--- a/Thesis Writing Documents/Project Development.pptx
+++ b/Thesis Writing Documents/Project Development.pptx
@@ -5,10 +5,10 @@
     <p:sldMasterId id="2147483648" r:id="rId5"/>
   </p:sldMasterIdLst>
   <p:notesMasterIdLst>
-    <p:notesMasterId r:id="rId21"/>
+    <p:notesMasterId r:id="rId25"/>
   </p:notesMasterIdLst>
   <p:handoutMasterIdLst>
-    <p:handoutMasterId r:id="rId22"/>
+    <p:handoutMasterId r:id="rId26"/>
   </p:handoutMasterIdLst>
   <p:sldIdLst>
     <p:sldId id="256" r:id="rId6"/>
@@ -18,19 +18,23 @@
     <p:sldId id="2146848305" r:id="rId10"/>
     <p:sldId id="2146848306" r:id="rId11"/>
     <p:sldId id="2146848303" r:id="rId12"/>
-    <p:sldId id="2146848307" r:id="rId13"/>
-    <p:sldId id="2146848308" r:id="rId14"/>
-    <p:sldId id="2146848309" r:id="rId15"/>
-    <p:sldId id="2146848311" r:id="rId16"/>
-    <p:sldId id="2146848310" r:id="rId17"/>
-    <p:sldId id="2146848300" r:id="rId18"/>
-    <p:sldId id="2146848312" r:id="rId19"/>
-    <p:sldId id="2146848313" r:id="rId20"/>
+    <p:sldId id="2146848316" r:id="rId13"/>
+    <p:sldId id="2146848317" r:id="rId14"/>
+    <p:sldId id="2146848307" r:id="rId15"/>
+    <p:sldId id="2146848308" r:id="rId16"/>
+    <p:sldId id="2146848309" r:id="rId17"/>
+    <p:sldId id="2146848311" r:id="rId18"/>
+    <p:sldId id="2146848310" r:id="rId19"/>
+    <p:sldId id="2146848300" r:id="rId20"/>
+    <p:sldId id="2146848312" r:id="rId21"/>
+    <p:sldId id="2146848314" r:id="rId22"/>
+    <p:sldId id="2146848313" r:id="rId23"/>
+    <p:sldId id="2146848315" r:id="rId24"/>
   </p:sldIdLst>
   <p:sldSz cx="12192000" cy="6858000"/>
   <p:notesSz cx="6800850" cy="9926638"/>
   <p:custDataLst>
-    <p:tags r:id="rId23"/>
+    <p:tags r:id="rId27"/>
   </p:custDataLst>
   <p:defaultTextStyle>
     <a:defPPr>
@@ -200,12 +204,1123 @@
 </p:presentation>
 </file>
 
+<file path=ppt/authors.xml><?xml version="1.0" encoding="utf-8"?>
+<p188:authorLst xmlns:a="http://schemas.openxmlformats.org/drawingml/2006/main" xmlns:r="http://schemas.openxmlformats.org/officeDocument/2006/relationships" xmlns:p188="http://schemas.microsoft.com/office/powerpoint/2018/8/main">
+  <p188:author id="{C5CB79AA-8EBF-1E57-EC02-8B657B2EB377}" name="Corbin Ferguson" initials="CF" userId="S::corbin.ferguson@endress.com::34a864e2-e65e-4cb2-823c-dc28f73f0e40" providerId="AD"/>
+</p188:authorLst>
+</file>
+
 <file path=ppt/revisionInfo.xml><?xml version="1.0" encoding="utf-8"?>
 <p1510:revInfo xmlns:a="http://schemas.openxmlformats.org/drawingml/2006/main" xmlns:r="http://schemas.openxmlformats.org/officeDocument/2006/relationships" xmlns:p1510="http://schemas.microsoft.com/office/powerpoint/2015/10/main">
   <p1510:revLst>
-    <p1510:client id="{22354E51-28A9-4CD1-BB37-8B89FE97107A}" v="200" dt="2026-03-16T14:14:38.242"/>
+    <p1510:client id="{F0E03B4B-CC56-43F1-8F18-BCA697229170}" v="263" dt="2026-03-16T16:46:06.936"/>
   </p1510:revLst>
 </p1510:revInfo>
+</file>
+
+<file path=ppt/changesInfos/changesInfo1.xml><?xml version="1.0" encoding="utf-8"?>
+<pc:chgInfo xmlns:a="http://schemas.openxmlformats.org/drawingml/2006/main" xmlns:r="http://schemas.openxmlformats.org/officeDocument/2006/relationships" xmlns:ac="http://schemas.microsoft.com/office/drawing/2013/main/command" xmlns:pc="http://schemas.microsoft.com/office/powerpoint/2013/main/command">
+  <pc:docChgLst>
+    <pc:chgData name="Corbin Ferguson" userId="34a864e2-e65e-4cb2-823c-dc28f73f0e40" providerId="ADAL" clId="{8D2D96CF-1319-4CCC-9EA9-073445628049}"/>
+    <pc:docChg chg="undo custSel addSld modSld sldOrd">
+      <pc:chgData name="Corbin Ferguson" userId="34a864e2-e65e-4cb2-823c-dc28f73f0e40" providerId="ADAL" clId="{8D2D96CF-1319-4CCC-9EA9-073445628049}" dt="2026-03-16T16:46:09.342" v="1562" actId="26606"/>
+      <pc:docMkLst>
+        <pc:docMk/>
+      </pc:docMkLst>
+      <pc:sldChg chg="modSp mod">
+        <pc:chgData name="Corbin Ferguson" userId="34a864e2-e65e-4cb2-823c-dc28f73f0e40" providerId="ADAL" clId="{8D2D96CF-1319-4CCC-9EA9-073445628049}" dt="2026-03-16T14:58:23.802" v="1005" actId="20577"/>
+        <pc:sldMkLst>
+          <pc:docMk/>
+          <pc:sldMk cId="1806041311" sldId="256"/>
+        </pc:sldMkLst>
+        <pc:spChg chg="mod">
+          <ac:chgData name="Corbin Ferguson" userId="34a864e2-e65e-4cb2-823c-dc28f73f0e40" providerId="ADAL" clId="{8D2D96CF-1319-4CCC-9EA9-073445628049}" dt="2026-03-16T14:58:23.802" v="1005" actId="20577"/>
+          <ac:spMkLst>
+            <pc:docMk/>
+            <pc:sldMk cId="1806041311" sldId="256"/>
+            <ac:spMk id="7" creationId="{05DBE8C5-106F-9E45-96DE-92C740078C67}"/>
+          </ac:spMkLst>
+        </pc:spChg>
+      </pc:sldChg>
+      <pc:sldChg chg="addSp delSp modSp mod">
+        <pc:chgData name="Corbin Ferguson" userId="34a864e2-e65e-4cb2-823c-dc28f73f0e40" providerId="ADAL" clId="{8D2D96CF-1319-4CCC-9EA9-073445628049}" dt="2026-03-16T15:01:20.713" v="1025" actId="732"/>
+        <pc:sldMkLst>
+          <pc:docMk/>
+          <pc:sldMk cId="463964235" sldId="257"/>
+        </pc:sldMkLst>
+        <pc:picChg chg="del mod">
+          <ac:chgData name="Corbin Ferguson" userId="34a864e2-e65e-4cb2-823c-dc28f73f0e40" providerId="ADAL" clId="{8D2D96CF-1319-4CCC-9EA9-073445628049}" dt="2026-03-16T15:00:14.797" v="1011" actId="478"/>
+          <ac:picMkLst>
+            <pc:docMk/>
+            <pc:sldMk cId="463964235" sldId="257"/>
+            <ac:picMk id="9" creationId="{1BC88699-DDD8-5B47-A357-650F499C3E03}"/>
+          </ac:picMkLst>
+        </pc:picChg>
+        <pc:picChg chg="add mod">
+          <ac:chgData name="Corbin Ferguson" userId="34a864e2-e65e-4cb2-823c-dc28f73f0e40" providerId="ADAL" clId="{8D2D96CF-1319-4CCC-9EA9-073445628049}" dt="2026-03-16T15:01:11.847" v="1024" actId="1076"/>
+          <ac:picMkLst>
+            <pc:docMk/>
+            <pc:sldMk cId="463964235" sldId="257"/>
+            <ac:picMk id="1028" creationId="{6C86E4AC-1B5D-4CB7-A176-9C365C540E23}"/>
+          </ac:picMkLst>
+        </pc:picChg>
+        <pc:picChg chg="add mod">
+          <ac:chgData name="Corbin Ferguson" userId="34a864e2-e65e-4cb2-823c-dc28f73f0e40" providerId="ADAL" clId="{8D2D96CF-1319-4CCC-9EA9-073445628049}" dt="2026-03-16T15:01:20.713" v="1025" actId="732"/>
+          <ac:picMkLst>
+            <pc:docMk/>
+            <pc:sldMk cId="463964235" sldId="257"/>
+            <ac:picMk id="1030" creationId="{84E072FF-ABEC-64D2-234E-9A5158069A12}"/>
+          </ac:picMkLst>
+        </pc:picChg>
+      </pc:sldChg>
+      <pc:sldChg chg="modSp mod">
+        <pc:chgData name="Corbin Ferguson" userId="34a864e2-e65e-4cb2-823c-dc28f73f0e40" providerId="ADAL" clId="{8D2D96CF-1319-4CCC-9EA9-073445628049}" dt="2026-03-16T15:13:05.111" v="1343" actId="20577"/>
+        <pc:sldMkLst>
+          <pc:docMk/>
+          <pc:sldMk cId="3766655233" sldId="2146848300"/>
+        </pc:sldMkLst>
+        <pc:spChg chg="mod">
+          <ac:chgData name="Corbin Ferguson" userId="34a864e2-e65e-4cb2-823c-dc28f73f0e40" providerId="ADAL" clId="{8D2D96CF-1319-4CCC-9EA9-073445628049}" dt="2026-03-16T15:13:05.111" v="1343" actId="20577"/>
+          <ac:spMkLst>
+            <pc:docMk/>
+            <pc:sldMk cId="3766655233" sldId="2146848300"/>
+            <ac:spMk id="3" creationId="{69166F1D-356D-D430-8690-D44E331BF4F9}"/>
+          </ac:spMkLst>
+        </pc:spChg>
+      </pc:sldChg>
+      <pc:sldChg chg="modSp mod">
+        <pc:chgData name="Corbin Ferguson" userId="34a864e2-e65e-4cb2-823c-dc28f73f0e40" providerId="ADAL" clId="{8D2D96CF-1319-4CCC-9EA9-073445628049}" dt="2026-03-16T15:06:18.204" v="1136" actId="20577"/>
+        <pc:sldMkLst>
+          <pc:docMk/>
+          <pc:sldMk cId="189939056" sldId="2146848304"/>
+        </pc:sldMkLst>
+        <pc:spChg chg="mod">
+          <ac:chgData name="Corbin Ferguson" userId="34a864e2-e65e-4cb2-823c-dc28f73f0e40" providerId="ADAL" clId="{8D2D96CF-1319-4CCC-9EA9-073445628049}" dt="2026-03-16T15:06:18.204" v="1136" actId="20577"/>
+          <ac:spMkLst>
+            <pc:docMk/>
+            <pc:sldMk cId="189939056" sldId="2146848304"/>
+            <ac:spMk id="13" creationId="{4B3CDBD9-BD4E-E7E3-A1E9-2D692BAA1734}"/>
+          </ac:spMkLst>
+        </pc:spChg>
+      </pc:sldChg>
+      <pc:sldChg chg="modSp mod">
+        <pc:chgData name="Corbin Ferguson" userId="34a864e2-e65e-4cb2-823c-dc28f73f0e40" providerId="ADAL" clId="{8D2D96CF-1319-4CCC-9EA9-073445628049}" dt="2026-03-16T15:02:46.111" v="1042" actId="20577"/>
+        <pc:sldMkLst>
+          <pc:docMk/>
+          <pc:sldMk cId="2928641305" sldId="2146848305"/>
+        </pc:sldMkLst>
+        <pc:spChg chg="mod">
+          <ac:chgData name="Corbin Ferguson" userId="34a864e2-e65e-4cb2-823c-dc28f73f0e40" providerId="ADAL" clId="{8D2D96CF-1319-4CCC-9EA9-073445628049}" dt="2026-03-16T15:02:46.111" v="1042" actId="20577"/>
+          <ac:spMkLst>
+            <pc:docMk/>
+            <pc:sldMk cId="2928641305" sldId="2146848305"/>
+            <ac:spMk id="2" creationId="{A59311E1-2F3C-706B-E772-4C7FF4CB0DFD}"/>
+          </ac:spMkLst>
+        </pc:spChg>
+      </pc:sldChg>
+      <pc:sldChg chg="modSp mod">
+        <pc:chgData name="Corbin Ferguson" userId="34a864e2-e65e-4cb2-823c-dc28f73f0e40" providerId="ADAL" clId="{8D2D96CF-1319-4CCC-9EA9-073445628049}" dt="2026-03-16T14:38:49.156" v="491" actId="20577"/>
+        <pc:sldMkLst>
+          <pc:docMk/>
+          <pc:sldMk cId="364984994" sldId="2146848306"/>
+        </pc:sldMkLst>
+        <pc:spChg chg="mod">
+          <ac:chgData name="Corbin Ferguson" userId="34a864e2-e65e-4cb2-823c-dc28f73f0e40" providerId="ADAL" clId="{8D2D96CF-1319-4CCC-9EA9-073445628049}" dt="2026-03-16T14:38:49.156" v="491" actId="20577"/>
+          <ac:spMkLst>
+            <pc:docMk/>
+            <pc:sldMk cId="364984994" sldId="2146848306"/>
+            <ac:spMk id="13" creationId="{ED6C0032-109D-5E6D-74D4-9A87B9B556F0}"/>
+          </ac:spMkLst>
+        </pc:spChg>
+      </pc:sldChg>
+      <pc:sldChg chg="modSp mod">
+        <pc:chgData name="Corbin Ferguson" userId="34a864e2-e65e-4cb2-823c-dc28f73f0e40" providerId="ADAL" clId="{8D2D96CF-1319-4CCC-9EA9-073445628049}" dt="2026-03-16T14:42:17.759" v="600" actId="20577"/>
+        <pc:sldMkLst>
+          <pc:docMk/>
+          <pc:sldMk cId="1957245743" sldId="2146848310"/>
+        </pc:sldMkLst>
+        <pc:spChg chg="mod">
+          <ac:chgData name="Corbin Ferguson" userId="34a864e2-e65e-4cb2-823c-dc28f73f0e40" providerId="ADAL" clId="{8D2D96CF-1319-4CCC-9EA9-073445628049}" dt="2026-03-16T14:42:17.759" v="600" actId="20577"/>
+          <ac:spMkLst>
+            <pc:docMk/>
+            <pc:sldMk cId="1957245743" sldId="2146848310"/>
+            <ac:spMk id="13" creationId="{1EC16664-E325-8471-1AD8-B488025297CB}"/>
+          </ac:spMkLst>
+        </pc:spChg>
+      </pc:sldChg>
+      <pc:sldChg chg="addSp modSp mod modClrScheme chgLayout">
+        <pc:chgData name="Corbin Ferguson" userId="34a864e2-e65e-4cb2-823c-dc28f73f0e40" providerId="ADAL" clId="{8D2D96CF-1319-4CCC-9EA9-073445628049}" dt="2026-03-16T15:08:24.308" v="1176" actId="20577"/>
+        <pc:sldMkLst>
+          <pc:docMk/>
+          <pc:sldMk cId="765330338" sldId="2146848311"/>
+        </pc:sldMkLst>
+        <pc:spChg chg="mod ord">
+          <ac:chgData name="Corbin Ferguson" userId="34a864e2-e65e-4cb2-823c-dc28f73f0e40" providerId="ADAL" clId="{8D2D96CF-1319-4CCC-9EA9-073445628049}" dt="2026-03-16T15:08:11.545" v="1166" actId="700"/>
+          <ac:spMkLst>
+            <pc:docMk/>
+            <pc:sldMk cId="765330338" sldId="2146848311"/>
+            <ac:spMk id="2" creationId="{39A6CDB0-B34B-8995-0E8B-C319A922B5B3}"/>
+          </ac:spMkLst>
+        </pc:spChg>
+        <pc:spChg chg="add mod ord">
+          <ac:chgData name="Corbin Ferguson" userId="34a864e2-e65e-4cb2-823c-dc28f73f0e40" providerId="ADAL" clId="{8D2D96CF-1319-4CCC-9EA9-073445628049}" dt="2026-03-16T15:08:24.308" v="1176" actId="20577"/>
+          <ac:spMkLst>
+            <pc:docMk/>
+            <pc:sldMk cId="765330338" sldId="2146848311"/>
+            <ac:spMk id="3" creationId="{63F6E7F2-C333-13E7-6A23-E317DC8149B0}"/>
+          </ac:spMkLst>
+        </pc:spChg>
+        <pc:spChg chg="mod ord">
+          <ac:chgData name="Corbin Ferguson" userId="34a864e2-e65e-4cb2-823c-dc28f73f0e40" providerId="ADAL" clId="{8D2D96CF-1319-4CCC-9EA9-073445628049}" dt="2026-03-16T15:08:11.545" v="1166" actId="700"/>
+          <ac:spMkLst>
+            <pc:docMk/>
+            <pc:sldMk cId="765330338" sldId="2146848311"/>
+            <ac:spMk id="4" creationId="{00FFBEF8-5E91-2668-D8BE-7A069006F3AD}"/>
+          </ac:spMkLst>
+        </pc:spChg>
+        <pc:spChg chg="mod ord">
+          <ac:chgData name="Corbin Ferguson" userId="34a864e2-e65e-4cb2-823c-dc28f73f0e40" providerId="ADAL" clId="{8D2D96CF-1319-4CCC-9EA9-073445628049}" dt="2026-03-16T15:08:11.545" v="1166" actId="700"/>
+          <ac:spMkLst>
+            <pc:docMk/>
+            <pc:sldMk cId="765330338" sldId="2146848311"/>
+            <ac:spMk id="7" creationId="{F24A93D2-C404-5313-F354-72800B3D775A}"/>
+          </ac:spMkLst>
+        </pc:spChg>
+        <pc:spChg chg="mod ord">
+          <ac:chgData name="Corbin Ferguson" userId="34a864e2-e65e-4cb2-823c-dc28f73f0e40" providerId="ADAL" clId="{8D2D96CF-1319-4CCC-9EA9-073445628049}" dt="2026-03-16T15:08:11.545" v="1166" actId="700"/>
+          <ac:spMkLst>
+            <pc:docMk/>
+            <pc:sldMk cId="765330338" sldId="2146848311"/>
+            <ac:spMk id="8" creationId="{0399E63B-65A1-3030-DC23-CA1AF7150CCF}"/>
+          </ac:spMkLst>
+        </pc:spChg>
+      </pc:sldChg>
+      <pc:sldChg chg="modSp mod">
+        <pc:chgData name="Corbin Ferguson" userId="34a864e2-e65e-4cb2-823c-dc28f73f0e40" providerId="ADAL" clId="{8D2D96CF-1319-4CCC-9EA9-073445628049}" dt="2026-03-16T15:07:15.312" v="1165" actId="20577"/>
+        <pc:sldMkLst>
+          <pc:docMk/>
+          <pc:sldMk cId="785037573" sldId="2146848312"/>
+        </pc:sldMkLst>
+        <pc:spChg chg="mod">
+          <ac:chgData name="Corbin Ferguson" userId="34a864e2-e65e-4cb2-823c-dc28f73f0e40" providerId="ADAL" clId="{8D2D96CF-1319-4CCC-9EA9-073445628049}" dt="2026-03-16T15:07:15.312" v="1165" actId="20577"/>
+          <ac:spMkLst>
+            <pc:docMk/>
+            <pc:sldMk cId="785037573" sldId="2146848312"/>
+            <ac:spMk id="9" creationId="{F12D16D0-86CF-AF46-C7E4-9E991E80B9A8}"/>
+          </ac:spMkLst>
+        </pc:spChg>
+      </pc:sldChg>
+      <pc:sldChg chg="addSp modSp add mod">
+        <pc:chgData name="Corbin Ferguson" userId="34a864e2-e65e-4cb2-823c-dc28f73f0e40" providerId="ADAL" clId="{8D2D96CF-1319-4CCC-9EA9-073445628049}" dt="2026-03-16T15:12:46.375" v="1342" actId="20577"/>
+        <pc:sldMkLst>
+          <pc:docMk/>
+          <pc:sldMk cId="1067535560" sldId="2146848314"/>
+        </pc:sldMkLst>
+        <pc:spChg chg="mod">
+          <ac:chgData name="Corbin Ferguson" userId="34a864e2-e65e-4cb2-823c-dc28f73f0e40" providerId="ADAL" clId="{8D2D96CF-1319-4CCC-9EA9-073445628049}" dt="2026-03-16T14:35:58.596" v="10" actId="20577"/>
+          <ac:spMkLst>
+            <pc:docMk/>
+            <pc:sldMk cId="1067535560" sldId="2146848314"/>
+            <ac:spMk id="2" creationId="{29DC8B36-B78B-74FC-1B96-372E60B3CCA5}"/>
+          </ac:spMkLst>
+        </pc:spChg>
+        <pc:spChg chg="mod">
+          <ac:chgData name="Corbin Ferguson" userId="34a864e2-e65e-4cb2-823c-dc28f73f0e40" providerId="ADAL" clId="{8D2D96CF-1319-4CCC-9EA9-073445628049}" dt="2026-03-16T15:12:46.375" v="1342" actId="20577"/>
+          <ac:spMkLst>
+            <pc:docMk/>
+            <pc:sldMk cId="1067535560" sldId="2146848314"/>
+            <ac:spMk id="9" creationId="{10547ECE-F4D6-7E7B-B957-03EBA9BFAC16}"/>
+          </ac:spMkLst>
+        </pc:spChg>
+        <pc:graphicFrameChg chg="add mod">
+          <ac:chgData name="Corbin Ferguson" userId="34a864e2-e65e-4cb2-823c-dc28f73f0e40" providerId="ADAL" clId="{8D2D96CF-1319-4CCC-9EA9-073445628049}" dt="2026-03-16T14:54:26.903" v="642"/>
+          <ac:graphicFrameMkLst>
+            <pc:docMk/>
+            <pc:sldMk cId="1067535560" sldId="2146848314"/>
+            <ac:graphicFrameMk id="6" creationId="{2B0FA1C0-BB02-FE95-4882-659F84EC68BF}"/>
+          </ac:graphicFrameMkLst>
+        </pc:graphicFrameChg>
+        <pc:graphicFrameChg chg="add mod">
+          <ac:chgData name="Corbin Ferguson" userId="34a864e2-e65e-4cb2-823c-dc28f73f0e40" providerId="ADAL" clId="{8D2D96CF-1319-4CCC-9EA9-073445628049}" dt="2026-03-16T14:54:31.888" v="643"/>
+          <ac:graphicFrameMkLst>
+            <pc:docMk/>
+            <pc:sldMk cId="1067535560" sldId="2146848314"/>
+            <ac:graphicFrameMk id="7" creationId="{B0DB4696-A2DE-2DAF-F42D-A13D1E03B497}"/>
+          </ac:graphicFrameMkLst>
+        </pc:graphicFrameChg>
+        <pc:graphicFrameChg chg="add mod">
+          <ac:chgData name="Corbin Ferguson" userId="34a864e2-e65e-4cb2-823c-dc28f73f0e40" providerId="ADAL" clId="{8D2D96CF-1319-4CCC-9EA9-073445628049}" dt="2026-03-16T14:54:52.519" v="648"/>
+          <ac:graphicFrameMkLst>
+            <pc:docMk/>
+            <pc:sldMk cId="1067535560" sldId="2146848314"/>
+            <ac:graphicFrameMk id="8" creationId="{0627A225-39DD-3E02-1C79-E76C3DE5AD4B}"/>
+          </ac:graphicFrameMkLst>
+        </pc:graphicFrameChg>
+        <pc:graphicFrameChg chg="add mod">
+          <ac:chgData name="Corbin Ferguson" userId="34a864e2-e65e-4cb2-823c-dc28f73f0e40" providerId="ADAL" clId="{8D2D96CF-1319-4CCC-9EA9-073445628049}" dt="2026-03-16T14:56:54.559" v="881"/>
+          <ac:graphicFrameMkLst>
+            <pc:docMk/>
+            <pc:sldMk cId="1067535560" sldId="2146848314"/>
+            <ac:graphicFrameMk id="10" creationId="{6AE61343-672E-4651-8B93-D5EAA608BA5B}"/>
+          </ac:graphicFrameMkLst>
+        </pc:graphicFrameChg>
+      </pc:sldChg>
+      <pc:sldChg chg="modSp add mod ord">
+        <pc:chgData name="Corbin Ferguson" userId="34a864e2-e65e-4cb2-823c-dc28f73f0e40" providerId="ADAL" clId="{8D2D96CF-1319-4CCC-9EA9-073445628049}" dt="2026-03-16T14:42:49.632" v="602"/>
+        <pc:sldMkLst>
+          <pc:docMk/>
+          <pc:sldMk cId="1869098219" sldId="2146848315"/>
+        </pc:sldMkLst>
+        <pc:spChg chg="mod">
+          <ac:chgData name="Corbin Ferguson" userId="34a864e2-e65e-4cb2-823c-dc28f73f0e40" providerId="ADAL" clId="{8D2D96CF-1319-4CCC-9EA9-073445628049}" dt="2026-03-16T14:39:31.709" v="503" actId="20577"/>
+          <ac:spMkLst>
+            <pc:docMk/>
+            <pc:sldMk cId="1869098219" sldId="2146848315"/>
+            <ac:spMk id="2" creationId="{42490D66-69B9-FCB3-4EE3-71E22ADE614D}"/>
+          </ac:spMkLst>
+        </pc:spChg>
+        <pc:spChg chg="mod">
+          <ac:chgData name="Corbin Ferguson" userId="34a864e2-e65e-4cb2-823c-dc28f73f0e40" providerId="ADAL" clId="{8D2D96CF-1319-4CCC-9EA9-073445628049}" dt="2026-03-16T14:42:49.632" v="602"/>
+          <ac:spMkLst>
+            <pc:docMk/>
+            <pc:sldMk cId="1869098219" sldId="2146848315"/>
+            <ac:spMk id="9" creationId="{01007C77-2DF3-8DD9-8D8C-832A640C674D}"/>
+          </ac:spMkLst>
+        </pc:spChg>
+      </pc:sldChg>
+      <pc:sldChg chg="addSp delSp modSp add mod modClrScheme chgLayout">
+        <pc:chgData name="Corbin Ferguson" userId="34a864e2-e65e-4cb2-823c-dc28f73f0e40" providerId="ADAL" clId="{8D2D96CF-1319-4CCC-9EA9-073445628049}" dt="2026-03-16T16:45:57.083" v="1559" actId="26606"/>
+        <pc:sldMkLst>
+          <pc:docMk/>
+          <pc:sldMk cId="2077614573" sldId="2146848316"/>
+        </pc:sldMkLst>
+        <pc:spChg chg="mod ord">
+          <ac:chgData name="Corbin Ferguson" userId="34a864e2-e65e-4cb2-823c-dc28f73f0e40" providerId="ADAL" clId="{8D2D96CF-1319-4CCC-9EA9-073445628049}" dt="2026-03-16T16:39:10.614" v="1550" actId="26606"/>
+          <ac:spMkLst>
+            <pc:docMk/>
+            <pc:sldMk cId="2077614573" sldId="2146848316"/>
+            <ac:spMk id="2" creationId="{07BCF97A-6A5E-DA70-0A21-4FF0D5A9B2D1}"/>
+          </ac:spMkLst>
+        </pc:spChg>
+        <pc:spChg chg="mod ord">
+          <ac:chgData name="Corbin Ferguson" userId="34a864e2-e65e-4cb2-823c-dc28f73f0e40" providerId="ADAL" clId="{8D2D96CF-1319-4CCC-9EA9-073445628049}" dt="2026-03-16T16:39:10.614" v="1550" actId="26606"/>
+          <ac:spMkLst>
+            <pc:docMk/>
+            <pc:sldMk cId="2077614573" sldId="2146848316"/>
+            <ac:spMk id="4" creationId="{6F1C84BC-19BE-D2D3-DB6B-179BB01EE861}"/>
+          </ac:spMkLst>
+        </pc:spChg>
+        <pc:spChg chg="mod ord">
+          <ac:chgData name="Corbin Ferguson" userId="34a864e2-e65e-4cb2-823c-dc28f73f0e40" providerId="ADAL" clId="{8D2D96CF-1319-4CCC-9EA9-073445628049}" dt="2026-03-16T16:39:10.614" v="1550" actId="26606"/>
+          <ac:spMkLst>
+            <pc:docMk/>
+            <pc:sldMk cId="2077614573" sldId="2146848316"/>
+            <ac:spMk id="7" creationId="{3583879C-95E5-7299-C98A-2B7D0B63F807}"/>
+          </ac:spMkLst>
+        </pc:spChg>
+        <pc:spChg chg="mod ord">
+          <ac:chgData name="Corbin Ferguson" userId="34a864e2-e65e-4cb2-823c-dc28f73f0e40" providerId="ADAL" clId="{8D2D96CF-1319-4CCC-9EA9-073445628049}" dt="2026-03-16T16:39:10.614" v="1550" actId="26606"/>
+          <ac:spMkLst>
+            <pc:docMk/>
+            <pc:sldMk cId="2077614573" sldId="2146848316"/>
+            <ac:spMk id="8" creationId="{4C7D5AC9-EA29-86A4-7EF8-4DF941130DC8}"/>
+          </ac:spMkLst>
+        </pc:spChg>
+        <pc:spChg chg="del mod">
+          <ac:chgData name="Corbin Ferguson" userId="34a864e2-e65e-4cb2-823c-dc28f73f0e40" providerId="ADAL" clId="{8D2D96CF-1319-4CCC-9EA9-073445628049}" dt="2026-03-16T16:13:34.801" v="1460" actId="478"/>
+          <ac:spMkLst>
+            <pc:docMk/>
+            <pc:sldMk cId="2077614573" sldId="2146848316"/>
+            <ac:spMk id="13" creationId="{D7D4E759-8FDE-86E6-E731-24ECD92780CE}"/>
+          </ac:spMkLst>
+        </pc:spChg>
+        <pc:spChg chg="del">
+          <ac:chgData name="Corbin Ferguson" userId="34a864e2-e65e-4cb2-823c-dc28f73f0e40" providerId="ADAL" clId="{8D2D96CF-1319-4CCC-9EA9-073445628049}" dt="2026-03-16T16:13:29.237" v="1456" actId="478"/>
+          <ac:spMkLst>
+            <pc:docMk/>
+            <pc:sldMk cId="2077614573" sldId="2146848316"/>
+            <ac:spMk id="24" creationId="{686D1B61-5B63-C724-2CB5-FD3BFC6AFDD4}"/>
+          </ac:spMkLst>
+        </pc:spChg>
+        <pc:spChg chg="del">
+          <ac:chgData name="Corbin Ferguson" userId="34a864e2-e65e-4cb2-823c-dc28f73f0e40" providerId="ADAL" clId="{8D2D96CF-1319-4CCC-9EA9-073445628049}" dt="2026-03-16T16:13:29.237" v="1456" actId="478"/>
+          <ac:spMkLst>
+            <pc:docMk/>
+            <pc:sldMk cId="2077614573" sldId="2146848316"/>
+            <ac:spMk id="36" creationId="{744595BF-62E0-2BA1-92DD-CD78756D96D0}"/>
+          </ac:spMkLst>
+        </pc:spChg>
+        <pc:spChg chg="del">
+          <ac:chgData name="Corbin Ferguson" userId="34a864e2-e65e-4cb2-823c-dc28f73f0e40" providerId="ADAL" clId="{8D2D96CF-1319-4CCC-9EA9-073445628049}" dt="2026-03-16T16:13:29.237" v="1456" actId="478"/>
+          <ac:spMkLst>
+            <pc:docMk/>
+            <pc:sldMk cId="2077614573" sldId="2146848316"/>
+            <ac:spMk id="42" creationId="{BC769C5F-21DA-B5F2-C497-39B7F975B55B}"/>
+          </ac:spMkLst>
+        </pc:spChg>
+        <pc:spChg chg="mod topLvl">
+          <ac:chgData name="Corbin Ferguson" userId="34a864e2-e65e-4cb2-823c-dc28f73f0e40" providerId="ADAL" clId="{8D2D96CF-1319-4CCC-9EA9-073445628049}" dt="2026-03-16T16:02:03.946" v="1375" actId="165"/>
+          <ac:spMkLst>
+            <pc:docMk/>
+            <pc:sldMk cId="2077614573" sldId="2146848316"/>
+            <ac:spMk id="55" creationId="{28DFFED1-D271-35C0-A749-731C7D90E772}"/>
+          </ac:spMkLst>
+        </pc:spChg>
+        <pc:spChg chg="del">
+          <ac:chgData name="Corbin Ferguson" userId="34a864e2-e65e-4cb2-823c-dc28f73f0e40" providerId="ADAL" clId="{8D2D96CF-1319-4CCC-9EA9-073445628049}" dt="2026-03-16T16:13:29.237" v="1456" actId="478"/>
+          <ac:spMkLst>
+            <pc:docMk/>
+            <pc:sldMk cId="2077614573" sldId="2146848316"/>
+            <ac:spMk id="56" creationId="{6C489836-C900-A02E-8277-D16D696CD472}"/>
+          </ac:spMkLst>
+        </pc:spChg>
+        <pc:spChg chg="del">
+          <ac:chgData name="Corbin Ferguson" userId="34a864e2-e65e-4cb2-823c-dc28f73f0e40" providerId="ADAL" clId="{8D2D96CF-1319-4CCC-9EA9-073445628049}" dt="2026-03-16T16:13:29.237" v="1456" actId="478"/>
+          <ac:spMkLst>
+            <pc:docMk/>
+            <pc:sldMk cId="2077614573" sldId="2146848316"/>
+            <ac:spMk id="61" creationId="{85AC204E-F4BC-E994-8003-6157E29B17C4}"/>
+          </ac:spMkLst>
+        </pc:spChg>
+        <pc:spChg chg="mod topLvl">
+          <ac:chgData name="Corbin Ferguson" userId="34a864e2-e65e-4cb2-823c-dc28f73f0e40" providerId="ADAL" clId="{8D2D96CF-1319-4CCC-9EA9-073445628049}" dt="2026-03-16T16:13:04.178" v="1437" actId="165"/>
+          <ac:spMkLst>
+            <pc:docMk/>
+            <pc:sldMk cId="2077614573" sldId="2146848316"/>
+            <ac:spMk id="8248" creationId="{5B198541-A049-C8CA-F02C-E5415B398853}"/>
+          </ac:spMkLst>
+        </pc:spChg>
+        <pc:spChg chg="mod topLvl">
+          <ac:chgData name="Corbin Ferguson" userId="34a864e2-e65e-4cb2-823c-dc28f73f0e40" providerId="ADAL" clId="{8D2D96CF-1319-4CCC-9EA9-073445628049}" dt="2026-03-16T16:13:04.178" v="1437" actId="165"/>
+          <ac:spMkLst>
+            <pc:docMk/>
+            <pc:sldMk cId="2077614573" sldId="2146848316"/>
+            <ac:spMk id="8291" creationId="{4434AD16-C590-BE76-6B5E-13209D698BC4}"/>
+          </ac:spMkLst>
+        </pc:spChg>
+        <pc:spChg chg="mod">
+          <ac:chgData name="Corbin Ferguson" userId="34a864e2-e65e-4cb2-823c-dc28f73f0e40" providerId="ADAL" clId="{8D2D96CF-1319-4CCC-9EA9-073445628049}" dt="2026-03-16T16:01:40.264" v="1371" actId="165"/>
+          <ac:spMkLst>
+            <pc:docMk/>
+            <pc:sldMk cId="2077614573" sldId="2146848316"/>
+            <ac:spMk id="8544" creationId="{E5D84286-4EE9-53B8-4951-8D0A3816D9B8}"/>
+          </ac:spMkLst>
+        </pc:spChg>
+        <pc:spChg chg="add del mod ord modVis">
+          <ac:chgData name="Corbin Ferguson" userId="34a864e2-e65e-4cb2-823c-dc28f73f0e40" providerId="ADAL" clId="{8D2D96CF-1319-4CCC-9EA9-073445628049}" dt="2026-03-16T16:13:02.702" v="1436" actId="207"/>
+          <ac:spMkLst>
+            <pc:docMk/>
+            <pc:sldMk cId="2077614573" sldId="2146848316"/>
+            <ac:spMk id="8567" creationId="{73615F16-59EB-B70F-8238-D5B33CF342BB}"/>
+          </ac:spMkLst>
+        </pc:spChg>
+        <pc:spChg chg="mod topLvl">
+          <ac:chgData name="Corbin Ferguson" userId="34a864e2-e65e-4cb2-823c-dc28f73f0e40" providerId="ADAL" clId="{8D2D96CF-1319-4CCC-9EA9-073445628049}" dt="2026-03-16T16:13:04.178" v="1437" actId="165"/>
+          <ac:spMkLst>
+            <pc:docMk/>
+            <pc:sldMk cId="2077614573" sldId="2146848316"/>
+            <ac:spMk id="8568" creationId="{743FE570-5A53-F9B3-A590-6FA06FF2E4D7}"/>
+          </ac:spMkLst>
+        </pc:spChg>
+        <pc:spChg chg="mod">
+          <ac:chgData name="Corbin Ferguson" userId="34a864e2-e65e-4cb2-823c-dc28f73f0e40" providerId="ADAL" clId="{8D2D96CF-1319-4CCC-9EA9-073445628049}" dt="2026-03-16T16:01:40.264" v="1371" actId="165"/>
+          <ac:spMkLst>
+            <pc:docMk/>
+            <pc:sldMk cId="2077614573" sldId="2146848316"/>
+            <ac:spMk id="8632" creationId="{4EA6240F-3582-C7A6-A438-BDE40D59BCDE}"/>
+          </ac:spMkLst>
+        </pc:spChg>
+        <pc:spChg chg="mod">
+          <ac:chgData name="Corbin Ferguson" userId="34a864e2-e65e-4cb2-823c-dc28f73f0e40" providerId="ADAL" clId="{8D2D96CF-1319-4CCC-9EA9-073445628049}" dt="2026-03-16T16:01:40.264" v="1371" actId="165"/>
+          <ac:spMkLst>
+            <pc:docMk/>
+            <pc:sldMk cId="2077614573" sldId="2146848316"/>
+            <ac:spMk id="8643" creationId="{2C0C8624-EC81-B2A3-06C4-53B52A47364E}"/>
+          </ac:spMkLst>
+        </pc:spChg>
+        <pc:spChg chg="mod">
+          <ac:chgData name="Corbin Ferguson" userId="34a864e2-e65e-4cb2-823c-dc28f73f0e40" providerId="ADAL" clId="{8D2D96CF-1319-4CCC-9EA9-073445628049}" dt="2026-03-16T16:02:03.946" v="1375" actId="165"/>
+          <ac:spMkLst>
+            <pc:docMk/>
+            <pc:sldMk cId="2077614573" sldId="2146848316"/>
+            <ac:spMk id="8961" creationId="{1DEDA1F4-5534-3ABA-796A-43CBE331391B}"/>
+          </ac:spMkLst>
+        </pc:spChg>
+        <pc:spChg chg="mod topLvl">
+          <ac:chgData name="Corbin Ferguson" userId="34a864e2-e65e-4cb2-823c-dc28f73f0e40" providerId="ADAL" clId="{8D2D96CF-1319-4CCC-9EA9-073445628049}" dt="2026-03-16T16:13:07.664" v="1441" actId="165"/>
+          <ac:spMkLst>
+            <pc:docMk/>
+            <pc:sldMk cId="2077614573" sldId="2146848316"/>
+            <ac:spMk id="9026" creationId="{6C204C66-8F61-60B6-6DAE-F9365A8C27F3}"/>
+          </ac:spMkLst>
+        </pc:spChg>
+        <pc:spChg chg="mod topLvl">
+          <ac:chgData name="Corbin Ferguson" userId="34a864e2-e65e-4cb2-823c-dc28f73f0e40" providerId="ADAL" clId="{8D2D96CF-1319-4CCC-9EA9-073445628049}" dt="2026-03-16T16:13:07.664" v="1441" actId="165"/>
+          <ac:spMkLst>
+            <pc:docMk/>
+            <pc:sldMk cId="2077614573" sldId="2146848316"/>
+            <ac:spMk id="9093" creationId="{685AD8E8-7F61-1BE9-F294-D9D90AA4BCB3}"/>
+          </ac:spMkLst>
+        </pc:spChg>
+        <pc:spChg chg="mod topLvl">
+          <ac:chgData name="Corbin Ferguson" userId="34a864e2-e65e-4cb2-823c-dc28f73f0e40" providerId="ADAL" clId="{8D2D96CF-1319-4CCC-9EA9-073445628049}" dt="2026-03-16T16:13:07.664" v="1441" actId="165"/>
+          <ac:spMkLst>
+            <pc:docMk/>
+            <pc:sldMk cId="2077614573" sldId="2146848316"/>
+            <ac:spMk id="9118" creationId="{8CC27F9C-D0D8-C07D-3B62-C7B575A1DD65}"/>
+          </ac:spMkLst>
+        </pc:spChg>
+        <pc:spChg chg="mod">
+          <ac:chgData name="Corbin Ferguson" userId="34a864e2-e65e-4cb2-823c-dc28f73f0e40" providerId="ADAL" clId="{8D2D96CF-1319-4CCC-9EA9-073445628049}" dt="2026-03-16T16:02:03.946" v="1375" actId="165"/>
+          <ac:spMkLst>
+            <pc:docMk/>
+            <pc:sldMk cId="2077614573" sldId="2146848316"/>
+            <ac:spMk id="9188" creationId="{41F6D49B-BF20-C635-F3DC-E8E78B672334}"/>
+          </ac:spMkLst>
+        </pc:spChg>
+        <pc:spChg chg="mod">
+          <ac:chgData name="Corbin Ferguson" userId="34a864e2-e65e-4cb2-823c-dc28f73f0e40" providerId="ADAL" clId="{8D2D96CF-1319-4CCC-9EA9-073445628049}" dt="2026-03-16T16:01:40.264" v="1371" actId="165"/>
+          <ac:spMkLst>
+            <pc:docMk/>
+            <pc:sldMk cId="2077614573" sldId="2146848316"/>
+            <ac:spMk id="9259" creationId="{40AA7F6B-5945-AA9A-4084-91670E0E3BA6}"/>
+          </ac:spMkLst>
+        </pc:spChg>
+        <pc:spChg chg="mod topLvl">
+          <ac:chgData name="Corbin Ferguson" userId="34a864e2-e65e-4cb2-823c-dc28f73f0e40" providerId="ADAL" clId="{8D2D96CF-1319-4CCC-9EA9-073445628049}" dt="2026-03-16T16:13:07.664" v="1441" actId="165"/>
+          <ac:spMkLst>
+            <pc:docMk/>
+            <pc:sldMk cId="2077614573" sldId="2146848316"/>
+            <ac:spMk id="9401" creationId="{0D334F6E-4CA3-A5D7-A441-4C7445A6288C}"/>
+          </ac:spMkLst>
+        </pc:spChg>
+        <pc:spChg chg="mod topLvl">
+          <ac:chgData name="Corbin Ferguson" userId="34a864e2-e65e-4cb2-823c-dc28f73f0e40" providerId="ADAL" clId="{8D2D96CF-1319-4CCC-9EA9-073445628049}" dt="2026-03-16T16:13:07.664" v="1441" actId="165"/>
+          <ac:spMkLst>
+            <pc:docMk/>
+            <pc:sldMk cId="2077614573" sldId="2146848316"/>
+            <ac:spMk id="9404" creationId="{A5F2C69B-31F9-1FF4-A5E1-9AF7743B7361}"/>
+          </ac:spMkLst>
+        </pc:spChg>
+        <pc:spChg chg="mod">
+          <ac:chgData name="Corbin Ferguson" userId="34a864e2-e65e-4cb2-823c-dc28f73f0e40" providerId="ADAL" clId="{8D2D96CF-1319-4CCC-9EA9-073445628049}" dt="2026-03-16T16:02:03.946" v="1375" actId="165"/>
+          <ac:spMkLst>
+            <pc:docMk/>
+            <pc:sldMk cId="2077614573" sldId="2146848316"/>
+            <ac:spMk id="9444" creationId="{4F6E9EA8-2F4F-5D2A-2F5B-1BCA7597DA8F}"/>
+          </ac:spMkLst>
+        </pc:spChg>
+        <pc:spChg chg="mod">
+          <ac:chgData name="Corbin Ferguson" userId="34a864e2-e65e-4cb2-823c-dc28f73f0e40" providerId="ADAL" clId="{8D2D96CF-1319-4CCC-9EA9-073445628049}" dt="2026-03-16T16:01:40.264" v="1371" actId="165"/>
+          <ac:spMkLst>
+            <pc:docMk/>
+            <pc:sldMk cId="2077614573" sldId="2146848316"/>
+            <ac:spMk id="9845" creationId="{45A65B3C-704D-81A8-9CB8-1B808C9DB46F}"/>
+          </ac:spMkLst>
+        </pc:spChg>
+        <pc:spChg chg="del">
+          <ac:chgData name="Corbin Ferguson" userId="34a864e2-e65e-4cb2-823c-dc28f73f0e40" providerId="ADAL" clId="{8D2D96CF-1319-4CCC-9EA9-073445628049}" dt="2026-03-16T16:13:29.237" v="1456" actId="478"/>
+          <ac:spMkLst>
+            <pc:docMk/>
+            <pc:sldMk cId="2077614573" sldId="2146848316"/>
+            <ac:spMk id="9990" creationId="{1A14FB88-5FB8-61A3-5A87-F8C40EF53100}"/>
+          </ac:spMkLst>
+        </pc:spChg>
+        <pc:spChg chg="del">
+          <ac:chgData name="Corbin Ferguson" userId="34a864e2-e65e-4cb2-823c-dc28f73f0e40" providerId="ADAL" clId="{8D2D96CF-1319-4CCC-9EA9-073445628049}" dt="2026-03-16T16:13:38.282" v="1461" actId="478"/>
+          <ac:spMkLst>
+            <pc:docMk/>
+            <pc:sldMk cId="2077614573" sldId="2146848316"/>
+            <ac:spMk id="9997" creationId="{6078BC0C-7BF6-79C6-9752-3CCDACE1113B}"/>
+          </ac:spMkLst>
+        </pc:spChg>
+        <pc:spChg chg="del">
+          <ac:chgData name="Corbin Ferguson" userId="34a864e2-e65e-4cb2-823c-dc28f73f0e40" providerId="ADAL" clId="{8D2D96CF-1319-4CCC-9EA9-073445628049}" dt="2026-03-16T16:13:38.282" v="1461" actId="478"/>
+          <ac:spMkLst>
+            <pc:docMk/>
+            <pc:sldMk cId="2077614573" sldId="2146848316"/>
+            <ac:spMk id="9998" creationId="{88600233-ABCB-3174-F69A-401D513C7624}"/>
+          </ac:spMkLst>
+        </pc:spChg>
+        <pc:spChg chg="del">
+          <ac:chgData name="Corbin Ferguson" userId="34a864e2-e65e-4cb2-823c-dc28f73f0e40" providerId="ADAL" clId="{8D2D96CF-1319-4CCC-9EA9-073445628049}" dt="2026-03-16T16:13:38.282" v="1461" actId="478"/>
+          <ac:spMkLst>
+            <pc:docMk/>
+            <pc:sldMk cId="2077614573" sldId="2146848316"/>
+            <ac:spMk id="9999" creationId="{7D5B8841-DB8C-5C65-782F-42DB1A2994E5}"/>
+          </ac:spMkLst>
+        </pc:spChg>
+        <pc:spChg chg="del">
+          <ac:chgData name="Corbin Ferguson" userId="34a864e2-e65e-4cb2-823c-dc28f73f0e40" providerId="ADAL" clId="{8D2D96CF-1319-4CCC-9EA9-073445628049}" dt="2026-03-16T16:13:38.282" v="1461" actId="478"/>
+          <ac:spMkLst>
+            <pc:docMk/>
+            <pc:sldMk cId="2077614573" sldId="2146848316"/>
+            <ac:spMk id="10000" creationId="{18773B56-FBA6-3A3A-1D0D-353C9A1CAB64}"/>
+          </ac:spMkLst>
+        </pc:spChg>
+        <pc:spChg chg="mod">
+          <ac:chgData name="Corbin Ferguson" userId="34a864e2-e65e-4cb2-823c-dc28f73f0e40" providerId="ADAL" clId="{8D2D96CF-1319-4CCC-9EA9-073445628049}" dt="2026-03-16T16:01:40.264" v="1371" actId="165"/>
+          <ac:spMkLst>
+            <pc:docMk/>
+            <pc:sldMk cId="2077614573" sldId="2146848316"/>
+            <ac:spMk id="10003" creationId="{8624F5E2-E70C-6B88-1C23-FE10AFC7DD90}"/>
+          </ac:spMkLst>
+        </pc:spChg>
+        <pc:spChg chg="del">
+          <ac:chgData name="Corbin Ferguson" userId="34a864e2-e65e-4cb2-823c-dc28f73f0e40" providerId="ADAL" clId="{8D2D96CF-1319-4CCC-9EA9-073445628049}" dt="2026-03-16T16:13:29.237" v="1456" actId="478"/>
+          <ac:spMkLst>
+            <pc:docMk/>
+            <pc:sldMk cId="2077614573" sldId="2146848316"/>
+            <ac:spMk id="10008" creationId="{B1F0841A-FA07-A4E0-A080-3A495483D6B6}"/>
+          </ac:spMkLst>
+        </pc:spChg>
+        <pc:spChg chg="del">
+          <ac:chgData name="Corbin Ferguson" userId="34a864e2-e65e-4cb2-823c-dc28f73f0e40" providerId="ADAL" clId="{8D2D96CF-1319-4CCC-9EA9-073445628049}" dt="2026-03-16T16:13:29.237" v="1456" actId="478"/>
+          <ac:spMkLst>
+            <pc:docMk/>
+            <pc:sldMk cId="2077614573" sldId="2146848316"/>
+            <ac:spMk id="10019" creationId="{0F32F3BF-4493-282F-6406-56917E91F62A}"/>
+          </ac:spMkLst>
+        </pc:spChg>
+        <pc:spChg chg="del">
+          <ac:chgData name="Corbin Ferguson" userId="34a864e2-e65e-4cb2-823c-dc28f73f0e40" providerId="ADAL" clId="{8D2D96CF-1319-4CCC-9EA9-073445628049}" dt="2026-03-16T16:13:29.237" v="1456" actId="478"/>
+          <ac:spMkLst>
+            <pc:docMk/>
+            <pc:sldMk cId="2077614573" sldId="2146848316"/>
+            <ac:spMk id="10020" creationId="{0B140EB4-2DD4-A169-C104-950692A145B1}"/>
+          </ac:spMkLst>
+        </pc:spChg>
+        <pc:spChg chg="del">
+          <ac:chgData name="Corbin Ferguson" userId="34a864e2-e65e-4cb2-823c-dc28f73f0e40" providerId="ADAL" clId="{8D2D96CF-1319-4CCC-9EA9-073445628049}" dt="2026-03-16T16:13:29.237" v="1456" actId="478"/>
+          <ac:spMkLst>
+            <pc:docMk/>
+            <pc:sldMk cId="2077614573" sldId="2146848316"/>
+            <ac:spMk id="10025" creationId="{FE71403A-2281-5DDC-DFAB-21BA5FD84C6C}"/>
+          </ac:spMkLst>
+        </pc:spChg>
+        <pc:spChg chg="del">
+          <ac:chgData name="Corbin Ferguson" userId="34a864e2-e65e-4cb2-823c-dc28f73f0e40" providerId="ADAL" clId="{8D2D96CF-1319-4CCC-9EA9-073445628049}" dt="2026-03-16T16:13:40.693" v="1462" actId="478"/>
+          <ac:spMkLst>
+            <pc:docMk/>
+            <pc:sldMk cId="2077614573" sldId="2146848316"/>
+            <ac:spMk id="10029" creationId="{6256A978-DF3A-CA52-E8E9-04CAB46297B6}"/>
+          </ac:spMkLst>
+        </pc:spChg>
+        <pc:spChg chg="del">
+          <ac:chgData name="Corbin Ferguson" userId="34a864e2-e65e-4cb2-823c-dc28f73f0e40" providerId="ADAL" clId="{8D2D96CF-1319-4CCC-9EA9-073445628049}" dt="2026-03-16T16:13:40.693" v="1462" actId="478"/>
+          <ac:spMkLst>
+            <pc:docMk/>
+            <pc:sldMk cId="2077614573" sldId="2146848316"/>
+            <ac:spMk id="10030" creationId="{A2F065D7-7A97-DCAF-9AEB-2EA5464EC424}"/>
+          </ac:spMkLst>
+        </pc:spChg>
+        <pc:spChg chg="del">
+          <ac:chgData name="Corbin Ferguson" userId="34a864e2-e65e-4cb2-823c-dc28f73f0e40" providerId="ADAL" clId="{8D2D96CF-1319-4CCC-9EA9-073445628049}" dt="2026-03-16T16:13:40.693" v="1462" actId="478"/>
+          <ac:spMkLst>
+            <pc:docMk/>
+            <pc:sldMk cId="2077614573" sldId="2146848316"/>
+            <ac:spMk id="10031" creationId="{7386F5C3-5ED2-1E35-3F2A-7F615097E0FD}"/>
+          </ac:spMkLst>
+        </pc:spChg>
+        <pc:spChg chg="del">
+          <ac:chgData name="Corbin Ferguson" userId="34a864e2-e65e-4cb2-823c-dc28f73f0e40" providerId="ADAL" clId="{8D2D96CF-1319-4CCC-9EA9-073445628049}" dt="2026-03-16T16:13:38.282" v="1461" actId="478"/>
+          <ac:spMkLst>
+            <pc:docMk/>
+            <pc:sldMk cId="2077614573" sldId="2146848316"/>
+            <ac:spMk id="10039" creationId="{A767D995-2245-EFF0-B2A3-EED0E0B5ABE0}"/>
+          </ac:spMkLst>
+        </pc:spChg>
+        <pc:spChg chg="del">
+          <ac:chgData name="Corbin Ferguson" userId="34a864e2-e65e-4cb2-823c-dc28f73f0e40" providerId="ADAL" clId="{8D2D96CF-1319-4CCC-9EA9-073445628049}" dt="2026-03-16T16:13:38.282" v="1461" actId="478"/>
+          <ac:spMkLst>
+            <pc:docMk/>
+            <pc:sldMk cId="2077614573" sldId="2146848316"/>
+            <ac:spMk id="10040" creationId="{F5F31AD6-77DE-1B28-21CF-F269EC311F1F}"/>
+          </ac:spMkLst>
+        </pc:spChg>
+        <pc:spChg chg="mod">
+          <ac:chgData name="Corbin Ferguson" userId="34a864e2-e65e-4cb2-823c-dc28f73f0e40" providerId="ADAL" clId="{8D2D96CF-1319-4CCC-9EA9-073445628049}" dt="2026-03-16T16:02:03.946" v="1375" actId="165"/>
+          <ac:spMkLst>
+            <pc:docMk/>
+            <pc:sldMk cId="2077614573" sldId="2146848316"/>
+            <ac:spMk id="10163" creationId="{9DA64397-879A-CC61-3C2F-AC5F268A765A}"/>
+          </ac:spMkLst>
+        </pc:spChg>
+        <pc:spChg chg="mod">
+          <ac:chgData name="Corbin Ferguson" userId="34a864e2-e65e-4cb2-823c-dc28f73f0e40" providerId="ADAL" clId="{8D2D96CF-1319-4CCC-9EA9-073445628049}" dt="2026-03-16T16:01:40.264" v="1371" actId="165"/>
+          <ac:spMkLst>
+            <pc:docMk/>
+            <pc:sldMk cId="2077614573" sldId="2146848316"/>
+            <ac:spMk id="10261" creationId="{DFFE02BB-2D22-323B-9346-35A5106901E7}"/>
+          </ac:spMkLst>
+        </pc:spChg>
+        <pc:spChg chg="mod">
+          <ac:chgData name="Corbin Ferguson" userId="34a864e2-e65e-4cb2-823c-dc28f73f0e40" providerId="ADAL" clId="{8D2D96CF-1319-4CCC-9EA9-073445628049}" dt="2026-03-16T16:02:03.946" v="1375" actId="165"/>
+          <ac:spMkLst>
+            <pc:docMk/>
+            <pc:sldMk cId="2077614573" sldId="2146848316"/>
+            <ac:spMk id="10271" creationId="{3DFE3B36-1D23-B941-B786-CF08850E2BBC}"/>
+          </ac:spMkLst>
+        </pc:spChg>
+        <pc:spChg chg="mod topLvl">
+          <ac:chgData name="Corbin Ferguson" userId="34a864e2-e65e-4cb2-823c-dc28f73f0e40" providerId="ADAL" clId="{8D2D96CF-1319-4CCC-9EA9-073445628049}" dt="2026-03-16T16:13:07.664" v="1441" actId="165"/>
+          <ac:spMkLst>
+            <pc:docMk/>
+            <pc:sldMk cId="2077614573" sldId="2146848316"/>
+            <ac:spMk id="10419" creationId="{4B6A0A59-0841-ACBC-9ACF-8DDC7F585AD8}"/>
+          </ac:spMkLst>
+        </pc:spChg>
+        <pc:spChg chg="mod topLvl">
+          <ac:chgData name="Corbin Ferguson" userId="34a864e2-e65e-4cb2-823c-dc28f73f0e40" providerId="ADAL" clId="{8D2D96CF-1319-4CCC-9EA9-073445628049}" dt="2026-03-16T16:13:07.664" v="1441" actId="165"/>
+          <ac:spMkLst>
+            <pc:docMk/>
+            <pc:sldMk cId="2077614573" sldId="2146848316"/>
+            <ac:spMk id="10434" creationId="{71299B70-E2A2-36F6-BF08-C9A0A5683ADE}"/>
+          </ac:spMkLst>
+        </pc:spChg>
+        <pc:spChg chg="mod topLvl">
+          <ac:chgData name="Corbin Ferguson" userId="34a864e2-e65e-4cb2-823c-dc28f73f0e40" providerId="ADAL" clId="{8D2D96CF-1319-4CCC-9EA9-073445628049}" dt="2026-03-16T16:13:07.664" v="1441" actId="165"/>
+          <ac:spMkLst>
+            <pc:docMk/>
+            <pc:sldMk cId="2077614573" sldId="2146848316"/>
+            <ac:spMk id="10438" creationId="{18D18D81-FEBF-37F5-6C20-B6F09FFFD838}"/>
+          </ac:spMkLst>
+        </pc:spChg>
+        <pc:spChg chg="mod modVis">
+          <ac:chgData name="Corbin Ferguson" userId="34a864e2-e65e-4cb2-823c-dc28f73f0e40" providerId="ADAL" clId="{8D2D96CF-1319-4CCC-9EA9-073445628049}" dt="2026-03-16T16:13:14.640" v="1452" actId="14429"/>
+          <ac:spMkLst>
+            <pc:docMk/>
+            <pc:sldMk cId="2077614573" sldId="2146848316"/>
+            <ac:spMk id="10454" creationId="{AAA717C8-C7BD-FAAA-2E81-4D76EA54C548}"/>
+          </ac:spMkLst>
+        </pc:spChg>
+        <pc:spChg chg="mod modVis">
+          <ac:chgData name="Corbin Ferguson" userId="34a864e2-e65e-4cb2-823c-dc28f73f0e40" providerId="ADAL" clId="{8D2D96CF-1319-4CCC-9EA9-073445628049}" dt="2026-03-16T16:13:14.263" v="1451" actId="14430"/>
+          <ac:spMkLst>
+            <pc:docMk/>
+            <pc:sldMk cId="2077614573" sldId="2146848316"/>
+            <ac:spMk id="10456" creationId="{10928AD7-DDD4-A9F4-ED11-2D3FCBAB2AF7}"/>
+          </ac:spMkLst>
+        </pc:spChg>
+        <pc:spChg chg="mod modVis">
+          <ac:chgData name="Corbin Ferguson" userId="34a864e2-e65e-4cb2-823c-dc28f73f0e40" providerId="ADAL" clId="{8D2D96CF-1319-4CCC-9EA9-073445628049}" dt="2026-03-16T16:13:13.462" v="1449" actId="14430"/>
+          <ac:spMkLst>
+            <pc:docMk/>
+            <pc:sldMk cId="2077614573" sldId="2146848316"/>
+            <ac:spMk id="10457" creationId="{E4D783BE-4B50-1EE9-293B-212C35D871F3}"/>
+          </ac:spMkLst>
+        </pc:spChg>
+        <pc:spChg chg="mod modVis">
+          <ac:chgData name="Corbin Ferguson" userId="34a864e2-e65e-4cb2-823c-dc28f73f0e40" providerId="ADAL" clId="{8D2D96CF-1319-4CCC-9EA9-073445628049}" dt="2026-03-16T16:13:12.614" v="1447" actId="14430"/>
+          <ac:spMkLst>
+            <pc:docMk/>
+            <pc:sldMk cId="2077614573" sldId="2146848316"/>
+            <ac:spMk id="10458" creationId="{CB731D3F-3E72-28D4-6275-824262BB1A26}"/>
+          </ac:spMkLst>
+        </pc:spChg>
+        <pc:spChg chg="mod topLvl">
+          <ac:chgData name="Corbin Ferguson" userId="34a864e2-e65e-4cb2-823c-dc28f73f0e40" providerId="ADAL" clId="{8D2D96CF-1319-4CCC-9EA9-073445628049}" dt="2026-03-16T16:13:07.664" v="1441" actId="165"/>
+          <ac:spMkLst>
+            <pc:docMk/>
+            <pc:sldMk cId="2077614573" sldId="2146848316"/>
+            <ac:spMk id="10469" creationId="{3DF84D1F-2D12-0BC2-D0E1-AE32F687E41E}"/>
+          </ac:spMkLst>
+        </pc:spChg>
+        <pc:spChg chg="mod modVis">
+          <ac:chgData name="Corbin Ferguson" userId="34a864e2-e65e-4cb2-823c-dc28f73f0e40" providerId="ADAL" clId="{8D2D96CF-1319-4CCC-9EA9-073445628049}" dt="2026-03-16T16:03:33.804" v="1406" actId="14429"/>
+          <ac:spMkLst>
+            <pc:docMk/>
+            <pc:sldMk cId="2077614573" sldId="2146848316"/>
+            <ac:spMk id="10476" creationId="{1BB2F026-A377-8A25-813A-5F255959DD51}"/>
+          </ac:spMkLst>
+        </pc:spChg>
+        <pc:spChg chg="mod modVis">
+          <ac:chgData name="Corbin Ferguson" userId="34a864e2-e65e-4cb2-823c-dc28f73f0e40" providerId="ADAL" clId="{8D2D96CF-1319-4CCC-9EA9-073445628049}" dt="2026-03-16T16:03:31.319" v="1402" actId="14429"/>
+          <ac:spMkLst>
+            <pc:docMk/>
+            <pc:sldMk cId="2077614573" sldId="2146848316"/>
+            <ac:spMk id="10477" creationId="{6EDA60F5-0155-1969-4303-C8E1ECB68C04}"/>
+          </ac:spMkLst>
+        </pc:spChg>
+        <pc:spChg chg="mod modVis">
+          <ac:chgData name="Corbin Ferguson" userId="34a864e2-e65e-4cb2-823c-dc28f73f0e40" providerId="ADAL" clId="{8D2D96CF-1319-4CCC-9EA9-073445628049}" dt="2026-03-16T16:03:32.507" v="1404" actId="14429"/>
+          <ac:spMkLst>
+            <pc:docMk/>
+            <pc:sldMk cId="2077614573" sldId="2146848316"/>
+            <ac:spMk id="10478" creationId="{EF29C8E0-E33D-F434-F784-79635682E34D}"/>
+          </ac:spMkLst>
+        </pc:spChg>
+        <pc:spChg chg="mod topLvl">
+          <ac:chgData name="Corbin Ferguson" userId="34a864e2-e65e-4cb2-823c-dc28f73f0e40" providerId="ADAL" clId="{8D2D96CF-1319-4CCC-9EA9-073445628049}" dt="2026-03-16T16:13:07.664" v="1441" actId="165"/>
+          <ac:spMkLst>
+            <pc:docMk/>
+            <pc:sldMk cId="2077614573" sldId="2146848316"/>
+            <ac:spMk id="10479" creationId="{D902B22C-C8C4-FC29-FD78-C8791BD9E2CC}"/>
+          </ac:spMkLst>
+        </pc:spChg>
+        <pc:spChg chg="mod">
+          <ac:chgData name="Corbin Ferguson" userId="34a864e2-e65e-4cb2-823c-dc28f73f0e40" providerId="ADAL" clId="{8D2D96CF-1319-4CCC-9EA9-073445628049}" dt="2026-03-16T16:01:40.264" v="1371" actId="165"/>
+          <ac:spMkLst>
+            <pc:docMk/>
+            <pc:sldMk cId="2077614573" sldId="2146848316"/>
+            <ac:spMk id="10510" creationId="{2ADD0366-DE82-45B0-F168-8CD88ADFB3B6}"/>
+          </ac:spMkLst>
+        </pc:spChg>
+        <pc:spChg chg="mod">
+          <ac:chgData name="Corbin Ferguson" userId="34a864e2-e65e-4cb2-823c-dc28f73f0e40" providerId="ADAL" clId="{8D2D96CF-1319-4CCC-9EA9-073445628049}" dt="2026-03-16T16:02:03.946" v="1375" actId="165"/>
+          <ac:spMkLst>
+            <pc:docMk/>
+            <pc:sldMk cId="2077614573" sldId="2146848316"/>
+            <ac:spMk id="10530" creationId="{E5A31BEE-6EDA-EE4B-F580-37AC596BEBCC}"/>
+          </ac:spMkLst>
+        </pc:spChg>
+        <pc:spChg chg="mod">
+          <ac:chgData name="Corbin Ferguson" userId="34a864e2-e65e-4cb2-823c-dc28f73f0e40" providerId="ADAL" clId="{8D2D96CF-1319-4CCC-9EA9-073445628049}" dt="2026-03-16T16:01:40.264" v="1371" actId="165"/>
+          <ac:spMkLst>
+            <pc:docMk/>
+            <pc:sldMk cId="2077614573" sldId="2146848316"/>
+            <ac:spMk id="10586" creationId="{C440AF32-A01E-BC5A-EB6F-9F358FDE1989}"/>
+          </ac:spMkLst>
+        </pc:spChg>
+        <pc:spChg chg="mod">
+          <ac:chgData name="Corbin Ferguson" userId="34a864e2-e65e-4cb2-823c-dc28f73f0e40" providerId="ADAL" clId="{8D2D96CF-1319-4CCC-9EA9-073445628049}" dt="2026-03-16T16:02:03.946" v="1375" actId="165"/>
+          <ac:spMkLst>
+            <pc:docMk/>
+            <pc:sldMk cId="2077614573" sldId="2146848316"/>
+            <ac:spMk id="10687" creationId="{9621F235-C373-80D3-9770-B71FE923BFC5}"/>
+          </ac:spMkLst>
+        </pc:spChg>
+        <pc:spChg chg="mod">
+          <ac:chgData name="Corbin Ferguson" userId="34a864e2-e65e-4cb2-823c-dc28f73f0e40" providerId="ADAL" clId="{8D2D96CF-1319-4CCC-9EA9-073445628049}" dt="2026-03-16T16:01:40.264" v="1371" actId="165"/>
+          <ac:spMkLst>
+            <pc:docMk/>
+            <pc:sldMk cId="2077614573" sldId="2146848316"/>
+            <ac:spMk id="10740" creationId="{61B952FE-E7A4-0D04-592D-0C422FE6B368}"/>
+          </ac:spMkLst>
+        </pc:spChg>
+        <pc:spChg chg="mod">
+          <ac:chgData name="Corbin Ferguson" userId="34a864e2-e65e-4cb2-823c-dc28f73f0e40" providerId="ADAL" clId="{8D2D96CF-1319-4CCC-9EA9-073445628049}" dt="2026-03-16T16:02:03.946" v="1375" actId="165"/>
+          <ac:spMkLst>
+            <pc:docMk/>
+            <pc:sldMk cId="2077614573" sldId="2146848316"/>
+            <ac:spMk id="10759" creationId="{43DDD9A3-EB88-656E-9B37-FC8511FCDD1B}"/>
+          </ac:spMkLst>
+        </pc:spChg>
+        <pc:spChg chg="mod topLvl">
+          <ac:chgData name="Corbin Ferguson" userId="34a864e2-e65e-4cb2-823c-dc28f73f0e40" providerId="ADAL" clId="{8D2D96CF-1319-4CCC-9EA9-073445628049}" dt="2026-03-16T16:13:04.178" v="1437" actId="165"/>
+          <ac:spMkLst>
+            <pc:docMk/>
+            <pc:sldMk cId="2077614573" sldId="2146848316"/>
+            <ac:spMk id="10803" creationId="{BDF784A6-CB84-62F6-3B49-D10C2D6392ED}"/>
+          </ac:spMkLst>
+        </pc:spChg>
+        <pc:spChg chg="mod topLvl">
+          <ac:chgData name="Corbin Ferguson" userId="34a864e2-e65e-4cb2-823c-dc28f73f0e40" providerId="ADAL" clId="{8D2D96CF-1319-4CCC-9EA9-073445628049}" dt="2026-03-16T16:13:04.178" v="1437" actId="165"/>
+          <ac:spMkLst>
+            <pc:docMk/>
+            <pc:sldMk cId="2077614573" sldId="2146848316"/>
+            <ac:spMk id="10818" creationId="{BD6D1489-B3D4-696E-8DC3-0C02A6377A0C}"/>
+          </ac:spMkLst>
+        </pc:spChg>
+        <pc:spChg chg="mod topLvl">
+          <ac:chgData name="Corbin Ferguson" userId="34a864e2-e65e-4cb2-823c-dc28f73f0e40" providerId="ADAL" clId="{8D2D96CF-1319-4CCC-9EA9-073445628049}" dt="2026-03-16T16:13:04.178" v="1437" actId="165"/>
+          <ac:spMkLst>
+            <pc:docMk/>
+            <pc:sldMk cId="2077614573" sldId="2146848316"/>
+            <ac:spMk id="10820" creationId="{4E375D8D-9893-0EF9-21C5-A4FD87C2D98A}"/>
+          </ac:spMkLst>
+        </pc:spChg>
+        <pc:spChg chg="mod topLvl">
+          <ac:chgData name="Corbin Ferguson" userId="34a864e2-e65e-4cb2-823c-dc28f73f0e40" providerId="ADAL" clId="{8D2D96CF-1319-4CCC-9EA9-073445628049}" dt="2026-03-16T16:13:04.178" v="1437" actId="165"/>
+          <ac:spMkLst>
+            <pc:docMk/>
+            <pc:sldMk cId="2077614573" sldId="2146848316"/>
+            <ac:spMk id="10847" creationId="{CDB448F4-DDEA-7232-A26A-9F4C6D8EBAFB}"/>
+          </ac:spMkLst>
+        </pc:spChg>
+        <pc:spChg chg="mod">
+          <ac:chgData name="Corbin Ferguson" userId="34a864e2-e65e-4cb2-823c-dc28f73f0e40" providerId="ADAL" clId="{8D2D96CF-1319-4CCC-9EA9-073445628049}" dt="2026-03-16T16:02:03.946" v="1375" actId="165"/>
+          <ac:spMkLst>
+            <pc:docMk/>
+            <pc:sldMk cId="2077614573" sldId="2146848316"/>
+            <ac:spMk id="10849" creationId="{D706CB23-ECA8-F94E-0123-9D2D8AEEB319}"/>
+          </ac:spMkLst>
+        </pc:spChg>
+        <pc:spChg chg="mod topLvl">
+          <ac:chgData name="Corbin Ferguson" userId="34a864e2-e65e-4cb2-823c-dc28f73f0e40" providerId="ADAL" clId="{8D2D96CF-1319-4CCC-9EA9-073445628049}" dt="2026-03-16T16:13:04.178" v="1437" actId="165"/>
+          <ac:spMkLst>
+            <pc:docMk/>
+            <pc:sldMk cId="2077614573" sldId="2146848316"/>
+            <ac:spMk id="10864" creationId="{3D49FB3A-FA28-5254-0381-D659100DD293}"/>
+          </ac:spMkLst>
+        </pc:spChg>
+        <pc:spChg chg="mod topLvl">
+          <ac:chgData name="Corbin Ferguson" userId="34a864e2-e65e-4cb2-823c-dc28f73f0e40" providerId="ADAL" clId="{8D2D96CF-1319-4CCC-9EA9-073445628049}" dt="2026-03-16T16:13:04.178" v="1437" actId="165"/>
+          <ac:spMkLst>
+            <pc:docMk/>
+            <pc:sldMk cId="2077614573" sldId="2146848316"/>
+            <ac:spMk id="10882" creationId="{7E181B4E-AFDE-1988-2754-6F3E2FD335AD}"/>
+          </ac:spMkLst>
+        </pc:spChg>
+        <pc:spChg chg="mod topLvl">
+          <ac:chgData name="Corbin Ferguson" userId="34a864e2-e65e-4cb2-823c-dc28f73f0e40" providerId="ADAL" clId="{8D2D96CF-1319-4CCC-9EA9-073445628049}" dt="2026-03-16T16:13:04.178" v="1437" actId="165"/>
+          <ac:spMkLst>
+            <pc:docMk/>
+            <pc:sldMk cId="2077614573" sldId="2146848316"/>
+            <ac:spMk id="10901" creationId="{260D5BFC-8D99-2DF3-3788-EC0316444132}"/>
+          </ac:spMkLst>
+        </pc:spChg>
+        <pc:grpChg chg="add del mod modVis">
+          <ac:chgData name="Corbin Ferguson" userId="34a864e2-e65e-4cb2-823c-dc28f73f0e40" providerId="ADAL" clId="{8D2D96CF-1319-4CCC-9EA9-073445628049}" dt="2026-03-16T16:13:24.497" v="1455" actId="478"/>
+          <ac:grpSpMkLst>
+            <pc:docMk/>
+            <pc:sldMk cId="2077614573" sldId="2146848316"/>
+            <ac:grpSpMk id="14" creationId="{24BD7666-D6A4-D570-E479-D9C1E24A98D3}"/>
+          </ac:grpSpMkLst>
+        </pc:grpChg>
+        <pc:grpChg chg="mod modVis">
+          <ac:chgData name="Corbin Ferguson" userId="34a864e2-e65e-4cb2-823c-dc28f73f0e40" providerId="ADAL" clId="{8D2D96CF-1319-4CCC-9EA9-073445628049}" dt="2026-03-16T16:03:17.864" v="1394" actId="14429"/>
+          <ac:grpSpMkLst>
+            <pc:docMk/>
+            <pc:sldMk cId="2077614573" sldId="2146848316"/>
+            <ac:grpSpMk id="16" creationId="{1591C2AE-17F1-0EE1-027C-BE8C34BCE3CC}"/>
+          </ac:grpSpMkLst>
+        </pc:grpChg>
+        <pc:grpChg chg="del mod modVis">
+          <ac:chgData name="Corbin Ferguson" userId="34a864e2-e65e-4cb2-823c-dc28f73f0e40" providerId="ADAL" clId="{8D2D96CF-1319-4CCC-9EA9-073445628049}" dt="2026-03-16T16:13:38.282" v="1461" actId="478"/>
+          <ac:grpSpMkLst>
+            <pc:docMk/>
+            <pc:sldMk cId="2077614573" sldId="2146848316"/>
+            <ac:grpSpMk id="17" creationId="{3B72B237-E1BF-EE5F-0E3B-FDA8A14AE1C8}"/>
+          </ac:grpSpMkLst>
+        </pc:grpChg>
+        <pc:grpChg chg="del mod modVis">
+          <ac:chgData name="Corbin Ferguson" userId="34a864e2-e65e-4cb2-823c-dc28f73f0e40" providerId="ADAL" clId="{8D2D96CF-1319-4CCC-9EA9-073445628049}" dt="2026-03-16T16:13:38.282" v="1461" actId="478"/>
+          <ac:grpSpMkLst>
+            <pc:docMk/>
+            <pc:sldMk cId="2077614573" sldId="2146848316"/>
+            <ac:grpSpMk id="18" creationId="{75CD6B92-65FC-FE36-FC57-794EA5976853}"/>
+          </ac:grpSpMkLst>
+        </pc:grpChg>
+        <pc:grpChg chg="mod modVis">
+          <ac:chgData name="Corbin Ferguson" userId="34a864e2-e65e-4cb2-823c-dc28f73f0e40" providerId="ADAL" clId="{8D2D96CF-1319-4CCC-9EA9-073445628049}" dt="2026-03-16T16:03:23.716" v="1400" actId="14429"/>
+          <ac:grpSpMkLst>
+            <pc:docMk/>
+            <pc:sldMk cId="2077614573" sldId="2146848316"/>
+            <ac:grpSpMk id="19" creationId="{501463A7-693C-D89C-0D3F-C9AC66AA15D4}"/>
+          </ac:grpSpMkLst>
+        </pc:grpChg>
+        <pc:grpChg chg="add del">
+          <ac:chgData name="Corbin Ferguson" userId="34a864e2-e65e-4cb2-823c-dc28f73f0e40" providerId="ADAL" clId="{8D2D96CF-1319-4CCC-9EA9-073445628049}" dt="2026-03-16T16:13:01.240" v="1432" actId="478"/>
+          <ac:grpSpMkLst>
+            <pc:docMk/>
+            <pc:sldMk cId="2077614573" sldId="2146848316"/>
+            <ac:grpSpMk id="23" creationId="{77F3592F-D463-8558-91D1-AF26484A5B05}"/>
+          </ac:grpSpMkLst>
+        </pc:grpChg>
+        <pc:picChg chg="add del mod">
+          <ac:chgData name="Corbin Ferguson" userId="34a864e2-e65e-4cb2-823c-dc28f73f0e40" providerId="ADAL" clId="{8D2D96CF-1319-4CCC-9EA9-073445628049}" dt="2026-03-16T15:45:11.303" v="1349" actId="478"/>
+          <ac:picMkLst>
+            <pc:docMk/>
+            <pc:sldMk cId="2077614573" sldId="2146848316"/>
+            <ac:picMk id="5" creationId="{1CAC52FA-C254-5FF7-A91C-88C0A8842080}"/>
+          </ac:picMkLst>
+        </pc:picChg>
+        <pc:picChg chg="add del mod">
+          <ac:chgData name="Corbin Ferguson" userId="34a864e2-e65e-4cb2-823c-dc28f73f0e40" providerId="ADAL" clId="{8D2D96CF-1319-4CCC-9EA9-073445628049}" dt="2026-03-16T15:48:04.705" v="1352" actId="478"/>
+          <ac:picMkLst>
+            <pc:docMk/>
+            <pc:sldMk cId="2077614573" sldId="2146848316"/>
+            <ac:picMk id="9" creationId="{430551EE-87DD-0553-0AFE-29775E2D2392}"/>
+          </ac:picMkLst>
+        </pc:picChg>
+        <pc:picChg chg="add del mod ord">
+          <ac:chgData name="Corbin Ferguson" userId="34a864e2-e65e-4cb2-823c-dc28f73f0e40" providerId="ADAL" clId="{8D2D96CF-1319-4CCC-9EA9-073445628049}" dt="2026-03-16T16:01:51.115" v="1374" actId="338"/>
+          <ac:picMkLst>
+            <pc:docMk/>
+            <pc:sldMk cId="2077614573" sldId="2146848316"/>
+            <ac:picMk id="11" creationId="{D14058B6-AC8F-6982-F515-E572E1436816}"/>
+          </ac:picMkLst>
+        </pc:picChg>
+        <pc:picChg chg="del">
+          <ac:chgData name="Corbin Ferguson" userId="34a864e2-e65e-4cb2-823c-dc28f73f0e40" providerId="ADAL" clId="{8D2D96CF-1319-4CCC-9EA9-073445628049}" dt="2026-03-16T15:42:39.157" v="1345" actId="478"/>
+          <ac:picMkLst>
+            <pc:docMk/>
+            <pc:sldMk cId="2077614573" sldId="2146848316"/>
+            <ac:picMk id="15" creationId="{BACB85A8-B9AD-3E0D-DA82-B68BDCBBD8C9}"/>
+          </ac:picMkLst>
+        </pc:picChg>
+        <pc:picChg chg="add del mod">
+          <ac:chgData name="Corbin Ferguson" userId="34a864e2-e65e-4cb2-823c-dc28f73f0e40" providerId="ADAL" clId="{8D2D96CF-1319-4CCC-9EA9-073445628049}" dt="2026-03-16T16:15:39.561" v="1507" actId="478"/>
+          <ac:picMkLst>
+            <pc:docMk/>
+            <pc:sldMk cId="2077614573" sldId="2146848316"/>
+            <ac:picMk id="8352" creationId="{ED480CF8-327A-1146-55D3-6EEF1CB4996D}"/>
+          </ac:picMkLst>
+        </pc:picChg>
+        <pc:picChg chg="add del mod ord">
+          <ac:chgData name="Corbin Ferguson" userId="34a864e2-e65e-4cb2-823c-dc28f73f0e40" providerId="ADAL" clId="{8D2D96CF-1319-4CCC-9EA9-073445628049}" dt="2026-03-16T16:22:46.609" v="1526" actId="478"/>
+          <ac:picMkLst>
+            <pc:docMk/>
+            <pc:sldMk cId="2077614573" sldId="2146848316"/>
+            <ac:picMk id="8354" creationId="{C8A49E57-BF04-273B-0328-EA90A1EE242B}"/>
+          </ac:picMkLst>
+        </pc:picChg>
+        <pc:picChg chg="add del mod">
+          <ac:chgData name="Corbin Ferguson" userId="34a864e2-e65e-4cb2-823c-dc28f73f0e40" providerId="ADAL" clId="{8D2D96CF-1319-4CCC-9EA9-073445628049}" dt="2026-03-16T16:15:40.381" v="1509" actId="478"/>
+          <ac:picMkLst>
+            <pc:docMk/>
+            <pc:sldMk cId="2077614573" sldId="2146848316"/>
+            <ac:picMk id="8356" creationId="{48AA5230-156E-1B19-834E-65774ADBFB8C}"/>
+          </ac:picMkLst>
+        </pc:picChg>
+        <pc:picChg chg="add del mod ord modCrop">
+          <ac:chgData name="Corbin Ferguson" userId="34a864e2-e65e-4cb2-823c-dc28f73f0e40" providerId="ADAL" clId="{8D2D96CF-1319-4CCC-9EA9-073445628049}" dt="2026-03-16T16:38:59.731" v="1543" actId="478"/>
+          <ac:picMkLst>
+            <pc:docMk/>
+            <pc:sldMk cId="2077614573" sldId="2146848316"/>
+            <ac:picMk id="8358" creationId="{16C12B4B-667C-C698-8AB7-6A7EAEC39E2E}"/>
+          </ac:picMkLst>
+        </pc:picChg>
+        <pc:picChg chg="add del mod ord">
+          <ac:chgData name="Corbin Ferguson" userId="34a864e2-e65e-4cb2-823c-dc28f73f0e40" providerId="ADAL" clId="{8D2D96CF-1319-4CCC-9EA9-073445628049}" dt="2026-03-16T16:45:51.625" v="1557" actId="478"/>
+          <ac:picMkLst>
+            <pc:docMk/>
+            <pc:sldMk cId="2077614573" sldId="2146848316"/>
+            <ac:picMk id="8360" creationId="{AA1DB74E-7D0E-154A-067C-B10A6CA3976F}"/>
+          </ac:picMkLst>
+        </pc:picChg>
+        <pc:picChg chg="add mod ord">
+          <ac:chgData name="Corbin Ferguson" userId="34a864e2-e65e-4cb2-823c-dc28f73f0e40" providerId="ADAL" clId="{8D2D96CF-1319-4CCC-9EA9-073445628049}" dt="2026-03-16T16:45:57.083" v="1559" actId="26606"/>
+          <ac:picMkLst>
+            <pc:docMk/>
+            <pc:sldMk cId="2077614573" sldId="2146848316"/>
+            <ac:picMk id="8362" creationId="{5B32580E-8B7E-FCBF-145C-131D2AA75C68}"/>
+          </ac:picMkLst>
+        </pc:picChg>
+        <pc:picChg chg="mod modVis">
+          <ac:chgData name="Corbin Ferguson" userId="34a864e2-e65e-4cb2-823c-dc28f73f0e40" providerId="ADAL" clId="{8D2D96CF-1319-4CCC-9EA9-073445628049}" dt="2026-03-16T16:02:36.808" v="1385" actId="14429"/>
+          <ac:picMkLst>
+            <pc:docMk/>
+            <pc:sldMk cId="2077614573" sldId="2146848316"/>
+            <ac:picMk id="8369" creationId="{1432331A-ED63-06D9-B692-FAB1A42D7193}"/>
+          </ac:picMkLst>
+        </pc:picChg>
+        <pc:picChg chg="mod modVis">
+          <ac:chgData name="Corbin Ferguson" userId="34a864e2-e65e-4cb2-823c-dc28f73f0e40" providerId="ADAL" clId="{8D2D96CF-1319-4CCC-9EA9-073445628049}" dt="2026-03-16T16:03:39.595" v="1410" actId="14429"/>
+          <ac:picMkLst>
+            <pc:docMk/>
+            <pc:sldMk cId="2077614573" sldId="2146848316"/>
+            <ac:picMk id="9150" creationId="{6A9C2A39-93CA-0897-20FA-17DB258118EA}"/>
+          </ac:picMkLst>
+        </pc:picChg>
+        <pc:picChg chg="mod modVis">
+          <ac:chgData name="Corbin Ferguson" userId="34a864e2-e65e-4cb2-823c-dc28f73f0e40" providerId="ADAL" clId="{8D2D96CF-1319-4CCC-9EA9-073445628049}" dt="2026-03-16T16:03:38.213" v="1408" actId="14429"/>
+          <ac:picMkLst>
+            <pc:docMk/>
+            <pc:sldMk cId="2077614573" sldId="2146848316"/>
+            <ac:picMk id="9151" creationId="{1CE7A485-6D52-9B7E-BB0D-AC43B0B8B90B}"/>
+          </ac:picMkLst>
+        </pc:picChg>
+        <pc:picChg chg="del">
+          <ac:chgData name="Corbin Ferguson" userId="34a864e2-e65e-4cb2-823c-dc28f73f0e40" providerId="ADAL" clId="{8D2D96CF-1319-4CCC-9EA9-073445628049}" dt="2026-03-16T16:13:38.282" v="1461" actId="478"/>
+          <ac:picMkLst>
+            <pc:docMk/>
+            <pc:sldMk cId="2077614573" sldId="2146848316"/>
+            <ac:picMk id="10119" creationId="{DA93CEAA-2052-B167-8E52-151AAB275CE4}"/>
+          </ac:picMkLst>
+        </pc:picChg>
+        <pc:picChg chg="del">
+          <ac:chgData name="Corbin Ferguson" userId="34a864e2-e65e-4cb2-823c-dc28f73f0e40" providerId="ADAL" clId="{8D2D96CF-1319-4CCC-9EA9-073445628049}" dt="2026-03-16T16:13:38.282" v="1461" actId="478"/>
+          <ac:picMkLst>
+            <pc:docMk/>
+            <pc:sldMk cId="2077614573" sldId="2146848316"/>
+            <ac:picMk id="10120" creationId="{8A73F059-DDA2-3BEC-5638-7DA80C4F1400}"/>
+          </ac:picMkLst>
+        </pc:picChg>
+        <pc:picChg chg="add del mod">
+          <ac:chgData name="Corbin Ferguson" userId="34a864e2-e65e-4cb2-823c-dc28f73f0e40" providerId="ADAL" clId="{8D2D96CF-1319-4CCC-9EA9-073445628049}" dt="2026-03-16T16:13:02.319" v="1435" actId="22"/>
+          <ac:picMkLst>
+            <pc:docMk/>
+            <pc:sldMk cId="2077614573" sldId="2146848316"/>
+            <ac:picMk id="10908" creationId="{5BBDBB99-399A-3E78-8D76-C542D48741AD}"/>
+          </ac:picMkLst>
+        </pc:picChg>
+        <pc:picChg chg="add del mod">
+          <ac:chgData name="Corbin Ferguson" userId="34a864e2-e65e-4cb2-823c-dc28f73f0e40" providerId="ADAL" clId="{8D2D96CF-1319-4CCC-9EA9-073445628049}" dt="2026-03-16T16:15:39.901" v="1508" actId="478"/>
+          <ac:picMkLst>
+            <pc:docMk/>
+            <pc:sldMk cId="2077614573" sldId="2146848316"/>
+            <ac:picMk id="10910" creationId="{9D937817-7381-1FE2-843B-1E01F2130801}"/>
+          </ac:picMkLst>
+        </pc:picChg>
+      </pc:sldChg>
+      <pc:sldChg chg="addSp delSp modSp add mod">
+        <pc:chgData name="Corbin Ferguson" userId="34a864e2-e65e-4cb2-823c-dc28f73f0e40" providerId="ADAL" clId="{8D2D96CF-1319-4CCC-9EA9-073445628049}" dt="2026-03-16T16:46:09.342" v="1562" actId="26606"/>
+        <pc:sldMkLst>
+          <pc:docMk/>
+          <pc:sldMk cId="1692918807" sldId="2146848317"/>
+        </pc:sldMkLst>
+        <pc:spChg chg="mod">
+          <ac:chgData name="Corbin Ferguson" userId="34a864e2-e65e-4cb2-823c-dc28f73f0e40" providerId="ADAL" clId="{8D2D96CF-1319-4CCC-9EA9-073445628049}" dt="2026-03-16T16:16:24.772" v="1525" actId="20577"/>
+          <ac:spMkLst>
+            <pc:docMk/>
+            <pc:sldMk cId="1692918807" sldId="2146848317"/>
+            <ac:spMk id="2" creationId="{5EBCB58C-1369-EDD7-5D5E-7C1E1415DB2E}"/>
+          </ac:spMkLst>
+        </pc:spChg>
+        <pc:picChg chg="add del mod ord">
+          <ac:chgData name="Corbin Ferguson" userId="34a864e2-e65e-4cb2-823c-dc28f73f0e40" providerId="ADAL" clId="{8D2D96CF-1319-4CCC-9EA9-073445628049}" dt="2026-03-16T16:46:03.814" v="1560" actId="478"/>
+          <ac:picMkLst>
+            <pc:docMk/>
+            <pc:sldMk cId="1692918807" sldId="2146848317"/>
+            <ac:picMk id="5" creationId="{3B859A28-2ACE-A4B7-DEC7-316954D7B566}"/>
+          </ac:picMkLst>
+        </pc:picChg>
+        <pc:picChg chg="add mod ord">
+          <ac:chgData name="Corbin Ferguson" userId="34a864e2-e65e-4cb2-823c-dc28f73f0e40" providerId="ADAL" clId="{8D2D96CF-1319-4CCC-9EA9-073445628049}" dt="2026-03-16T16:46:09.342" v="1562" actId="26606"/>
+          <ac:picMkLst>
+            <pc:docMk/>
+            <pc:sldMk cId="1692918807" sldId="2146848317"/>
+            <ac:picMk id="9" creationId="{A889D74E-A641-8FCA-9F55-93231CDB546D}"/>
+          </ac:picMkLst>
+        </pc:picChg>
+        <pc:picChg chg="del mod">
+          <ac:chgData name="Corbin Ferguson" userId="34a864e2-e65e-4cb2-823c-dc28f73f0e40" providerId="ADAL" clId="{8D2D96CF-1319-4CCC-9EA9-073445628049}" dt="2026-03-16T16:42:30.470" v="1553" actId="478"/>
+          <ac:picMkLst>
+            <pc:docMk/>
+            <pc:sldMk cId="1692918807" sldId="2146848317"/>
+            <ac:picMk id="8352" creationId="{80F05C8E-9631-A510-8677-5DD7385BC4AE}"/>
+          </ac:picMkLst>
+        </pc:picChg>
+        <pc:picChg chg="del">
+          <ac:chgData name="Corbin Ferguson" userId="34a864e2-e65e-4cb2-823c-dc28f73f0e40" providerId="ADAL" clId="{8D2D96CF-1319-4CCC-9EA9-073445628049}" dt="2026-03-16T16:15:22.910" v="1499" actId="478"/>
+          <ac:picMkLst>
+            <pc:docMk/>
+            <pc:sldMk cId="1692918807" sldId="2146848317"/>
+            <ac:picMk id="8354" creationId="{E90019A8-76BA-2ED0-32B4-272D74BDE709}"/>
+          </ac:picMkLst>
+        </pc:picChg>
+        <pc:picChg chg="del mod">
+          <ac:chgData name="Corbin Ferguson" userId="34a864e2-e65e-4cb2-823c-dc28f73f0e40" providerId="ADAL" clId="{8D2D96CF-1319-4CCC-9EA9-073445628049}" dt="2026-03-16T16:42:30.820" v="1554" actId="478"/>
+          <ac:picMkLst>
+            <pc:docMk/>
+            <pc:sldMk cId="1692918807" sldId="2146848317"/>
+            <ac:picMk id="8356" creationId="{D199DA8A-A808-1059-BF00-DD0A3C6CA781}"/>
+          </ac:picMkLst>
+        </pc:picChg>
+        <pc:picChg chg="del mod">
+          <ac:chgData name="Corbin Ferguson" userId="34a864e2-e65e-4cb2-823c-dc28f73f0e40" providerId="ADAL" clId="{8D2D96CF-1319-4CCC-9EA9-073445628049}" dt="2026-03-16T16:42:30.138" v="1552" actId="478"/>
+          <ac:picMkLst>
+            <pc:docMk/>
+            <pc:sldMk cId="1692918807" sldId="2146848317"/>
+            <ac:picMk id="10910" creationId="{5EB4AF2A-E1DF-5181-7810-0E4B05E08A25}"/>
+          </ac:picMkLst>
+        </pc:picChg>
+      </pc:sldChg>
+    </pc:docChg>
+  </pc:docChgLst>
+</pc:chgInfo>
 </file>
 
 <file path=ppt/charts/chart1.xml><?xml version="1.0" encoding="utf-8"?>
@@ -4156,6 +5271,27 @@
 </cs:chartStyle>
 </file>
 
+<file path=ppt/comments/modernComment_7FF64E2C_E0829901.xml><?xml version="1.0" encoding="utf-8"?>
+<p188:cmLst xmlns:a="http://schemas.openxmlformats.org/drawingml/2006/main" xmlns:r="http://schemas.openxmlformats.org/officeDocument/2006/relationships" xmlns:p188="http://schemas.microsoft.com/office/powerpoint/2018/8/main">
+  <p188:cm id="{556C706D-509E-4C8A-87BA-280BEA73EA40}" authorId="{C5CB79AA-8EBF-1E57-EC02-8B657B2EB377}" created="2026-03-16T15:13:51.405">
+    <pc:sldMkLst xmlns:pc="http://schemas.microsoft.com/office/powerpoint/2013/main/command">
+      <pc:docMk/>
+      <pc:sldMk cId="3766655233" sldId="2146848300"/>
+    </pc:sldMkLst>
+    <p188:txBody>
+      <a:bodyPr/>
+      <a:lstStyle/>
+      <a:p>
+        <a:r>
+          <a:rPr lang="en-US"/>
+          <a:t>If there continues to be failing tests, highlight why. Explain why the 1 test is skipped</a:t>
+        </a:r>
+      </a:p>
+    </p188:txBody>
+  </p188:cm>
+</p188:cmLst>
+</file>
+
 <file path=ppt/handoutMasters/handoutMaster1.xml><?xml version="1.0" encoding="utf-8"?>
 <p:handoutMaster xmlns:a="http://schemas.openxmlformats.org/drawingml/2006/main" xmlns:r="http://schemas.openxmlformats.org/officeDocument/2006/relationships" xmlns:p="http://schemas.openxmlformats.org/presentationml/2006/main">
   <p:cSld>
@@ -18241,7 +19377,7 @@
             </a:pPr>
             <a:r>
               <a:rPr lang="en-US" sz="1900" dirty="0"/>
-              <a:t>This is a subtitle which shall be written in maximum two lines! This is a subtitle which shall be written in maximum two lines! </a:t>
+              <a:t>Creating an alternative tool for generating L5X files for use in Rockwell Automation’s Studio 5000 Logix Designer</a:t>
             </a:r>
           </a:p>
         </p:txBody>
@@ -18322,6 +19458,514 @@
 </file>
 
 <file path=ppt/slides/slide10.xml><?xml version="1.0" encoding="utf-8"?>
+<p:sld xmlns:a="http://schemas.openxmlformats.org/drawingml/2006/main" xmlns:r="http://schemas.openxmlformats.org/officeDocument/2006/relationships" xmlns:p="http://schemas.openxmlformats.org/presentationml/2006/main">
+  <p:cSld>
+    <p:spTree>
+      <p:nvGrpSpPr>
+        <p:cNvPr id="1" name="">
+          <a:extLst>
+            <a:ext uri="{FF2B5EF4-FFF2-40B4-BE49-F238E27FC236}">
+              <a16:creationId xmlns:a16="http://schemas.microsoft.com/office/drawing/2014/main" id="{93938A11-EECC-9BC6-7865-435054160CD9}"/>
+            </a:ext>
+          </a:extLst>
+        </p:cNvPr>
+        <p:cNvGrpSpPr/>
+        <p:nvPr/>
+      </p:nvGrpSpPr>
+      <p:grpSpPr>
+        <a:xfrm>
+          <a:off x="0" y="0"/>
+          <a:ext cx="0" cy="0"/>
+          <a:chOff x="0" y="0"/>
+          <a:chExt cx="0" cy="0"/>
+        </a:xfrm>
+      </p:grpSpPr>
+      <p:sp>
+        <p:nvSpPr>
+          <p:cNvPr id="2" name="Title 1">
+            <a:extLst>
+              <a:ext uri="{FF2B5EF4-FFF2-40B4-BE49-F238E27FC236}">
+                <a16:creationId xmlns:a16="http://schemas.microsoft.com/office/drawing/2014/main" id="{2A18B76F-2AF4-F180-30B2-B28BCC59D004}"/>
+              </a:ext>
+            </a:extLst>
+          </p:cNvPr>
+          <p:cNvSpPr>
+            <a:spLocks noGrp="1"/>
+          </p:cNvSpPr>
+          <p:nvPr>
+            <p:ph type="title"/>
+          </p:nvPr>
+        </p:nvSpPr>
+        <p:spPr>
+          <a:xfrm>
+            <a:off x="334963" y="620690"/>
+            <a:ext cx="5903913" cy="360041"/>
+          </a:xfrm>
+        </p:spPr>
+        <p:txBody>
+          <a:bodyPr/>
+          <a:lstStyle/>
+          <a:p>
+            <a:r>
+              <a:rPr lang="en-US" dirty="0"/>
+              <a:t>New Elements Sequences Charts</a:t>
+            </a:r>
+          </a:p>
+        </p:txBody>
+      </p:sp>
+      <p:sp>
+        <p:nvSpPr>
+          <p:cNvPr id="4" name="Date Placeholder 3">
+            <a:extLst>
+              <a:ext uri="{FF2B5EF4-FFF2-40B4-BE49-F238E27FC236}">
+                <a16:creationId xmlns:a16="http://schemas.microsoft.com/office/drawing/2014/main" id="{9A01F89D-9B16-8125-D461-9AF251E3A9E1}"/>
+              </a:ext>
+            </a:extLst>
+          </p:cNvPr>
+          <p:cNvSpPr>
+            <a:spLocks noGrp="1"/>
+          </p:cNvSpPr>
+          <p:nvPr>
+            <p:ph type="dt" sz="half" idx="10"/>
+          </p:nvPr>
+        </p:nvSpPr>
+        <p:spPr/>
+        <p:txBody>
+          <a:bodyPr/>
+          <a:lstStyle/>
+          <a:p>
+            <a:r>
+              <a:rPr lang="en-US"/>
+              <a:t>L5X Automation Build Tool</a:t>
+            </a:r>
+            <a:endParaRPr lang="en-US" dirty="0"/>
+          </a:p>
+        </p:txBody>
+      </p:sp>
+      <p:sp>
+        <p:nvSpPr>
+          <p:cNvPr id="7" name="Slide Number Placeholder 6">
+            <a:extLst>
+              <a:ext uri="{FF2B5EF4-FFF2-40B4-BE49-F238E27FC236}">
+                <a16:creationId xmlns:a16="http://schemas.microsoft.com/office/drawing/2014/main" id="{0BAF9346-2F50-F0FB-C237-28D282CCCF63}"/>
+              </a:ext>
+            </a:extLst>
+          </p:cNvPr>
+          <p:cNvSpPr>
+            <a:spLocks noGrp="1"/>
+          </p:cNvSpPr>
+          <p:nvPr>
+            <p:ph type="sldNum" sz="quarter" idx="12"/>
+          </p:nvPr>
+        </p:nvSpPr>
+        <p:spPr/>
+        <p:txBody>
+          <a:bodyPr/>
+          <a:lstStyle/>
+          <a:p>
+            <a:r>
+              <a:rPr lang="en-US"/>
+              <a:t>Slide </a:t>
+            </a:r>
+            <a:fld id="{78C39363-BD0C-4CE6-8DE9-7D78215F2B9F}" type="slidenum">
+              <a:rPr lang="en-US" smtClean="0"/>
+              <a:t>10</a:t>
+            </a:fld>
+            <a:endParaRPr lang="en-US" dirty="0"/>
+          </a:p>
+        </p:txBody>
+      </p:sp>
+      <p:sp>
+        <p:nvSpPr>
+          <p:cNvPr id="8" name="Footer Placeholder 7">
+            <a:extLst>
+              <a:ext uri="{FF2B5EF4-FFF2-40B4-BE49-F238E27FC236}">
+                <a16:creationId xmlns:a16="http://schemas.microsoft.com/office/drawing/2014/main" id="{9EB94696-3F28-AFA0-7505-55910BF18FFA}"/>
+              </a:ext>
+            </a:extLst>
+          </p:cNvPr>
+          <p:cNvSpPr>
+            <a:spLocks noGrp="1"/>
+          </p:cNvSpPr>
+          <p:nvPr>
+            <p:ph type="ftr" sz="quarter" idx="11"/>
+          </p:nvPr>
+        </p:nvSpPr>
+        <p:spPr/>
+        <p:txBody>
+          <a:bodyPr/>
+          <a:lstStyle/>
+          <a:p>
+            <a:r>
+              <a:rPr lang="en-US"/>
+              <a:t>Corbin Ferguson</a:t>
+            </a:r>
+            <a:endParaRPr lang="en-US" dirty="0"/>
+          </a:p>
+        </p:txBody>
+      </p:sp>
+      <p:pic>
+        <p:nvPicPr>
+          <p:cNvPr id="3074" name="Picture 2">
+            <a:extLst>
+              <a:ext uri="{FF2B5EF4-FFF2-40B4-BE49-F238E27FC236}">
+                <a16:creationId xmlns:a16="http://schemas.microsoft.com/office/drawing/2014/main" id="{72CA8AB4-E276-87CC-8117-E47CD1C46076}"/>
+              </a:ext>
+            </a:extLst>
+          </p:cNvPr>
+          <p:cNvPicPr>
+            <a:picLocks noChangeAspect="1" noChangeArrowheads="1"/>
+          </p:cNvPicPr>
+          <p:nvPr/>
+        </p:nvPicPr>
+        <p:blipFill>
+          <a:blip r:embed="rId2" cstate="print">
+            <a:extLst>
+              <a:ext uri="{28A0092B-C50C-407E-A947-70E740481C1C}">
+                <a14:useLocalDpi xmlns:a14="http://schemas.microsoft.com/office/drawing/2010/main" val="0"/>
+              </a:ext>
+            </a:extLst>
+          </a:blip>
+          <a:srcRect/>
+          <a:stretch>
+            <a:fillRect/>
+          </a:stretch>
+        </p:blipFill>
+        <p:spPr bwMode="auto">
+          <a:xfrm>
+            <a:off x="6238876" y="89360"/>
+            <a:ext cx="5867400" cy="6116194"/>
+          </a:xfrm>
+          <a:prstGeom prst="rect">
+            <a:avLst/>
+          </a:prstGeom>
+          <a:noFill/>
+          <a:extLst>
+            <a:ext uri="{909E8E84-426E-40DD-AFC4-6F175D3DCCD1}">
+              <a14:hiddenFill xmlns:a14="http://schemas.microsoft.com/office/drawing/2010/main">
+                <a:solidFill>
+                  <a:srgbClr val="FFFFFF"/>
+                </a:solidFill>
+              </a14:hiddenFill>
+            </a:ext>
+          </a:extLst>
+        </p:spPr>
+      </p:pic>
+      <p:pic>
+        <p:nvPicPr>
+          <p:cNvPr id="3078" name="Picture 6">
+            <a:extLst>
+              <a:ext uri="{FF2B5EF4-FFF2-40B4-BE49-F238E27FC236}">
+                <a16:creationId xmlns:a16="http://schemas.microsoft.com/office/drawing/2014/main" id="{0AE53FD7-985C-4CAE-5485-DA0AC6FB44D1}"/>
+              </a:ext>
+            </a:extLst>
+          </p:cNvPr>
+          <p:cNvPicPr>
+            <a:picLocks noChangeAspect="1" noChangeArrowheads="1"/>
+          </p:cNvPicPr>
+          <p:nvPr/>
+        </p:nvPicPr>
+        <p:blipFill rotWithShape="1">
+          <a:blip r:embed="rId3" cstate="print">
+            <a:extLst>
+              <a:ext uri="{28A0092B-C50C-407E-A947-70E740481C1C}">
+                <a14:useLocalDpi xmlns:a14="http://schemas.microsoft.com/office/drawing/2010/main" val="0"/>
+              </a:ext>
+            </a:extLst>
+          </a:blip>
+          <a:srcRect r="7667"/>
+          <a:stretch>
+            <a:fillRect/>
+          </a:stretch>
+        </p:blipFill>
+        <p:spPr bwMode="auto">
+          <a:xfrm>
+            <a:off x="82103" y="1129116"/>
+            <a:ext cx="6156773" cy="4734269"/>
+          </a:xfrm>
+          <a:prstGeom prst="rect">
+            <a:avLst/>
+          </a:prstGeom>
+          <a:noFill/>
+          <a:extLst>
+            <a:ext uri="{909E8E84-426E-40DD-AFC4-6F175D3DCCD1}">
+              <a14:hiddenFill xmlns:a14="http://schemas.microsoft.com/office/drawing/2010/main">
+                <a:solidFill>
+                  <a:srgbClr val="FFFFFF"/>
+                </a:solidFill>
+              </a14:hiddenFill>
+            </a:ext>
+          </a:extLst>
+        </p:spPr>
+      </p:pic>
+    </p:spTree>
+    <p:extLst>
+      <p:ext uri="{BB962C8B-B14F-4D97-AF65-F5344CB8AC3E}">
+        <p14:creationId xmlns:p14="http://schemas.microsoft.com/office/powerpoint/2010/main" val="1350697150"/>
+      </p:ext>
+    </p:extLst>
+  </p:cSld>
+  <p:clrMapOvr>
+    <a:masterClrMapping/>
+  </p:clrMapOvr>
+</p:sld>
+</file>
+
+<file path=ppt/slides/slide11.xml><?xml version="1.0" encoding="utf-8"?>
+<p:sld xmlns:a="http://schemas.openxmlformats.org/drawingml/2006/main" xmlns:r="http://schemas.openxmlformats.org/officeDocument/2006/relationships" xmlns:p="http://schemas.openxmlformats.org/presentationml/2006/main">
+  <p:cSld>
+    <p:spTree>
+      <p:nvGrpSpPr>
+        <p:cNvPr id="1" name="">
+          <a:extLst>
+            <a:ext uri="{FF2B5EF4-FFF2-40B4-BE49-F238E27FC236}">
+              <a16:creationId xmlns:a16="http://schemas.microsoft.com/office/drawing/2014/main" id="{EF9DF529-63FE-ADF8-53ED-6BE7FB507424}"/>
+            </a:ext>
+          </a:extLst>
+        </p:cNvPr>
+        <p:cNvGrpSpPr/>
+        <p:nvPr/>
+      </p:nvGrpSpPr>
+      <p:grpSpPr>
+        <a:xfrm>
+          <a:off x="0" y="0"/>
+          <a:ext cx="0" cy="0"/>
+          <a:chOff x="0" y="0"/>
+          <a:chExt cx="0" cy="0"/>
+        </a:xfrm>
+      </p:grpSpPr>
+      <p:sp>
+        <p:nvSpPr>
+          <p:cNvPr id="2" name="Title 1">
+            <a:extLst>
+              <a:ext uri="{FF2B5EF4-FFF2-40B4-BE49-F238E27FC236}">
+                <a16:creationId xmlns:a16="http://schemas.microsoft.com/office/drawing/2014/main" id="{1BEC76E2-5D10-E119-28DF-87EA10623968}"/>
+              </a:ext>
+            </a:extLst>
+          </p:cNvPr>
+          <p:cNvSpPr>
+            <a:spLocks noGrp="1"/>
+          </p:cNvSpPr>
+          <p:nvPr>
+            <p:ph type="title"/>
+          </p:nvPr>
+        </p:nvSpPr>
+        <p:spPr>
+          <a:xfrm>
+            <a:off x="334963" y="620690"/>
+            <a:ext cx="7018337" cy="360041"/>
+          </a:xfrm>
+        </p:spPr>
+        <p:txBody>
+          <a:bodyPr/>
+          <a:lstStyle/>
+          <a:p>
+            <a:r>
+              <a:rPr lang="en-US" dirty="0"/>
+              <a:t>Element Editing Sequences Charts</a:t>
+            </a:r>
+          </a:p>
+        </p:txBody>
+      </p:sp>
+      <p:sp>
+        <p:nvSpPr>
+          <p:cNvPr id="4" name="Date Placeholder 3">
+            <a:extLst>
+              <a:ext uri="{FF2B5EF4-FFF2-40B4-BE49-F238E27FC236}">
+                <a16:creationId xmlns:a16="http://schemas.microsoft.com/office/drawing/2014/main" id="{4AB04ED2-D7AC-3763-1039-630C099F3A4C}"/>
+              </a:ext>
+            </a:extLst>
+          </p:cNvPr>
+          <p:cNvSpPr>
+            <a:spLocks noGrp="1"/>
+          </p:cNvSpPr>
+          <p:nvPr>
+            <p:ph type="dt" sz="half" idx="10"/>
+          </p:nvPr>
+        </p:nvSpPr>
+        <p:spPr/>
+        <p:txBody>
+          <a:bodyPr/>
+          <a:lstStyle/>
+          <a:p>
+            <a:r>
+              <a:rPr lang="en-US"/>
+              <a:t>L5X Automation Build Tool</a:t>
+            </a:r>
+            <a:endParaRPr lang="en-US" dirty="0"/>
+          </a:p>
+        </p:txBody>
+      </p:sp>
+      <p:sp>
+        <p:nvSpPr>
+          <p:cNvPr id="7" name="Slide Number Placeholder 6">
+            <a:extLst>
+              <a:ext uri="{FF2B5EF4-FFF2-40B4-BE49-F238E27FC236}">
+                <a16:creationId xmlns:a16="http://schemas.microsoft.com/office/drawing/2014/main" id="{FA5C2B7C-90AB-FD77-3161-D3654154603E}"/>
+              </a:ext>
+            </a:extLst>
+          </p:cNvPr>
+          <p:cNvSpPr>
+            <a:spLocks noGrp="1"/>
+          </p:cNvSpPr>
+          <p:nvPr>
+            <p:ph type="sldNum" sz="quarter" idx="12"/>
+          </p:nvPr>
+        </p:nvSpPr>
+        <p:spPr/>
+        <p:txBody>
+          <a:bodyPr/>
+          <a:lstStyle/>
+          <a:p>
+            <a:r>
+              <a:rPr lang="en-US"/>
+              <a:t>Slide </a:t>
+            </a:r>
+            <a:fld id="{599786A8-973E-49A8-9C43-0BE71F98A081}" type="slidenum">
+              <a:rPr lang="en-US" smtClean="0"/>
+              <a:t>11</a:t>
+            </a:fld>
+            <a:endParaRPr lang="en-US" dirty="0"/>
+          </a:p>
+        </p:txBody>
+      </p:sp>
+      <p:sp>
+        <p:nvSpPr>
+          <p:cNvPr id="8" name="Footer Placeholder 7">
+            <a:extLst>
+              <a:ext uri="{FF2B5EF4-FFF2-40B4-BE49-F238E27FC236}">
+                <a16:creationId xmlns:a16="http://schemas.microsoft.com/office/drawing/2014/main" id="{C2F6AD5B-E994-0A83-78C8-94E2F6F39074}"/>
+              </a:ext>
+            </a:extLst>
+          </p:cNvPr>
+          <p:cNvSpPr>
+            <a:spLocks noGrp="1"/>
+          </p:cNvSpPr>
+          <p:nvPr>
+            <p:ph type="ftr" sz="quarter" idx="11"/>
+          </p:nvPr>
+        </p:nvSpPr>
+        <p:spPr/>
+        <p:txBody>
+          <a:bodyPr/>
+          <a:lstStyle/>
+          <a:p>
+            <a:r>
+              <a:rPr lang="en-US"/>
+              <a:t>Corbin Ferguson</a:t>
+            </a:r>
+            <a:endParaRPr lang="en-US" dirty="0"/>
+          </a:p>
+        </p:txBody>
+      </p:sp>
+      <p:pic>
+        <p:nvPicPr>
+          <p:cNvPr id="4100" name="Picture 4">
+            <a:extLst>
+              <a:ext uri="{FF2B5EF4-FFF2-40B4-BE49-F238E27FC236}">
+                <a16:creationId xmlns:a16="http://schemas.microsoft.com/office/drawing/2014/main" id="{BB53261F-4A38-01BF-14A0-AC05F4918629}"/>
+              </a:ext>
+            </a:extLst>
+          </p:cNvPr>
+          <p:cNvPicPr>
+            <a:picLocks noChangeAspect="1" noChangeArrowheads="1"/>
+          </p:cNvPicPr>
+          <p:nvPr/>
+        </p:nvPicPr>
+        <p:blipFill>
+          <a:blip r:embed="rId2" cstate="print">
+            <a:extLst>
+              <a:ext uri="{28A0092B-C50C-407E-A947-70E740481C1C}">
+                <a14:useLocalDpi xmlns:a14="http://schemas.microsoft.com/office/drawing/2010/main" val="0"/>
+              </a:ext>
+            </a:extLst>
+          </a:blip>
+          <a:srcRect/>
+          <a:stretch>
+            <a:fillRect/>
+          </a:stretch>
+        </p:blipFill>
+        <p:spPr bwMode="auto">
+          <a:xfrm>
+            <a:off x="5660591" y="194736"/>
+            <a:ext cx="6482994" cy="5720289"/>
+          </a:xfrm>
+          <a:prstGeom prst="rect">
+            <a:avLst/>
+          </a:prstGeom>
+          <a:noFill/>
+          <a:extLst>
+            <a:ext uri="{909E8E84-426E-40DD-AFC4-6F175D3DCCD1}">
+              <a14:hiddenFill xmlns:a14="http://schemas.microsoft.com/office/drawing/2010/main">
+                <a:solidFill>
+                  <a:srgbClr val="FFFFFF"/>
+                </a:solidFill>
+              </a14:hiddenFill>
+            </a:ext>
+          </a:extLst>
+        </p:spPr>
+      </p:pic>
+      <p:pic>
+        <p:nvPicPr>
+          <p:cNvPr id="4102" name="Picture 6">
+            <a:extLst>
+              <a:ext uri="{FF2B5EF4-FFF2-40B4-BE49-F238E27FC236}">
+                <a16:creationId xmlns:a16="http://schemas.microsoft.com/office/drawing/2014/main" id="{1369CFC5-7E6D-03BD-C62A-74FBF0D2D610}"/>
+              </a:ext>
+            </a:extLst>
+          </p:cNvPr>
+          <p:cNvPicPr>
+            <a:picLocks noChangeAspect="1" noChangeArrowheads="1"/>
+          </p:cNvPicPr>
+          <p:nvPr/>
+        </p:nvPicPr>
+        <p:blipFill>
+          <a:blip r:embed="rId3" cstate="print">
+            <a:extLst>
+              <a:ext uri="{28A0092B-C50C-407E-A947-70E740481C1C}">
+                <a14:useLocalDpi xmlns:a14="http://schemas.microsoft.com/office/drawing/2010/main" val="0"/>
+              </a:ext>
+            </a:extLst>
+          </a:blip>
+          <a:srcRect/>
+          <a:stretch>
+            <a:fillRect/>
+          </a:stretch>
+        </p:blipFill>
+        <p:spPr bwMode="auto">
+          <a:xfrm>
+            <a:off x="48416" y="1482391"/>
+            <a:ext cx="5677702" cy="3727784"/>
+          </a:xfrm>
+          <a:prstGeom prst="rect">
+            <a:avLst/>
+          </a:prstGeom>
+          <a:noFill/>
+          <a:extLst>
+            <a:ext uri="{909E8E84-426E-40DD-AFC4-6F175D3DCCD1}">
+              <a14:hiddenFill xmlns:a14="http://schemas.microsoft.com/office/drawing/2010/main">
+                <a:solidFill>
+                  <a:srgbClr val="FFFFFF"/>
+                </a:solidFill>
+              </a14:hiddenFill>
+            </a:ext>
+          </a:extLst>
+        </p:spPr>
+      </p:pic>
+    </p:spTree>
+    <p:extLst>
+      <p:ext uri="{BB962C8B-B14F-4D97-AF65-F5344CB8AC3E}">
+        <p14:creationId xmlns:p14="http://schemas.microsoft.com/office/powerpoint/2010/main" val="3038692604"/>
+      </p:ext>
+    </p:extLst>
+  </p:cSld>
+  <p:clrMapOvr>
+    <a:masterClrMapping/>
+  </p:clrMapOvr>
+</p:sld>
+</file>
+
+<file path=ppt/slides/slide12.xml><?xml version="1.0" encoding="utf-8"?>
 <p:sld xmlns:a="http://schemas.openxmlformats.org/drawingml/2006/main" xmlns:r="http://schemas.openxmlformats.org/officeDocument/2006/relationships" xmlns:p="http://schemas.openxmlformats.org/presentationml/2006/main">
   <p:cSld>
     <p:spTree>
@@ -18433,7 +20077,7 @@
             </a:r>
             <a:fld id="{DEE51C30-41E2-4709-97ED-40F16AE6C836}" type="slidenum">
               <a:rPr lang="en-US" smtClean="0"/>
-              <a:t>10</a:t>
+              <a:t>12</a:t>
             </a:fld>
             <a:endParaRPr lang="en-US" dirty="0"/>
           </a:p>
@@ -18669,7 +20313,7 @@
 </p:sld>
 </file>
 
-<file path=ppt/slides/slide11.xml><?xml version="1.0" encoding="utf-8"?>
+<file path=ppt/slides/slide13.xml><?xml version="1.0" encoding="utf-8"?>
 <p:sld xmlns:a="http://schemas.openxmlformats.org/drawingml/2006/main" xmlns:r="http://schemas.openxmlformats.org/officeDocument/2006/relationships" xmlns:p="http://schemas.openxmlformats.org/presentationml/2006/main">
   <p:cSld>
     <p:spTree>
@@ -18694,6 +20338,96 @@
       </p:grpSpPr>
       <p:sp>
         <p:nvSpPr>
+          <p:cNvPr id="8" name="Footer Placeholder 7">
+            <a:extLst>
+              <a:ext uri="{FF2B5EF4-FFF2-40B4-BE49-F238E27FC236}">
+                <a16:creationId xmlns:a16="http://schemas.microsoft.com/office/drawing/2014/main" id="{0399E63B-65A1-3030-DC23-CA1AF7150CCF}"/>
+              </a:ext>
+            </a:extLst>
+          </p:cNvPr>
+          <p:cNvSpPr>
+            <a:spLocks noGrp="1"/>
+          </p:cNvSpPr>
+          <p:nvPr>
+            <p:ph type="ftr" sz="quarter" idx="19"/>
+          </p:nvPr>
+        </p:nvSpPr>
+        <p:spPr/>
+        <p:txBody>
+          <a:bodyPr/>
+          <a:lstStyle/>
+          <a:p>
+            <a:r>
+              <a:rPr lang="en-US"/>
+              <a:t>Corbin Ferguson</a:t>
+            </a:r>
+            <a:endParaRPr lang="en-US" dirty="0"/>
+          </a:p>
+        </p:txBody>
+      </p:sp>
+      <p:sp>
+        <p:nvSpPr>
+          <p:cNvPr id="7" name="Slide Number Placeholder 6">
+            <a:extLst>
+              <a:ext uri="{FF2B5EF4-FFF2-40B4-BE49-F238E27FC236}">
+                <a16:creationId xmlns:a16="http://schemas.microsoft.com/office/drawing/2014/main" id="{F24A93D2-C404-5313-F354-72800B3D775A}"/>
+              </a:ext>
+            </a:extLst>
+          </p:cNvPr>
+          <p:cNvSpPr>
+            <a:spLocks noGrp="1"/>
+          </p:cNvSpPr>
+          <p:nvPr>
+            <p:ph type="sldNum" sz="quarter" idx="20"/>
+          </p:nvPr>
+        </p:nvSpPr>
+        <p:spPr/>
+        <p:txBody>
+          <a:bodyPr/>
+          <a:lstStyle/>
+          <a:p>
+            <a:r>
+              <a:rPr lang="en-US"/>
+              <a:t>Slide </a:t>
+            </a:r>
+            <a:fld id="{32B897BE-5B46-4D7A-8E5C-716C3CDA6A39}" type="slidenum">
+              <a:rPr lang="en-US" smtClean="0"/>
+              <a:t>13</a:t>
+            </a:fld>
+            <a:endParaRPr lang="en-US" dirty="0"/>
+          </a:p>
+        </p:txBody>
+      </p:sp>
+      <p:sp>
+        <p:nvSpPr>
+          <p:cNvPr id="3" name="Subtitle 2">
+            <a:extLst>
+              <a:ext uri="{FF2B5EF4-FFF2-40B4-BE49-F238E27FC236}">
+                <a16:creationId xmlns:a16="http://schemas.microsoft.com/office/drawing/2014/main" id="{63F6E7F2-C333-13E7-6A23-E317DC8149B0}"/>
+              </a:ext>
+            </a:extLst>
+          </p:cNvPr>
+          <p:cNvSpPr>
+            <a:spLocks noGrp="1"/>
+          </p:cNvSpPr>
+          <p:nvPr>
+            <p:ph type="subTitle" idx="1"/>
+          </p:nvPr>
+        </p:nvSpPr>
+        <p:spPr/>
+        <p:txBody>
+          <a:bodyPr/>
+          <a:lstStyle/>
+          <a:p>
+            <a:r>
+              <a:rPr lang="en-US" dirty="0"/>
+              <a:t>Live Demo!</a:t>
+            </a:r>
+          </a:p>
+        </p:txBody>
+      </p:sp>
+      <p:sp>
+        <p:nvSpPr>
           <p:cNvPr id="2" name="Title 1">
             <a:extLst>
               <a:ext uri="{FF2B5EF4-FFF2-40B4-BE49-F238E27FC236}">
@@ -18705,13 +20439,13 @@
             <a:spLocks noGrp="1"/>
           </p:cNvSpPr>
           <p:nvPr>
-            <p:ph type="title"/>
+            <p:ph type="title" idx="4294967295"/>
           </p:nvPr>
         </p:nvSpPr>
         <p:spPr>
           <a:xfrm>
-            <a:off x="334963" y="620690"/>
-            <a:ext cx="5227637" cy="360041"/>
+            <a:off x="0" y="620713"/>
+            <a:ext cx="5227638" cy="360362"/>
           </a:xfrm>
         </p:spPr>
         <p:txBody>
@@ -18738,10 +20472,15 @@
             <a:spLocks noGrp="1"/>
           </p:cNvSpPr>
           <p:nvPr>
-            <p:ph type="dt" sz="half" idx="10"/>
-          </p:nvPr>
-        </p:nvSpPr>
-        <p:spPr/>
+            <p:ph type="dt" sz="half" idx="4294967295"/>
+          </p:nvPr>
+        </p:nvSpPr>
+        <p:spPr>
+          <a:xfrm>
+            <a:off x="0" y="195263"/>
+            <a:ext cx="9674225" cy="179387"/>
+          </a:xfrm>
+        </p:spPr>
         <p:txBody>
           <a:bodyPr/>
           <a:lstStyle/>
@@ -18749,68 +20488,6 @@
             <a:r>
               <a:rPr lang="en-US"/>
               <a:t>L5X Automation Build Tool</a:t>
-            </a:r>
-            <a:endParaRPr lang="en-US" dirty="0"/>
-          </a:p>
-        </p:txBody>
-      </p:sp>
-      <p:sp>
-        <p:nvSpPr>
-          <p:cNvPr id="7" name="Slide Number Placeholder 6">
-            <a:extLst>
-              <a:ext uri="{FF2B5EF4-FFF2-40B4-BE49-F238E27FC236}">
-                <a16:creationId xmlns:a16="http://schemas.microsoft.com/office/drawing/2014/main" id="{F24A93D2-C404-5313-F354-72800B3D775A}"/>
-              </a:ext>
-            </a:extLst>
-          </p:cNvPr>
-          <p:cNvSpPr>
-            <a:spLocks noGrp="1"/>
-          </p:cNvSpPr>
-          <p:nvPr>
-            <p:ph type="sldNum" sz="quarter" idx="12"/>
-          </p:nvPr>
-        </p:nvSpPr>
-        <p:spPr/>
-        <p:txBody>
-          <a:bodyPr/>
-          <a:lstStyle/>
-          <a:p>
-            <a:r>
-              <a:rPr lang="en-US"/>
-              <a:t>Slide </a:t>
-            </a:r>
-            <a:fld id="{32B897BE-5B46-4D7A-8E5C-716C3CDA6A39}" type="slidenum">
-              <a:rPr lang="en-US" smtClean="0"/>
-              <a:t>11</a:t>
-            </a:fld>
-            <a:endParaRPr lang="en-US" dirty="0"/>
-          </a:p>
-        </p:txBody>
-      </p:sp>
-      <p:sp>
-        <p:nvSpPr>
-          <p:cNvPr id="8" name="Footer Placeholder 7">
-            <a:extLst>
-              <a:ext uri="{FF2B5EF4-FFF2-40B4-BE49-F238E27FC236}">
-                <a16:creationId xmlns:a16="http://schemas.microsoft.com/office/drawing/2014/main" id="{0399E63B-65A1-3030-DC23-CA1AF7150CCF}"/>
-              </a:ext>
-            </a:extLst>
-          </p:cNvPr>
-          <p:cNvSpPr>
-            <a:spLocks noGrp="1"/>
-          </p:cNvSpPr>
-          <p:nvPr>
-            <p:ph type="ftr" sz="quarter" idx="11"/>
-          </p:nvPr>
-        </p:nvSpPr>
-        <p:spPr/>
-        <p:txBody>
-          <a:bodyPr/>
-          <a:lstStyle/>
-          <a:p>
-            <a:r>
-              <a:rPr lang="en-US"/>
-              <a:t>Corbin Ferguson</a:t>
             </a:r>
             <a:endParaRPr lang="en-US" dirty="0"/>
           </a:p>
@@ -18829,7 +20506,7 @@
 </p:sld>
 </file>
 
-<file path=ppt/slides/slide12.xml><?xml version="1.0" encoding="utf-8"?>
+<file path=ppt/slides/slide14.xml><?xml version="1.0" encoding="utf-8"?>
 <p:sld xmlns:a="http://schemas.openxmlformats.org/drawingml/2006/main" xmlns:r="http://schemas.openxmlformats.org/officeDocument/2006/relationships" xmlns:p="http://schemas.openxmlformats.org/presentationml/2006/main">
   <p:cSld>
     <p:spTree>
@@ -18911,7 +20588,15 @@
             </a:pPr>
             <a:r>
               <a:rPr lang="en-US" dirty="0"/>
-              <a:t>The test suite is split into 3 different namespaces:</a:t>
+              <a:t>The tests are written in C# utilizing </a:t>
+            </a:r>
+            <a:r>
+              <a:rPr lang="en-US" dirty="0" err="1"/>
+              <a:t>MSTest</a:t>
+            </a:r>
+            <a:r>
+              <a:rPr lang="en-US" dirty="0"/>
+              <a:t>, and are split into 3 different namespaces:</a:t>
             </a:r>
           </a:p>
           <a:p>
@@ -19059,7 +20744,7 @@
             </a:r>
             <a:fld id="{5BFF8BEA-C7AD-416A-8E1B-AC59D078A379}" type="slidenum">
               <a:rPr lang="en-US" smtClean="0"/>
-              <a:t>12</a:t>
+              <a:t>14</a:t>
             </a:fld>
             <a:endParaRPr lang="en-US" dirty="0"/>
           </a:p>
@@ -19107,7 +20792,7 @@
 </p:sld>
 </file>
 
-<file path=ppt/slides/slide13.xml><?xml version="1.0" encoding="utf-8"?>
+<file path=ppt/slides/slide15.xml><?xml version="1.0" encoding="utf-8"?>
 <p:sld xmlns:a="http://schemas.openxmlformats.org/drawingml/2006/main" xmlns:r="http://schemas.openxmlformats.org/officeDocument/2006/relationships" xmlns:p="http://schemas.openxmlformats.org/presentationml/2006/main">
   <p:cSld>
     <p:spTree>
@@ -19177,7 +20862,7 @@
           <a:p>
             <a:r>
               <a:rPr lang="en-US" dirty="0"/>
-              <a:t>Final Test Results</a:t>
+              <a:t>Test Results</a:t>
             </a:r>
           </a:p>
         </p:txBody>
@@ -19238,7 +20923,7 @@
             </a:r>
             <a:fld id="{358A1964-41C6-43E7-8879-EF27F633EDD1}" type="slidenum">
               <a:rPr lang="en-US" smtClean="0"/>
-              <a:t>13</a:t>
+              <a:t>15</a:t>
             </a:fld>
             <a:endParaRPr lang="en-US" dirty="0"/>
           </a:p>
@@ -19299,7 +20984,7 @@
         </p:xfrm>
         <a:graphic>
           <a:graphicData uri="http://schemas.openxmlformats.org/drawingml/2006/chart">
-            <c:chart xmlns:c="http://schemas.openxmlformats.org/drawingml/2006/chart" xmlns:r="http://schemas.openxmlformats.org/officeDocument/2006/relationships" r:id="rId2"/>
+            <c:chart xmlns:c="http://schemas.openxmlformats.org/drawingml/2006/chart" xmlns:r="http://schemas.openxmlformats.org/officeDocument/2006/relationships" r:id="rId3"/>
           </a:graphicData>
         </a:graphic>
       </p:graphicFrame>
@@ -19329,7 +21014,7 @@
         </p:xfrm>
         <a:graphic>
           <a:graphicData uri="http://schemas.openxmlformats.org/drawingml/2006/chart">
-            <c:chart xmlns:c="http://schemas.openxmlformats.org/drawingml/2006/chart" xmlns:r="http://schemas.openxmlformats.org/officeDocument/2006/relationships" r:id="rId3"/>
+            <c:chart xmlns:c="http://schemas.openxmlformats.org/drawingml/2006/chart" xmlns:r="http://schemas.openxmlformats.org/officeDocument/2006/relationships" r:id="rId4"/>
           </a:graphicData>
         </a:graphic>
       </p:graphicFrame>
@@ -19359,7 +21044,7 @@
         </p:xfrm>
         <a:graphic>
           <a:graphicData uri="http://schemas.openxmlformats.org/drawingml/2006/chart">
-            <c:chart xmlns:c="http://schemas.openxmlformats.org/drawingml/2006/chart" xmlns:r="http://schemas.openxmlformats.org/officeDocument/2006/relationships" r:id="rId4"/>
+            <c:chart xmlns:c="http://schemas.openxmlformats.org/drawingml/2006/chart" xmlns:r="http://schemas.openxmlformats.org/officeDocument/2006/relationships" r:id="rId5"/>
           </a:graphicData>
         </a:graphic>
       </p:graphicFrame>
@@ -19389,7 +21074,7 @@
         </p:xfrm>
         <a:graphic>
           <a:graphicData uri="http://schemas.openxmlformats.org/drawingml/2006/chart">
-            <c:chart xmlns:c="http://schemas.openxmlformats.org/drawingml/2006/chart" xmlns:r="http://schemas.openxmlformats.org/officeDocument/2006/relationships" r:id="rId5"/>
+            <c:chart xmlns:c="http://schemas.openxmlformats.org/drawingml/2006/chart" xmlns:r="http://schemas.openxmlformats.org/officeDocument/2006/relationships" r:id="rId6"/>
           </a:graphicData>
         </a:graphic>
       </p:graphicFrame>
@@ -19403,10 +21088,15 @@
   <p:clrMapOvr>
     <a:masterClrMapping/>
   </p:clrMapOvr>
+  <p:extLst>
+    <p:ext uri="{6950BFC3-D8DA-4A85-94F7-54DA5524770B}">
+      <p188:commentRel xmlns:p188="http://schemas.microsoft.com/office/powerpoint/2018/8/main" r:id="rId2"/>
+    </p:ext>
+  </p:extLst>
 </p:sld>
 </file>
 
-<file path=ppt/slides/slide14.xml><?xml version="1.0" encoding="utf-8"?>
+<file path=ppt/slides/slide16.xml><?xml version="1.0" encoding="utf-8"?>
 <p:sld xmlns:a="http://schemas.openxmlformats.org/drawingml/2006/main" xmlns:r="http://schemas.openxmlformats.org/officeDocument/2006/relationships" xmlns:p="http://schemas.openxmlformats.org/presentationml/2006/main">
   <p:cSld>
     <p:spTree>
@@ -19460,7 +21150,7 @@
             </a:pPr>
             <a:r>
               <a:rPr lang="en-US" sz="2200" dirty="0"/>
-              <a:t>Integrate documentation work throughout development, rather than separately</a:t>
+              <a:t>Segment out and abstract classes from the start, interfaces were very helpful</a:t>
             </a:r>
           </a:p>
           <a:p>
@@ -19480,7 +21170,7 @@
             </a:pPr>
             <a:r>
               <a:rPr lang="en-US" sz="2200" dirty="0"/>
-              <a:t>Segment out and abstract classes, interfaces are very helpful</a:t>
+              <a:t>Integrate documentation work throughout development, rather than separately</a:t>
             </a:r>
           </a:p>
           <a:p>
@@ -19500,7 +21190,7 @@
             </a:pPr>
             <a:r>
               <a:rPr lang="en-US" sz="2200" dirty="0"/>
-              <a:t>Keep a constant line of communication open with the client(Matt)</a:t>
+              <a:t>Keep a constant line of communication open with the client(Matt) for better workflow in system design</a:t>
             </a:r>
           </a:p>
         </p:txBody>
@@ -19590,7 +21280,7 @@
             </a:r>
             <a:fld id="{B7F1FE61-F696-4BC2-948F-7278C8C6DBB9}" type="slidenum">
               <a:rPr lang="en-US" smtClean="0"/>
-              <a:t>14</a:t>
+              <a:t>16</a:t>
             </a:fld>
             <a:endParaRPr lang="en-US" dirty="0"/>
           </a:p>
@@ -19637,7 +21327,234 @@
 </p:sld>
 </file>
 
-<file path=ppt/slides/slide15.xml><?xml version="1.0" encoding="utf-8"?>
+<file path=ppt/slides/slide17.xml><?xml version="1.0" encoding="utf-8"?>
+<p:sld xmlns:a="http://schemas.openxmlformats.org/drawingml/2006/main" xmlns:r="http://schemas.openxmlformats.org/officeDocument/2006/relationships" xmlns:p="http://schemas.openxmlformats.org/presentationml/2006/main">
+  <p:cSld>
+    <p:spTree>
+      <p:nvGrpSpPr>
+        <p:cNvPr id="1" name="">
+          <a:extLst>
+            <a:ext uri="{FF2B5EF4-FFF2-40B4-BE49-F238E27FC236}">
+              <a16:creationId xmlns:a16="http://schemas.microsoft.com/office/drawing/2014/main" id="{B2FF2CB5-4411-5F8F-ECAD-B9723833255F}"/>
+            </a:ext>
+          </a:extLst>
+        </p:cNvPr>
+        <p:cNvGrpSpPr/>
+        <p:nvPr/>
+      </p:nvGrpSpPr>
+      <p:grpSpPr>
+        <a:xfrm>
+          <a:off x="0" y="0"/>
+          <a:ext cx="0" cy="0"/>
+          <a:chOff x="0" y="0"/>
+          <a:chExt cx="0" cy="0"/>
+        </a:xfrm>
+      </p:grpSpPr>
+      <p:sp>
+        <p:nvSpPr>
+          <p:cNvPr id="9" name="Text Placeholder 8">
+            <a:extLst>
+              <a:ext uri="{FF2B5EF4-FFF2-40B4-BE49-F238E27FC236}">
+                <a16:creationId xmlns:a16="http://schemas.microsoft.com/office/drawing/2014/main" id="{10547ECE-F4D6-7E7B-B957-03EBA9BFAC16}"/>
+              </a:ext>
+            </a:extLst>
+          </p:cNvPr>
+          <p:cNvSpPr>
+            <a:spLocks noGrp="1"/>
+          </p:cNvSpPr>
+          <p:nvPr>
+            <p:ph type="body" sz="quarter" idx="13"/>
+          </p:nvPr>
+        </p:nvSpPr>
+        <p:spPr/>
+        <p:txBody>
+          <a:bodyPr/>
+          <a:lstStyle/>
+          <a:p>
+            <a:pPr marL="342900" indent="-342900">
+              <a:buFont typeface="Arial" panose="020B0604020202020204" pitchFamily="34" charset="0"/>
+              <a:buChar char="•"/>
+            </a:pPr>
+            <a:r>
+              <a:rPr lang="en-US" dirty="0"/>
+              <a:t>Gained substantial experience in software design principles, test‑driven development practices, UML modeling, and project management techniques for single‑developer projects.</a:t>
+            </a:r>
+          </a:p>
+          <a:p>
+            <a:pPr marL="342900" indent="-342900">
+              <a:buFont typeface="Arial" panose="020B0604020202020204" pitchFamily="34" charset="0"/>
+              <a:buChar char="•"/>
+            </a:pPr>
+            <a:r>
+              <a:rPr lang="en-US" dirty="0"/>
+              <a:t>Application state OK but not shippable</a:t>
+            </a:r>
+          </a:p>
+          <a:p>
+            <a:pPr marL="342900" indent="-342900">
+              <a:buFont typeface="Arial" panose="020B0604020202020204" pitchFamily="34" charset="0"/>
+              <a:buChar char="•"/>
+            </a:pPr>
+            <a:r>
+              <a:rPr lang="en-US" dirty="0"/>
+              <a:t>Significant additional input and item‑level validation is required to ensure data integrity and make the tool viable for real‑world deployment.</a:t>
+            </a:r>
+          </a:p>
+          <a:p>
+            <a:pPr marL="703263" lvl="1" indent="-342900">
+              <a:buFont typeface="Arial" panose="020B0604020202020204" pitchFamily="34" charset="0"/>
+              <a:buChar char="•"/>
+            </a:pPr>
+            <a:r>
+              <a:rPr lang="en-US" sz="2000" dirty="0"/>
+              <a:t>Still requires extensive manual corrections outside of the defined XML schema, reducing reliability and increasing error risk.</a:t>
+            </a:r>
+          </a:p>
+          <a:p>
+            <a:pPr marL="703263" lvl="1" indent="-342900">
+              <a:buFont typeface="Arial" panose="020B0604020202020204" pitchFamily="34" charset="0"/>
+              <a:buChar char="•"/>
+            </a:pPr>
+            <a:r>
+              <a:rPr lang="en-US" sz="2000" dirty="0"/>
+              <a:t>Not all dependencies function like normal XML dependencies but are unique to L5X, meaning they cannot be included in the schema</a:t>
+            </a:r>
+          </a:p>
+        </p:txBody>
+      </p:sp>
+      <p:sp>
+        <p:nvSpPr>
+          <p:cNvPr id="3" name="Date Placeholder 2">
+            <a:extLst>
+              <a:ext uri="{FF2B5EF4-FFF2-40B4-BE49-F238E27FC236}">
+                <a16:creationId xmlns:a16="http://schemas.microsoft.com/office/drawing/2014/main" id="{E4CEC92F-70B2-5955-59BA-71F8FCCF7607}"/>
+              </a:ext>
+            </a:extLst>
+          </p:cNvPr>
+          <p:cNvSpPr>
+            <a:spLocks noGrp="1"/>
+          </p:cNvSpPr>
+          <p:nvPr>
+            <p:ph type="dt" sz="half" idx="14"/>
+          </p:nvPr>
+        </p:nvSpPr>
+        <p:spPr/>
+        <p:txBody>
+          <a:bodyPr/>
+          <a:lstStyle/>
+          <a:p>
+            <a:r>
+              <a:rPr lang="en-US"/>
+              <a:t>L5X Automation Build Tool</a:t>
+            </a:r>
+            <a:endParaRPr lang="en-US" dirty="0"/>
+          </a:p>
+        </p:txBody>
+      </p:sp>
+      <p:sp>
+        <p:nvSpPr>
+          <p:cNvPr id="4" name="Footer Placeholder 3">
+            <a:extLst>
+              <a:ext uri="{FF2B5EF4-FFF2-40B4-BE49-F238E27FC236}">
+                <a16:creationId xmlns:a16="http://schemas.microsoft.com/office/drawing/2014/main" id="{ABD4DDF0-37C4-840E-A856-383B023B3228}"/>
+              </a:ext>
+            </a:extLst>
+          </p:cNvPr>
+          <p:cNvSpPr>
+            <a:spLocks noGrp="1"/>
+          </p:cNvSpPr>
+          <p:nvPr>
+            <p:ph type="ftr" sz="quarter" idx="15"/>
+          </p:nvPr>
+        </p:nvSpPr>
+        <p:spPr/>
+        <p:txBody>
+          <a:bodyPr/>
+          <a:lstStyle/>
+          <a:p>
+            <a:r>
+              <a:rPr lang="en-US"/>
+              <a:t>Corbin Ferguson</a:t>
+            </a:r>
+            <a:endParaRPr lang="en-US" dirty="0"/>
+          </a:p>
+        </p:txBody>
+      </p:sp>
+      <p:sp>
+        <p:nvSpPr>
+          <p:cNvPr id="5" name="Slide Number Placeholder 4">
+            <a:extLst>
+              <a:ext uri="{FF2B5EF4-FFF2-40B4-BE49-F238E27FC236}">
+                <a16:creationId xmlns:a16="http://schemas.microsoft.com/office/drawing/2014/main" id="{E1A1F705-1454-F7D1-51D1-6A08783759F2}"/>
+              </a:ext>
+            </a:extLst>
+          </p:cNvPr>
+          <p:cNvSpPr>
+            <a:spLocks noGrp="1"/>
+          </p:cNvSpPr>
+          <p:nvPr>
+            <p:ph type="sldNum" sz="quarter" idx="16"/>
+          </p:nvPr>
+        </p:nvSpPr>
+        <p:spPr/>
+        <p:txBody>
+          <a:bodyPr/>
+          <a:lstStyle/>
+          <a:p>
+            <a:r>
+              <a:rPr lang="en-US"/>
+              <a:t>Slide </a:t>
+            </a:r>
+            <a:fld id="{B7F1FE61-F696-4BC2-948F-7278C8C6DBB9}" type="slidenum">
+              <a:rPr lang="en-US" smtClean="0"/>
+              <a:t>17</a:t>
+            </a:fld>
+            <a:endParaRPr lang="en-US" dirty="0"/>
+          </a:p>
+        </p:txBody>
+      </p:sp>
+      <p:sp>
+        <p:nvSpPr>
+          <p:cNvPr id="2" name="Title 1">
+            <a:extLst>
+              <a:ext uri="{FF2B5EF4-FFF2-40B4-BE49-F238E27FC236}">
+                <a16:creationId xmlns:a16="http://schemas.microsoft.com/office/drawing/2014/main" id="{29DC8B36-B78B-74FC-1B96-372E60B3CCA5}"/>
+              </a:ext>
+            </a:extLst>
+          </p:cNvPr>
+          <p:cNvSpPr>
+            <a:spLocks noGrp="1"/>
+          </p:cNvSpPr>
+          <p:nvPr>
+            <p:ph type="title"/>
+          </p:nvPr>
+        </p:nvSpPr>
+        <p:spPr/>
+        <p:txBody>
+          <a:bodyPr/>
+          <a:lstStyle/>
+          <a:p>
+            <a:r>
+              <a:rPr lang="en-US" dirty="0"/>
+              <a:t>Conclusion</a:t>
+            </a:r>
+          </a:p>
+        </p:txBody>
+      </p:sp>
+    </p:spTree>
+    <p:extLst>
+      <p:ext uri="{BB962C8B-B14F-4D97-AF65-F5344CB8AC3E}">
+        <p14:creationId xmlns:p14="http://schemas.microsoft.com/office/powerpoint/2010/main" val="1067535560"/>
+      </p:ext>
+    </p:extLst>
+  </p:cSld>
+  <p:clrMapOvr>
+    <a:masterClrMapping/>
+  </p:clrMapOvr>
+</p:sld>
+</file>
+
+<file path=ppt/slides/slide18.xml><?xml version="1.0" encoding="utf-8"?>
 <p:sld xmlns:a="http://schemas.openxmlformats.org/drawingml/2006/main" xmlns:r="http://schemas.openxmlformats.org/officeDocument/2006/relationships" xmlns:p="http://schemas.openxmlformats.org/presentationml/2006/main">
   <p:cSld>
     <p:spTree>
@@ -19687,7 +21604,7 @@
             </a:r>
             <a:fld id="{C20DA095-8283-4DCC-BA55-3B61E88C6181}" type="slidenum">
               <a:rPr lang="en-US" smtClean="0"/>
-              <a:t>15</a:t>
+              <a:t>18</a:t>
             </a:fld>
             <a:endParaRPr lang="en-US" dirty="0"/>
           </a:p>
@@ -19781,6 +21698,328 @@
 </p:sld>
 </file>
 
+<file path=ppt/slides/slide19.xml><?xml version="1.0" encoding="utf-8"?>
+<p:sld xmlns:a="http://schemas.openxmlformats.org/drawingml/2006/main" xmlns:r="http://schemas.openxmlformats.org/officeDocument/2006/relationships" xmlns:p="http://schemas.openxmlformats.org/presentationml/2006/main">
+  <p:cSld>
+    <p:spTree>
+      <p:nvGrpSpPr>
+        <p:cNvPr id="1" name="">
+          <a:extLst>
+            <a:ext uri="{FF2B5EF4-FFF2-40B4-BE49-F238E27FC236}">
+              <a16:creationId xmlns:a16="http://schemas.microsoft.com/office/drawing/2014/main" id="{2261480E-EC27-6782-E840-077677AC47DA}"/>
+            </a:ext>
+          </a:extLst>
+        </p:cNvPr>
+        <p:cNvGrpSpPr/>
+        <p:nvPr/>
+      </p:nvGrpSpPr>
+      <p:grpSpPr>
+        <a:xfrm>
+          <a:off x="0" y="0"/>
+          <a:ext cx="0" cy="0"/>
+          <a:chOff x="0" y="0"/>
+          <a:chExt cx="0" cy="0"/>
+        </a:xfrm>
+      </p:grpSpPr>
+      <p:sp>
+        <p:nvSpPr>
+          <p:cNvPr id="9" name="Text Placeholder 8">
+            <a:extLst>
+              <a:ext uri="{FF2B5EF4-FFF2-40B4-BE49-F238E27FC236}">
+                <a16:creationId xmlns:a16="http://schemas.microsoft.com/office/drawing/2014/main" id="{01007C77-2DF3-8DD9-8D8C-832A640C674D}"/>
+              </a:ext>
+            </a:extLst>
+          </p:cNvPr>
+          <p:cNvSpPr>
+            <a:spLocks noGrp="1"/>
+          </p:cNvSpPr>
+          <p:nvPr>
+            <p:ph type="body" sz="quarter" idx="13"/>
+          </p:nvPr>
+        </p:nvSpPr>
+        <p:spPr/>
+        <p:txBody>
+          <a:bodyPr/>
+          <a:lstStyle/>
+          <a:p>
+            <a:pPr marL="342900" indent="-342900">
+              <a:buFont typeface="Arial" panose="020B0604020202020204" pitchFamily="34" charset="0"/>
+              <a:buChar char="•"/>
+            </a:pPr>
+            <a:r>
+              <a:rPr lang="en-US" dirty="0">
+                <a:hlinkClick r:id="rId2"/>
+              </a:rPr>
+              <a:t>RSLogix5000_V35.xsd</a:t>
+            </a:r>
+            <a:endParaRPr lang="en-US" dirty="0"/>
+          </a:p>
+          <a:p>
+            <a:pPr marL="342900" indent="-342900">
+              <a:buFont typeface="Arial" panose="020B0604020202020204" pitchFamily="34" charset="0"/>
+              <a:buChar char="•"/>
+            </a:pPr>
+            <a:r>
+              <a:rPr lang="en-US" dirty="0">
+                <a:hlinkClick r:id="rId3"/>
+              </a:rPr>
+              <a:t>https://literature.rockwellautomation.com/idc/groups/literature/documents/pm/1756-pm019_-en-p.pdf</a:t>
+            </a:r>
+            <a:endParaRPr lang="en-US" dirty="0"/>
+          </a:p>
+          <a:p>
+            <a:pPr marL="342900" indent="-342900">
+              <a:buFont typeface="Arial" panose="020B0604020202020204" pitchFamily="34" charset="0"/>
+              <a:buChar char="•"/>
+            </a:pPr>
+            <a:r>
+              <a:rPr lang="en-US" dirty="0">
+                <a:hlinkClick r:id="rId4"/>
+              </a:rPr>
+              <a:t>https://literature.rockwellautomation.com/idc/groups/literature/documents/rm/1756-rm014_-en-p.pdf</a:t>
+            </a:r>
+            <a:endParaRPr lang="en-US" dirty="0"/>
+          </a:p>
+          <a:p>
+            <a:pPr marL="342900" indent="-342900">
+              <a:buFont typeface="Arial" panose="020B0604020202020204" pitchFamily="34" charset="0"/>
+              <a:buChar char="•"/>
+            </a:pPr>
+            <a:r>
+              <a:rPr lang="en-US" dirty="0" err="1">
+                <a:hlinkClick r:id="rId5"/>
+              </a:rPr>
+              <a:t>System.Xml.Linq</a:t>
+            </a:r>
+            <a:r>
+              <a:rPr lang="en-US" dirty="0">
+                <a:hlinkClick r:id="rId5"/>
+              </a:rPr>
+              <a:t> Namespace | Microsoft Learn</a:t>
+            </a:r>
+            <a:endParaRPr lang="en-US" dirty="0"/>
+          </a:p>
+          <a:p>
+            <a:pPr marL="342900" indent="-342900">
+              <a:buFont typeface="Arial" panose="020B0604020202020204" pitchFamily="34" charset="0"/>
+              <a:buChar char="•"/>
+            </a:pPr>
+            <a:r>
+              <a:rPr lang="en-US" dirty="0" err="1">
+                <a:hlinkClick r:id="rId6"/>
+              </a:rPr>
+              <a:t>devlooped</a:t>
+            </a:r>
+            <a:r>
+              <a:rPr lang="en-US" dirty="0">
+                <a:hlinkClick r:id="rId6"/>
+              </a:rPr>
+              <a:t>/</a:t>
+            </a:r>
+            <a:r>
+              <a:rPr lang="en-US" dirty="0" err="1">
+                <a:hlinkClick r:id="rId6"/>
+              </a:rPr>
+              <a:t>moq</a:t>
+            </a:r>
+            <a:r>
+              <a:rPr lang="en-US" dirty="0">
+                <a:hlinkClick r:id="rId6"/>
+              </a:rPr>
+              <a:t>: The most popular and friendly mocking framework for .NET</a:t>
+            </a:r>
+            <a:endParaRPr lang="en-US" dirty="0"/>
+          </a:p>
+          <a:p>
+            <a:pPr marL="342900" indent="-342900">
+              <a:buFont typeface="Arial" panose="020B0604020202020204" pitchFamily="34" charset="0"/>
+              <a:buChar char="•"/>
+            </a:pPr>
+            <a:r>
+              <a:rPr lang="en-US" dirty="0" err="1">
+                <a:hlinkClick r:id="rId7"/>
+              </a:rPr>
+              <a:t>FlaUI</a:t>
+            </a:r>
+            <a:r>
+              <a:rPr lang="en-US" dirty="0">
+                <a:hlinkClick r:id="rId7"/>
+              </a:rPr>
+              <a:t>/</a:t>
+            </a:r>
+            <a:r>
+              <a:rPr lang="en-US" dirty="0" err="1">
+                <a:hlinkClick r:id="rId7"/>
+              </a:rPr>
+              <a:t>FlaUI</a:t>
+            </a:r>
+            <a:r>
+              <a:rPr lang="en-US" dirty="0">
+                <a:hlinkClick r:id="rId7"/>
+              </a:rPr>
+              <a:t>: UI automation library for </a:t>
+            </a:r>
+            <a:r>
+              <a:rPr lang="en-US" dirty="0" err="1">
+                <a:hlinkClick r:id="rId7"/>
+              </a:rPr>
+              <a:t>.Net</a:t>
+            </a:r>
+            <a:endParaRPr lang="en-US" dirty="0"/>
+          </a:p>
+          <a:p>
+            <a:pPr marL="342900" indent="-342900">
+              <a:buFont typeface="Arial" panose="020B0604020202020204" pitchFamily="34" charset="0"/>
+              <a:buChar char="•"/>
+            </a:pPr>
+            <a:r>
+              <a:rPr lang="en-US" dirty="0" err="1">
+                <a:hlinkClick r:id="rId8"/>
+              </a:rPr>
+              <a:t>MSTest</a:t>
+            </a:r>
+            <a:r>
+              <a:rPr lang="en-US" dirty="0">
+                <a:hlinkClick r:id="rId8"/>
+              </a:rPr>
+              <a:t> overview - .NET | Microsoft Learn</a:t>
+            </a:r>
+            <a:endParaRPr lang="en-US" sz="2000" dirty="0"/>
+          </a:p>
+        </p:txBody>
+      </p:sp>
+      <p:sp>
+        <p:nvSpPr>
+          <p:cNvPr id="3" name="Date Placeholder 2">
+            <a:extLst>
+              <a:ext uri="{FF2B5EF4-FFF2-40B4-BE49-F238E27FC236}">
+                <a16:creationId xmlns:a16="http://schemas.microsoft.com/office/drawing/2014/main" id="{F9289A25-DE32-EAA4-17EE-075AAEC9AFBF}"/>
+              </a:ext>
+            </a:extLst>
+          </p:cNvPr>
+          <p:cNvSpPr>
+            <a:spLocks noGrp="1"/>
+          </p:cNvSpPr>
+          <p:nvPr>
+            <p:ph type="dt" sz="half" idx="14"/>
+          </p:nvPr>
+        </p:nvSpPr>
+        <p:spPr/>
+        <p:txBody>
+          <a:bodyPr/>
+          <a:lstStyle/>
+          <a:p>
+            <a:r>
+              <a:rPr lang="en-US"/>
+              <a:t>L5X Automation Build Tool</a:t>
+            </a:r>
+            <a:endParaRPr lang="en-US" dirty="0"/>
+          </a:p>
+        </p:txBody>
+      </p:sp>
+      <p:sp>
+        <p:nvSpPr>
+          <p:cNvPr id="4" name="Footer Placeholder 3">
+            <a:extLst>
+              <a:ext uri="{FF2B5EF4-FFF2-40B4-BE49-F238E27FC236}">
+                <a16:creationId xmlns:a16="http://schemas.microsoft.com/office/drawing/2014/main" id="{4033C15C-D89A-56B7-E112-A72F740A71B9}"/>
+              </a:ext>
+            </a:extLst>
+          </p:cNvPr>
+          <p:cNvSpPr>
+            <a:spLocks noGrp="1"/>
+          </p:cNvSpPr>
+          <p:nvPr>
+            <p:ph type="ftr" sz="quarter" idx="15"/>
+          </p:nvPr>
+        </p:nvSpPr>
+        <p:spPr/>
+        <p:txBody>
+          <a:bodyPr/>
+          <a:lstStyle/>
+          <a:p>
+            <a:r>
+              <a:rPr lang="en-US"/>
+              <a:t>Corbin Ferguson</a:t>
+            </a:r>
+            <a:endParaRPr lang="en-US" dirty="0"/>
+          </a:p>
+        </p:txBody>
+      </p:sp>
+      <p:sp>
+        <p:nvSpPr>
+          <p:cNvPr id="5" name="Slide Number Placeholder 4">
+            <a:extLst>
+              <a:ext uri="{FF2B5EF4-FFF2-40B4-BE49-F238E27FC236}">
+                <a16:creationId xmlns:a16="http://schemas.microsoft.com/office/drawing/2014/main" id="{E66F4642-FAF3-185E-7CBC-239DE9E56FBF}"/>
+              </a:ext>
+            </a:extLst>
+          </p:cNvPr>
+          <p:cNvSpPr>
+            <a:spLocks noGrp="1"/>
+          </p:cNvSpPr>
+          <p:nvPr>
+            <p:ph type="sldNum" sz="quarter" idx="16"/>
+          </p:nvPr>
+        </p:nvSpPr>
+        <p:spPr/>
+        <p:txBody>
+          <a:bodyPr/>
+          <a:lstStyle/>
+          <a:p>
+            <a:r>
+              <a:rPr lang="en-US"/>
+              <a:t>Slide </a:t>
+            </a:r>
+            <a:fld id="{B7F1FE61-F696-4BC2-948F-7278C8C6DBB9}" type="slidenum">
+              <a:rPr lang="en-US" smtClean="0"/>
+              <a:t>19</a:t>
+            </a:fld>
+            <a:endParaRPr lang="en-US" dirty="0"/>
+          </a:p>
+        </p:txBody>
+      </p:sp>
+      <p:sp>
+        <p:nvSpPr>
+          <p:cNvPr id="2" name="Title 1">
+            <a:extLst>
+              <a:ext uri="{FF2B5EF4-FFF2-40B4-BE49-F238E27FC236}">
+                <a16:creationId xmlns:a16="http://schemas.microsoft.com/office/drawing/2014/main" id="{42490D66-69B9-FCB3-4EE3-71E22ADE614D}"/>
+              </a:ext>
+            </a:extLst>
+          </p:cNvPr>
+          <p:cNvSpPr>
+            <a:spLocks noGrp="1"/>
+          </p:cNvSpPr>
+          <p:nvPr>
+            <p:ph type="title"/>
+          </p:nvPr>
+        </p:nvSpPr>
+        <p:spPr/>
+        <p:txBody>
+          <a:bodyPr/>
+          <a:lstStyle/>
+          <a:p>
+            <a:r>
+              <a:rPr lang="en-US" dirty="0"/>
+              <a:t>Resources</a:t>
+            </a:r>
+          </a:p>
+        </p:txBody>
+      </p:sp>
+    </p:spTree>
+    <p:extLst>
+      <p:ext uri="{BB962C8B-B14F-4D97-AF65-F5344CB8AC3E}">
+        <p14:creationId xmlns:p14="http://schemas.microsoft.com/office/powerpoint/2010/main" val="1869098219"/>
+      </p:ext>
+    </p:extLst>
+  </p:cSld>
+  <p:clrMapOvr>
+    <a:masterClrMapping/>
+  </p:clrMapOvr>
+</p:sld>
+</file>
+
 <file path=ppt/slides/slide2.xml><?xml version="1.0" encoding="utf-8"?>
 <p:sld xmlns:a="http://schemas.openxmlformats.org/drawingml/2006/main" xmlns:r="http://schemas.openxmlformats.org/officeDocument/2006/relationships" xmlns:p="http://schemas.openxmlformats.org/presentationml/2006/main">
   <p:cSld>
@@ -20215,33 +22454,96 @@
       </p:sp>
       <p:pic>
         <p:nvPicPr>
-          <p:cNvPr id="9" name="Picture 8" descr="A white and blue design with black text&#10;&#10;AI-generated content may be incorrect.">
+          <p:cNvPr id="1028" name="Picture 4" descr="5 Tips for Getting Started in RSLogix 5000 | DMC, Inc.">
             <a:extLst>
               <a:ext uri="{FF2B5EF4-FFF2-40B4-BE49-F238E27FC236}">
-                <a16:creationId xmlns:a16="http://schemas.microsoft.com/office/drawing/2014/main" id="{1BC88699-DDD8-5B47-A357-650F499C3E03}"/>
+                <a16:creationId xmlns:a16="http://schemas.microsoft.com/office/drawing/2014/main" id="{6C86E4AC-1B5D-4CB7-A176-9C365C540E23}"/>
               </a:ext>
             </a:extLst>
           </p:cNvPr>
           <p:cNvPicPr>
-            <a:picLocks noChangeAspect="1"/>
+            <a:picLocks noChangeAspect="1" noChangeArrowheads="1"/>
           </p:cNvPicPr>
           <p:nvPr/>
         </p:nvPicPr>
-        <p:blipFill>
-          <a:blip r:embed="rId2"/>
-          <a:srcRect l="844" t="2038" r="-1"/>
+        <p:blipFill rotWithShape="1">
+          <a:blip r:embed="rId2">
+            <a:extLst>
+              <a:ext uri="{28A0092B-C50C-407E-A947-70E740481C1C}">
+                <a14:useLocalDpi xmlns:a14="http://schemas.microsoft.com/office/drawing/2010/main" val="0"/>
+              </a:ext>
+            </a:extLst>
+          </a:blip>
+          <a:srcRect t="19922" b="19921"/>
           <a:stretch>
             <a:fillRect/>
           </a:stretch>
         </p:blipFill>
-        <p:spPr>
+        <p:spPr bwMode="auto">
           <a:xfrm>
-            <a:off x="10172700" y="85725"/>
-            <a:ext cx="1879731" cy="1073204"/>
+            <a:off x="9769601" y="2034348"/>
+            <a:ext cx="2276475" cy="1369477"/>
           </a:xfrm>
           <a:prstGeom prst="rect">
             <a:avLst/>
           </a:prstGeom>
+          <a:noFill/>
+          <a:extLst>
+            <a:ext uri="{909E8E84-426E-40DD-AFC4-6F175D3DCCD1}">
+              <a14:hiddenFill xmlns:a14="http://schemas.microsoft.com/office/drawing/2010/main">
+                <a:solidFill>
+                  <a:srgbClr val="FFFFFF"/>
+                </a:solidFill>
+              </a14:hiddenFill>
+            </a:ext>
+          </a:extLst>
+        </p:spPr>
+      </p:pic>
+      <p:pic>
+        <p:nvPicPr>
+          <p:cNvPr id="1030" name="Picture 6" descr="Day6 Part3 Rockwell Studio 5000 training Complete Function Block diagram  FBD programming">
+            <a:extLst>
+              <a:ext uri="{FF2B5EF4-FFF2-40B4-BE49-F238E27FC236}">
+                <a16:creationId xmlns:a16="http://schemas.microsoft.com/office/drawing/2014/main" id="{84E072FF-ABEC-64D2-234E-9A5158069A12}"/>
+              </a:ext>
+            </a:extLst>
+          </p:cNvPr>
+          <p:cNvPicPr>
+            <a:picLocks noChangeAspect="1" noChangeArrowheads="1"/>
+          </p:cNvPicPr>
+          <p:nvPr/>
+        </p:nvPicPr>
+        <p:blipFill rotWithShape="1">
+          <a:blip r:embed="rId3">
+            <a:extLst>
+              <a:ext uri="{28A0092B-C50C-407E-A947-70E740481C1C}">
+                <a14:useLocalDpi xmlns:a14="http://schemas.microsoft.com/office/drawing/2010/main" val="0"/>
+              </a:ext>
+            </a:extLst>
+          </a:blip>
+          <a:srcRect b="5099"/>
+          <a:stretch>
+            <a:fillRect/>
+          </a:stretch>
+        </p:blipFill>
+        <p:spPr bwMode="auto">
+          <a:xfrm>
+            <a:off x="7010400" y="3403826"/>
+            <a:ext cx="5035676" cy="2689000"/>
+          </a:xfrm>
+          <a:prstGeom prst="rect">
+            <a:avLst/>
+          </a:prstGeom>
+          <a:noFill/>
+          <a:extLst>
+            <a:ext uri="{909E8E84-426E-40DD-AFC4-6F175D3DCCD1}">
+              <a14:hiddenFill xmlns:a14="http://schemas.microsoft.com/office/drawing/2010/main">
+                <a:solidFill>
+                  <a:srgbClr val="FFFFFF"/>
+                </a:solidFill>
+              </a14:hiddenFill>
+            </a:ext>
+          </a:extLst>
         </p:spPr>
       </p:pic>
     </p:spTree>
@@ -20343,14 +22645,14 @@
             <a:pPr lvl="1"/>
             <a:r>
               <a:rPr lang="en-US" dirty="0"/>
-              <a:t>Investigation</a:t>
+              <a:t>Investigation into applicable tools and resources</a:t>
             </a:r>
           </a:p>
           <a:p>
             <a:pPr lvl="1"/>
             <a:r>
               <a:rPr lang="en-US" dirty="0"/>
-              <a:t>Feature outline</a:t>
+              <a:t>Feature outline and requirements development</a:t>
             </a:r>
           </a:p>
           <a:p>
@@ -20377,14 +22679,21 @@
             <a:pPr lvl="1"/>
             <a:r>
               <a:rPr lang="en-US" dirty="0"/>
-              <a:t>Testing and Verification</a:t>
+              <a:t>Testing and verification</a:t>
             </a:r>
           </a:p>
           <a:p>
             <a:pPr lvl="1"/>
             <a:r>
               <a:rPr lang="en-US" dirty="0"/>
-              <a:t>Final Reporting</a:t>
+              <a:t>Application cleanup</a:t>
+            </a:r>
+          </a:p>
+          <a:p>
+            <a:pPr lvl="1"/>
+            <a:r>
+              <a:rPr lang="en-US" dirty="0"/>
+              <a:t>Final reporting</a:t>
             </a:r>
           </a:p>
         </p:txBody>
@@ -20549,7 +22858,7 @@
           <a:p>
             <a:r>
               <a:rPr lang="en-US" dirty="0"/>
-              <a:t>Intended Features</a:t>
+              <a:t>Necessary Features</a:t>
             </a:r>
           </a:p>
         </p:txBody>
@@ -20874,6 +23183,27 @@
               <a:rPr lang="en-US" dirty="0"/>
               <a:t>Business logic implemented using LINQ (Language Integrated Query)</a:t>
             </a:r>
+          </a:p>
+          <a:p>
+            <a:r>
+              <a:rPr lang="en-US" dirty="0"/>
+              <a:t>Utilizes an XML schema file(</a:t>
+            </a:r>
+            <a:r>
+              <a:rPr lang="en-US" dirty="0">
+                <a:hlinkClick r:id="rId2"/>
+              </a:rPr>
+              <a:t>RSLogix5000_V35.xsd</a:t>
+            </a:r>
+            <a:r>
+              <a:rPr lang="en-US" dirty="0"/>
+              <a:t>) developed by Jeremy Medders on </a:t>
+            </a:r>
+            <a:r>
+              <a:rPr lang="en-US" dirty="0" err="1"/>
+              <a:t>dropbox</a:t>
+            </a:r>
+            <a:endParaRPr lang="en-US" dirty="0"/>
           </a:p>
           <a:p>
             <a:r>
@@ -21196,7 +23526,7 @@
         <p:cNvPr id="1" name="">
           <a:extLst>
             <a:ext uri="{FF2B5EF4-FFF2-40B4-BE49-F238E27FC236}">
-              <a16:creationId xmlns:a16="http://schemas.microsoft.com/office/drawing/2014/main" id="{93938A11-EECC-9BC6-7865-435054160CD9}"/>
+              <a16:creationId xmlns:a16="http://schemas.microsoft.com/office/drawing/2014/main" id="{AE741E45-B413-0AAD-097D-05F3401E8023}"/>
             </a:ext>
           </a:extLst>
         </p:cNvPr>
@@ -21211,228 +23541,218 @@
           <a:chExt cx="0" cy="0"/>
         </a:xfrm>
       </p:grpSpPr>
-      <p:sp>
-        <p:nvSpPr>
-          <p:cNvPr id="2" name="Title 1">
+      <p:pic>
+        <p:nvPicPr>
+          <p:cNvPr id="8362" name="Picture 8361">
             <a:extLst>
               <a:ext uri="{FF2B5EF4-FFF2-40B4-BE49-F238E27FC236}">
-                <a16:creationId xmlns:a16="http://schemas.microsoft.com/office/drawing/2014/main" id="{2A18B76F-2AF4-F180-30B2-B28BCC59D004}"/>
-              </a:ext>
-            </a:extLst>
-          </p:cNvPr>
-          <p:cNvSpPr>
-            <a:spLocks noGrp="1"/>
-          </p:cNvSpPr>
-          <p:nvPr>
-            <p:ph type="title"/>
-          </p:nvPr>
-        </p:nvSpPr>
-        <p:spPr>
-          <a:xfrm>
-            <a:off x="334963" y="620690"/>
-            <a:ext cx="5903913" cy="360041"/>
-          </a:xfrm>
-        </p:spPr>
-        <p:txBody>
-          <a:bodyPr/>
-          <a:lstStyle/>
-          <a:p>
-            <a:r>
-              <a:rPr lang="en-US" dirty="0"/>
-              <a:t>New Elements Sequences Charts</a:t>
-            </a:r>
-          </a:p>
-        </p:txBody>
-      </p:sp>
-      <p:sp>
-        <p:nvSpPr>
-          <p:cNvPr id="4" name="Date Placeholder 3">
-            <a:extLst>
-              <a:ext uri="{FF2B5EF4-FFF2-40B4-BE49-F238E27FC236}">
-                <a16:creationId xmlns:a16="http://schemas.microsoft.com/office/drawing/2014/main" id="{9A01F89D-9B16-8125-D461-9AF251E3A9E1}"/>
-              </a:ext>
-            </a:extLst>
-          </p:cNvPr>
-          <p:cNvSpPr>
-            <a:spLocks noGrp="1"/>
-          </p:cNvSpPr>
-          <p:nvPr>
-            <p:ph type="dt" sz="half" idx="10"/>
-          </p:nvPr>
-        </p:nvSpPr>
-        <p:spPr/>
-        <p:txBody>
-          <a:bodyPr/>
-          <a:lstStyle/>
-          <a:p>
-            <a:r>
-              <a:rPr lang="en-US"/>
-              <a:t>L5X Automation Build Tool</a:t>
-            </a:r>
-            <a:endParaRPr lang="en-US" dirty="0"/>
-          </a:p>
-        </p:txBody>
-      </p:sp>
-      <p:sp>
-        <p:nvSpPr>
-          <p:cNvPr id="7" name="Slide Number Placeholder 6">
-            <a:extLst>
-              <a:ext uri="{FF2B5EF4-FFF2-40B4-BE49-F238E27FC236}">
-                <a16:creationId xmlns:a16="http://schemas.microsoft.com/office/drawing/2014/main" id="{0BAF9346-2F50-F0FB-C237-28D282CCCF63}"/>
-              </a:ext>
-            </a:extLst>
-          </p:cNvPr>
-          <p:cNvSpPr>
-            <a:spLocks noGrp="1"/>
-          </p:cNvSpPr>
-          <p:nvPr>
-            <p:ph type="sldNum" sz="quarter" idx="12"/>
-          </p:nvPr>
-        </p:nvSpPr>
-        <p:spPr/>
-        <p:txBody>
-          <a:bodyPr/>
-          <a:lstStyle/>
-          <a:p>
-            <a:r>
-              <a:rPr lang="en-US"/>
-              <a:t>Slide </a:t>
-            </a:r>
-            <a:fld id="{78C39363-BD0C-4CE6-8DE9-7D78215F2B9F}" type="slidenum">
-              <a:rPr lang="en-US" smtClean="0"/>
-              <a:t>8</a:t>
-            </a:fld>
-            <a:endParaRPr lang="en-US" dirty="0"/>
-          </a:p>
-        </p:txBody>
-      </p:sp>
-      <p:sp>
-        <p:nvSpPr>
-          <p:cNvPr id="8" name="Footer Placeholder 7">
-            <a:extLst>
-              <a:ext uri="{FF2B5EF4-FFF2-40B4-BE49-F238E27FC236}">
-                <a16:creationId xmlns:a16="http://schemas.microsoft.com/office/drawing/2014/main" id="{9EB94696-3F28-AFA0-7505-55910BF18FFA}"/>
-              </a:ext>
-            </a:extLst>
-          </p:cNvPr>
-          <p:cNvSpPr>
-            <a:spLocks noGrp="1"/>
-          </p:cNvSpPr>
-          <p:nvPr>
-            <p:ph type="ftr" sz="quarter" idx="11"/>
-          </p:nvPr>
-        </p:nvSpPr>
-        <p:spPr/>
-        <p:txBody>
-          <a:bodyPr/>
-          <a:lstStyle/>
-          <a:p>
-            <a:r>
-              <a:rPr lang="en-US"/>
-              <a:t>Corbin Ferguson</a:t>
-            </a:r>
-            <a:endParaRPr lang="en-US" dirty="0"/>
-          </a:p>
-        </p:txBody>
-      </p:sp>
-      <p:pic>
-        <p:nvPicPr>
-          <p:cNvPr id="3074" name="Picture 2">
-            <a:extLst>
-              <a:ext uri="{FF2B5EF4-FFF2-40B4-BE49-F238E27FC236}">
-                <a16:creationId xmlns:a16="http://schemas.microsoft.com/office/drawing/2014/main" id="{72CA8AB4-E276-87CC-8117-E47CD1C46076}"/>
+                <a16:creationId xmlns:a16="http://schemas.microsoft.com/office/drawing/2014/main" id="{5B32580E-8B7E-FCBF-145C-131D2AA75C68}"/>
               </a:ext>
             </a:extLst>
           </p:cNvPr>
           <p:cNvPicPr>
-            <a:picLocks noChangeAspect="1" noChangeArrowheads="1"/>
+            <a:picLocks noChangeAspect="1"/>
           </p:cNvPicPr>
           <p:nvPr/>
         </p:nvPicPr>
         <p:blipFill>
-          <a:blip r:embed="rId2" cstate="print">
-            <a:extLst>
-              <a:ext uri="{28A0092B-C50C-407E-A947-70E740481C1C}">
-                <a14:useLocalDpi xmlns:a14="http://schemas.microsoft.com/office/drawing/2010/main" val="0"/>
-              </a:ext>
-            </a:extLst>
-          </a:blip>
-          <a:srcRect/>
+          <a:blip r:embed="rId2"/>
           <a:stretch>
             <a:fillRect/>
           </a:stretch>
         </p:blipFill>
-        <p:spPr bwMode="auto">
+        <p:spPr>
           <a:xfrm>
-            <a:off x="6238876" y="89360"/>
-            <a:ext cx="5867400" cy="6116194"/>
+            <a:off x="2687786" y="1160462"/>
+            <a:ext cx="6816427" cy="5113337"/>
           </a:xfrm>
           <a:prstGeom prst="rect">
             <a:avLst/>
           </a:prstGeom>
           <a:noFill/>
-          <a:extLst>
-            <a:ext uri="{909E8E84-426E-40DD-AFC4-6F175D3DCCD1}">
-              <a14:hiddenFill xmlns:a14="http://schemas.microsoft.com/office/drawing/2010/main">
-                <a:solidFill>
-                  <a:srgbClr val="FFFFFF"/>
-                </a:solidFill>
-              </a14:hiddenFill>
-            </a:ext>
-          </a:extLst>
         </p:spPr>
       </p:pic>
-      <p:pic>
-        <p:nvPicPr>
-          <p:cNvPr id="3078" name="Picture 6">
+      <p:sp>
+        <p:nvSpPr>
+          <p:cNvPr id="8" name="Footer Placeholder 7">
             <a:extLst>
               <a:ext uri="{FF2B5EF4-FFF2-40B4-BE49-F238E27FC236}">
-                <a16:creationId xmlns:a16="http://schemas.microsoft.com/office/drawing/2014/main" id="{0AE53FD7-985C-4CAE-5485-DA0AC6FB44D1}"/>
+                <a16:creationId xmlns:a16="http://schemas.microsoft.com/office/drawing/2014/main" id="{4C7D5AC9-EA29-86A4-7EF8-4DF941130DC8}"/>
               </a:ext>
             </a:extLst>
           </p:cNvPr>
-          <p:cNvPicPr>
-            <a:picLocks noChangeAspect="1" noChangeArrowheads="1"/>
-          </p:cNvPicPr>
-          <p:nvPr/>
-        </p:nvPicPr>
-        <p:blipFill rotWithShape="1">
-          <a:blip r:embed="rId3" cstate="print">
+          <p:cNvSpPr>
+            <a:spLocks noGrp="1"/>
+          </p:cNvSpPr>
+          <p:nvPr>
+            <p:ph type="ftr" sz="quarter" idx="19"/>
+          </p:nvPr>
+        </p:nvSpPr>
+        <p:spPr>
+          <a:xfrm>
+            <a:off x="4086351" y="6469380"/>
+            <a:ext cx="1130300" cy="180000"/>
+          </a:xfrm>
+        </p:spPr>
+        <p:txBody>
+          <a:bodyPr wrap="none" anchor="ctr">
+            <a:normAutofit/>
+          </a:bodyPr>
+          <a:lstStyle/>
+          <a:p>
+            <a:pPr>
+              <a:lnSpc>
+                <a:spcPct val="90000"/>
+              </a:lnSpc>
+              <a:spcAft>
+                <a:spcPts val="600"/>
+              </a:spcAft>
+            </a:pPr>
+            <a:r>
+              <a:rPr lang="en-US"/>
+              <a:t>Corbin Ferguson</a:t>
+            </a:r>
+          </a:p>
+        </p:txBody>
+      </p:sp>
+      <p:sp>
+        <p:nvSpPr>
+          <p:cNvPr id="7" name="Slide Number Placeholder 6">
             <a:extLst>
-              <a:ext uri="{28A0092B-C50C-407E-A947-70E740481C1C}">
-                <a14:useLocalDpi xmlns:a14="http://schemas.microsoft.com/office/drawing/2010/main" val="0"/>
+              <a:ext uri="{FF2B5EF4-FFF2-40B4-BE49-F238E27FC236}">
+                <a16:creationId xmlns:a16="http://schemas.microsoft.com/office/drawing/2014/main" id="{3583879C-95E5-7299-C98A-2B7D0B63F807}"/>
               </a:ext>
             </a:extLst>
-          </a:blip>
-          <a:srcRect r="7667"/>
-          <a:stretch>
-            <a:fillRect/>
-          </a:stretch>
-        </p:blipFill>
-        <p:spPr bwMode="auto">
+          </p:cNvPr>
+          <p:cNvSpPr>
+            <a:spLocks noGrp="1"/>
+          </p:cNvSpPr>
+          <p:nvPr>
+            <p:ph type="sldNum" sz="quarter" idx="20"/>
+          </p:nvPr>
+        </p:nvSpPr>
+        <p:spPr>
           <a:xfrm>
-            <a:off x="82103" y="1129116"/>
-            <a:ext cx="6156773" cy="4734269"/>
+            <a:off x="1633051" y="6469380"/>
+            <a:ext cx="571500" cy="180000"/>
           </a:xfrm>
-          <a:prstGeom prst="rect">
-            <a:avLst/>
-          </a:prstGeom>
-          <a:noFill/>
-          <a:extLst>
-            <a:ext uri="{909E8E84-426E-40DD-AFC4-6F175D3DCCD1}">
-              <a14:hiddenFill xmlns:a14="http://schemas.microsoft.com/office/drawing/2010/main">
-                <a:solidFill>
-                  <a:srgbClr val="FFFFFF"/>
-                </a:solidFill>
-              </a14:hiddenFill>
-            </a:ext>
-          </a:extLst>
         </p:spPr>
-      </p:pic>
+        <p:txBody>
+          <a:bodyPr wrap="none" anchor="ctr">
+            <a:normAutofit/>
+          </a:bodyPr>
+          <a:lstStyle/>
+          <a:p>
+            <a:pPr>
+              <a:lnSpc>
+                <a:spcPct val="90000"/>
+              </a:lnSpc>
+              <a:spcAft>
+                <a:spcPts val="600"/>
+              </a:spcAft>
+            </a:pPr>
+            <a:r>
+              <a:rPr lang="en-US"/>
+              <a:t>Slide </a:t>
+            </a:r>
+            <a:fld id="{C6F8E2D1-BFA0-484A-B7F1-E348F2594759}" type="slidenum">
+              <a:rPr lang="en-US" smtClean="0"/>
+              <a:pPr>
+                <a:lnSpc>
+                  <a:spcPct val="90000"/>
+                </a:lnSpc>
+                <a:spcAft>
+                  <a:spcPts val="600"/>
+                </a:spcAft>
+              </a:pPr>
+              <a:t>8</a:t>
+            </a:fld>
+            <a:endParaRPr lang="en-US"/>
+          </a:p>
+        </p:txBody>
+      </p:sp>
+      <p:sp>
+        <p:nvSpPr>
+          <p:cNvPr id="4" name="Date Placeholder 3">
+            <a:extLst>
+              <a:ext uri="{FF2B5EF4-FFF2-40B4-BE49-F238E27FC236}">
+                <a16:creationId xmlns:a16="http://schemas.microsoft.com/office/drawing/2014/main" id="{6F1C84BC-19BE-D2D3-DB6B-179BB01EE861}"/>
+              </a:ext>
+            </a:extLst>
+          </p:cNvPr>
+          <p:cNvSpPr>
+            <a:spLocks noGrp="1"/>
+          </p:cNvSpPr>
+          <p:nvPr>
+            <p:ph type="dt" sz="half" idx="21"/>
+          </p:nvPr>
+        </p:nvSpPr>
+        <p:spPr>
+          <a:xfrm>
+            <a:off x="334963" y="194736"/>
+            <a:ext cx="9674225" cy="180000"/>
+          </a:xfrm>
+        </p:spPr>
+        <p:txBody>
+          <a:bodyPr wrap="none" anchor="t">
+            <a:normAutofit/>
+          </a:bodyPr>
+          <a:lstStyle/>
+          <a:p>
+            <a:pPr>
+              <a:lnSpc>
+                <a:spcPct val="90000"/>
+              </a:lnSpc>
+              <a:spcAft>
+                <a:spcPts val="600"/>
+              </a:spcAft>
+            </a:pPr>
+            <a:r>
+              <a:rPr lang="en-US"/>
+              <a:t>L5X Automation Build Tool</a:t>
+            </a:r>
+          </a:p>
+        </p:txBody>
+      </p:sp>
+      <p:sp>
+        <p:nvSpPr>
+          <p:cNvPr id="2" name="Title 1">
+            <a:extLst>
+              <a:ext uri="{FF2B5EF4-FFF2-40B4-BE49-F238E27FC236}">
+                <a16:creationId xmlns:a16="http://schemas.microsoft.com/office/drawing/2014/main" id="{07BCF97A-6A5E-DA70-0A21-4FF0D5A9B2D1}"/>
+              </a:ext>
+            </a:extLst>
+          </p:cNvPr>
+          <p:cNvSpPr>
+            <a:spLocks noGrp="1"/>
+          </p:cNvSpPr>
+          <p:nvPr>
+            <p:ph type="title"/>
+          </p:nvPr>
+        </p:nvSpPr>
+        <p:spPr>
+          <a:xfrm>
+            <a:off x="334963" y="620690"/>
+            <a:ext cx="11522075" cy="360041"/>
+          </a:xfrm>
+        </p:spPr>
+        <p:txBody>
+          <a:bodyPr wrap="none" anchor="t">
+            <a:normAutofit/>
+          </a:bodyPr>
+          <a:lstStyle/>
+          <a:p>
+            <a:r>
+              <a:rPr lang="en-US" dirty="0"/>
+              <a:t>Class Diagram</a:t>
+            </a:r>
+          </a:p>
+        </p:txBody>
+      </p:sp>
     </p:spTree>
     <p:extLst>
       <p:ext uri="{BB962C8B-B14F-4D97-AF65-F5344CB8AC3E}">
-        <p14:creationId xmlns:p14="http://schemas.microsoft.com/office/powerpoint/2010/main" val="1350697150"/>
+        <p14:creationId xmlns:p14="http://schemas.microsoft.com/office/powerpoint/2010/main" val="2077614573"/>
       </p:ext>
     </p:extLst>
   </p:cSld>
@@ -21450,7 +23770,7 @@
         <p:cNvPr id="1" name="">
           <a:extLst>
             <a:ext uri="{FF2B5EF4-FFF2-40B4-BE49-F238E27FC236}">
-              <a16:creationId xmlns:a16="http://schemas.microsoft.com/office/drawing/2014/main" id="{EF9DF529-63FE-ADF8-53ED-6BE7FB507424}"/>
+              <a16:creationId xmlns:a16="http://schemas.microsoft.com/office/drawing/2014/main" id="{B031D0FB-813C-A1A9-95BF-F0A18A2C1086}"/>
             </a:ext>
           </a:extLst>
         </p:cNvPr>
@@ -21465,228 +23785,218 @@
           <a:chExt cx="0" cy="0"/>
         </a:xfrm>
       </p:grpSpPr>
-      <p:sp>
-        <p:nvSpPr>
-          <p:cNvPr id="2" name="Title 1">
+      <p:pic>
+        <p:nvPicPr>
+          <p:cNvPr id="9" name="Picture 8">
             <a:extLst>
               <a:ext uri="{FF2B5EF4-FFF2-40B4-BE49-F238E27FC236}">
-                <a16:creationId xmlns:a16="http://schemas.microsoft.com/office/drawing/2014/main" id="{1BEC76E2-5D10-E119-28DF-87EA10623968}"/>
-              </a:ext>
-            </a:extLst>
-          </p:cNvPr>
-          <p:cNvSpPr>
-            <a:spLocks noGrp="1"/>
-          </p:cNvSpPr>
-          <p:nvPr>
-            <p:ph type="title"/>
-          </p:nvPr>
-        </p:nvSpPr>
-        <p:spPr>
-          <a:xfrm>
-            <a:off x="334963" y="620690"/>
-            <a:ext cx="7018337" cy="360041"/>
-          </a:xfrm>
-        </p:spPr>
-        <p:txBody>
-          <a:bodyPr/>
-          <a:lstStyle/>
-          <a:p>
-            <a:r>
-              <a:rPr lang="en-US" dirty="0"/>
-              <a:t>Element Editing Sequences Charts</a:t>
-            </a:r>
-          </a:p>
-        </p:txBody>
-      </p:sp>
-      <p:sp>
-        <p:nvSpPr>
-          <p:cNvPr id="4" name="Date Placeholder 3">
-            <a:extLst>
-              <a:ext uri="{FF2B5EF4-FFF2-40B4-BE49-F238E27FC236}">
-                <a16:creationId xmlns:a16="http://schemas.microsoft.com/office/drawing/2014/main" id="{4AB04ED2-D7AC-3763-1039-630C099F3A4C}"/>
-              </a:ext>
-            </a:extLst>
-          </p:cNvPr>
-          <p:cNvSpPr>
-            <a:spLocks noGrp="1"/>
-          </p:cNvSpPr>
-          <p:nvPr>
-            <p:ph type="dt" sz="half" idx="10"/>
-          </p:nvPr>
-        </p:nvSpPr>
-        <p:spPr/>
-        <p:txBody>
-          <a:bodyPr/>
-          <a:lstStyle/>
-          <a:p>
-            <a:r>
-              <a:rPr lang="en-US"/>
-              <a:t>L5X Automation Build Tool</a:t>
-            </a:r>
-            <a:endParaRPr lang="en-US" dirty="0"/>
-          </a:p>
-        </p:txBody>
-      </p:sp>
-      <p:sp>
-        <p:nvSpPr>
-          <p:cNvPr id="7" name="Slide Number Placeholder 6">
-            <a:extLst>
-              <a:ext uri="{FF2B5EF4-FFF2-40B4-BE49-F238E27FC236}">
-                <a16:creationId xmlns:a16="http://schemas.microsoft.com/office/drawing/2014/main" id="{FA5C2B7C-90AB-FD77-3161-D3654154603E}"/>
-              </a:ext>
-            </a:extLst>
-          </p:cNvPr>
-          <p:cNvSpPr>
-            <a:spLocks noGrp="1"/>
-          </p:cNvSpPr>
-          <p:nvPr>
-            <p:ph type="sldNum" sz="quarter" idx="12"/>
-          </p:nvPr>
-        </p:nvSpPr>
-        <p:spPr/>
-        <p:txBody>
-          <a:bodyPr/>
-          <a:lstStyle/>
-          <a:p>
-            <a:r>
-              <a:rPr lang="en-US"/>
-              <a:t>Slide </a:t>
-            </a:r>
-            <a:fld id="{599786A8-973E-49A8-9C43-0BE71F98A081}" type="slidenum">
-              <a:rPr lang="en-US" smtClean="0"/>
-              <a:t>9</a:t>
-            </a:fld>
-            <a:endParaRPr lang="en-US" dirty="0"/>
-          </a:p>
-        </p:txBody>
-      </p:sp>
-      <p:sp>
-        <p:nvSpPr>
-          <p:cNvPr id="8" name="Footer Placeholder 7">
-            <a:extLst>
-              <a:ext uri="{FF2B5EF4-FFF2-40B4-BE49-F238E27FC236}">
-                <a16:creationId xmlns:a16="http://schemas.microsoft.com/office/drawing/2014/main" id="{C2F6AD5B-E994-0A83-78C8-94E2F6F39074}"/>
-              </a:ext>
-            </a:extLst>
-          </p:cNvPr>
-          <p:cNvSpPr>
-            <a:spLocks noGrp="1"/>
-          </p:cNvSpPr>
-          <p:nvPr>
-            <p:ph type="ftr" sz="quarter" idx="11"/>
-          </p:nvPr>
-        </p:nvSpPr>
-        <p:spPr/>
-        <p:txBody>
-          <a:bodyPr/>
-          <a:lstStyle/>
-          <a:p>
-            <a:r>
-              <a:rPr lang="en-US"/>
-              <a:t>Corbin Ferguson</a:t>
-            </a:r>
-            <a:endParaRPr lang="en-US" dirty="0"/>
-          </a:p>
-        </p:txBody>
-      </p:sp>
-      <p:pic>
-        <p:nvPicPr>
-          <p:cNvPr id="4100" name="Picture 4">
-            <a:extLst>
-              <a:ext uri="{FF2B5EF4-FFF2-40B4-BE49-F238E27FC236}">
-                <a16:creationId xmlns:a16="http://schemas.microsoft.com/office/drawing/2014/main" id="{BB53261F-4A38-01BF-14A0-AC05F4918629}"/>
+                <a16:creationId xmlns:a16="http://schemas.microsoft.com/office/drawing/2014/main" id="{A889D74E-A641-8FCA-9F55-93231CDB546D}"/>
               </a:ext>
             </a:extLst>
           </p:cNvPr>
           <p:cNvPicPr>
-            <a:picLocks noChangeAspect="1" noChangeArrowheads="1"/>
+            <a:picLocks noChangeAspect="1"/>
           </p:cNvPicPr>
           <p:nvPr/>
         </p:nvPicPr>
         <p:blipFill>
-          <a:blip r:embed="rId2" cstate="print">
-            <a:extLst>
-              <a:ext uri="{28A0092B-C50C-407E-A947-70E740481C1C}">
-                <a14:useLocalDpi xmlns:a14="http://schemas.microsoft.com/office/drawing/2010/main" val="0"/>
-              </a:ext>
-            </a:extLst>
-          </a:blip>
-          <a:srcRect/>
+          <a:blip r:embed="rId2"/>
           <a:stretch>
             <a:fillRect/>
           </a:stretch>
         </p:blipFill>
-        <p:spPr bwMode="auto">
+        <p:spPr>
           <a:xfrm>
-            <a:off x="5660591" y="194736"/>
-            <a:ext cx="6482994" cy="5720289"/>
+            <a:off x="1176290" y="1160462"/>
+            <a:ext cx="9839419" cy="5113337"/>
           </a:xfrm>
           <a:prstGeom prst="rect">
             <a:avLst/>
           </a:prstGeom>
           <a:noFill/>
-          <a:extLst>
-            <a:ext uri="{909E8E84-426E-40DD-AFC4-6F175D3DCCD1}">
-              <a14:hiddenFill xmlns:a14="http://schemas.microsoft.com/office/drawing/2010/main">
-                <a:solidFill>
-                  <a:srgbClr val="FFFFFF"/>
-                </a:solidFill>
-              </a14:hiddenFill>
-            </a:ext>
-          </a:extLst>
         </p:spPr>
       </p:pic>
-      <p:pic>
-        <p:nvPicPr>
-          <p:cNvPr id="4102" name="Picture 6">
+      <p:sp>
+        <p:nvSpPr>
+          <p:cNvPr id="8" name="Footer Placeholder 7">
             <a:extLst>
               <a:ext uri="{FF2B5EF4-FFF2-40B4-BE49-F238E27FC236}">
-                <a16:creationId xmlns:a16="http://schemas.microsoft.com/office/drawing/2014/main" id="{1369CFC5-7E6D-03BD-C62A-74FBF0D2D610}"/>
+                <a16:creationId xmlns:a16="http://schemas.microsoft.com/office/drawing/2014/main" id="{71C973FB-1860-D33D-FFB0-E373255B1325}"/>
               </a:ext>
             </a:extLst>
           </p:cNvPr>
-          <p:cNvPicPr>
-            <a:picLocks noChangeAspect="1" noChangeArrowheads="1"/>
-          </p:cNvPicPr>
-          <p:nvPr/>
-        </p:nvPicPr>
-        <p:blipFill>
-          <a:blip r:embed="rId3" cstate="print">
+          <p:cNvSpPr>
+            <a:spLocks noGrp="1"/>
+          </p:cNvSpPr>
+          <p:nvPr>
+            <p:ph type="ftr" sz="quarter" idx="19"/>
+          </p:nvPr>
+        </p:nvSpPr>
+        <p:spPr>
+          <a:xfrm>
+            <a:off x="4086351" y="6469380"/>
+            <a:ext cx="1130300" cy="180000"/>
+          </a:xfrm>
+        </p:spPr>
+        <p:txBody>
+          <a:bodyPr wrap="none" anchor="ctr">
+            <a:normAutofit/>
+          </a:bodyPr>
+          <a:lstStyle/>
+          <a:p>
+            <a:pPr>
+              <a:lnSpc>
+                <a:spcPct val="90000"/>
+              </a:lnSpc>
+              <a:spcAft>
+                <a:spcPts val="600"/>
+              </a:spcAft>
+            </a:pPr>
+            <a:r>
+              <a:rPr lang="en-US"/>
+              <a:t>Corbin Ferguson</a:t>
+            </a:r>
+          </a:p>
+        </p:txBody>
+      </p:sp>
+      <p:sp>
+        <p:nvSpPr>
+          <p:cNvPr id="7" name="Slide Number Placeholder 6">
             <a:extLst>
-              <a:ext uri="{28A0092B-C50C-407E-A947-70E740481C1C}">
-                <a14:useLocalDpi xmlns:a14="http://schemas.microsoft.com/office/drawing/2010/main" val="0"/>
+              <a:ext uri="{FF2B5EF4-FFF2-40B4-BE49-F238E27FC236}">
+                <a16:creationId xmlns:a16="http://schemas.microsoft.com/office/drawing/2014/main" id="{FF861633-550D-9192-7E16-88623F1FDD40}"/>
               </a:ext>
             </a:extLst>
-          </a:blip>
-          <a:srcRect/>
-          <a:stretch>
-            <a:fillRect/>
-          </a:stretch>
-        </p:blipFill>
-        <p:spPr bwMode="auto">
+          </p:cNvPr>
+          <p:cNvSpPr>
+            <a:spLocks noGrp="1"/>
+          </p:cNvSpPr>
+          <p:nvPr>
+            <p:ph type="sldNum" sz="quarter" idx="20"/>
+          </p:nvPr>
+        </p:nvSpPr>
+        <p:spPr>
           <a:xfrm>
-            <a:off x="48416" y="1482391"/>
-            <a:ext cx="5677702" cy="3727784"/>
+            <a:off x="1633051" y="6469380"/>
+            <a:ext cx="571500" cy="180000"/>
           </a:xfrm>
-          <a:prstGeom prst="rect">
-            <a:avLst/>
-          </a:prstGeom>
-          <a:noFill/>
-          <a:extLst>
-            <a:ext uri="{909E8E84-426E-40DD-AFC4-6F175D3DCCD1}">
-              <a14:hiddenFill xmlns:a14="http://schemas.microsoft.com/office/drawing/2010/main">
-                <a:solidFill>
-                  <a:srgbClr val="FFFFFF"/>
-                </a:solidFill>
-              </a14:hiddenFill>
-            </a:ext>
-          </a:extLst>
         </p:spPr>
-      </p:pic>
+        <p:txBody>
+          <a:bodyPr wrap="none" anchor="ctr">
+            <a:normAutofit/>
+          </a:bodyPr>
+          <a:lstStyle/>
+          <a:p>
+            <a:pPr>
+              <a:lnSpc>
+                <a:spcPct val="90000"/>
+              </a:lnSpc>
+              <a:spcAft>
+                <a:spcPts val="600"/>
+              </a:spcAft>
+            </a:pPr>
+            <a:r>
+              <a:rPr lang="en-US"/>
+              <a:t>Slide </a:t>
+            </a:r>
+            <a:fld id="{C6F8E2D1-BFA0-484A-B7F1-E348F2594759}" type="slidenum">
+              <a:rPr lang="en-US" smtClean="0"/>
+              <a:pPr>
+                <a:lnSpc>
+                  <a:spcPct val="90000"/>
+                </a:lnSpc>
+                <a:spcAft>
+                  <a:spcPts val="600"/>
+                </a:spcAft>
+              </a:pPr>
+              <a:t>9</a:t>
+            </a:fld>
+            <a:endParaRPr lang="en-US"/>
+          </a:p>
+        </p:txBody>
+      </p:sp>
+      <p:sp>
+        <p:nvSpPr>
+          <p:cNvPr id="4" name="Date Placeholder 3">
+            <a:extLst>
+              <a:ext uri="{FF2B5EF4-FFF2-40B4-BE49-F238E27FC236}">
+                <a16:creationId xmlns:a16="http://schemas.microsoft.com/office/drawing/2014/main" id="{5D0DCAB8-9A4F-6068-74B2-D5C8356B650C}"/>
+              </a:ext>
+            </a:extLst>
+          </p:cNvPr>
+          <p:cNvSpPr>
+            <a:spLocks noGrp="1"/>
+          </p:cNvSpPr>
+          <p:nvPr>
+            <p:ph type="dt" sz="half" idx="21"/>
+          </p:nvPr>
+        </p:nvSpPr>
+        <p:spPr>
+          <a:xfrm>
+            <a:off x="334963" y="194736"/>
+            <a:ext cx="9674225" cy="180000"/>
+          </a:xfrm>
+        </p:spPr>
+        <p:txBody>
+          <a:bodyPr wrap="none" anchor="t">
+            <a:normAutofit/>
+          </a:bodyPr>
+          <a:lstStyle/>
+          <a:p>
+            <a:pPr>
+              <a:lnSpc>
+                <a:spcPct val="90000"/>
+              </a:lnSpc>
+              <a:spcAft>
+                <a:spcPts val="600"/>
+              </a:spcAft>
+            </a:pPr>
+            <a:r>
+              <a:rPr lang="en-US"/>
+              <a:t>L5X Automation Build Tool</a:t>
+            </a:r>
+          </a:p>
+        </p:txBody>
+      </p:sp>
+      <p:sp>
+        <p:nvSpPr>
+          <p:cNvPr id="2" name="Title 1">
+            <a:extLst>
+              <a:ext uri="{FF2B5EF4-FFF2-40B4-BE49-F238E27FC236}">
+                <a16:creationId xmlns:a16="http://schemas.microsoft.com/office/drawing/2014/main" id="{5EBCB58C-1369-EDD7-5D5E-7C1E1415DB2E}"/>
+              </a:ext>
+            </a:extLst>
+          </p:cNvPr>
+          <p:cNvSpPr>
+            <a:spLocks noGrp="1"/>
+          </p:cNvSpPr>
+          <p:nvPr>
+            <p:ph type="title"/>
+          </p:nvPr>
+        </p:nvSpPr>
+        <p:spPr>
+          <a:xfrm>
+            <a:off x="334963" y="620690"/>
+            <a:ext cx="11522075" cy="360041"/>
+          </a:xfrm>
+        </p:spPr>
+        <p:txBody>
+          <a:bodyPr wrap="none" anchor="t">
+            <a:normAutofit/>
+          </a:bodyPr>
+          <a:lstStyle/>
+          <a:p>
+            <a:r>
+              <a:rPr lang="en-US" dirty="0"/>
+              <a:t>Class Diagram Cont.</a:t>
+            </a:r>
+          </a:p>
+        </p:txBody>
+      </p:sp>
     </p:spTree>
     <p:extLst>
       <p:ext uri="{BB962C8B-B14F-4D97-AF65-F5344CB8AC3E}">
-        <p14:creationId xmlns:p14="http://schemas.microsoft.com/office/powerpoint/2010/main" val="3038692604"/>
+        <p14:creationId xmlns:p14="http://schemas.microsoft.com/office/powerpoint/2010/main" val="1692918807"/>
       </p:ext>
     </p:extLst>
   </p:cSld>

--- a/Thesis Writing Documents/Project Development.pptx
+++ b/Thesis Writing Documents/Project Development.pptx
@@ -213,7 +213,7 @@
 <file path=ppt/revisionInfo.xml><?xml version="1.0" encoding="utf-8"?>
 <p1510:revInfo xmlns:a="http://schemas.openxmlformats.org/drawingml/2006/main" xmlns:r="http://schemas.openxmlformats.org/officeDocument/2006/relationships" xmlns:p1510="http://schemas.microsoft.com/office/powerpoint/2015/10/main">
   <p1510:revLst>
-    <p1510:client id="{F0E03B4B-CC56-43F1-8F18-BCA697229170}" v="263" dt="2026-03-16T16:46:06.936"/>
+    <p1510:client id="{F0E03B4B-CC56-43F1-8F18-BCA697229170}" v="271" dt="2026-03-16T18:23:33.003"/>
   </p1510:revLst>
 </p1510:revInfo>
 </file>
@@ -223,7 +223,7 @@
   <pc:docChgLst>
     <pc:chgData name="Corbin Ferguson" userId="34a864e2-e65e-4cb2-823c-dc28f73f0e40" providerId="ADAL" clId="{8D2D96CF-1319-4CCC-9EA9-073445628049}"/>
     <pc:docChg chg="undo custSel addSld modSld sldOrd">
-      <pc:chgData name="Corbin Ferguson" userId="34a864e2-e65e-4cb2-823c-dc28f73f0e40" providerId="ADAL" clId="{8D2D96CF-1319-4CCC-9EA9-073445628049}" dt="2026-03-16T16:46:09.342" v="1562" actId="26606"/>
+      <pc:chgData name="Corbin Ferguson" userId="34a864e2-e65e-4cb2-823c-dc28f73f0e40" providerId="ADAL" clId="{8D2D96CF-1319-4CCC-9EA9-073445628049}" dt="2026-03-16T18:25:23.793" v="1576" actId="14100"/>
       <pc:docMkLst>
         <pc:docMk/>
       </pc:docMkLst>
@@ -289,6 +289,21 @@
         </pc:spChg>
       </pc:sldChg>
       <pc:sldChg chg="modSp mod">
+        <pc:chgData name="Corbin Ferguson" userId="34a864e2-e65e-4cb2-823c-dc28f73f0e40" providerId="ADAL" clId="{8D2D96CF-1319-4CCC-9EA9-073445628049}" dt="2026-03-16T18:25:23.793" v="1576" actId="14100"/>
+        <pc:sldMkLst>
+          <pc:docMk/>
+          <pc:sldMk cId="1979168377" sldId="2146848303"/>
+        </pc:sldMkLst>
+        <pc:picChg chg="mod">
+          <ac:chgData name="Corbin Ferguson" userId="34a864e2-e65e-4cb2-823c-dc28f73f0e40" providerId="ADAL" clId="{8D2D96CF-1319-4CCC-9EA9-073445628049}" dt="2026-03-16T18:25:23.793" v="1576" actId="14100"/>
+          <ac:picMkLst>
+            <pc:docMk/>
+            <pc:sldMk cId="1979168377" sldId="2146848303"/>
+            <ac:picMk id="15" creationId="{6244959B-B329-3457-CDC8-8A5F7BF28B7D}"/>
+          </ac:picMkLst>
+        </pc:picChg>
+      </pc:sldChg>
+      <pc:sldChg chg="modSp mod">
         <pc:chgData name="Corbin Ferguson" userId="34a864e2-e65e-4cb2-823c-dc28f73f0e40" providerId="ADAL" clId="{8D2D96CF-1319-4CCC-9EA9-073445628049}" dt="2026-03-16T15:06:18.204" v="1136" actId="20577"/>
         <pc:sldMkLst>
           <pc:docMk/>
@@ -332,6 +347,37 @@
             <ac:spMk id="13" creationId="{ED6C0032-109D-5E6D-74D4-9A87B9B556F0}"/>
           </ac:spMkLst>
         </pc:spChg>
+      </pc:sldChg>
+      <pc:sldChg chg="addSp delSp modSp mod">
+        <pc:chgData name="Corbin Ferguson" userId="34a864e2-e65e-4cb2-823c-dc28f73f0e40" providerId="ADAL" clId="{8D2D96CF-1319-4CCC-9EA9-073445628049}" dt="2026-03-16T18:23:33.003" v="1573" actId="14100"/>
+        <pc:sldMkLst>
+          <pc:docMk/>
+          <pc:sldMk cId="3092458060" sldId="2146848309"/>
+        </pc:sldMkLst>
+        <pc:spChg chg="add del">
+          <ac:chgData name="Corbin Ferguson" userId="34a864e2-e65e-4cb2-823c-dc28f73f0e40" providerId="ADAL" clId="{8D2D96CF-1319-4CCC-9EA9-073445628049}" dt="2026-03-16T18:23:22.880" v="1569" actId="22"/>
+          <ac:spMkLst>
+            <pc:docMk/>
+            <pc:sldMk cId="3092458060" sldId="2146848309"/>
+            <ac:spMk id="5" creationId="{8BC8D642-BC9E-D530-78FF-57DA6447CB56}"/>
+          </ac:spMkLst>
+        </pc:spChg>
+        <pc:picChg chg="del">
+          <ac:chgData name="Corbin Ferguson" userId="34a864e2-e65e-4cb2-823c-dc28f73f0e40" providerId="ADAL" clId="{8D2D96CF-1319-4CCC-9EA9-073445628049}" dt="2026-03-16T18:23:21.517" v="1567" actId="478"/>
+          <ac:picMkLst>
+            <pc:docMk/>
+            <pc:sldMk cId="3092458060" sldId="2146848309"/>
+            <ac:picMk id="5128" creationId="{0B2E5208-67CE-83DA-8360-9F0600144B16}"/>
+          </ac:picMkLst>
+        </pc:picChg>
+        <pc:picChg chg="add mod">
+          <ac:chgData name="Corbin Ferguson" userId="34a864e2-e65e-4cb2-823c-dc28f73f0e40" providerId="ADAL" clId="{8D2D96CF-1319-4CCC-9EA9-073445628049}" dt="2026-03-16T18:23:33.003" v="1573" actId="14100"/>
+          <ac:picMkLst>
+            <pc:docMk/>
+            <pc:sldMk cId="3092458060" sldId="2146848309"/>
+            <ac:picMk id="5132" creationId="{4666DD03-80DA-70E0-19B8-82E5620169CE}"/>
+          </ac:picMkLst>
+        </pc:picChg>
       </pc:sldChg>
       <pc:sldChg chg="modSp mod">
         <pc:chgData name="Corbin Ferguson" userId="34a864e2-e65e-4cb2-823c-dc28f73f0e40" providerId="ADAL" clId="{8D2D96CF-1319-4CCC-9EA9-073445628049}" dt="2026-03-16T14:42:17.759" v="600" actId="20577"/>
@@ -489,7 +535,7 @@
         </pc:spChg>
       </pc:sldChg>
       <pc:sldChg chg="addSp delSp modSp add mod modClrScheme chgLayout">
-        <pc:chgData name="Corbin Ferguson" userId="34a864e2-e65e-4cb2-823c-dc28f73f0e40" providerId="ADAL" clId="{8D2D96CF-1319-4CCC-9EA9-073445628049}" dt="2026-03-16T16:45:57.083" v="1559" actId="26606"/>
+        <pc:chgData name="Corbin Ferguson" userId="34a864e2-e65e-4cb2-823c-dc28f73f0e40" providerId="ADAL" clId="{8D2D96CF-1319-4CCC-9EA9-073445628049}" dt="2026-03-16T17:39:26.042" v="1566" actId="26606"/>
         <pc:sldMkLst>
           <pc:docMk/>
           <pc:sldMk cId="2077614573" sldId="2146848316"/>
@@ -1190,12 +1236,28 @@
             <ac:picMk id="8360" creationId="{AA1DB74E-7D0E-154A-067C-B10A6CA3976F}"/>
           </ac:picMkLst>
         </pc:picChg>
-        <pc:picChg chg="add mod ord">
-          <ac:chgData name="Corbin Ferguson" userId="34a864e2-e65e-4cb2-823c-dc28f73f0e40" providerId="ADAL" clId="{8D2D96CF-1319-4CCC-9EA9-073445628049}" dt="2026-03-16T16:45:57.083" v="1559" actId="26606"/>
+        <pc:picChg chg="add del mod ord">
+          <ac:chgData name="Corbin Ferguson" userId="34a864e2-e65e-4cb2-823c-dc28f73f0e40" providerId="ADAL" clId="{8D2D96CF-1319-4CCC-9EA9-073445628049}" dt="2026-03-16T17:39:05.796" v="1563" actId="478"/>
           <ac:picMkLst>
             <pc:docMk/>
             <pc:sldMk cId="2077614573" sldId="2146848316"/>
             <ac:picMk id="8362" creationId="{5B32580E-8B7E-FCBF-145C-131D2AA75C68}"/>
+          </ac:picMkLst>
+        </pc:picChg>
+        <pc:picChg chg="add mod">
+          <ac:chgData name="Corbin Ferguson" userId="34a864e2-e65e-4cb2-823c-dc28f73f0e40" providerId="ADAL" clId="{8D2D96CF-1319-4CCC-9EA9-073445628049}" dt="2026-03-16T17:39:08.133" v="1564"/>
+          <ac:picMkLst>
+            <pc:docMk/>
+            <pc:sldMk cId="2077614573" sldId="2146848316"/>
+            <ac:picMk id="8364" creationId="{619C7DB7-7434-0284-720A-6D16CC9C0D27}"/>
+          </ac:picMkLst>
+        </pc:picChg>
+        <pc:picChg chg="add mod ord">
+          <ac:chgData name="Corbin Ferguson" userId="34a864e2-e65e-4cb2-823c-dc28f73f0e40" providerId="ADAL" clId="{8D2D96CF-1319-4CCC-9EA9-073445628049}" dt="2026-03-16T17:39:26.042" v="1566" actId="26606"/>
+          <ac:picMkLst>
+            <pc:docMk/>
+            <pc:sldMk cId="2077614573" sldId="2146848316"/>
+            <ac:picMk id="8366" creationId="{60AE9E24-9AB4-5014-B6BD-6F056F5807BA}"/>
           </ac:picMkLst>
         </pc:picChg>
         <pc:picChg chg="mod modVis">
@@ -20208,10 +20270,10 @@
       </p:pic>
       <p:pic>
         <p:nvPicPr>
-          <p:cNvPr id="5128" name="Picture 8">
+          <p:cNvPr id="5130" name="Picture 10">
             <a:extLst>
               <a:ext uri="{FF2B5EF4-FFF2-40B4-BE49-F238E27FC236}">
-                <a16:creationId xmlns:a16="http://schemas.microsoft.com/office/drawing/2014/main" id="{0B2E5208-67CE-83DA-8360-9F0600144B16}"/>
+                <a16:creationId xmlns:a16="http://schemas.microsoft.com/office/drawing/2014/main" id="{B65222FB-CA7D-3194-4E01-2EC0ADCE666F}"/>
               </a:ext>
             </a:extLst>
           </p:cNvPr>
@@ -20235,8 +20297,8 @@
         </p:blipFill>
         <p:spPr bwMode="auto">
           <a:xfrm>
-            <a:off x="5216650" y="3429000"/>
-            <a:ext cx="5704579" cy="2276475"/>
+            <a:off x="334962" y="1445743"/>
+            <a:ext cx="4880502" cy="2154690"/>
           </a:xfrm>
           <a:prstGeom prst="rect">
             <a:avLst/>
@@ -20255,10 +20317,10 @@
       </p:pic>
       <p:pic>
         <p:nvPicPr>
-          <p:cNvPr id="5130" name="Picture 10">
+          <p:cNvPr id="5132" name="Picture 12">
             <a:extLst>
               <a:ext uri="{FF2B5EF4-FFF2-40B4-BE49-F238E27FC236}">
-                <a16:creationId xmlns:a16="http://schemas.microsoft.com/office/drawing/2014/main" id="{B65222FB-CA7D-3194-4E01-2EC0ADCE666F}"/>
+                <a16:creationId xmlns:a16="http://schemas.microsoft.com/office/drawing/2014/main" id="{4666DD03-80DA-70E0-19B8-82E5620169CE}"/>
               </a:ext>
             </a:extLst>
           </p:cNvPr>
@@ -20268,7 +20330,7 @@
           <p:nvPr/>
         </p:nvPicPr>
         <p:blipFill>
-          <a:blip r:embed="rId5" cstate="print">
+          <a:blip r:embed="rId5">
             <a:extLst>
               <a:ext uri="{28A0092B-C50C-407E-A947-70E740481C1C}">
                 <a14:useLocalDpi xmlns:a14="http://schemas.microsoft.com/office/drawing/2010/main" val="0"/>
@@ -20282,8 +20344,8 @@
         </p:blipFill>
         <p:spPr bwMode="auto">
           <a:xfrm>
-            <a:off x="334962" y="1445743"/>
-            <a:ext cx="4880502" cy="2154690"/>
+            <a:off x="5310187" y="3590907"/>
+            <a:ext cx="5618325" cy="2400317"/>
           </a:xfrm>
           <a:prstGeom prst="rect">
             <a:avLst/>
@@ -23497,8 +23559,8 @@
         </p:blipFill>
         <p:spPr>
           <a:xfrm>
-            <a:off x="1864479" y="580443"/>
-            <a:ext cx="9992558" cy="5656867"/>
+            <a:off x="999282" y="310829"/>
+            <a:ext cx="10468818" cy="5926482"/>
           </a:xfrm>
           <a:prstGeom prst="rect">
             <a:avLst/>
@@ -23543,10 +23605,10 @@
       </p:grpSpPr>
       <p:pic>
         <p:nvPicPr>
-          <p:cNvPr id="8362" name="Picture 8361">
+          <p:cNvPr id="8366" name="Picture 8365">
             <a:extLst>
               <a:ext uri="{FF2B5EF4-FFF2-40B4-BE49-F238E27FC236}">
-                <a16:creationId xmlns:a16="http://schemas.microsoft.com/office/drawing/2014/main" id="{5B32580E-8B7E-FCBF-145C-131D2AA75C68}"/>
+                <a16:creationId xmlns:a16="http://schemas.microsoft.com/office/drawing/2014/main" id="{60AE9E24-9AB4-5014-B6BD-6F056F5807BA}"/>
               </a:ext>
             </a:extLst>
           </p:cNvPr>
@@ -23563,8 +23625,8 @@
         </p:blipFill>
         <p:spPr>
           <a:xfrm>
-            <a:off x="2687786" y="1160462"/>
-            <a:ext cx="6816427" cy="5113337"/>
+            <a:off x="2181925" y="1160462"/>
+            <a:ext cx="7828149" cy="5113337"/>
           </a:xfrm>
           <a:prstGeom prst="rect">
             <a:avLst/>

--- a/Thesis Writing Documents/Project Development.pptx
+++ b/Thesis Writing Documents/Project Development.pptx
@@ -5,10 +5,10 @@
     <p:sldMasterId id="2147483648" r:id="rId5"/>
   </p:sldMasterIdLst>
   <p:notesMasterIdLst>
-    <p:notesMasterId r:id="rId25"/>
+    <p:notesMasterId r:id="rId30"/>
   </p:notesMasterIdLst>
   <p:handoutMasterIdLst>
-    <p:handoutMasterId r:id="rId26"/>
+    <p:handoutMasterId r:id="rId31"/>
   </p:handoutMasterIdLst>
   <p:sldIdLst>
     <p:sldId id="256" r:id="rId6"/>
@@ -17,24 +17,29 @@
     <p:sldId id="2146848304" r:id="rId9"/>
     <p:sldId id="2146848305" r:id="rId10"/>
     <p:sldId id="2146848306" r:id="rId11"/>
-    <p:sldId id="2146848303" r:id="rId12"/>
-    <p:sldId id="2146848316" r:id="rId13"/>
-    <p:sldId id="2146848317" r:id="rId14"/>
-    <p:sldId id="2146848307" r:id="rId15"/>
-    <p:sldId id="2146848308" r:id="rId16"/>
-    <p:sldId id="2146848309" r:id="rId17"/>
-    <p:sldId id="2146848311" r:id="rId18"/>
-    <p:sldId id="2146848310" r:id="rId19"/>
-    <p:sldId id="2146848300" r:id="rId20"/>
-    <p:sldId id="2146848312" r:id="rId21"/>
-    <p:sldId id="2146848314" r:id="rId22"/>
-    <p:sldId id="2146848313" r:id="rId23"/>
-    <p:sldId id="2146848315" r:id="rId24"/>
+    <p:sldId id="2146848319" r:id="rId12"/>
+    <p:sldId id="2146848322" r:id="rId13"/>
+    <p:sldId id="2146848323" r:id="rId14"/>
+    <p:sldId id="2146848318" r:id="rId15"/>
+    <p:sldId id="2146848324" r:id="rId16"/>
+    <p:sldId id="2146848325" r:id="rId17"/>
+    <p:sldId id="2146848316" r:id="rId18"/>
+    <p:sldId id="2146848317" r:id="rId19"/>
+    <p:sldId id="2146848307" r:id="rId20"/>
+    <p:sldId id="2146848308" r:id="rId21"/>
+    <p:sldId id="2146848309" r:id="rId22"/>
+    <p:sldId id="2146848311" r:id="rId23"/>
+    <p:sldId id="2146848310" r:id="rId24"/>
+    <p:sldId id="2146848300" r:id="rId25"/>
+    <p:sldId id="2146848312" r:id="rId26"/>
+    <p:sldId id="2146848314" r:id="rId27"/>
+    <p:sldId id="2146848313" r:id="rId28"/>
+    <p:sldId id="2146848315" r:id="rId29"/>
   </p:sldIdLst>
   <p:sldSz cx="12192000" cy="6858000"/>
   <p:notesSz cx="6800850" cy="9926638"/>
   <p:custDataLst>
-    <p:tags r:id="rId27"/>
+    <p:tags r:id="rId32"/>
   </p:custDataLst>
   <p:defaultTextStyle>
     <a:defPPr>
@@ -213,7 +218,7 @@
 <file path=ppt/revisionInfo.xml><?xml version="1.0" encoding="utf-8"?>
 <p1510:revInfo xmlns:a="http://schemas.openxmlformats.org/drawingml/2006/main" xmlns:r="http://schemas.openxmlformats.org/officeDocument/2006/relationships" xmlns:p1510="http://schemas.microsoft.com/office/powerpoint/2015/10/main">
   <p1510:revLst>
-    <p1510:client id="{F0E03B4B-CC56-43F1-8F18-BCA697229170}" v="271" dt="2026-03-16T18:23:33.003"/>
+    <p1510:client id="{F0E03B4B-CC56-43F1-8F18-BCA697229170}" v="436" dt="2026-03-16T21:03:18.013"/>
   </p1510:revLst>
 </p1510:revInfo>
 </file>
@@ -222,8 +227,8 @@
 <pc:chgInfo xmlns:a="http://schemas.openxmlformats.org/drawingml/2006/main" xmlns:r="http://schemas.openxmlformats.org/officeDocument/2006/relationships" xmlns:ac="http://schemas.microsoft.com/office/drawing/2013/main/command" xmlns:pc="http://schemas.microsoft.com/office/powerpoint/2013/main/command">
   <pc:docChgLst>
     <pc:chgData name="Corbin Ferguson" userId="34a864e2-e65e-4cb2-823c-dc28f73f0e40" providerId="ADAL" clId="{8D2D96CF-1319-4CCC-9EA9-073445628049}"/>
-    <pc:docChg chg="undo custSel addSld modSld sldOrd">
-      <pc:chgData name="Corbin Ferguson" userId="34a864e2-e65e-4cb2-823c-dc28f73f0e40" providerId="ADAL" clId="{8D2D96CF-1319-4CCC-9EA9-073445628049}" dt="2026-03-16T18:25:23.793" v="1576" actId="14100"/>
+    <pc:docChg chg="undo redo custSel addSld delSld modSld sldOrd">
+      <pc:chgData name="Corbin Ferguson" userId="34a864e2-e65e-4cb2-823c-dc28f73f0e40" providerId="ADAL" clId="{8D2D96CF-1319-4CCC-9EA9-073445628049}" dt="2026-03-16T21:03:53.279" v="2075" actId="1036"/>
       <pc:docMkLst>
         <pc:docMk/>
       </pc:docMkLst>
@@ -288,14 +293,30 @@
           </ac:spMkLst>
         </pc:spChg>
       </pc:sldChg>
-      <pc:sldChg chg="modSp mod">
-        <pc:chgData name="Corbin Ferguson" userId="34a864e2-e65e-4cb2-823c-dc28f73f0e40" providerId="ADAL" clId="{8D2D96CF-1319-4CCC-9EA9-073445628049}" dt="2026-03-16T18:25:23.793" v="1576" actId="14100"/>
+      <pc:sldChg chg="addSp delSp modSp del mod delAnim modAnim">
+        <pc:chgData name="Corbin Ferguson" userId="34a864e2-e65e-4cb2-823c-dc28f73f0e40" providerId="ADAL" clId="{8D2D96CF-1319-4CCC-9EA9-073445628049}" dt="2026-03-16T20:32:39.784" v="1827" actId="2696"/>
         <pc:sldMkLst>
           <pc:docMk/>
           <pc:sldMk cId="1979168377" sldId="2146848303"/>
         </pc:sldMkLst>
-        <pc:picChg chg="mod">
-          <ac:chgData name="Corbin Ferguson" userId="34a864e2-e65e-4cb2-823c-dc28f73f0e40" providerId="ADAL" clId="{8D2D96CF-1319-4CCC-9EA9-073445628049}" dt="2026-03-16T18:25:23.793" v="1576" actId="14100"/>
+        <pc:spChg chg="add del mod">
+          <ac:chgData name="Corbin Ferguson" userId="34a864e2-e65e-4cb2-823c-dc28f73f0e40" providerId="ADAL" clId="{8D2D96CF-1319-4CCC-9EA9-073445628049}" dt="2026-03-16T20:32:17.428" v="1824" actId="478"/>
+          <ac:spMkLst>
+            <pc:docMk/>
+            <pc:sldMk cId="1979168377" sldId="2146848303"/>
+            <ac:spMk id="3" creationId="{7E1F48FE-02C8-5BA2-C31C-33633F3769D0}"/>
+          </ac:spMkLst>
+        </pc:spChg>
+        <pc:spChg chg="add del mod ord">
+          <ac:chgData name="Corbin Ferguson" userId="34a864e2-e65e-4cb2-823c-dc28f73f0e40" providerId="ADAL" clId="{8D2D96CF-1319-4CCC-9EA9-073445628049}" dt="2026-03-16T20:01:48.402" v="1596" actId="11529"/>
+          <ac:spMkLst>
+            <pc:docMk/>
+            <pc:sldMk cId="1979168377" sldId="2146848303"/>
+            <ac:spMk id="5" creationId="{B39D629C-D470-8907-C1E4-DDBFE74A2B19}"/>
+          </ac:spMkLst>
+        </pc:spChg>
+        <pc:picChg chg="add del mod modCrop">
+          <ac:chgData name="Corbin Ferguson" userId="34a864e2-e65e-4cb2-823c-dc28f73f0e40" providerId="ADAL" clId="{8D2D96CF-1319-4CCC-9EA9-073445628049}" dt="2026-03-16T20:32:37.321" v="1826" actId="732"/>
           <ac:picMkLst>
             <pc:docMk/>
             <pc:sldMk cId="1979168377" sldId="2146848303"/>
@@ -1377,6 +1398,430 @@
             <pc:docMk/>
             <pc:sldMk cId="1692918807" sldId="2146848317"/>
             <ac:picMk id="10910" creationId="{5EB4AF2A-E1DF-5181-7810-0E4B05E08A25}"/>
+          </ac:picMkLst>
+        </pc:picChg>
+      </pc:sldChg>
+      <pc:sldChg chg="addSp delSp modSp add mod modTransition delAnim modAnim">
+        <pc:chgData name="Corbin Ferguson" userId="34a864e2-e65e-4cb2-823c-dc28f73f0e40" providerId="ADAL" clId="{8D2D96CF-1319-4CCC-9EA9-073445628049}" dt="2026-03-16T20:58:06.345" v="2029" actId="1035"/>
+        <pc:sldMkLst>
+          <pc:docMk/>
+          <pc:sldMk cId="3831013115" sldId="2146848318"/>
+        </pc:sldMkLst>
+        <pc:spChg chg="mod">
+          <ac:chgData name="Corbin Ferguson" userId="34a864e2-e65e-4cb2-823c-dc28f73f0e40" providerId="ADAL" clId="{8D2D96CF-1319-4CCC-9EA9-073445628049}" dt="2026-03-16T20:06:27.829" v="1625" actId="20577"/>
+          <ac:spMkLst>
+            <pc:docMk/>
+            <pc:sldMk cId="3831013115" sldId="2146848318"/>
+            <ac:spMk id="2" creationId="{C6FD6CC9-4051-8C8E-6F53-6558CC8D4A8F}"/>
+          </ac:spMkLst>
+        </pc:spChg>
+        <pc:spChg chg="del">
+          <ac:chgData name="Corbin Ferguson" userId="34a864e2-e65e-4cb2-823c-dc28f73f0e40" providerId="ADAL" clId="{8D2D96CF-1319-4CCC-9EA9-073445628049}" dt="2026-03-16T20:05:05.817" v="1598" actId="478"/>
+          <ac:spMkLst>
+            <pc:docMk/>
+            <pc:sldMk cId="3831013115" sldId="2146848318"/>
+            <ac:spMk id="3" creationId="{FA7BB05D-74E8-FD1A-F596-C0FBAB1002C2}"/>
+          </ac:spMkLst>
+        </pc:spChg>
+        <pc:spChg chg="add del mod">
+          <ac:chgData name="Corbin Ferguson" userId="34a864e2-e65e-4cb2-823c-dc28f73f0e40" providerId="ADAL" clId="{8D2D96CF-1319-4CCC-9EA9-073445628049}" dt="2026-03-16T20:38:42.029" v="1914" actId="478"/>
+          <ac:spMkLst>
+            <pc:docMk/>
+            <pc:sldMk cId="3831013115" sldId="2146848318"/>
+            <ac:spMk id="9" creationId="{A9535BEC-4949-27A6-BC75-04F113251855}"/>
+          </ac:spMkLst>
+        </pc:spChg>
+        <pc:spChg chg="add mod">
+          <ac:chgData name="Corbin Ferguson" userId="34a864e2-e65e-4cb2-823c-dc28f73f0e40" providerId="ADAL" clId="{8D2D96CF-1319-4CCC-9EA9-073445628049}" dt="2026-03-16T20:58:06.345" v="2029" actId="1035"/>
+          <ac:spMkLst>
+            <pc:docMk/>
+            <pc:sldMk cId="3831013115" sldId="2146848318"/>
+            <ac:spMk id="11" creationId="{C63E6493-7963-69F9-0E49-FBFB34C98CC6}"/>
+          </ac:spMkLst>
+        </pc:spChg>
+        <pc:picChg chg="add mod">
+          <ac:chgData name="Corbin Ferguson" userId="34a864e2-e65e-4cb2-823c-dc28f73f0e40" providerId="ADAL" clId="{8D2D96CF-1319-4CCC-9EA9-073445628049}" dt="2026-03-16T20:34:20.415" v="1854"/>
+          <ac:picMkLst>
+            <pc:docMk/>
+            <pc:sldMk cId="3831013115" sldId="2146848318"/>
+            <ac:picMk id="5" creationId="{D3A01971-F695-BDED-3EBA-C707EA559E2A}"/>
+          </ac:picMkLst>
+        </pc:picChg>
+        <pc:picChg chg="add del mod ord modVis">
+          <ac:chgData name="Corbin Ferguson" userId="34a864e2-e65e-4cb2-823c-dc28f73f0e40" providerId="ADAL" clId="{8D2D96CF-1319-4CCC-9EA9-073445628049}" dt="2026-03-16T20:48:04.603" v="1961" actId="478"/>
+          <ac:picMkLst>
+            <pc:docMk/>
+            <pc:sldMk cId="3831013115" sldId="2146848318"/>
+            <ac:picMk id="6" creationId="{A90F5D03-9F6A-ED0B-1CF7-9BD05CC11130}"/>
+          </ac:picMkLst>
+        </pc:picChg>
+        <pc:picChg chg="add mod ord modCrop">
+          <ac:chgData name="Corbin Ferguson" userId="34a864e2-e65e-4cb2-823c-dc28f73f0e40" providerId="ADAL" clId="{8D2D96CF-1319-4CCC-9EA9-073445628049}" dt="2026-03-16T20:54:25.304" v="2000" actId="14100"/>
+          <ac:picMkLst>
+            <pc:docMk/>
+            <pc:sldMk cId="3831013115" sldId="2146848318"/>
+            <ac:picMk id="10" creationId="{36552AD4-E539-C4C4-F016-02E1B6D7EFCF}"/>
+          </ac:picMkLst>
+        </pc:picChg>
+        <pc:picChg chg="mod ord modVis modCrop">
+          <ac:chgData name="Corbin Ferguson" userId="34a864e2-e65e-4cb2-823c-dc28f73f0e40" providerId="ADAL" clId="{8D2D96CF-1319-4CCC-9EA9-073445628049}" dt="2026-03-16T20:58:06.345" v="2029" actId="1035"/>
+          <ac:picMkLst>
+            <pc:docMk/>
+            <pc:sldMk cId="3831013115" sldId="2146848318"/>
+            <ac:picMk id="15" creationId="{5956B2B1-2846-2DBE-61A6-5C404403D377}"/>
+          </ac:picMkLst>
+        </pc:picChg>
+      </pc:sldChg>
+      <pc:sldChg chg="addSp delSp modSp add mod ord modAnim">
+        <pc:chgData name="Corbin Ferguson" userId="34a864e2-e65e-4cb2-823c-dc28f73f0e40" providerId="ADAL" clId="{8D2D96CF-1319-4CCC-9EA9-073445628049}" dt="2026-03-16T20:28:00.671" v="1805"/>
+        <pc:sldMkLst>
+          <pc:docMk/>
+          <pc:sldMk cId="3493033771" sldId="2146848319"/>
+        </pc:sldMkLst>
+        <pc:spChg chg="mod">
+          <ac:chgData name="Corbin Ferguson" userId="34a864e2-e65e-4cb2-823c-dc28f73f0e40" providerId="ADAL" clId="{8D2D96CF-1319-4CCC-9EA9-073445628049}" dt="2026-03-16T20:18:32.158" v="1713" actId="1076"/>
+          <ac:spMkLst>
+            <pc:docMk/>
+            <pc:sldMk cId="3493033771" sldId="2146848319"/>
+            <ac:spMk id="3" creationId="{ED261959-73BE-AC8F-A9DA-6CAEF5E9BB95}"/>
+          </ac:spMkLst>
+        </pc:spChg>
+        <pc:picChg chg="add del mod">
+          <ac:chgData name="Corbin Ferguson" userId="34a864e2-e65e-4cb2-823c-dc28f73f0e40" providerId="ADAL" clId="{8D2D96CF-1319-4CCC-9EA9-073445628049}" dt="2026-03-16T20:16:25.287" v="1699" actId="22"/>
+          <ac:picMkLst>
+            <pc:docMk/>
+            <pc:sldMk cId="3493033771" sldId="2146848319"/>
+            <ac:picMk id="6" creationId="{1B800A62-C9CF-F197-C3C4-1B88AD96D848}"/>
+          </ac:picMkLst>
+        </pc:picChg>
+        <pc:picChg chg="add del">
+          <ac:chgData name="Corbin Ferguson" userId="34a864e2-e65e-4cb2-823c-dc28f73f0e40" providerId="ADAL" clId="{8D2D96CF-1319-4CCC-9EA9-073445628049}" dt="2026-03-16T20:16:25.821" v="1700" actId="478"/>
+          <ac:picMkLst>
+            <pc:docMk/>
+            <pc:sldMk cId="3493033771" sldId="2146848319"/>
+            <ac:picMk id="15" creationId="{D209E713-11DD-16BC-02AC-C8F52F87573B}"/>
+          </ac:picMkLst>
+        </pc:picChg>
+        <pc:picChg chg="add mod">
+          <ac:chgData name="Corbin Ferguson" userId="34a864e2-e65e-4cb2-823c-dc28f73f0e40" providerId="ADAL" clId="{8D2D96CF-1319-4CCC-9EA9-073445628049}" dt="2026-03-16T20:17:35.362" v="1711" actId="962"/>
+          <ac:picMkLst>
+            <pc:docMk/>
+            <pc:sldMk cId="3493033771" sldId="2146848319"/>
+            <ac:picMk id="10242" creationId="{461CD87D-B8E2-EBAC-C16F-E56594D3F499}"/>
+          </ac:picMkLst>
+        </pc:picChg>
+      </pc:sldChg>
+      <pc:sldChg chg="addSp delSp modSp new del mod modTransition modClrScheme chgLayout">
+        <pc:chgData name="Corbin Ferguson" userId="34a864e2-e65e-4cb2-823c-dc28f73f0e40" providerId="ADAL" clId="{8D2D96CF-1319-4CCC-9EA9-073445628049}" dt="2026-03-16T20:23:33.104" v="1770" actId="2696"/>
+        <pc:sldMkLst>
+          <pc:docMk/>
+          <pc:sldMk cId="1273764086" sldId="2146848320"/>
+        </pc:sldMkLst>
+        <pc:spChg chg="mod">
+          <ac:chgData name="Corbin Ferguson" userId="34a864e2-e65e-4cb2-823c-dc28f73f0e40" providerId="ADAL" clId="{8D2D96CF-1319-4CCC-9EA9-073445628049}" dt="2026-03-16T20:08:58.922" v="1661" actId="20577"/>
+          <ac:spMkLst>
+            <pc:docMk/>
+            <pc:sldMk cId="1273764086" sldId="2146848320"/>
+            <ac:spMk id="2" creationId="{3FF556C6-C6F3-4F87-F431-44AF492D1490}"/>
+          </ac:spMkLst>
+        </pc:spChg>
+        <pc:spChg chg="del">
+          <ac:chgData name="Corbin Ferguson" userId="34a864e2-e65e-4cb2-823c-dc28f73f0e40" providerId="ADAL" clId="{8D2D96CF-1319-4CCC-9EA9-073445628049}" dt="2026-03-16T20:07:56.499" v="1635" actId="478"/>
+          <ac:spMkLst>
+            <pc:docMk/>
+            <pc:sldMk cId="1273764086" sldId="2146848320"/>
+            <ac:spMk id="3" creationId="{1CDC32B6-E4A1-267F-8C8F-73F879CA15C1}"/>
+          </ac:spMkLst>
+        </pc:spChg>
+        <pc:spChg chg="mod">
+          <ac:chgData name="Corbin Ferguson" userId="34a864e2-e65e-4cb2-823c-dc28f73f0e40" providerId="ADAL" clId="{8D2D96CF-1319-4CCC-9EA9-073445628049}" dt="2026-03-16T20:08:53.199" v="1652" actId="26606"/>
+          <ac:spMkLst>
+            <pc:docMk/>
+            <pc:sldMk cId="1273764086" sldId="2146848320"/>
+            <ac:spMk id="4" creationId="{CC58F1BF-F4DC-9174-D688-5197602569A5}"/>
+          </ac:spMkLst>
+        </pc:spChg>
+        <pc:spChg chg="mod">
+          <ac:chgData name="Corbin Ferguson" userId="34a864e2-e65e-4cb2-823c-dc28f73f0e40" providerId="ADAL" clId="{8D2D96CF-1319-4CCC-9EA9-073445628049}" dt="2026-03-16T20:08:53.199" v="1652" actId="26606"/>
+          <ac:spMkLst>
+            <pc:docMk/>
+            <pc:sldMk cId="1273764086" sldId="2146848320"/>
+            <ac:spMk id="5" creationId="{C177D47D-26ED-1097-B0B0-8511A0373FCF}"/>
+          </ac:spMkLst>
+        </pc:spChg>
+        <pc:spChg chg="mod">
+          <ac:chgData name="Corbin Ferguson" userId="34a864e2-e65e-4cb2-823c-dc28f73f0e40" providerId="ADAL" clId="{8D2D96CF-1319-4CCC-9EA9-073445628049}" dt="2026-03-16T20:08:53.199" v="1652" actId="26606"/>
+          <ac:spMkLst>
+            <pc:docMk/>
+            <pc:sldMk cId="1273764086" sldId="2146848320"/>
+            <ac:spMk id="6" creationId="{BD2E2879-AE0A-BC28-AA74-F77010345B5C}"/>
+          </ac:spMkLst>
+        </pc:spChg>
+        <pc:spChg chg="del">
+          <ac:chgData name="Corbin Ferguson" userId="34a864e2-e65e-4cb2-823c-dc28f73f0e40" providerId="ADAL" clId="{8D2D96CF-1319-4CCC-9EA9-073445628049}" dt="2026-03-16T20:07:55.485" v="1634" actId="478"/>
+          <ac:spMkLst>
+            <pc:docMk/>
+            <pc:sldMk cId="1273764086" sldId="2146848320"/>
+            <ac:spMk id="7" creationId="{E2E2C671-C5B3-D45A-4830-7022C8A74ABB}"/>
+          </ac:spMkLst>
+        </pc:spChg>
+        <pc:picChg chg="add del mod ord">
+          <ac:chgData name="Corbin Ferguson" userId="34a864e2-e65e-4cb2-823c-dc28f73f0e40" providerId="ADAL" clId="{8D2D96CF-1319-4CCC-9EA9-073445628049}" dt="2026-03-16T20:23:30.407" v="1769" actId="21"/>
+          <ac:picMkLst>
+            <pc:docMk/>
+            <pc:sldMk cId="1273764086" sldId="2146848320"/>
+            <ac:picMk id="9" creationId="{6A2D6E58-7219-5B27-BB56-A33060C076CA}"/>
+          </ac:picMkLst>
+        </pc:picChg>
+      </pc:sldChg>
+      <pc:sldChg chg="addSp delSp modSp add del mod ord modTransition delAnim">
+        <pc:chgData name="Corbin Ferguson" userId="34a864e2-e65e-4cb2-823c-dc28f73f0e40" providerId="ADAL" clId="{8D2D96CF-1319-4CCC-9EA9-073445628049}" dt="2026-03-16T20:31:23.737" v="1820" actId="2696"/>
+        <pc:sldMkLst>
+          <pc:docMk/>
+          <pc:sldMk cId="3845007870" sldId="2146848321"/>
+        </pc:sldMkLst>
+        <pc:spChg chg="del">
+          <ac:chgData name="Corbin Ferguson" userId="34a864e2-e65e-4cb2-823c-dc28f73f0e40" providerId="ADAL" clId="{8D2D96CF-1319-4CCC-9EA9-073445628049}" dt="2026-03-16T20:19:36.941" v="1721" actId="478"/>
+          <ac:spMkLst>
+            <pc:docMk/>
+            <pc:sldMk cId="3845007870" sldId="2146848321"/>
+            <ac:spMk id="3" creationId="{5BBD0DA6-64AC-B620-3CCA-F230B73FC9EC}"/>
+          </ac:spMkLst>
+        </pc:spChg>
+        <pc:picChg chg="add del mod">
+          <ac:chgData name="Corbin Ferguson" userId="34a864e2-e65e-4cb2-823c-dc28f73f0e40" providerId="ADAL" clId="{8D2D96CF-1319-4CCC-9EA9-073445628049}" dt="2026-03-16T20:26:07.031" v="1785" actId="478"/>
+          <ac:picMkLst>
+            <pc:docMk/>
+            <pc:sldMk cId="3845007870" sldId="2146848321"/>
+            <ac:picMk id="5" creationId="{906F1959-4BEB-93A8-2053-028869BA4669}"/>
+          </ac:picMkLst>
+        </pc:picChg>
+        <pc:picChg chg="del">
+          <ac:chgData name="Corbin Ferguson" userId="34a864e2-e65e-4cb2-823c-dc28f73f0e40" providerId="ADAL" clId="{8D2D96CF-1319-4CCC-9EA9-073445628049}" dt="2026-03-16T20:22:53.685" v="1767" actId="478"/>
+          <ac:picMkLst>
+            <pc:docMk/>
+            <pc:sldMk cId="3845007870" sldId="2146848321"/>
+            <ac:picMk id="15" creationId="{AFE6C1CC-E254-65E5-1018-8A1D8CE76641}"/>
+          </ac:picMkLst>
+        </pc:picChg>
+        <pc:picChg chg="mod">
+          <ac:chgData name="Corbin Ferguson" userId="34a864e2-e65e-4cb2-823c-dc28f73f0e40" providerId="ADAL" clId="{8D2D96CF-1319-4CCC-9EA9-073445628049}" dt="2026-03-16T20:30:33.896" v="1817" actId="14100"/>
+          <ac:picMkLst>
+            <pc:docMk/>
+            <pc:sldMk cId="3845007870" sldId="2146848321"/>
+            <ac:picMk id="10242" creationId="{CAFB99A3-B0BD-025E-F01B-2778A840C59D}"/>
+          </ac:picMkLst>
+        </pc:picChg>
+      </pc:sldChg>
+      <pc:sldChg chg="addSp delSp modSp add mod modTransition modAnim">
+        <pc:chgData name="Corbin Ferguson" userId="34a864e2-e65e-4cb2-823c-dc28f73f0e40" providerId="ADAL" clId="{8D2D96CF-1319-4CCC-9EA9-073445628049}" dt="2026-03-16T20:36:46.428" v="1904"/>
+        <pc:sldMkLst>
+          <pc:docMk/>
+          <pc:sldMk cId="462985986" sldId="2146848322"/>
+        </pc:sldMkLst>
+        <pc:spChg chg="add mod ord">
+          <ac:chgData name="Corbin Ferguson" userId="34a864e2-e65e-4cb2-823c-dc28f73f0e40" providerId="ADAL" clId="{8D2D96CF-1319-4CCC-9EA9-073445628049}" dt="2026-03-16T20:33:20.740" v="1836" actId="13244"/>
+          <ac:spMkLst>
+            <pc:docMk/>
+            <pc:sldMk cId="462985986" sldId="2146848322"/>
+            <ac:spMk id="6" creationId="{F97ADB1C-4CC1-050A-F7E0-C59FABA26D8C}"/>
+          </ac:spMkLst>
+        </pc:spChg>
+        <pc:picChg chg="add del mod">
+          <ac:chgData name="Corbin Ferguson" userId="34a864e2-e65e-4cb2-823c-dc28f73f0e40" providerId="ADAL" clId="{8D2D96CF-1319-4CCC-9EA9-073445628049}" dt="2026-03-16T20:24:44.714" v="1777" actId="478"/>
+          <ac:picMkLst>
+            <pc:docMk/>
+            <pc:sldMk cId="462985986" sldId="2146848322"/>
+            <ac:picMk id="3" creationId="{5EE884B0-0BCB-EC26-9B66-4AE2AEFF4D8A}"/>
+          </ac:picMkLst>
+        </pc:picChg>
+        <pc:picChg chg="add mod modVis">
+          <ac:chgData name="Corbin Ferguson" userId="34a864e2-e65e-4cb2-823c-dc28f73f0e40" providerId="ADAL" clId="{8D2D96CF-1319-4CCC-9EA9-073445628049}" dt="2026-03-16T20:36:12.514" v="1900" actId="14429"/>
+          <ac:picMkLst>
+            <pc:docMk/>
+            <pc:sldMk cId="462985986" sldId="2146848322"/>
+            <ac:picMk id="5" creationId="{771B8AC6-311F-3E75-33C2-615158918A8C}"/>
+          </ac:picMkLst>
+        </pc:picChg>
+        <pc:picChg chg="add del mod">
+          <ac:chgData name="Corbin Ferguson" userId="34a864e2-e65e-4cb2-823c-dc28f73f0e40" providerId="ADAL" clId="{8D2D96CF-1319-4CCC-9EA9-073445628049}" dt="2026-03-16T20:26:02.606" v="1783" actId="478"/>
+          <ac:picMkLst>
+            <pc:docMk/>
+            <pc:sldMk cId="462985986" sldId="2146848322"/>
+            <ac:picMk id="9" creationId="{6A2D6E58-7219-5B27-BB56-A33060C076CA}"/>
+          </ac:picMkLst>
+        </pc:picChg>
+        <pc:picChg chg="add mod modCrop">
+          <ac:chgData name="Corbin Ferguson" userId="34a864e2-e65e-4cb2-823c-dc28f73f0e40" providerId="ADAL" clId="{8D2D96CF-1319-4CCC-9EA9-073445628049}" dt="2026-03-16T20:33:42.403" v="1850" actId="962"/>
+          <ac:picMkLst>
+            <pc:docMk/>
+            <pc:sldMk cId="462985986" sldId="2146848322"/>
+            <ac:picMk id="10" creationId="{A8BD3308-9470-9AF2-87BA-D34E2A93E67A}"/>
+          </ac:picMkLst>
+        </pc:picChg>
+        <pc:picChg chg="mod modVis">
+          <ac:chgData name="Corbin Ferguson" userId="34a864e2-e65e-4cb2-823c-dc28f73f0e40" providerId="ADAL" clId="{8D2D96CF-1319-4CCC-9EA9-073445628049}" dt="2026-03-16T20:36:24.671" v="1902" actId="14429"/>
+          <ac:picMkLst>
+            <pc:docMk/>
+            <pc:sldMk cId="462985986" sldId="2146848322"/>
+            <ac:picMk id="10242" creationId="{F222EBA9-47DB-A494-0A25-7CD0A39D0D61}"/>
+          </ac:picMkLst>
+        </pc:picChg>
+      </pc:sldChg>
+      <pc:sldChg chg="addSp delSp modSp add mod ord delAnim modAnim">
+        <pc:chgData name="Corbin Ferguson" userId="34a864e2-e65e-4cb2-823c-dc28f73f0e40" providerId="ADAL" clId="{8D2D96CF-1319-4CCC-9EA9-073445628049}" dt="2026-03-16T20:55:06.654" v="2002" actId="732"/>
+        <pc:sldMkLst>
+          <pc:docMk/>
+          <pc:sldMk cId="1670292182" sldId="2146848323"/>
+        </pc:sldMkLst>
+        <pc:spChg chg="add del">
+          <ac:chgData name="Corbin Ferguson" userId="34a864e2-e65e-4cb2-823c-dc28f73f0e40" providerId="ADAL" clId="{8D2D96CF-1319-4CCC-9EA9-073445628049}" dt="2026-03-16T20:40:01.898" v="1920" actId="22"/>
+          <ac:spMkLst>
+            <pc:docMk/>
+            <pc:sldMk cId="1670292182" sldId="2146848323"/>
+            <ac:spMk id="5" creationId="{5DD8D43C-2C75-F7BC-6ABC-1D0F71EF9248}"/>
+          </ac:spMkLst>
+        </pc:spChg>
+        <pc:spChg chg="add del">
+          <ac:chgData name="Corbin Ferguson" userId="34a864e2-e65e-4cb2-823c-dc28f73f0e40" providerId="ADAL" clId="{8D2D96CF-1319-4CCC-9EA9-073445628049}" dt="2026-03-16T20:40:07.307" v="1922" actId="22"/>
+          <ac:spMkLst>
+            <pc:docMk/>
+            <pc:sldMk cId="1670292182" sldId="2146848323"/>
+            <ac:spMk id="10" creationId="{8937C66F-EC84-6131-1D2B-76A6DB09A7BF}"/>
+          </ac:spMkLst>
+        </pc:spChg>
+        <pc:spChg chg="add mod">
+          <ac:chgData name="Corbin Ferguson" userId="34a864e2-e65e-4cb2-823c-dc28f73f0e40" providerId="ADAL" clId="{8D2D96CF-1319-4CCC-9EA9-073445628049}" dt="2026-03-16T20:44:01.003" v="1951" actId="207"/>
+          <ac:spMkLst>
+            <pc:docMk/>
+            <pc:sldMk cId="1670292182" sldId="2146848323"/>
+            <ac:spMk id="11" creationId="{BBDD576A-A414-9915-960B-C7192C1A13D8}"/>
+          </ac:spMkLst>
+        </pc:spChg>
+        <pc:spChg chg="add del mod">
+          <ac:chgData name="Corbin Ferguson" userId="34a864e2-e65e-4cb2-823c-dc28f73f0e40" providerId="ADAL" clId="{8D2D96CF-1319-4CCC-9EA9-073445628049}" dt="2026-03-16T20:52:37.621" v="1985" actId="478"/>
+          <ac:spMkLst>
+            <pc:docMk/>
+            <pc:sldMk cId="1670292182" sldId="2146848323"/>
+            <ac:spMk id="12" creationId="{CC8204E8-E13C-33EB-CF24-007E48F2438C}"/>
+          </ac:spMkLst>
+        </pc:spChg>
+        <pc:picChg chg="mod ord">
+          <ac:chgData name="Corbin Ferguson" userId="34a864e2-e65e-4cb2-823c-dc28f73f0e40" providerId="ADAL" clId="{8D2D96CF-1319-4CCC-9EA9-073445628049}" dt="2026-03-16T20:42:31.830" v="1945" actId="13244"/>
+          <ac:picMkLst>
+            <pc:docMk/>
+            <pc:sldMk cId="1670292182" sldId="2146848323"/>
+            <ac:picMk id="6" creationId="{BF17B26E-CEBE-31E2-A928-A78B0BE175DA}"/>
+          </ac:picMkLst>
+        </pc:picChg>
+        <pc:picChg chg="del">
+          <ac:chgData name="Corbin Ferguson" userId="34a864e2-e65e-4cb2-823c-dc28f73f0e40" providerId="ADAL" clId="{8D2D96CF-1319-4CCC-9EA9-073445628049}" dt="2026-03-16T20:39:55.286" v="1918" actId="478"/>
+          <ac:picMkLst>
+            <pc:docMk/>
+            <pc:sldMk cId="1670292182" sldId="2146848323"/>
+            <ac:picMk id="15" creationId="{5CF8EE59-9274-2241-AA34-8B93965B0C2A}"/>
+          </ac:picMkLst>
+        </pc:picChg>
+        <pc:picChg chg="add del mod">
+          <ac:chgData name="Corbin Ferguson" userId="34a864e2-e65e-4cb2-823c-dc28f73f0e40" providerId="ADAL" clId="{8D2D96CF-1319-4CCC-9EA9-073445628049}" dt="2026-03-16T20:42:00.476" v="1934" actId="478"/>
+          <ac:picMkLst>
+            <pc:docMk/>
+            <pc:sldMk cId="1670292182" sldId="2146848323"/>
+            <ac:picMk id="11266" creationId="{917D32E0-211F-D44A-4E32-8791EF34FFEE}"/>
+          </ac:picMkLst>
+        </pc:picChg>
+        <pc:picChg chg="add mod modCrop">
+          <ac:chgData name="Corbin Ferguson" userId="34a864e2-e65e-4cb2-823c-dc28f73f0e40" providerId="ADAL" clId="{8D2D96CF-1319-4CCC-9EA9-073445628049}" dt="2026-03-16T20:55:06.654" v="2002" actId="732"/>
+          <ac:picMkLst>
+            <pc:docMk/>
+            <pc:sldMk cId="1670292182" sldId="2146848323"/>
+            <ac:picMk id="11268" creationId="{14AE5F5A-6C88-0F58-A592-0FB668BF99DA}"/>
+          </ac:picMkLst>
+        </pc:picChg>
+      </pc:sldChg>
+      <pc:sldChg chg="addSp delSp modSp add mod delAnim modAnim">
+        <pc:chgData name="Corbin Ferguson" userId="34a864e2-e65e-4cb2-823c-dc28f73f0e40" providerId="ADAL" clId="{8D2D96CF-1319-4CCC-9EA9-073445628049}" dt="2026-03-16T21:01:16.352" v="2046"/>
+        <pc:sldMkLst>
+          <pc:docMk/>
+          <pc:sldMk cId="2455060311" sldId="2146848324"/>
+        </pc:sldMkLst>
+        <pc:spChg chg="add mod">
+          <ac:chgData name="Corbin Ferguson" userId="34a864e2-e65e-4cb2-823c-dc28f73f0e40" providerId="ADAL" clId="{8D2D96CF-1319-4CCC-9EA9-073445628049}" dt="2026-03-16T20:58:38.750" v="2043" actId="14100"/>
+          <ac:spMkLst>
+            <pc:docMk/>
+            <pc:sldMk cId="2455060311" sldId="2146848324"/>
+            <ac:spMk id="6" creationId="{A38A10BF-2126-40C7-FAE5-7BBF6C867EF1}"/>
+          </ac:spMkLst>
+        </pc:spChg>
+        <pc:spChg chg="del">
+          <ac:chgData name="Corbin Ferguson" userId="34a864e2-e65e-4cb2-823c-dc28f73f0e40" providerId="ADAL" clId="{8D2D96CF-1319-4CCC-9EA9-073445628049}" dt="2026-03-16T20:55:50.301" v="2006" actId="478"/>
+          <ac:spMkLst>
+            <pc:docMk/>
+            <pc:sldMk cId="2455060311" sldId="2146848324"/>
+            <ac:spMk id="11" creationId="{9C0ECDBE-0763-C450-3DCA-C286F0A0A27A}"/>
+          </ac:spMkLst>
+        </pc:spChg>
+        <pc:picChg chg="add mod">
+          <ac:chgData name="Corbin Ferguson" userId="34a864e2-e65e-4cb2-823c-dc28f73f0e40" providerId="ADAL" clId="{8D2D96CF-1319-4CCC-9EA9-073445628049}" dt="2026-03-16T20:57:53.186" v="2021" actId="14100"/>
+          <ac:picMkLst>
+            <pc:docMk/>
+            <pc:sldMk cId="2455060311" sldId="2146848324"/>
+            <ac:picMk id="5" creationId="{BE5C2147-6B8C-1D93-D1D8-4113A963D2D0}"/>
+          </ac:picMkLst>
+        </pc:picChg>
+        <pc:picChg chg="del">
+          <ac:chgData name="Corbin Ferguson" userId="34a864e2-e65e-4cb2-823c-dc28f73f0e40" providerId="ADAL" clId="{8D2D96CF-1319-4CCC-9EA9-073445628049}" dt="2026-03-16T20:55:47.366" v="2005" actId="478"/>
+          <ac:picMkLst>
+            <pc:docMk/>
+            <pc:sldMk cId="2455060311" sldId="2146848324"/>
+            <ac:picMk id="10" creationId="{54360C4F-9744-9D0A-7526-A62F5CBBD343}"/>
+          </ac:picMkLst>
+        </pc:picChg>
+        <pc:picChg chg="mod">
+          <ac:chgData name="Corbin Ferguson" userId="34a864e2-e65e-4cb2-823c-dc28f73f0e40" providerId="ADAL" clId="{8D2D96CF-1319-4CCC-9EA9-073445628049}" dt="2026-03-16T20:58:13.772" v="2039" actId="14100"/>
+          <ac:picMkLst>
+            <pc:docMk/>
+            <pc:sldMk cId="2455060311" sldId="2146848324"/>
+            <ac:picMk id="15" creationId="{17752B2B-1B72-2430-A670-818B3CCFD41D}"/>
+          </ac:picMkLst>
+        </pc:picChg>
+      </pc:sldChg>
+      <pc:sldChg chg="addSp delSp modSp add mod ord delAnim modAnim">
+        <pc:chgData name="Corbin Ferguson" userId="34a864e2-e65e-4cb2-823c-dc28f73f0e40" providerId="ADAL" clId="{8D2D96CF-1319-4CCC-9EA9-073445628049}" dt="2026-03-16T21:03:53.279" v="2075" actId="1036"/>
+        <pc:sldMkLst>
+          <pc:docMk/>
+          <pc:sldMk cId="935187346" sldId="2146848325"/>
+        </pc:sldMkLst>
+        <pc:spChg chg="mod">
+          <ac:chgData name="Corbin Ferguson" userId="34a864e2-e65e-4cb2-823c-dc28f73f0e40" providerId="ADAL" clId="{8D2D96CF-1319-4CCC-9EA9-073445628049}" dt="2026-03-16T21:01:46.105" v="2051" actId="14100"/>
+          <ac:spMkLst>
+            <pc:docMk/>
+            <pc:sldMk cId="935187346" sldId="2146848325"/>
+            <ac:spMk id="11" creationId="{E527682E-55F4-1E8E-3D74-DD36AAF5EC17}"/>
+          </ac:spMkLst>
+        </pc:spChg>
+        <pc:picChg chg="add mod ord">
+          <ac:chgData name="Corbin Ferguson" userId="34a864e2-e65e-4cb2-823c-dc28f73f0e40" providerId="ADAL" clId="{8D2D96CF-1319-4CCC-9EA9-073445628049}" dt="2026-03-16T21:03:53.279" v="2075" actId="1036"/>
+          <ac:picMkLst>
+            <pc:docMk/>
+            <pc:sldMk cId="935187346" sldId="2146848325"/>
+            <ac:picMk id="3" creationId="{A34E6259-020A-CE8B-AC93-FDF3B8CB5BB9}"/>
+          </ac:picMkLst>
+        </pc:picChg>
+        <pc:picChg chg="del ord">
+          <ac:chgData name="Corbin Ferguson" userId="34a864e2-e65e-4cb2-823c-dc28f73f0e40" providerId="ADAL" clId="{8D2D96CF-1319-4CCC-9EA9-073445628049}" dt="2026-03-16T21:02:18.440" v="2053" actId="478"/>
+          <ac:picMkLst>
+            <pc:docMk/>
+            <pc:sldMk cId="935187346" sldId="2146848325"/>
+            <ac:picMk id="6" creationId="{B6127BAF-6D0E-BEB6-A0F4-C56A9F66FD85}"/>
+          </ac:picMkLst>
+        </pc:picChg>
+        <pc:picChg chg="mod modVis">
+          <ac:chgData name="Corbin Ferguson" userId="34a864e2-e65e-4cb2-823c-dc28f73f0e40" providerId="ADAL" clId="{8D2D96CF-1319-4CCC-9EA9-073445628049}" dt="2026-03-16T21:03:45.465" v="2072" actId="14100"/>
+          <ac:picMkLst>
+            <pc:docMk/>
+            <pc:sldMk cId="935187346" sldId="2146848325"/>
+            <ac:picMk id="11268" creationId="{398BFDD6-EE1D-2233-1BC7-9B7205573827}"/>
           </ac:picMkLst>
         </pc:picChg>
       </pc:sldChg>
@@ -19527,6 +19972,1740 @@
         <p:cNvPr id="1" name="">
           <a:extLst>
             <a:ext uri="{FF2B5EF4-FFF2-40B4-BE49-F238E27FC236}">
+              <a16:creationId xmlns:a16="http://schemas.microsoft.com/office/drawing/2014/main" id="{1E13B339-4EEC-59AB-4772-95A4281B42AE}"/>
+            </a:ext>
+          </a:extLst>
+        </p:cNvPr>
+        <p:cNvGrpSpPr/>
+        <p:nvPr/>
+      </p:nvGrpSpPr>
+      <p:grpSpPr>
+        <a:xfrm>
+          <a:off x="0" y="0"/>
+          <a:ext cx="0" cy="0"/>
+          <a:chOff x="0" y="0"/>
+          <a:chExt cx="0" cy="0"/>
+        </a:xfrm>
+      </p:grpSpPr>
+      <p:sp>
+        <p:nvSpPr>
+          <p:cNvPr id="2" name="Title 1">
+            <a:extLst>
+              <a:ext uri="{FF2B5EF4-FFF2-40B4-BE49-F238E27FC236}">
+                <a16:creationId xmlns:a16="http://schemas.microsoft.com/office/drawing/2014/main" id="{C6FD6CC9-4051-8C8E-6F53-6558CC8D4A8F}"/>
+              </a:ext>
+            </a:extLst>
+          </p:cNvPr>
+          <p:cNvSpPr>
+            <a:spLocks noGrp="1"/>
+          </p:cNvSpPr>
+          <p:nvPr>
+            <p:ph type="title"/>
+          </p:nvPr>
+        </p:nvSpPr>
+        <p:spPr>
+          <a:xfrm>
+            <a:off x="334963" y="620690"/>
+            <a:ext cx="7018337" cy="360041"/>
+          </a:xfrm>
+        </p:spPr>
+        <p:txBody>
+          <a:bodyPr/>
+          <a:lstStyle/>
+          <a:p>
+            <a:r>
+              <a:rPr lang="en-US" dirty="0"/>
+              <a:t>New File Pathing</a:t>
+            </a:r>
+          </a:p>
+        </p:txBody>
+      </p:sp>
+      <p:sp>
+        <p:nvSpPr>
+          <p:cNvPr id="4" name="Date Placeholder 3">
+            <a:extLst>
+              <a:ext uri="{FF2B5EF4-FFF2-40B4-BE49-F238E27FC236}">
+                <a16:creationId xmlns:a16="http://schemas.microsoft.com/office/drawing/2014/main" id="{39A7C85B-3F3C-7F47-8670-EC9B7599C42E}"/>
+              </a:ext>
+            </a:extLst>
+          </p:cNvPr>
+          <p:cNvSpPr>
+            <a:spLocks noGrp="1"/>
+          </p:cNvSpPr>
+          <p:nvPr>
+            <p:ph type="dt" sz="half" idx="10"/>
+          </p:nvPr>
+        </p:nvSpPr>
+        <p:spPr/>
+        <p:txBody>
+          <a:bodyPr/>
+          <a:lstStyle/>
+          <a:p>
+            <a:r>
+              <a:rPr lang="en-US"/>
+              <a:t>L5X Automation Build Tool</a:t>
+            </a:r>
+            <a:endParaRPr lang="en-US" dirty="0"/>
+          </a:p>
+        </p:txBody>
+      </p:sp>
+      <p:sp>
+        <p:nvSpPr>
+          <p:cNvPr id="7" name="Slide Number Placeholder 6">
+            <a:extLst>
+              <a:ext uri="{FF2B5EF4-FFF2-40B4-BE49-F238E27FC236}">
+                <a16:creationId xmlns:a16="http://schemas.microsoft.com/office/drawing/2014/main" id="{F6C98780-7782-6438-33E0-36B16CFBA93E}"/>
+              </a:ext>
+            </a:extLst>
+          </p:cNvPr>
+          <p:cNvSpPr>
+            <a:spLocks noGrp="1"/>
+          </p:cNvSpPr>
+          <p:nvPr>
+            <p:ph type="sldNum" sz="quarter" idx="12"/>
+          </p:nvPr>
+        </p:nvSpPr>
+        <p:spPr/>
+        <p:txBody>
+          <a:bodyPr/>
+          <a:lstStyle/>
+          <a:p>
+            <a:r>
+              <a:rPr lang="en-US"/>
+              <a:t>Slide </a:t>
+            </a:r>
+            <a:fld id="{C6F8E2D1-BFA0-484A-B7F1-E348F2594759}" type="slidenum">
+              <a:rPr lang="en-US" smtClean="0"/>
+              <a:t>10</a:t>
+            </a:fld>
+            <a:endParaRPr lang="en-US" dirty="0"/>
+          </a:p>
+        </p:txBody>
+      </p:sp>
+      <p:sp>
+        <p:nvSpPr>
+          <p:cNvPr id="8" name="Footer Placeholder 7">
+            <a:extLst>
+              <a:ext uri="{FF2B5EF4-FFF2-40B4-BE49-F238E27FC236}">
+                <a16:creationId xmlns:a16="http://schemas.microsoft.com/office/drawing/2014/main" id="{FD345246-AA94-A9AA-8773-390E7B836603}"/>
+              </a:ext>
+            </a:extLst>
+          </p:cNvPr>
+          <p:cNvSpPr>
+            <a:spLocks noGrp="1"/>
+          </p:cNvSpPr>
+          <p:nvPr>
+            <p:ph type="ftr" sz="quarter" idx="11"/>
+          </p:nvPr>
+        </p:nvSpPr>
+        <p:spPr/>
+        <p:txBody>
+          <a:bodyPr/>
+          <a:lstStyle/>
+          <a:p>
+            <a:r>
+              <a:rPr lang="en-US"/>
+              <a:t>Corbin Ferguson</a:t>
+            </a:r>
+            <a:endParaRPr lang="en-US" dirty="0"/>
+          </a:p>
+        </p:txBody>
+      </p:sp>
+      <p:pic>
+        <p:nvPicPr>
+          <p:cNvPr id="10" name="!NewFile">
+            <a:extLst>
+              <a:ext uri="{FF2B5EF4-FFF2-40B4-BE49-F238E27FC236}">
+                <a16:creationId xmlns:a16="http://schemas.microsoft.com/office/drawing/2014/main" id="{36552AD4-E539-C4C4-F016-02E1B6D7EFCF}"/>
+              </a:ext>
+            </a:extLst>
+          </p:cNvPr>
+          <p:cNvPicPr>
+            <a:picLocks noChangeAspect="1" noChangeArrowheads="1"/>
+          </p:cNvPicPr>
+          <p:nvPr/>
+        </p:nvPicPr>
+        <p:blipFill>
+          <a:blip r:embed="rId2">
+            <a:extLst>
+              <a:ext uri="{28A0092B-C50C-407E-A947-70E740481C1C}">
+                <a14:useLocalDpi xmlns:a14="http://schemas.microsoft.com/office/drawing/2010/main" val="0"/>
+              </a:ext>
+            </a:extLst>
+          </a:blip>
+          <a:srcRect l="19200" t="28133" r="679" b="47493"/>
+          <a:stretch>
+            <a:fillRect/>
+          </a:stretch>
+        </p:blipFill>
+        <p:spPr bwMode="auto">
+          <a:xfrm>
+            <a:off x="1173906" y="2090712"/>
+            <a:ext cx="10296628" cy="2316188"/>
+          </a:xfrm>
+          <a:prstGeom prst="rect">
+            <a:avLst/>
+          </a:prstGeom>
+          <a:solidFill>
+            <a:schemeClr val="bg1"/>
+          </a:solidFill>
+        </p:spPr>
+      </p:pic>
+      <p:pic>
+        <p:nvPicPr>
+          <p:cNvPr id="15" name="NewFile" descr="A Flow chart displaying all windows in the application and how they lead to one another">
+            <a:extLst>
+              <a:ext uri="{FF2B5EF4-FFF2-40B4-BE49-F238E27FC236}">
+                <a16:creationId xmlns:a16="http://schemas.microsoft.com/office/drawing/2014/main" id="{5956B2B1-2846-2DBE-61A6-5C404403D377}"/>
+              </a:ext>
+            </a:extLst>
+          </p:cNvPr>
+          <p:cNvPicPr>
+            <a:picLocks noChangeAspect="1"/>
+          </p:cNvPicPr>
+          <p:nvPr/>
+        </p:nvPicPr>
+        <p:blipFill>
+          <a:blip r:embed="rId3">
+            <a:extLst>
+              <a:ext uri="{28A0092B-C50C-407E-A947-70E740481C1C}">
+                <a14:useLocalDpi xmlns:a14="http://schemas.microsoft.com/office/drawing/2010/main" val="0"/>
+              </a:ext>
+            </a:extLst>
+          </a:blip>
+          <a:srcRect l="13550" t="32704" r="60214" b="51579"/>
+          <a:stretch>
+            <a:fillRect/>
+          </a:stretch>
+        </p:blipFill>
+        <p:spPr>
+          <a:xfrm>
+            <a:off x="1143001" y="1386840"/>
+            <a:ext cx="10358438" cy="3512821"/>
+          </a:xfrm>
+          <a:prstGeom prst="rect">
+            <a:avLst/>
+          </a:prstGeom>
+          <a:solidFill>
+            <a:srgbClr val="FFFFFF"/>
+          </a:solidFill>
+        </p:spPr>
+      </p:pic>
+      <p:sp>
+        <p:nvSpPr>
+          <p:cNvPr id="11" name="Rectangle: Rounded Corners 10">
+            <a:extLst>
+              <a:ext uri="{FF2B5EF4-FFF2-40B4-BE49-F238E27FC236}">
+                <a16:creationId xmlns:a16="http://schemas.microsoft.com/office/drawing/2014/main" id="{C63E6493-7963-69F9-0E49-FBFB34C98CC6}"/>
+              </a:ext>
+            </a:extLst>
+          </p:cNvPr>
+          <p:cNvSpPr/>
+          <p:nvPr/>
+        </p:nvSpPr>
+        <p:spPr>
+          <a:xfrm>
+            <a:off x="2204551" y="1992834"/>
+            <a:ext cx="2469049" cy="1512365"/>
+          </a:xfrm>
+          <a:prstGeom prst="roundRect">
+            <a:avLst/>
+          </a:prstGeom>
+          <a:solidFill>
+            <a:srgbClr val="007CAA">
+              <a:alpha val="20000"/>
+            </a:srgbClr>
+          </a:solidFill>
+          <a:ln>
+            <a:solidFill>
+              <a:srgbClr val="007CAA"/>
+            </a:solidFill>
+          </a:ln>
+          <a:effectLst>
+            <a:glow rad="63500">
+              <a:schemeClr val="accent4">
+                <a:satMod val="175000"/>
+                <a:alpha val="40000"/>
+              </a:schemeClr>
+            </a:glow>
+          </a:effectLst>
+        </p:spPr>
+        <p:style>
+          <a:lnRef idx="2">
+            <a:schemeClr val="accent1">
+              <a:shade val="50000"/>
+            </a:schemeClr>
+          </a:lnRef>
+          <a:fillRef idx="1">
+            <a:schemeClr val="accent1"/>
+          </a:fillRef>
+          <a:effectRef idx="0">
+            <a:schemeClr val="accent1"/>
+          </a:effectRef>
+          <a:fontRef idx="minor">
+            <a:schemeClr val="lt1"/>
+          </a:fontRef>
+        </p:style>
+        <p:txBody>
+          <a:bodyPr rtlCol="0" anchor="ctr"/>
+          <a:lstStyle/>
+          <a:p>
+            <a:pPr algn="ctr"/>
+            <a:endParaRPr lang="en-US" sz="2000" dirty="0" err="1">
+              <a:solidFill>
+                <a:srgbClr val="FFFFFF"/>
+              </a:solidFill>
+              <a:latin typeface="E+H Sans" panose="020B0404050202020204" pitchFamily="34" charset="0"/>
+            </a:endParaRPr>
+          </a:p>
+        </p:txBody>
+      </p:sp>
+    </p:spTree>
+    <p:extLst>
+      <p:ext uri="{BB962C8B-B14F-4D97-AF65-F5344CB8AC3E}">
+        <p14:creationId xmlns:p14="http://schemas.microsoft.com/office/powerpoint/2010/main" val="3831013115"/>
+      </p:ext>
+    </p:extLst>
+  </p:cSld>
+  <p:clrMapOvr>
+    <a:masterClrMapping/>
+  </p:clrMapOvr>
+  <mc:AlternateContent xmlns:mc="http://schemas.openxmlformats.org/markup-compatibility/2006">
+    <mc:Choice xmlns:p159="http://schemas.microsoft.com/office/powerpoint/2015/09/main" Requires="p159">
+      <p:transition xmlns:p14="http://schemas.microsoft.com/office/powerpoint/2010/main" spd="slow" p14:dur="2000">
+        <p159:morph option="byObject"/>
+      </p:transition>
+    </mc:Choice>
+    <mc:Fallback>
+      <p:transition spd="slow">
+        <p:fade/>
+      </p:transition>
+    </mc:Fallback>
+  </mc:AlternateContent>
+  <p:timing>
+    <p:tnLst>
+      <p:par>
+        <p:cTn id="1" dur="indefinite" restart="never" nodeType="tmRoot">
+          <p:childTnLst>
+            <p:seq concurrent="1" nextAc="seek">
+              <p:cTn id="2" dur="indefinite" nodeType="mainSeq">
+                <p:childTnLst>
+                  <p:par>
+                    <p:cTn id="3" fill="hold">
+                      <p:stCondLst>
+                        <p:cond delay="indefinite"/>
+                        <p:cond evt="onBegin" delay="0">
+                          <p:tn val="2"/>
+                        </p:cond>
+                      </p:stCondLst>
+                      <p:childTnLst>
+                        <p:par>
+                          <p:cTn id="4" fill="hold">
+                            <p:stCondLst>
+                              <p:cond delay="0"/>
+                            </p:stCondLst>
+                            <p:childTnLst>
+                              <p:par>
+                                <p:cTn id="5" presetID="10" presetClass="entr" presetSubtype="0" fill="hold" grpId="0" nodeType="afterEffect">
+                                  <p:stCondLst>
+                                    <p:cond delay="100"/>
+                                  </p:stCondLst>
+                                  <p:childTnLst>
+                                    <p:set>
+                                      <p:cBhvr>
+                                        <p:cTn id="6" dur="1" fill="hold">
+                                          <p:stCondLst>
+                                            <p:cond delay="0"/>
+                                          </p:stCondLst>
+                                        </p:cTn>
+                                        <p:tgtEl>
+                                          <p:spTgt spid="11"/>
+                                        </p:tgtEl>
+                                        <p:attrNameLst>
+                                          <p:attrName>style.visibility</p:attrName>
+                                        </p:attrNameLst>
+                                      </p:cBhvr>
+                                      <p:to>
+                                        <p:strVal val="visible"/>
+                                      </p:to>
+                                    </p:set>
+                                    <p:animEffect transition="in" filter="fade">
+                                      <p:cBhvr>
+                                        <p:cTn id="7" dur="500"/>
+                                        <p:tgtEl>
+                                          <p:spTgt spid="11"/>
+                                        </p:tgtEl>
+                                      </p:cBhvr>
+                                    </p:animEffect>
+                                  </p:childTnLst>
+                                </p:cTn>
+                              </p:par>
+                            </p:childTnLst>
+                          </p:cTn>
+                        </p:par>
+                      </p:childTnLst>
+                    </p:cTn>
+                  </p:par>
+                </p:childTnLst>
+              </p:cTn>
+              <p:prevCondLst>
+                <p:cond evt="onPrev" delay="0">
+                  <p:tgtEl>
+                    <p:sldTgt/>
+                  </p:tgtEl>
+                </p:cond>
+              </p:prevCondLst>
+              <p:nextCondLst>
+                <p:cond evt="onNext" delay="0">
+                  <p:tgtEl>
+                    <p:sldTgt/>
+                  </p:tgtEl>
+                </p:cond>
+              </p:nextCondLst>
+            </p:seq>
+          </p:childTnLst>
+        </p:cTn>
+      </p:par>
+    </p:tnLst>
+    <p:bldLst>
+      <p:bldP spid="11" grpId="0" animBg="1"/>
+    </p:bldLst>
+  </p:timing>
+</p:sld>
+</file>
+
+<file path=ppt/slides/slide11.xml><?xml version="1.0" encoding="utf-8"?>
+<p:sld xmlns:a="http://schemas.openxmlformats.org/drawingml/2006/main" xmlns:r="http://schemas.openxmlformats.org/officeDocument/2006/relationships" xmlns:p="http://schemas.openxmlformats.org/presentationml/2006/main">
+  <p:cSld>
+    <p:spTree>
+      <p:nvGrpSpPr>
+        <p:cNvPr id="1" name="">
+          <a:extLst>
+            <a:ext uri="{FF2B5EF4-FFF2-40B4-BE49-F238E27FC236}">
+              <a16:creationId xmlns:a16="http://schemas.microsoft.com/office/drawing/2014/main" id="{82D89F6A-C1EA-199A-6410-C327902E30E7}"/>
+            </a:ext>
+          </a:extLst>
+        </p:cNvPr>
+        <p:cNvGrpSpPr/>
+        <p:nvPr/>
+      </p:nvGrpSpPr>
+      <p:grpSpPr>
+        <a:xfrm>
+          <a:off x="0" y="0"/>
+          <a:ext cx="0" cy="0"/>
+          <a:chOff x="0" y="0"/>
+          <a:chExt cx="0" cy="0"/>
+        </a:xfrm>
+      </p:grpSpPr>
+      <p:sp>
+        <p:nvSpPr>
+          <p:cNvPr id="2" name="Title 1">
+            <a:extLst>
+              <a:ext uri="{FF2B5EF4-FFF2-40B4-BE49-F238E27FC236}">
+                <a16:creationId xmlns:a16="http://schemas.microsoft.com/office/drawing/2014/main" id="{BEF4F8F7-7FD1-D66F-55BE-B09150AA9A29}"/>
+              </a:ext>
+            </a:extLst>
+          </p:cNvPr>
+          <p:cNvSpPr>
+            <a:spLocks noGrp="1"/>
+          </p:cNvSpPr>
+          <p:nvPr>
+            <p:ph type="title"/>
+          </p:nvPr>
+        </p:nvSpPr>
+        <p:spPr>
+          <a:xfrm>
+            <a:off x="334963" y="620690"/>
+            <a:ext cx="7018337" cy="360041"/>
+          </a:xfrm>
+        </p:spPr>
+        <p:txBody>
+          <a:bodyPr/>
+          <a:lstStyle/>
+          <a:p>
+            <a:r>
+              <a:rPr lang="en-US" dirty="0"/>
+              <a:t>New File Pathing</a:t>
+            </a:r>
+          </a:p>
+        </p:txBody>
+      </p:sp>
+      <p:sp>
+        <p:nvSpPr>
+          <p:cNvPr id="4" name="Date Placeholder 3">
+            <a:extLst>
+              <a:ext uri="{FF2B5EF4-FFF2-40B4-BE49-F238E27FC236}">
+                <a16:creationId xmlns:a16="http://schemas.microsoft.com/office/drawing/2014/main" id="{B908FCD3-24C5-4D9D-9FA2-17B51B3E7CA1}"/>
+              </a:ext>
+            </a:extLst>
+          </p:cNvPr>
+          <p:cNvSpPr>
+            <a:spLocks noGrp="1"/>
+          </p:cNvSpPr>
+          <p:nvPr>
+            <p:ph type="dt" sz="half" idx="10"/>
+          </p:nvPr>
+        </p:nvSpPr>
+        <p:spPr/>
+        <p:txBody>
+          <a:bodyPr/>
+          <a:lstStyle/>
+          <a:p>
+            <a:r>
+              <a:rPr lang="en-US"/>
+              <a:t>L5X Automation Build Tool</a:t>
+            </a:r>
+            <a:endParaRPr lang="en-US" dirty="0"/>
+          </a:p>
+        </p:txBody>
+      </p:sp>
+      <p:sp>
+        <p:nvSpPr>
+          <p:cNvPr id="7" name="Slide Number Placeholder 6">
+            <a:extLst>
+              <a:ext uri="{FF2B5EF4-FFF2-40B4-BE49-F238E27FC236}">
+                <a16:creationId xmlns:a16="http://schemas.microsoft.com/office/drawing/2014/main" id="{B7AC7758-5A3A-B7B2-8B08-2352C8414B37}"/>
+              </a:ext>
+            </a:extLst>
+          </p:cNvPr>
+          <p:cNvSpPr>
+            <a:spLocks noGrp="1"/>
+          </p:cNvSpPr>
+          <p:nvPr>
+            <p:ph type="sldNum" sz="quarter" idx="12"/>
+          </p:nvPr>
+        </p:nvSpPr>
+        <p:spPr/>
+        <p:txBody>
+          <a:bodyPr/>
+          <a:lstStyle/>
+          <a:p>
+            <a:r>
+              <a:rPr lang="en-US"/>
+              <a:t>Slide </a:t>
+            </a:r>
+            <a:fld id="{C6F8E2D1-BFA0-484A-B7F1-E348F2594759}" type="slidenum">
+              <a:rPr lang="en-US" smtClean="0"/>
+              <a:t>11</a:t>
+            </a:fld>
+            <a:endParaRPr lang="en-US" dirty="0"/>
+          </a:p>
+        </p:txBody>
+      </p:sp>
+      <p:sp>
+        <p:nvSpPr>
+          <p:cNvPr id="8" name="Footer Placeholder 7">
+            <a:extLst>
+              <a:ext uri="{FF2B5EF4-FFF2-40B4-BE49-F238E27FC236}">
+                <a16:creationId xmlns:a16="http://schemas.microsoft.com/office/drawing/2014/main" id="{B9CE8CF7-B43D-DD81-DE4D-0FB8CA97A05B}"/>
+              </a:ext>
+            </a:extLst>
+          </p:cNvPr>
+          <p:cNvSpPr>
+            <a:spLocks noGrp="1"/>
+          </p:cNvSpPr>
+          <p:nvPr>
+            <p:ph type="ftr" sz="quarter" idx="11"/>
+          </p:nvPr>
+        </p:nvSpPr>
+        <p:spPr/>
+        <p:txBody>
+          <a:bodyPr/>
+          <a:lstStyle/>
+          <a:p>
+            <a:r>
+              <a:rPr lang="en-US"/>
+              <a:t>Corbin Ferguson</a:t>
+            </a:r>
+            <a:endParaRPr lang="en-US" dirty="0"/>
+          </a:p>
+        </p:txBody>
+      </p:sp>
+      <p:pic>
+        <p:nvPicPr>
+          <p:cNvPr id="15" name="!NewFile" descr="A Flow chart displaying all windows in the application and how they lead to one another">
+            <a:extLst>
+              <a:ext uri="{FF2B5EF4-FFF2-40B4-BE49-F238E27FC236}">
+                <a16:creationId xmlns:a16="http://schemas.microsoft.com/office/drawing/2014/main" id="{17752B2B-1B72-2430-A670-818B3CCFD41D}"/>
+              </a:ext>
+            </a:extLst>
+          </p:cNvPr>
+          <p:cNvPicPr>
+            <a:picLocks noChangeAspect="1"/>
+          </p:cNvPicPr>
+          <p:nvPr/>
+        </p:nvPicPr>
+        <p:blipFill>
+          <a:blip r:embed="rId2">
+            <a:extLst>
+              <a:ext uri="{28A0092B-C50C-407E-A947-70E740481C1C}">
+                <a14:useLocalDpi xmlns:a14="http://schemas.microsoft.com/office/drawing/2010/main" val="0"/>
+              </a:ext>
+            </a:extLst>
+          </a:blip>
+          <a:srcRect l="13550" t="32704" r="60214" b="51579"/>
+          <a:stretch>
+            <a:fillRect/>
+          </a:stretch>
+        </p:blipFill>
+        <p:spPr>
+          <a:xfrm>
+            <a:off x="3045421" y="1930402"/>
+            <a:ext cx="6553598" cy="2222498"/>
+          </a:xfrm>
+          <a:prstGeom prst="rect">
+            <a:avLst/>
+          </a:prstGeom>
+          <a:solidFill>
+            <a:srgbClr val="FFFFFF"/>
+          </a:solidFill>
+        </p:spPr>
+      </p:pic>
+      <p:pic>
+        <p:nvPicPr>
+          <p:cNvPr id="5" name="NewFile">
+            <a:extLst>
+              <a:ext uri="{FF2B5EF4-FFF2-40B4-BE49-F238E27FC236}">
+                <a16:creationId xmlns:a16="http://schemas.microsoft.com/office/drawing/2014/main" id="{BE5C2147-6B8C-1D93-D1D8-4113A963D2D0}"/>
+              </a:ext>
+            </a:extLst>
+          </p:cNvPr>
+          <p:cNvPicPr>
+            <a:picLocks noChangeAspect="1"/>
+          </p:cNvPicPr>
+          <p:nvPr/>
+        </p:nvPicPr>
+        <p:blipFill>
+          <a:blip r:embed="rId3"/>
+          <a:stretch>
+            <a:fillRect/>
+          </a:stretch>
+        </p:blipFill>
+        <p:spPr>
+          <a:xfrm>
+            <a:off x="1433867" y="1283432"/>
+            <a:ext cx="9776708" cy="3872768"/>
+          </a:xfrm>
+          <a:prstGeom prst="rect">
+            <a:avLst/>
+          </a:prstGeom>
+        </p:spPr>
+      </p:pic>
+      <p:sp>
+        <p:nvSpPr>
+          <p:cNvPr id="6" name="Rectangle: Rounded Corners 5">
+            <a:extLst>
+              <a:ext uri="{FF2B5EF4-FFF2-40B4-BE49-F238E27FC236}">
+                <a16:creationId xmlns:a16="http://schemas.microsoft.com/office/drawing/2014/main" id="{A38A10BF-2126-40C7-FAE5-7BBF6C867EF1}"/>
+              </a:ext>
+            </a:extLst>
+          </p:cNvPr>
+          <p:cNvSpPr/>
+          <p:nvPr/>
+        </p:nvSpPr>
+        <p:spPr>
+          <a:xfrm>
+            <a:off x="6540500" y="4330700"/>
+            <a:ext cx="2133600" cy="730896"/>
+          </a:xfrm>
+          <a:prstGeom prst="roundRect">
+            <a:avLst/>
+          </a:prstGeom>
+          <a:solidFill>
+            <a:srgbClr val="007CAA">
+              <a:alpha val="20000"/>
+            </a:srgbClr>
+          </a:solidFill>
+          <a:ln>
+            <a:solidFill>
+              <a:srgbClr val="007CAA"/>
+            </a:solidFill>
+          </a:ln>
+          <a:effectLst>
+            <a:glow rad="63500">
+              <a:schemeClr val="accent4">
+                <a:satMod val="175000"/>
+                <a:alpha val="40000"/>
+              </a:schemeClr>
+            </a:glow>
+          </a:effectLst>
+        </p:spPr>
+        <p:style>
+          <a:lnRef idx="2">
+            <a:schemeClr val="accent1">
+              <a:shade val="50000"/>
+            </a:schemeClr>
+          </a:lnRef>
+          <a:fillRef idx="1">
+            <a:schemeClr val="accent1"/>
+          </a:fillRef>
+          <a:effectRef idx="0">
+            <a:schemeClr val="accent1"/>
+          </a:effectRef>
+          <a:fontRef idx="minor">
+            <a:schemeClr val="lt1"/>
+          </a:fontRef>
+        </p:style>
+        <p:txBody>
+          <a:bodyPr rtlCol="0" anchor="ctr"/>
+          <a:lstStyle/>
+          <a:p>
+            <a:pPr algn="ctr"/>
+            <a:endParaRPr lang="en-US" sz="2000" dirty="0" err="1">
+              <a:solidFill>
+                <a:srgbClr val="FFFFFF"/>
+              </a:solidFill>
+              <a:latin typeface="E+H Sans" panose="020B0404050202020204" pitchFamily="34" charset="0"/>
+            </a:endParaRPr>
+          </a:p>
+        </p:txBody>
+      </p:sp>
+    </p:spTree>
+    <p:extLst>
+      <p:ext uri="{BB962C8B-B14F-4D97-AF65-F5344CB8AC3E}">
+        <p14:creationId xmlns:p14="http://schemas.microsoft.com/office/powerpoint/2010/main" val="2455060311"/>
+      </p:ext>
+    </p:extLst>
+  </p:cSld>
+  <p:clrMapOvr>
+    <a:masterClrMapping/>
+  </p:clrMapOvr>
+  <mc:AlternateContent xmlns:mc="http://schemas.openxmlformats.org/markup-compatibility/2006">
+    <mc:Choice xmlns:p159="http://schemas.microsoft.com/office/powerpoint/2015/09/main" Requires="p159">
+      <p:transition xmlns:p14="http://schemas.microsoft.com/office/powerpoint/2010/main" spd="slow" p14:dur="2000">
+        <p159:morph option="byObject"/>
+      </p:transition>
+    </mc:Choice>
+    <mc:Fallback>
+      <p:transition spd="slow">
+        <p:fade/>
+      </p:transition>
+    </mc:Fallback>
+  </mc:AlternateContent>
+  <p:timing>
+    <p:tnLst>
+      <p:par>
+        <p:cTn id="1" dur="indefinite" restart="never" nodeType="tmRoot">
+          <p:childTnLst>
+            <p:seq concurrent="1" nextAc="seek">
+              <p:cTn id="2" dur="indefinite" nodeType="mainSeq">
+                <p:childTnLst>
+                  <p:par>
+                    <p:cTn id="3" fill="hold">
+                      <p:stCondLst>
+                        <p:cond delay="indefinite"/>
+                        <p:cond evt="onBegin" delay="0">
+                          <p:tn val="2"/>
+                        </p:cond>
+                      </p:stCondLst>
+                      <p:childTnLst>
+                        <p:par>
+                          <p:cTn id="4" fill="hold">
+                            <p:stCondLst>
+                              <p:cond delay="0"/>
+                            </p:stCondLst>
+                            <p:childTnLst>
+                              <p:par>
+                                <p:cTn id="5" presetID="10" presetClass="entr" presetSubtype="0" fill="hold" grpId="0" nodeType="afterEffect">
+                                  <p:stCondLst>
+                                    <p:cond delay="100"/>
+                                  </p:stCondLst>
+                                  <p:childTnLst>
+                                    <p:set>
+                                      <p:cBhvr>
+                                        <p:cTn id="6" dur="1" fill="hold">
+                                          <p:stCondLst>
+                                            <p:cond delay="0"/>
+                                          </p:stCondLst>
+                                        </p:cTn>
+                                        <p:tgtEl>
+                                          <p:spTgt spid="6"/>
+                                        </p:tgtEl>
+                                        <p:attrNameLst>
+                                          <p:attrName>style.visibility</p:attrName>
+                                        </p:attrNameLst>
+                                      </p:cBhvr>
+                                      <p:to>
+                                        <p:strVal val="visible"/>
+                                      </p:to>
+                                    </p:set>
+                                    <p:animEffect transition="in" filter="fade">
+                                      <p:cBhvr>
+                                        <p:cTn id="7" dur="500"/>
+                                        <p:tgtEl>
+                                          <p:spTgt spid="6"/>
+                                        </p:tgtEl>
+                                      </p:cBhvr>
+                                    </p:animEffect>
+                                  </p:childTnLst>
+                                </p:cTn>
+                              </p:par>
+                            </p:childTnLst>
+                          </p:cTn>
+                        </p:par>
+                      </p:childTnLst>
+                    </p:cTn>
+                  </p:par>
+                </p:childTnLst>
+              </p:cTn>
+              <p:prevCondLst>
+                <p:cond evt="onPrev" delay="0">
+                  <p:tgtEl>
+                    <p:sldTgt/>
+                  </p:tgtEl>
+                </p:cond>
+              </p:prevCondLst>
+              <p:nextCondLst>
+                <p:cond evt="onNext" delay="0">
+                  <p:tgtEl>
+                    <p:sldTgt/>
+                  </p:tgtEl>
+                </p:cond>
+              </p:nextCondLst>
+            </p:seq>
+          </p:childTnLst>
+        </p:cTn>
+      </p:par>
+    </p:tnLst>
+    <p:bldLst>
+      <p:bldP spid="6" grpId="0" animBg="1"/>
+    </p:bldLst>
+  </p:timing>
+</p:sld>
+</file>
+
+<file path=ppt/slides/slide12.xml><?xml version="1.0" encoding="utf-8"?>
+<p:sld xmlns:a="http://schemas.openxmlformats.org/drawingml/2006/main" xmlns:r="http://schemas.openxmlformats.org/officeDocument/2006/relationships" xmlns:p="http://schemas.openxmlformats.org/presentationml/2006/main">
+  <p:cSld>
+    <p:spTree>
+      <p:nvGrpSpPr>
+        <p:cNvPr id="1" name="">
+          <a:extLst>
+            <a:ext uri="{FF2B5EF4-FFF2-40B4-BE49-F238E27FC236}">
+              <a16:creationId xmlns:a16="http://schemas.microsoft.com/office/drawing/2014/main" id="{62BA7F1E-9132-6B43-FA78-6CD227802AB2}"/>
+            </a:ext>
+          </a:extLst>
+        </p:cNvPr>
+        <p:cNvGrpSpPr/>
+        <p:nvPr/>
+      </p:nvGrpSpPr>
+      <p:grpSpPr>
+        <a:xfrm>
+          <a:off x="0" y="0"/>
+          <a:ext cx="0" cy="0"/>
+          <a:chOff x="0" y="0"/>
+          <a:chExt cx="0" cy="0"/>
+        </a:xfrm>
+      </p:grpSpPr>
+      <p:sp>
+        <p:nvSpPr>
+          <p:cNvPr id="2" name="Title 1">
+            <a:extLst>
+              <a:ext uri="{FF2B5EF4-FFF2-40B4-BE49-F238E27FC236}">
+                <a16:creationId xmlns:a16="http://schemas.microsoft.com/office/drawing/2014/main" id="{38154D3D-CF39-6C55-45B8-AB9F07D515DB}"/>
+              </a:ext>
+            </a:extLst>
+          </p:cNvPr>
+          <p:cNvSpPr>
+            <a:spLocks noGrp="1"/>
+          </p:cNvSpPr>
+          <p:nvPr>
+            <p:ph type="title"/>
+          </p:nvPr>
+        </p:nvSpPr>
+        <p:spPr>
+          <a:xfrm>
+            <a:off x="334963" y="620690"/>
+            <a:ext cx="7018337" cy="360041"/>
+          </a:xfrm>
+        </p:spPr>
+        <p:txBody>
+          <a:bodyPr/>
+          <a:lstStyle/>
+          <a:p>
+            <a:r>
+              <a:rPr lang="en-US" dirty="0"/>
+              <a:t>New File Pathing</a:t>
+            </a:r>
+          </a:p>
+        </p:txBody>
+      </p:sp>
+      <p:sp>
+        <p:nvSpPr>
+          <p:cNvPr id="4" name="Date Placeholder 3">
+            <a:extLst>
+              <a:ext uri="{FF2B5EF4-FFF2-40B4-BE49-F238E27FC236}">
+                <a16:creationId xmlns:a16="http://schemas.microsoft.com/office/drawing/2014/main" id="{2FC48088-5AD3-2119-84FA-2876083B74BA}"/>
+              </a:ext>
+            </a:extLst>
+          </p:cNvPr>
+          <p:cNvSpPr>
+            <a:spLocks noGrp="1"/>
+          </p:cNvSpPr>
+          <p:nvPr>
+            <p:ph type="dt" sz="half" idx="10"/>
+          </p:nvPr>
+        </p:nvSpPr>
+        <p:spPr/>
+        <p:txBody>
+          <a:bodyPr/>
+          <a:lstStyle/>
+          <a:p>
+            <a:r>
+              <a:rPr lang="en-US"/>
+              <a:t>L5X Automation Build Tool</a:t>
+            </a:r>
+            <a:endParaRPr lang="en-US" dirty="0"/>
+          </a:p>
+        </p:txBody>
+      </p:sp>
+      <p:sp>
+        <p:nvSpPr>
+          <p:cNvPr id="7" name="Slide Number Placeholder 6">
+            <a:extLst>
+              <a:ext uri="{FF2B5EF4-FFF2-40B4-BE49-F238E27FC236}">
+                <a16:creationId xmlns:a16="http://schemas.microsoft.com/office/drawing/2014/main" id="{F160AB3E-73E0-E11E-4112-DDA4E807913F}"/>
+              </a:ext>
+            </a:extLst>
+          </p:cNvPr>
+          <p:cNvSpPr>
+            <a:spLocks noGrp="1"/>
+          </p:cNvSpPr>
+          <p:nvPr>
+            <p:ph type="sldNum" sz="quarter" idx="12"/>
+          </p:nvPr>
+        </p:nvSpPr>
+        <p:spPr/>
+        <p:txBody>
+          <a:bodyPr/>
+          <a:lstStyle/>
+          <a:p>
+            <a:r>
+              <a:rPr lang="en-US"/>
+              <a:t>Slide </a:t>
+            </a:r>
+            <a:fld id="{C6F8E2D1-BFA0-484A-B7F1-E348F2594759}" type="slidenum">
+              <a:rPr lang="en-US" smtClean="0"/>
+              <a:t>12</a:t>
+            </a:fld>
+            <a:endParaRPr lang="en-US" dirty="0"/>
+          </a:p>
+        </p:txBody>
+      </p:sp>
+      <p:sp>
+        <p:nvSpPr>
+          <p:cNvPr id="8" name="Footer Placeholder 7">
+            <a:extLst>
+              <a:ext uri="{FF2B5EF4-FFF2-40B4-BE49-F238E27FC236}">
+                <a16:creationId xmlns:a16="http://schemas.microsoft.com/office/drawing/2014/main" id="{0894B326-A35F-D05E-DD5B-CAE2B4D488C1}"/>
+              </a:ext>
+            </a:extLst>
+          </p:cNvPr>
+          <p:cNvSpPr>
+            <a:spLocks noGrp="1"/>
+          </p:cNvSpPr>
+          <p:nvPr>
+            <p:ph type="ftr" sz="quarter" idx="11"/>
+          </p:nvPr>
+        </p:nvSpPr>
+        <p:spPr/>
+        <p:txBody>
+          <a:bodyPr/>
+          <a:lstStyle/>
+          <a:p>
+            <a:r>
+              <a:rPr lang="en-US"/>
+              <a:t>Corbin Ferguson</a:t>
+            </a:r>
+            <a:endParaRPr lang="en-US" dirty="0"/>
+          </a:p>
+        </p:txBody>
+      </p:sp>
+      <p:pic>
+        <p:nvPicPr>
+          <p:cNvPr id="3" name="!NewFile">
+            <a:extLst>
+              <a:ext uri="{FF2B5EF4-FFF2-40B4-BE49-F238E27FC236}">
+                <a16:creationId xmlns:a16="http://schemas.microsoft.com/office/drawing/2014/main" id="{A34E6259-020A-CE8B-AC93-FDF3B8CB5BB9}"/>
+              </a:ext>
+            </a:extLst>
+          </p:cNvPr>
+          <p:cNvPicPr>
+            <a:picLocks noChangeAspect="1"/>
+          </p:cNvPicPr>
+          <p:nvPr/>
+        </p:nvPicPr>
+        <p:blipFill>
+          <a:blip r:embed="rId2"/>
+          <a:stretch>
+            <a:fillRect/>
+          </a:stretch>
+        </p:blipFill>
+        <p:spPr>
+          <a:xfrm>
+            <a:off x="397934" y="911176"/>
+            <a:ext cx="11084414" cy="4390780"/>
+          </a:xfrm>
+          <a:prstGeom prst="rect">
+            <a:avLst/>
+          </a:prstGeom>
+        </p:spPr>
+      </p:pic>
+      <p:pic>
+        <p:nvPicPr>
+          <p:cNvPr id="11268" name="NewFile">
+            <a:extLst>
+              <a:ext uri="{FF2B5EF4-FFF2-40B4-BE49-F238E27FC236}">
+                <a16:creationId xmlns:a16="http://schemas.microsoft.com/office/drawing/2014/main" id="{398BFDD6-EE1D-2233-1BC7-9B7205573827}"/>
+              </a:ext>
+            </a:extLst>
+          </p:cNvPr>
+          <p:cNvPicPr>
+            <a:picLocks noChangeAspect="1" noChangeArrowheads="1"/>
+          </p:cNvPicPr>
+          <p:nvPr/>
+        </p:nvPicPr>
+        <p:blipFill>
+          <a:blip r:embed="rId3">
+            <a:extLst>
+              <a:ext uri="{28A0092B-C50C-407E-A947-70E740481C1C}">
+                <a14:useLocalDpi xmlns:a14="http://schemas.microsoft.com/office/drawing/2010/main" val="0"/>
+              </a:ext>
+            </a:extLst>
+          </a:blip>
+          <a:srcRect/>
+          <a:stretch>
+            <a:fillRect/>
+          </a:stretch>
+        </p:blipFill>
+        <p:spPr bwMode="auto">
+          <a:xfrm>
+            <a:off x="203201" y="911419"/>
+            <a:ext cx="11590866" cy="4951966"/>
+          </a:xfrm>
+          <a:prstGeom prst="rect">
+            <a:avLst/>
+          </a:prstGeom>
+          <a:solidFill>
+            <a:schemeClr val="bg1"/>
+          </a:solidFill>
+        </p:spPr>
+      </p:pic>
+      <p:sp>
+        <p:nvSpPr>
+          <p:cNvPr id="11" name="Rectangle: Rounded Corners 10">
+            <a:extLst>
+              <a:ext uri="{FF2B5EF4-FFF2-40B4-BE49-F238E27FC236}">
+                <a16:creationId xmlns:a16="http://schemas.microsoft.com/office/drawing/2014/main" id="{E527682E-55F4-1E8E-3D74-DD36AAF5EC17}"/>
+              </a:ext>
+            </a:extLst>
+          </p:cNvPr>
+          <p:cNvSpPr/>
+          <p:nvPr/>
+        </p:nvSpPr>
+        <p:spPr>
+          <a:xfrm>
+            <a:off x="2489200" y="3543300"/>
+            <a:ext cx="8839200" cy="1663700"/>
+          </a:xfrm>
+          <a:prstGeom prst="roundRect">
+            <a:avLst/>
+          </a:prstGeom>
+          <a:solidFill>
+            <a:srgbClr val="007CAA">
+              <a:alpha val="20000"/>
+            </a:srgbClr>
+          </a:solidFill>
+          <a:ln>
+            <a:solidFill>
+              <a:srgbClr val="007CAA"/>
+            </a:solidFill>
+          </a:ln>
+          <a:effectLst>
+            <a:glow rad="63500">
+              <a:schemeClr val="accent4">
+                <a:satMod val="175000"/>
+                <a:alpha val="40000"/>
+              </a:schemeClr>
+            </a:glow>
+          </a:effectLst>
+        </p:spPr>
+        <p:style>
+          <a:lnRef idx="2">
+            <a:schemeClr val="accent1">
+              <a:shade val="50000"/>
+            </a:schemeClr>
+          </a:lnRef>
+          <a:fillRef idx="1">
+            <a:schemeClr val="accent1"/>
+          </a:fillRef>
+          <a:effectRef idx="0">
+            <a:schemeClr val="accent1"/>
+          </a:effectRef>
+          <a:fontRef idx="minor">
+            <a:schemeClr val="lt1"/>
+          </a:fontRef>
+        </p:style>
+        <p:txBody>
+          <a:bodyPr rtlCol="0" anchor="ctr"/>
+          <a:lstStyle/>
+          <a:p>
+            <a:pPr algn="ctr"/>
+            <a:endParaRPr lang="en-US" sz="2000" dirty="0" err="1">
+              <a:solidFill>
+                <a:srgbClr val="FFFFFF"/>
+              </a:solidFill>
+              <a:latin typeface="E+H Sans" panose="020B0404050202020204" pitchFamily="34" charset="0"/>
+            </a:endParaRPr>
+          </a:p>
+        </p:txBody>
+      </p:sp>
+    </p:spTree>
+    <p:extLst>
+      <p:ext uri="{BB962C8B-B14F-4D97-AF65-F5344CB8AC3E}">
+        <p14:creationId xmlns:p14="http://schemas.microsoft.com/office/powerpoint/2010/main" val="935187346"/>
+      </p:ext>
+    </p:extLst>
+  </p:cSld>
+  <p:clrMapOvr>
+    <a:masterClrMapping/>
+  </p:clrMapOvr>
+  <mc:AlternateContent xmlns:mc="http://schemas.openxmlformats.org/markup-compatibility/2006">
+    <mc:Choice xmlns:p159="http://schemas.microsoft.com/office/powerpoint/2015/09/main" Requires="p159">
+      <p:transition xmlns:p14="http://schemas.microsoft.com/office/powerpoint/2010/main" spd="slow" p14:dur="2000">
+        <p159:morph option="byObject"/>
+      </p:transition>
+    </mc:Choice>
+    <mc:Fallback>
+      <p:transition spd="slow">
+        <p:fade/>
+      </p:transition>
+    </mc:Fallback>
+  </mc:AlternateContent>
+  <p:timing>
+    <p:tnLst>
+      <p:par>
+        <p:cTn id="1" dur="indefinite" restart="never" nodeType="tmRoot">
+          <p:childTnLst>
+            <p:seq concurrent="1" nextAc="seek">
+              <p:cTn id="2" dur="indefinite" nodeType="mainSeq">
+                <p:childTnLst>
+                  <p:par>
+                    <p:cTn id="3" fill="hold">
+                      <p:stCondLst>
+                        <p:cond delay="indefinite"/>
+                        <p:cond evt="onBegin" delay="0">
+                          <p:tn val="2"/>
+                        </p:cond>
+                      </p:stCondLst>
+                      <p:childTnLst>
+                        <p:par>
+                          <p:cTn id="4" fill="hold">
+                            <p:stCondLst>
+                              <p:cond delay="0"/>
+                            </p:stCondLst>
+                            <p:childTnLst>
+                              <p:par>
+                                <p:cTn id="5" presetID="10" presetClass="entr" presetSubtype="0" fill="hold" grpId="0" nodeType="afterEffect">
+                                  <p:stCondLst>
+                                    <p:cond delay="100"/>
+                                  </p:stCondLst>
+                                  <p:childTnLst>
+                                    <p:set>
+                                      <p:cBhvr>
+                                        <p:cTn id="6" dur="1" fill="hold">
+                                          <p:stCondLst>
+                                            <p:cond delay="0"/>
+                                          </p:stCondLst>
+                                        </p:cTn>
+                                        <p:tgtEl>
+                                          <p:spTgt spid="11"/>
+                                        </p:tgtEl>
+                                        <p:attrNameLst>
+                                          <p:attrName>style.visibility</p:attrName>
+                                        </p:attrNameLst>
+                                      </p:cBhvr>
+                                      <p:to>
+                                        <p:strVal val="visible"/>
+                                      </p:to>
+                                    </p:set>
+                                    <p:animEffect transition="in" filter="fade">
+                                      <p:cBhvr>
+                                        <p:cTn id="7" dur="500"/>
+                                        <p:tgtEl>
+                                          <p:spTgt spid="11"/>
+                                        </p:tgtEl>
+                                      </p:cBhvr>
+                                    </p:animEffect>
+                                  </p:childTnLst>
+                                </p:cTn>
+                              </p:par>
+                            </p:childTnLst>
+                          </p:cTn>
+                        </p:par>
+                        <p:par>
+                          <p:cTn id="8" fill="hold">
+                            <p:stCondLst>
+                              <p:cond delay="600"/>
+                            </p:stCondLst>
+                            <p:childTnLst>
+                              <p:par>
+                                <p:cTn id="9" presetID="1" presetClass="exit" presetSubtype="0" fill="hold" nodeType="afterEffect">
+                                  <p:stCondLst>
+                                    <p:cond delay="0"/>
+                                  </p:stCondLst>
+                                  <p:childTnLst>
+                                    <p:set>
+                                      <p:cBhvr>
+                                        <p:cTn id="10" dur="1" fill="hold">
+                                          <p:stCondLst>
+                                            <p:cond delay="0"/>
+                                          </p:stCondLst>
+                                        </p:cTn>
+                                        <p:tgtEl>
+                                          <p:spTgt spid="3"/>
+                                        </p:tgtEl>
+                                        <p:attrNameLst>
+                                          <p:attrName>style.visibility</p:attrName>
+                                        </p:attrNameLst>
+                                      </p:cBhvr>
+                                      <p:to>
+                                        <p:strVal val="hidden"/>
+                                      </p:to>
+                                    </p:set>
+                                  </p:childTnLst>
+                                </p:cTn>
+                              </p:par>
+                            </p:childTnLst>
+                          </p:cTn>
+                        </p:par>
+                      </p:childTnLst>
+                    </p:cTn>
+                  </p:par>
+                </p:childTnLst>
+              </p:cTn>
+              <p:prevCondLst>
+                <p:cond evt="onPrev" delay="0">
+                  <p:tgtEl>
+                    <p:sldTgt/>
+                  </p:tgtEl>
+                </p:cond>
+              </p:prevCondLst>
+              <p:nextCondLst>
+                <p:cond evt="onNext" delay="0">
+                  <p:tgtEl>
+                    <p:sldTgt/>
+                  </p:tgtEl>
+                </p:cond>
+              </p:nextCondLst>
+            </p:seq>
+          </p:childTnLst>
+        </p:cTn>
+      </p:par>
+    </p:tnLst>
+    <p:bldLst>
+      <p:bldP spid="11" grpId="0" animBg="1"/>
+    </p:bldLst>
+  </p:timing>
+</p:sld>
+</file>
+
+<file path=ppt/slides/slide13.xml><?xml version="1.0" encoding="utf-8"?>
+<p:sld xmlns:a="http://schemas.openxmlformats.org/drawingml/2006/main" xmlns:r="http://schemas.openxmlformats.org/officeDocument/2006/relationships" xmlns:p="http://schemas.openxmlformats.org/presentationml/2006/main">
+  <p:cSld>
+    <p:spTree>
+      <p:nvGrpSpPr>
+        <p:cNvPr id="1" name="">
+          <a:extLst>
+            <a:ext uri="{FF2B5EF4-FFF2-40B4-BE49-F238E27FC236}">
+              <a16:creationId xmlns:a16="http://schemas.microsoft.com/office/drawing/2014/main" id="{AE741E45-B413-0AAD-097D-05F3401E8023}"/>
+            </a:ext>
+          </a:extLst>
+        </p:cNvPr>
+        <p:cNvGrpSpPr/>
+        <p:nvPr/>
+      </p:nvGrpSpPr>
+      <p:grpSpPr>
+        <a:xfrm>
+          <a:off x="0" y="0"/>
+          <a:ext cx="0" cy="0"/>
+          <a:chOff x="0" y="0"/>
+          <a:chExt cx="0" cy="0"/>
+        </a:xfrm>
+      </p:grpSpPr>
+      <p:pic>
+        <p:nvPicPr>
+          <p:cNvPr id="8366" name="Picture 8365">
+            <a:extLst>
+              <a:ext uri="{FF2B5EF4-FFF2-40B4-BE49-F238E27FC236}">
+                <a16:creationId xmlns:a16="http://schemas.microsoft.com/office/drawing/2014/main" id="{60AE9E24-9AB4-5014-B6BD-6F056F5807BA}"/>
+              </a:ext>
+            </a:extLst>
+          </p:cNvPr>
+          <p:cNvPicPr>
+            <a:picLocks noChangeAspect="1"/>
+          </p:cNvPicPr>
+          <p:nvPr/>
+        </p:nvPicPr>
+        <p:blipFill>
+          <a:blip r:embed="rId2"/>
+          <a:stretch>
+            <a:fillRect/>
+          </a:stretch>
+        </p:blipFill>
+        <p:spPr>
+          <a:xfrm>
+            <a:off x="2181925" y="1160462"/>
+            <a:ext cx="7828149" cy="5113337"/>
+          </a:xfrm>
+          <a:prstGeom prst="rect">
+            <a:avLst/>
+          </a:prstGeom>
+          <a:noFill/>
+        </p:spPr>
+      </p:pic>
+      <p:sp>
+        <p:nvSpPr>
+          <p:cNvPr id="8" name="Footer Placeholder 7">
+            <a:extLst>
+              <a:ext uri="{FF2B5EF4-FFF2-40B4-BE49-F238E27FC236}">
+                <a16:creationId xmlns:a16="http://schemas.microsoft.com/office/drawing/2014/main" id="{4C7D5AC9-EA29-86A4-7EF8-4DF941130DC8}"/>
+              </a:ext>
+            </a:extLst>
+          </p:cNvPr>
+          <p:cNvSpPr>
+            <a:spLocks noGrp="1"/>
+          </p:cNvSpPr>
+          <p:nvPr>
+            <p:ph type="ftr" sz="quarter" idx="19"/>
+          </p:nvPr>
+        </p:nvSpPr>
+        <p:spPr>
+          <a:xfrm>
+            <a:off x="4086351" y="6469380"/>
+            <a:ext cx="1130300" cy="180000"/>
+          </a:xfrm>
+        </p:spPr>
+        <p:txBody>
+          <a:bodyPr wrap="none" anchor="ctr">
+            <a:normAutofit/>
+          </a:bodyPr>
+          <a:lstStyle/>
+          <a:p>
+            <a:pPr>
+              <a:lnSpc>
+                <a:spcPct val="90000"/>
+              </a:lnSpc>
+              <a:spcAft>
+                <a:spcPts val="600"/>
+              </a:spcAft>
+            </a:pPr>
+            <a:r>
+              <a:rPr lang="en-US"/>
+              <a:t>Corbin Ferguson</a:t>
+            </a:r>
+          </a:p>
+        </p:txBody>
+      </p:sp>
+      <p:sp>
+        <p:nvSpPr>
+          <p:cNvPr id="7" name="Slide Number Placeholder 6">
+            <a:extLst>
+              <a:ext uri="{FF2B5EF4-FFF2-40B4-BE49-F238E27FC236}">
+                <a16:creationId xmlns:a16="http://schemas.microsoft.com/office/drawing/2014/main" id="{3583879C-95E5-7299-C98A-2B7D0B63F807}"/>
+              </a:ext>
+            </a:extLst>
+          </p:cNvPr>
+          <p:cNvSpPr>
+            <a:spLocks noGrp="1"/>
+          </p:cNvSpPr>
+          <p:nvPr>
+            <p:ph type="sldNum" sz="quarter" idx="20"/>
+          </p:nvPr>
+        </p:nvSpPr>
+        <p:spPr>
+          <a:xfrm>
+            <a:off x="1633051" y="6469380"/>
+            <a:ext cx="571500" cy="180000"/>
+          </a:xfrm>
+        </p:spPr>
+        <p:txBody>
+          <a:bodyPr wrap="none" anchor="ctr">
+            <a:normAutofit/>
+          </a:bodyPr>
+          <a:lstStyle/>
+          <a:p>
+            <a:pPr>
+              <a:lnSpc>
+                <a:spcPct val="90000"/>
+              </a:lnSpc>
+              <a:spcAft>
+                <a:spcPts val="600"/>
+              </a:spcAft>
+            </a:pPr>
+            <a:r>
+              <a:rPr lang="en-US"/>
+              <a:t>Slide </a:t>
+            </a:r>
+            <a:fld id="{C6F8E2D1-BFA0-484A-B7F1-E348F2594759}" type="slidenum">
+              <a:rPr lang="en-US" smtClean="0"/>
+              <a:pPr>
+                <a:lnSpc>
+                  <a:spcPct val="90000"/>
+                </a:lnSpc>
+                <a:spcAft>
+                  <a:spcPts val="600"/>
+                </a:spcAft>
+              </a:pPr>
+              <a:t>13</a:t>
+            </a:fld>
+            <a:endParaRPr lang="en-US"/>
+          </a:p>
+        </p:txBody>
+      </p:sp>
+      <p:sp>
+        <p:nvSpPr>
+          <p:cNvPr id="4" name="Date Placeholder 3">
+            <a:extLst>
+              <a:ext uri="{FF2B5EF4-FFF2-40B4-BE49-F238E27FC236}">
+                <a16:creationId xmlns:a16="http://schemas.microsoft.com/office/drawing/2014/main" id="{6F1C84BC-19BE-D2D3-DB6B-179BB01EE861}"/>
+              </a:ext>
+            </a:extLst>
+          </p:cNvPr>
+          <p:cNvSpPr>
+            <a:spLocks noGrp="1"/>
+          </p:cNvSpPr>
+          <p:nvPr>
+            <p:ph type="dt" sz="half" idx="21"/>
+          </p:nvPr>
+        </p:nvSpPr>
+        <p:spPr>
+          <a:xfrm>
+            <a:off x="334963" y="194736"/>
+            <a:ext cx="9674225" cy="180000"/>
+          </a:xfrm>
+        </p:spPr>
+        <p:txBody>
+          <a:bodyPr wrap="none" anchor="t">
+            <a:normAutofit/>
+          </a:bodyPr>
+          <a:lstStyle/>
+          <a:p>
+            <a:pPr>
+              <a:lnSpc>
+                <a:spcPct val="90000"/>
+              </a:lnSpc>
+              <a:spcAft>
+                <a:spcPts val="600"/>
+              </a:spcAft>
+            </a:pPr>
+            <a:r>
+              <a:rPr lang="en-US"/>
+              <a:t>L5X Automation Build Tool</a:t>
+            </a:r>
+          </a:p>
+        </p:txBody>
+      </p:sp>
+      <p:sp>
+        <p:nvSpPr>
+          <p:cNvPr id="2" name="Title 1">
+            <a:extLst>
+              <a:ext uri="{FF2B5EF4-FFF2-40B4-BE49-F238E27FC236}">
+                <a16:creationId xmlns:a16="http://schemas.microsoft.com/office/drawing/2014/main" id="{07BCF97A-6A5E-DA70-0A21-4FF0D5A9B2D1}"/>
+              </a:ext>
+            </a:extLst>
+          </p:cNvPr>
+          <p:cNvSpPr>
+            <a:spLocks noGrp="1"/>
+          </p:cNvSpPr>
+          <p:nvPr>
+            <p:ph type="title"/>
+          </p:nvPr>
+        </p:nvSpPr>
+        <p:spPr>
+          <a:xfrm>
+            <a:off x="334963" y="620690"/>
+            <a:ext cx="11522075" cy="360041"/>
+          </a:xfrm>
+        </p:spPr>
+        <p:txBody>
+          <a:bodyPr wrap="none" anchor="t">
+            <a:normAutofit/>
+          </a:bodyPr>
+          <a:lstStyle/>
+          <a:p>
+            <a:r>
+              <a:rPr lang="en-US" dirty="0"/>
+              <a:t>Class Diagram</a:t>
+            </a:r>
+          </a:p>
+        </p:txBody>
+      </p:sp>
+    </p:spTree>
+    <p:extLst>
+      <p:ext uri="{BB962C8B-B14F-4D97-AF65-F5344CB8AC3E}">
+        <p14:creationId xmlns:p14="http://schemas.microsoft.com/office/powerpoint/2010/main" val="2077614573"/>
+      </p:ext>
+    </p:extLst>
+  </p:cSld>
+  <p:clrMapOvr>
+    <a:masterClrMapping/>
+  </p:clrMapOvr>
+</p:sld>
+</file>
+
+<file path=ppt/slides/slide14.xml><?xml version="1.0" encoding="utf-8"?>
+<p:sld xmlns:a="http://schemas.openxmlformats.org/drawingml/2006/main" xmlns:r="http://schemas.openxmlformats.org/officeDocument/2006/relationships" xmlns:p="http://schemas.openxmlformats.org/presentationml/2006/main">
+  <p:cSld>
+    <p:spTree>
+      <p:nvGrpSpPr>
+        <p:cNvPr id="1" name="">
+          <a:extLst>
+            <a:ext uri="{FF2B5EF4-FFF2-40B4-BE49-F238E27FC236}">
+              <a16:creationId xmlns:a16="http://schemas.microsoft.com/office/drawing/2014/main" id="{B031D0FB-813C-A1A9-95BF-F0A18A2C1086}"/>
+            </a:ext>
+          </a:extLst>
+        </p:cNvPr>
+        <p:cNvGrpSpPr/>
+        <p:nvPr/>
+      </p:nvGrpSpPr>
+      <p:grpSpPr>
+        <a:xfrm>
+          <a:off x="0" y="0"/>
+          <a:ext cx="0" cy="0"/>
+          <a:chOff x="0" y="0"/>
+          <a:chExt cx="0" cy="0"/>
+        </a:xfrm>
+      </p:grpSpPr>
+      <p:pic>
+        <p:nvPicPr>
+          <p:cNvPr id="9" name="Picture 8">
+            <a:extLst>
+              <a:ext uri="{FF2B5EF4-FFF2-40B4-BE49-F238E27FC236}">
+                <a16:creationId xmlns:a16="http://schemas.microsoft.com/office/drawing/2014/main" id="{A889D74E-A641-8FCA-9F55-93231CDB546D}"/>
+              </a:ext>
+            </a:extLst>
+          </p:cNvPr>
+          <p:cNvPicPr>
+            <a:picLocks noChangeAspect="1"/>
+          </p:cNvPicPr>
+          <p:nvPr/>
+        </p:nvPicPr>
+        <p:blipFill>
+          <a:blip r:embed="rId2"/>
+          <a:stretch>
+            <a:fillRect/>
+          </a:stretch>
+        </p:blipFill>
+        <p:spPr>
+          <a:xfrm>
+            <a:off x="1176290" y="1160462"/>
+            <a:ext cx="9839419" cy="5113337"/>
+          </a:xfrm>
+          <a:prstGeom prst="rect">
+            <a:avLst/>
+          </a:prstGeom>
+          <a:noFill/>
+        </p:spPr>
+      </p:pic>
+      <p:sp>
+        <p:nvSpPr>
+          <p:cNvPr id="8" name="Footer Placeholder 7">
+            <a:extLst>
+              <a:ext uri="{FF2B5EF4-FFF2-40B4-BE49-F238E27FC236}">
+                <a16:creationId xmlns:a16="http://schemas.microsoft.com/office/drawing/2014/main" id="{71C973FB-1860-D33D-FFB0-E373255B1325}"/>
+              </a:ext>
+            </a:extLst>
+          </p:cNvPr>
+          <p:cNvSpPr>
+            <a:spLocks noGrp="1"/>
+          </p:cNvSpPr>
+          <p:nvPr>
+            <p:ph type="ftr" sz="quarter" idx="19"/>
+          </p:nvPr>
+        </p:nvSpPr>
+        <p:spPr>
+          <a:xfrm>
+            <a:off x="4086351" y="6469380"/>
+            <a:ext cx="1130300" cy="180000"/>
+          </a:xfrm>
+        </p:spPr>
+        <p:txBody>
+          <a:bodyPr wrap="none" anchor="ctr">
+            <a:normAutofit/>
+          </a:bodyPr>
+          <a:lstStyle/>
+          <a:p>
+            <a:pPr>
+              <a:lnSpc>
+                <a:spcPct val="90000"/>
+              </a:lnSpc>
+              <a:spcAft>
+                <a:spcPts val="600"/>
+              </a:spcAft>
+            </a:pPr>
+            <a:r>
+              <a:rPr lang="en-US"/>
+              <a:t>Corbin Ferguson</a:t>
+            </a:r>
+          </a:p>
+        </p:txBody>
+      </p:sp>
+      <p:sp>
+        <p:nvSpPr>
+          <p:cNvPr id="7" name="Slide Number Placeholder 6">
+            <a:extLst>
+              <a:ext uri="{FF2B5EF4-FFF2-40B4-BE49-F238E27FC236}">
+                <a16:creationId xmlns:a16="http://schemas.microsoft.com/office/drawing/2014/main" id="{FF861633-550D-9192-7E16-88623F1FDD40}"/>
+              </a:ext>
+            </a:extLst>
+          </p:cNvPr>
+          <p:cNvSpPr>
+            <a:spLocks noGrp="1"/>
+          </p:cNvSpPr>
+          <p:nvPr>
+            <p:ph type="sldNum" sz="quarter" idx="20"/>
+          </p:nvPr>
+        </p:nvSpPr>
+        <p:spPr>
+          <a:xfrm>
+            <a:off x="1633051" y="6469380"/>
+            <a:ext cx="571500" cy="180000"/>
+          </a:xfrm>
+        </p:spPr>
+        <p:txBody>
+          <a:bodyPr wrap="none" anchor="ctr">
+            <a:normAutofit/>
+          </a:bodyPr>
+          <a:lstStyle/>
+          <a:p>
+            <a:pPr>
+              <a:lnSpc>
+                <a:spcPct val="90000"/>
+              </a:lnSpc>
+              <a:spcAft>
+                <a:spcPts val="600"/>
+              </a:spcAft>
+            </a:pPr>
+            <a:r>
+              <a:rPr lang="en-US"/>
+              <a:t>Slide </a:t>
+            </a:r>
+            <a:fld id="{C6F8E2D1-BFA0-484A-B7F1-E348F2594759}" type="slidenum">
+              <a:rPr lang="en-US" smtClean="0"/>
+              <a:pPr>
+                <a:lnSpc>
+                  <a:spcPct val="90000"/>
+                </a:lnSpc>
+                <a:spcAft>
+                  <a:spcPts val="600"/>
+                </a:spcAft>
+              </a:pPr>
+              <a:t>14</a:t>
+            </a:fld>
+            <a:endParaRPr lang="en-US"/>
+          </a:p>
+        </p:txBody>
+      </p:sp>
+      <p:sp>
+        <p:nvSpPr>
+          <p:cNvPr id="4" name="Date Placeholder 3">
+            <a:extLst>
+              <a:ext uri="{FF2B5EF4-FFF2-40B4-BE49-F238E27FC236}">
+                <a16:creationId xmlns:a16="http://schemas.microsoft.com/office/drawing/2014/main" id="{5D0DCAB8-9A4F-6068-74B2-D5C8356B650C}"/>
+              </a:ext>
+            </a:extLst>
+          </p:cNvPr>
+          <p:cNvSpPr>
+            <a:spLocks noGrp="1"/>
+          </p:cNvSpPr>
+          <p:nvPr>
+            <p:ph type="dt" sz="half" idx="21"/>
+          </p:nvPr>
+        </p:nvSpPr>
+        <p:spPr>
+          <a:xfrm>
+            <a:off x="334963" y="194736"/>
+            <a:ext cx="9674225" cy="180000"/>
+          </a:xfrm>
+        </p:spPr>
+        <p:txBody>
+          <a:bodyPr wrap="none" anchor="t">
+            <a:normAutofit/>
+          </a:bodyPr>
+          <a:lstStyle/>
+          <a:p>
+            <a:pPr>
+              <a:lnSpc>
+                <a:spcPct val="90000"/>
+              </a:lnSpc>
+              <a:spcAft>
+                <a:spcPts val="600"/>
+              </a:spcAft>
+            </a:pPr>
+            <a:r>
+              <a:rPr lang="en-US"/>
+              <a:t>L5X Automation Build Tool</a:t>
+            </a:r>
+          </a:p>
+        </p:txBody>
+      </p:sp>
+      <p:sp>
+        <p:nvSpPr>
+          <p:cNvPr id="2" name="Title 1">
+            <a:extLst>
+              <a:ext uri="{FF2B5EF4-FFF2-40B4-BE49-F238E27FC236}">
+                <a16:creationId xmlns:a16="http://schemas.microsoft.com/office/drawing/2014/main" id="{5EBCB58C-1369-EDD7-5D5E-7C1E1415DB2E}"/>
+              </a:ext>
+            </a:extLst>
+          </p:cNvPr>
+          <p:cNvSpPr>
+            <a:spLocks noGrp="1"/>
+          </p:cNvSpPr>
+          <p:nvPr>
+            <p:ph type="title"/>
+          </p:nvPr>
+        </p:nvSpPr>
+        <p:spPr>
+          <a:xfrm>
+            <a:off x="334963" y="620690"/>
+            <a:ext cx="11522075" cy="360041"/>
+          </a:xfrm>
+        </p:spPr>
+        <p:txBody>
+          <a:bodyPr wrap="none" anchor="t">
+            <a:normAutofit/>
+          </a:bodyPr>
+          <a:lstStyle/>
+          <a:p>
+            <a:r>
+              <a:rPr lang="en-US" dirty="0"/>
+              <a:t>Class Diagram Cont.</a:t>
+            </a:r>
+          </a:p>
+        </p:txBody>
+      </p:sp>
+    </p:spTree>
+    <p:extLst>
+      <p:ext uri="{BB962C8B-B14F-4D97-AF65-F5344CB8AC3E}">
+        <p14:creationId xmlns:p14="http://schemas.microsoft.com/office/powerpoint/2010/main" val="1692918807"/>
+      </p:ext>
+    </p:extLst>
+  </p:cSld>
+  <p:clrMapOvr>
+    <a:masterClrMapping/>
+  </p:clrMapOvr>
+</p:sld>
+</file>
+
+<file path=ppt/slides/slide15.xml><?xml version="1.0" encoding="utf-8"?>
+<p:sld xmlns:a="http://schemas.openxmlformats.org/drawingml/2006/main" xmlns:r="http://schemas.openxmlformats.org/officeDocument/2006/relationships" xmlns:p="http://schemas.openxmlformats.org/presentationml/2006/main">
+  <p:cSld>
+    <p:spTree>
+      <p:nvGrpSpPr>
+        <p:cNvPr id="1" name="">
+          <a:extLst>
+            <a:ext uri="{FF2B5EF4-FFF2-40B4-BE49-F238E27FC236}">
               <a16:creationId xmlns:a16="http://schemas.microsoft.com/office/drawing/2014/main" id="{93938A11-EECC-9BC6-7865-435054160CD9}"/>
             </a:ext>
           </a:extLst>
@@ -19631,7 +21810,7 @@
             </a:r>
             <a:fld id="{78C39363-BD0C-4CE6-8DE9-7D78215F2B9F}" type="slidenum">
               <a:rPr lang="en-US" smtClean="0"/>
-              <a:t>10</a:t>
+              <a:t>15</a:t>
             </a:fld>
             <a:endParaRPr lang="en-US" dirty="0"/>
           </a:p>
@@ -19773,7 +21952,7 @@
 </p:sld>
 </file>
 
-<file path=ppt/slides/slide11.xml><?xml version="1.0" encoding="utf-8"?>
+<file path=ppt/slides/slide16.xml><?xml version="1.0" encoding="utf-8"?>
 <p:sld xmlns:a="http://schemas.openxmlformats.org/drawingml/2006/main" xmlns:r="http://schemas.openxmlformats.org/officeDocument/2006/relationships" xmlns:p="http://schemas.openxmlformats.org/presentationml/2006/main">
   <p:cSld>
     <p:spTree>
@@ -19885,7 +22064,7 @@
             </a:r>
             <a:fld id="{599786A8-973E-49A8-9C43-0BE71F98A081}" type="slidenum">
               <a:rPr lang="en-US" smtClean="0"/>
-              <a:t>11</a:t>
+              <a:t>16</a:t>
             </a:fld>
             <a:endParaRPr lang="en-US" dirty="0"/>
           </a:p>
@@ -20027,7 +22206,7 @@
 </p:sld>
 </file>
 
-<file path=ppt/slides/slide12.xml><?xml version="1.0" encoding="utf-8"?>
+<file path=ppt/slides/slide17.xml><?xml version="1.0" encoding="utf-8"?>
 <p:sld xmlns:a="http://schemas.openxmlformats.org/drawingml/2006/main" xmlns:r="http://schemas.openxmlformats.org/officeDocument/2006/relationships" xmlns:p="http://schemas.openxmlformats.org/presentationml/2006/main">
   <p:cSld>
     <p:spTree>
@@ -20139,7 +22318,7 @@
             </a:r>
             <a:fld id="{DEE51C30-41E2-4709-97ED-40F16AE6C836}" type="slidenum">
               <a:rPr lang="en-US" smtClean="0"/>
-              <a:t>12</a:t>
+              <a:t>17</a:t>
             </a:fld>
             <a:endParaRPr lang="en-US" dirty="0"/>
           </a:p>
@@ -20375,7 +22554,7 @@
 </p:sld>
 </file>
 
-<file path=ppt/slides/slide13.xml><?xml version="1.0" encoding="utf-8"?>
+<file path=ppt/slides/slide18.xml><?xml version="1.0" encoding="utf-8"?>
 <p:sld xmlns:a="http://schemas.openxmlformats.org/drawingml/2006/main" xmlns:r="http://schemas.openxmlformats.org/officeDocument/2006/relationships" xmlns:p="http://schemas.openxmlformats.org/presentationml/2006/main">
   <p:cSld>
     <p:spTree>
@@ -20454,7 +22633,7 @@
             </a:r>
             <a:fld id="{32B897BE-5B46-4D7A-8E5C-716C3CDA6A39}" type="slidenum">
               <a:rPr lang="en-US" smtClean="0"/>
-              <a:t>13</a:t>
+              <a:t>18</a:t>
             </a:fld>
             <a:endParaRPr lang="en-US" dirty="0"/>
           </a:p>
@@ -20568,7 +22747,7 @@
 </p:sld>
 </file>
 
-<file path=ppt/slides/slide14.xml><?xml version="1.0" encoding="utf-8"?>
+<file path=ppt/slides/slide19.xml><?xml version="1.0" encoding="utf-8"?>
 <p:sld xmlns:a="http://schemas.openxmlformats.org/drawingml/2006/main" xmlns:r="http://schemas.openxmlformats.org/officeDocument/2006/relationships" xmlns:p="http://schemas.openxmlformats.org/presentationml/2006/main">
   <p:cSld>
     <p:spTree>
@@ -20806,7 +22985,7 @@
             </a:r>
             <a:fld id="{5BFF8BEA-C7AD-416A-8E1B-AC59D078A379}" type="slidenum">
               <a:rPr lang="en-US" smtClean="0"/>
-              <a:t>14</a:t>
+              <a:t>19</a:t>
             </a:fld>
             <a:endParaRPr lang="en-US" dirty="0"/>
           </a:p>
@@ -20854,7 +23033,236 @@
 </p:sld>
 </file>
 
-<file path=ppt/slides/slide15.xml><?xml version="1.0" encoding="utf-8"?>
+<file path=ppt/slides/slide2.xml><?xml version="1.0" encoding="utf-8"?>
+<p:sld xmlns:a="http://schemas.openxmlformats.org/drawingml/2006/main" xmlns:r="http://schemas.openxmlformats.org/officeDocument/2006/relationships" xmlns:p="http://schemas.openxmlformats.org/presentationml/2006/main">
+  <p:cSld>
+    <p:spTree>
+      <p:nvGrpSpPr>
+        <p:cNvPr id="1" name="">
+          <a:extLst>
+            <a:ext uri="{FF2B5EF4-FFF2-40B4-BE49-F238E27FC236}">
+              <a16:creationId xmlns:a16="http://schemas.microsoft.com/office/drawing/2014/main" id="{ECC06C52-67BC-A4C8-3ED0-3636080E3212}"/>
+            </a:ext>
+          </a:extLst>
+        </p:cNvPr>
+        <p:cNvGrpSpPr/>
+        <p:nvPr/>
+      </p:nvGrpSpPr>
+      <p:grpSpPr>
+        <a:xfrm>
+          <a:off x="0" y="0"/>
+          <a:ext cx="0" cy="0"/>
+          <a:chOff x="0" y="0"/>
+          <a:chExt cx="0" cy="0"/>
+        </a:xfrm>
+      </p:grpSpPr>
+      <p:sp>
+        <p:nvSpPr>
+          <p:cNvPr id="2" name="Title 1">
+            <a:extLst>
+              <a:ext uri="{FF2B5EF4-FFF2-40B4-BE49-F238E27FC236}">
+                <a16:creationId xmlns:a16="http://schemas.microsoft.com/office/drawing/2014/main" id="{389C7A2E-1427-5278-B512-F2A80C319122}"/>
+              </a:ext>
+            </a:extLst>
+          </p:cNvPr>
+          <p:cNvSpPr>
+            <a:spLocks noGrp="1"/>
+          </p:cNvSpPr>
+          <p:nvPr>
+            <p:ph type="title"/>
+          </p:nvPr>
+        </p:nvSpPr>
+        <p:spPr>
+          <a:xfrm>
+            <a:off x="334963" y="620690"/>
+            <a:ext cx="11522075" cy="360041"/>
+          </a:xfrm>
+        </p:spPr>
+        <p:txBody>
+          <a:bodyPr/>
+          <a:lstStyle/>
+          <a:p>
+            <a:r>
+              <a:rPr lang="en-US" dirty="0"/>
+              <a:t>Outline</a:t>
+            </a:r>
+          </a:p>
+        </p:txBody>
+      </p:sp>
+      <p:sp>
+        <p:nvSpPr>
+          <p:cNvPr id="13" name="Content Placeholder 12">
+            <a:extLst>
+              <a:ext uri="{FF2B5EF4-FFF2-40B4-BE49-F238E27FC236}">
+                <a16:creationId xmlns:a16="http://schemas.microsoft.com/office/drawing/2014/main" id="{9ABB78FB-6052-78C4-38A0-9B7AF58E9FCB}"/>
+              </a:ext>
+            </a:extLst>
+          </p:cNvPr>
+          <p:cNvSpPr>
+            <a:spLocks noGrp="1"/>
+          </p:cNvSpPr>
+          <p:nvPr>
+            <p:ph idx="1"/>
+          </p:nvPr>
+        </p:nvSpPr>
+        <p:spPr/>
+        <p:txBody>
+          <a:bodyPr/>
+          <a:lstStyle/>
+          <a:p>
+            <a:r>
+              <a:rPr lang="en-US" dirty="0"/>
+              <a:t>Project Goals</a:t>
+            </a:r>
+          </a:p>
+          <a:p>
+            <a:r>
+              <a:rPr lang="en-US" dirty="0"/>
+              <a:t>Implemented Features</a:t>
+            </a:r>
+          </a:p>
+          <a:p>
+            <a:r>
+              <a:rPr lang="en-US" dirty="0"/>
+              <a:t>Design timeline</a:t>
+            </a:r>
+          </a:p>
+          <a:p>
+            <a:r>
+              <a:rPr lang="en-US" dirty="0"/>
+              <a:t>Tools Used</a:t>
+            </a:r>
+          </a:p>
+          <a:p>
+            <a:r>
+              <a:rPr lang="en-US" dirty="0"/>
+              <a:t>System Design</a:t>
+            </a:r>
+          </a:p>
+          <a:p>
+            <a:r>
+              <a:rPr lang="en-US" dirty="0"/>
+              <a:t>Testing and Verification</a:t>
+            </a:r>
+          </a:p>
+          <a:p>
+            <a:r>
+              <a:rPr lang="en-US" dirty="0"/>
+              <a:t>Lessons Learned</a:t>
+            </a:r>
+          </a:p>
+        </p:txBody>
+      </p:sp>
+      <p:sp>
+        <p:nvSpPr>
+          <p:cNvPr id="4" name="Date Placeholder 3">
+            <a:extLst>
+              <a:ext uri="{FF2B5EF4-FFF2-40B4-BE49-F238E27FC236}">
+                <a16:creationId xmlns:a16="http://schemas.microsoft.com/office/drawing/2014/main" id="{64344D59-887A-89DB-90DC-83D1F2848381}"/>
+              </a:ext>
+            </a:extLst>
+          </p:cNvPr>
+          <p:cNvSpPr>
+            <a:spLocks noGrp="1"/>
+          </p:cNvSpPr>
+          <p:nvPr>
+            <p:ph type="dt" sz="half" idx="10"/>
+          </p:nvPr>
+        </p:nvSpPr>
+        <p:spPr>
+          <a:xfrm>
+            <a:off x="334963" y="194736"/>
+            <a:ext cx="9674225" cy="180000"/>
+          </a:xfrm>
+        </p:spPr>
+        <p:txBody>
+          <a:bodyPr/>
+          <a:lstStyle/>
+          <a:p>
+            <a:r>
+              <a:rPr lang="en-US"/>
+              <a:t>L5X Automation Build Tool</a:t>
+            </a:r>
+            <a:endParaRPr lang="en-US" dirty="0"/>
+          </a:p>
+        </p:txBody>
+      </p:sp>
+      <p:sp>
+        <p:nvSpPr>
+          <p:cNvPr id="3" name="Slide Number Placeholder 2">
+            <a:extLst>
+              <a:ext uri="{FF2B5EF4-FFF2-40B4-BE49-F238E27FC236}">
+                <a16:creationId xmlns:a16="http://schemas.microsoft.com/office/drawing/2014/main" id="{D1AEB583-7C00-647F-EA4B-940732920BC4}"/>
+              </a:ext>
+            </a:extLst>
+          </p:cNvPr>
+          <p:cNvSpPr>
+            <a:spLocks noGrp="1"/>
+          </p:cNvSpPr>
+          <p:nvPr>
+            <p:ph type="sldNum" sz="quarter" idx="12"/>
+          </p:nvPr>
+        </p:nvSpPr>
+        <p:spPr/>
+        <p:txBody>
+          <a:bodyPr/>
+          <a:lstStyle/>
+          <a:p>
+            <a:r>
+              <a:rPr lang="en-US"/>
+              <a:t>Slide </a:t>
+            </a:r>
+            <a:fld id="{6ED4F0B8-A3B9-4B6F-BEC0-B0E78C1192A7}" type="slidenum">
+              <a:rPr lang="en-US" smtClean="0"/>
+              <a:t>2</a:t>
+            </a:fld>
+            <a:endParaRPr lang="en-US" dirty="0"/>
+          </a:p>
+        </p:txBody>
+      </p:sp>
+      <p:sp>
+        <p:nvSpPr>
+          <p:cNvPr id="7" name="Footer Placeholder 6">
+            <a:extLst>
+              <a:ext uri="{FF2B5EF4-FFF2-40B4-BE49-F238E27FC236}">
+                <a16:creationId xmlns:a16="http://schemas.microsoft.com/office/drawing/2014/main" id="{9F92DEA4-6CF8-8F90-FC4B-A9A798E29D53}"/>
+              </a:ext>
+            </a:extLst>
+          </p:cNvPr>
+          <p:cNvSpPr>
+            <a:spLocks noGrp="1"/>
+          </p:cNvSpPr>
+          <p:nvPr>
+            <p:ph type="ftr" sz="quarter" idx="11"/>
+          </p:nvPr>
+        </p:nvSpPr>
+        <p:spPr/>
+        <p:txBody>
+          <a:bodyPr/>
+          <a:lstStyle/>
+          <a:p>
+            <a:r>
+              <a:rPr lang="en-US"/>
+              <a:t>Corbin Ferguson</a:t>
+            </a:r>
+            <a:endParaRPr lang="en-US" dirty="0"/>
+          </a:p>
+        </p:txBody>
+      </p:sp>
+    </p:spTree>
+    <p:extLst>
+      <p:ext uri="{BB962C8B-B14F-4D97-AF65-F5344CB8AC3E}">
+        <p14:creationId xmlns:p14="http://schemas.microsoft.com/office/powerpoint/2010/main" val="4050751982"/>
+      </p:ext>
+    </p:extLst>
+  </p:cSld>
+  <p:clrMapOvr>
+    <a:masterClrMapping/>
+  </p:clrMapOvr>
+</p:sld>
+</file>
+
+<file path=ppt/slides/slide20.xml><?xml version="1.0" encoding="utf-8"?>
 <p:sld xmlns:a="http://schemas.openxmlformats.org/drawingml/2006/main" xmlns:r="http://schemas.openxmlformats.org/officeDocument/2006/relationships" xmlns:p="http://schemas.openxmlformats.org/presentationml/2006/main">
   <p:cSld>
     <p:spTree>
@@ -20985,7 +23393,7 @@
             </a:r>
             <a:fld id="{358A1964-41C6-43E7-8879-EF27F633EDD1}" type="slidenum">
               <a:rPr lang="en-US" smtClean="0"/>
-              <a:t>15</a:t>
+              <a:t>20</a:t>
             </a:fld>
             <a:endParaRPr lang="en-US" dirty="0"/>
           </a:p>
@@ -21158,7 +23566,7 @@
 </p:sld>
 </file>
 
-<file path=ppt/slides/slide16.xml><?xml version="1.0" encoding="utf-8"?>
+<file path=ppt/slides/slide21.xml><?xml version="1.0" encoding="utf-8"?>
 <p:sld xmlns:a="http://schemas.openxmlformats.org/drawingml/2006/main" xmlns:r="http://schemas.openxmlformats.org/officeDocument/2006/relationships" xmlns:p="http://schemas.openxmlformats.org/presentationml/2006/main">
   <p:cSld>
     <p:spTree>
@@ -21342,7 +23750,7 @@
             </a:r>
             <a:fld id="{B7F1FE61-F696-4BC2-948F-7278C8C6DBB9}" type="slidenum">
               <a:rPr lang="en-US" smtClean="0"/>
-              <a:t>16</a:t>
+              <a:t>21</a:t>
             </a:fld>
             <a:endParaRPr lang="en-US" dirty="0"/>
           </a:p>
@@ -21389,7 +23797,7 @@
 </p:sld>
 </file>
 
-<file path=ppt/slides/slide17.xml><?xml version="1.0" encoding="utf-8"?>
+<file path=ppt/slides/slide22.xml><?xml version="1.0" encoding="utf-8"?>
 <p:sld xmlns:a="http://schemas.openxmlformats.org/drawingml/2006/main" xmlns:r="http://schemas.openxmlformats.org/officeDocument/2006/relationships" xmlns:p="http://schemas.openxmlformats.org/presentationml/2006/main">
   <p:cSld>
     <p:spTree>
@@ -21569,7 +23977,7 @@
             </a:r>
             <a:fld id="{B7F1FE61-F696-4BC2-948F-7278C8C6DBB9}" type="slidenum">
               <a:rPr lang="en-US" smtClean="0"/>
-              <a:t>17</a:t>
+              <a:t>22</a:t>
             </a:fld>
             <a:endParaRPr lang="en-US" dirty="0"/>
           </a:p>
@@ -21616,7 +24024,7 @@
 </p:sld>
 </file>
 
-<file path=ppt/slides/slide18.xml><?xml version="1.0" encoding="utf-8"?>
+<file path=ppt/slides/slide23.xml><?xml version="1.0" encoding="utf-8"?>
 <p:sld xmlns:a="http://schemas.openxmlformats.org/drawingml/2006/main" xmlns:r="http://schemas.openxmlformats.org/officeDocument/2006/relationships" xmlns:p="http://schemas.openxmlformats.org/presentationml/2006/main">
   <p:cSld>
     <p:spTree>
@@ -21666,7 +24074,7 @@
             </a:r>
             <a:fld id="{C20DA095-8283-4DCC-BA55-3B61E88C6181}" type="slidenum">
               <a:rPr lang="en-US" smtClean="0"/>
-              <a:t>18</a:t>
+              <a:t>23</a:t>
             </a:fld>
             <a:endParaRPr lang="en-US" dirty="0"/>
           </a:p>
@@ -21760,7 +24168,7 @@
 </p:sld>
 </file>
 
-<file path=ppt/slides/slide19.xml><?xml version="1.0" encoding="utf-8"?>
+<file path=ppt/slides/slide24.xml><?xml version="1.0" encoding="utf-8"?>
 <p:sld xmlns:a="http://schemas.openxmlformats.org/drawingml/2006/main" xmlns:r="http://schemas.openxmlformats.org/officeDocument/2006/relationships" xmlns:p="http://schemas.openxmlformats.org/presentationml/2006/main">
   <p:cSld>
     <p:spTree>
@@ -22035,7 +24443,7 @@
             </a:r>
             <a:fld id="{B7F1FE61-F696-4BC2-948F-7278C8C6DBB9}" type="slidenum">
               <a:rPr lang="en-US" smtClean="0"/>
-              <a:t>19</a:t>
+              <a:t>24</a:t>
             </a:fld>
             <a:endParaRPr lang="en-US" dirty="0"/>
           </a:p>
@@ -22073,235 +24481,6 @@
     <p:extLst>
       <p:ext uri="{BB962C8B-B14F-4D97-AF65-F5344CB8AC3E}">
         <p14:creationId xmlns:p14="http://schemas.microsoft.com/office/powerpoint/2010/main" val="1869098219"/>
-      </p:ext>
-    </p:extLst>
-  </p:cSld>
-  <p:clrMapOvr>
-    <a:masterClrMapping/>
-  </p:clrMapOvr>
-</p:sld>
-</file>
-
-<file path=ppt/slides/slide2.xml><?xml version="1.0" encoding="utf-8"?>
-<p:sld xmlns:a="http://schemas.openxmlformats.org/drawingml/2006/main" xmlns:r="http://schemas.openxmlformats.org/officeDocument/2006/relationships" xmlns:p="http://schemas.openxmlformats.org/presentationml/2006/main">
-  <p:cSld>
-    <p:spTree>
-      <p:nvGrpSpPr>
-        <p:cNvPr id="1" name="">
-          <a:extLst>
-            <a:ext uri="{FF2B5EF4-FFF2-40B4-BE49-F238E27FC236}">
-              <a16:creationId xmlns:a16="http://schemas.microsoft.com/office/drawing/2014/main" id="{ECC06C52-67BC-A4C8-3ED0-3636080E3212}"/>
-            </a:ext>
-          </a:extLst>
-        </p:cNvPr>
-        <p:cNvGrpSpPr/>
-        <p:nvPr/>
-      </p:nvGrpSpPr>
-      <p:grpSpPr>
-        <a:xfrm>
-          <a:off x="0" y="0"/>
-          <a:ext cx="0" cy="0"/>
-          <a:chOff x="0" y="0"/>
-          <a:chExt cx="0" cy="0"/>
-        </a:xfrm>
-      </p:grpSpPr>
-      <p:sp>
-        <p:nvSpPr>
-          <p:cNvPr id="2" name="Title 1">
-            <a:extLst>
-              <a:ext uri="{FF2B5EF4-FFF2-40B4-BE49-F238E27FC236}">
-                <a16:creationId xmlns:a16="http://schemas.microsoft.com/office/drawing/2014/main" id="{389C7A2E-1427-5278-B512-F2A80C319122}"/>
-              </a:ext>
-            </a:extLst>
-          </p:cNvPr>
-          <p:cNvSpPr>
-            <a:spLocks noGrp="1"/>
-          </p:cNvSpPr>
-          <p:nvPr>
-            <p:ph type="title"/>
-          </p:nvPr>
-        </p:nvSpPr>
-        <p:spPr>
-          <a:xfrm>
-            <a:off x="334963" y="620690"/>
-            <a:ext cx="11522075" cy="360041"/>
-          </a:xfrm>
-        </p:spPr>
-        <p:txBody>
-          <a:bodyPr/>
-          <a:lstStyle/>
-          <a:p>
-            <a:r>
-              <a:rPr lang="en-US" dirty="0"/>
-              <a:t>Outline</a:t>
-            </a:r>
-          </a:p>
-        </p:txBody>
-      </p:sp>
-      <p:sp>
-        <p:nvSpPr>
-          <p:cNvPr id="13" name="Content Placeholder 12">
-            <a:extLst>
-              <a:ext uri="{FF2B5EF4-FFF2-40B4-BE49-F238E27FC236}">
-                <a16:creationId xmlns:a16="http://schemas.microsoft.com/office/drawing/2014/main" id="{9ABB78FB-6052-78C4-38A0-9B7AF58E9FCB}"/>
-              </a:ext>
-            </a:extLst>
-          </p:cNvPr>
-          <p:cNvSpPr>
-            <a:spLocks noGrp="1"/>
-          </p:cNvSpPr>
-          <p:nvPr>
-            <p:ph idx="1"/>
-          </p:nvPr>
-        </p:nvSpPr>
-        <p:spPr/>
-        <p:txBody>
-          <a:bodyPr/>
-          <a:lstStyle/>
-          <a:p>
-            <a:r>
-              <a:rPr lang="en-US" dirty="0"/>
-              <a:t>Project Goals</a:t>
-            </a:r>
-          </a:p>
-          <a:p>
-            <a:r>
-              <a:rPr lang="en-US" dirty="0"/>
-              <a:t>Implemented Features</a:t>
-            </a:r>
-          </a:p>
-          <a:p>
-            <a:r>
-              <a:rPr lang="en-US" dirty="0"/>
-              <a:t>Design timeline</a:t>
-            </a:r>
-          </a:p>
-          <a:p>
-            <a:r>
-              <a:rPr lang="en-US" dirty="0"/>
-              <a:t>Tools Used</a:t>
-            </a:r>
-          </a:p>
-          <a:p>
-            <a:r>
-              <a:rPr lang="en-US" dirty="0"/>
-              <a:t>System Design</a:t>
-            </a:r>
-          </a:p>
-          <a:p>
-            <a:r>
-              <a:rPr lang="en-US" dirty="0"/>
-              <a:t>Testing and Verification</a:t>
-            </a:r>
-          </a:p>
-          <a:p>
-            <a:r>
-              <a:rPr lang="en-US" dirty="0"/>
-              <a:t>Lessons Learned</a:t>
-            </a:r>
-          </a:p>
-        </p:txBody>
-      </p:sp>
-      <p:sp>
-        <p:nvSpPr>
-          <p:cNvPr id="4" name="Date Placeholder 3">
-            <a:extLst>
-              <a:ext uri="{FF2B5EF4-FFF2-40B4-BE49-F238E27FC236}">
-                <a16:creationId xmlns:a16="http://schemas.microsoft.com/office/drawing/2014/main" id="{64344D59-887A-89DB-90DC-83D1F2848381}"/>
-              </a:ext>
-            </a:extLst>
-          </p:cNvPr>
-          <p:cNvSpPr>
-            <a:spLocks noGrp="1"/>
-          </p:cNvSpPr>
-          <p:nvPr>
-            <p:ph type="dt" sz="half" idx="10"/>
-          </p:nvPr>
-        </p:nvSpPr>
-        <p:spPr>
-          <a:xfrm>
-            <a:off x="334963" y="194736"/>
-            <a:ext cx="9674225" cy="180000"/>
-          </a:xfrm>
-        </p:spPr>
-        <p:txBody>
-          <a:bodyPr/>
-          <a:lstStyle/>
-          <a:p>
-            <a:r>
-              <a:rPr lang="en-US"/>
-              <a:t>L5X Automation Build Tool</a:t>
-            </a:r>
-            <a:endParaRPr lang="en-US" dirty="0"/>
-          </a:p>
-        </p:txBody>
-      </p:sp>
-      <p:sp>
-        <p:nvSpPr>
-          <p:cNvPr id="3" name="Slide Number Placeholder 2">
-            <a:extLst>
-              <a:ext uri="{FF2B5EF4-FFF2-40B4-BE49-F238E27FC236}">
-                <a16:creationId xmlns:a16="http://schemas.microsoft.com/office/drawing/2014/main" id="{D1AEB583-7C00-647F-EA4B-940732920BC4}"/>
-              </a:ext>
-            </a:extLst>
-          </p:cNvPr>
-          <p:cNvSpPr>
-            <a:spLocks noGrp="1"/>
-          </p:cNvSpPr>
-          <p:nvPr>
-            <p:ph type="sldNum" sz="quarter" idx="12"/>
-          </p:nvPr>
-        </p:nvSpPr>
-        <p:spPr/>
-        <p:txBody>
-          <a:bodyPr/>
-          <a:lstStyle/>
-          <a:p>
-            <a:r>
-              <a:rPr lang="en-US"/>
-              <a:t>Slide </a:t>
-            </a:r>
-            <a:fld id="{6ED4F0B8-A3B9-4B6F-BEC0-B0E78C1192A7}" type="slidenum">
-              <a:rPr lang="en-US" smtClean="0"/>
-              <a:t>2</a:t>
-            </a:fld>
-            <a:endParaRPr lang="en-US" dirty="0"/>
-          </a:p>
-        </p:txBody>
-      </p:sp>
-      <p:sp>
-        <p:nvSpPr>
-          <p:cNvPr id="7" name="Footer Placeholder 6">
-            <a:extLst>
-              <a:ext uri="{FF2B5EF4-FFF2-40B4-BE49-F238E27FC236}">
-                <a16:creationId xmlns:a16="http://schemas.microsoft.com/office/drawing/2014/main" id="{9F92DEA4-6CF8-8F90-FC4B-A9A798E29D53}"/>
-              </a:ext>
-            </a:extLst>
-          </p:cNvPr>
-          <p:cNvSpPr>
-            <a:spLocks noGrp="1"/>
-          </p:cNvSpPr>
-          <p:nvPr>
-            <p:ph type="ftr" sz="quarter" idx="11"/>
-          </p:nvPr>
-        </p:nvSpPr>
-        <p:spPr/>
-        <p:txBody>
-          <a:bodyPr/>
-          <a:lstStyle/>
-          <a:p>
-            <a:r>
-              <a:rPr lang="en-US"/>
-              <a:t>Corbin Ferguson</a:t>
-            </a:r>
-            <a:endParaRPr lang="en-US" dirty="0"/>
-          </a:p>
-        </p:txBody>
-      </p:sp>
-    </p:spTree>
-    <p:extLst>
-      <p:ext uri="{BB962C8B-B14F-4D97-AF65-F5344CB8AC3E}">
-        <p14:creationId xmlns:p14="http://schemas.microsoft.com/office/powerpoint/2010/main" val="4050751982"/>
       </p:ext>
     </p:extLst>
   </p:cSld>
@@ -23392,7 +25571,7 @@
         <p:cNvPr id="1" name="">
           <a:extLst>
             <a:ext uri="{FF2B5EF4-FFF2-40B4-BE49-F238E27FC236}">
-              <a16:creationId xmlns:a16="http://schemas.microsoft.com/office/drawing/2014/main" id="{B8FC7F66-5EAF-7CD6-5507-37789ADF879D}"/>
+              <a16:creationId xmlns:a16="http://schemas.microsoft.com/office/drawing/2014/main" id="{C1B326D9-95CE-9C7A-9B22-3CD559A064B4}"/>
             </a:ext>
           </a:extLst>
         </p:cNvPr>
@@ -23412,7 +25591,7 @@
           <p:cNvPr id="2" name="Title 1">
             <a:extLst>
               <a:ext uri="{FF2B5EF4-FFF2-40B4-BE49-F238E27FC236}">
-                <a16:creationId xmlns:a16="http://schemas.microsoft.com/office/drawing/2014/main" id="{2315E467-E348-D3A8-4D11-C2CBEDF12071}"/>
+                <a16:creationId xmlns:a16="http://schemas.microsoft.com/office/drawing/2014/main" id="{7E9D4B76-A3DE-8B10-4584-CAA5BCEAB3C3}"/>
               </a:ext>
             </a:extLst>
           </p:cNvPr>
@@ -23445,7 +25624,7 @@
           <p:cNvPr id="4" name="Date Placeholder 3">
             <a:extLst>
               <a:ext uri="{FF2B5EF4-FFF2-40B4-BE49-F238E27FC236}">
-                <a16:creationId xmlns:a16="http://schemas.microsoft.com/office/drawing/2014/main" id="{4317EBB6-D6BF-B489-80A4-08333792E136}"/>
+                <a16:creationId xmlns:a16="http://schemas.microsoft.com/office/drawing/2014/main" id="{72BD1437-1814-4718-15B2-4F4FE59D8788}"/>
               </a:ext>
             </a:extLst>
           </p:cNvPr>
@@ -23474,7 +25653,7 @@
           <p:cNvPr id="7" name="Slide Number Placeholder 6">
             <a:extLst>
               <a:ext uri="{FF2B5EF4-FFF2-40B4-BE49-F238E27FC236}">
-                <a16:creationId xmlns:a16="http://schemas.microsoft.com/office/drawing/2014/main" id="{7F6DEF74-2F72-3CD0-58A5-4EF19B8A9A56}"/>
+                <a16:creationId xmlns:a16="http://schemas.microsoft.com/office/drawing/2014/main" id="{4462FE55-B206-389E-6D0D-9464FE39EC4E}"/>
               </a:ext>
             </a:extLst>
           </p:cNvPr>
@@ -23507,7 +25686,7 @@
           <p:cNvPr id="8" name="Footer Placeholder 7">
             <a:extLst>
               <a:ext uri="{FF2B5EF4-FFF2-40B4-BE49-F238E27FC236}">
-                <a16:creationId xmlns:a16="http://schemas.microsoft.com/office/drawing/2014/main" id="{1CA91728-2710-BB92-A4D9-A62940118DD7}"/>
+                <a16:creationId xmlns:a16="http://schemas.microsoft.com/office/drawing/2014/main" id="{0BF0E17D-BE8E-1377-A679-B5EA93B3AE8F}"/>
               </a:ext>
             </a:extLst>
           </p:cNvPr>
@@ -23536,7 +25715,7 @@
           <p:cNvPr id="15" name="Picture 14" descr="A Flow chart displaying all windows in the application and how they lead to one another">
             <a:extLst>
               <a:ext uri="{FF2B5EF4-FFF2-40B4-BE49-F238E27FC236}">
-                <a16:creationId xmlns:a16="http://schemas.microsoft.com/office/drawing/2014/main" id="{6244959B-B329-3457-CDC8-8A5F7BF28B7D}"/>
+                <a16:creationId xmlns:a16="http://schemas.microsoft.com/office/drawing/2014/main" id="{D209E713-11DD-16BC-02AC-C8F52F87573B}"/>
               </a:ext>
             </a:extLst>
           </p:cNvPr>
@@ -23567,16 +25746,230 @@
           </a:prstGeom>
         </p:spPr>
       </p:pic>
+      <p:pic>
+        <p:nvPicPr>
+          <p:cNvPr id="10242" name="ActionSelect">
+            <a:extLst>
+              <a:ext uri="{FF2B5EF4-FFF2-40B4-BE49-F238E27FC236}">
+                <a16:creationId xmlns:a16="http://schemas.microsoft.com/office/drawing/2014/main" id="{461CD87D-B8E2-EBAC-C16F-E56594D3F499}"/>
+              </a:ext>
+            </a:extLst>
+          </p:cNvPr>
+          <p:cNvPicPr>
+            <a:picLocks noChangeAspect="1" noChangeArrowheads="1"/>
+          </p:cNvPicPr>
+          <p:nvPr/>
+        </p:nvPicPr>
+        <p:blipFill>
+          <a:blip r:embed="rId3">
+            <a:extLst>
+              <a:ext uri="{28A0092B-C50C-407E-A947-70E740481C1C}">
+                <a14:useLocalDpi xmlns:a14="http://schemas.microsoft.com/office/drawing/2010/main" val="0"/>
+              </a:ext>
+            </a:extLst>
+          </a:blip>
+          <a:srcRect/>
+          <a:stretch>
+            <a:fillRect/>
+          </a:stretch>
+        </p:blipFill>
+        <p:spPr bwMode="auto">
+          <a:xfrm>
+            <a:off x="5488780" y="3113311"/>
+            <a:ext cx="720731" cy="463327"/>
+          </a:xfrm>
+          <a:prstGeom prst="rect">
+            <a:avLst/>
+          </a:prstGeom>
+          <a:noFill/>
+          <a:extLst>
+            <a:ext uri="{909E8E84-426E-40DD-AFC4-6F175D3DCCD1}">
+              <a14:hiddenFill xmlns:a14="http://schemas.microsoft.com/office/drawing/2010/main">
+                <a:solidFill>
+                  <a:srgbClr val="FFFFFF"/>
+                </a:solidFill>
+              </a14:hiddenFill>
+            </a:ext>
+          </a:extLst>
+        </p:spPr>
+      </p:pic>
+      <p:sp>
+        <p:nvSpPr>
+          <p:cNvPr id="3" name="Rectangle: Rounded Corners 2">
+            <a:extLst>
+              <a:ext uri="{FF2B5EF4-FFF2-40B4-BE49-F238E27FC236}">
+                <a16:creationId xmlns:a16="http://schemas.microsoft.com/office/drawing/2014/main" id="{ED261959-73BE-AC8F-A9DA-6CAEF5E9BB95}"/>
+              </a:ext>
+            </a:extLst>
+          </p:cNvPr>
+          <p:cNvSpPr/>
+          <p:nvPr/>
+        </p:nvSpPr>
+        <p:spPr>
+          <a:xfrm>
+            <a:off x="5466560" y="3090863"/>
+            <a:ext cx="742951" cy="485775"/>
+          </a:xfrm>
+          <a:prstGeom prst="roundRect">
+            <a:avLst/>
+          </a:prstGeom>
+          <a:solidFill>
+            <a:schemeClr val="accent6">
+              <a:lumMod val="60000"/>
+              <a:lumOff val="40000"/>
+              <a:alpha val="60000"/>
+            </a:schemeClr>
+          </a:solidFill>
+          <a:ln w="38100">
+            <a:solidFill>
+              <a:schemeClr val="accent6">
+                <a:lumMod val="60000"/>
+                <a:lumOff val="40000"/>
+              </a:schemeClr>
+            </a:solidFill>
+          </a:ln>
+          <a:effectLst>
+            <a:glow rad="139700">
+              <a:schemeClr val="accent6">
+                <a:satMod val="175000"/>
+                <a:alpha val="40000"/>
+              </a:schemeClr>
+            </a:glow>
+          </a:effectLst>
+        </p:spPr>
+        <p:style>
+          <a:lnRef idx="2">
+            <a:schemeClr val="accent1">
+              <a:shade val="50000"/>
+            </a:schemeClr>
+          </a:lnRef>
+          <a:fillRef idx="1">
+            <a:schemeClr val="accent1"/>
+          </a:fillRef>
+          <a:effectRef idx="0">
+            <a:schemeClr val="accent1"/>
+          </a:effectRef>
+          <a:fontRef idx="minor">
+            <a:schemeClr val="lt1"/>
+          </a:fontRef>
+        </p:style>
+        <p:txBody>
+          <a:bodyPr rtlCol="0" anchor="ctr"/>
+          <a:lstStyle/>
+          <a:p>
+            <a:pPr algn="ctr"/>
+            <a:endParaRPr lang="en-US" sz="2000" dirty="0" err="1">
+              <a:solidFill>
+                <a:srgbClr val="FFFFFF"/>
+              </a:solidFill>
+              <a:effectLst>
+                <a:glow rad="63500">
+                  <a:srgbClr val="FF0000">
+                    <a:alpha val="40000"/>
+                  </a:srgbClr>
+                </a:glow>
+              </a:effectLst>
+              <a:latin typeface="E+H Sans" panose="020B0404050202020204" pitchFamily="34" charset="0"/>
+            </a:endParaRPr>
+          </a:p>
+        </p:txBody>
+      </p:sp>
     </p:spTree>
     <p:extLst>
       <p:ext uri="{BB962C8B-B14F-4D97-AF65-F5344CB8AC3E}">
-        <p14:creationId xmlns:p14="http://schemas.microsoft.com/office/powerpoint/2010/main" val="1979168377"/>
+        <p14:creationId xmlns:p14="http://schemas.microsoft.com/office/powerpoint/2010/main" val="3493033771"/>
       </p:ext>
     </p:extLst>
   </p:cSld>
   <p:clrMapOvr>
     <a:masterClrMapping/>
   </p:clrMapOvr>
+  <p:timing>
+    <p:tnLst>
+      <p:par>
+        <p:cTn id="1" dur="indefinite" restart="never" nodeType="tmRoot">
+          <p:childTnLst>
+            <p:seq concurrent="1" nextAc="seek">
+              <p:cTn id="2" dur="indefinite" nodeType="mainSeq">
+                <p:childTnLst>
+                  <p:par>
+                    <p:cTn id="3" fill="hold">
+                      <p:stCondLst>
+                        <p:cond delay="indefinite"/>
+                      </p:stCondLst>
+                      <p:childTnLst>
+                        <p:par>
+                          <p:cTn id="4" fill="hold">
+                            <p:stCondLst>
+                              <p:cond delay="0"/>
+                            </p:stCondLst>
+                            <p:childTnLst>
+                              <p:par>
+                                <p:cTn id="5" presetID="10" presetClass="entr" presetSubtype="0" fill="hold" grpId="0" nodeType="clickEffect">
+                                  <p:stCondLst>
+                                    <p:cond delay="0"/>
+                                  </p:stCondLst>
+                                  <p:childTnLst>
+                                    <p:set>
+                                      <p:cBhvr>
+                                        <p:cTn id="6" dur="1" fill="hold">
+                                          <p:stCondLst>
+                                            <p:cond delay="0"/>
+                                          </p:stCondLst>
+                                        </p:cTn>
+                                        <p:tgtEl>
+                                          <p:spTgt spid="3"/>
+                                        </p:tgtEl>
+                                        <p:attrNameLst>
+                                          <p:attrName>style.visibility</p:attrName>
+                                        </p:attrNameLst>
+                                      </p:cBhvr>
+                                      <p:to>
+                                        <p:strVal val="visible"/>
+                                      </p:to>
+                                    </p:set>
+                                    <p:animEffect transition="in" filter="fade">
+                                      <p:cBhvr>
+                                        <p:cTn id="7" dur="250"/>
+                                        <p:tgtEl>
+                                          <p:spTgt spid="3"/>
+                                        </p:tgtEl>
+                                      </p:cBhvr>
+                                    </p:animEffect>
+                                  </p:childTnLst>
+                                </p:cTn>
+                              </p:par>
+                            </p:childTnLst>
+                          </p:cTn>
+                        </p:par>
+                      </p:childTnLst>
+                    </p:cTn>
+                  </p:par>
+                </p:childTnLst>
+              </p:cTn>
+              <p:prevCondLst>
+                <p:cond evt="onPrev" delay="0">
+                  <p:tgtEl>
+                    <p:sldTgt/>
+                  </p:tgtEl>
+                </p:cond>
+              </p:prevCondLst>
+              <p:nextCondLst>
+                <p:cond evt="onNext" delay="0">
+                  <p:tgtEl>
+                    <p:sldTgt/>
+                  </p:tgtEl>
+                </p:cond>
+              </p:nextCondLst>
+            </p:seq>
+          </p:childTnLst>
+        </p:cTn>
+      </p:par>
+    </p:tnLst>
+    <p:bldLst>
+      <p:bldP spid="3" grpId="0" animBg="1"/>
+    </p:bldLst>
+  </p:timing>
 </p:sld>
 </file>
 
@@ -23588,7 +25981,7 @@
         <p:cNvPr id="1" name="">
           <a:extLst>
             <a:ext uri="{FF2B5EF4-FFF2-40B4-BE49-F238E27FC236}">
-              <a16:creationId xmlns:a16="http://schemas.microsoft.com/office/drawing/2014/main" id="{AE741E45-B413-0AAD-097D-05F3401E8023}"/>
+              <a16:creationId xmlns:a16="http://schemas.microsoft.com/office/drawing/2014/main" id="{89DCA1A2-FD6D-0264-7CAC-569FBB940928}"/>
             </a:ext>
           </a:extLst>
         </p:cNvPr>
@@ -23603,12 +25996,183 @@
           <a:chExt cx="0" cy="0"/>
         </a:xfrm>
       </p:grpSpPr>
+      <p:sp>
+        <p:nvSpPr>
+          <p:cNvPr id="2" name="Title 1">
+            <a:extLst>
+              <a:ext uri="{FF2B5EF4-FFF2-40B4-BE49-F238E27FC236}">
+                <a16:creationId xmlns:a16="http://schemas.microsoft.com/office/drawing/2014/main" id="{0CCFA355-078B-FB4E-2912-C0CF5C2BBF3F}"/>
+              </a:ext>
+            </a:extLst>
+          </p:cNvPr>
+          <p:cNvSpPr>
+            <a:spLocks noGrp="1"/>
+          </p:cNvSpPr>
+          <p:nvPr>
+            <p:ph type="title"/>
+          </p:nvPr>
+        </p:nvSpPr>
+        <p:spPr>
+          <a:xfrm>
+            <a:off x="334963" y="620690"/>
+            <a:ext cx="7018337" cy="360041"/>
+          </a:xfrm>
+        </p:spPr>
+        <p:txBody>
+          <a:bodyPr/>
+          <a:lstStyle/>
+          <a:p>
+            <a:r>
+              <a:rPr lang="en-US" dirty="0"/>
+              <a:t>GUI Displays Flowchart</a:t>
+            </a:r>
+          </a:p>
+        </p:txBody>
+      </p:sp>
+      <p:sp>
+        <p:nvSpPr>
+          <p:cNvPr id="4" name="Date Placeholder 3">
+            <a:extLst>
+              <a:ext uri="{FF2B5EF4-FFF2-40B4-BE49-F238E27FC236}">
+                <a16:creationId xmlns:a16="http://schemas.microsoft.com/office/drawing/2014/main" id="{35738F26-6031-7239-1A09-1427676CA467}"/>
+              </a:ext>
+            </a:extLst>
+          </p:cNvPr>
+          <p:cNvSpPr>
+            <a:spLocks noGrp="1"/>
+          </p:cNvSpPr>
+          <p:nvPr>
+            <p:ph type="dt" sz="half" idx="10"/>
+          </p:nvPr>
+        </p:nvSpPr>
+        <p:spPr/>
+        <p:txBody>
+          <a:bodyPr/>
+          <a:lstStyle/>
+          <a:p>
+            <a:r>
+              <a:rPr lang="en-US"/>
+              <a:t>L5X Automation Build Tool</a:t>
+            </a:r>
+            <a:endParaRPr lang="en-US" dirty="0"/>
+          </a:p>
+        </p:txBody>
+      </p:sp>
+      <p:sp>
+        <p:nvSpPr>
+          <p:cNvPr id="7" name="Slide Number Placeholder 6">
+            <a:extLst>
+              <a:ext uri="{FF2B5EF4-FFF2-40B4-BE49-F238E27FC236}">
+                <a16:creationId xmlns:a16="http://schemas.microsoft.com/office/drawing/2014/main" id="{65147936-E941-129B-1218-2E423FBE414C}"/>
+              </a:ext>
+            </a:extLst>
+          </p:cNvPr>
+          <p:cNvSpPr>
+            <a:spLocks noGrp="1"/>
+          </p:cNvSpPr>
+          <p:nvPr>
+            <p:ph type="sldNum" sz="quarter" idx="12"/>
+          </p:nvPr>
+        </p:nvSpPr>
+        <p:spPr/>
+        <p:txBody>
+          <a:bodyPr/>
+          <a:lstStyle/>
+          <a:p>
+            <a:r>
+              <a:rPr lang="en-US"/>
+              <a:t>Slide </a:t>
+            </a:r>
+            <a:fld id="{C6F8E2D1-BFA0-484A-B7F1-E348F2594759}" type="slidenum">
+              <a:rPr lang="en-US" smtClean="0"/>
+              <a:t>8</a:t>
+            </a:fld>
+            <a:endParaRPr lang="en-US" dirty="0"/>
+          </a:p>
+        </p:txBody>
+      </p:sp>
+      <p:sp>
+        <p:nvSpPr>
+          <p:cNvPr id="8" name="Footer Placeholder 7">
+            <a:extLst>
+              <a:ext uri="{FF2B5EF4-FFF2-40B4-BE49-F238E27FC236}">
+                <a16:creationId xmlns:a16="http://schemas.microsoft.com/office/drawing/2014/main" id="{64C07567-307C-AFF3-49AC-7E0858B2FFE0}"/>
+              </a:ext>
+            </a:extLst>
+          </p:cNvPr>
+          <p:cNvSpPr>
+            <a:spLocks noGrp="1"/>
+          </p:cNvSpPr>
+          <p:nvPr>
+            <p:ph type="ftr" sz="quarter" idx="11"/>
+          </p:nvPr>
+        </p:nvSpPr>
+        <p:spPr/>
+        <p:txBody>
+          <a:bodyPr/>
+          <a:lstStyle/>
+          <a:p>
+            <a:r>
+              <a:rPr lang="en-US"/>
+              <a:t>Corbin Ferguson</a:t>
+            </a:r>
+            <a:endParaRPr lang="en-US" dirty="0"/>
+          </a:p>
+        </p:txBody>
+      </p:sp>
       <p:pic>
         <p:nvPicPr>
-          <p:cNvPr id="8366" name="Picture 8365">
+          <p:cNvPr id="10242" name="!ActionSelect">
             <a:extLst>
               <a:ext uri="{FF2B5EF4-FFF2-40B4-BE49-F238E27FC236}">
-                <a16:creationId xmlns:a16="http://schemas.microsoft.com/office/drawing/2014/main" id="{60AE9E24-9AB4-5014-B6BD-6F056F5807BA}"/>
+                <a16:creationId xmlns:a16="http://schemas.microsoft.com/office/drawing/2014/main" id="{F222EBA9-47DB-A494-0A25-7CD0A39D0D61}"/>
+              </a:ext>
+            </a:extLst>
+          </p:cNvPr>
+          <p:cNvPicPr>
+            <a:picLocks noChangeAspect="1" noChangeArrowheads="1"/>
+          </p:cNvPicPr>
+          <p:nvPr/>
+        </p:nvPicPr>
+        <p:blipFill>
+          <a:blip r:embed="rId2">
+            <a:extLst>
+              <a:ext uri="{28A0092B-C50C-407E-A947-70E740481C1C}">
+                <a14:useLocalDpi xmlns:a14="http://schemas.microsoft.com/office/drawing/2010/main" val="0"/>
+              </a:ext>
+            </a:extLst>
+          </a:blip>
+          <a:srcRect/>
+          <a:stretch>
+            <a:fillRect/>
+          </a:stretch>
+        </p:blipFill>
+        <p:spPr bwMode="auto">
+          <a:xfrm>
+            <a:off x="1680314" y="444588"/>
+            <a:ext cx="8328874" cy="5792722"/>
+          </a:xfrm>
+          <a:prstGeom prst="rect">
+            <a:avLst/>
+          </a:prstGeom>
+          <a:noFill/>
+          <a:extLst>
+            <a:ext uri="{909E8E84-426E-40DD-AFC4-6F175D3DCCD1}">
+              <a14:hiddenFill xmlns:a14="http://schemas.microsoft.com/office/drawing/2010/main">
+                <a:solidFill>
+                  <a:srgbClr val="FFFFFF"/>
+                </a:solidFill>
+              </a14:hiddenFill>
+            </a:ext>
+          </a:extLst>
+        </p:spPr>
+      </p:pic>
+      <p:pic>
+        <p:nvPicPr>
+          <p:cNvPr id="5" name="ActionSelect">
+            <a:extLst>
+              <a:ext uri="{FF2B5EF4-FFF2-40B4-BE49-F238E27FC236}">
+                <a16:creationId xmlns:a16="http://schemas.microsoft.com/office/drawing/2014/main" id="{771B8AC6-311F-3E75-33C2-615158918A8C}"/>
               </a:ext>
             </a:extLst>
           </p:cNvPr>
@@ -23618,15 +26182,15 @@
           <p:nvPr/>
         </p:nvPicPr>
         <p:blipFill>
-          <a:blip r:embed="rId2"/>
+          <a:blip r:embed="rId3"/>
           <a:stretch>
             <a:fillRect/>
           </a:stretch>
         </p:blipFill>
         <p:spPr>
           <a:xfrm>
-            <a:off x="2181925" y="1160462"/>
-            <a:ext cx="7828149" cy="5113337"/>
+            <a:off x="2417888" y="1114340"/>
+            <a:ext cx="6853725" cy="4316230"/>
           </a:xfrm>
           <a:prstGeom prst="rect">
             <a:avLst/>
@@ -23634,193 +26198,263 @@
           <a:noFill/>
         </p:spPr>
       </p:pic>
-      <p:sp>
-        <p:nvSpPr>
-          <p:cNvPr id="8" name="Footer Placeholder 7">
+      <p:pic>
+        <p:nvPicPr>
+          <p:cNvPr id="10" name="NewFile">
             <a:extLst>
               <a:ext uri="{FF2B5EF4-FFF2-40B4-BE49-F238E27FC236}">
-                <a16:creationId xmlns:a16="http://schemas.microsoft.com/office/drawing/2014/main" id="{4C7D5AC9-EA29-86A4-7EF8-4DF941130DC8}"/>
+                <a16:creationId xmlns:a16="http://schemas.microsoft.com/office/drawing/2014/main" id="{A8BD3308-9470-9AF2-87BA-D34E2A93E67A}"/>
               </a:ext>
             </a:extLst>
           </p:cNvPr>
-          <p:cNvSpPr>
-            <a:spLocks noGrp="1"/>
-          </p:cNvSpPr>
-          <p:nvPr>
-            <p:ph type="ftr" sz="quarter" idx="19"/>
-          </p:nvPr>
-        </p:nvSpPr>
+          <p:cNvPicPr>
+            <a:picLocks noChangeAspect="1"/>
+          </p:cNvPicPr>
+          <p:nvPr/>
+        </p:nvPicPr>
+        <p:blipFill>
+          <a:blip r:embed="rId3"/>
+          <a:srcRect l="5131" t="67604" r="73596" b="17547"/>
+          <a:stretch>
+            <a:fillRect/>
+          </a:stretch>
+        </p:blipFill>
         <p:spPr>
           <a:xfrm>
-            <a:off x="4086351" y="6469380"/>
-            <a:ext cx="1130300" cy="180000"/>
+            <a:off x="2770368" y="4038600"/>
+            <a:ext cx="1451588" cy="638175"/>
           </a:xfrm>
+          <a:prstGeom prst="rect">
+            <a:avLst/>
+          </a:prstGeom>
+          <a:noFill/>
         </p:spPr>
-        <p:txBody>
-          <a:bodyPr wrap="none" anchor="ctr">
-            <a:normAutofit/>
-          </a:bodyPr>
-          <a:lstStyle/>
-          <a:p>
-            <a:pPr>
-              <a:lnSpc>
-                <a:spcPct val="90000"/>
-              </a:lnSpc>
-              <a:spcAft>
-                <a:spcPts val="600"/>
-              </a:spcAft>
-            </a:pPr>
-            <a:r>
-              <a:rPr lang="en-US"/>
-              <a:t>Corbin Ferguson</a:t>
-            </a:r>
-          </a:p>
-        </p:txBody>
-      </p:sp>
-      <p:sp>
-        <p:nvSpPr>
-          <p:cNvPr id="7" name="Slide Number Placeholder 6">
+      </p:pic>
+      <p:sp>
+        <p:nvSpPr>
+          <p:cNvPr id="6" name="Rectangle: Rounded Corners 5">
             <a:extLst>
               <a:ext uri="{FF2B5EF4-FFF2-40B4-BE49-F238E27FC236}">
-                <a16:creationId xmlns:a16="http://schemas.microsoft.com/office/drawing/2014/main" id="{3583879C-95E5-7299-C98A-2B7D0B63F807}"/>
+                <a16:creationId xmlns:a16="http://schemas.microsoft.com/office/drawing/2014/main" id="{F97ADB1C-4CC1-050A-F7E0-C59FABA26D8C}"/>
               </a:ext>
             </a:extLst>
           </p:cNvPr>
-          <p:cNvSpPr>
-            <a:spLocks noGrp="1"/>
-          </p:cNvSpPr>
-          <p:nvPr>
-            <p:ph type="sldNum" sz="quarter" idx="20"/>
-          </p:nvPr>
+          <p:cNvSpPr/>
+          <p:nvPr/>
         </p:nvSpPr>
         <p:spPr>
           <a:xfrm>
-            <a:off x="1633051" y="6469380"/>
-            <a:ext cx="571500" cy="180000"/>
+            <a:off x="2675735" y="3900488"/>
+            <a:ext cx="1581940" cy="890587"/>
           </a:xfrm>
+          <a:prstGeom prst="roundRect">
+            <a:avLst/>
+          </a:prstGeom>
+          <a:solidFill>
+            <a:schemeClr val="accent6">
+              <a:lumMod val="60000"/>
+              <a:lumOff val="40000"/>
+              <a:alpha val="60000"/>
+            </a:schemeClr>
+          </a:solidFill>
+          <a:ln w="38100">
+            <a:solidFill>
+              <a:schemeClr val="accent6">
+                <a:lumMod val="60000"/>
+                <a:lumOff val="40000"/>
+              </a:schemeClr>
+            </a:solidFill>
+          </a:ln>
+          <a:effectLst>
+            <a:glow rad="139700">
+              <a:schemeClr val="accent6">
+                <a:satMod val="175000"/>
+                <a:alpha val="40000"/>
+              </a:schemeClr>
+            </a:glow>
+          </a:effectLst>
         </p:spPr>
-        <p:txBody>
-          <a:bodyPr wrap="none" anchor="ctr">
-            <a:normAutofit/>
-          </a:bodyPr>
+        <p:style>
+          <a:lnRef idx="2">
+            <a:schemeClr val="accent1">
+              <a:shade val="50000"/>
+            </a:schemeClr>
+          </a:lnRef>
+          <a:fillRef idx="1">
+            <a:schemeClr val="accent1"/>
+          </a:fillRef>
+          <a:effectRef idx="0">
+            <a:schemeClr val="accent1"/>
+          </a:effectRef>
+          <a:fontRef idx="minor">
+            <a:schemeClr val="lt1"/>
+          </a:fontRef>
+        </p:style>
+        <p:txBody>
+          <a:bodyPr rtlCol="0" anchor="ctr"/>
           <a:lstStyle/>
           <a:p>
-            <a:pPr>
-              <a:lnSpc>
-                <a:spcPct val="90000"/>
-              </a:lnSpc>
-              <a:spcAft>
-                <a:spcPts val="600"/>
-              </a:spcAft>
-            </a:pPr>
-            <a:r>
-              <a:rPr lang="en-US"/>
-              <a:t>Slide </a:t>
-            </a:r>
-            <a:fld id="{C6F8E2D1-BFA0-484A-B7F1-E348F2594759}" type="slidenum">
-              <a:rPr lang="en-US" smtClean="0"/>
-              <a:pPr>
-                <a:lnSpc>
-                  <a:spcPct val="90000"/>
-                </a:lnSpc>
-                <a:spcAft>
-                  <a:spcPts val="600"/>
-                </a:spcAft>
-              </a:pPr>
-              <a:t>8</a:t>
-            </a:fld>
-            <a:endParaRPr lang="en-US"/>
-          </a:p>
-        </p:txBody>
-      </p:sp>
-      <p:sp>
-        <p:nvSpPr>
-          <p:cNvPr id="4" name="Date Placeholder 3">
-            <a:extLst>
-              <a:ext uri="{FF2B5EF4-FFF2-40B4-BE49-F238E27FC236}">
-                <a16:creationId xmlns:a16="http://schemas.microsoft.com/office/drawing/2014/main" id="{6F1C84BC-19BE-D2D3-DB6B-179BB01EE861}"/>
-              </a:ext>
-            </a:extLst>
-          </p:cNvPr>
-          <p:cNvSpPr>
-            <a:spLocks noGrp="1"/>
-          </p:cNvSpPr>
-          <p:nvPr>
-            <p:ph type="dt" sz="half" idx="21"/>
-          </p:nvPr>
-        </p:nvSpPr>
-        <p:spPr>
-          <a:xfrm>
-            <a:off x="334963" y="194736"/>
-            <a:ext cx="9674225" cy="180000"/>
-          </a:xfrm>
-        </p:spPr>
-        <p:txBody>
-          <a:bodyPr wrap="none" anchor="t">
-            <a:normAutofit/>
-          </a:bodyPr>
-          <a:lstStyle/>
-          <a:p>
-            <a:pPr>
-              <a:lnSpc>
-                <a:spcPct val="90000"/>
-              </a:lnSpc>
-              <a:spcAft>
-                <a:spcPts val="600"/>
-              </a:spcAft>
-            </a:pPr>
-            <a:r>
-              <a:rPr lang="en-US"/>
-              <a:t>L5X Automation Build Tool</a:t>
-            </a:r>
-          </a:p>
-        </p:txBody>
-      </p:sp>
-      <p:sp>
-        <p:nvSpPr>
-          <p:cNvPr id="2" name="Title 1">
-            <a:extLst>
-              <a:ext uri="{FF2B5EF4-FFF2-40B4-BE49-F238E27FC236}">
-                <a16:creationId xmlns:a16="http://schemas.microsoft.com/office/drawing/2014/main" id="{07BCF97A-6A5E-DA70-0A21-4FF0D5A9B2D1}"/>
-              </a:ext>
-            </a:extLst>
-          </p:cNvPr>
-          <p:cNvSpPr>
-            <a:spLocks noGrp="1"/>
-          </p:cNvSpPr>
-          <p:nvPr>
-            <p:ph type="title"/>
-          </p:nvPr>
-        </p:nvSpPr>
-        <p:spPr>
-          <a:xfrm>
-            <a:off x="334963" y="620690"/>
-            <a:ext cx="11522075" cy="360041"/>
-          </a:xfrm>
-        </p:spPr>
-        <p:txBody>
-          <a:bodyPr wrap="none" anchor="t">
-            <a:normAutofit/>
-          </a:bodyPr>
-          <a:lstStyle/>
-          <a:p>
-            <a:r>
-              <a:rPr lang="en-US" dirty="0"/>
-              <a:t>Class Diagram</a:t>
-            </a:r>
+            <a:pPr algn="ctr"/>
+            <a:endParaRPr lang="en-US" sz="2000" dirty="0" err="1">
+              <a:solidFill>
+                <a:srgbClr val="FFFFFF"/>
+              </a:solidFill>
+              <a:effectLst>
+                <a:glow rad="63500">
+                  <a:srgbClr val="FF0000">
+                    <a:alpha val="40000"/>
+                  </a:srgbClr>
+                </a:glow>
+              </a:effectLst>
+              <a:latin typeface="E+H Sans" panose="020B0404050202020204" pitchFamily="34" charset="0"/>
+            </a:endParaRPr>
           </a:p>
         </p:txBody>
       </p:sp>
     </p:spTree>
     <p:extLst>
       <p:ext uri="{BB962C8B-B14F-4D97-AF65-F5344CB8AC3E}">
-        <p14:creationId xmlns:p14="http://schemas.microsoft.com/office/powerpoint/2010/main" val="2077614573"/>
+        <p14:creationId xmlns:p14="http://schemas.microsoft.com/office/powerpoint/2010/main" val="462985986"/>
       </p:ext>
     </p:extLst>
   </p:cSld>
   <p:clrMapOvr>
     <a:masterClrMapping/>
   </p:clrMapOvr>
+  <mc:AlternateContent xmlns:mc="http://schemas.openxmlformats.org/markup-compatibility/2006">
+    <mc:Choice xmlns:p159="http://schemas.microsoft.com/office/powerpoint/2015/09/main" Requires="p159">
+      <p:transition>
+        <p159:morph option="byObject"/>
+      </p:transition>
+    </mc:Choice>
+    <mc:Fallback>
+      <p:transition>
+        <p:fade/>
+      </p:transition>
+    </mc:Fallback>
+  </mc:AlternateContent>
+  <p:timing>
+    <p:tnLst>
+      <p:par>
+        <p:cTn id="1" dur="indefinite" restart="never" nodeType="tmRoot">
+          <p:childTnLst>
+            <p:seq concurrent="1" nextAc="seek">
+              <p:cTn id="2" dur="indefinite" nodeType="mainSeq">
+                <p:childTnLst>
+                  <p:par>
+                    <p:cTn id="3" fill="hold">
+                      <p:stCondLst>
+                        <p:cond delay="indefinite"/>
+                      </p:stCondLst>
+                      <p:childTnLst>
+                        <p:par>
+                          <p:cTn id="4" fill="hold">
+                            <p:stCondLst>
+                              <p:cond delay="0"/>
+                            </p:stCondLst>
+                            <p:childTnLst>
+                              <p:par>
+                                <p:cTn id="5" presetID="10" presetClass="entr" presetSubtype="0" fill="hold" grpId="0" nodeType="clickEffect">
+                                  <p:stCondLst>
+                                    <p:cond delay="0"/>
+                                  </p:stCondLst>
+                                  <p:childTnLst>
+                                    <p:set>
+                                      <p:cBhvr>
+                                        <p:cTn id="6" dur="1" fill="hold">
+                                          <p:stCondLst>
+                                            <p:cond delay="0"/>
+                                          </p:stCondLst>
+                                        </p:cTn>
+                                        <p:tgtEl>
+                                          <p:spTgt spid="6"/>
+                                        </p:tgtEl>
+                                        <p:attrNameLst>
+                                          <p:attrName>style.visibility</p:attrName>
+                                        </p:attrNameLst>
+                                      </p:cBhvr>
+                                      <p:to>
+                                        <p:strVal val="visible"/>
+                                      </p:to>
+                                    </p:set>
+                                    <p:animEffect transition="in" filter="fade">
+                                      <p:cBhvr>
+                                        <p:cTn id="7" dur="250"/>
+                                        <p:tgtEl>
+                                          <p:spTgt spid="6"/>
+                                        </p:tgtEl>
+                                      </p:cBhvr>
+                                    </p:animEffect>
+                                  </p:childTnLst>
+                                </p:cTn>
+                              </p:par>
+                            </p:childTnLst>
+                          </p:cTn>
+                        </p:par>
+                        <p:par>
+                          <p:cTn id="8" fill="hold">
+                            <p:stCondLst>
+                              <p:cond delay="250"/>
+                            </p:stCondLst>
+                            <p:childTnLst>
+                              <p:par>
+                                <p:cTn id="9" presetID="1" presetClass="exit" presetSubtype="0" fill="hold" nodeType="afterEffect">
+                                  <p:stCondLst>
+                                    <p:cond delay="0"/>
+                                  </p:stCondLst>
+                                  <p:childTnLst>
+                                    <p:set>
+                                      <p:cBhvr>
+                                        <p:cTn id="10" dur="1" fill="hold">
+                                          <p:stCondLst>
+                                            <p:cond delay="0"/>
+                                          </p:stCondLst>
+                                        </p:cTn>
+                                        <p:tgtEl>
+                                          <p:spTgt spid="10242"/>
+                                        </p:tgtEl>
+                                        <p:attrNameLst>
+                                          <p:attrName>style.visibility</p:attrName>
+                                        </p:attrNameLst>
+                                      </p:cBhvr>
+                                      <p:to>
+                                        <p:strVal val="hidden"/>
+                                      </p:to>
+                                    </p:set>
+                                  </p:childTnLst>
+                                </p:cTn>
+                              </p:par>
+                            </p:childTnLst>
+                          </p:cTn>
+                        </p:par>
+                      </p:childTnLst>
+                    </p:cTn>
+                  </p:par>
+                </p:childTnLst>
+              </p:cTn>
+              <p:prevCondLst>
+                <p:cond evt="onPrev" delay="0">
+                  <p:tgtEl>
+                    <p:sldTgt/>
+                  </p:tgtEl>
+                </p:cond>
+              </p:prevCondLst>
+              <p:nextCondLst>
+                <p:cond evt="onNext" delay="0">
+                  <p:tgtEl>
+                    <p:sldTgt/>
+                  </p:tgtEl>
+                </p:cond>
+              </p:nextCondLst>
+            </p:seq>
+          </p:childTnLst>
+        </p:cTn>
+      </p:par>
+    </p:tnLst>
+    <p:bldLst>
+      <p:bldP spid="6" grpId="0" animBg="1"/>
+    </p:bldLst>
+  </p:timing>
 </p:sld>
 </file>
 
@@ -23832,7 +26466,7 @@
         <p:cNvPr id="1" name="">
           <a:extLst>
             <a:ext uri="{FF2B5EF4-FFF2-40B4-BE49-F238E27FC236}">
-              <a16:creationId xmlns:a16="http://schemas.microsoft.com/office/drawing/2014/main" id="{B031D0FB-813C-A1A9-95BF-F0A18A2C1086}"/>
+              <a16:creationId xmlns:a16="http://schemas.microsoft.com/office/drawing/2014/main" id="{7E4A68EB-BBA3-381D-430F-E3F9DF8BD3FB}"/>
             </a:ext>
           </a:extLst>
         </p:cNvPr>
@@ -23847,12 +26481,136 @@
           <a:chExt cx="0" cy="0"/>
         </a:xfrm>
       </p:grpSpPr>
+      <p:sp>
+        <p:nvSpPr>
+          <p:cNvPr id="2" name="Title 1">
+            <a:extLst>
+              <a:ext uri="{FF2B5EF4-FFF2-40B4-BE49-F238E27FC236}">
+                <a16:creationId xmlns:a16="http://schemas.microsoft.com/office/drawing/2014/main" id="{A767FD57-0C1F-53FC-E4AC-6E4AC4F8F9F9}"/>
+              </a:ext>
+            </a:extLst>
+          </p:cNvPr>
+          <p:cNvSpPr>
+            <a:spLocks noGrp="1"/>
+          </p:cNvSpPr>
+          <p:nvPr>
+            <p:ph type="title"/>
+          </p:nvPr>
+        </p:nvSpPr>
+        <p:spPr>
+          <a:xfrm>
+            <a:off x="334963" y="620690"/>
+            <a:ext cx="7018337" cy="360041"/>
+          </a:xfrm>
+        </p:spPr>
+        <p:txBody>
+          <a:bodyPr/>
+          <a:lstStyle/>
+          <a:p>
+            <a:r>
+              <a:rPr lang="en-US" dirty="0"/>
+              <a:t>New File Pathing</a:t>
+            </a:r>
+          </a:p>
+        </p:txBody>
+      </p:sp>
+      <p:sp>
+        <p:nvSpPr>
+          <p:cNvPr id="4" name="Date Placeholder 3">
+            <a:extLst>
+              <a:ext uri="{FF2B5EF4-FFF2-40B4-BE49-F238E27FC236}">
+                <a16:creationId xmlns:a16="http://schemas.microsoft.com/office/drawing/2014/main" id="{A7555496-A425-4EB0-4B85-1B98E6B462DC}"/>
+              </a:ext>
+            </a:extLst>
+          </p:cNvPr>
+          <p:cNvSpPr>
+            <a:spLocks noGrp="1"/>
+          </p:cNvSpPr>
+          <p:nvPr>
+            <p:ph type="dt" sz="half" idx="10"/>
+          </p:nvPr>
+        </p:nvSpPr>
+        <p:spPr/>
+        <p:txBody>
+          <a:bodyPr/>
+          <a:lstStyle/>
+          <a:p>
+            <a:r>
+              <a:rPr lang="en-US"/>
+              <a:t>L5X Automation Build Tool</a:t>
+            </a:r>
+            <a:endParaRPr lang="en-US" dirty="0"/>
+          </a:p>
+        </p:txBody>
+      </p:sp>
+      <p:sp>
+        <p:nvSpPr>
+          <p:cNvPr id="7" name="Slide Number Placeholder 6">
+            <a:extLst>
+              <a:ext uri="{FF2B5EF4-FFF2-40B4-BE49-F238E27FC236}">
+                <a16:creationId xmlns:a16="http://schemas.microsoft.com/office/drawing/2014/main" id="{8C70071A-23EE-C0B0-7BC3-656D969CC96D}"/>
+              </a:ext>
+            </a:extLst>
+          </p:cNvPr>
+          <p:cNvSpPr>
+            <a:spLocks noGrp="1"/>
+          </p:cNvSpPr>
+          <p:nvPr>
+            <p:ph type="sldNum" sz="quarter" idx="12"/>
+          </p:nvPr>
+        </p:nvSpPr>
+        <p:spPr/>
+        <p:txBody>
+          <a:bodyPr/>
+          <a:lstStyle/>
+          <a:p>
+            <a:r>
+              <a:rPr lang="en-US"/>
+              <a:t>Slide </a:t>
+            </a:r>
+            <a:fld id="{C6F8E2D1-BFA0-484A-B7F1-E348F2594759}" type="slidenum">
+              <a:rPr lang="en-US" smtClean="0"/>
+              <a:t>9</a:t>
+            </a:fld>
+            <a:endParaRPr lang="en-US" dirty="0"/>
+          </a:p>
+        </p:txBody>
+      </p:sp>
+      <p:sp>
+        <p:nvSpPr>
+          <p:cNvPr id="8" name="Footer Placeholder 7">
+            <a:extLst>
+              <a:ext uri="{FF2B5EF4-FFF2-40B4-BE49-F238E27FC236}">
+                <a16:creationId xmlns:a16="http://schemas.microsoft.com/office/drawing/2014/main" id="{560F8ABB-0706-BB35-FFAC-F2F7471C56AD}"/>
+              </a:ext>
+            </a:extLst>
+          </p:cNvPr>
+          <p:cNvSpPr>
+            <a:spLocks noGrp="1"/>
+          </p:cNvSpPr>
+          <p:nvPr>
+            <p:ph type="ftr" sz="quarter" idx="11"/>
+          </p:nvPr>
+        </p:nvSpPr>
+        <p:spPr/>
+        <p:txBody>
+          <a:bodyPr/>
+          <a:lstStyle/>
+          <a:p>
+            <a:r>
+              <a:rPr lang="en-US"/>
+              <a:t>Corbin Ferguson</a:t>
+            </a:r>
+            <a:endParaRPr lang="en-US" dirty="0"/>
+          </a:p>
+        </p:txBody>
+      </p:sp>
       <p:pic>
         <p:nvPicPr>
-          <p:cNvPr id="9" name="Picture 8">
+          <p:cNvPr id="6" name="!NewFile">
             <a:extLst>
               <a:ext uri="{FF2B5EF4-FFF2-40B4-BE49-F238E27FC236}">
-                <a16:creationId xmlns:a16="http://schemas.microsoft.com/office/drawing/2014/main" id="{A889D74E-A641-8FCA-9F55-93231CDB546D}"/>
+                <a16:creationId xmlns:a16="http://schemas.microsoft.com/office/drawing/2014/main" id="{BF17B26E-CEBE-31E2-A928-A78B0BE175DA}"/>
               </a:ext>
             </a:extLst>
           </p:cNvPr>
@@ -23863,14 +26621,15 @@
         </p:nvPicPr>
         <p:blipFill>
           <a:blip r:embed="rId2"/>
+          <a:srcRect l="5131" t="67604" r="73596" b="17547"/>
           <a:stretch>
             <a:fillRect/>
           </a:stretch>
         </p:blipFill>
         <p:spPr>
           <a:xfrm>
-            <a:off x="1176290" y="1160462"/>
-            <a:ext cx="9839419" cy="5113337"/>
+            <a:off x="1545843" y="1119567"/>
+            <a:ext cx="9552756" cy="4199766"/>
           </a:xfrm>
           <a:prstGeom prst="rect">
             <a:avLst/>
@@ -23878,193 +26637,253 @@
           <a:noFill/>
         </p:spPr>
       </p:pic>
-      <p:sp>
-        <p:nvSpPr>
-          <p:cNvPr id="8" name="Footer Placeholder 7">
+      <p:pic>
+        <p:nvPicPr>
+          <p:cNvPr id="11268" name="NewFile">
             <a:extLst>
               <a:ext uri="{FF2B5EF4-FFF2-40B4-BE49-F238E27FC236}">
-                <a16:creationId xmlns:a16="http://schemas.microsoft.com/office/drawing/2014/main" id="{71C973FB-1860-D33D-FFB0-E373255B1325}"/>
+                <a16:creationId xmlns:a16="http://schemas.microsoft.com/office/drawing/2014/main" id="{14AE5F5A-6C88-0F58-A592-0FB668BF99DA}"/>
               </a:ext>
             </a:extLst>
           </p:cNvPr>
-          <p:cNvSpPr>
-            <a:spLocks noGrp="1"/>
-          </p:cNvSpPr>
-          <p:nvPr>
-            <p:ph type="ftr" sz="quarter" idx="19"/>
-          </p:nvPr>
+          <p:cNvPicPr>
+            <a:picLocks noChangeAspect="1" noChangeArrowheads="1"/>
+          </p:cNvPicPr>
+          <p:nvPr/>
+        </p:nvPicPr>
+        <p:blipFill>
+          <a:blip r:embed="rId3">
+            <a:extLst>
+              <a:ext uri="{28A0092B-C50C-407E-A947-70E740481C1C}">
+                <a14:useLocalDpi xmlns:a14="http://schemas.microsoft.com/office/drawing/2010/main" val="0"/>
+              </a:ext>
+            </a:extLst>
+          </a:blip>
+          <a:srcRect/>
+          <a:stretch>
+            <a:fillRect/>
+          </a:stretch>
+        </p:blipFill>
+        <p:spPr bwMode="auto">
+          <a:xfrm>
+            <a:off x="365435" y="980731"/>
+            <a:ext cx="11428631" cy="4882654"/>
+          </a:xfrm>
+          <a:prstGeom prst="rect">
+            <a:avLst/>
+          </a:prstGeom>
+          <a:solidFill>
+            <a:schemeClr val="bg1"/>
+          </a:solidFill>
+        </p:spPr>
+      </p:pic>
+      <p:sp>
+        <p:nvSpPr>
+          <p:cNvPr id="11" name="Rectangle: Rounded Corners 10">
+            <a:extLst>
+              <a:ext uri="{FF2B5EF4-FFF2-40B4-BE49-F238E27FC236}">
+                <a16:creationId xmlns:a16="http://schemas.microsoft.com/office/drawing/2014/main" id="{BBDD576A-A414-9915-960B-C7192C1A13D8}"/>
+              </a:ext>
+            </a:extLst>
+          </p:cNvPr>
+          <p:cNvSpPr/>
+          <p:nvPr/>
         </p:nvSpPr>
         <p:spPr>
           <a:xfrm>
-            <a:off x="4086351" y="6469380"/>
-            <a:ext cx="1130300" cy="180000"/>
+            <a:off x="2514600" y="2705100"/>
+            <a:ext cx="8839200" cy="901700"/>
           </a:xfrm>
+          <a:prstGeom prst="roundRect">
+            <a:avLst/>
+          </a:prstGeom>
+          <a:solidFill>
+            <a:srgbClr val="007CAA">
+              <a:alpha val="20000"/>
+            </a:srgbClr>
+          </a:solidFill>
+          <a:ln>
+            <a:solidFill>
+              <a:srgbClr val="007CAA"/>
+            </a:solidFill>
+          </a:ln>
+          <a:effectLst>
+            <a:glow rad="63500">
+              <a:schemeClr val="accent4">
+                <a:satMod val="175000"/>
+                <a:alpha val="40000"/>
+              </a:schemeClr>
+            </a:glow>
+          </a:effectLst>
         </p:spPr>
-        <p:txBody>
-          <a:bodyPr wrap="none" anchor="ctr">
-            <a:normAutofit/>
-          </a:bodyPr>
+        <p:style>
+          <a:lnRef idx="2">
+            <a:schemeClr val="accent1">
+              <a:shade val="50000"/>
+            </a:schemeClr>
+          </a:lnRef>
+          <a:fillRef idx="1">
+            <a:schemeClr val="accent1"/>
+          </a:fillRef>
+          <a:effectRef idx="0">
+            <a:schemeClr val="accent1"/>
+          </a:effectRef>
+          <a:fontRef idx="minor">
+            <a:schemeClr val="lt1"/>
+          </a:fontRef>
+        </p:style>
+        <p:txBody>
+          <a:bodyPr rtlCol="0" anchor="ctr"/>
           <a:lstStyle/>
           <a:p>
-            <a:pPr>
-              <a:lnSpc>
-                <a:spcPct val="90000"/>
-              </a:lnSpc>
-              <a:spcAft>
-                <a:spcPts val="600"/>
-              </a:spcAft>
-            </a:pPr>
-            <a:r>
-              <a:rPr lang="en-US"/>
-              <a:t>Corbin Ferguson</a:t>
-            </a:r>
-          </a:p>
-        </p:txBody>
-      </p:sp>
-      <p:sp>
-        <p:nvSpPr>
-          <p:cNvPr id="7" name="Slide Number Placeholder 6">
-            <a:extLst>
-              <a:ext uri="{FF2B5EF4-FFF2-40B4-BE49-F238E27FC236}">
-                <a16:creationId xmlns:a16="http://schemas.microsoft.com/office/drawing/2014/main" id="{FF861633-550D-9192-7E16-88623F1FDD40}"/>
-              </a:ext>
-            </a:extLst>
-          </p:cNvPr>
-          <p:cNvSpPr>
-            <a:spLocks noGrp="1"/>
-          </p:cNvSpPr>
-          <p:nvPr>
-            <p:ph type="sldNum" sz="quarter" idx="20"/>
-          </p:nvPr>
-        </p:nvSpPr>
-        <p:spPr>
-          <a:xfrm>
-            <a:off x="1633051" y="6469380"/>
-            <a:ext cx="571500" cy="180000"/>
-          </a:xfrm>
-        </p:spPr>
-        <p:txBody>
-          <a:bodyPr wrap="none" anchor="ctr">
-            <a:normAutofit/>
-          </a:bodyPr>
-          <a:lstStyle/>
-          <a:p>
-            <a:pPr>
-              <a:lnSpc>
-                <a:spcPct val="90000"/>
-              </a:lnSpc>
-              <a:spcAft>
-                <a:spcPts val="600"/>
-              </a:spcAft>
-            </a:pPr>
-            <a:r>
-              <a:rPr lang="en-US"/>
-              <a:t>Slide </a:t>
-            </a:r>
-            <a:fld id="{C6F8E2D1-BFA0-484A-B7F1-E348F2594759}" type="slidenum">
-              <a:rPr lang="en-US" smtClean="0"/>
-              <a:pPr>
-                <a:lnSpc>
-                  <a:spcPct val="90000"/>
-                </a:lnSpc>
-                <a:spcAft>
-                  <a:spcPts val="600"/>
-                </a:spcAft>
-              </a:pPr>
-              <a:t>9</a:t>
-            </a:fld>
-            <a:endParaRPr lang="en-US"/>
-          </a:p>
-        </p:txBody>
-      </p:sp>
-      <p:sp>
-        <p:nvSpPr>
-          <p:cNvPr id="4" name="Date Placeholder 3">
-            <a:extLst>
-              <a:ext uri="{FF2B5EF4-FFF2-40B4-BE49-F238E27FC236}">
-                <a16:creationId xmlns:a16="http://schemas.microsoft.com/office/drawing/2014/main" id="{5D0DCAB8-9A4F-6068-74B2-D5C8356B650C}"/>
-              </a:ext>
-            </a:extLst>
-          </p:cNvPr>
-          <p:cNvSpPr>
-            <a:spLocks noGrp="1"/>
-          </p:cNvSpPr>
-          <p:nvPr>
-            <p:ph type="dt" sz="half" idx="21"/>
-          </p:nvPr>
-        </p:nvSpPr>
-        <p:spPr>
-          <a:xfrm>
-            <a:off x="334963" y="194736"/>
-            <a:ext cx="9674225" cy="180000"/>
-          </a:xfrm>
-        </p:spPr>
-        <p:txBody>
-          <a:bodyPr wrap="none" anchor="t">
-            <a:normAutofit/>
-          </a:bodyPr>
-          <a:lstStyle/>
-          <a:p>
-            <a:pPr>
-              <a:lnSpc>
-                <a:spcPct val="90000"/>
-              </a:lnSpc>
-              <a:spcAft>
-                <a:spcPts val="600"/>
-              </a:spcAft>
-            </a:pPr>
-            <a:r>
-              <a:rPr lang="en-US"/>
-              <a:t>L5X Automation Build Tool</a:t>
-            </a:r>
-          </a:p>
-        </p:txBody>
-      </p:sp>
-      <p:sp>
-        <p:nvSpPr>
-          <p:cNvPr id="2" name="Title 1">
-            <a:extLst>
-              <a:ext uri="{FF2B5EF4-FFF2-40B4-BE49-F238E27FC236}">
-                <a16:creationId xmlns:a16="http://schemas.microsoft.com/office/drawing/2014/main" id="{5EBCB58C-1369-EDD7-5D5E-7C1E1415DB2E}"/>
-              </a:ext>
-            </a:extLst>
-          </p:cNvPr>
-          <p:cNvSpPr>
-            <a:spLocks noGrp="1"/>
-          </p:cNvSpPr>
-          <p:nvPr>
-            <p:ph type="title"/>
-          </p:nvPr>
-        </p:nvSpPr>
-        <p:spPr>
-          <a:xfrm>
-            <a:off x="334963" y="620690"/>
-            <a:ext cx="11522075" cy="360041"/>
-          </a:xfrm>
-        </p:spPr>
-        <p:txBody>
-          <a:bodyPr wrap="none" anchor="t">
-            <a:normAutofit/>
-          </a:bodyPr>
-          <a:lstStyle/>
-          <a:p>
-            <a:r>
-              <a:rPr lang="en-US" dirty="0"/>
-              <a:t>Class Diagram Cont.</a:t>
-            </a:r>
+            <a:pPr algn="ctr"/>
+            <a:endParaRPr lang="en-US" sz="2000" dirty="0" err="1">
+              <a:solidFill>
+                <a:srgbClr val="FFFFFF"/>
+              </a:solidFill>
+              <a:latin typeface="E+H Sans" panose="020B0404050202020204" pitchFamily="34" charset="0"/>
+            </a:endParaRPr>
           </a:p>
         </p:txBody>
       </p:sp>
     </p:spTree>
     <p:extLst>
       <p:ext uri="{BB962C8B-B14F-4D97-AF65-F5344CB8AC3E}">
-        <p14:creationId xmlns:p14="http://schemas.microsoft.com/office/powerpoint/2010/main" val="1692918807"/>
+        <p14:creationId xmlns:p14="http://schemas.microsoft.com/office/powerpoint/2010/main" val="1670292182"/>
       </p:ext>
     </p:extLst>
   </p:cSld>
   <p:clrMapOvr>
     <a:masterClrMapping/>
   </p:clrMapOvr>
+  <mc:AlternateContent xmlns:mc="http://schemas.openxmlformats.org/markup-compatibility/2006">
+    <mc:Choice xmlns:p159="http://schemas.microsoft.com/office/powerpoint/2015/09/main" Requires="p159">
+      <p:transition xmlns:p14="http://schemas.microsoft.com/office/powerpoint/2010/main" spd="slow" p14:dur="2000">
+        <p159:morph option="byObject"/>
+      </p:transition>
+    </mc:Choice>
+    <mc:Fallback>
+      <p:transition spd="slow">
+        <p:fade/>
+      </p:transition>
+    </mc:Fallback>
+  </mc:AlternateContent>
+  <p:timing>
+    <p:tnLst>
+      <p:par>
+        <p:cTn id="1" dur="indefinite" restart="never" nodeType="tmRoot">
+          <p:childTnLst>
+            <p:seq concurrent="1" nextAc="seek">
+              <p:cTn id="2" dur="indefinite" nodeType="mainSeq">
+                <p:childTnLst>
+                  <p:par>
+                    <p:cTn id="3" fill="hold">
+                      <p:stCondLst>
+                        <p:cond delay="indefinite"/>
+                        <p:cond evt="onBegin" delay="0">
+                          <p:tn val="2"/>
+                        </p:cond>
+                      </p:stCondLst>
+                      <p:childTnLst>
+                        <p:par>
+                          <p:cTn id="4" fill="hold">
+                            <p:stCondLst>
+                              <p:cond delay="0"/>
+                            </p:stCondLst>
+                            <p:childTnLst>
+                              <p:par>
+                                <p:cTn id="5" presetID="10" presetClass="entr" presetSubtype="0" fill="hold" grpId="0" nodeType="afterEffect">
+                                  <p:stCondLst>
+                                    <p:cond delay="100"/>
+                                  </p:stCondLst>
+                                  <p:childTnLst>
+                                    <p:set>
+                                      <p:cBhvr>
+                                        <p:cTn id="6" dur="1" fill="hold">
+                                          <p:stCondLst>
+                                            <p:cond delay="0"/>
+                                          </p:stCondLst>
+                                        </p:cTn>
+                                        <p:tgtEl>
+                                          <p:spTgt spid="11"/>
+                                        </p:tgtEl>
+                                        <p:attrNameLst>
+                                          <p:attrName>style.visibility</p:attrName>
+                                        </p:attrNameLst>
+                                      </p:cBhvr>
+                                      <p:to>
+                                        <p:strVal val="visible"/>
+                                      </p:to>
+                                    </p:set>
+                                    <p:animEffect transition="in" filter="fade">
+                                      <p:cBhvr>
+                                        <p:cTn id="7" dur="500"/>
+                                        <p:tgtEl>
+                                          <p:spTgt spid="11"/>
+                                        </p:tgtEl>
+                                      </p:cBhvr>
+                                    </p:animEffect>
+                                  </p:childTnLst>
+                                </p:cTn>
+                              </p:par>
+                              <p:par>
+                                <p:cTn id="8" presetID="1" presetClass="exit" presetSubtype="0" fill="hold" nodeType="withEffect">
+                                  <p:stCondLst>
+                                    <p:cond delay="0"/>
+                                  </p:stCondLst>
+                                  <p:childTnLst>
+                                    <p:set>
+                                      <p:cBhvr>
+                                        <p:cTn id="9" dur="1" fill="hold">
+                                          <p:stCondLst>
+                                            <p:cond delay="0"/>
+                                          </p:stCondLst>
+                                        </p:cTn>
+                                        <p:tgtEl>
+                                          <p:spTgt spid="6"/>
+                                        </p:tgtEl>
+                                        <p:attrNameLst>
+                                          <p:attrName>style.visibility</p:attrName>
+                                        </p:attrNameLst>
+                                      </p:cBhvr>
+                                      <p:to>
+                                        <p:strVal val="hidden"/>
+                                      </p:to>
+                                    </p:set>
+                                  </p:childTnLst>
+                                </p:cTn>
+                              </p:par>
+                            </p:childTnLst>
+                          </p:cTn>
+                        </p:par>
+                      </p:childTnLst>
+                    </p:cTn>
+                  </p:par>
+                </p:childTnLst>
+              </p:cTn>
+              <p:prevCondLst>
+                <p:cond evt="onPrev" delay="0">
+                  <p:tgtEl>
+                    <p:sldTgt/>
+                  </p:tgtEl>
+                </p:cond>
+              </p:prevCondLst>
+              <p:nextCondLst>
+                <p:cond evt="onNext" delay="0">
+                  <p:tgtEl>
+                    <p:sldTgt/>
+                  </p:tgtEl>
+                </p:cond>
+              </p:nextCondLst>
+            </p:seq>
+          </p:childTnLst>
+        </p:cTn>
+      </p:par>
+    </p:tnLst>
+    <p:bldLst>
+      <p:bldP spid="11" grpId="0" animBg="1"/>
+    </p:bldLst>
+  </p:timing>
 </p:sld>
 </file>
 

--- a/Thesis Writing Documents/Project Development.pptx
+++ b/Thesis Writing Documents/Project Development.pptx
@@ -5,41 +5,37 @@
     <p:sldMasterId id="2147483648" r:id="rId5"/>
   </p:sldMasterIdLst>
   <p:notesMasterIdLst>
-    <p:notesMasterId r:id="rId30"/>
+    <p:notesMasterId r:id="rId26"/>
   </p:notesMasterIdLst>
   <p:handoutMasterIdLst>
-    <p:handoutMasterId r:id="rId31"/>
+    <p:handoutMasterId r:id="rId27"/>
   </p:handoutMasterIdLst>
   <p:sldIdLst>
     <p:sldId id="256" r:id="rId6"/>
     <p:sldId id="2146848302" r:id="rId7"/>
     <p:sldId id="257" r:id="rId8"/>
-    <p:sldId id="2146848304" r:id="rId9"/>
-    <p:sldId id="2146848305" r:id="rId10"/>
+    <p:sldId id="2146848305" r:id="rId9"/>
+    <p:sldId id="2146848304" r:id="rId10"/>
     <p:sldId id="2146848306" r:id="rId11"/>
     <p:sldId id="2146848319" r:id="rId12"/>
-    <p:sldId id="2146848322" r:id="rId13"/>
-    <p:sldId id="2146848323" r:id="rId14"/>
-    <p:sldId id="2146848318" r:id="rId15"/>
-    <p:sldId id="2146848324" r:id="rId16"/>
-    <p:sldId id="2146848325" r:id="rId17"/>
-    <p:sldId id="2146848316" r:id="rId18"/>
-    <p:sldId id="2146848317" r:id="rId19"/>
-    <p:sldId id="2146848307" r:id="rId20"/>
-    <p:sldId id="2146848308" r:id="rId21"/>
-    <p:sldId id="2146848309" r:id="rId22"/>
-    <p:sldId id="2146848311" r:id="rId23"/>
-    <p:sldId id="2146848310" r:id="rId24"/>
-    <p:sldId id="2146848300" r:id="rId25"/>
-    <p:sldId id="2146848312" r:id="rId26"/>
-    <p:sldId id="2146848314" r:id="rId27"/>
-    <p:sldId id="2146848313" r:id="rId28"/>
-    <p:sldId id="2146848315" r:id="rId29"/>
+    <p:sldId id="2146848327" r:id="rId13"/>
+    <p:sldId id="2146848322" r:id="rId14"/>
+    <p:sldId id="2146848323" r:id="rId15"/>
+    <p:sldId id="2146848318" r:id="rId16"/>
+    <p:sldId id="2146848324" r:id="rId17"/>
+    <p:sldId id="2146848325" r:id="rId18"/>
+    <p:sldId id="2146848311" r:id="rId19"/>
+    <p:sldId id="2146848310" r:id="rId20"/>
+    <p:sldId id="2146848300" r:id="rId21"/>
+    <p:sldId id="2146848312" r:id="rId22"/>
+    <p:sldId id="2146848314" r:id="rId23"/>
+    <p:sldId id="2146848313" r:id="rId24"/>
+    <p:sldId id="2146848315" r:id="rId25"/>
   </p:sldIdLst>
   <p:sldSz cx="12192000" cy="6858000"/>
   <p:notesSz cx="6800850" cy="9926638"/>
   <p:custDataLst>
-    <p:tags r:id="rId32"/>
+    <p:tags r:id="rId28"/>
   </p:custDataLst>
   <p:defaultTextStyle>
     <a:defPPr>
@@ -218,7 +214,7 @@
 <file path=ppt/revisionInfo.xml><?xml version="1.0" encoding="utf-8"?>
 <p1510:revInfo xmlns:a="http://schemas.openxmlformats.org/drawingml/2006/main" xmlns:r="http://schemas.openxmlformats.org/officeDocument/2006/relationships" xmlns:p1510="http://schemas.microsoft.com/office/powerpoint/2015/10/main">
   <p1510:revLst>
-    <p1510:client id="{F0E03B4B-CC56-43F1-8F18-BCA697229170}" v="436" dt="2026-03-16T21:03:18.013"/>
+    <p1510:client id="{F0E03B4B-CC56-43F1-8F18-BCA697229170}" v="452" dt="2026-03-19T14:02:29.746"/>
   </p1510:revLst>
 </p1510:revInfo>
 </file>
@@ -228,7 +224,7 @@
   <pc:docChgLst>
     <pc:chgData name="Corbin Ferguson" userId="34a864e2-e65e-4cb2-823c-dc28f73f0e40" providerId="ADAL" clId="{8D2D96CF-1319-4CCC-9EA9-073445628049}"/>
     <pc:docChg chg="undo redo custSel addSld delSld modSld sldOrd">
-      <pc:chgData name="Corbin Ferguson" userId="34a864e2-e65e-4cb2-823c-dc28f73f0e40" providerId="ADAL" clId="{8D2D96CF-1319-4CCC-9EA9-073445628049}" dt="2026-03-16T21:03:53.279" v="2075" actId="1036"/>
+      <pc:chgData name="Corbin Ferguson" userId="34a864e2-e65e-4cb2-823c-dc28f73f0e40" providerId="ADAL" clId="{8D2D96CF-1319-4CCC-9EA9-073445628049}" dt="2026-03-19T14:13:12.636" v="2387" actId="2696"/>
       <pc:docMkLst>
         <pc:docMk/>
       </pc:docMkLst>
@@ -248,19 +244,19 @@
         </pc:spChg>
       </pc:sldChg>
       <pc:sldChg chg="addSp delSp modSp mod">
-        <pc:chgData name="Corbin Ferguson" userId="34a864e2-e65e-4cb2-823c-dc28f73f0e40" providerId="ADAL" clId="{8D2D96CF-1319-4CCC-9EA9-073445628049}" dt="2026-03-16T15:01:20.713" v="1025" actId="732"/>
+        <pc:chgData name="Corbin Ferguson" userId="34a864e2-e65e-4cb2-823c-dc28f73f0e40" providerId="ADAL" clId="{8D2D96CF-1319-4CCC-9EA9-073445628049}" dt="2026-03-19T13:47:59.449" v="2101" actId="20577"/>
         <pc:sldMkLst>
           <pc:docMk/>
           <pc:sldMk cId="463964235" sldId="257"/>
         </pc:sldMkLst>
-        <pc:picChg chg="del mod">
-          <ac:chgData name="Corbin Ferguson" userId="34a864e2-e65e-4cb2-823c-dc28f73f0e40" providerId="ADAL" clId="{8D2D96CF-1319-4CCC-9EA9-073445628049}" dt="2026-03-16T15:00:14.797" v="1011" actId="478"/>
-          <ac:picMkLst>
+        <pc:spChg chg="mod">
+          <ac:chgData name="Corbin Ferguson" userId="34a864e2-e65e-4cb2-823c-dc28f73f0e40" providerId="ADAL" clId="{8D2D96CF-1319-4CCC-9EA9-073445628049}" dt="2026-03-19T13:47:59.449" v="2101" actId="20577"/>
+          <ac:spMkLst>
             <pc:docMk/>
             <pc:sldMk cId="463964235" sldId="257"/>
-            <ac:picMk id="9" creationId="{1BC88699-DDD8-5B47-A357-650F499C3E03}"/>
-          </ac:picMkLst>
-        </pc:picChg>
+            <ac:spMk id="2" creationId="{00337666-7C19-635B-616A-B69C9D688B5F}"/>
+          </ac:spMkLst>
+        </pc:spChg>
         <pc:picChg chg="add mod">
           <ac:chgData name="Corbin Ferguson" userId="34a864e2-e65e-4cb2-823c-dc28f73f0e40" providerId="ADAL" clId="{8D2D96CF-1319-4CCC-9EA9-073445628049}" dt="2026-03-16T15:01:11.847" v="1024" actId="1076"/>
           <ac:picMkLst>
@@ -293,37 +289,6 @@
           </ac:spMkLst>
         </pc:spChg>
       </pc:sldChg>
-      <pc:sldChg chg="addSp delSp modSp del mod delAnim modAnim">
-        <pc:chgData name="Corbin Ferguson" userId="34a864e2-e65e-4cb2-823c-dc28f73f0e40" providerId="ADAL" clId="{8D2D96CF-1319-4CCC-9EA9-073445628049}" dt="2026-03-16T20:32:39.784" v="1827" actId="2696"/>
-        <pc:sldMkLst>
-          <pc:docMk/>
-          <pc:sldMk cId="1979168377" sldId="2146848303"/>
-        </pc:sldMkLst>
-        <pc:spChg chg="add del mod">
-          <ac:chgData name="Corbin Ferguson" userId="34a864e2-e65e-4cb2-823c-dc28f73f0e40" providerId="ADAL" clId="{8D2D96CF-1319-4CCC-9EA9-073445628049}" dt="2026-03-16T20:32:17.428" v="1824" actId="478"/>
-          <ac:spMkLst>
-            <pc:docMk/>
-            <pc:sldMk cId="1979168377" sldId="2146848303"/>
-            <ac:spMk id="3" creationId="{7E1F48FE-02C8-5BA2-C31C-33633F3769D0}"/>
-          </ac:spMkLst>
-        </pc:spChg>
-        <pc:spChg chg="add del mod ord">
-          <ac:chgData name="Corbin Ferguson" userId="34a864e2-e65e-4cb2-823c-dc28f73f0e40" providerId="ADAL" clId="{8D2D96CF-1319-4CCC-9EA9-073445628049}" dt="2026-03-16T20:01:48.402" v="1596" actId="11529"/>
-          <ac:spMkLst>
-            <pc:docMk/>
-            <pc:sldMk cId="1979168377" sldId="2146848303"/>
-            <ac:spMk id="5" creationId="{B39D629C-D470-8907-C1E4-DDBFE74A2B19}"/>
-          </ac:spMkLst>
-        </pc:spChg>
-        <pc:picChg chg="add del mod modCrop">
-          <ac:chgData name="Corbin Ferguson" userId="34a864e2-e65e-4cb2-823c-dc28f73f0e40" providerId="ADAL" clId="{8D2D96CF-1319-4CCC-9EA9-073445628049}" dt="2026-03-16T20:32:37.321" v="1826" actId="732"/>
-          <ac:picMkLst>
-            <pc:docMk/>
-            <pc:sldMk cId="1979168377" sldId="2146848303"/>
-            <ac:picMk id="15" creationId="{6244959B-B329-3457-CDC8-8A5F7BF28B7D}"/>
-          </ac:picMkLst>
-        </pc:picChg>
-      </pc:sldChg>
       <pc:sldChg chg="modSp mod">
         <pc:chgData name="Corbin Ferguson" userId="34a864e2-e65e-4cb2-823c-dc28f73f0e40" providerId="ADAL" clId="{8D2D96CF-1319-4CCC-9EA9-073445628049}" dt="2026-03-16T15:06:18.204" v="1136" actId="20577"/>
         <pc:sldMkLst>
@@ -339,8 +304,8 @@
           </ac:spMkLst>
         </pc:spChg>
       </pc:sldChg>
-      <pc:sldChg chg="modSp mod">
-        <pc:chgData name="Corbin Ferguson" userId="34a864e2-e65e-4cb2-823c-dc28f73f0e40" providerId="ADAL" clId="{8D2D96CF-1319-4CCC-9EA9-073445628049}" dt="2026-03-16T15:02:46.111" v="1042" actId="20577"/>
+      <pc:sldChg chg="modSp mod ord">
+        <pc:chgData name="Corbin Ferguson" userId="34a864e2-e65e-4cb2-823c-dc28f73f0e40" providerId="ADAL" clId="{8D2D96CF-1319-4CCC-9EA9-073445628049}" dt="2026-03-19T13:48:23.753" v="2164" actId="20577"/>
         <pc:sldMkLst>
           <pc:docMk/>
           <pc:sldMk cId="2928641305" sldId="2146848305"/>
@@ -351,6 +316,14 @@
             <pc:docMk/>
             <pc:sldMk cId="2928641305" sldId="2146848305"/>
             <ac:spMk id="2" creationId="{A59311E1-2F3C-706B-E772-4C7FF4CB0DFD}"/>
+          </ac:spMkLst>
+        </pc:spChg>
+        <pc:spChg chg="mod">
+          <ac:chgData name="Corbin Ferguson" userId="34a864e2-e65e-4cb2-823c-dc28f73f0e40" providerId="ADAL" clId="{8D2D96CF-1319-4CCC-9EA9-073445628049}" dt="2026-03-19T13:48:23.753" v="2164" actId="20577"/>
+          <ac:spMkLst>
+            <pc:docMk/>
+            <pc:sldMk cId="2928641305" sldId="2146848305"/>
+            <ac:spMk id="13" creationId="{929D0112-3559-BA85-36ED-E2064B91FC9A}"/>
           </ac:spMkLst>
         </pc:spChg>
       </pc:sldChg>
@@ -369,36 +342,26 @@
           </ac:spMkLst>
         </pc:spChg>
       </pc:sldChg>
-      <pc:sldChg chg="addSp delSp modSp mod">
-        <pc:chgData name="Corbin Ferguson" userId="34a864e2-e65e-4cb2-823c-dc28f73f0e40" providerId="ADAL" clId="{8D2D96CF-1319-4CCC-9EA9-073445628049}" dt="2026-03-16T18:23:33.003" v="1573" actId="14100"/>
+      <pc:sldChg chg="del">
+        <pc:chgData name="Corbin Ferguson" userId="34a864e2-e65e-4cb2-823c-dc28f73f0e40" providerId="ADAL" clId="{8D2D96CF-1319-4CCC-9EA9-073445628049}" dt="2026-03-19T13:39:17.423" v="2076" actId="2696"/>
+        <pc:sldMkLst>
+          <pc:docMk/>
+          <pc:sldMk cId="1350697150" sldId="2146848307"/>
+        </pc:sldMkLst>
+      </pc:sldChg>
+      <pc:sldChg chg="del">
+        <pc:chgData name="Corbin Ferguson" userId="34a864e2-e65e-4cb2-823c-dc28f73f0e40" providerId="ADAL" clId="{8D2D96CF-1319-4CCC-9EA9-073445628049}" dt="2026-03-19T13:39:19.666" v="2077" actId="2696"/>
+        <pc:sldMkLst>
+          <pc:docMk/>
+          <pc:sldMk cId="3038692604" sldId="2146848308"/>
+        </pc:sldMkLst>
+      </pc:sldChg>
+      <pc:sldChg chg="addSp delSp modSp del mod">
+        <pc:chgData name="Corbin Ferguson" userId="34a864e2-e65e-4cb2-823c-dc28f73f0e40" providerId="ADAL" clId="{8D2D96CF-1319-4CCC-9EA9-073445628049}" dt="2026-03-19T13:39:21.568" v="2078" actId="2696"/>
         <pc:sldMkLst>
           <pc:docMk/>
           <pc:sldMk cId="3092458060" sldId="2146848309"/>
         </pc:sldMkLst>
-        <pc:spChg chg="add del">
-          <ac:chgData name="Corbin Ferguson" userId="34a864e2-e65e-4cb2-823c-dc28f73f0e40" providerId="ADAL" clId="{8D2D96CF-1319-4CCC-9EA9-073445628049}" dt="2026-03-16T18:23:22.880" v="1569" actId="22"/>
-          <ac:spMkLst>
-            <pc:docMk/>
-            <pc:sldMk cId="3092458060" sldId="2146848309"/>
-            <ac:spMk id="5" creationId="{8BC8D642-BC9E-D530-78FF-57DA6447CB56}"/>
-          </ac:spMkLst>
-        </pc:spChg>
-        <pc:picChg chg="del">
-          <ac:chgData name="Corbin Ferguson" userId="34a864e2-e65e-4cb2-823c-dc28f73f0e40" providerId="ADAL" clId="{8D2D96CF-1319-4CCC-9EA9-073445628049}" dt="2026-03-16T18:23:21.517" v="1567" actId="478"/>
-          <ac:picMkLst>
-            <pc:docMk/>
-            <pc:sldMk cId="3092458060" sldId="2146848309"/>
-            <ac:picMk id="5128" creationId="{0B2E5208-67CE-83DA-8360-9F0600144B16}"/>
-          </ac:picMkLst>
-        </pc:picChg>
-        <pc:picChg chg="add mod">
-          <ac:chgData name="Corbin Ferguson" userId="34a864e2-e65e-4cb2-823c-dc28f73f0e40" providerId="ADAL" clId="{8D2D96CF-1319-4CCC-9EA9-073445628049}" dt="2026-03-16T18:23:33.003" v="1573" actId="14100"/>
-          <ac:picMkLst>
-            <pc:docMk/>
-            <pc:sldMk cId="3092458060" sldId="2146848309"/>
-            <ac:picMk id="5132" creationId="{4666DD03-80DA-70E0-19B8-82E5620169CE}"/>
-          </ac:picMkLst>
-        </pc:picChg>
       </pc:sldChg>
       <pc:sldChg chg="modSp mod">
         <pc:chgData name="Corbin Ferguson" userId="34a864e2-e65e-4cb2-823c-dc28f73f0e40" providerId="ADAL" clId="{8D2D96CF-1319-4CCC-9EA9-073445628049}" dt="2026-03-16T14:42:17.759" v="600" actId="20577"/>
@@ -499,38 +462,6 @@
             <ac:spMk id="9" creationId="{10547ECE-F4D6-7E7B-B957-03EBA9BFAC16}"/>
           </ac:spMkLst>
         </pc:spChg>
-        <pc:graphicFrameChg chg="add mod">
-          <ac:chgData name="Corbin Ferguson" userId="34a864e2-e65e-4cb2-823c-dc28f73f0e40" providerId="ADAL" clId="{8D2D96CF-1319-4CCC-9EA9-073445628049}" dt="2026-03-16T14:54:26.903" v="642"/>
-          <ac:graphicFrameMkLst>
-            <pc:docMk/>
-            <pc:sldMk cId="1067535560" sldId="2146848314"/>
-            <ac:graphicFrameMk id="6" creationId="{2B0FA1C0-BB02-FE95-4882-659F84EC68BF}"/>
-          </ac:graphicFrameMkLst>
-        </pc:graphicFrameChg>
-        <pc:graphicFrameChg chg="add mod">
-          <ac:chgData name="Corbin Ferguson" userId="34a864e2-e65e-4cb2-823c-dc28f73f0e40" providerId="ADAL" clId="{8D2D96CF-1319-4CCC-9EA9-073445628049}" dt="2026-03-16T14:54:31.888" v="643"/>
-          <ac:graphicFrameMkLst>
-            <pc:docMk/>
-            <pc:sldMk cId="1067535560" sldId="2146848314"/>
-            <ac:graphicFrameMk id="7" creationId="{B0DB4696-A2DE-2DAF-F42D-A13D1E03B497}"/>
-          </ac:graphicFrameMkLst>
-        </pc:graphicFrameChg>
-        <pc:graphicFrameChg chg="add mod">
-          <ac:chgData name="Corbin Ferguson" userId="34a864e2-e65e-4cb2-823c-dc28f73f0e40" providerId="ADAL" clId="{8D2D96CF-1319-4CCC-9EA9-073445628049}" dt="2026-03-16T14:54:52.519" v="648"/>
-          <ac:graphicFrameMkLst>
-            <pc:docMk/>
-            <pc:sldMk cId="1067535560" sldId="2146848314"/>
-            <ac:graphicFrameMk id="8" creationId="{0627A225-39DD-3E02-1C79-E76C3DE5AD4B}"/>
-          </ac:graphicFrameMkLst>
-        </pc:graphicFrameChg>
-        <pc:graphicFrameChg chg="add mod">
-          <ac:chgData name="Corbin Ferguson" userId="34a864e2-e65e-4cb2-823c-dc28f73f0e40" providerId="ADAL" clId="{8D2D96CF-1319-4CCC-9EA9-073445628049}" dt="2026-03-16T14:56:54.559" v="881"/>
-          <ac:graphicFrameMkLst>
-            <pc:docMk/>
-            <pc:sldMk cId="1067535560" sldId="2146848314"/>
-            <ac:graphicFrameMk id="10" creationId="{6AE61343-672E-4651-8B93-D5EAA608BA5B}"/>
-          </ac:graphicFrameMkLst>
-        </pc:graphicFrameChg>
       </pc:sldChg>
       <pc:sldChg chg="modSp add mod ord">
         <pc:chgData name="Corbin Ferguson" userId="34a864e2-e65e-4cb2-823c-dc28f73f0e40" providerId="ADAL" clId="{8D2D96CF-1319-4CCC-9EA9-073445628049}" dt="2026-03-16T14:42:49.632" v="602"/>
@@ -555,8 +486,8 @@
           </ac:spMkLst>
         </pc:spChg>
       </pc:sldChg>
-      <pc:sldChg chg="addSp delSp modSp add mod modClrScheme chgLayout">
-        <pc:chgData name="Corbin Ferguson" userId="34a864e2-e65e-4cb2-823c-dc28f73f0e40" providerId="ADAL" clId="{8D2D96CF-1319-4CCC-9EA9-073445628049}" dt="2026-03-16T17:39:26.042" v="1566" actId="26606"/>
+      <pc:sldChg chg="addSp delSp modSp add del mod modClrScheme chgLayout">
+        <pc:chgData name="Corbin Ferguson" userId="34a864e2-e65e-4cb2-823c-dc28f73f0e40" providerId="ADAL" clId="{8D2D96CF-1319-4CCC-9EA9-073445628049}" dt="2026-03-19T14:13:12.636" v="2387" actId="2696"/>
         <pc:sldMkLst>
           <pc:docMk/>
           <pc:sldMk cId="2077614573" sldId="2146848316"/>
@@ -593,686 +524,6 @@
             <ac:spMk id="8" creationId="{4C7D5AC9-EA29-86A4-7EF8-4DF941130DC8}"/>
           </ac:spMkLst>
         </pc:spChg>
-        <pc:spChg chg="del mod">
-          <ac:chgData name="Corbin Ferguson" userId="34a864e2-e65e-4cb2-823c-dc28f73f0e40" providerId="ADAL" clId="{8D2D96CF-1319-4CCC-9EA9-073445628049}" dt="2026-03-16T16:13:34.801" v="1460" actId="478"/>
-          <ac:spMkLst>
-            <pc:docMk/>
-            <pc:sldMk cId="2077614573" sldId="2146848316"/>
-            <ac:spMk id="13" creationId="{D7D4E759-8FDE-86E6-E731-24ECD92780CE}"/>
-          </ac:spMkLst>
-        </pc:spChg>
-        <pc:spChg chg="del">
-          <ac:chgData name="Corbin Ferguson" userId="34a864e2-e65e-4cb2-823c-dc28f73f0e40" providerId="ADAL" clId="{8D2D96CF-1319-4CCC-9EA9-073445628049}" dt="2026-03-16T16:13:29.237" v="1456" actId="478"/>
-          <ac:spMkLst>
-            <pc:docMk/>
-            <pc:sldMk cId="2077614573" sldId="2146848316"/>
-            <ac:spMk id="24" creationId="{686D1B61-5B63-C724-2CB5-FD3BFC6AFDD4}"/>
-          </ac:spMkLst>
-        </pc:spChg>
-        <pc:spChg chg="del">
-          <ac:chgData name="Corbin Ferguson" userId="34a864e2-e65e-4cb2-823c-dc28f73f0e40" providerId="ADAL" clId="{8D2D96CF-1319-4CCC-9EA9-073445628049}" dt="2026-03-16T16:13:29.237" v="1456" actId="478"/>
-          <ac:spMkLst>
-            <pc:docMk/>
-            <pc:sldMk cId="2077614573" sldId="2146848316"/>
-            <ac:spMk id="36" creationId="{744595BF-62E0-2BA1-92DD-CD78756D96D0}"/>
-          </ac:spMkLst>
-        </pc:spChg>
-        <pc:spChg chg="del">
-          <ac:chgData name="Corbin Ferguson" userId="34a864e2-e65e-4cb2-823c-dc28f73f0e40" providerId="ADAL" clId="{8D2D96CF-1319-4CCC-9EA9-073445628049}" dt="2026-03-16T16:13:29.237" v="1456" actId="478"/>
-          <ac:spMkLst>
-            <pc:docMk/>
-            <pc:sldMk cId="2077614573" sldId="2146848316"/>
-            <ac:spMk id="42" creationId="{BC769C5F-21DA-B5F2-C497-39B7F975B55B}"/>
-          </ac:spMkLst>
-        </pc:spChg>
-        <pc:spChg chg="mod topLvl">
-          <ac:chgData name="Corbin Ferguson" userId="34a864e2-e65e-4cb2-823c-dc28f73f0e40" providerId="ADAL" clId="{8D2D96CF-1319-4CCC-9EA9-073445628049}" dt="2026-03-16T16:02:03.946" v="1375" actId="165"/>
-          <ac:spMkLst>
-            <pc:docMk/>
-            <pc:sldMk cId="2077614573" sldId="2146848316"/>
-            <ac:spMk id="55" creationId="{28DFFED1-D271-35C0-A749-731C7D90E772}"/>
-          </ac:spMkLst>
-        </pc:spChg>
-        <pc:spChg chg="del">
-          <ac:chgData name="Corbin Ferguson" userId="34a864e2-e65e-4cb2-823c-dc28f73f0e40" providerId="ADAL" clId="{8D2D96CF-1319-4CCC-9EA9-073445628049}" dt="2026-03-16T16:13:29.237" v="1456" actId="478"/>
-          <ac:spMkLst>
-            <pc:docMk/>
-            <pc:sldMk cId="2077614573" sldId="2146848316"/>
-            <ac:spMk id="56" creationId="{6C489836-C900-A02E-8277-D16D696CD472}"/>
-          </ac:spMkLst>
-        </pc:spChg>
-        <pc:spChg chg="del">
-          <ac:chgData name="Corbin Ferguson" userId="34a864e2-e65e-4cb2-823c-dc28f73f0e40" providerId="ADAL" clId="{8D2D96CF-1319-4CCC-9EA9-073445628049}" dt="2026-03-16T16:13:29.237" v="1456" actId="478"/>
-          <ac:spMkLst>
-            <pc:docMk/>
-            <pc:sldMk cId="2077614573" sldId="2146848316"/>
-            <ac:spMk id="61" creationId="{85AC204E-F4BC-E994-8003-6157E29B17C4}"/>
-          </ac:spMkLst>
-        </pc:spChg>
-        <pc:spChg chg="mod topLvl">
-          <ac:chgData name="Corbin Ferguson" userId="34a864e2-e65e-4cb2-823c-dc28f73f0e40" providerId="ADAL" clId="{8D2D96CF-1319-4CCC-9EA9-073445628049}" dt="2026-03-16T16:13:04.178" v="1437" actId="165"/>
-          <ac:spMkLst>
-            <pc:docMk/>
-            <pc:sldMk cId="2077614573" sldId="2146848316"/>
-            <ac:spMk id="8248" creationId="{5B198541-A049-C8CA-F02C-E5415B398853}"/>
-          </ac:spMkLst>
-        </pc:spChg>
-        <pc:spChg chg="mod topLvl">
-          <ac:chgData name="Corbin Ferguson" userId="34a864e2-e65e-4cb2-823c-dc28f73f0e40" providerId="ADAL" clId="{8D2D96CF-1319-4CCC-9EA9-073445628049}" dt="2026-03-16T16:13:04.178" v="1437" actId="165"/>
-          <ac:spMkLst>
-            <pc:docMk/>
-            <pc:sldMk cId="2077614573" sldId="2146848316"/>
-            <ac:spMk id="8291" creationId="{4434AD16-C590-BE76-6B5E-13209D698BC4}"/>
-          </ac:spMkLst>
-        </pc:spChg>
-        <pc:spChg chg="mod">
-          <ac:chgData name="Corbin Ferguson" userId="34a864e2-e65e-4cb2-823c-dc28f73f0e40" providerId="ADAL" clId="{8D2D96CF-1319-4CCC-9EA9-073445628049}" dt="2026-03-16T16:01:40.264" v="1371" actId="165"/>
-          <ac:spMkLst>
-            <pc:docMk/>
-            <pc:sldMk cId="2077614573" sldId="2146848316"/>
-            <ac:spMk id="8544" creationId="{E5D84286-4EE9-53B8-4951-8D0A3816D9B8}"/>
-          </ac:spMkLst>
-        </pc:spChg>
-        <pc:spChg chg="add del mod ord modVis">
-          <ac:chgData name="Corbin Ferguson" userId="34a864e2-e65e-4cb2-823c-dc28f73f0e40" providerId="ADAL" clId="{8D2D96CF-1319-4CCC-9EA9-073445628049}" dt="2026-03-16T16:13:02.702" v="1436" actId="207"/>
-          <ac:spMkLst>
-            <pc:docMk/>
-            <pc:sldMk cId="2077614573" sldId="2146848316"/>
-            <ac:spMk id="8567" creationId="{73615F16-59EB-B70F-8238-D5B33CF342BB}"/>
-          </ac:spMkLst>
-        </pc:spChg>
-        <pc:spChg chg="mod topLvl">
-          <ac:chgData name="Corbin Ferguson" userId="34a864e2-e65e-4cb2-823c-dc28f73f0e40" providerId="ADAL" clId="{8D2D96CF-1319-4CCC-9EA9-073445628049}" dt="2026-03-16T16:13:04.178" v="1437" actId="165"/>
-          <ac:spMkLst>
-            <pc:docMk/>
-            <pc:sldMk cId="2077614573" sldId="2146848316"/>
-            <ac:spMk id="8568" creationId="{743FE570-5A53-F9B3-A590-6FA06FF2E4D7}"/>
-          </ac:spMkLst>
-        </pc:spChg>
-        <pc:spChg chg="mod">
-          <ac:chgData name="Corbin Ferguson" userId="34a864e2-e65e-4cb2-823c-dc28f73f0e40" providerId="ADAL" clId="{8D2D96CF-1319-4CCC-9EA9-073445628049}" dt="2026-03-16T16:01:40.264" v="1371" actId="165"/>
-          <ac:spMkLst>
-            <pc:docMk/>
-            <pc:sldMk cId="2077614573" sldId="2146848316"/>
-            <ac:spMk id="8632" creationId="{4EA6240F-3582-C7A6-A438-BDE40D59BCDE}"/>
-          </ac:spMkLst>
-        </pc:spChg>
-        <pc:spChg chg="mod">
-          <ac:chgData name="Corbin Ferguson" userId="34a864e2-e65e-4cb2-823c-dc28f73f0e40" providerId="ADAL" clId="{8D2D96CF-1319-4CCC-9EA9-073445628049}" dt="2026-03-16T16:01:40.264" v="1371" actId="165"/>
-          <ac:spMkLst>
-            <pc:docMk/>
-            <pc:sldMk cId="2077614573" sldId="2146848316"/>
-            <ac:spMk id="8643" creationId="{2C0C8624-EC81-B2A3-06C4-53B52A47364E}"/>
-          </ac:spMkLst>
-        </pc:spChg>
-        <pc:spChg chg="mod">
-          <ac:chgData name="Corbin Ferguson" userId="34a864e2-e65e-4cb2-823c-dc28f73f0e40" providerId="ADAL" clId="{8D2D96CF-1319-4CCC-9EA9-073445628049}" dt="2026-03-16T16:02:03.946" v="1375" actId="165"/>
-          <ac:spMkLst>
-            <pc:docMk/>
-            <pc:sldMk cId="2077614573" sldId="2146848316"/>
-            <ac:spMk id="8961" creationId="{1DEDA1F4-5534-3ABA-796A-43CBE331391B}"/>
-          </ac:spMkLst>
-        </pc:spChg>
-        <pc:spChg chg="mod topLvl">
-          <ac:chgData name="Corbin Ferguson" userId="34a864e2-e65e-4cb2-823c-dc28f73f0e40" providerId="ADAL" clId="{8D2D96CF-1319-4CCC-9EA9-073445628049}" dt="2026-03-16T16:13:07.664" v="1441" actId="165"/>
-          <ac:spMkLst>
-            <pc:docMk/>
-            <pc:sldMk cId="2077614573" sldId="2146848316"/>
-            <ac:spMk id="9026" creationId="{6C204C66-8F61-60B6-6DAE-F9365A8C27F3}"/>
-          </ac:spMkLst>
-        </pc:spChg>
-        <pc:spChg chg="mod topLvl">
-          <ac:chgData name="Corbin Ferguson" userId="34a864e2-e65e-4cb2-823c-dc28f73f0e40" providerId="ADAL" clId="{8D2D96CF-1319-4CCC-9EA9-073445628049}" dt="2026-03-16T16:13:07.664" v="1441" actId="165"/>
-          <ac:spMkLst>
-            <pc:docMk/>
-            <pc:sldMk cId="2077614573" sldId="2146848316"/>
-            <ac:spMk id="9093" creationId="{685AD8E8-7F61-1BE9-F294-D9D90AA4BCB3}"/>
-          </ac:spMkLst>
-        </pc:spChg>
-        <pc:spChg chg="mod topLvl">
-          <ac:chgData name="Corbin Ferguson" userId="34a864e2-e65e-4cb2-823c-dc28f73f0e40" providerId="ADAL" clId="{8D2D96CF-1319-4CCC-9EA9-073445628049}" dt="2026-03-16T16:13:07.664" v="1441" actId="165"/>
-          <ac:spMkLst>
-            <pc:docMk/>
-            <pc:sldMk cId="2077614573" sldId="2146848316"/>
-            <ac:spMk id="9118" creationId="{8CC27F9C-D0D8-C07D-3B62-C7B575A1DD65}"/>
-          </ac:spMkLst>
-        </pc:spChg>
-        <pc:spChg chg="mod">
-          <ac:chgData name="Corbin Ferguson" userId="34a864e2-e65e-4cb2-823c-dc28f73f0e40" providerId="ADAL" clId="{8D2D96CF-1319-4CCC-9EA9-073445628049}" dt="2026-03-16T16:02:03.946" v="1375" actId="165"/>
-          <ac:spMkLst>
-            <pc:docMk/>
-            <pc:sldMk cId="2077614573" sldId="2146848316"/>
-            <ac:spMk id="9188" creationId="{41F6D49B-BF20-C635-F3DC-E8E78B672334}"/>
-          </ac:spMkLst>
-        </pc:spChg>
-        <pc:spChg chg="mod">
-          <ac:chgData name="Corbin Ferguson" userId="34a864e2-e65e-4cb2-823c-dc28f73f0e40" providerId="ADAL" clId="{8D2D96CF-1319-4CCC-9EA9-073445628049}" dt="2026-03-16T16:01:40.264" v="1371" actId="165"/>
-          <ac:spMkLst>
-            <pc:docMk/>
-            <pc:sldMk cId="2077614573" sldId="2146848316"/>
-            <ac:spMk id="9259" creationId="{40AA7F6B-5945-AA9A-4084-91670E0E3BA6}"/>
-          </ac:spMkLst>
-        </pc:spChg>
-        <pc:spChg chg="mod topLvl">
-          <ac:chgData name="Corbin Ferguson" userId="34a864e2-e65e-4cb2-823c-dc28f73f0e40" providerId="ADAL" clId="{8D2D96CF-1319-4CCC-9EA9-073445628049}" dt="2026-03-16T16:13:07.664" v="1441" actId="165"/>
-          <ac:spMkLst>
-            <pc:docMk/>
-            <pc:sldMk cId="2077614573" sldId="2146848316"/>
-            <ac:spMk id="9401" creationId="{0D334F6E-4CA3-A5D7-A441-4C7445A6288C}"/>
-          </ac:spMkLst>
-        </pc:spChg>
-        <pc:spChg chg="mod topLvl">
-          <ac:chgData name="Corbin Ferguson" userId="34a864e2-e65e-4cb2-823c-dc28f73f0e40" providerId="ADAL" clId="{8D2D96CF-1319-4CCC-9EA9-073445628049}" dt="2026-03-16T16:13:07.664" v="1441" actId="165"/>
-          <ac:spMkLst>
-            <pc:docMk/>
-            <pc:sldMk cId="2077614573" sldId="2146848316"/>
-            <ac:spMk id="9404" creationId="{A5F2C69B-31F9-1FF4-A5E1-9AF7743B7361}"/>
-          </ac:spMkLst>
-        </pc:spChg>
-        <pc:spChg chg="mod">
-          <ac:chgData name="Corbin Ferguson" userId="34a864e2-e65e-4cb2-823c-dc28f73f0e40" providerId="ADAL" clId="{8D2D96CF-1319-4CCC-9EA9-073445628049}" dt="2026-03-16T16:02:03.946" v="1375" actId="165"/>
-          <ac:spMkLst>
-            <pc:docMk/>
-            <pc:sldMk cId="2077614573" sldId="2146848316"/>
-            <ac:spMk id="9444" creationId="{4F6E9EA8-2F4F-5D2A-2F5B-1BCA7597DA8F}"/>
-          </ac:spMkLst>
-        </pc:spChg>
-        <pc:spChg chg="mod">
-          <ac:chgData name="Corbin Ferguson" userId="34a864e2-e65e-4cb2-823c-dc28f73f0e40" providerId="ADAL" clId="{8D2D96CF-1319-4CCC-9EA9-073445628049}" dt="2026-03-16T16:01:40.264" v="1371" actId="165"/>
-          <ac:spMkLst>
-            <pc:docMk/>
-            <pc:sldMk cId="2077614573" sldId="2146848316"/>
-            <ac:spMk id="9845" creationId="{45A65B3C-704D-81A8-9CB8-1B808C9DB46F}"/>
-          </ac:spMkLst>
-        </pc:spChg>
-        <pc:spChg chg="del">
-          <ac:chgData name="Corbin Ferguson" userId="34a864e2-e65e-4cb2-823c-dc28f73f0e40" providerId="ADAL" clId="{8D2D96CF-1319-4CCC-9EA9-073445628049}" dt="2026-03-16T16:13:29.237" v="1456" actId="478"/>
-          <ac:spMkLst>
-            <pc:docMk/>
-            <pc:sldMk cId="2077614573" sldId="2146848316"/>
-            <ac:spMk id="9990" creationId="{1A14FB88-5FB8-61A3-5A87-F8C40EF53100}"/>
-          </ac:spMkLst>
-        </pc:spChg>
-        <pc:spChg chg="del">
-          <ac:chgData name="Corbin Ferguson" userId="34a864e2-e65e-4cb2-823c-dc28f73f0e40" providerId="ADAL" clId="{8D2D96CF-1319-4CCC-9EA9-073445628049}" dt="2026-03-16T16:13:38.282" v="1461" actId="478"/>
-          <ac:spMkLst>
-            <pc:docMk/>
-            <pc:sldMk cId="2077614573" sldId="2146848316"/>
-            <ac:spMk id="9997" creationId="{6078BC0C-7BF6-79C6-9752-3CCDACE1113B}"/>
-          </ac:spMkLst>
-        </pc:spChg>
-        <pc:spChg chg="del">
-          <ac:chgData name="Corbin Ferguson" userId="34a864e2-e65e-4cb2-823c-dc28f73f0e40" providerId="ADAL" clId="{8D2D96CF-1319-4CCC-9EA9-073445628049}" dt="2026-03-16T16:13:38.282" v="1461" actId="478"/>
-          <ac:spMkLst>
-            <pc:docMk/>
-            <pc:sldMk cId="2077614573" sldId="2146848316"/>
-            <ac:spMk id="9998" creationId="{88600233-ABCB-3174-F69A-401D513C7624}"/>
-          </ac:spMkLst>
-        </pc:spChg>
-        <pc:spChg chg="del">
-          <ac:chgData name="Corbin Ferguson" userId="34a864e2-e65e-4cb2-823c-dc28f73f0e40" providerId="ADAL" clId="{8D2D96CF-1319-4CCC-9EA9-073445628049}" dt="2026-03-16T16:13:38.282" v="1461" actId="478"/>
-          <ac:spMkLst>
-            <pc:docMk/>
-            <pc:sldMk cId="2077614573" sldId="2146848316"/>
-            <ac:spMk id="9999" creationId="{7D5B8841-DB8C-5C65-782F-42DB1A2994E5}"/>
-          </ac:spMkLst>
-        </pc:spChg>
-        <pc:spChg chg="del">
-          <ac:chgData name="Corbin Ferguson" userId="34a864e2-e65e-4cb2-823c-dc28f73f0e40" providerId="ADAL" clId="{8D2D96CF-1319-4CCC-9EA9-073445628049}" dt="2026-03-16T16:13:38.282" v="1461" actId="478"/>
-          <ac:spMkLst>
-            <pc:docMk/>
-            <pc:sldMk cId="2077614573" sldId="2146848316"/>
-            <ac:spMk id="10000" creationId="{18773B56-FBA6-3A3A-1D0D-353C9A1CAB64}"/>
-          </ac:spMkLst>
-        </pc:spChg>
-        <pc:spChg chg="mod">
-          <ac:chgData name="Corbin Ferguson" userId="34a864e2-e65e-4cb2-823c-dc28f73f0e40" providerId="ADAL" clId="{8D2D96CF-1319-4CCC-9EA9-073445628049}" dt="2026-03-16T16:01:40.264" v="1371" actId="165"/>
-          <ac:spMkLst>
-            <pc:docMk/>
-            <pc:sldMk cId="2077614573" sldId="2146848316"/>
-            <ac:spMk id="10003" creationId="{8624F5E2-E70C-6B88-1C23-FE10AFC7DD90}"/>
-          </ac:spMkLst>
-        </pc:spChg>
-        <pc:spChg chg="del">
-          <ac:chgData name="Corbin Ferguson" userId="34a864e2-e65e-4cb2-823c-dc28f73f0e40" providerId="ADAL" clId="{8D2D96CF-1319-4CCC-9EA9-073445628049}" dt="2026-03-16T16:13:29.237" v="1456" actId="478"/>
-          <ac:spMkLst>
-            <pc:docMk/>
-            <pc:sldMk cId="2077614573" sldId="2146848316"/>
-            <ac:spMk id="10008" creationId="{B1F0841A-FA07-A4E0-A080-3A495483D6B6}"/>
-          </ac:spMkLst>
-        </pc:spChg>
-        <pc:spChg chg="del">
-          <ac:chgData name="Corbin Ferguson" userId="34a864e2-e65e-4cb2-823c-dc28f73f0e40" providerId="ADAL" clId="{8D2D96CF-1319-4CCC-9EA9-073445628049}" dt="2026-03-16T16:13:29.237" v="1456" actId="478"/>
-          <ac:spMkLst>
-            <pc:docMk/>
-            <pc:sldMk cId="2077614573" sldId="2146848316"/>
-            <ac:spMk id="10019" creationId="{0F32F3BF-4493-282F-6406-56917E91F62A}"/>
-          </ac:spMkLst>
-        </pc:spChg>
-        <pc:spChg chg="del">
-          <ac:chgData name="Corbin Ferguson" userId="34a864e2-e65e-4cb2-823c-dc28f73f0e40" providerId="ADAL" clId="{8D2D96CF-1319-4CCC-9EA9-073445628049}" dt="2026-03-16T16:13:29.237" v="1456" actId="478"/>
-          <ac:spMkLst>
-            <pc:docMk/>
-            <pc:sldMk cId="2077614573" sldId="2146848316"/>
-            <ac:spMk id="10020" creationId="{0B140EB4-2DD4-A169-C104-950692A145B1}"/>
-          </ac:spMkLst>
-        </pc:spChg>
-        <pc:spChg chg="del">
-          <ac:chgData name="Corbin Ferguson" userId="34a864e2-e65e-4cb2-823c-dc28f73f0e40" providerId="ADAL" clId="{8D2D96CF-1319-4CCC-9EA9-073445628049}" dt="2026-03-16T16:13:29.237" v="1456" actId="478"/>
-          <ac:spMkLst>
-            <pc:docMk/>
-            <pc:sldMk cId="2077614573" sldId="2146848316"/>
-            <ac:spMk id="10025" creationId="{FE71403A-2281-5DDC-DFAB-21BA5FD84C6C}"/>
-          </ac:spMkLst>
-        </pc:spChg>
-        <pc:spChg chg="del">
-          <ac:chgData name="Corbin Ferguson" userId="34a864e2-e65e-4cb2-823c-dc28f73f0e40" providerId="ADAL" clId="{8D2D96CF-1319-4CCC-9EA9-073445628049}" dt="2026-03-16T16:13:40.693" v="1462" actId="478"/>
-          <ac:spMkLst>
-            <pc:docMk/>
-            <pc:sldMk cId="2077614573" sldId="2146848316"/>
-            <ac:spMk id="10029" creationId="{6256A978-DF3A-CA52-E8E9-04CAB46297B6}"/>
-          </ac:spMkLst>
-        </pc:spChg>
-        <pc:spChg chg="del">
-          <ac:chgData name="Corbin Ferguson" userId="34a864e2-e65e-4cb2-823c-dc28f73f0e40" providerId="ADAL" clId="{8D2D96CF-1319-4CCC-9EA9-073445628049}" dt="2026-03-16T16:13:40.693" v="1462" actId="478"/>
-          <ac:spMkLst>
-            <pc:docMk/>
-            <pc:sldMk cId="2077614573" sldId="2146848316"/>
-            <ac:spMk id="10030" creationId="{A2F065D7-7A97-DCAF-9AEB-2EA5464EC424}"/>
-          </ac:spMkLst>
-        </pc:spChg>
-        <pc:spChg chg="del">
-          <ac:chgData name="Corbin Ferguson" userId="34a864e2-e65e-4cb2-823c-dc28f73f0e40" providerId="ADAL" clId="{8D2D96CF-1319-4CCC-9EA9-073445628049}" dt="2026-03-16T16:13:40.693" v="1462" actId="478"/>
-          <ac:spMkLst>
-            <pc:docMk/>
-            <pc:sldMk cId="2077614573" sldId="2146848316"/>
-            <ac:spMk id="10031" creationId="{7386F5C3-5ED2-1E35-3F2A-7F615097E0FD}"/>
-          </ac:spMkLst>
-        </pc:spChg>
-        <pc:spChg chg="del">
-          <ac:chgData name="Corbin Ferguson" userId="34a864e2-e65e-4cb2-823c-dc28f73f0e40" providerId="ADAL" clId="{8D2D96CF-1319-4CCC-9EA9-073445628049}" dt="2026-03-16T16:13:38.282" v="1461" actId="478"/>
-          <ac:spMkLst>
-            <pc:docMk/>
-            <pc:sldMk cId="2077614573" sldId="2146848316"/>
-            <ac:spMk id="10039" creationId="{A767D995-2245-EFF0-B2A3-EED0E0B5ABE0}"/>
-          </ac:spMkLst>
-        </pc:spChg>
-        <pc:spChg chg="del">
-          <ac:chgData name="Corbin Ferguson" userId="34a864e2-e65e-4cb2-823c-dc28f73f0e40" providerId="ADAL" clId="{8D2D96CF-1319-4CCC-9EA9-073445628049}" dt="2026-03-16T16:13:38.282" v="1461" actId="478"/>
-          <ac:spMkLst>
-            <pc:docMk/>
-            <pc:sldMk cId="2077614573" sldId="2146848316"/>
-            <ac:spMk id="10040" creationId="{F5F31AD6-77DE-1B28-21CF-F269EC311F1F}"/>
-          </ac:spMkLst>
-        </pc:spChg>
-        <pc:spChg chg="mod">
-          <ac:chgData name="Corbin Ferguson" userId="34a864e2-e65e-4cb2-823c-dc28f73f0e40" providerId="ADAL" clId="{8D2D96CF-1319-4CCC-9EA9-073445628049}" dt="2026-03-16T16:02:03.946" v="1375" actId="165"/>
-          <ac:spMkLst>
-            <pc:docMk/>
-            <pc:sldMk cId="2077614573" sldId="2146848316"/>
-            <ac:spMk id="10163" creationId="{9DA64397-879A-CC61-3C2F-AC5F268A765A}"/>
-          </ac:spMkLst>
-        </pc:spChg>
-        <pc:spChg chg="mod">
-          <ac:chgData name="Corbin Ferguson" userId="34a864e2-e65e-4cb2-823c-dc28f73f0e40" providerId="ADAL" clId="{8D2D96CF-1319-4CCC-9EA9-073445628049}" dt="2026-03-16T16:01:40.264" v="1371" actId="165"/>
-          <ac:spMkLst>
-            <pc:docMk/>
-            <pc:sldMk cId="2077614573" sldId="2146848316"/>
-            <ac:spMk id="10261" creationId="{DFFE02BB-2D22-323B-9346-35A5106901E7}"/>
-          </ac:spMkLst>
-        </pc:spChg>
-        <pc:spChg chg="mod">
-          <ac:chgData name="Corbin Ferguson" userId="34a864e2-e65e-4cb2-823c-dc28f73f0e40" providerId="ADAL" clId="{8D2D96CF-1319-4CCC-9EA9-073445628049}" dt="2026-03-16T16:02:03.946" v="1375" actId="165"/>
-          <ac:spMkLst>
-            <pc:docMk/>
-            <pc:sldMk cId="2077614573" sldId="2146848316"/>
-            <ac:spMk id="10271" creationId="{3DFE3B36-1D23-B941-B786-CF08850E2BBC}"/>
-          </ac:spMkLst>
-        </pc:spChg>
-        <pc:spChg chg="mod topLvl">
-          <ac:chgData name="Corbin Ferguson" userId="34a864e2-e65e-4cb2-823c-dc28f73f0e40" providerId="ADAL" clId="{8D2D96CF-1319-4CCC-9EA9-073445628049}" dt="2026-03-16T16:13:07.664" v="1441" actId="165"/>
-          <ac:spMkLst>
-            <pc:docMk/>
-            <pc:sldMk cId="2077614573" sldId="2146848316"/>
-            <ac:spMk id="10419" creationId="{4B6A0A59-0841-ACBC-9ACF-8DDC7F585AD8}"/>
-          </ac:spMkLst>
-        </pc:spChg>
-        <pc:spChg chg="mod topLvl">
-          <ac:chgData name="Corbin Ferguson" userId="34a864e2-e65e-4cb2-823c-dc28f73f0e40" providerId="ADAL" clId="{8D2D96CF-1319-4CCC-9EA9-073445628049}" dt="2026-03-16T16:13:07.664" v="1441" actId="165"/>
-          <ac:spMkLst>
-            <pc:docMk/>
-            <pc:sldMk cId="2077614573" sldId="2146848316"/>
-            <ac:spMk id="10434" creationId="{71299B70-E2A2-36F6-BF08-C9A0A5683ADE}"/>
-          </ac:spMkLst>
-        </pc:spChg>
-        <pc:spChg chg="mod topLvl">
-          <ac:chgData name="Corbin Ferguson" userId="34a864e2-e65e-4cb2-823c-dc28f73f0e40" providerId="ADAL" clId="{8D2D96CF-1319-4CCC-9EA9-073445628049}" dt="2026-03-16T16:13:07.664" v="1441" actId="165"/>
-          <ac:spMkLst>
-            <pc:docMk/>
-            <pc:sldMk cId="2077614573" sldId="2146848316"/>
-            <ac:spMk id="10438" creationId="{18D18D81-FEBF-37F5-6C20-B6F09FFFD838}"/>
-          </ac:spMkLst>
-        </pc:spChg>
-        <pc:spChg chg="mod modVis">
-          <ac:chgData name="Corbin Ferguson" userId="34a864e2-e65e-4cb2-823c-dc28f73f0e40" providerId="ADAL" clId="{8D2D96CF-1319-4CCC-9EA9-073445628049}" dt="2026-03-16T16:13:14.640" v="1452" actId="14429"/>
-          <ac:spMkLst>
-            <pc:docMk/>
-            <pc:sldMk cId="2077614573" sldId="2146848316"/>
-            <ac:spMk id="10454" creationId="{AAA717C8-C7BD-FAAA-2E81-4D76EA54C548}"/>
-          </ac:spMkLst>
-        </pc:spChg>
-        <pc:spChg chg="mod modVis">
-          <ac:chgData name="Corbin Ferguson" userId="34a864e2-e65e-4cb2-823c-dc28f73f0e40" providerId="ADAL" clId="{8D2D96CF-1319-4CCC-9EA9-073445628049}" dt="2026-03-16T16:13:14.263" v="1451" actId="14430"/>
-          <ac:spMkLst>
-            <pc:docMk/>
-            <pc:sldMk cId="2077614573" sldId="2146848316"/>
-            <ac:spMk id="10456" creationId="{10928AD7-DDD4-A9F4-ED11-2D3FCBAB2AF7}"/>
-          </ac:spMkLst>
-        </pc:spChg>
-        <pc:spChg chg="mod modVis">
-          <ac:chgData name="Corbin Ferguson" userId="34a864e2-e65e-4cb2-823c-dc28f73f0e40" providerId="ADAL" clId="{8D2D96CF-1319-4CCC-9EA9-073445628049}" dt="2026-03-16T16:13:13.462" v="1449" actId="14430"/>
-          <ac:spMkLst>
-            <pc:docMk/>
-            <pc:sldMk cId="2077614573" sldId="2146848316"/>
-            <ac:spMk id="10457" creationId="{E4D783BE-4B50-1EE9-293B-212C35D871F3}"/>
-          </ac:spMkLst>
-        </pc:spChg>
-        <pc:spChg chg="mod modVis">
-          <ac:chgData name="Corbin Ferguson" userId="34a864e2-e65e-4cb2-823c-dc28f73f0e40" providerId="ADAL" clId="{8D2D96CF-1319-4CCC-9EA9-073445628049}" dt="2026-03-16T16:13:12.614" v="1447" actId="14430"/>
-          <ac:spMkLst>
-            <pc:docMk/>
-            <pc:sldMk cId="2077614573" sldId="2146848316"/>
-            <ac:spMk id="10458" creationId="{CB731D3F-3E72-28D4-6275-824262BB1A26}"/>
-          </ac:spMkLst>
-        </pc:spChg>
-        <pc:spChg chg="mod topLvl">
-          <ac:chgData name="Corbin Ferguson" userId="34a864e2-e65e-4cb2-823c-dc28f73f0e40" providerId="ADAL" clId="{8D2D96CF-1319-4CCC-9EA9-073445628049}" dt="2026-03-16T16:13:07.664" v="1441" actId="165"/>
-          <ac:spMkLst>
-            <pc:docMk/>
-            <pc:sldMk cId="2077614573" sldId="2146848316"/>
-            <ac:spMk id="10469" creationId="{3DF84D1F-2D12-0BC2-D0E1-AE32F687E41E}"/>
-          </ac:spMkLst>
-        </pc:spChg>
-        <pc:spChg chg="mod modVis">
-          <ac:chgData name="Corbin Ferguson" userId="34a864e2-e65e-4cb2-823c-dc28f73f0e40" providerId="ADAL" clId="{8D2D96CF-1319-4CCC-9EA9-073445628049}" dt="2026-03-16T16:03:33.804" v="1406" actId="14429"/>
-          <ac:spMkLst>
-            <pc:docMk/>
-            <pc:sldMk cId="2077614573" sldId="2146848316"/>
-            <ac:spMk id="10476" creationId="{1BB2F026-A377-8A25-813A-5F255959DD51}"/>
-          </ac:spMkLst>
-        </pc:spChg>
-        <pc:spChg chg="mod modVis">
-          <ac:chgData name="Corbin Ferguson" userId="34a864e2-e65e-4cb2-823c-dc28f73f0e40" providerId="ADAL" clId="{8D2D96CF-1319-4CCC-9EA9-073445628049}" dt="2026-03-16T16:03:31.319" v="1402" actId="14429"/>
-          <ac:spMkLst>
-            <pc:docMk/>
-            <pc:sldMk cId="2077614573" sldId="2146848316"/>
-            <ac:spMk id="10477" creationId="{6EDA60F5-0155-1969-4303-C8E1ECB68C04}"/>
-          </ac:spMkLst>
-        </pc:spChg>
-        <pc:spChg chg="mod modVis">
-          <ac:chgData name="Corbin Ferguson" userId="34a864e2-e65e-4cb2-823c-dc28f73f0e40" providerId="ADAL" clId="{8D2D96CF-1319-4CCC-9EA9-073445628049}" dt="2026-03-16T16:03:32.507" v="1404" actId="14429"/>
-          <ac:spMkLst>
-            <pc:docMk/>
-            <pc:sldMk cId="2077614573" sldId="2146848316"/>
-            <ac:spMk id="10478" creationId="{EF29C8E0-E33D-F434-F784-79635682E34D}"/>
-          </ac:spMkLst>
-        </pc:spChg>
-        <pc:spChg chg="mod topLvl">
-          <ac:chgData name="Corbin Ferguson" userId="34a864e2-e65e-4cb2-823c-dc28f73f0e40" providerId="ADAL" clId="{8D2D96CF-1319-4CCC-9EA9-073445628049}" dt="2026-03-16T16:13:07.664" v="1441" actId="165"/>
-          <ac:spMkLst>
-            <pc:docMk/>
-            <pc:sldMk cId="2077614573" sldId="2146848316"/>
-            <ac:spMk id="10479" creationId="{D902B22C-C8C4-FC29-FD78-C8791BD9E2CC}"/>
-          </ac:spMkLst>
-        </pc:spChg>
-        <pc:spChg chg="mod">
-          <ac:chgData name="Corbin Ferguson" userId="34a864e2-e65e-4cb2-823c-dc28f73f0e40" providerId="ADAL" clId="{8D2D96CF-1319-4CCC-9EA9-073445628049}" dt="2026-03-16T16:01:40.264" v="1371" actId="165"/>
-          <ac:spMkLst>
-            <pc:docMk/>
-            <pc:sldMk cId="2077614573" sldId="2146848316"/>
-            <ac:spMk id="10510" creationId="{2ADD0366-DE82-45B0-F168-8CD88ADFB3B6}"/>
-          </ac:spMkLst>
-        </pc:spChg>
-        <pc:spChg chg="mod">
-          <ac:chgData name="Corbin Ferguson" userId="34a864e2-e65e-4cb2-823c-dc28f73f0e40" providerId="ADAL" clId="{8D2D96CF-1319-4CCC-9EA9-073445628049}" dt="2026-03-16T16:02:03.946" v="1375" actId="165"/>
-          <ac:spMkLst>
-            <pc:docMk/>
-            <pc:sldMk cId="2077614573" sldId="2146848316"/>
-            <ac:spMk id="10530" creationId="{E5A31BEE-6EDA-EE4B-F580-37AC596BEBCC}"/>
-          </ac:spMkLst>
-        </pc:spChg>
-        <pc:spChg chg="mod">
-          <ac:chgData name="Corbin Ferguson" userId="34a864e2-e65e-4cb2-823c-dc28f73f0e40" providerId="ADAL" clId="{8D2D96CF-1319-4CCC-9EA9-073445628049}" dt="2026-03-16T16:01:40.264" v="1371" actId="165"/>
-          <ac:spMkLst>
-            <pc:docMk/>
-            <pc:sldMk cId="2077614573" sldId="2146848316"/>
-            <ac:spMk id="10586" creationId="{C440AF32-A01E-BC5A-EB6F-9F358FDE1989}"/>
-          </ac:spMkLst>
-        </pc:spChg>
-        <pc:spChg chg="mod">
-          <ac:chgData name="Corbin Ferguson" userId="34a864e2-e65e-4cb2-823c-dc28f73f0e40" providerId="ADAL" clId="{8D2D96CF-1319-4CCC-9EA9-073445628049}" dt="2026-03-16T16:02:03.946" v="1375" actId="165"/>
-          <ac:spMkLst>
-            <pc:docMk/>
-            <pc:sldMk cId="2077614573" sldId="2146848316"/>
-            <ac:spMk id="10687" creationId="{9621F235-C373-80D3-9770-B71FE923BFC5}"/>
-          </ac:spMkLst>
-        </pc:spChg>
-        <pc:spChg chg="mod">
-          <ac:chgData name="Corbin Ferguson" userId="34a864e2-e65e-4cb2-823c-dc28f73f0e40" providerId="ADAL" clId="{8D2D96CF-1319-4CCC-9EA9-073445628049}" dt="2026-03-16T16:01:40.264" v="1371" actId="165"/>
-          <ac:spMkLst>
-            <pc:docMk/>
-            <pc:sldMk cId="2077614573" sldId="2146848316"/>
-            <ac:spMk id="10740" creationId="{61B952FE-E7A4-0D04-592D-0C422FE6B368}"/>
-          </ac:spMkLst>
-        </pc:spChg>
-        <pc:spChg chg="mod">
-          <ac:chgData name="Corbin Ferguson" userId="34a864e2-e65e-4cb2-823c-dc28f73f0e40" providerId="ADAL" clId="{8D2D96CF-1319-4CCC-9EA9-073445628049}" dt="2026-03-16T16:02:03.946" v="1375" actId="165"/>
-          <ac:spMkLst>
-            <pc:docMk/>
-            <pc:sldMk cId="2077614573" sldId="2146848316"/>
-            <ac:spMk id="10759" creationId="{43DDD9A3-EB88-656E-9B37-FC8511FCDD1B}"/>
-          </ac:spMkLst>
-        </pc:spChg>
-        <pc:spChg chg="mod topLvl">
-          <ac:chgData name="Corbin Ferguson" userId="34a864e2-e65e-4cb2-823c-dc28f73f0e40" providerId="ADAL" clId="{8D2D96CF-1319-4CCC-9EA9-073445628049}" dt="2026-03-16T16:13:04.178" v="1437" actId="165"/>
-          <ac:spMkLst>
-            <pc:docMk/>
-            <pc:sldMk cId="2077614573" sldId="2146848316"/>
-            <ac:spMk id="10803" creationId="{BDF784A6-CB84-62F6-3B49-D10C2D6392ED}"/>
-          </ac:spMkLst>
-        </pc:spChg>
-        <pc:spChg chg="mod topLvl">
-          <ac:chgData name="Corbin Ferguson" userId="34a864e2-e65e-4cb2-823c-dc28f73f0e40" providerId="ADAL" clId="{8D2D96CF-1319-4CCC-9EA9-073445628049}" dt="2026-03-16T16:13:04.178" v="1437" actId="165"/>
-          <ac:spMkLst>
-            <pc:docMk/>
-            <pc:sldMk cId="2077614573" sldId="2146848316"/>
-            <ac:spMk id="10818" creationId="{BD6D1489-B3D4-696E-8DC3-0C02A6377A0C}"/>
-          </ac:spMkLst>
-        </pc:spChg>
-        <pc:spChg chg="mod topLvl">
-          <ac:chgData name="Corbin Ferguson" userId="34a864e2-e65e-4cb2-823c-dc28f73f0e40" providerId="ADAL" clId="{8D2D96CF-1319-4CCC-9EA9-073445628049}" dt="2026-03-16T16:13:04.178" v="1437" actId="165"/>
-          <ac:spMkLst>
-            <pc:docMk/>
-            <pc:sldMk cId="2077614573" sldId="2146848316"/>
-            <ac:spMk id="10820" creationId="{4E375D8D-9893-0EF9-21C5-A4FD87C2D98A}"/>
-          </ac:spMkLst>
-        </pc:spChg>
-        <pc:spChg chg="mod topLvl">
-          <ac:chgData name="Corbin Ferguson" userId="34a864e2-e65e-4cb2-823c-dc28f73f0e40" providerId="ADAL" clId="{8D2D96CF-1319-4CCC-9EA9-073445628049}" dt="2026-03-16T16:13:04.178" v="1437" actId="165"/>
-          <ac:spMkLst>
-            <pc:docMk/>
-            <pc:sldMk cId="2077614573" sldId="2146848316"/>
-            <ac:spMk id="10847" creationId="{CDB448F4-DDEA-7232-A26A-9F4C6D8EBAFB}"/>
-          </ac:spMkLst>
-        </pc:spChg>
-        <pc:spChg chg="mod">
-          <ac:chgData name="Corbin Ferguson" userId="34a864e2-e65e-4cb2-823c-dc28f73f0e40" providerId="ADAL" clId="{8D2D96CF-1319-4CCC-9EA9-073445628049}" dt="2026-03-16T16:02:03.946" v="1375" actId="165"/>
-          <ac:spMkLst>
-            <pc:docMk/>
-            <pc:sldMk cId="2077614573" sldId="2146848316"/>
-            <ac:spMk id="10849" creationId="{D706CB23-ECA8-F94E-0123-9D2D8AEEB319}"/>
-          </ac:spMkLst>
-        </pc:spChg>
-        <pc:spChg chg="mod topLvl">
-          <ac:chgData name="Corbin Ferguson" userId="34a864e2-e65e-4cb2-823c-dc28f73f0e40" providerId="ADAL" clId="{8D2D96CF-1319-4CCC-9EA9-073445628049}" dt="2026-03-16T16:13:04.178" v="1437" actId="165"/>
-          <ac:spMkLst>
-            <pc:docMk/>
-            <pc:sldMk cId="2077614573" sldId="2146848316"/>
-            <ac:spMk id="10864" creationId="{3D49FB3A-FA28-5254-0381-D659100DD293}"/>
-          </ac:spMkLst>
-        </pc:spChg>
-        <pc:spChg chg="mod topLvl">
-          <ac:chgData name="Corbin Ferguson" userId="34a864e2-e65e-4cb2-823c-dc28f73f0e40" providerId="ADAL" clId="{8D2D96CF-1319-4CCC-9EA9-073445628049}" dt="2026-03-16T16:13:04.178" v="1437" actId="165"/>
-          <ac:spMkLst>
-            <pc:docMk/>
-            <pc:sldMk cId="2077614573" sldId="2146848316"/>
-            <ac:spMk id="10882" creationId="{7E181B4E-AFDE-1988-2754-6F3E2FD335AD}"/>
-          </ac:spMkLst>
-        </pc:spChg>
-        <pc:spChg chg="mod topLvl">
-          <ac:chgData name="Corbin Ferguson" userId="34a864e2-e65e-4cb2-823c-dc28f73f0e40" providerId="ADAL" clId="{8D2D96CF-1319-4CCC-9EA9-073445628049}" dt="2026-03-16T16:13:04.178" v="1437" actId="165"/>
-          <ac:spMkLst>
-            <pc:docMk/>
-            <pc:sldMk cId="2077614573" sldId="2146848316"/>
-            <ac:spMk id="10901" creationId="{260D5BFC-8D99-2DF3-3788-EC0316444132}"/>
-          </ac:spMkLst>
-        </pc:spChg>
-        <pc:grpChg chg="add del mod modVis">
-          <ac:chgData name="Corbin Ferguson" userId="34a864e2-e65e-4cb2-823c-dc28f73f0e40" providerId="ADAL" clId="{8D2D96CF-1319-4CCC-9EA9-073445628049}" dt="2026-03-16T16:13:24.497" v="1455" actId="478"/>
-          <ac:grpSpMkLst>
-            <pc:docMk/>
-            <pc:sldMk cId="2077614573" sldId="2146848316"/>
-            <ac:grpSpMk id="14" creationId="{24BD7666-D6A4-D570-E479-D9C1E24A98D3}"/>
-          </ac:grpSpMkLst>
-        </pc:grpChg>
-        <pc:grpChg chg="mod modVis">
-          <ac:chgData name="Corbin Ferguson" userId="34a864e2-e65e-4cb2-823c-dc28f73f0e40" providerId="ADAL" clId="{8D2D96CF-1319-4CCC-9EA9-073445628049}" dt="2026-03-16T16:03:17.864" v="1394" actId="14429"/>
-          <ac:grpSpMkLst>
-            <pc:docMk/>
-            <pc:sldMk cId="2077614573" sldId="2146848316"/>
-            <ac:grpSpMk id="16" creationId="{1591C2AE-17F1-0EE1-027C-BE8C34BCE3CC}"/>
-          </ac:grpSpMkLst>
-        </pc:grpChg>
-        <pc:grpChg chg="del mod modVis">
-          <ac:chgData name="Corbin Ferguson" userId="34a864e2-e65e-4cb2-823c-dc28f73f0e40" providerId="ADAL" clId="{8D2D96CF-1319-4CCC-9EA9-073445628049}" dt="2026-03-16T16:13:38.282" v="1461" actId="478"/>
-          <ac:grpSpMkLst>
-            <pc:docMk/>
-            <pc:sldMk cId="2077614573" sldId="2146848316"/>
-            <ac:grpSpMk id="17" creationId="{3B72B237-E1BF-EE5F-0E3B-FDA8A14AE1C8}"/>
-          </ac:grpSpMkLst>
-        </pc:grpChg>
-        <pc:grpChg chg="del mod modVis">
-          <ac:chgData name="Corbin Ferguson" userId="34a864e2-e65e-4cb2-823c-dc28f73f0e40" providerId="ADAL" clId="{8D2D96CF-1319-4CCC-9EA9-073445628049}" dt="2026-03-16T16:13:38.282" v="1461" actId="478"/>
-          <ac:grpSpMkLst>
-            <pc:docMk/>
-            <pc:sldMk cId="2077614573" sldId="2146848316"/>
-            <ac:grpSpMk id="18" creationId="{75CD6B92-65FC-FE36-FC57-794EA5976853}"/>
-          </ac:grpSpMkLst>
-        </pc:grpChg>
-        <pc:grpChg chg="mod modVis">
-          <ac:chgData name="Corbin Ferguson" userId="34a864e2-e65e-4cb2-823c-dc28f73f0e40" providerId="ADAL" clId="{8D2D96CF-1319-4CCC-9EA9-073445628049}" dt="2026-03-16T16:03:23.716" v="1400" actId="14429"/>
-          <ac:grpSpMkLst>
-            <pc:docMk/>
-            <pc:sldMk cId="2077614573" sldId="2146848316"/>
-            <ac:grpSpMk id="19" creationId="{501463A7-693C-D89C-0D3F-C9AC66AA15D4}"/>
-          </ac:grpSpMkLst>
-        </pc:grpChg>
-        <pc:grpChg chg="add del">
-          <ac:chgData name="Corbin Ferguson" userId="34a864e2-e65e-4cb2-823c-dc28f73f0e40" providerId="ADAL" clId="{8D2D96CF-1319-4CCC-9EA9-073445628049}" dt="2026-03-16T16:13:01.240" v="1432" actId="478"/>
-          <ac:grpSpMkLst>
-            <pc:docMk/>
-            <pc:sldMk cId="2077614573" sldId="2146848316"/>
-            <ac:grpSpMk id="23" creationId="{77F3592F-D463-8558-91D1-AF26484A5B05}"/>
-          </ac:grpSpMkLst>
-        </pc:grpChg>
-        <pc:picChg chg="add del mod">
-          <ac:chgData name="Corbin Ferguson" userId="34a864e2-e65e-4cb2-823c-dc28f73f0e40" providerId="ADAL" clId="{8D2D96CF-1319-4CCC-9EA9-073445628049}" dt="2026-03-16T15:45:11.303" v="1349" actId="478"/>
-          <ac:picMkLst>
-            <pc:docMk/>
-            <pc:sldMk cId="2077614573" sldId="2146848316"/>
-            <ac:picMk id="5" creationId="{1CAC52FA-C254-5FF7-A91C-88C0A8842080}"/>
-          </ac:picMkLst>
-        </pc:picChg>
-        <pc:picChg chg="add del mod">
-          <ac:chgData name="Corbin Ferguson" userId="34a864e2-e65e-4cb2-823c-dc28f73f0e40" providerId="ADAL" clId="{8D2D96CF-1319-4CCC-9EA9-073445628049}" dt="2026-03-16T15:48:04.705" v="1352" actId="478"/>
-          <ac:picMkLst>
-            <pc:docMk/>
-            <pc:sldMk cId="2077614573" sldId="2146848316"/>
-            <ac:picMk id="9" creationId="{430551EE-87DD-0553-0AFE-29775E2D2392}"/>
-          </ac:picMkLst>
-        </pc:picChg>
-        <pc:picChg chg="add del mod ord">
-          <ac:chgData name="Corbin Ferguson" userId="34a864e2-e65e-4cb2-823c-dc28f73f0e40" providerId="ADAL" clId="{8D2D96CF-1319-4CCC-9EA9-073445628049}" dt="2026-03-16T16:01:51.115" v="1374" actId="338"/>
-          <ac:picMkLst>
-            <pc:docMk/>
-            <pc:sldMk cId="2077614573" sldId="2146848316"/>
-            <ac:picMk id="11" creationId="{D14058B6-AC8F-6982-F515-E572E1436816}"/>
-          </ac:picMkLst>
-        </pc:picChg>
-        <pc:picChg chg="del">
-          <ac:chgData name="Corbin Ferguson" userId="34a864e2-e65e-4cb2-823c-dc28f73f0e40" providerId="ADAL" clId="{8D2D96CF-1319-4CCC-9EA9-073445628049}" dt="2026-03-16T15:42:39.157" v="1345" actId="478"/>
-          <ac:picMkLst>
-            <pc:docMk/>
-            <pc:sldMk cId="2077614573" sldId="2146848316"/>
-            <ac:picMk id="15" creationId="{BACB85A8-B9AD-3E0D-DA82-B68BDCBBD8C9}"/>
-          </ac:picMkLst>
-        </pc:picChg>
-        <pc:picChg chg="add del mod">
-          <ac:chgData name="Corbin Ferguson" userId="34a864e2-e65e-4cb2-823c-dc28f73f0e40" providerId="ADAL" clId="{8D2D96CF-1319-4CCC-9EA9-073445628049}" dt="2026-03-16T16:15:39.561" v="1507" actId="478"/>
-          <ac:picMkLst>
-            <pc:docMk/>
-            <pc:sldMk cId="2077614573" sldId="2146848316"/>
-            <ac:picMk id="8352" creationId="{ED480CF8-327A-1146-55D3-6EEF1CB4996D}"/>
-          </ac:picMkLst>
-        </pc:picChg>
-        <pc:picChg chg="add del mod ord">
-          <ac:chgData name="Corbin Ferguson" userId="34a864e2-e65e-4cb2-823c-dc28f73f0e40" providerId="ADAL" clId="{8D2D96CF-1319-4CCC-9EA9-073445628049}" dt="2026-03-16T16:22:46.609" v="1526" actId="478"/>
-          <ac:picMkLst>
-            <pc:docMk/>
-            <pc:sldMk cId="2077614573" sldId="2146848316"/>
-            <ac:picMk id="8354" creationId="{C8A49E57-BF04-273B-0328-EA90A1EE242B}"/>
-          </ac:picMkLst>
-        </pc:picChg>
-        <pc:picChg chg="add del mod">
-          <ac:chgData name="Corbin Ferguson" userId="34a864e2-e65e-4cb2-823c-dc28f73f0e40" providerId="ADAL" clId="{8D2D96CF-1319-4CCC-9EA9-073445628049}" dt="2026-03-16T16:15:40.381" v="1509" actId="478"/>
-          <ac:picMkLst>
-            <pc:docMk/>
-            <pc:sldMk cId="2077614573" sldId="2146848316"/>
-            <ac:picMk id="8356" creationId="{48AA5230-156E-1B19-834E-65774ADBFB8C}"/>
-          </ac:picMkLst>
-        </pc:picChg>
-        <pc:picChg chg="add del mod ord modCrop">
-          <ac:chgData name="Corbin Ferguson" userId="34a864e2-e65e-4cb2-823c-dc28f73f0e40" providerId="ADAL" clId="{8D2D96CF-1319-4CCC-9EA9-073445628049}" dt="2026-03-16T16:38:59.731" v="1543" actId="478"/>
-          <ac:picMkLst>
-            <pc:docMk/>
-            <pc:sldMk cId="2077614573" sldId="2146848316"/>
-            <ac:picMk id="8358" creationId="{16C12B4B-667C-C698-8AB7-6A7EAEC39E2E}"/>
-          </ac:picMkLst>
-        </pc:picChg>
-        <pc:picChg chg="add del mod ord">
-          <ac:chgData name="Corbin Ferguson" userId="34a864e2-e65e-4cb2-823c-dc28f73f0e40" providerId="ADAL" clId="{8D2D96CF-1319-4CCC-9EA9-073445628049}" dt="2026-03-16T16:45:51.625" v="1557" actId="478"/>
-          <ac:picMkLst>
-            <pc:docMk/>
-            <pc:sldMk cId="2077614573" sldId="2146848316"/>
-            <ac:picMk id="8360" creationId="{AA1DB74E-7D0E-154A-067C-B10A6CA3976F}"/>
-          </ac:picMkLst>
-        </pc:picChg>
-        <pc:picChg chg="add del mod ord">
-          <ac:chgData name="Corbin Ferguson" userId="34a864e2-e65e-4cb2-823c-dc28f73f0e40" providerId="ADAL" clId="{8D2D96CF-1319-4CCC-9EA9-073445628049}" dt="2026-03-16T17:39:05.796" v="1563" actId="478"/>
-          <ac:picMkLst>
-            <pc:docMk/>
-            <pc:sldMk cId="2077614573" sldId="2146848316"/>
-            <ac:picMk id="8362" creationId="{5B32580E-8B7E-FCBF-145C-131D2AA75C68}"/>
-          </ac:picMkLst>
-        </pc:picChg>
-        <pc:picChg chg="add mod">
-          <ac:chgData name="Corbin Ferguson" userId="34a864e2-e65e-4cb2-823c-dc28f73f0e40" providerId="ADAL" clId="{8D2D96CF-1319-4CCC-9EA9-073445628049}" dt="2026-03-16T17:39:08.133" v="1564"/>
-          <ac:picMkLst>
-            <pc:docMk/>
-            <pc:sldMk cId="2077614573" sldId="2146848316"/>
-            <ac:picMk id="8364" creationId="{619C7DB7-7434-0284-720A-6D16CC9C0D27}"/>
-          </ac:picMkLst>
-        </pc:picChg>
         <pc:picChg chg="add mod ord">
           <ac:chgData name="Corbin Ferguson" userId="34a864e2-e65e-4cb2-823c-dc28f73f0e40" providerId="ADAL" clId="{8D2D96CF-1319-4CCC-9EA9-073445628049}" dt="2026-03-16T17:39:26.042" v="1566" actId="26606"/>
           <ac:picMkLst>
@@ -1281,65 +532,9 @@
             <ac:picMk id="8366" creationId="{60AE9E24-9AB4-5014-B6BD-6F056F5807BA}"/>
           </ac:picMkLst>
         </pc:picChg>
-        <pc:picChg chg="mod modVis">
-          <ac:chgData name="Corbin Ferguson" userId="34a864e2-e65e-4cb2-823c-dc28f73f0e40" providerId="ADAL" clId="{8D2D96CF-1319-4CCC-9EA9-073445628049}" dt="2026-03-16T16:02:36.808" v="1385" actId="14429"/>
-          <ac:picMkLst>
-            <pc:docMk/>
-            <pc:sldMk cId="2077614573" sldId="2146848316"/>
-            <ac:picMk id="8369" creationId="{1432331A-ED63-06D9-B692-FAB1A42D7193}"/>
-          </ac:picMkLst>
-        </pc:picChg>
-        <pc:picChg chg="mod modVis">
-          <ac:chgData name="Corbin Ferguson" userId="34a864e2-e65e-4cb2-823c-dc28f73f0e40" providerId="ADAL" clId="{8D2D96CF-1319-4CCC-9EA9-073445628049}" dt="2026-03-16T16:03:39.595" v="1410" actId="14429"/>
-          <ac:picMkLst>
-            <pc:docMk/>
-            <pc:sldMk cId="2077614573" sldId="2146848316"/>
-            <ac:picMk id="9150" creationId="{6A9C2A39-93CA-0897-20FA-17DB258118EA}"/>
-          </ac:picMkLst>
-        </pc:picChg>
-        <pc:picChg chg="mod modVis">
-          <ac:chgData name="Corbin Ferguson" userId="34a864e2-e65e-4cb2-823c-dc28f73f0e40" providerId="ADAL" clId="{8D2D96CF-1319-4CCC-9EA9-073445628049}" dt="2026-03-16T16:03:38.213" v="1408" actId="14429"/>
-          <ac:picMkLst>
-            <pc:docMk/>
-            <pc:sldMk cId="2077614573" sldId="2146848316"/>
-            <ac:picMk id="9151" creationId="{1CE7A485-6D52-9B7E-BB0D-AC43B0B8B90B}"/>
-          </ac:picMkLst>
-        </pc:picChg>
-        <pc:picChg chg="del">
-          <ac:chgData name="Corbin Ferguson" userId="34a864e2-e65e-4cb2-823c-dc28f73f0e40" providerId="ADAL" clId="{8D2D96CF-1319-4CCC-9EA9-073445628049}" dt="2026-03-16T16:13:38.282" v="1461" actId="478"/>
-          <ac:picMkLst>
-            <pc:docMk/>
-            <pc:sldMk cId="2077614573" sldId="2146848316"/>
-            <ac:picMk id="10119" creationId="{DA93CEAA-2052-B167-8E52-151AAB275CE4}"/>
-          </ac:picMkLst>
-        </pc:picChg>
-        <pc:picChg chg="del">
-          <ac:chgData name="Corbin Ferguson" userId="34a864e2-e65e-4cb2-823c-dc28f73f0e40" providerId="ADAL" clId="{8D2D96CF-1319-4CCC-9EA9-073445628049}" dt="2026-03-16T16:13:38.282" v="1461" actId="478"/>
-          <ac:picMkLst>
-            <pc:docMk/>
-            <pc:sldMk cId="2077614573" sldId="2146848316"/>
-            <ac:picMk id="10120" creationId="{8A73F059-DDA2-3BEC-5638-7DA80C4F1400}"/>
-          </ac:picMkLst>
-        </pc:picChg>
-        <pc:picChg chg="add del mod">
-          <ac:chgData name="Corbin Ferguson" userId="34a864e2-e65e-4cb2-823c-dc28f73f0e40" providerId="ADAL" clId="{8D2D96CF-1319-4CCC-9EA9-073445628049}" dt="2026-03-16T16:13:02.319" v="1435" actId="22"/>
-          <ac:picMkLst>
-            <pc:docMk/>
-            <pc:sldMk cId="2077614573" sldId="2146848316"/>
-            <ac:picMk id="10908" creationId="{5BBDBB99-399A-3E78-8D76-C542D48741AD}"/>
-          </ac:picMkLst>
-        </pc:picChg>
-        <pc:picChg chg="add del mod">
-          <ac:chgData name="Corbin Ferguson" userId="34a864e2-e65e-4cb2-823c-dc28f73f0e40" providerId="ADAL" clId="{8D2D96CF-1319-4CCC-9EA9-073445628049}" dt="2026-03-16T16:15:39.901" v="1508" actId="478"/>
-          <ac:picMkLst>
-            <pc:docMk/>
-            <pc:sldMk cId="2077614573" sldId="2146848316"/>
-            <ac:picMk id="10910" creationId="{9D937817-7381-1FE2-843B-1E01F2130801}"/>
-          </ac:picMkLst>
-        </pc:picChg>
       </pc:sldChg>
-      <pc:sldChg chg="addSp delSp modSp add mod">
-        <pc:chgData name="Corbin Ferguson" userId="34a864e2-e65e-4cb2-823c-dc28f73f0e40" providerId="ADAL" clId="{8D2D96CF-1319-4CCC-9EA9-073445628049}" dt="2026-03-16T16:46:09.342" v="1562" actId="26606"/>
+      <pc:sldChg chg="addSp delSp modSp add del mod">
+        <pc:chgData name="Corbin Ferguson" userId="34a864e2-e65e-4cb2-823c-dc28f73f0e40" providerId="ADAL" clId="{8D2D96CF-1319-4CCC-9EA9-073445628049}" dt="2026-03-19T14:13:06.763" v="2386" actId="2696"/>
         <pc:sldMkLst>
           <pc:docMk/>
           <pc:sldMk cId="1692918807" sldId="2146848317"/>
@@ -1352,52 +547,12 @@
             <ac:spMk id="2" creationId="{5EBCB58C-1369-EDD7-5D5E-7C1E1415DB2E}"/>
           </ac:spMkLst>
         </pc:spChg>
-        <pc:picChg chg="add del mod ord">
-          <ac:chgData name="Corbin Ferguson" userId="34a864e2-e65e-4cb2-823c-dc28f73f0e40" providerId="ADAL" clId="{8D2D96CF-1319-4CCC-9EA9-073445628049}" dt="2026-03-16T16:46:03.814" v="1560" actId="478"/>
-          <ac:picMkLst>
-            <pc:docMk/>
-            <pc:sldMk cId="1692918807" sldId="2146848317"/>
-            <ac:picMk id="5" creationId="{3B859A28-2ACE-A4B7-DEC7-316954D7B566}"/>
-          </ac:picMkLst>
-        </pc:picChg>
         <pc:picChg chg="add mod ord">
           <ac:chgData name="Corbin Ferguson" userId="34a864e2-e65e-4cb2-823c-dc28f73f0e40" providerId="ADAL" clId="{8D2D96CF-1319-4CCC-9EA9-073445628049}" dt="2026-03-16T16:46:09.342" v="1562" actId="26606"/>
           <ac:picMkLst>
             <pc:docMk/>
             <pc:sldMk cId="1692918807" sldId="2146848317"/>
             <ac:picMk id="9" creationId="{A889D74E-A641-8FCA-9F55-93231CDB546D}"/>
-          </ac:picMkLst>
-        </pc:picChg>
-        <pc:picChg chg="del mod">
-          <ac:chgData name="Corbin Ferguson" userId="34a864e2-e65e-4cb2-823c-dc28f73f0e40" providerId="ADAL" clId="{8D2D96CF-1319-4CCC-9EA9-073445628049}" dt="2026-03-16T16:42:30.470" v="1553" actId="478"/>
-          <ac:picMkLst>
-            <pc:docMk/>
-            <pc:sldMk cId="1692918807" sldId="2146848317"/>
-            <ac:picMk id="8352" creationId="{80F05C8E-9631-A510-8677-5DD7385BC4AE}"/>
-          </ac:picMkLst>
-        </pc:picChg>
-        <pc:picChg chg="del">
-          <ac:chgData name="Corbin Ferguson" userId="34a864e2-e65e-4cb2-823c-dc28f73f0e40" providerId="ADAL" clId="{8D2D96CF-1319-4CCC-9EA9-073445628049}" dt="2026-03-16T16:15:22.910" v="1499" actId="478"/>
-          <ac:picMkLst>
-            <pc:docMk/>
-            <pc:sldMk cId="1692918807" sldId="2146848317"/>
-            <ac:picMk id="8354" creationId="{E90019A8-76BA-2ED0-32B4-272D74BDE709}"/>
-          </ac:picMkLst>
-        </pc:picChg>
-        <pc:picChg chg="del mod">
-          <ac:chgData name="Corbin Ferguson" userId="34a864e2-e65e-4cb2-823c-dc28f73f0e40" providerId="ADAL" clId="{8D2D96CF-1319-4CCC-9EA9-073445628049}" dt="2026-03-16T16:42:30.820" v="1554" actId="478"/>
-          <ac:picMkLst>
-            <pc:docMk/>
-            <pc:sldMk cId="1692918807" sldId="2146848317"/>
-            <ac:picMk id="8356" creationId="{D199DA8A-A808-1059-BF00-DD0A3C6CA781}"/>
-          </ac:picMkLst>
-        </pc:picChg>
-        <pc:picChg chg="del mod">
-          <ac:chgData name="Corbin Ferguson" userId="34a864e2-e65e-4cb2-823c-dc28f73f0e40" providerId="ADAL" clId="{8D2D96CF-1319-4CCC-9EA9-073445628049}" dt="2026-03-16T16:42:30.138" v="1552" actId="478"/>
-          <ac:picMkLst>
-            <pc:docMk/>
-            <pc:sldMk cId="1692918807" sldId="2146848317"/>
-            <ac:picMk id="10910" creationId="{5EB4AF2A-E1DF-5181-7810-0E4B05E08A25}"/>
           </ac:picMkLst>
         </pc:picChg>
       </pc:sldChg>
@@ -1415,22 +570,6 @@
             <ac:spMk id="2" creationId="{C6FD6CC9-4051-8C8E-6F53-6558CC8D4A8F}"/>
           </ac:spMkLst>
         </pc:spChg>
-        <pc:spChg chg="del">
-          <ac:chgData name="Corbin Ferguson" userId="34a864e2-e65e-4cb2-823c-dc28f73f0e40" providerId="ADAL" clId="{8D2D96CF-1319-4CCC-9EA9-073445628049}" dt="2026-03-16T20:05:05.817" v="1598" actId="478"/>
-          <ac:spMkLst>
-            <pc:docMk/>
-            <pc:sldMk cId="3831013115" sldId="2146848318"/>
-            <ac:spMk id="3" creationId="{FA7BB05D-74E8-FD1A-F596-C0FBAB1002C2}"/>
-          </ac:spMkLst>
-        </pc:spChg>
-        <pc:spChg chg="add del mod">
-          <ac:chgData name="Corbin Ferguson" userId="34a864e2-e65e-4cb2-823c-dc28f73f0e40" providerId="ADAL" clId="{8D2D96CF-1319-4CCC-9EA9-073445628049}" dt="2026-03-16T20:38:42.029" v="1914" actId="478"/>
-          <ac:spMkLst>
-            <pc:docMk/>
-            <pc:sldMk cId="3831013115" sldId="2146848318"/>
-            <ac:spMk id="9" creationId="{A9535BEC-4949-27A6-BC75-04F113251855}"/>
-          </ac:spMkLst>
-        </pc:spChg>
         <pc:spChg chg="add mod">
           <ac:chgData name="Corbin Ferguson" userId="34a864e2-e65e-4cb2-823c-dc28f73f0e40" providerId="ADAL" clId="{8D2D96CF-1319-4CCC-9EA9-073445628049}" dt="2026-03-16T20:58:06.345" v="2029" actId="1035"/>
           <ac:spMkLst>
@@ -1439,22 +578,6 @@
             <ac:spMk id="11" creationId="{C63E6493-7963-69F9-0E49-FBFB34C98CC6}"/>
           </ac:spMkLst>
         </pc:spChg>
-        <pc:picChg chg="add mod">
-          <ac:chgData name="Corbin Ferguson" userId="34a864e2-e65e-4cb2-823c-dc28f73f0e40" providerId="ADAL" clId="{8D2D96CF-1319-4CCC-9EA9-073445628049}" dt="2026-03-16T20:34:20.415" v="1854"/>
-          <ac:picMkLst>
-            <pc:docMk/>
-            <pc:sldMk cId="3831013115" sldId="2146848318"/>
-            <ac:picMk id="5" creationId="{D3A01971-F695-BDED-3EBA-C707EA559E2A}"/>
-          </ac:picMkLst>
-        </pc:picChg>
-        <pc:picChg chg="add del mod ord modVis">
-          <ac:chgData name="Corbin Ferguson" userId="34a864e2-e65e-4cb2-823c-dc28f73f0e40" providerId="ADAL" clId="{8D2D96CF-1319-4CCC-9EA9-073445628049}" dt="2026-03-16T20:48:04.603" v="1961" actId="478"/>
-          <ac:picMkLst>
-            <pc:docMk/>
-            <pc:sldMk cId="3831013115" sldId="2146848318"/>
-            <ac:picMk id="6" creationId="{A90F5D03-9F6A-ED0B-1CF7-9BD05CC11130}"/>
-          </ac:picMkLst>
-        </pc:picChg>
         <pc:picChg chg="add mod ord modCrop">
           <ac:chgData name="Corbin Ferguson" userId="34a864e2-e65e-4cb2-823c-dc28f73f0e40" providerId="ADAL" clId="{8D2D96CF-1319-4CCC-9EA9-073445628049}" dt="2026-03-16T20:54:25.304" v="2000" actId="14100"/>
           <ac:picMkLst>
@@ -1473,27 +596,19 @@
         </pc:picChg>
       </pc:sldChg>
       <pc:sldChg chg="addSp delSp modSp add mod ord modAnim">
-        <pc:chgData name="Corbin Ferguson" userId="34a864e2-e65e-4cb2-823c-dc28f73f0e40" providerId="ADAL" clId="{8D2D96CF-1319-4CCC-9EA9-073445628049}" dt="2026-03-16T20:28:00.671" v="1805"/>
+        <pc:chgData name="Corbin Ferguson" userId="34a864e2-e65e-4cb2-823c-dc28f73f0e40" providerId="ADAL" clId="{8D2D96CF-1319-4CCC-9EA9-073445628049}" dt="2026-03-19T13:40:03.956" v="2081" actId="14861"/>
         <pc:sldMkLst>
           <pc:docMk/>
           <pc:sldMk cId="3493033771" sldId="2146848319"/>
         </pc:sldMkLst>
         <pc:spChg chg="mod">
-          <ac:chgData name="Corbin Ferguson" userId="34a864e2-e65e-4cb2-823c-dc28f73f0e40" providerId="ADAL" clId="{8D2D96CF-1319-4CCC-9EA9-073445628049}" dt="2026-03-16T20:18:32.158" v="1713" actId="1076"/>
+          <ac:chgData name="Corbin Ferguson" userId="34a864e2-e65e-4cb2-823c-dc28f73f0e40" providerId="ADAL" clId="{8D2D96CF-1319-4CCC-9EA9-073445628049}" dt="2026-03-19T13:40:03.956" v="2081" actId="14861"/>
           <ac:spMkLst>
             <pc:docMk/>
             <pc:sldMk cId="3493033771" sldId="2146848319"/>
             <ac:spMk id="3" creationId="{ED261959-73BE-AC8F-A9DA-6CAEF5E9BB95}"/>
           </ac:spMkLst>
         </pc:spChg>
-        <pc:picChg chg="add del mod">
-          <ac:chgData name="Corbin Ferguson" userId="34a864e2-e65e-4cb2-823c-dc28f73f0e40" providerId="ADAL" clId="{8D2D96CF-1319-4CCC-9EA9-073445628049}" dt="2026-03-16T20:16:25.287" v="1699" actId="22"/>
-          <ac:picMkLst>
-            <pc:docMk/>
-            <pc:sldMk cId="3493033771" sldId="2146848319"/>
-            <ac:picMk id="6" creationId="{1B800A62-C9CF-F197-C3C4-1B88AD96D848}"/>
-          </ac:picMkLst>
-        </pc:picChg>
         <pc:picChg chg="add del">
           <ac:chgData name="Corbin Ferguson" userId="34a864e2-e65e-4cb2-823c-dc28f73f0e40" providerId="ADAL" clId="{8D2D96CF-1319-4CCC-9EA9-073445628049}" dt="2026-03-16T20:16:25.821" v="1700" actId="478"/>
           <ac:picMkLst>
@@ -1511,144 +626,26 @@
           </ac:picMkLst>
         </pc:picChg>
       </pc:sldChg>
-      <pc:sldChg chg="addSp delSp modSp new del mod modTransition modClrScheme chgLayout">
-        <pc:chgData name="Corbin Ferguson" userId="34a864e2-e65e-4cb2-823c-dc28f73f0e40" providerId="ADAL" clId="{8D2D96CF-1319-4CCC-9EA9-073445628049}" dt="2026-03-16T20:23:33.104" v="1770" actId="2696"/>
-        <pc:sldMkLst>
-          <pc:docMk/>
-          <pc:sldMk cId="1273764086" sldId="2146848320"/>
-        </pc:sldMkLst>
-        <pc:spChg chg="mod">
-          <ac:chgData name="Corbin Ferguson" userId="34a864e2-e65e-4cb2-823c-dc28f73f0e40" providerId="ADAL" clId="{8D2D96CF-1319-4CCC-9EA9-073445628049}" dt="2026-03-16T20:08:58.922" v="1661" actId="20577"/>
-          <ac:spMkLst>
-            <pc:docMk/>
-            <pc:sldMk cId="1273764086" sldId="2146848320"/>
-            <ac:spMk id="2" creationId="{3FF556C6-C6F3-4F87-F431-44AF492D1490}"/>
-          </ac:spMkLst>
-        </pc:spChg>
-        <pc:spChg chg="del">
-          <ac:chgData name="Corbin Ferguson" userId="34a864e2-e65e-4cb2-823c-dc28f73f0e40" providerId="ADAL" clId="{8D2D96CF-1319-4CCC-9EA9-073445628049}" dt="2026-03-16T20:07:56.499" v="1635" actId="478"/>
-          <ac:spMkLst>
-            <pc:docMk/>
-            <pc:sldMk cId="1273764086" sldId="2146848320"/>
-            <ac:spMk id="3" creationId="{1CDC32B6-E4A1-267F-8C8F-73F879CA15C1}"/>
-          </ac:spMkLst>
-        </pc:spChg>
-        <pc:spChg chg="mod">
-          <ac:chgData name="Corbin Ferguson" userId="34a864e2-e65e-4cb2-823c-dc28f73f0e40" providerId="ADAL" clId="{8D2D96CF-1319-4CCC-9EA9-073445628049}" dt="2026-03-16T20:08:53.199" v="1652" actId="26606"/>
-          <ac:spMkLst>
-            <pc:docMk/>
-            <pc:sldMk cId="1273764086" sldId="2146848320"/>
-            <ac:spMk id="4" creationId="{CC58F1BF-F4DC-9174-D688-5197602569A5}"/>
-          </ac:spMkLst>
-        </pc:spChg>
-        <pc:spChg chg="mod">
-          <ac:chgData name="Corbin Ferguson" userId="34a864e2-e65e-4cb2-823c-dc28f73f0e40" providerId="ADAL" clId="{8D2D96CF-1319-4CCC-9EA9-073445628049}" dt="2026-03-16T20:08:53.199" v="1652" actId="26606"/>
-          <ac:spMkLst>
-            <pc:docMk/>
-            <pc:sldMk cId="1273764086" sldId="2146848320"/>
-            <ac:spMk id="5" creationId="{C177D47D-26ED-1097-B0B0-8511A0373FCF}"/>
-          </ac:spMkLst>
-        </pc:spChg>
-        <pc:spChg chg="mod">
-          <ac:chgData name="Corbin Ferguson" userId="34a864e2-e65e-4cb2-823c-dc28f73f0e40" providerId="ADAL" clId="{8D2D96CF-1319-4CCC-9EA9-073445628049}" dt="2026-03-16T20:08:53.199" v="1652" actId="26606"/>
-          <ac:spMkLst>
-            <pc:docMk/>
-            <pc:sldMk cId="1273764086" sldId="2146848320"/>
-            <ac:spMk id="6" creationId="{BD2E2879-AE0A-BC28-AA74-F77010345B5C}"/>
-          </ac:spMkLst>
-        </pc:spChg>
-        <pc:spChg chg="del">
-          <ac:chgData name="Corbin Ferguson" userId="34a864e2-e65e-4cb2-823c-dc28f73f0e40" providerId="ADAL" clId="{8D2D96CF-1319-4CCC-9EA9-073445628049}" dt="2026-03-16T20:07:55.485" v="1634" actId="478"/>
-          <ac:spMkLst>
-            <pc:docMk/>
-            <pc:sldMk cId="1273764086" sldId="2146848320"/>
-            <ac:spMk id="7" creationId="{E2E2C671-C5B3-D45A-4830-7022C8A74ABB}"/>
-          </ac:spMkLst>
-        </pc:spChg>
-        <pc:picChg chg="add del mod ord">
-          <ac:chgData name="Corbin Ferguson" userId="34a864e2-e65e-4cb2-823c-dc28f73f0e40" providerId="ADAL" clId="{8D2D96CF-1319-4CCC-9EA9-073445628049}" dt="2026-03-16T20:23:30.407" v="1769" actId="21"/>
-          <ac:picMkLst>
-            <pc:docMk/>
-            <pc:sldMk cId="1273764086" sldId="2146848320"/>
-            <ac:picMk id="9" creationId="{6A2D6E58-7219-5B27-BB56-A33060C076CA}"/>
-          </ac:picMkLst>
-        </pc:picChg>
-      </pc:sldChg>
-      <pc:sldChg chg="addSp delSp modSp add del mod ord modTransition delAnim">
-        <pc:chgData name="Corbin Ferguson" userId="34a864e2-e65e-4cb2-823c-dc28f73f0e40" providerId="ADAL" clId="{8D2D96CF-1319-4CCC-9EA9-073445628049}" dt="2026-03-16T20:31:23.737" v="1820" actId="2696"/>
-        <pc:sldMkLst>
-          <pc:docMk/>
-          <pc:sldMk cId="3845007870" sldId="2146848321"/>
-        </pc:sldMkLst>
-        <pc:spChg chg="del">
-          <ac:chgData name="Corbin Ferguson" userId="34a864e2-e65e-4cb2-823c-dc28f73f0e40" providerId="ADAL" clId="{8D2D96CF-1319-4CCC-9EA9-073445628049}" dt="2026-03-16T20:19:36.941" v="1721" actId="478"/>
-          <ac:spMkLst>
-            <pc:docMk/>
-            <pc:sldMk cId="3845007870" sldId="2146848321"/>
-            <ac:spMk id="3" creationId="{5BBD0DA6-64AC-B620-3CCA-F230B73FC9EC}"/>
-          </ac:spMkLst>
-        </pc:spChg>
-        <pc:picChg chg="add del mod">
-          <ac:chgData name="Corbin Ferguson" userId="34a864e2-e65e-4cb2-823c-dc28f73f0e40" providerId="ADAL" clId="{8D2D96CF-1319-4CCC-9EA9-073445628049}" dt="2026-03-16T20:26:07.031" v="1785" actId="478"/>
-          <ac:picMkLst>
-            <pc:docMk/>
-            <pc:sldMk cId="3845007870" sldId="2146848321"/>
-            <ac:picMk id="5" creationId="{906F1959-4BEB-93A8-2053-028869BA4669}"/>
-          </ac:picMkLst>
-        </pc:picChg>
-        <pc:picChg chg="del">
-          <ac:chgData name="Corbin Ferguson" userId="34a864e2-e65e-4cb2-823c-dc28f73f0e40" providerId="ADAL" clId="{8D2D96CF-1319-4CCC-9EA9-073445628049}" dt="2026-03-16T20:22:53.685" v="1767" actId="478"/>
-          <ac:picMkLst>
-            <pc:docMk/>
-            <pc:sldMk cId="3845007870" sldId="2146848321"/>
-            <ac:picMk id="15" creationId="{AFE6C1CC-E254-65E5-1018-8A1D8CE76641}"/>
-          </ac:picMkLst>
-        </pc:picChg>
-        <pc:picChg chg="mod">
-          <ac:chgData name="Corbin Ferguson" userId="34a864e2-e65e-4cb2-823c-dc28f73f0e40" providerId="ADAL" clId="{8D2D96CF-1319-4CCC-9EA9-073445628049}" dt="2026-03-16T20:30:33.896" v="1817" actId="14100"/>
-          <ac:picMkLst>
-            <pc:docMk/>
-            <pc:sldMk cId="3845007870" sldId="2146848321"/>
-            <ac:picMk id="10242" creationId="{CAFB99A3-B0BD-025E-F01B-2778A840C59D}"/>
-          </ac:picMkLst>
-        </pc:picChg>
-      </pc:sldChg>
       <pc:sldChg chg="addSp delSp modSp add mod modTransition modAnim">
-        <pc:chgData name="Corbin Ferguson" userId="34a864e2-e65e-4cb2-823c-dc28f73f0e40" providerId="ADAL" clId="{8D2D96CF-1319-4CCC-9EA9-073445628049}" dt="2026-03-16T20:36:46.428" v="1904"/>
+        <pc:chgData name="Corbin Ferguson" userId="34a864e2-e65e-4cb2-823c-dc28f73f0e40" providerId="ADAL" clId="{8D2D96CF-1319-4CCC-9EA9-073445628049}" dt="2026-03-19T13:40:16.753" v="2084" actId="14861"/>
         <pc:sldMkLst>
           <pc:docMk/>
           <pc:sldMk cId="462985986" sldId="2146848322"/>
         </pc:sldMkLst>
         <pc:spChg chg="add mod ord">
-          <ac:chgData name="Corbin Ferguson" userId="34a864e2-e65e-4cb2-823c-dc28f73f0e40" providerId="ADAL" clId="{8D2D96CF-1319-4CCC-9EA9-073445628049}" dt="2026-03-16T20:33:20.740" v="1836" actId="13244"/>
+          <ac:chgData name="Corbin Ferguson" userId="34a864e2-e65e-4cb2-823c-dc28f73f0e40" providerId="ADAL" clId="{8D2D96CF-1319-4CCC-9EA9-073445628049}" dt="2026-03-19T13:40:16.753" v="2084" actId="14861"/>
           <ac:spMkLst>
             <pc:docMk/>
             <pc:sldMk cId="462985986" sldId="2146848322"/>
             <ac:spMk id="6" creationId="{F97ADB1C-4CC1-050A-F7E0-C59FABA26D8C}"/>
           </ac:spMkLst>
         </pc:spChg>
-        <pc:picChg chg="add del mod">
-          <ac:chgData name="Corbin Ferguson" userId="34a864e2-e65e-4cb2-823c-dc28f73f0e40" providerId="ADAL" clId="{8D2D96CF-1319-4CCC-9EA9-073445628049}" dt="2026-03-16T20:24:44.714" v="1777" actId="478"/>
-          <ac:picMkLst>
-            <pc:docMk/>
-            <pc:sldMk cId="462985986" sldId="2146848322"/>
-            <ac:picMk id="3" creationId="{5EE884B0-0BCB-EC26-9B66-4AE2AEFF4D8A}"/>
-          </ac:picMkLst>
-        </pc:picChg>
         <pc:picChg chg="add mod modVis">
           <ac:chgData name="Corbin Ferguson" userId="34a864e2-e65e-4cb2-823c-dc28f73f0e40" providerId="ADAL" clId="{8D2D96CF-1319-4CCC-9EA9-073445628049}" dt="2026-03-16T20:36:12.514" v="1900" actId="14429"/>
           <ac:picMkLst>
             <pc:docMk/>
             <pc:sldMk cId="462985986" sldId="2146848322"/>
             <ac:picMk id="5" creationId="{771B8AC6-311F-3E75-33C2-615158918A8C}"/>
-          </ac:picMkLst>
-        </pc:picChg>
-        <pc:picChg chg="add del mod">
-          <ac:chgData name="Corbin Ferguson" userId="34a864e2-e65e-4cb2-823c-dc28f73f0e40" providerId="ADAL" clId="{8D2D96CF-1319-4CCC-9EA9-073445628049}" dt="2026-03-16T20:26:02.606" v="1783" actId="478"/>
-          <ac:picMkLst>
-            <pc:docMk/>
-            <pc:sldMk cId="462985986" sldId="2146848322"/>
-            <ac:picMk id="9" creationId="{6A2D6E58-7219-5B27-BB56-A33060C076CA}"/>
           </ac:picMkLst>
         </pc:picChg>
         <pc:picChg chg="add mod modCrop">
@@ -1674,22 +671,6 @@
           <pc:docMk/>
           <pc:sldMk cId="1670292182" sldId="2146848323"/>
         </pc:sldMkLst>
-        <pc:spChg chg="add del">
-          <ac:chgData name="Corbin Ferguson" userId="34a864e2-e65e-4cb2-823c-dc28f73f0e40" providerId="ADAL" clId="{8D2D96CF-1319-4CCC-9EA9-073445628049}" dt="2026-03-16T20:40:01.898" v="1920" actId="22"/>
-          <ac:spMkLst>
-            <pc:docMk/>
-            <pc:sldMk cId="1670292182" sldId="2146848323"/>
-            <ac:spMk id="5" creationId="{5DD8D43C-2C75-F7BC-6ABC-1D0F71EF9248}"/>
-          </ac:spMkLst>
-        </pc:spChg>
-        <pc:spChg chg="add del">
-          <ac:chgData name="Corbin Ferguson" userId="34a864e2-e65e-4cb2-823c-dc28f73f0e40" providerId="ADAL" clId="{8D2D96CF-1319-4CCC-9EA9-073445628049}" dt="2026-03-16T20:40:07.307" v="1922" actId="22"/>
-          <ac:spMkLst>
-            <pc:docMk/>
-            <pc:sldMk cId="1670292182" sldId="2146848323"/>
-            <ac:spMk id="10" creationId="{8937C66F-EC84-6131-1D2B-76A6DB09A7BF}"/>
-          </ac:spMkLst>
-        </pc:spChg>
         <pc:spChg chg="add mod">
           <ac:chgData name="Corbin Ferguson" userId="34a864e2-e65e-4cb2-823c-dc28f73f0e40" providerId="ADAL" clId="{8D2D96CF-1319-4CCC-9EA9-073445628049}" dt="2026-03-16T20:44:01.003" v="1951" actId="207"/>
           <ac:spMkLst>
@@ -1698,36 +679,12 @@
             <ac:spMk id="11" creationId="{BBDD576A-A414-9915-960B-C7192C1A13D8}"/>
           </ac:spMkLst>
         </pc:spChg>
-        <pc:spChg chg="add del mod">
-          <ac:chgData name="Corbin Ferguson" userId="34a864e2-e65e-4cb2-823c-dc28f73f0e40" providerId="ADAL" clId="{8D2D96CF-1319-4CCC-9EA9-073445628049}" dt="2026-03-16T20:52:37.621" v="1985" actId="478"/>
-          <ac:spMkLst>
-            <pc:docMk/>
-            <pc:sldMk cId="1670292182" sldId="2146848323"/>
-            <ac:spMk id="12" creationId="{CC8204E8-E13C-33EB-CF24-007E48F2438C}"/>
-          </ac:spMkLst>
-        </pc:spChg>
         <pc:picChg chg="mod ord">
           <ac:chgData name="Corbin Ferguson" userId="34a864e2-e65e-4cb2-823c-dc28f73f0e40" providerId="ADAL" clId="{8D2D96CF-1319-4CCC-9EA9-073445628049}" dt="2026-03-16T20:42:31.830" v="1945" actId="13244"/>
           <ac:picMkLst>
             <pc:docMk/>
             <pc:sldMk cId="1670292182" sldId="2146848323"/>
             <ac:picMk id="6" creationId="{BF17B26E-CEBE-31E2-A928-A78B0BE175DA}"/>
-          </ac:picMkLst>
-        </pc:picChg>
-        <pc:picChg chg="del">
-          <ac:chgData name="Corbin Ferguson" userId="34a864e2-e65e-4cb2-823c-dc28f73f0e40" providerId="ADAL" clId="{8D2D96CF-1319-4CCC-9EA9-073445628049}" dt="2026-03-16T20:39:55.286" v="1918" actId="478"/>
-          <ac:picMkLst>
-            <pc:docMk/>
-            <pc:sldMk cId="1670292182" sldId="2146848323"/>
-            <ac:picMk id="15" creationId="{5CF8EE59-9274-2241-AA34-8B93965B0C2A}"/>
-          </ac:picMkLst>
-        </pc:picChg>
-        <pc:picChg chg="add del mod">
-          <ac:chgData name="Corbin Ferguson" userId="34a864e2-e65e-4cb2-823c-dc28f73f0e40" providerId="ADAL" clId="{8D2D96CF-1319-4CCC-9EA9-073445628049}" dt="2026-03-16T20:42:00.476" v="1934" actId="478"/>
-          <ac:picMkLst>
-            <pc:docMk/>
-            <pc:sldMk cId="1670292182" sldId="2146848323"/>
-            <ac:picMk id="11266" creationId="{917D32E0-211F-D44A-4E32-8791EF34FFEE}"/>
           </ac:picMkLst>
         </pc:picChg>
         <pc:picChg chg="add mod modCrop">
@@ -1753,28 +710,12 @@
             <ac:spMk id="6" creationId="{A38A10BF-2126-40C7-FAE5-7BBF6C867EF1}"/>
           </ac:spMkLst>
         </pc:spChg>
-        <pc:spChg chg="del">
-          <ac:chgData name="Corbin Ferguson" userId="34a864e2-e65e-4cb2-823c-dc28f73f0e40" providerId="ADAL" clId="{8D2D96CF-1319-4CCC-9EA9-073445628049}" dt="2026-03-16T20:55:50.301" v="2006" actId="478"/>
-          <ac:spMkLst>
-            <pc:docMk/>
-            <pc:sldMk cId="2455060311" sldId="2146848324"/>
-            <ac:spMk id="11" creationId="{9C0ECDBE-0763-C450-3DCA-C286F0A0A27A}"/>
-          </ac:spMkLst>
-        </pc:spChg>
         <pc:picChg chg="add mod">
           <ac:chgData name="Corbin Ferguson" userId="34a864e2-e65e-4cb2-823c-dc28f73f0e40" providerId="ADAL" clId="{8D2D96CF-1319-4CCC-9EA9-073445628049}" dt="2026-03-16T20:57:53.186" v="2021" actId="14100"/>
           <ac:picMkLst>
             <pc:docMk/>
             <pc:sldMk cId="2455060311" sldId="2146848324"/>
             <ac:picMk id="5" creationId="{BE5C2147-6B8C-1D93-D1D8-4113A963D2D0}"/>
-          </ac:picMkLst>
-        </pc:picChg>
-        <pc:picChg chg="del">
-          <ac:chgData name="Corbin Ferguson" userId="34a864e2-e65e-4cb2-823c-dc28f73f0e40" providerId="ADAL" clId="{8D2D96CF-1319-4CCC-9EA9-073445628049}" dt="2026-03-16T20:55:47.366" v="2005" actId="478"/>
-          <ac:picMkLst>
-            <pc:docMk/>
-            <pc:sldMk cId="2455060311" sldId="2146848324"/>
-            <ac:picMk id="10" creationId="{54360C4F-9744-9D0A-7526-A62F5CBBD343}"/>
           </ac:picMkLst>
         </pc:picChg>
         <pc:picChg chg="mod">
@@ -1808,14 +749,6 @@
             <ac:picMk id="3" creationId="{A34E6259-020A-CE8B-AC93-FDF3B8CB5BB9}"/>
           </ac:picMkLst>
         </pc:picChg>
-        <pc:picChg chg="del ord">
-          <ac:chgData name="Corbin Ferguson" userId="34a864e2-e65e-4cb2-823c-dc28f73f0e40" providerId="ADAL" clId="{8D2D96CF-1319-4CCC-9EA9-073445628049}" dt="2026-03-16T21:02:18.440" v="2053" actId="478"/>
-          <ac:picMkLst>
-            <pc:docMk/>
-            <pc:sldMk cId="935187346" sldId="2146848325"/>
-            <ac:picMk id="6" creationId="{B6127BAF-6D0E-BEB6-A0F4-C56A9F66FD85}"/>
-          </ac:picMkLst>
-        </pc:picChg>
         <pc:picChg chg="mod modVis">
           <ac:chgData name="Corbin Ferguson" userId="34a864e2-e65e-4cb2-823c-dc28f73f0e40" providerId="ADAL" clId="{8D2D96CF-1319-4CCC-9EA9-073445628049}" dt="2026-03-16T21:03:45.465" v="2072" actId="14100"/>
           <ac:picMkLst>
@@ -1824,6 +757,132 @@
             <ac:picMk id="11268" creationId="{398BFDD6-EE1D-2233-1BC7-9B7205573827}"/>
           </ac:picMkLst>
         </pc:picChg>
+      </pc:sldChg>
+      <pc:sldChg chg="addSp delSp modSp new del mod modClrScheme chgLayout">
+        <pc:chgData name="Corbin Ferguson" userId="34a864e2-e65e-4cb2-823c-dc28f73f0e40" providerId="ADAL" clId="{8D2D96CF-1319-4CCC-9EA9-073445628049}" dt="2026-03-19T14:12:06.718" v="2385" actId="2696"/>
+        <pc:sldMkLst>
+          <pc:docMk/>
+          <pc:sldMk cId="3470561254" sldId="2146848326"/>
+        </pc:sldMkLst>
+        <pc:spChg chg="del mod ord">
+          <ac:chgData name="Corbin Ferguson" userId="34a864e2-e65e-4cb2-823c-dc28f73f0e40" providerId="ADAL" clId="{8D2D96CF-1319-4CCC-9EA9-073445628049}" dt="2026-03-19T13:53:56.815" v="2166" actId="700"/>
+          <ac:spMkLst>
+            <pc:docMk/>
+            <pc:sldMk cId="3470561254" sldId="2146848326"/>
+            <ac:spMk id="2" creationId="{FCF00E6F-4671-9471-4EC5-9538EAEC44A1}"/>
+          </ac:spMkLst>
+        </pc:spChg>
+        <pc:spChg chg="del mod ord">
+          <ac:chgData name="Corbin Ferguson" userId="34a864e2-e65e-4cb2-823c-dc28f73f0e40" providerId="ADAL" clId="{8D2D96CF-1319-4CCC-9EA9-073445628049}" dt="2026-03-19T13:53:56.815" v="2166" actId="700"/>
+          <ac:spMkLst>
+            <pc:docMk/>
+            <pc:sldMk cId="3470561254" sldId="2146848326"/>
+            <ac:spMk id="3" creationId="{C7001ADC-AF92-2BA7-A190-5278CBD35477}"/>
+          </ac:spMkLst>
+        </pc:spChg>
+        <pc:spChg chg="mod ord">
+          <ac:chgData name="Corbin Ferguson" userId="34a864e2-e65e-4cb2-823c-dc28f73f0e40" providerId="ADAL" clId="{8D2D96CF-1319-4CCC-9EA9-073445628049}" dt="2026-03-19T13:53:56.815" v="2166" actId="700"/>
+          <ac:spMkLst>
+            <pc:docMk/>
+            <pc:sldMk cId="3470561254" sldId="2146848326"/>
+            <ac:spMk id="4" creationId="{B86FED9A-7D42-F8C3-84B7-B2D90E62EC1E}"/>
+          </ac:spMkLst>
+        </pc:spChg>
+        <pc:spChg chg="mod ord">
+          <ac:chgData name="Corbin Ferguson" userId="34a864e2-e65e-4cb2-823c-dc28f73f0e40" providerId="ADAL" clId="{8D2D96CF-1319-4CCC-9EA9-073445628049}" dt="2026-03-19T13:53:56.815" v="2166" actId="700"/>
+          <ac:spMkLst>
+            <pc:docMk/>
+            <pc:sldMk cId="3470561254" sldId="2146848326"/>
+            <ac:spMk id="5" creationId="{263147B8-9824-E340-582F-F6C5CA357488}"/>
+          </ac:spMkLst>
+        </pc:spChg>
+        <pc:spChg chg="mod ord">
+          <ac:chgData name="Corbin Ferguson" userId="34a864e2-e65e-4cb2-823c-dc28f73f0e40" providerId="ADAL" clId="{8D2D96CF-1319-4CCC-9EA9-073445628049}" dt="2026-03-19T13:53:56.815" v="2166" actId="700"/>
+          <ac:spMkLst>
+            <pc:docMk/>
+            <pc:sldMk cId="3470561254" sldId="2146848326"/>
+            <ac:spMk id="6" creationId="{4A277EBD-EB34-B334-713F-EC88B56D6F4A}"/>
+          </ac:spMkLst>
+        </pc:spChg>
+        <pc:spChg chg="del">
+          <ac:chgData name="Corbin Ferguson" userId="34a864e2-e65e-4cb2-823c-dc28f73f0e40" providerId="ADAL" clId="{8D2D96CF-1319-4CCC-9EA9-073445628049}" dt="2026-03-19T13:53:56.815" v="2166" actId="700"/>
+          <ac:spMkLst>
+            <pc:docMk/>
+            <pc:sldMk cId="3470561254" sldId="2146848326"/>
+            <ac:spMk id="7" creationId="{05946096-7B26-2F75-5091-980FC4754DE5}"/>
+          </ac:spMkLst>
+        </pc:spChg>
+        <pc:spChg chg="add mod ord">
+          <ac:chgData name="Corbin Ferguson" userId="34a864e2-e65e-4cb2-823c-dc28f73f0e40" providerId="ADAL" clId="{8D2D96CF-1319-4CCC-9EA9-073445628049}" dt="2026-03-19T13:54:06.202" v="2181" actId="20577"/>
+          <ac:spMkLst>
+            <pc:docMk/>
+            <pc:sldMk cId="3470561254" sldId="2146848326"/>
+            <ac:spMk id="8" creationId="{88AA3733-1CD8-58BD-0417-C28D4C89287B}"/>
+          </ac:spMkLst>
+        </pc:spChg>
+        <pc:spChg chg="add mod ord">
+          <ac:chgData name="Corbin Ferguson" userId="34a864e2-e65e-4cb2-823c-dc28f73f0e40" providerId="ADAL" clId="{8D2D96CF-1319-4CCC-9EA9-073445628049}" dt="2026-03-19T13:54:34.157" v="2213" actId="6549"/>
+          <ac:spMkLst>
+            <pc:docMk/>
+            <pc:sldMk cId="3470561254" sldId="2146848326"/>
+            <ac:spMk id="9" creationId="{6CD9AD1D-4B8C-7F8E-A0E8-8F71CA76C531}"/>
+          </ac:spMkLst>
+        </pc:spChg>
+        <pc:graphicFrameChg chg="add mod">
+          <ac:chgData name="Corbin Ferguson" userId="34a864e2-e65e-4cb2-823c-dc28f73f0e40" providerId="ADAL" clId="{8D2D96CF-1319-4CCC-9EA9-073445628049}" dt="2026-03-19T13:54:00.910" v="2167"/>
+          <ac:graphicFrameMkLst>
+            <pc:docMk/>
+            <pc:sldMk cId="3470561254" sldId="2146848326"/>
+            <ac:graphicFrameMk id="10" creationId="{234D3189-3F03-97AD-17F5-EC2C4153963C}"/>
+          </ac:graphicFrameMkLst>
+        </pc:graphicFrameChg>
+        <pc:graphicFrameChg chg="add mod">
+          <ac:chgData name="Corbin Ferguson" userId="34a864e2-e65e-4cb2-823c-dc28f73f0e40" providerId="ADAL" clId="{8D2D96CF-1319-4CCC-9EA9-073445628049}" dt="2026-03-19T13:54:07.335" v="2182"/>
+          <ac:graphicFrameMkLst>
+            <pc:docMk/>
+            <pc:sldMk cId="3470561254" sldId="2146848326"/>
+            <ac:graphicFrameMk id="11" creationId="{96AB9561-A9A7-EE58-3E17-9095EC64CD70}"/>
+          </ac:graphicFrameMkLst>
+        </pc:graphicFrameChg>
+      </pc:sldChg>
+      <pc:sldChg chg="addSp delSp modSp new mod">
+        <pc:chgData name="Corbin Ferguson" userId="34a864e2-e65e-4cb2-823c-dc28f73f0e40" providerId="ADAL" clId="{8D2D96CF-1319-4CCC-9EA9-073445628049}" dt="2026-03-19T14:03:22.121" v="2384" actId="2710"/>
+        <pc:sldMkLst>
+          <pc:docMk/>
+          <pc:sldMk cId="4147216281" sldId="2146848327"/>
+        </pc:sldMkLst>
+        <pc:spChg chg="mod">
+          <ac:chgData name="Corbin Ferguson" userId="34a864e2-e65e-4cb2-823c-dc28f73f0e40" providerId="ADAL" clId="{8D2D96CF-1319-4CCC-9EA9-073445628049}" dt="2026-03-19T14:03:22.121" v="2384" actId="2710"/>
+          <ac:spMkLst>
+            <pc:docMk/>
+            <pc:sldMk cId="4147216281" sldId="2146848327"/>
+            <ac:spMk id="2" creationId="{66F5F0CA-AE20-3F47-A2DA-544E05972351}"/>
+          </ac:spMkLst>
+        </pc:spChg>
+        <pc:spChg chg="mod">
+          <ac:chgData name="Corbin Ferguson" userId="34a864e2-e65e-4cb2-823c-dc28f73f0e40" providerId="ADAL" clId="{8D2D96CF-1319-4CCC-9EA9-073445628049}" dt="2026-03-19T13:54:58.545" v="2241" actId="20577"/>
+          <ac:spMkLst>
+            <pc:docMk/>
+            <pc:sldMk cId="4147216281" sldId="2146848327"/>
+            <ac:spMk id="6" creationId="{EDE23E98-5860-3F33-9CE1-AB9573CB1CBC}"/>
+          </ac:spMkLst>
+        </pc:spChg>
+        <pc:graphicFrameChg chg="add mod">
+          <ac:chgData name="Corbin Ferguson" userId="34a864e2-e65e-4cb2-823c-dc28f73f0e40" providerId="ADAL" clId="{8D2D96CF-1319-4CCC-9EA9-073445628049}" dt="2026-03-19T13:55:02.870" v="2242"/>
+          <ac:graphicFrameMkLst>
+            <pc:docMk/>
+            <pc:sldMk cId="4147216281" sldId="2146848327"/>
+            <ac:graphicFrameMk id="7" creationId="{C812F62C-43B7-184B-3D2C-86B538682483}"/>
+          </ac:graphicFrameMkLst>
+        </pc:graphicFrameChg>
+        <pc:graphicFrameChg chg="add del mod modGraphic">
+          <ac:chgData name="Corbin Ferguson" userId="34a864e2-e65e-4cb2-823c-dc28f73f0e40" providerId="ADAL" clId="{8D2D96CF-1319-4CCC-9EA9-073445628049}" dt="2026-03-19T14:02:28.356" v="2265" actId="478"/>
+          <ac:graphicFrameMkLst>
+            <pc:docMk/>
+            <pc:sldMk cId="4147216281" sldId="2146848327"/>
+            <ac:graphicFrameMk id="8" creationId="{3402CB9A-DF00-9ADB-9A95-E19A8AE19B7A}"/>
+          </ac:graphicFrameMkLst>
+        </pc:graphicFrameChg>
       </pc:sldChg>
     </pc:docChg>
   </pc:docChgLst>
@@ -2064,6 +1123,11 @@
               </a:ln>
               <a:effectLst/>
             </c:spPr>
+            <c:extLst>
+              <c:ext xmlns:c16="http://schemas.microsoft.com/office/drawing/2014/chart" uri="{C3380CC4-5D6E-409C-BE32-E72D297353CC}">
+                <c16:uniqueId val="{00000007-E8E1-458D-A017-D493D027130B}"/>
+              </c:ext>
+            </c:extLst>
           </c:dPt>
           <c:dLbls>
             <c:dLbl>
@@ -5915,7 +4979,7 @@
           <a:p>
             <a:fld id="{54AB45C9-81B3-4A94-8767-58F068DAE020}" type="datetimeFigureOut">
               <a:rPr lang="en-US" smtClean="0"/>
-              <a:t>3/16/2026</a:t>
+              <a:t>3/19/2026</a:t>
             </a:fld>
             <a:endParaRPr lang="en-US" dirty="0"/>
           </a:p>
@@ -6229,7 +5293,7 @@
             <a:fld id="{7305D29C-7523-4ABE-8CB4-FD5FDA2414D8}" type="datetimeFigureOut">
               <a:rPr lang="en-US" noProof="0" smtClean="0"/>
               <a:pPr/>
-              <a:t>3/16/2026</a:t>
+              <a:t>3/19/2026</a:t>
             </a:fld>
             <a:endParaRPr lang="en-US" noProof="0" dirty="0"/>
           </a:p>
@@ -19972,6 +19036,435 @@
         <p:cNvPr id="1" name="">
           <a:extLst>
             <a:ext uri="{FF2B5EF4-FFF2-40B4-BE49-F238E27FC236}">
+              <a16:creationId xmlns:a16="http://schemas.microsoft.com/office/drawing/2014/main" id="{7E4A68EB-BBA3-381D-430F-E3F9DF8BD3FB}"/>
+            </a:ext>
+          </a:extLst>
+        </p:cNvPr>
+        <p:cNvGrpSpPr/>
+        <p:nvPr/>
+      </p:nvGrpSpPr>
+      <p:grpSpPr>
+        <a:xfrm>
+          <a:off x="0" y="0"/>
+          <a:ext cx="0" cy="0"/>
+          <a:chOff x="0" y="0"/>
+          <a:chExt cx="0" cy="0"/>
+        </a:xfrm>
+      </p:grpSpPr>
+      <p:sp>
+        <p:nvSpPr>
+          <p:cNvPr id="2" name="Title 1">
+            <a:extLst>
+              <a:ext uri="{FF2B5EF4-FFF2-40B4-BE49-F238E27FC236}">
+                <a16:creationId xmlns:a16="http://schemas.microsoft.com/office/drawing/2014/main" id="{A767FD57-0C1F-53FC-E4AC-6E4AC4F8F9F9}"/>
+              </a:ext>
+            </a:extLst>
+          </p:cNvPr>
+          <p:cNvSpPr>
+            <a:spLocks noGrp="1"/>
+          </p:cNvSpPr>
+          <p:nvPr>
+            <p:ph type="title"/>
+          </p:nvPr>
+        </p:nvSpPr>
+        <p:spPr>
+          <a:xfrm>
+            <a:off x="334963" y="620690"/>
+            <a:ext cx="7018337" cy="360041"/>
+          </a:xfrm>
+        </p:spPr>
+        <p:txBody>
+          <a:bodyPr/>
+          <a:lstStyle/>
+          <a:p>
+            <a:r>
+              <a:rPr lang="en-US" dirty="0"/>
+              <a:t>New File Pathing</a:t>
+            </a:r>
+          </a:p>
+        </p:txBody>
+      </p:sp>
+      <p:sp>
+        <p:nvSpPr>
+          <p:cNvPr id="4" name="Date Placeholder 3">
+            <a:extLst>
+              <a:ext uri="{FF2B5EF4-FFF2-40B4-BE49-F238E27FC236}">
+                <a16:creationId xmlns:a16="http://schemas.microsoft.com/office/drawing/2014/main" id="{A7555496-A425-4EB0-4B85-1B98E6B462DC}"/>
+              </a:ext>
+            </a:extLst>
+          </p:cNvPr>
+          <p:cNvSpPr>
+            <a:spLocks noGrp="1"/>
+          </p:cNvSpPr>
+          <p:nvPr>
+            <p:ph type="dt" sz="half" idx="10"/>
+          </p:nvPr>
+        </p:nvSpPr>
+        <p:spPr/>
+        <p:txBody>
+          <a:bodyPr/>
+          <a:lstStyle/>
+          <a:p>
+            <a:r>
+              <a:rPr lang="en-US"/>
+              <a:t>L5X Automation Build Tool</a:t>
+            </a:r>
+            <a:endParaRPr lang="en-US" dirty="0"/>
+          </a:p>
+        </p:txBody>
+      </p:sp>
+      <p:sp>
+        <p:nvSpPr>
+          <p:cNvPr id="7" name="Slide Number Placeholder 6">
+            <a:extLst>
+              <a:ext uri="{FF2B5EF4-FFF2-40B4-BE49-F238E27FC236}">
+                <a16:creationId xmlns:a16="http://schemas.microsoft.com/office/drawing/2014/main" id="{8C70071A-23EE-C0B0-7BC3-656D969CC96D}"/>
+              </a:ext>
+            </a:extLst>
+          </p:cNvPr>
+          <p:cNvSpPr>
+            <a:spLocks noGrp="1"/>
+          </p:cNvSpPr>
+          <p:nvPr>
+            <p:ph type="sldNum" sz="quarter" idx="12"/>
+          </p:nvPr>
+        </p:nvSpPr>
+        <p:spPr/>
+        <p:txBody>
+          <a:bodyPr/>
+          <a:lstStyle/>
+          <a:p>
+            <a:r>
+              <a:rPr lang="en-US"/>
+              <a:t>Slide </a:t>
+            </a:r>
+            <a:fld id="{C6F8E2D1-BFA0-484A-B7F1-E348F2594759}" type="slidenum">
+              <a:rPr lang="en-US" smtClean="0"/>
+              <a:t>10</a:t>
+            </a:fld>
+            <a:endParaRPr lang="en-US" dirty="0"/>
+          </a:p>
+        </p:txBody>
+      </p:sp>
+      <p:sp>
+        <p:nvSpPr>
+          <p:cNvPr id="8" name="Footer Placeholder 7">
+            <a:extLst>
+              <a:ext uri="{FF2B5EF4-FFF2-40B4-BE49-F238E27FC236}">
+                <a16:creationId xmlns:a16="http://schemas.microsoft.com/office/drawing/2014/main" id="{560F8ABB-0706-BB35-FFAC-F2F7471C56AD}"/>
+              </a:ext>
+            </a:extLst>
+          </p:cNvPr>
+          <p:cNvSpPr>
+            <a:spLocks noGrp="1"/>
+          </p:cNvSpPr>
+          <p:nvPr>
+            <p:ph type="ftr" sz="quarter" idx="11"/>
+          </p:nvPr>
+        </p:nvSpPr>
+        <p:spPr/>
+        <p:txBody>
+          <a:bodyPr/>
+          <a:lstStyle/>
+          <a:p>
+            <a:r>
+              <a:rPr lang="en-US"/>
+              <a:t>Corbin Ferguson</a:t>
+            </a:r>
+            <a:endParaRPr lang="en-US" dirty="0"/>
+          </a:p>
+        </p:txBody>
+      </p:sp>
+      <p:pic>
+        <p:nvPicPr>
+          <p:cNvPr id="6" name="!NewFile">
+            <a:extLst>
+              <a:ext uri="{FF2B5EF4-FFF2-40B4-BE49-F238E27FC236}">
+                <a16:creationId xmlns:a16="http://schemas.microsoft.com/office/drawing/2014/main" id="{BF17B26E-CEBE-31E2-A928-A78B0BE175DA}"/>
+              </a:ext>
+            </a:extLst>
+          </p:cNvPr>
+          <p:cNvPicPr>
+            <a:picLocks noChangeAspect="1"/>
+          </p:cNvPicPr>
+          <p:nvPr/>
+        </p:nvPicPr>
+        <p:blipFill>
+          <a:blip r:embed="rId2"/>
+          <a:srcRect l="5131" t="67604" r="73596" b="17547"/>
+          <a:stretch>
+            <a:fillRect/>
+          </a:stretch>
+        </p:blipFill>
+        <p:spPr>
+          <a:xfrm>
+            <a:off x="1545843" y="1119567"/>
+            <a:ext cx="9552756" cy="4199766"/>
+          </a:xfrm>
+          <a:prstGeom prst="rect">
+            <a:avLst/>
+          </a:prstGeom>
+          <a:noFill/>
+        </p:spPr>
+      </p:pic>
+      <p:pic>
+        <p:nvPicPr>
+          <p:cNvPr id="11268" name="NewFile">
+            <a:extLst>
+              <a:ext uri="{FF2B5EF4-FFF2-40B4-BE49-F238E27FC236}">
+                <a16:creationId xmlns:a16="http://schemas.microsoft.com/office/drawing/2014/main" id="{14AE5F5A-6C88-0F58-A592-0FB668BF99DA}"/>
+              </a:ext>
+            </a:extLst>
+          </p:cNvPr>
+          <p:cNvPicPr>
+            <a:picLocks noChangeAspect="1" noChangeArrowheads="1"/>
+          </p:cNvPicPr>
+          <p:nvPr/>
+        </p:nvPicPr>
+        <p:blipFill>
+          <a:blip r:embed="rId3">
+            <a:extLst>
+              <a:ext uri="{28A0092B-C50C-407E-A947-70E740481C1C}">
+                <a14:useLocalDpi xmlns:a14="http://schemas.microsoft.com/office/drawing/2010/main" val="0"/>
+              </a:ext>
+            </a:extLst>
+          </a:blip>
+          <a:srcRect/>
+          <a:stretch>
+            <a:fillRect/>
+          </a:stretch>
+        </p:blipFill>
+        <p:spPr bwMode="auto">
+          <a:xfrm>
+            <a:off x="365435" y="980731"/>
+            <a:ext cx="11428631" cy="4882654"/>
+          </a:xfrm>
+          <a:prstGeom prst="rect">
+            <a:avLst/>
+          </a:prstGeom>
+          <a:solidFill>
+            <a:schemeClr val="bg1"/>
+          </a:solidFill>
+        </p:spPr>
+      </p:pic>
+      <p:sp>
+        <p:nvSpPr>
+          <p:cNvPr id="11" name="Rectangle: Rounded Corners 10">
+            <a:extLst>
+              <a:ext uri="{FF2B5EF4-FFF2-40B4-BE49-F238E27FC236}">
+                <a16:creationId xmlns:a16="http://schemas.microsoft.com/office/drawing/2014/main" id="{BBDD576A-A414-9915-960B-C7192C1A13D8}"/>
+              </a:ext>
+            </a:extLst>
+          </p:cNvPr>
+          <p:cNvSpPr/>
+          <p:nvPr/>
+        </p:nvSpPr>
+        <p:spPr>
+          <a:xfrm>
+            <a:off x="2514600" y="2705100"/>
+            <a:ext cx="8839200" cy="901700"/>
+          </a:xfrm>
+          <a:prstGeom prst="roundRect">
+            <a:avLst/>
+          </a:prstGeom>
+          <a:solidFill>
+            <a:srgbClr val="007CAA">
+              <a:alpha val="20000"/>
+            </a:srgbClr>
+          </a:solidFill>
+          <a:ln>
+            <a:solidFill>
+              <a:srgbClr val="007CAA"/>
+            </a:solidFill>
+          </a:ln>
+          <a:effectLst>
+            <a:glow rad="63500">
+              <a:schemeClr val="accent4">
+                <a:satMod val="175000"/>
+                <a:alpha val="40000"/>
+              </a:schemeClr>
+            </a:glow>
+          </a:effectLst>
+        </p:spPr>
+        <p:style>
+          <a:lnRef idx="2">
+            <a:schemeClr val="accent1">
+              <a:shade val="50000"/>
+            </a:schemeClr>
+          </a:lnRef>
+          <a:fillRef idx="1">
+            <a:schemeClr val="accent1"/>
+          </a:fillRef>
+          <a:effectRef idx="0">
+            <a:schemeClr val="accent1"/>
+          </a:effectRef>
+          <a:fontRef idx="minor">
+            <a:schemeClr val="lt1"/>
+          </a:fontRef>
+        </p:style>
+        <p:txBody>
+          <a:bodyPr rtlCol="0" anchor="ctr"/>
+          <a:lstStyle/>
+          <a:p>
+            <a:pPr algn="ctr"/>
+            <a:endParaRPr lang="en-US" sz="2000" dirty="0" err="1">
+              <a:solidFill>
+                <a:srgbClr val="FFFFFF"/>
+              </a:solidFill>
+              <a:latin typeface="E+H Sans" panose="020B0404050202020204" pitchFamily="34" charset="0"/>
+            </a:endParaRPr>
+          </a:p>
+        </p:txBody>
+      </p:sp>
+    </p:spTree>
+    <p:extLst>
+      <p:ext uri="{BB962C8B-B14F-4D97-AF65-F5344CB8AC3E}">
+        <p14:creationId xmlns:p14="http://schemas.microsoft.com/office/powerpoint/2010/main" val="1670292182"/>
+      </p:ext>
+    </p:extLst>
+  </p:cSld>
+  <p:clrMapOvr>
+    <a:masterClrMapping/>
+  </p:clrMapOvr>
+  <mc:AlternateContent xmlns:mc="http://schemas.openxmlformats.org/markup-compatibility/2006" xmlns:p159="http://schemas.microsoft.com/office/powerpoint/2015/09/main">
+    <mc:Choice Requires="p159">
+      <p:transition xmlns:p14="http://schemas.microsoft.com/office/powerpoint/2010/main" spd="slow" p14:dur="2000">
+        <p159:morph option="byObject"/>
+      </p:transition>
+    </mc:Choice>
+    <mc:Fallback xmlns="">
+      <p:transition spd="slow">
+        <p:fade/>
+      </p:transition>
+    </mc:Fallback>
+  </mc:AlternateContent>
+  <p:timing>
+    <p:tnLst>
+      <p:par>
+        <p:cTn id="1" dur="indefinite" restart="never" nodeType="tmRoot">
+          <p:childTnLst>
+            <p:seq concurrent="1" nextAc="seek">
+              <p:cTn id="2" dur="indefinite" nodeType="mainSeq">
+                <p:childTnLst>
+                  <p:par>
+                    <p:cTn id="3" fill="hold">
+                      <p:stCondLst>
+                        <p:cond delay="indefinite"/>
+                        <p:cond evt="onBegin" delay="0">
+                          <p:tn val="2"/>
+                        </p:cond>
+                      </p:stCondLst>
+                      <p:childTnLst>
+                        <p:par>
+                          <p:cTn id="4" fill="hold">
+                            <p:stCondLst>
+                              <p:cond delay="0"/>
+                            </p:stCondLst>
+                            <p:childTnLst>
+                              <p:par>
+                                <p:cTn id="5" presetID="10" presetClass="entr" presetSubtype="0" fill="hold" grpId="0" nodeType="afterEffect">
+                                  <p:stCondLst>
+                                    <p:cond delay="100"/>
+                                  </p:stCondLst>
+                                  <p:childTnLst>
+                                    <p:set>
+                                      <p:cBhvr>
+                                        <p:cTn id="6" dur="1" fill="hold">
+                                          <p:stCondLst>
+                                            <p:cond delay="0"/>
+                                          </p:stCondLst>
+                                        </p:cTn>
+                                        <p:tgtEl>
+                                          <p:spTgt spid="11"/>
+                                        </p:tgtEl>
+                                        <p:attrNameLst>
+                                          <p:attrName>style.visibility</p:attrName>
+                                        </p:attrNameLst>
+                                      </p:cBhvr>
+                                      <p:to>
+                                        <p:strVal val="visible"/>
+                                      </p:to>
+                                    </p:set>
+                                    <p:animEffect transition="in" filter="fade">
+                                      <p:cBhvr>
+                                        <p:cTn id="7" dur="500"/>
+                                        <p:tgtEl>
+                                          <p:spTgt spid="11"/>
+                                        </p:tgtEl>
+                                      </p:cBhvr>
+                                    </p:animEffect>
+                                  </p:childTnLst>
+                                </p:cTn>
+                              </p:par>
+                              <p:par>
+                                <p:cTn id="8" presetID="1" presetClass="exit" presetSubtype="0" fill="hold" nodeType="withEffect">
+                                  <p:stCondLst>
+                                    <p:cond delay="0"/>
+                                  </p:stCondLst>
+                                  <p:childTnLst>
+                                    <p:set>
+                                      <p:cBhvr>
+                                        <p:cTn id="9" dur="1" fill="hold">
+                                          <p:stCondLst>
+                                            <p:cond delay="0"/>
+                                          </p:stCondLst>
+                                        </p:cTn>
+                                        <p:tgtEl>
+                                          <p:spTgt spid="6"/>
+                                        </p:tgtEl>
+                                        <p:attrNameLst>
+                                          <p:attrName>style.visibility</p:attrName>
+                                        </p:attrNameLst>
+                                      </p:cBhvr>
+                                      <p:to>
+                                        <p:strVal val="hidden"/>
+                                      </p:to>
+                                    </p:set>
+                                  </p:childTnLst>
+                                </p:cTn>
+                              </p:par>
+                            </p:childTnLst>
+                          </p:cTn>
+                        </p:par>
+                      </p:childTnLst>
+                    </p:cTn>
+                  </p:par>
+                </p:childTnLst>
+              </p:cTn>
+              <p:prevCondLst>
+                <p:cond evt="onPrev" delay="0">
+                  <p:tgtEl>
+                    <p:sldTgt/>
+                  </p:tgtEl>
+                </p:cond>
+              </p:prevCondLst>
+              <p:nextCondLst>
+                <p:cond evt="onNext" delay="0">
+                  <p:tgtEl>
+                    <p:sldTgt/>
+                  </p:tgtEl>
+                </p:cond>
+              </p:nextCondLst>
+            </p:seq>
+          </p:childTnLst>
+        </p:cTn>
+      </p:par>
+    </p:tnLst>
+    <p:bldLst>
+      <p:bldP spid="11" grpId="0" animBg="1"/>
+    </p:bldLst>
+  </p:timing>
+</p:sld>
+</file>
+
+<file path=ppt/slides/slide11.xml><?xml version="1.0" encoding="utf-8"?>
+<p:sld xmlns:a="http://schemas.openxmlformats.org/drawingml/2006/main" xmlns:r="http://schemas.openxmlformats.org/officeDocument/2006/relationships" xmlns:p="http://schemas.openxmlformats.org/presentationml/2006/main">
+  <p:cSld>
+    <p:spTree>
+      <p:nvGrpSpPr>
+        <p:cNvPr id="1" name="">
+          <a:extLst>
+            <a:ext uri="{FF2B5EF4-FFF2-40B4-BE49-F238E27FC236}">
               <a16:creationId xmlns:a16="http://schemas.microsoft.com/office/drawing/2014/main" id="{1E13B339-4EEC-59AB-4772-95A4281B42AE}"/>
             </a:ext>
           </a:extLst>
@@ -20076,7 +19569,7 @@
             </a:r>
             <a:fld id="{C6F8E2D1-BFA0-484A-B7F1-E348F2594759}" type="slidenum">
               <a:rPr lang="en-US" smtClean="0"/>
-              <a:t>10</a:t>
+              <a:t>11</a:t>
             </a:fld>
             <a:endParaRPr lang="en-US" dirty="0"/>
           </a:p>
@@ -20270,13 +19763,13 @@
   <p:clrMapOvr>
     <a:masterClrMapping/>
   </p:clrMapOvr>
-  <mc:AlternateContent xmlns:mc="http://schemas.openxmlformats.org/markup-compatibility/2006">
-    <mc:Choice xmlns:p159="http://schemas.microsoft.com/office/powerpoint/2015/09/main" Requires="p159">
+  <mc:AlternateContent xmlns:mc="http://schemas.openxmlformats.org/markup-compatibility/2006" xmlns:p159="http://schemas.microsoft.com/office/powerpoint/2015/09/main">
+    <mc:Choice Requires="p159">
       <p:transition xmlns:p14="http://schemas.microsoft.com/office/powerpoint/2010/main" spd="slow" p14:dur="2000">
         <p159:morph option="byObject"/>
       </p:transition>
     </mc:Choice>
-    <mc:Fallback>
+    <mc:Fallback xmlns="">
       <p:transition spd="slow">
         <p:fade/>
       </p:transition>
@@ -20374,7 +19867,7 @@
 </p:sld>
 </file>
 
-<file path=ppt/slides/slide11.xml><?xml version="1.0" encoding="utf-8"?>
+<file path=ppt/slides/slide12.xml><?xml version="1.0" encoding="utf-8"?>
 <p:sld xmlns:a="http://schemas.openxmlformats.org/drawingml/2006/main" xmlns:r="http://schemas.openxmlformats.org/officeDocument/2006/relationships" xmlns:p="http://schemas.openxmlformats.org/presentationml/2006/main">
   <p:cSld>
     <p:spTree>
@@ -20486,7 +19979,7 @@
             </a:r>
             <a:fld id="{C6F8E2D1-BFA0-484A-B7F1-E348F2594759}" type="slidenum">
               <a:rPr lang="en-US" smtClean="0"/>
-              <a:t>11</a:t>
+              <a:t>12</a:t>
             </a:fld>
             <a:endParaRPr lang="en-US" dirty="0"/>
           </a:p>
@@ -20670,13 +20163,13 @@
   <p:clrMapOvr>
     <a:masterClrMapping/>
   </p:clrMapOvr>
-  <mc:AlternateContent xmlns:mc="http://schemas.openxmlformats.org/markup-compatibility/2006">
-    <mc:Choice xmlns:p159="http://schemas.microsoft.com/office/powerpoint/2015/09/main" Requires="p159">
+  <mc:AlternateContent xmlns:mc="http://schemas.openxmlformats.org/markup-compatibility/2006" xmlns:p159="http://schemas.microsoft.com/office/powerpoint/2015/09/main">
+    <mc:Choice Requires="p159">
       <p:transition xmlns:p14="http://schemas.microsoft.com/office/powerpoint/2010/main" spd="slow" p14:dur="2000">
         <p159:morph option="byObject"/>
       </p:transition>
     </mc:Choice>
-    <mc:Fallback>
+    <mc:Fallback xmlns="">
       <p:transition spd="slow">
         <p:fade/>
       </p:transition>
@@ -20774,7 +20267,7 @@
 </p:sld>
 </file>
 
-<file path=ppt/slides/slide12.xml><?xml version="1.0" encoding="utf-8"?>
+<file path=ppt/slides/slide13.xml><?xml version="1.0" encoding="utf-8"?>
 <p:sld xmlns:a="http://schemas.openxmlformats.org/drawingml/2006/main" xmlns:r="http://schemas.openxmlformats.org/officeDocument/2006/relationships" xmlns:p="http://schemas.openxmlformats.org/presentationml/2006/main">
   <p:cSld>
     <p:spTree>
@@ -20886,7 +20379,7 @@
             </a:r>
             <a:fld id="{C6F8E2D1-BFA0-484A-B7F1-E348F2594759}" type="slidenum">
               <a:rPr lang="en-US" smtClean="0"/>
-              <a:t>12</a:t>
+              <a:t>13</a:t>
             </a:fld>
             <a:endParaRPr lang="en-US" dirty="0"/>
           </a:p>
@@ -21070,13 +20563,13 @@
   <p:clrMapOvr>
     <a:masterClrMapping/>
   </p:clrMapOvr>
-  <mc:AlternateContent xmlns:mc="http://schemas.openxmlformats.org/markup-compatibility/2006">
-    <mc:Choice xmlns:p159="http://schemas.microsoft.com/office/powerpoint/2015/09/main" Requires="p159">
+  <mc:AlternateContent xmlns:mc="http://schemas.openxmlformats.org/markup-compatibility/2006" xmlns:p159="http://schemas.microsoft.com/office/powerpoint/2015/09/main">
+    <mc:Choice Requires="p159">
       <p:transition xmlns:p14="http://schemas.microsoft.com/office/powerpoint/2010/main" spd="slow" p14:dur="2000">
         <p159:morph option="byObject"/>
       </p:transition>
     </mc:Choice>
-    <mc:Fallback>
+    <mc:Fallback xmlns="">
       <p:transition spd="slow">
         <p:fade/>
       </p:transition>
@@ -21210,1351 +20703,7 @@
 </p:sld>
 </file>
 
-<file path=ppt/slides/slide13.xml><?xml version="1.0" encoding="utf-8"?>
-<p:sld xmlns:a="http://schemas.openxmlformats.org/drawingml/2006/main" xmlns:r="http://schemas.openxmlformats.org/officeDocument/2006/relationships" xmlns:p="http://schemas.openxmlformats.org/presentationml/2006/main">
-  <p:cSld>
-    <p:spTree>
-      <p:nvGrpSpPr>
-        <p:cNvPr id="1" name="">
-          <a:extLst>
-            <a:ext uri="{FF2B5EF4-FFF2-40B4-BE49-F238E27FC236}">
-              <a16:creationId xmlns:a16="http://schemas.microsoft.com/office/drawing/2014/main" id="{AE741E45-B413-0AAD-097D-05F3401E8023}"/>
-            </a:ext>
-          </a:extLst>
-        </p:cNvPr>
-        <p:cNvGrpSpPr/>
-        <p:nvPr/>
-      </p:nvGrpSpPr>
-      <p:grpSpPr>
-        <a:xfrm>
-          <a:off x="0" y="0"/>
-          <a:ext cx="0" cy="0"/>
-          <a:chOff x="0" y="0"/>
-          <a:chExt cx="0" cy="0"/>
-        </a:xfrm>
-      </p:grpSpPr>
-      <p:pic>
-        <p:nvPicPr>
-          <p:cNvPr id="8366" name="Picture 8365">
-            <a:extLst>
-              <a:ext uri="{FF2B5EF4-FFF2-40B4-BE49-F238E27FC236}">
-                <a16:creationId xmlns:a16="http://schemas.microsoft.com/office/drawing/2014/main" id="{60AE9E24-9AB4-5014-B6BD-6F056F5807BA}"/>
-              </a:ext>
-            </a:extLst>
-          </p:cNvPr>
-          <p:cNvPicPr>
-            <a:picLocks noChangeAspect="1"/>
-          </p:cNvPicPr>
-          <p:nvPr/>
-        </p:nvPicPr>
-        <p:blipFill>
-          <a:blip r:embed="rId2"/>
-          <a:stretch>
-            <a:fillRect/>
-          </a:stretch>
-        </p:blipFill>
-        <p:spPr>
-          <a:xfrm>
-            <a:off x="2181925" y="1160462"/>
-            <a:ext cx="7828149" cy="5113337"/>
-          </a:xfrm>
-          <a:prstGeom prst="rect">
-            <a:avLst/>
-          </a:prstGeom>
-          <a:noFill/>
-        </p:spPr>
-      </p:pic>
-      <p:sp>
-        <p:nvSpPr>
-          <p:cNvPr id="8" name="Footer Placeholder 7">
-            <a:extLst>
-              <a:ext uri="{FF2B5EF4-FFF2-40B4-BE49-F238E27FC236}">
-                <a16:creationId xmlns:a16="http://schemas.microsoft.com/office/drawing/2014/main" id="{4C7D5AC9-EA29-86A4-7EF8-4DF941130DC8}"/>
-              </a:ext>
-            </a:extLst>
-          </p:cNvPr>
-          <p:cNvSpPr>
-            <a:spLocks noGrp="1"/>
-          </p:cNvSpPr>
-          <p:nvPr>
-            <p:ph type="ftr" sz="quarter" idx="19"/>
-          </p:nvPr>
-        </p:nvSpPr>
-        <p:spPr>
-          <a:xfrm>
-            <a:off x="4086351" y="6469380"/>
-            <a:ext cx="1130300" cy="180000"/>
-          </a:xfrm>
-        </p:spPr>
-        <p:txBody>
-          <a:bodyPr wrap="none" anchor="ctr">
-            <a:normAutofit/>
-          </a:bodyPr>
-          <a:lstStyle/>
-          <a:p>
-            <a:pPr>
-              <a:lnSpc>
-                <a:spcPct val="90000"/>
-              </a:lnSpc>
-              <a:spcAft>
-                <a:spcPts val="600"/>
-              </a:spcAft>
-            </a:pPr>
-            <a:r>
-              <a:rPr lang="en-US"/>
-              <a:t>Corbin Ferguson</a:t>
-            </a:r>
-          </a:p>
-        </p:txBody>
-      </p:sp>
-      <p:sp>
-        <p:nvSpPr>
-          <p:cNvPr id="7" name="Slide Number Placeholder 6">
-            <a:extLst>
-              <a:ext uri="{FF2B5EF4-FFF2-40B4-BE49-F238E27FC236}">
-                <a16:creationId xmlns:a16="http://schemas.microsoft.com/office/drawing/2014/main" id="{3583879C-95E5-7299-C98A-2B7D0B63F807}"/>
-              </a:ext>
-            </a:extLst>
-          </p:cNvPr>
-          <p:cNvSpPr>
-            <a:spLocks noGrp="1"/>
-          </p:cNvSpPr>
-          <p:nvPr>
-            <p:ph type="sldNum" sz="quarter" idx="20"/>
-          </p:nvPr>
-        </p:nvSpPr>
-        <p:spPr>
-          <a:xfrm>
-            <a:off x="1633051" y="6469380"/>
-            <a:ext cx="571500" cy="180000"/>
-          </a:xfrm>
-        </p:spPr>
-        <p:txBody>
-          <a:bodyPr wrap="none" anchor="ctr">
-            <a:normAutofit/>
-          </a:bodyPr>
-          <a:lstStyle/>
-          <a:p>
-            <a:pPr>
-              <a:lnSpc>
-                <a:spcPct val="90000"/>
-              </a:lnSpc>
-              <a:spcAft>
-                <a:spcPts val="600"/>
-              </a:spcAft>
-            </a:pPr>
-            <a:r>
-              <a:rPr lang="en-US"/>
-              <a:t>Slide </a:t>
-            </a:r>
-            <a:fld id="{C6F8E2D1-BFA0-484A-B7F1-E348F2594759}" type="slidenum">
-              <a:rPr lang="en-US" smtClean="0"/>
-              <a:pPr>
-                <a:lnSpc>
-                  <a:spcPct val="90000"/>
-                </a:lnSpc>
-                <a:spcAft>
-                  <a:spcPts val="600"/>
-                </a:spcAft>
-              </a:pPr>
-              <a:t>13</a:t>
-            </a:fld>
-            <a:endParaRPr lang="en-US"/>
-          </a:p>
-        </p:txBody>
-      </p:sp>
-      <p:sp>
-        <p:nvSpPr>
-          <p:cNvPr id="4" name="Date Placeholder 3">
-            <a:extLst>
-              <a:ext uri="{FF2B5EF4-FFF2-40B4-BE49-F238E27FC236}">
-                <a16:creationId xmlns:a16="http://schemas.microsoft.com/office/drawing/2014/main" id="{6F1C84BC-19BE-D2D3-DB6B-179BB01EE861}"/>
-              </a:ext>
-            </a:extLst>
-          </p:cNvPr>
-          <p:cNvSpPr>
-            <a:spLocks noGrp="1"/>
-          </p:cNvSpPr>
-          <p:nvPr>
-            <p:ph type="dt" sz="half" idx="21"/>
-          </p:nvPr>
-        </p:nvSpPr>
-        <p:spPr>
-          <a:xfrm>
-            <a:off x="334963" y="194736"/>
-            <a:ext cx="9674225" cy="180000"/>
-          </a:xfrm>
-        </p:spPr>
-        <p:txBody>
-          <a:bodyPr wrap="none" anchor="t">
-            <a:normAutofit/>
-          </a:bodyPr>
-          <a:lstStyle/>
-          <a:p>
-            <a:pPr>
-              <a:lnSpc>
-                <a:spcPct val="90000"/>
-              </a:lnSpc>
-              <a:spcAft>
-                <a:spcPts val="600"/>
-              </a:spcAft>
-            </a:pPr>
-            <a:r>
-              <a:rPr lang="en-US"/>
-              <a:t>L5X Automation Build Tool</a:t>
-            </a:r>
-          </a:p>
-        </p:txBody>
-      </p:sp>
-      <p:sp>
-        <p:nvSpPr>
-          <p:cNvPr id="2" name="Title 1">
-            <a:extLst>
-              <a:ext uri="{FF2B5EF4-FFF2-40B4-BE49-F238E27FC236}">
-                <a16:creationId xmlns:a16="http://schemas.microsoft.com/office/drawing/2014/main" id="{07BCF97A-6A5E-DA70-0A21-4FF0D5A9B2D1}"/>
-              </a:ext>
-            </a:extLst>
-          </p:cNvPr>
-          <p:cNvSpPr>
-            <a:spLocks noGrp="1"/>
-          </p:cNvSpPr>
-          <p:nvPr>
-            <p:ph type="title"/>
-          </p:nvPr>
-        </p:nvSpPr>
-        <p:spPr>
-          <a:xfrm>
-            <a:off x="334963" y="620690"/>
-            <a:ext cx="11522075" cy="360041"/>
-          </a:xfrm>
-        </p:spPr>
-        <p:txBody>
-          <a:bodyPr wrap="none" anchor="t">
-            <a:normAutofit/>
-          </a:bodyPr>
-          <a:lstStyle/>
-          <a:p>
-            <a:r>
-              <a:rPr lang="en-US" dirty="0"/>
-              <a:t>Class Diagram</a:t>
-            </a:r>
-          </a:p>
-        </p:txBody>
-      </p:sp>
-    </p:spTree>
-    <p:extLst>
-      <p:ext uri="{BB962C8B-B14F-4D97-AF65-F5344CB8AC3E}">
-        <p14:creationId xmlns:p14="http://schemas.microsoft.com/office/powerpoint/2010/main" val="2077614573"/>
-      </p:ext>
-    </p:extLst>
-  </p:cSld>
-  <p:clrMapOvr>
-    <a:masterClrMapping/>
-  </p:clrMapOvr>
-</p:sld>
-</file>
-
 <file path=ppt/slides/slide14.xml><?xml version="1.0" encoding="utf-8"?>
-<p:sld xmlns:a="http://schemas.openxmlformats.org/drawingml/2006/main" xmlns:r="http://schemas.openxmlformats.org/officeDocument/2006/relationships" xmlns:p="http://schemas.openxmlformats.org/presentationml/2006/main">
-  <p:cSld>
-    <p:spTree>
-      <p:nvGrpSpPr>
-        <p:cNvPr id="1" name="">
-          <a:extLst>
-            <a:ext uri="{FF2B5EF4-FFF2-40B4-BE49-F238E27FC236}">
-              <a16:creationId xmlns:a16="http://schemas.microsoft.com/office/drawing/2014/main" id="{B031D0FB-813C-A1A9-95BF-F0A18A2C1086}"/>
-            </a:ext>
-          </a:extLst>
-        </p:cNvPr>
-        <p:cNvGrpSpPr/>
-        <p:nvPr/>
-      </p:nvGrpSpPr>
-      <p:grpSpPr>
-        <a:xfrm>
-          <a:off x="0" y="0"/>
-          <a:ext cx="0" cy="0"/>
-          <a:chOff x="0" y="0"/>
-          <a:chExt cx="0" cy="0"/>
-        </a:xfrm>
-      </p:grpSpPr>
-      <p:pic>
-        <p:nvPicPr>
-          <p:cNvPr id="9" name="Picture 8">
-            <a:extLst>
-              <a:ext uri="{FF2B5EF4-FFF2-40B4-BE49-F238E27FC236}">
-                <a16:creationId xmlns:a16="http://schemas.microsoft.com/office/drawing/2014/main" id="{A889D74E-A641-8FCA-9F55-93231CDB546D}"/>
-              </a:ext>
-            </a:extLst>
-          </p:cNvPr>
-          <p:cNvPicPr>
-            <a:picLocks noChangeAspect="1"/>
-          </p:cNvPicPr>
-          <p:nvPr/>
-        </p:nvPicPr>
-        <p:blipFill>
-          <a:blip r:embed="rId2"/>
-          <a:stretch>
-            <a:fillRect/>
-          </a:stretch>
-        </p:blipFill>
-        <p:spPr>
-          <a:xfrm>
-            <a:off x="1176290" y="1160462"/>
-            <a:ext cx="9839419" cy="5113337"/>
-          </a:xfrm>
-          <a:prstGeom prst="rect">
-            <a:avLst/>
-          </a:prstGeom>
-          <a:noFill/>
-        </p:spPr>
-      </p:pic>
-      <p:sp>
-        <p:nvSpPr>
-          <p:cNvPr id="8" name="Footer Placeholder 7">
-            <a:extLst>
-              <a:ext uri="{FF2B5EF4-FFF2-40B4-BE49-F238E27FC236}">
-                <a16:creationId xmlns:a16="http://schemas.microsoft.com/office/drawing/2014/main" id="{71C973FB-1860-D33D-FFB0-E373255B1325}"/>
-              </a:ext>
-            </a:extLst>
-          </p:cNvPr>
-          <p:cNvSpPr>
-            <a:spLocks noGrp="1"/>
-          </p:cNvSpPr>
-          <p:nvPr>
-            <p:ph type="ftr" sz="quarter" idx="19"/>
-          </p:nvPr>
-        </p:nvSpPr>
-        <p:spPr>
-          <a:xfrm>
-            <a:off x="4086351" y="6469380"/>
-            <a:ext cx="1130300" cy="180000"/>
-          </a:xfrm>
-        </p:spPr>
-        <p:txBody>
-          <a:bodyPr wrap="none" anchor="ctr">
-            <a:normAutofit/>
-          </a:bodyPr>
-          <a:lstStyle/>
-          <a:p>
-            <a:pPr>
-              <a:lnSpc>
-                <a:spcPct val="90000"/>
-              </a:lnSpc>
-              <a:spcAft>
-                <a:spcPts val="600"/>
-              </a:spcAft>
-            </a:pPr>
-            <a:r>
-              <a:rPr lang="en-US"/>
-              <a:t>Corbin Ferguson</a:t>
-            </a:r>
-          </a:p>
-        </p:txBody>
-      </p:sp>
-      <p:sp>
-        <p:nvSpPr>
-          <p:cNvPr id="7" name="Slide Number Placeholder 6">
-            <a:extLst>
-              <a:ext uri="{FF2B5EF4-FFF2-40B4-BE49-F238E27FC236}">
-                <a16:creationId xmlns:a16="http://schemas.microsoft.com/office/drawing/2014/main" id="{FF861633-550D-9192-7E16-88623F1FDD40}"/>
-              </a:ext>
-            </a:extLst>
-          </p:cNvPr>
-          <p:cNvSpPr>
-            <a:spLocks noGrp="1"/>
-          </p:cNvSpPr>
-          <p:nvPr>
-            <p:ph type="sldNum" sz="quarter" idx="20"/>
-          </p:nvPr>
-        </p:nvSpPr>
-        <p:spPr>
-          <a:xfrm>
-            <a:off x="1633051" y="6469380"/>
-            <a:ext cx="571500" cy="180000"/>
-          </a:xfrm>
-        </p:spPr>
-        <p:txBody>
-          <a:bodyPr wrap="none" anchor="ctr">
-            <a:normAutofit/>
-          </a:bodyPr>
-          <a:lstStyle/>
-          <a:p>
-            <a:pPr>
-              <a:lnSpc>
-                <a:spcPct val="90000"/>
-              </a:lnSpc>
-              <a:spcAft>
-                <a:spcPts val="600"/>
-              </a:spcAft>
-            </a:pPr>
-            <a:r>
-              <a:rPr lang="en-US"/>
-              <a:t>Slide </a:t>
-            </a:r>
-            <a:fld id="{C6F8E2D1-BFA0-484A-B7F1-E348F2594759}" type="slidenum">
-              <a:rPr lang="en-US" smtClean="0"/>
-              <a:pPr>
-                <a:lnSpc>
-                  <a:spcPct val="90000"/>
-                </a:lnSpc>
-                <a:spcAft>
-                  <a:spcPts val="600"/>
-                </a:spcAft>
-              </a:pPr>
-              <a:t>14</a:t>
-            </a:fld>
-            <a:endParaRPr lang="en-US"/>
-          </a:p>
-        </p:txBody>
-      </p:sp>
-      <p:sp>
-        <p:nvSpPr>
-          <p:cNvPr id="4" name="Date Placeholder 3">
-            <a:extLst>
-              <a:ext uri="{FF2B5EF4-FFF2-40B4-BE49-F238E27FC236}">
-                <a16:creationId xmlns:a16="http://schemas.microsoft.com/office/drawing/2014/main" id="{5D0DCAB8-9A4F-6068-74B2-D5C8356B650C}"/>
-              </a:ext>
-            </a:extLst>
-          </p:cNvPr>
-          <p:cNvSpPr>
-            <a:spLocks noGrp="1"/>
-          </p:cNvSpPr>
-          <p:nvPr>
-            <p:ph type="dt" sz="half" idx="21"/>
-          </p:nvPr>
-        </p:nvSpPr>
-        <p:spPr>
-          <a:xfrm>
-            <a:off x="334963" y="194736"/>
-            <a:ext cx="9674225" cy="180000"/>
-          </a:xfrm>
-        </p:spPr>
-        <p:txBody>
-          <a:bodyPr wrap="none" anchor="t">
-            <a:normAutofit/>
-          </a:bodyPr>
-          <a:lstStyle/>
-          <a:p>
-            <a:pPr>
-              <a:lnSpc>
-                <a:spcPct val="90000"/>
-              </a:lnSpc>
-              <a:spcAft>
-                <a:spcPts val="600"/>
-              </a:spcAft>
-            </a:pPr>
-            <a:r>
-              <a:rPr lang="en-US"/>
-              <a:t>L5X Automation Build Tool</a:t>
-            </a:r>
-          </a:p>
-        </p:txBody>
-      </p:sp>
-      <p:sp>
-        <p:nvSpPr>
-          <p:cNvPr id="2" name="Title 1">
-            <a:extLst>
-              <a:ext uri="{FF2B5EF4-FFF2-40B4-BE49-F238E27FC236}">
-                <a16:creationId xmlns:a16="http://schemas.microsoft.com/office/drawing/2014/main" id="{5EBCB58C-1369-EDD7-5D5E-7C1E1415DB2E}"/>
-              </a:ext>
-            </a:extLst>
-          </p:cNvPr>
-          <p:cNvSpPr>
-            <a:spLocks noGrp="1"/>
-          </p:cNvSpPr>
-          <p:nvPr>
-            <p:ph type="title"/>
-          </p:nvPr>
-        </p:nvSpPr>
-        <p:spPr>
-          <a:xfrm>
-            <a:off x="334963" y="620690"/>
-            <a:ext cx="11522075" cy="360041"/>
-          </a:xfrm>
-        </p:spPr>
-        <p:txBody>
-          <a:bodyPr wrap="none" anchor="t">
-            <a:normAutofit/>
-          </a:bodyPr>
-          <a:lstStyle/>
-          <a:p>
-            <a:r>
-              <a:rPr lang="en-US" dirty="0"/>
-              <a:t>Class Diagram Cont.</a:t>
-            </a:r>
-          </a:p>
-        </p:txBody>
-      </p:sp>
-    </p:spTree>
-    <p:extLst>
-      <p:ext uri="{BB962C8B-B14F-4D97-AF65-F5344CB8AC3E}">
-        <p14:creationId xmlns:p14="http://schemas.microsoft.com/office/powerpoint/2010/main" val="1692918807"/>
-      </p:ext>
-    </p:extLst>
-  </p:cSld>
-  <p:clrMapOvr>
-    <a:masterClrMapping/>
-  </p:clrMapOvr>
-</p:sld>
-</file>
-
-<file path=ppt/slides/slide15.xml><?xml version="1.0" encoding="utf-8"?>
-<p:sld xmlns:a="http://schemas.openxmlformats.org/drawingml/2006/main" xmlns:r="http://schemas.openxmlformats.org/officeDocument/2006/relationships" xmlns:p="http://schemas.openxmlformats.org/presentationml/2006/main">
-  <p:cSld>
-    <p:spTree>
-      <p:nvGrpSpPr>
-        <p:cNvPr id="1" name="">
-          <a:extLst>
-            <a:ext uri="{FF2B5EF4-FFF2-40B4-BE49-F238E27FC236}">
-              <a16:creationId xmlns:a16="http://schemas.microsoft.com/office/drawing/2014/main" id="{93938A11-EECC-9BC6-7865-435054160CD9}"/>
-            </a:ext>
-          </a:extLst>
-        </p:cNvPr>
-        <p:cNvGrpSpPr/>
-        <p:nvPr/>
-      </p:nvGrpSpPr>
-      <p:grpSpPr>
-        <a:xfrm>
-          <a:off x="0" y="0"/>
-          <a:ext cx="0" cy="0"/>
-          <a:chOff x="0" y="0"/>
-          <a:chExt cx="0" cy="0"/>
-        </a:xfrm>
-      </p:grpSpPr>
-      <p:sp>
-        <p:nvSpPr>
-          <p:cNvPr id="2" name="Title 1">
-            <a:extLst>
-              <a:ext uri="{FF2B5EF4-FFF2-40B4-BE49-F238E27FC236}">
-                <a16:creationId xmlns:a16="http://schemas.microsoft.com/office/drawing/2014/main" id="{2A18B76F-2AF4-F180-30B2-B28BCC59D004}"/>
-              </a:ext>
-            </a:extLst>
-          </p:cNvPr>
-          <p:cNvSpPr>
-            <a:spLocks noGrp="1"/>
-          </p:cNvSpPr>
-          <p:nvPr>
-            <p:ph type="title"/>
-          </p:nvPr>
-        </p:nvSpPr>
-        <p:spPr>
-          <a:xfrm>
-            <a:off x="334963" y="620690"/>
-            <a:ext cx="5903913" cy="360041"/>
-          </a:xfrm>
-        </p:spPr>
-        <p:txBody>
-          <a:bodyPr/>
-          <a:lstStyle/>
-          <a:p>
-            <a:r>
-              <a:rPr lang="en-US" dirty="0"/>
-              <a:t>New Elements Sequences Charts</a:t>
-            </a:r>
-          </a:p>
-        </p:txBody>
-      </p:sp>
-      <p:sp>
-        <p:nvSpPr>
-          <p:cNvPr id="4" name="Date Placeholder 3">
-            <a:extLst>
-              <a:ext uri="{FF2B5EF4-FFF2-40B4-BE49-F238E27FC236}">
-                <a16:creationId xmlns:a16="http://schemas.microsoft.com/office/drawing/2014/main" id="{9A01F89D-9B16-8125-D461-9AF251E3A9E1}"/>
-              </a:ext>
-            </a:extLst>
-          </p:cNvPr>
-          <p:cNvSpPr>
-            <a:spLocks noGrp="1"/>
-          </p:cNvSpPr>
-          <p:nvPr>
-            <p:ph type="dt" sz="half" idx="10"/>
-          </p:nvPr>
-        </p:nvSpPr>
-        <p:spPr/>
-        <p:txBody>
-          <a:bodyPr/>
-          <a:lstStyle/>
-          <a:p>
-            <a:r>
-              <a:rPr lang="en-US"/>
-              <a:t>L5X Automation Build Tool</a:t>
-            </a:r>
-            <a:endParaRPr lang="en-US" dirty="0"/>
-          </a:p>
-        </p:txBody>
-      </p:sp>
-      <p:sp>
-        <p:nvSpPr>
-          <p:cNvPr id="7" name="Slide Number Placeholder 6">
-            <a:extLst>
-              <a:ext uri="{FF2B5EF4-FFF2-40B4-BE49-F238E27FC236}">
-                <a16:creationId xmlns:a16="http://schemas.microsoft.com/office/drawing/2014/main" id="{0BAF9346-2F50-F0FB-C237-28D282CCCF63}"/>
-              </a:ext>
-            </a:extLst>
-          </p:cNvPr>
-          <p:cNvSpPr>
-            <a:spLocks noGrp="1"/>
-          </p:cNvSpPr>
-          <p:nvPr>
-            <p:ph type="sldNum" sz="quarter" idx="12"/>
-          </p:nvPr>
-        </p:nvSpPr>
-        <p:spPr/>
-        <p:txBody>
-          <a:bodyPr/>
-          <a:lstStyle/>
-          <a:p>
-            <a:r>
-              <a:rPr lang="en-US"/>
-              <a:t>Slide </a:t>
-            </a:r>
-            <a:fld id="{78C39363-BD0C-4CE6-8DE9-7D78215F2B9F}" type="slidenum">
-              <a:rPr lang="en-US" smtClean="0"/>
-              <a:t>15</a:t>
-            </a:fld>
-            <a:endParaRPr lang="en-US" dirty="0"/>
-          </a:p>
-        </p:txBody>
-      </p:sp>
-      <p:sp>
-        <p:nvSpPr>
-          <p:cNvPr id="8" name="Footer Placeholder 7">
-            <a:extLst>
-              <a:ext uri="{FF2B5EF4-FFF2-40B4-BE49-F238E27FC236}">
-                <a16:creationId xmlns:a16="http://schemas.microsoft.com/office/drawing/2014/main" id="{9EB94696-3F28-AFA0-7505-55910BF18FFA}"/>
-              </a:ext>
-            </a:extLst>
-          </p:cNvPr>
-          <p:cNvSpPr>
-            <a:spLocks noGrp="1"/>
-          </p:cNvSpPr>
-          <p:nvPr>
-            <p:ph type="ftr" sz="quarter" idx="11"/>
-          </p:nvPr>
-        </p:nvSpPr>
-        <p:spPr/>
-        <p:txBody>
-          <a:bodyPr/>
-          <a:lstStyle/>
-          <a:p>
-            <a:r>
-              <a:rPr lang="en-US"/>
-              <a:t>Corbin Ferguson</a:t>
-            </a:r>
-            <a:endParaRPr lang="en-US" dirty="0"/>
-          </a:p>
-        </p:txBody>
-      </p:sp>
-      <p:pic>
-        <p:nvPicPr>
-          <p:cNvPr id="3074" name="Picture 2">
-            <a:extLst>
-              <a:ext uri="{FF2B5EF4-FFF2-40B4-BE49-F238E27FC236}">
-                <a16:creationId xmlns:a16="http://schemas.microsoft.com/office/drawing/2014/main" id="{72CA8AB4-E276-87CC-8117-E47CD1C46076}"/>
-              </a:ext>
-            </a:extLst>
-          </p:cNvPr>
-          <p:cNvPicPr>
-            <a:picLocks noChangeAspect="1" noChangeArrowheads="1"/>
-          </p:cNvPicPr>
-          <p:nvPr/>
-        </p:nvPicPr>
-        <p:blipFill>
-          <a:blip r:embed="rId2" cstate="print">
-            <a:extLst>
-              <a:ext uri="{28A0092B-C50C-407E-A947-70E740481C1C}">
-                <a14:useLocalDpi xmlns:a14="http://schemas.microsoft.com/office/drawing/2010/main" val="0"/>
-              </a:ext>
-            </a:extLst>
-          </a:blip>
-          <a:srcRect/>
-          <a:stretch>
-            <a:fillRect/>
-          </a:stretch>
-        </p:blipFill>
-        <p:spPr bwMode="auto">
-          <a:xfrm>
-            <a:off x="6238876" y="89360"/>
-            <a:ext cx="5867400" cy="6116194"/>
-          </a:xfrm>
-          <a:prstGeom prst="rect">
-            <a:avLst/>
-          </a:prstGeom>
-          <a:noFill/>
-          <a:extLst>
-            <a:ext uri="{909E8E84-426E-40DD-AFC4-6F175D3DCCD1}">
-              <a14:hiddenFill xmlns:a14="http://schemas.microsoft.com/office/drawing/2010/main">
-                <a:solidFill>
-                  <a:srgbClr val="FFFFFF"/>
-                </a:solidFill>
-              </a14:hiddenFill>
-            </a:ext>
-          </a:extLst>
-        </p:spPr>
-      </p:pic>
-      <p:pic>
-        <p:nvPicPr>
-          <p:cNvPr id="3078" name="Picture 6">
-            <a:extLst>
-              <a:ext uri="{FF2B5EF4-FFF2-40B4-BE49-F238E27FC236}">
-                <a16:creationId xmlns:a16="http://schemas.microsoft.com/office/drawing/2014/main" id="{0AE53FD7-985C-4CAE-5485-DA0AC6FB44D1}"/>
-              </a:ext>
-            </a:extLst>
-          </p:cNvPr>
-          <p:cNvPicPr>
-            <a:picLocks noChangeAspect="1" noChangeArrowheads="1"/>
-          </p:cNvPicPr>
-          <p:nvPr/>
-        </p:nvPicPr>
-        <p:blipFill rotWithShape="1">
-          <a:blip r:embed="rId3" cstate="print">
-            <a:extLst>
-              <a:ext uri="{28A0092B-C50C-407E-A947-70E740481C1C}">
-                <a14:useLocalDpi xmlns:a14="http://schemas.microsoft.com/office/drawing/2010/main" val="0"/>
-              </a:ext>
-            </a:extLst>
-          </a:blip>
-          <a:srcRect r="7667"/>
-          <a:stretch>
-            <a:fillRect/>
-          </a:stretch>
-        </p:blipFill>
-        <p:spPr bwMode="auto">
-          <a:xfrm>
-            <a:off x="82103" y="1129116"/>
-            <a:ext cx="6156773" cy="4734269"/>
-          </a:xfrm>
-          <a:prstGeom prst="rect">
-            <a:avLst/>
-          </a:prstGeom>
-          <a:noFill/>
-          <a:extLst>
-            <a:ext uri="{909E8E84-426E-40DD-AFC4-6F175D3DCCD1}">
-              <a14:hiddenFill xmlns:a14="http://schemas.microsoft.com/office/drawing/2010/main">
-                <a:solidFill>
-                  <a:srgbClr val="FFFFFF"/>
-                </a:solidFill>
-              </a14:hiddenFill>
-            </a:ext>
-          </a:extLst>
-        </p:spPr>
-      </p:pic>
-    </p:spTree>
-    <p:extLst>
-      <p:ext uri="{BB962C8B-B14F-4D97-AF65-F5344CB8AC3E}">
-        <p14:creationId xmlns:p14="http://schemas.microsoft.com/office/powerpoint/2010/main" val="1350697150"/>
-      </p:ext>
-    </p:extLst>
-  </p:cSld>
-  <p:clrMapOvr>
-    <a:masterClrMapping/>
-  </p:clrMapOvr>
-</p:sld>
-</file>
-
-<file path=ppt/slides/slide16.xml><?xml version="1.0" encoding="utf-8"?>
-<p:sld xmlns:a="http://schemas.openxmlformats.org/drawingml/2006/main" xmlns:r="http://schemas.openxmlformats.org/officeDocument/2006/relationships" xmlns:p="http://schemas.openxmlformats.org/presentationml/2006/main">
-  <p:cSld>
-    <p:spTree>
-      <p:nvGrpSpPr>
-        <p:cNvPr id="1" name="">
-          <a:extLst>
-            <a:ext uri="{FF2B5EF4-FFF2-40B4-BE49-F238E27FC236}">
-              <a16:creationId xmlns:a16="http://schemas.microsoft.com/office/drawing/2014/main" id="{EF9DF529-63FE-ADF8-53ED-6BE7FB507424}"/>
-            </a:ext>
-          </a:extLst>
-        </p:cNvPr>
-        <p:cNvGrpSpPr/>
-        <p:nvPr/>
-      </p:nvGrpSpPr>
-      <p:grpSpPr>
-        <a:xfrm>
-          <a:off x="0" y="0"/>
-          <a:ext cx="0" cy="0"/>
-          <a:chOff x="0" y="0"/>
-          <a:chExt cx="0" cy="0"/>
-        </a:xfrm>
-      </p:grpSpPr>
-      <p:sp>
-        <p:nvSpPr>
-          <p:cNvPr id="2" name="Title 1">
-            <a:extLst>
-              <a:ext uri="{FF2B5EF4-FFF2-40B4-BE49-F238E27FC236}">
-                <a16:creationId xmlns:a16="http://schemas.microsoft.com/office/drawing/2014/main" id="{1BEC76E2-5D10-E119-28DF-87EA10623968}"/>
-              </a:ext>
-            </a:extLst>
-          </p:cNvPr>
-          <p:cNvSpPr>
-            <a:spLocks noGrp="1"/>
-          </p:cNvSpPr>
-          <p:nvPr>
-            <p:ph type="title"/>
-          </p:nvPr>
-        </p:nvSpPr>
-        <p:spPr>
-          <a:xfrm>
-            <a:off x="334963" y="620690"/>
-            <a:ext cx="7018337" cy="360041"/>
-          </a:xfrm>
-        </p:spPr>
-        <p:txBody>
-          <a:bodyPr/>
-          <a:lstStyle/>
-          <a:p>
-            <a:r>
-              <a:rPr lang="en-US" dirty="0"/>
-              <a:t>Element Editing Sequences Charts</a:t>
-            </a:r>
-          </a:p>
-        </p:txBody>
-      </p:sp>
-      <p:sp>
-        <p:nvSpPr>
-          <p:cNvPr id="4" name="Date Placeholder 3">
-            <a:extLst>
-              <a:ext uri="{FF2B5EF4-FFF2-40B4-BE49-F238E27FC236}">
-                <a16:creationId xmlns:a16="http://schemas.microsoft.com/office/drawing/2014/main" id="{4AB04ED2-D7AC-3763-1039-630C099F3A4C}"/>
-              </a:ext>
-            </a:extLst>
-          </p:cNvPr>
-          <p:cNvSpPr>
-            <a:spLocks noGrp="1"/>
-          </p:cNvSpPr>
-          <p:nvPr>
-            <p:ph type="dt" sz="half" idx="10"/>
-          </p:nvPr>
-        </p:nvSpPr>
-        <p:spPr/>
-        <p:txBody>
-          <a:bodyPr/>
-          <a:lstStyle/>
-          <a:p>
-            <a:r>
-              <a:rPr lang="en-US"/>
-              <a:t>L5X Automation Build Tool</a:t>
-            </a:r>
-            <a:endParaRPr lang="en-US" dirty="0"/>
-          </a:p>
-        </p:txBody>
-      </p:sp>
-      <p:sp>
-        <p:nvSpPr>
-          <p:cNvPr id="7" name="Slide Number Placeholder 6">
-            <a:extLst>
-              <a:ext uri="{FF2B5EF4-FFF2-40B4-BE49-F238E27FC236}">
-                <a16:creationId xmlns:a16="http://schemas.microsoft.com/office/drawing/2014/main" id="{FA5C2B7C-90AB-FD77-3161-D3654154603E}"/>
-              </a:ext>
-            </a:extLst>
-          </p:cNvPr>
-          <p:cNvSpPr>
-            <a:spLocks noGrp="1"/>
-          </p:cNvSpPr>
-          <p:nvPr>
-            <p:ph type="sldNum" sz="quarter" idx="12"/>
-          </p:nvPr>
-        </p:nvSpPr>
-        <p:spPr/>
-        <p:txBody>
-          <a:bodyPr/>
-          <a:lstStyle/>
-          <a:p>
-            <a:r>
-              <a:rPr lang="en-US"/>
-              <a:t>Slide </a:t>
-            </a:r>
-            <a:fld id="{599786A8-973E-49A8-9C43-0BE71F98A081}" type="slidenum">
-              <a:rPr lang="en-US" smtClean="0"/>
-              <a:t>16</a:t>
-            </a:fld>
-            <a:endParaRPr lang="en-US" dirty="0"/>
-          </a:p>
-        </p:txBody>
-      </p:sp>
-      <p:sp>
-        <p:nvSpPr>
-          <p:cNvPr id="8" name="Footer Placeholder 7">
-            <a:extLst>
-              <a:ext uri="{FF2B5EF4-FFF2-40B4-BE49-F238E27FC236}">
-                <a16:creationId xmlns:a16="http://schemas.microsoft.com/office/drawing/2014/main" id="{C2F6AD5B-E994-0A83-78C8-94E2F6F39074}"/>
-              </a:ext>
-            </a:extLst>
-          </p:cNvPr>
-          <p:cNvSpPr>
-            <a:spLocks noGrp="1"/>
-          </p:cNvSpPr>
-          <p:nvPr>
-            <p:ph type="ftr" sz="quarter" idx="11"/>
-          </p:nvPr>
-        </p:nvSpPr>
-        <p:spPr/>
-        <p:txBody>
-          <a:bodyPr/>
-          <a:lstStyle/>
-          <a:p>
-            <a:r>
-              <a:rPr lang="en-US"/>
-              <a:t>Corbin Ferguson</a:t>
-            </a:r>
-            <a:endParaRPr lang="en-US" dirty="0"/>
-          </a:p>
-        </p:txBody>
-      </p:sp>
-      <p:pic>
-        <p:nvPicPr>
-          <p:cNvPr id="4100" name="Picture 4">
-            <a:extLst>
-              <a:ext uri="{FF2B5EF4-FFF2-40B4-BE49-F238E27FC236}">
-                <a16:creationId xmlns:a16="http://schemas.microsoft.com/office/drawing/2014/main" id="{BB53261F-4A38-01BF-14A0-AC05F4918629}"/>
-              </a:ext>
-            </a:extLst>
-          </p:cNvPr>
-          <p:cNvPicPr>
-            <a:picLocks noChangeAspect="1" noChangeArrowheads="1"/>
-          </p:cNvPicPr>
-          <p:nvPr/>
-        </p:nvPicPr>
-        <p:blipFill>
-          <a:blip r:embed="rId2" cstate="print">
-            <a:extLst>
-              <a:ext uri="{28A0092B-C50C-407E-A947-70E740481C1C}">
-                <a14:useLocalDpi xmlns:a14="http://schemas.microsoft.com/office/drawing/2010/main" val="0"/>
-              </a:ext>
-            </a:extLst>
-          </a:blip>
-          <a:srcRect/>
-          <a:stretch>
-            <a:fillRect/>
-          </a:stretch>
-        </p:blipFill>
-        <p:spPr bwMode="auto">
-          <a:xfrm>
-            <a:off x="5660591" y="194736"/>
-            <a:ext cx="6482994" cy="5720289"/>
-          </a:xfrm>
-          <a:prstGeom prst="rect">
-            <a:avLst/>
-          </a:prstGeom>
-          <a:noFill/>
-          <a:extLst>
-            <a:ext uri="{909E8E84-426E-40DD-AFC4-6F175D3DCCD1}">
-              <a14:hiddenFill xmlns:a14="http://schemas.microsoft.com/office/drawing/2010/main">
-                <a:solidFill>
-                  <a:srgbClr val="FFFFFF"/>
-                </a:solidFill>
-              </a14:hiddenFill>
-            </a:ext>
-          </a:extLst>
-        </p:spPr>
-      </p:pic>
-      <p:pic>
-        <p:nvPicPr>
-          <p:cNvPr id="4102" name="Picture 6">
-            <a:extLst>
-              <a:ext uri="{FF2B5EF4-FFF2-40B4-BE49-F238E27FC236}">
-                <a16:creationId xmlns:a16="http://schemas.microsoft.com/office/drawing/2014/main" id="{1369CFC5-7E6D-03BD-C62A-74FBF0D2D610}"/>
-              </a:ext>
-            </a:extLst>
-          </p:cNvPr>
-          <p:cNvPicPr>
-            <a:picLocks noChangeAspect="1" noChangeArrowheads="1"/>
-          </p:cNvPicPr>
-          <p:nvPr/>
-        </p:nvPicPr>
-        <p:blipFill>
-          <a:blip r:embed="rId3" cstate="print">
-            <a:extLst>
-              <a:ext uri="{28A0092B-C50C-407E-A947-70E740481C1C}">
-                <a14:useLocalDpi xmlns:a14="http://schemas.microsoft.com/office/drawing/2010/main" val="0"/>
-              </a:ext>
-            </a:extLst>
-          </a:blip>
-          <a:srcRect/>
-          <a:stretch>
-            <a:fillRect/>
-          </a:stretch>
-        </p:blipFill>
-        <p:spPr bwMode="auto">
-          <a:xfrm>
-            <a:off x="48416" y="1482391"/>
-            <a:ext cx="5677702" cy="3727784"/>
-          </a:xfrm>
-          <a:prstGeom prst="rect">
-            <a:avLst/>
-          </a:prstGeom>
-          <a:noFill/>
-          <a:extLst>
-            <a:ext uri="{909E8E84-426E-40DD-AFC4-6F175D3DCCD1}">
-              <a14:hiddenFill xmlns:a14="http://schemas.microsoft.com/office/drawing/2010/main">
-                <a:solidFill>
-                  <a:srgbClr val="FFFFFF"/>
-                </a:solidFill>
-              </a14:hiddenFill>
-            </a:ext>
-          </a:extLst>
-        </p:spPr>
-      </p:pic>
-    </p:spTree>
-    <p:extLst>
-      <p:ext uri="{BB962C8B-B14F-4D97-AF65-F5344CB8AC3E}">
-        <p14:creationId xmlns:p14="http://schemas.microsoft.com/office/powerpoint/2010/main" val="3038692604"/>
-      </p:ext>
-    </p:extLst>
-  </p:cSld>
-  <p:clrMapOvr>
-    <a:masterClrMapping/>
-  </p:clrMapOvr>
-</p:sld>
-</file>
-
-<file path=ppt/slides/slide17.xml><?xml version="1.0" encoding="utf-8"?>
-<p:sld xmlns:a="http://schemas.openxmlformats.org/drawingml/2006/main" xmlns:r="http://schemas.openxmlformats.org/officeDocument/2006/relationships" xmlns:p="http://schemas.openxmlformats.org/presentationml/2006/main">
-  <p:cSld>
-    <p:spTree>
-      <p:nvGrpSpPr>
-        <p:cNvPr id="1" name="">
-          <a:extLst>
-            <a:ext uri="{FF2B5EF4-FFF2-40B4-BE49-F238E27FC236}">
-              <a16:creationId xmlns:a16="http://schemas.microsoft.com/office/drawing/2014/main" id="{9B0625B0-1796-38B2-E698-3B34B20C980A}"/>
-            </a:ext>
-          </a:extLst>
-        </p:cNvPr>
-        <p:cNvGrpSpPr/>
-        <p:nvPr/>
-      </p:nvGrpSpPr>
-      <p:grpSpPr>
-        <a:xfrm>
-          <a:off x="0" y="0"/>
-          <a:ext cx="0" cy="0"/>
-          <a:chOff x="0" y="0"/>
-          <a:chExt cx="0" cy="0"/>
-        </a:xfrm>
-      </p:grpSpPr>
-      <p:sp>
-        <p:nvSpPr>
-          <p:cNvPr id="2" name="Title 1">
-            <a:extLst>
-              <a:ext uri="{FF2B5EF4-FFF2-40B4-BE49-F238E27FC236}">
-                <a16:creationId xmlns:a16="http://schemas.microsoft.com/office/drawing/2014/main" id="{2701FC85-1B07-44D2-FDE2-EF7086F579B8}"/>
-              </a:ext>
-            </a:extLst>
-          </p:cNvPr>
-          <p:cNvSpPr>
-            <a:spLocks noGrp="1"/>
-          </p:cNvSpPr>
-          <p:nvPr>
-            <p:ph type="title"/>
-          </p:nvPr>
-        </p:nvSpPr>
-        <p:spPr>
-          <a:xfrm>
-            <a:off x="334963" y="620690"/>
-            <a:ext cx="5227637" cy="360041"/>
-          </a:xfrm>
-        </p:spPr>
-        <p:txBody>
-          <a:bodyPr/>
-          <a:lstStyle/>
-          <a:p>
-            <a:r>
-              <a:rPr lang="en-US" dirty="0"/>
-              <a:t>File Management Sequences Charts</a:t>
-            </a:r>
-          </a:p>
-        </p:txBody>
-      </p:sp>
-      <p:sp>
-        <p:nvSpPr>
-          <p:cNvPr id="4" name="Date Placeholder 3">
-            <a:extLst>
-              <a:ext uri="{FF2B5EF4-FFF2-40B4-BE49-F238E27FC236}">
-                <a16:creationId xmlns:a16="http://schemas.microsoft.com/office/drawing/2014/main" id="{BFB5A5A9-9FDA-C1A8-1065-A63A10A54E0E}"/>
-              </a:ext>
-            </a:extLst>
-          </p:cNvPr>
-          <p:cNvSpPr>
-            <a:spLocks noGrp="1"/>
-          </p:cNvSpPr>
-          <p:nvPr>
-            <p:ph type="dt" sz="half" idx="10"/>
-          </p:nvPr>
-        </p:nvSpPr>
-        <p:spPr/>
-        <p:txBody>
-          <a:bodyPr/>
-          <a:lstStyle/>
-          <a:p>
-            <a:r>
-              <a:rPr lang="en-US"/>
-              <a:t>L5X Automation Build Tool</a:t>
-            </a:r>
-            <a:endParaRPr lang="en-US" dirty="0"/>
-          </a:p>
-        </p:txBody>
-      </p:sp>
-      <p:sp>
-        <p:nvSpPr>
-          <p:cNvPr id="7" name="Slide Number Placeholder 6">
-            <a:extLst>
-              <a:ext uri="{FF2B5EF4-FFF2-40B4-BE49-F238E27FC236}">
-                <a16:creationId xmlns:a16="http://schemas.microsoft.com/office/drawing/2014/main" id="{18C1CD43-8250-6B96-E75B-3EB27A7B3149}"/>
-              </a:ext>
-            </a:extLst>
-          </p:cNvPr>
-          <p:cNvSpPr>
-            <a:spLocks noGrp="1"/>
-          </p:cNvSpPr>
-          <p:nvPr>
-            <p:ph type="sldNum" sz="quarter" idx="12"/>
-          </p:nvPr>
-        </p:nvSpPr>
-        <p:spPr/>
-        <p:txBody>
-          <a:bodyPr/>
-          <a:lstStyle/>
-          <a:p>
-            <a:r>
-              <a:rPr lang="en-US"/>
-              <a:t>Slide </a:t>
-            </a:r>
-            <a:fld id="{DEE51C30-41E2-4709-97ED-40F16AE6C836}" type="slidenum">
-              <a:rPr lang="en-US" smtClean="0"/>
-              <a:t>17</a:t>
-            </a:fld>
-            <a:endParaRPr lang="en-US" dirty="0"/>
-          </a:p>
-        </p:txBody>
-      </p:sp>
-      <p:sp>
-        <p:nvSpPr>
-          <p:cNvPr id="8" name="Footer Placeholder 7">
-            <a:extLst>
-              <a:ext uri="{FF2B5EF4-FFF2-40B4-BE49-F238E27FC236}">
-                <a16:creationId xmlns:a16="http://schemas.microsoft.com/office/drawing/2014/main" id="{921AD08B-0B64-BF87-BC8F-D31074D3F4FA}"/>
-              </a:ext>
-            </a:extLst>
-          </p:cNvPr>
-          <p:cNvSpPr>
-            <a:spLocks noGrp="1"/>
-          </p:cNvSpPr>
-          <p:nvPr>
-            <p:ph type="ftr" sz="quarter" idx="11"/>
-          </p:nvPr>
-        </p:nvSpPr>
-        <p:spPr/>
-        <p:txBody>
-          <a:bodyPr/>
-          <a:lstStyle/>
-          <a:p>
-            <a:r>
-              <a:rPr lang="en-US"/>
-              <a:t>Corbin Ferguson</a:t>
-            </a:r>
-            <a:endParaRPr lang="en-US" dirty="0"/>
-          </a:p>
-        </p:txBody>
-      </p:sp>
-      <p:pic>
-        <p:nvPicPr>
-          <p:cNvPr id="5124" name="Picture 4">
-            <a:extLst>
-              <a:ext uri="{FF2B5EF4-FFF2-40B4-BE49-F238E27FC236}">
-                <a16:creationId xmlns:a16="http://schemas.microsoft.com/office/drawing/2014/main" id="{DC466C96-0AB2-BB88-7FF7-FDB1E79771AA}"/>
-              </a:ext>
-            </a:extLst>
-          </p:cNvPr>
-          <p:cNvPicPr>
-            <a:picLocks noChangeAspect="1" noChangeArrowheads="1"/>
-          </p:cNvPicPr>
-          <p:nvPr/>
-        </p:nvPicPr>
-        <p:blipFill>
-          <a:blip r:embed="rId2" cstate="print">
-            <a:extLst>
-              <a:ext uri="{28A0092B-C50C-407E-A947-70E740481C1C}">
-                <a14:useLocalDpi xmlns:a14="http://schemas.microsoft.com/office/drawing/2010/main" val="0"/>
-              </a:ext>
-            </a:extLst>
-          </a:blip>
-          <a:srcRect/>
-          <a:stretch>
-            <a:fillRect/>
-          </a:stretch>
-        </p:blipFill>
-        <p:spPr bwMode="auto">
-          <a:xfrm>
-            <a:off x="334962" y="3657600"/>
-            <a:ext cx="4882802" cy="1885950"/>
-          </a:xfrm>
-          <a:prstGeom prst="rect">
-            <a:avLst/>
-          </a:prstGeom>
-          <a:noFill/>
-          <a:extLst>
-            <a:ext uri="{909E8E84-426E-40DD-AFC4-6F175D3DCCD1}">
-              <a14:hiddenFill xmlns:a14="http://schemas.microsoft.com/office/drawing/2010/main">
-                <a:solidFill>
-                  <a:srgbClr val="FFFFFF"/>
-                </a:solidFill>
-              </a14:hiddenFill>
-            </a:ext>
-          </a:extLst>
-        </p:spPr>
-      </p:pic>
-      <p:pic>
-        <p:nvPicPr>
-          <p:cNvPr id="5126" name="Picture 6">
-            <a:extLst>
-              <a:ext uri="{FF2B5EF4-FFF2-40B4-BE49-F238E27FC236}">
-                <a16:creationId xmlns:a16="http://schemas.microsoft.com/office/drawing/2014/main" id="{2FBC38D1-F10C-60BD-0423-A276CE6B9F84}"/>
-              </a:ext>
-            </a:extLst>
-          </p:cNvPr>
-          <p:cNvPicPr>
-            <a:picLocks noChangeAspect="1" noChangeArrowheads="1"/>
-          </p:cNvPicPr>
-          <p:nvPr/>
-        </p:nvPicPr>
-        <p:blipFill>
-          <a:blip r:embed="rId3" cstate="print">
-            <a:extLst>
-              <a:ext uri="{28A0092B-C50C-407E-A947-70E740481C1C}">
-                <a14:useLocalDpi xmlns:a14="http://schemas.microsoft.com/office/drawing/2010/main" val="0"/>
-              </a:ext>
-            </a:extLst>
-          </a:blip>
-          <a:srcRect/>
-          <a:stretch>
-            <a:fillRect/>
-          </a:stretch>
-        </p:blipFill>
-        <p:spPr bwMode="auto">
-          <a:xfrm>
-            <a:off x="5216650" y="1274310"/>
-            <a:ext cx="5703591" cy="2154690"/>
-          </a:xfrm>
-          <a:prstGeom prst="rect">
-            <a:avLst/>
-          </a:prstGeom>
-          <a:noFill/>
-          <a:extLst>
-            <a:ext uri="{909E8E84-426E-40DD-AFC4-6F175D3DCCD1}">
-              <a14:hiddenFill xmlns:a14="http://schemas.microsoft.com/office/drawing/2010/main">
-                <a:solidFill>
-                  <a:srgbClr val="FFFFFF"/>
-                </a:solidFill>
-              </a14:hiddenFill>
-            </a:ext>
-          </a:extLst>
-        </p:spPr>
-      </p:pic>
-      <p:pic>
-        <p:nvPicPr>
-          <p:cNvPr id="5130" name="Picture 10">
-            <a:extLst>
-              <a:ext uri="{FF2B5EF4-FFF2-40B4-BE49-F238E27FC236}">
-                <a16:creationId xmlns:a16="http://schemas.microsoft.com/office/drawing/2014/main" id="{B65222FB-CA7D-3194-4E01-2EC0ADCE666F}"/>
-              </a:ext>
-            </a:extLst>
-          </p:cNvPr>
-          <p:cNvPicPr>
-            <a:picLocks noChangeAspect="1" noChangeArrowheads="1"/>
-          </p:cNvPicPr>
-          <p:nvPr/>
-        </p:nvPicPr>
-        <p:blipFill>
-          <a:blip r:embed="rId4" cstate="print">
-            <a:extLst>
-              <a:ext uri="{28A0092B-C50C-407E-A947-70E740481C1C}">
-                <a14:useLocalDpi xmlns:a14="http://schemas.microsoft.com/office/drawing/2010/main" val="0"/>
-              </a:ext>
-            </a:extLst>
-          </a:blip>
-          <a:srcRect/>
-          <a:stretch>
-            <a:fillRect/>
-          </a:stretch>
-        </p:blipFill>
-        <p:spPr bwMode="auto">
-          <a:xfrm>
-            <a:off x="334962" y="1445743"/>
-            <a:ext cx="4880502" cy="2154690"/>
-          </a:xfrm>
-          <a:prstGeom prst="rect">
-            <a:avLst/>
-          </a:prstGeom>
-          <a:noFill/>
-          <a:extLst>
-            <a:ext uri="{909E8E84-426E-40DD-AFC4-6F175D3DCCD1}">
-              <a14:hiddenFill xmlns:a14="http://schemas.microsoft.com/office/drawing/2010/main">
-                <a:solidFill>
-                  <a:srgbClr val="FFFFFF"/>
-                </a:solidFill>
-              </a14:hiddenFill>
-            </a:ext>
-          </a:extLst>
-        </p:spPr>
-      </p:pic>
-      <p:pic>
-        <p:nvPicPr>
-          <p:cNvPr id="5132" name="Picture 12">
-            <a:extLst>
-              <a:ext uri="{FF2B5EF4-FFF2-40B4-BE49-F238E27FC236}">
-                <a16:creationId xmlns:a16="http://schemas.microsoft.com/office/drawing/2014/main" id="{4666DD03-80DA-70E0-19B8-82E5620169CE}"/>
-              </a:ext>
-            </a:extLst>
-          </p:cNvPr>
-          <p:cNvPicPr>
-            <a:picLocks noChangeAspect="1" noChangeArrowheads="1"/>
-          </p:cNvPicPr>
-          <p:nvPr/>
-        </p:nvPicPr>
-        <p:blipFill>
-          <a:blip r:embed="rId5">
-            <a:extLst>
-              <a:ext uri="{28A0092B-C50C-407E-A947-70E740481C1C}">
-                <a14:useLocalDpi xmlns:a14="http://schemas.microsoft.com/office/drawing/2010/main" val="0"/>
-              </a:ext>
-            </a:extLst>
-          </a:blip>
-          <a:srcRect/>
-          <a:stretch>
-            <a:fillRect/>
-          </a:stretch>
-        </p:blipFill>
-        <p:spPr bwMode="auto">
-          <a:xfrm>
-            <a:off x="5310187" y="3590907"/>
-            <a:ext cx="5618325" cy="2400317"/>
-          </a:xfrm>
-          <a:prstGeom prst="rect">
-            <a:avLst/>
-          </a:prstGeom>
-          <a:noFill/>
-          <a:extLst>
-            <a:ext uri="{909E8E84-426E-40DD-AFC4-6F175D3DCCD1}">
-              <a14:hiddenFill xmlns:a14="http://schemas.microsoft.com/office/drawing/2010/main">
-                <a:solidFill>
-                  <a:srgbClr val="FFFFFF"/>
-                </a:solidFill>
-              </a14:hiddenFill>
-            </a:ext>
-          </a:extLst>
-        </p:spPr>
-      </p:pic>
-    </p:spTree>
-    <p:extLst>
-      <p:ext uri="{BB962C8B-B14F-4D97-AF65-F5344CB8AC3E}">
-        <p14:creationId xmlns:p14="http://schemas.microsoft.com/office/powerpoint/2010/main" val="3092458060"/>
-      </p:ext>
-    </p:extLst>
-  </p:cSld>
-  <p:clrMapOvr>
-    <a:masterClrMapping/>
-  </p:clrMapOvr>
-</p:sld>
-</file>
-
-<file path=ppt/slides/slide18.xml><?xml version="1.0" encoding="utf-8"?>
 <p:sld xmlns:a="http://schemas.openxmlformats.org/drawingml/2006/main" xmlns:r="http://schemas.openxmlformats.org/officeDocument/2006/relationships" xmlns:p="http://schemas.openxmlformats.org/presentationml/2006/main">
   <p:cSld>
     <p:spTree>
@@ -22633,7 +20782,7 @@
             </a:r>
             <a:fld id="{32B897BE-5B46-4D7A-8E5C-716C3CDA6A39}" type="slidenum">
               <a:rPr lang="en-US" smtClean="0"/>
-              <a:t>18</a:t>
+              <a:t>14</a:t>
             </a:fld>
             <a:endParaRPr lang="en-US" dirty="0"/>
           </a:p>
@@ -22747,7 +20896,7 @@
 </p:sld>
 </file>
 
-<file path=ppt/slides/slide19.xml><?xml version="1.0" encoding="utf-8"?>
+<file path=ppt/slides/slide15.xml><?xml version="1.0" encoding="utf-8"?>
 <p:sld xmlns:a="http://schemas.openxmlformats.org/drawingml/2006/main" xmlns:r="http://schemas.openxmlformats.org/officeDocument/2006/relationships" xmlns:p="http://schemas.openxmlformats.org/presentationml/2006/main">
   <p:cSld>
     <p:spTree>
@@ -22985,7 +21134,7 @@
             </a:r>
             <a:fld id="{5BFF8BEA-C7AD-416A-8E1B-AC59D078A379}" type="slidenum">
               <a:rPr lang="en-US" smtClean="0"/>
-              <a:t>19</a:t>
+              <a:t>15</a:t>
             </a:fld>
             <a:endParaRPr lang="en-US" dirty="0"/>
           </a:p>
@@ -23033,236 +21182,7 @@
 </p:sld>
 </file>
 
-<file path=ppt/slides/slide2.xml><?xml version="1.0" encoding="utf-8"?>
-<p:sld xmlns:a="http://schemas.openxmlformats.org/drawingml/2006/main" xmlns:r="http://schemas.openxmlformats.org/officeDocument/2006/relationships" xmlns:p="http://schemas.openxmlformats.org/presentationml/2006/main">
-  <p:cSld>
-    <p:spTree>
-      <p:nvGrpSpPr>
-        <p:cNvPr id="1" name="">
-          <a:extLst>
-            <a:ext uri="{FF2B5EF4-FFF2-40B4-BE49-F238E27FC236}">
-              <a16:creationId xmlns:a16="http://schemas.microsoft.com/office/drawing/2014/main" id="{ECC06C52-67BC-A4C8-3ED0-3636080E3212}"/>
-            </a:ext>
-          </a:extLst>
-        </p:cNvPr>
-        <p:cNvGrpSpPr/>
-        <p:nvPr/>
-      </p:nvGrpSpPr>
-      <p:grpSpPr>
-        <a:xfrm>
-          <a:off x="0" y="0"/>
-          <a:ext cx="0" cy="0"/>
-          <a:chOff x="0" y="0"/>
-          <a:chExt cx="0" cy="0"/>
-        </a:xfrm>
-      </p:grpSpPr>
-      <p:sp>
-        <p:nvSpPr>
-          <p:cNvPr id="2" name="Title 1">
-            <a:extLst>
-              <a:ext uri="{FF2B5EF4-FFF2-40B4-BE49-F238E27FC236}">
-                <a16:creationId xmlns:a16="http://schemas.microsoft.com/office/drawing/2014/main" id="{389C7A2E-1427-5278-B512-F2A80C319122}"/>
-              </a:ext>
-            </a:extLst>
-          </p:cNvPr>
-          <p:cNvSpPr>
-            <a:spLocks noGrp="1"/>
-          </p:cNvSpPr>
-          <p:nvPr>
-            <p:ph type="title"/>
-          </p:nvPr>
-        </p:nvSpPr>
-        <p:spPr>
-          <a:xfrm>
-            <a:off x="334963" y="620690"/>
-            <a:ext cx="11522075" cy="360041"/>
-          </a:xfrm>
-        </p:spPr>
-        <p:txBody>
-          <a:bodyPr/>
-          <a:lstStyle/>
-          <a:p>
-            <a:r>
-              <a:rPr lang="en-US" dirty="0"/>
-              <a:t>Outline</a:t>
-            </a:r>
-          </a:p>
-        </p:txBody>
-      </p:sp>
-      <p:sp>
-        <p:nvSpPr>
-          <p:cNvPr id="13" name="Content Placeholder 12">
-            <a:extLst>
-              <a:ext uri="{FF2B5EF4-FFF2-40B4-BE49-F238E27FC236}">
-                <a16:creationId xmlns:a16="http://schemas.microsoft.com/office/drawing/2014/main" id="{9ABB78FB-6052-78C4-38A0-9B7AF58E9FCB}"/>
-              </a:ext>
-            </a:extLst>
-          </p:cNvPr>
-          <p:cNvSpPr>
-            <a:spLocks noGrp="1"/>
-          </p:cNvSpPr>
-          <p:nvPr>
-            <p:ph idx="1"/>
-          </p:nvPr>
-        </p:nvSpPr>
-        <p:spPr/>
-        <p:txBody>
-          <a:bodyPr/>
-          <a:lstStyle/>
-          <a:p>
-            <a:r>
-              <a:rPr lang="en-US" dirty="0"/>
-              <a:t>Project Goals</a:t>
-            </a:r>
-          </a:p>
-          <a:p>
-            <a:r>
-              <a:rPr lang="en-US" dirty="0"/>
-              <a:t>Implemented Features</a:t>
-            </a:r>
-          </a:p>
-          <a:p>
-            <a:r>
-              <a:rPr lang="en-US" dirty="0"/>
-              <a:t>Design timeline</a:t>
-            </a:r>
-          </a:p>
-          <a:p>
-            <a:r>
-              <a:rPr lang="en-US" dirty="0"/>
-              <a:t>Tools Used</a:t>
-            </a:r>
-          </a:p>
-          <a:p>
-            <a:r>
-              <a:rPr lang="en-US" dirty="0"/>
-              <a:t>System Design</a:t>
-            </a:r>
-          </a:p>
-          <a:p>
-            <a:r>
-              <a:rPr lang="en-US" dirty="0"/>
-              <a:t>Testing and Verification</a:t>
-            </a:r>
-          </a:p>
-          <a:p>
-            <a:r>
-              <a:rPr lang="en-US" dirty="0"/>
-              <a:t>Lessons Learned</a:t>
-            </a:r>
-          </a:p>
-        </p:txBody>
-      </p:sp>
-      <p:sp>
-        <p:nvSpPr>
-          <p:cNvPr id="4" name="Date Placeholder 3">
-            <a:extLst>
-              <a:ext uri="{FF2B5EF4-FFF2-40B4-BE49-F238E27FC236}">
-                <a16:creationId xmlns:a16="http://schemas.microsoft.com/office/drawing/2014/main" id="{64344D59-887A-89DB-90DC-83D1F2848381}"/>
-              </a:ext>
-            </a:extLst>
-          </p:cNvPr>
-          <p:cNvSpPr>
-            <a:spLocks noGrp="1"/>
-          </p:cNvSpPr>
-          <p:nvPr>
-            <p:ph type="dt" sz="half" idx="10"/>
-          </p:nvPr>
-        </p:nvSpPr>
-        <p:spPr>
-          <a:xfrm>
-            <a:off x="334963" y="194736"/>
-            <a:ext cx="9674225" cy="180000"/>
-          </a:xfrm>
-        </p:spPr>
-        <p:txBody>
-          <a:bodyPr/>
-          <a:lstStyle/>
-          <a:p>
-            <a:r>
-              <a:rPr lang="en-US"/>
-              <a:t>L5X Automation Build Tool</a:t>
-            </a:r>
-            <a:endParaRPr lang="en-US" dirty="0"/>
-          </a:p>
-        </p:txBody>
-      </p:sp>
-      <p:sp>
-        <p:nvSpPr>
-          <p:cNvPr id="3" name="Slide Number Placeholder 2">
-            <a:extLst>
-              <a:ext uri="{FF2B5EF4-FFF2-40B4-BE49-F238E27FC236}">
-                <a16:creationId xmlns:a16="http://schemas.microsoft.com/office/drawing/2014/main" id="{D1AEB583-7C00-647F-EA4B-940732920BC4}"/>
-              </a:ext>
-            </a:extLst>
-          </p:cNvPr>
-          <p:cNvSpPr>
-            <a:spLocks noGrp="1"/>
-          </p:cNvSpPr>
-          <p:nvPr>
-            <p:ph type="sldNum" sz="quarter" idx="12"/>
-          </p:nvPr>
-        </p:nvSpPr>
-        <p:spPr/>
-        <p:txBody>
-          <a:bodyPr/>
-          <a:lstStyle/>
-          <a:p>
-            <a:r>
-              <a:rPr lang="en-US"/>
-              <a:t>Slide </a:t>
-            </a:r>
-            <a:fld id="{6ED4F0B8-A3B9-4B6F-BEC0-B0E78C1192A7}" type="slidenum">
-              <a:rPr lang="en-US" smtClean="0"/>
-              <a:t>2</a:t>
-            </a:fld>
-            <a:endParaRPr lang="en-US" dirty="0"/>
-          </a:p>
-        </p:txBody>
-      </p:sp>
-      <p:sp>
-        <p:nvSpPr>
-          <p:cNvPr id="7" name="Footer Placeholder 6">
-            <a:extLst>
-              <a:ext uri="{FF2B5EF4-FFF2-40B4-BE49-F238E27FC236}">
-                <a16:creationId xmlns:a16="http://schemas.microsoft.com/office/drawing/2014/main" id="{9F92DEA4-6CF8-8F90-FC4B-A9A798E29D53}"/>
-              </a:ext>
-            </a:extLst>
-          </p:cNvPr>
-          <p:cNvSpPr>
-            <a:spLocks noGrp="1"/>
-          </p:cNvSpPr>
-          <p:nvPr>
-            <p:ph type="ftr" sz="quarter" idx="11"/>
-          </p:nvPr>
-        </p:nvSpPr>
-        <p:spPr/>
-        <p:txBody>
-          <a:bodyPr/>
-          <a:lstStyle/>
-          <a:p>
-            <a:r>
-              <a:rPr lang="en-US"/>
-              <a:t>Corbin Ferguson</a:t>
-            </a:r>
-            <a:endParaRPr lang="en-US" dirty="0"/>
-          </a:p>
-        </p:txBody>
-      </p:sp>
-    </p:spTree>
-    <p:extLst>
-      <p:ext uri="{BB962C8B-B14F-4D97-AF65-F5344CB8AC3E}">
-        <p14:creationId xmlns:p14="http://schemas.microsoft.com/office/powerpoint/2010/main" val="4050751982"/>
-      </p:ext>
-    </p:extLst>
-  </p:cSld>
-  <p:clrMapOvr>
-    <a:masterClrMapping/>
-  </p:clrMapOvr>
-</p:sld>
-</file>
-
-<file path=ppt/slides/slide20.xml><?xml version="1.0" encoding="utf-8"?>
+<file path=ppt/slides/slide16.xml><?xml version="1.0" encoding="utf-8"?>
 <p:sld xmlns:a="http://schemas.openxmlformats.org/drawingml/2006/main" xmlns:r="http://schemas.openxmlformats.org/officeDocument/2006/relationships" xmlns:p="http://schemas.openxmlformats.org/presentationml/2006/main">
   <p:cSld>
     <p:spTree>
@@ -23393,7 +21313,7 @@
             </a:r>
             <a:fld id="{358A1964-41C6-43E7-8879-EF27F633EDD1}" type="slidenum">
               <a:rPr lang="en-US" smtClean="0"/>
-              <a:t>20</a:t>
+              <a:t>16</a:t>
             </a:fld>
             <a:endParaRPr lang="en-US" dirty="0"/>
           </a:p>
@@ -23566,7 +21486,7 @@
 </p:sld>
 </file>
 
-<file path=ppt/slides/slide21.xml><?xml version="1.0" encoding="utf-8"?>
+<file path=ppt/slides/slide17.xml><?xml version="1.0" encoding="utf-8"?>
 <p:sld xmlns:a="http://schemas.openxmlformats.org/drawingml/2006/main" xmlns:r="http://schemas.openxmlformats.org/officeDocument/2006/relationships" xmlns:p="http://schemas.openxmlformats.org/presentationml/2006/main">
   <p:cSld>
     <p:spTree>
@@ -23750,7 +21670,7 @@
             </a:r>
             <a:fld id="{B7F1FE61-F696-4BC2-948F-7278C8C6DBB9}" type="slidenum">
               <a:rPr lang="en-US" smtClean="0"/>
-              <a:t>21</a:t>
+              <a:t>17</a:t>
             </a:fld>
             <a:endParaRPr lang="en-US" dirty="0"/>
           </a:p>
@@ -23797,7 +21717,7 @@
 </p:sld>
 </file>
 
-<file path=ppt/slides/slide22.xml><?xml version="1.0" encoding="utf-8"?>
+<file path=ppt/slides/slide18.xml><?xml version="1.0" encoding="utf-8"?>
 <p:sld xmlns:a="http://schemas.openxmlformats.org/drawingml/2006/main" xmlns:r="http://schemas.openxmlformats.org/officeDocument/2006/relationships" xmlns:p="http://schemas.openxmlformats.org/presentationml/2006/main">
   <p:cSld>
     <p:spTree>
@@ -23977,7 +21897,7 @@
             </a:r>
             <a:fld id="{B7F1FE61-F696-4BC2-948F-7278C8C6DBB9}" type="slidenum">
               <a:rPr lang="en-US" smtClean="0"/>
-              <a:t>22</a:t>
+              <a:t>18</a:t>
             </a:fld>
             <a:endParaRPr lang="en-US" dirty="0"/>
           </a:p>
@@ -24024,7 +21944,7 @@
 </p:sld>
 </file>
 
-<file path=ppt/slides/slide23.xml><?xml version="1.0" encoding="utf-8"?>
+<file path=ppt/slides/slide19.xml><?xml version="1.0" encoding="utf-8"?>
 <p:sld xmlns:a="http://schemas.openxmlformats.org/drawingml/2006/main" xmlns:r="http://schemas.openxmlformats.org/officeDocument/2006/relationships" xmlns:p="http://schemas.openxmlformats.org/presentationml/2006/main">
   <p:cSld>
     <p:spTree>
@@ -24074,7 +21994,7 @@
             </a:r>
             <a:fld id="{C20DA095-8283-4DCC-BA55-3B61E88C6181}" type="slidenum">
               <a:rPr lang="en-US" smtClean="0"/>
-              <a:t>23</a:t>
+              <a:t>19</a:t>
             </a:fld>
             <a:endParaRPr lang="en-US" dirty="0"/>
           </a:p>
@@ -24168,7 +22088,236 @@
 </p:sld>
 </file>
 
-<file path=ppt/slides/slide24.xml><?xml version="1.0" encoding="utf-8"?>
+<file path=ppt/slides/slide2.xml><?xml version="1.0" encoding="utf-8"?>
+<p:sld xmlns:a="http://schemas.openxmlformats.org/drawingml/2006/main" xmlns:r="http://schemas.openxmlformats.org/officeDocument/2006/relationships" xmlns:p="http://schemas.openxmlformats.org/presentationml/2006/main">
+  <p:cSld>
+    <p:spTree>
+      <p:nvGrpSpPr>
+        <p:cNvPr id="1" name="">
+          <a:extLst>
+            <a:ext uri="{FF2B5EF4-FFF2-40B4-BE49-F238E27FC236}">
+              <a16:creationId xmlns:a16="http://schemas.microsoft.com/office/drawing/2014/main" id="{ECC06C52-67BC-A4C8-3ED0-3636080E3212}"/>
+            </a:ext>
+          </a:extLst>
+        </p:cNvPr>
+        <p:cNvGrpSpPr/>
+        <p:nvPr/>
+      </p:nvGrpSpPr>
+      <p:grpSpPr>
+        <a:xfrm>
+          <a:off x="0" y="0"/>
+          <a:ext cx="0" cy="0"/>
+          <a:chOff x="0" y="0"/>
+          <a:chExt cx="0" cy="0"/>
+        </a:xfrm>
+      </p:grpSpPr>
+      <p:sp>
+        <p:nvSpPr>
+          <p:cNvPr id="2" name="Title 1">
+            <a:extLst>
+              <a:ext uri="{FF2B5EF4-FFF2-40B4-BE49-F238E27FC236}">
+                <a16:creationId xmlns:a16="http://schemas.microsoft.com/office/drawing/2014/main" id="{389C7A2E-1427-5278-B512-F2A80C319122}"/>
+              </a:ext>
+            </a:extLst>
+          </p:cNvPr>
+          <p:cNvSpPr>
+            <a:spLocks noGrp="1"/>
+          </p:cNvSpPr>
+          <p:nvPr>
+            <p:ph type="title"/>
+          </p:nvPr>
+        </p:nvSpPr>
+        <p:spPr>
+          <a:xfrm>
+            <a:off x="334963" y="620690"/>
+            <a:ext cx="11522075" cy="360041"/>
+          </a:xfrm>
+        </p:spPr>
+        <p:txBody>
+          <a:bodyPr/>
+          <a:lstStyle/>
+          <a:p>
+            <a:r>
+              <a:rPr lang="en-US" dirty="0"/>
+              <a:t>Outline</a:t>
+            </a:r>
+          </a:p>
+        </p:txBody>
+      </p:sp>
+      <p:sp>
+        <p:nvSpPr>
+          <p:cNvPr id="13" name="Content Placeholder 12">
+            <a:extLst>
+              <a:ext uri="{FF2B5EF4-FFF2-40B4-BE49-F238E27FC236}">
+                <a16:creationId xmlns:a16="http://schemas.microsoft.com/office/drawing/2014/main" id="{9ABB78FB-6052-78C4-38A0-9B7AF58E9FCB}"/>
+              </a:ext>
+            </a:extLst>
+          </p:cNvPr>
+          <p:cNvSpPr>
+            <a:spLocks noGrp="1"/>
+          </p:cNvSpPr>
+          <p:nvPr>
+            <p:ph idx="1"/>
+          </p:nvPr>
+        </p:nvSpPr>
+        <p:spPr/>
+        <p:txBody>
+          <a:bodyPr/>
+          <a:lstStyle/>
+          <a:p>
+            <a:r>
+              <a:rPr lang="en-US" dirty="0"/>
+              <a:t>Project Goals</a:t>
+            </a:r>
+          </a:p>
+          <a:p>
+            <a:r>
+              <a:rPr lang="en-US" dirty="0"/>
+              <a:t>Implemented Features</a:t>
+            </a:r>
+          </a:p>
+          <a:p>
+            <a:r>
+              <a:rPr lang="en-US" dirty="0"/>
+              <a:t>Design timeline</a:t>
+            </a:r>
+          </a:p>
+          <a:p>
+            <a:r>
+              <a:rPr lang="en-US" dirty="0"/>
+              <a:t>Tools Used</a:t>
+            </a:r>
+          </a:p>
+          <a:p>
+            <a:r>
+              <a:rPr lang="en-US" dirty="0"/>
+              <a:t>System Design</a:t>
+            </a:r>
+          </a:p>
+          <a:p>
+            <a:r>
+              <a:rPr lang="en-US" dirty="0"/>
+              <a:t>Testing and Verification</a:t>
+            </a:r>
+          </a:p>
+          <a:p>
+            <a:r>
+              <a:rPr lang="en-US" dirty="0"/>
+              <a:t>Lessons Learned</a:t>
+            </a:r>
+          </a:p>
+        </p:txBody>
+      </p:sp>
+      <p:sp>
+        <p:nvSpPr>
+          <p:cNvPr id="4" name="Date Placeholder 3">
+            <a:extLst>
+              <a:ext uri="{FF2B5EF4-FFF2-40B4-BE49-F238E27FC236}">
+                <a16:creationId xmlns:a16="http://schemas.microsoft.com/office/drawing/2014/main" id="{64344D59-887A-89DB-90DC-83D1F2848381}"/>
+              </a:ext>
+            </a:extLst>
+          </p:cNvPr>
+          <p:cNvSpPr>
+            <a:spLocks noGrp="1"/>
+          </p:cNvSpPr>
+          <p:nvPr>
+            <p:ph type="dt" sz="half" idx="10"/>
+          </p:nvPr>
+        </p:nvSpPr>
+        <p:spPr>
+          <a:xfrm>
+            <a:off x="334963" y="194736"/>
+            <a:ext cx="9674225" cy="180000"/>
+          </a:xfrm>
+        </p:spPr>
+        <p:txBody>
+          <a:bodyPr/>
+          <a:lstStyle/>
+          <a:p>
+            <a:r>
+              <a:rPr lang="en-US"/>
+              <a:t>L5X Automation Build Tool</a:t>
+            </a:r>
+            <a:endParaRPr lang="en-US" dirty="0"/>
+          </a:p>
+        </p:txBody>
+      </p:sp>
+      <p:sp>
+        <p:nvSpPr>
+          <p:cNvPr id="3" name="Slide Number Placeholder 2">
+            <a:extLst>
+              <a:ext uri="{FF2B5EF4-FFF2-40B4-BE49-F238E27FC236}">
+                <a16:creationId xmlns:a16="http://schemas.microsoft.com/office/drawing/2014/main" id="{D1AEB583-7C00-647F-EA4B-940732920BC4}"/>
+              </a:ext>
+            </a:extLst>
+          </p:cNvPr>
+          <p:cNvSpPr>
+            <a:spLocks noGrp="1"/>
+          </p:cNvSpPr>
+          <p:nvPr>
+            <p:ph type="sldNum" sz="quarter" idx="12"/>
+          </p:nvPr>
+        </p:nvSpPr>
+        <p:spPr/>
+        <p:txBody>
+          <a:bodyPr/>
+          <a:lstStyle/>
+          <a:p>
+            <a:r>
+              <a:rPr lang="en-US"/>
+              <a:t>Slide </a:t>
+            </a:r>
+            <a:fld id="{6ED4F0B8-A3B9-4B6F-BEC0-B0E78C1192A7}" type="slidenum">
+              <a:rPr lang="en-US" smtClean="0"/>
+              <a:t>2</a:t>
+            </a:fld>
+            <a:endParaRPr lang="en-US" dirty="0"/>
+          </a:p>
+        </p:txBody>
+      </p:sp>
+      <p:sp>
+        <p:nvSpPr>
+          <p:cNvPr id="7" name="Footer Placeholder 6">
+            <a:extLst>
+              <a:ext uri="{FF2B5EF4-FFF2-40B4-BE49-F238E27FC236}">
+                <a16:creationId xmlns:a16="http://schemas.microsoft.com/office/drawing/2014/main" id="{9F92DEA4-6CF8-8F90-FC4B-A9A798E29D53}"/>
+              </a:ext>
+            </a:extLst>
+          </p:cNvPr>
+          <p:cNvSpPr>
+            <a:spLocks noGrp="1"/>
+          </p:cNvSpPr>
+          <p:nvPr>
+            <p:ph type="ftr" sz="quarter" idx="11"/>
+          </p:nvPr>
+        </p:nvSpPr>
+        <p:spPr/>
+        <p:txBody>
+          <a:bodyPr/>
+          <a:lstStyle/>
+          <a:p>
+            <a:r>
+              <a:rPr lang="en-US"/>
+              <a:t>Corbin Ferguson</a:t>
+            </a:r>
+            <a:endParaRPr lang="en-US" dirty="0"/>
+          </a:p>
+        </p:txBody>
+      </p:sp>
+    </p:spTree>
+    <p:extLst>
+      <p:ext uri="{BB962C8B-B14F-4D97-AF65-F5344CB8AC3E}">
+        <p14:creationId xmlns:p14="http://schemas.microsoft.com/office/powerpoint/2010/main" val="4050751982"/>
+      </p:ext>
+    </p:extLst>
+  </p:cSld>
+  <p:clrMapOvr>
+    <a:masterClrMapping/>
+  </p:clrMapOvr>
+</p:sld>
+</file>
+
+<file path=ppt/slides/slide20.xml><?xml version="1.0" encoding="utf-8"?>
 <p:sld xmlns:a="http://schemas.openxmlformats.org/drawingml/2006/main" xmlns:r="http://schemas.openxmlformats.org/officeDocument/2006/relationships" xmlns:p="http://schemas.openxmlformats.org/presentationml/2006/main">
   <p:cSld>
     <p:spTree>
@@ -24443,7 +22592,7 @@
             </a:r>
             <a:fld id="{B7F1FE61-F696-4BC2-948F-7278C8C6DBB9}" type="slidenum">
               <a:rPr lang="en-US" smtClean="0"/>
-              <a:t>24</a:t>
+              <a:t>20</a:t>
             </a:fld>
             <a:endParaRPr lang="en-US" dirty="0"/>
           </a:p>
@@ -24535,7 +22684,7 @@
           <a:p>
             <a:r>
               <a:rPr lang="en-US" dirty="0"/>
-              <a:t>Project Goals</a:t>
+              <a:t>Project Necessity</a:t>
             </a:r>
           </a:p>
         </p:txBody>
@@ -24808,7 +22957,7 @@
         <p:cNvPr id="1" name="">
           <a:extLst>
             <a:ext uri="{FF2B5EF4-FFF2-40B4-BE49-F238E27FC236}">
-              <a16:creationId xmlns:a16="http://schemas.microsoft.com/office/drawing/2014/main" id="{77866DE4-249B-FCA3-5A7F-05F163C98B46}"/>
+              <a16:creationId xmlns:a16="http://schemas.microsoft.com/office/drawing/2014/main" id="{FF2A5873-0A0A-14D5-9C6C-E6923A0FE69F}"/>
             </a:ext>
           </a:extLst>
         </p:cNvPr>
@@ -24828,7 +22977,7 @@
           <p:cNvPr id="2" name="Title 1">
             <a:extLst>
               <a:ext uri="{FF2B5EF4-FFF2-40B4-BE49-F238E27FC236}">
-                <a16:creationId xmlns:a16="http://schemas.microsoft.com/office/drawing/2014/main" id="{1F1E6C66-1F62-7184-B675-F8634209902C}"/>
+                <a16:creationId xmlns:a16="http://schemas.microsoft.com/office/drawing/2014/main" id="{A59311E1-2F3C-706B-E772-4C7FF4CB0DFD}"/>
               </a:ext>
             </a:extLst>
           </p:cNvPr>
@@ -24851,7 +23000,7 @@
           <a:p>
             <a:r>
               <a:rPr lang="en-US" dirty="0"/>
-              <a:t>Design Timeline</a:t>
+              <a:t>Necessary Features</a:t>
             </a:r>
           </a:p>
         </p:txBody>
@@ -24861,7 +23010,7 @@
           <p:cNvPr id="13" name="Content Placeholder 12">
             <a:extLst>
               <a:ext uri="{FF2B5EF4-FFF2-40B4-BE49-F238E27FC236}">
-                <a16:creationId xmlns:a16="http://schemas.microsoft.com/office/drawing/2014/main" id="{4B3CDBD9-BD4E-E7E3-A1E9-2D692BAA1734}"/>
+                <a16:creationId xmlns:a16="http://schemas.microsoft.com/office/drawing/2014/main" id="{929D0112-3559-BA85-36ED-E2064B91FC9A}"/>
               </a:ext>
             </a:extLst>
           </p:cNvPr>
@@ -24877,64 +23026,63 @@
           <a:bodyPr/>
           <a:lstStyle/>
           <a:p>
+            <a:pPr marL="0" indent="0">
+              <a:buNone/>
+            </a:pPr>
             <a:r>
               <a:rPr lang="en-US" dirty="0"/>
-              <a:t>Term 1:</a:t>
-            </a:r>
-          </a:p>
-          <a:p>
-            <a:pPr lvl="1"/>
+              <a:t>The application will speed up the bulk of development, </a:t>
+            </a:r>
+          </a:p>
+          <a:p>
+            <a:pPr marL="0" indent="0">
+              <a:buNone/>
+            </a:pPr>
             <a:r>
               <a:rPr lang="en-US" dirty="0"/>
-              <a:t>Investigation into applicable tools and resources</a:t>
-            </a:r>
-          </a:p>
-          <a:p>
-            <a:pPr lvl="1"/>
+              <a:t>It will help augment development through implementation of the following features:</a:t>
+            </a:r>
+          </a:p>
+          <a:p>
             <a:r>
               <a:rPr lang="en-US" dirty="0"/>
-              <a:t>Feature outline and requirements development</a:t>
-            </a:r>
-          </a:p>
-          <a:p>
-            <a:pPr lvl="1"/>
+              <a:t>Create new objects from a default template</a:t>
+            </a:r>
+          </a:p>
+          <a:p>
             <a:r>
               <a:rPr lang="en-US" dirty="0"/>
-              <a:t>Application development</a:t>
+              <a:t>Import objects from other files</a:t>
             </a:r>
           </a:p>
           <a:p>
             <a:r>
               <a:rPr lang="en-US" dirty="0"/>
-              <a:t>Term 2:</a:t>
-            </a:r>
-          </a:p>
-          <a:p>
-            <a:pPr lvl="1"/>
+              <a:t>Modify existing objects in the file</a:t>
+            </a:r>
+          </a:p>
+          <a:p>
             <a:r>
               <a:rPr lang="en-US" dirty="0"/>
-              <a:t>Documentation</a:t>
-            </a:r>
-          </a:p>
-          <a:p>
-            <a:pPr lvl="1"/>
+              <a:t>Delete existing objects in the file</a:t>
+            </a:r>
+          </a:p>
+          <a:p>
             <a:r>
               <a:rPr lang="en-US" dirty="0"/>
-              <a:t>Testing and verification</a:t>
-            </a:r>
-          </a:p>
-          <a:p>
-            <a:pPr lvl="1"/>
+              <a:t>Load existing files</a:t>
+            </a:r>
+          </a:p>
+          <a:p>
             <a:r>
               <a:rPr lang="en-US" dirty="0"/>
-              <a:t>Application cleanup</a:t>
-            </a:r>
-          </a:p>
-          <a:p>
-            <a:pPr lvl="1"/>
+              <a:t>Save file as .L5X</a:t>
+            </a:r>
+          </a:p>
+          <a:p>
             <a:r>
               <a:rPr lang="en-US" dirty="0"/>
-              <a:t>Final reporting</a:t>
+              <a:t>Library of files for the user to select from</a:t>
             </a:r>
           </a:p>
         </p:txBody>
@@ -24944,7 +23092,7 @@
           <p:cNvPr id="4" name="Date Placeholder 3">
             <a:extLst>
               <a:ext uri="{FF2B5EF4-FFF2-40B4-BE49-F238E27FC236}">
-                <a16:creationId xmlns:a16="http://schemas.microsoft.com/office/drawing/2014/main" id="{98ECF90B-3B05-898A-22FC-076CFE1CCF51}"/>
+                <a16:creationId xmlns:a16="http://schemas.microsoft.com/office/drawing/2014/main" id="{7BCF4611-BDC5-30DA-B81B-069E70C72C5C}"/>
               </a:ext>
             </a:extLst>
           </p:cNvPr>
@@ -24978,7 +23126,7 @@
           <p:cNvPr id="3" name="Slide Number Placeholder 2">
             <a:extLst>
               <a:ext uri="{FF2B5EF4-FFF2-40B4-BE49-F238E27FC236}">
-                <a16:creationId xmlns:a16="http://schemas.microsoft.com/office/drawing/2014/main" id="{4F1CFC65-37C8-4089-27E5-F2837CEC131C}"/>
+                <a16:creationId xmlns:a16="http://schemas.microsoft.com/office/drawing/2014/main" id="{1910D28F-D0D7-89C9-84EE-6BB86615E5EC}"/>
               </a:ext>
             </a:extLst>
           </p:cNvPr>
@@ -24998,7 +23146,7 @@
               <a:rPr lang="en-US"/>
               <a:t>Slide </a:t>
             </a:r>
-            <a:fld id="{56BA209A-2E05-4EC7-ADAC-6B751F7D63D1}" type="slidenum">
+            <a:fld id="{9509DEC0-B203-4E7F-B1E2-3D38B394EC90}" type="slidenum">
               <a:rPr lang="en-US" smtClean="0"/>
               <a:t>4</a:t>
             </a:fld>
@@ -25011,7 +23159,7 @@
           <p:cNvPr id="7" name="Footer Placeholder 6">
             <a:extLst>
               <a:ext uri="{FF2B5EF4-FFF2-40B4-BE49-F238E27FC236}">
-                <a16:creationId xmlns:a16="http://schemas.microsoft.com/office/drawing/2014/main" id="{173752C8-897A-58CF-1846-D12DCC149E52}"/>
+                <a16:creationId xmlns:a16="http://schemas.microsoft.com/office/drawing/2014/main" id="{3289AD5A-D9B8-0DD6-9BCC-CA23CBE7B0C8}"/>
               </a:ext>
             </a:extLst>
           </p:cNvPr>
@@ -25038,7 +23186,7 @@
     </p:spTree>
     <p:extLst>
       <p:ext uri="{BB962C8B-B14F-4D97-AF65-F5344CB8AC3E}">
-        <p14:creationId xmlns:p14="http://schemas.microsoft.com/office/powerpoint/2010/main" val="189939056"/>
+        <p14:creationId xmlns:p14="http://schemas.microsoft.com/office/powerpoint/2010/main" val="2928641305"/>
       </p:ext>
     </p:extLst>
   </p:cSld>
@@ -25056,7 +23204,7 @@
         <p:cNvPr id="1" name="">
           <a:extLst>
             <a:ext uri="{FF2B5EF4-FFF2-40B4-BE49-F238E27FC236}">
-              <a16:creationId xmlns:a16="http://schemas.microsoft.com/office/drawing/2014/main" id="{FF2A5873-0A0A-14D5-9C6C-E6923A0FE69F}"/>
+              <a16:creationId xmlns:a16="http://schemas.microsoft.com/office/drawing/2014/main" id="{77866DE4-249B-FCA3-5A7F-05F163C98B46}"/>
             </a:ext>
           </a:extLst>
         </p:cNvPr>
@@ -25076,7 +23224,7 @@
           <p:cNvPr id="2" name="Title 1">
             <a:extLst>
               <a:ext uri="{FF2B5EF4-FFF2-40B4-BE49-F238E27FC236}">
-                <a16:creationId xmlns:a16="http://schemas.microsoft.com/office/drawing/2014/main" id="{A59311E1-2F3C-706B-E772-4C7FF4CB0DFD}"/>
+                <a16:creationId xmlns:a16="http://schemas.microsoft.com/office/drawing/2014/main" id="{1F1E6C66-1F62-7184-B675-F8634209902C}"/>
               </a:ext>
             </a:extLst>
           </p:cNvPr>
@@ -25099,7 +23247,7 @@
           <a:p>
             <a:r>
               <a:rPr lang="en-US" dirty="0"/>
-              <a:t>Necessary Features</a:t>
+              <a:t>Design Timeline</a:t>
             </a:r>
           </a:p>
         </p:txBody>
@@ -25109,7 +23257,7 @@
           <p:cNvPr id="13" name="Content Placeholder 12">
             <a:extLst>
               <a:ext uri="{FF2B5EF4-FFF2-40B4-BE49-F238E27FC236}">
-                <a16:creationId xmlns:a16="http://schemas.microsoft.com/office/drawing/2014/main" id="{929D0112-3559-BA85-36ED-E2064B91FC9A}"/>
+                <a16:creationId xmlns:a16="http://schemas.microsoft.com/office/drawing/2014/main" id="{4B3CDBD9-BD4E-E7E3-A1E9-2D692BAA1734}"/>
               </a:ext>
             </a:extLst>
           </p:cNvPr>
@@ -25125,54 +23273,64 @@
           <a:bodyPr/>
           <a:lstStyle/>
           <a:p>
-            <a:pPr marL="0" indent="0">
-              <a:buNone/>
-            </a:pPr>
             <a:r>
               <a:rPr lang="en-US" dirty="0"/>
-              <a:t>The application will help augment development through implementation of the following features:</a:t>
-            </a:r>
-          </a:p>
-          <a:p>
+              <a:t>Term 1:</a:t>
+            </a:r>
+          </a:p>
+          <a:p>
+            <a:pPr lvl="1"/>
             <a:r>
               <a:rPr lang="en-US" dirty="0"/>
-              <a:t>Create new objects from a default template</a:t>
-            </a:r>
-          </a:p>
-          <a:p>
+              <a:t>Investigation into applicable tools and resources</a:t>
+            </a:r>
+          </a:p>
+          <a:p>
+            <a:pPr lvl="1"/>
             <a:r>
               <a:rPr lang="en-US" dirty="0"/>
-              <a:t>Import objects from other files</a:t>
-            </a:r>
-          </a:p>
-          <a:p>
+              <a:t>Feature outline and requirements development</a:t>
+            </a:r>
+          </a:p>
+          <a:p>
+            <a:pPr lvl="1"/>
             <a:r>
               <a:rPr lang="en-US" dirty="0"/>
-              <a:t>Modify existing objects in the file</a:t>
+              <a:t>Application development</a:t>
             </a:r>
           </a:p>
           <a:p>
             <a:r>
               <a:rPr lang="en-US" dirty="0"/>
-              <a:t>Delete existing objects in the file</a:t>
-            </a:r>
-          </a:p>
-          <a:p>
+              <a:t>Term 2:</a:t>
+            </a:r>
+          </a:p>
+          <a:p>
+            <a:pPr lvl="1"/>
             <a:r>
               <a:rPr lang="en-US" dirty="0"/>
-              <a:t>Load existing files</a:t>
-            </a:r>
-          </a:p>
-          <a:p>
+              <a:t>Documentation</a:t>
+            </a:r>
+          </a:p>
+          <a:p>
+            <a:pPr lvl="1"/>
             <a:r>
               <a:rPr lang="en-US" dirty="0"/>
-              <a:t>Save file as .L5X</a:t>
-            </a:r>
-          </a:p>
-          <a:p>
+              <a:t>Testing and verification</a:t>
+            </a:r>
+          </a:p>
+          <a:p>
+            <a:pPr lvl="1"/>
             <a:r>
               <a:rPr lang="en-US" dirty="0"/>
-              <a:t>Library of files for the user to select from</a:t>
+              <a:t>Application cleanup</a:t>
+            </a:r>
+          </a:p>
+          <a:p>
+            <a:pPr lvl="1"/>
+            <a:r>
+              <a:rPr lang="en-US" dirty="0"/>
+              <a:t>Final reporting</a:t>
             </a:r>
           </a:p>
         </p:txBody>
@@ -25182,7 +23340,7 @@
           <p:cNvPr id="4" name="Date Placeholder 3">
             <a:extLst>
               <a:ext uri="{FF2B5EF4-FFF2-40B4-BE49-F238E27FC236}">
-                <a16:creationId xmlns:a16="http://schemas.microsoft.com/office/drawing/2014/main" id="{7BCF4611-BDC5-30DA-B81B-069E70C72C5C}"/>
+                <a16:creationId xmlns:a16="http://schemas.microsoft.com/office/drawing/2014/main" id="{98ECF90B-3B05-898A-22FC-076CFE1CCF51}"/>
               </a:ext>
             </a:extLst>
           </p:cNvPr>
@@ -25216,7 +23374,7 @@
           <p:cNvPr id="3" name="Slide Number Placeholder 2">
             <a:extLst>
               <a:ext uri="{FF2B5EF4-FFF2-40B4-BE49-F238E27FC236}">
-                <a16:creationId xmlns:a16="http://schemas.microsoft.com/office/drawing/2014/main" id="{1910D28F-D0D7-89C9-84EE-6BB86615E5EC}"/>
+                <a16:creationId xmlns:a16="http://schemas.microsoft.com/office/drawing/2014/main" id="{4F1CFC65-37C8-4089-27E5-F2837CEC131C}"/>
               </a:ext>
             </a:extLst>
           </p:cNvPr>
@@ -25236,7 +23394,7 @@
               <a:rPr lang="en-US"/>
               <a:t>Slide </a:t>
             </a:r>
-            <a:fld id="{9509DEC0-B203-4E7F-B1E2-3D38B394EC90}" type="slidenum">
+            <a:fld id="{56BA209A-2E05-4EC7-ADAC-6B751F7D63D1}" type="slidenum">
               <a:rPr lang="en-US" smtClean="0"/>
               <a:t>5</a:t>
             </a:fld>
@@ -25249,7 +23407,7 @@
           <p:cNvPr id="7" name="Footer Placeholder 6">
             <a:extLst>
               <a:ext uri="{FF2B5EF4-FFF2-40B4-BE49-F238E27FC236}">
-                <a16:creationId xmlns:a16="http://schemas.microsoft.com/office/drawing/2014/main" id="{3289AD5A-D9B8-0DD6-9BCC-CA23CBE7B0C8}"/>
+                <a16:creationId xmlns:a16="http://schemas.microsoft.com/office/drawing/2014/main" id="{173752C8-897A-58CF-1846-D12DCC149E52}"/>
               </a:ext>
             </a:extLst>
           </p:cNvPr>
@@ -25276,7 +23434,7 @@
     </p:spTree>
     <p:extLst>
       <p:ext uri="{BB962C8B-B14F-4D97-AF65-F5344CB8AC3E}">
-        <p14:creationId xmlns:p14="http://schemas.microsoft.com/office/powerpoint/2010/main" val="2928641305"/>
+        <p14:creationId xmlns:p14="http://schemas.microsoft.com/office/powerpoint/2010/main" val="189939056"/>
       </p:ext>
     </p:extLst>
   </p:cSld>
@@ -25814,23 +23972,18 @@
             <a:avLst/>
           </a:prstGeom>
           <a:solidFill>
-            <a:schemeClr val="accent6">
-              <a:lumMod val="60000"/>
-              <a:lumOff val="40000"/>
+            <a:srgbClr val="007CAA">
               <a:alpha val="60000"/>
-            </a:schemeClr>
+            </a:srgbClr>
           </a:solidFill>
           <a:ln w="38100">
             <a:solidFill>
-              <a:schemeClr val="accent6">
-                <a:lumMod val="60000"/>
-                <a:lumOff val="40000"/>
-              </a:schemeClr>
+              <a:srgbClr val="007CAA"/>
             </a:solidFill>
           </a:ln>
           <a:effectLst>
-            <a:glow rad="139700">
-              <a:schemeClr val="accent6">
+            <a:glow rad="63500">
+              <a:schemeClr val="accent4">
                 <a:satMod val="175000"/>
                 <a:alpha val="40000"/>
               </a:schemeClr>
@@ -25978,6 +24131,367 @@
   <p:cSld>
     <p:spTree>
       <p:nvGrpSpPr>
+        <p:cNvPr id="1" name=""/>
+        <p:cNvGrpSpPr/>
+        <p:nvPr/>
+      </p:nvGrpSpPr>
+      <p:grpSpPr>
+        <a:xfrm>
+          <a:off x="0" y="0"/>
+          <a:ext cx="0" cy="0"/>
+          <a:chOff x="0" y="0"/>
+          <a:chExt cx="0" cy="0"/>
+        </a:xfrm>
+      </p:grpSpPr>
+      <p:sp>
+        <p:nvSpPr>
+          <p:cNvPr id="2" name="Text Placeholder 1">
+            <a:extLst>
+              <a:ext uri="{FF2B5EF4-FFF2-40B4-BE49-F238E27FC236}">
+                <a16:creationId xmlns:a16="http://schemas.microsoft.com/office/drawing/2014/main" id="{66F5F0CA-AE20-3F47-A2DA-544E05972351}"/>
+              </a:ext>
+            </a:extLst>
+          </p:cNvPr>
+          <p:cNvSpPr>
+            <a:spLocks noGrp="1"/>
+          </p:cNvSpPr>
+          <p:nvPr>
+            <p:ph type="body" sz="quarter" idx="13"/>
+          </p:nvPr>
+        </p:nvSpPr>
+        <p:spPr/>
+        <p:txBody>
+          <a:bodyPr/>
+          <a:lstStyle/>
+          <a:p>
+            <a:pPr fontAlgn="t">
+              <a:lnSpc>
+                <a:spcPct val="100000"/>
+              </a:lnSpc>
+            </a:pPr>
+            <a:r>
+              <a:rPr lang="en-US" b="1" dirty="0"/>
+              <a:t>Presentation Layer — WinForms UI</a:t>
+            </a:r>
+            <a:endParaRPr lang="en-US" dirty="0"/>
+          </a:p>
+          <a:p>
+            <a:pPr marL="271463" indent="-271463" fontAlgn="t">
+              <a:lnSpc>
+                <a:spcPct val="100000"/>
+              </a:lnSpc>
+              <a:buSzPct val="100000"/>
+              <a:buFont typeface="E+H Serif" panose="02020403050405020404" pitchFamily="18" charset="0"/>
+              <a:buChar char="•"/>
+            </a:pPr>
+            <a:r>
+              <a:rPr lang="en-US" dirty="0"/>
+              <a:t>Multi‑form, event‑driven design</a:t>
+            </a:r>
+          </a:p>
+          <a:p>
+            <a:pPr marL="271463" indent="-271463" fontAlgn="t">
+              <a:lnSpc>
+                <a:spcPct val="100000"/>
+              </a:lnSpc>
+              <a:buSzPct val="100000"/>
+              <a:buFont typeface="E+H Serif" panose="02020403050405020404" pitchFamily="18" charset="0"/>
+              <a:buChar char="•"/>
+            </a:pPr>
+            <a:r>
+              <a:rPr lang="en-US" dirty="0"/>
+              <a:t>Each form collects user input and returns structured data to the workflow</a:t>
+            </a:r>
+          </a:p>
+          <a:p>
+            <a:pPr marL="271463" indent="-271463" fontAlgn="t">
+              <a:lnSpc>
+                <a:spcPct val="100000"/>
+              </a:lnSpc>
+              <a:buSzPct val="100000"/>
+              <a:buFont typeface="E+H Serif" panose="02020403050405020404" pitchFamily="18" charset="0"/>
+              <a:buChar char="•"/>
+            </a:pPr>
+            <a:r>
+              <a:rPr lang="en-US" dirty="0"/>
+              <a:t>Navigation between forms follows dynamic UI flow sequences</a:t>
+            </a:r>
+          </a:p>
+          <a:p>
+            <a:pPr fontAlgn="t">
+              <a:lnSpc>
+                <a:spcPct val="100000"/>
+              </a:lnSpc>
+            </a:pPr>
+            <a:r>
+              <a:rPr lang="en-US" b="1" dirty="0"/>
+              <a:t>Business Logic Layer</a:t>
+            </a:r>
+            <a:endParaRPr lang="en-US" dirty="0"/>
+          </a:p>
+          <a:p>
+            <a:pPr marL="271463" indent="-271463" fontAlgn="t">
+              <a:lnSpc>
+                <a:spcPct val="100000"/>
+              </a:lnSpc>
+              <a:buSzPct val="100000"/>
+              <a:buFont typeface="E+H Serif" panose="02020403050405020404" pitchFamily="18" charset="0"/>
+              <a:buChar char="•"/>
+            </a:pPr>
+            <a:r>
+              <a:rPr lang="en-US" dirty="0"/>
+              <a:t>Core processing written in C# using </a:t>
+            </a:r>
+            <a:r>
+              <a:rPr lang="en-US" b="1" dirty="0"/>
+              <a:t>LINQ to XML</a:t>
+            </a:r>
+            <a:endParaRPr lang="en-US" dirty="0"/>
+          </a:p>
+          <a:p>
+            <a:pPr marL="271463" indent="-271463" fontAlgn="t">
+              <a:lnSpc>
+                <a:spcPct val="100000"/>
+              </a:lnSpc>
+              <a:buSzPct val="100000"/>
+              <a:buFont typeface="E+H Serif" panose="02020403050405020404" pitchFamily="18" charset="0"/>
+              <a:buChar char="•"/>
+            </a:pPr>
+            <a:r>
+              <a:rPr lang="en-US" dirty="0"/>
+              <a:t>Manages creation, editing, and deletion of L5X objects</a:t>
+            </a:r>
+          </a:p>
+          <a:p>
+            <a:pPr marL="271463" indent="-271463" fontAlgn="t">
+              <a:lnSpc>
+                <a:spcPct val="100000"/>
+              </a:lnSpc>
+              <a:buSzPct val="100000"/>
+              <a:buFont typeface="E+H Serif" panose="02020403050405020404" pitchFamily="18" charset="0"/>
+              <a:buChar char="•"/>
+            </a:pPr>
+            <a:r>
+              <a:rPr lang="en-US" dirty="0"/>
+              <a:t>Validates data against schema‑derived rules</a:t>
+            </a:r>
+          </a:p>
+          <a:p>
+            <a:pPr marL="271463" indent="-271463" fontAlgn="t">
+              <a:lnSpc>
+                <a:spcPct val="100000"/>
+              </a:lnSpc>
+              <a:buSzPct val="100000"/>
+              <a:buFont typeface="E+H Serif" panose="02020403050405020404" pitchFamily="18" charset="0"/>
+              <a:buChar char="•"/>
+            </a:pPr>
+            <a:r>
+              <a:rPr lang="en-US" dirty="0"/>
+              <a:t>Coordinates object mapping from templates to final XML structure</a:t>
+            </a:r>
+          </a:p>
+          <a:p>
+            <a:pPr fontAlgn="t">
+              <a:lnSpc>
+                <a:spcPct val="100000"/>
+              </a:lnSpc>
+            </a:pPr>
+            <a:r>
+              <a:rPr lang="en-US" b="1" dirty="0"/>
+              <a:t>Data &amp; File Layer</a:t>
+            </a:r>
+            <a:endParaRPr lang="en-US" dirty="0"/>
+          </a:p>
+          <a:p>
+            <a:pPr marL="271463" indent="-271463" fontAlgn="t">
+              <a:lnSpc>
+                <a:spcPct val="100000"/>
+              </a:lnSpc>
+              <a:buSzPct val="100000"/>
+              <a:buFont typeface="E+H Serif" panose="02020403050405020404" pitchFamily="18" charset="0"/>
+              <a:buChar char="•"/>
+            </a:pPr>
+            <a:r>
+              <a:rPr lang="en-US" dirty="0"/>
+              <a:t>Uses the </a:t>
+            </a:r>
+            <a:r>
+              <a:rPr lang="en-US" b="1" dirty="0"/>
+              <a:t>RSLogix5000_V35.xsd XML schema</a:t>
+            </a:r>
+            <a:r>
+              <a:rPr lang="en-US" dirty="0"/>
+              <a:t> for structure guidance</a:t>
+            </a:r>
+          </a:p>
+          <a:p>
+            <a:pPr marL="271463" indent="-271463" fontAlgn="t">
+              <a:lnSpc>
+                <a:spcPct val="100000"/>
+              </a:lnSpc>
+              <a:buSzPct val="100000"/>
+              <a:buFont typeface="E+H Serif" panose="02020403050405020404" pitchFamily="18" charset="0"/>
+              <a:buChar char="•"/>
+            </a:pPr>
+            <a:r>
+              <a:rPr lang="en-US" dirty="0"/>
+              <a:t>Loads template files from a defined library</a:t>
+            </a:r>
+          </a:p>
+          <a:p>
+            <a:pPr marL="271463" indent="-271463" fontAlgn="t">
+              <a:lnSpc>
+                <a:spcPct val="100000"/>
+              </a:lnSpc>
+              <a:buSzPct val="100000"/>
+              <a:buFont typeface="E+H Serif" panose="02020403050405020404" pitchFamily="18" charset="0"/>
+              <a:buChar char="•"/>
+            </a:pPr>
+            <a:r>
+              <a:rPr lang="en-US" dirty="0"/>
+              <a:t>Central “Master XML Handler” class abstracts all read/write operations</a:t>
+            </a:r>
+          </a:p>
+        </p:txBody>
+      </p:sp>
+      <p:sp>
+        <p:nvSpPr>
+          <p:cNvPr id="3" name="Date Placeholder 2">
+            <a:extLst>
+              <a:ext uri="{FF2B5EF4-FFF2-40B4-BE49-F238E27FC236}">
+                <a16:creationId xmlns:a16="http://schemas.microsoft.com/office/drawing/2014/main" id="{2F7C765E-B543-78A9-1A98-7AE43A3666B2}"/>
+              </a:ext>
+            </a:extLst>
+          </p:cNvPr>
+          <p:cNvSpPr>
+            <a:spLocks noGrp="1"/>
+          </p:cNvSpPr>
+          <p:nvPr>
+            <p:ph type="dt" sz="half" idx="14"/>
+          </p:nvPr>
+        </p:nvSpPr>
+        <p:spPr/>
+        <p:txBody>
+          <a:bodyPr/>
+          <a:lstStyle/>
+          <a:p>
+            <a:r>
+              <a:rPr lang="en-US"/>
+              <a:t>L5X Automation Build Tool</a:t>
+            </a:r>
+            <a:endParaRPr lang="en-US" dirty="0"/>
+          </a:p>
+        </p:txBody>
+      </p:sp>
+      <p:sp>
+        <p:nvSpPr>
+          <p:cNvPr id="4" name="Footer Placeholder 3">
+            <a:extLst>
+              <a:ext uri="{FF2B5EF4-FFF2-40B4-BE49-F238E27FC236}">
+                <a16:creationId xmlns:a16="http://schemas.microsoft.com/office/drawing/2014/main" id="{21C6C6B4-C229-7E23-3125-59DBE7538314}"/>
+              </a:ext>
+            </a:extLst>
+          </p:cNvPr>
+          <p:cNvSpPr>
+            <a:spLocks noGrp="1"/>
+          </p:cNvSpPr>
+          <p:nvPr>
+            <p:ph type="ftr" sz="quarter" idx="15"/>
+          </p:nvPr>
+        </p:nvSpPr>
+        <p:spPr/>
+        <p:txBody>
+          <a:bodyPr/>
+          <a:lstStyle/>
+          <a:p>
+            <a:r>
+              <a:rPr lang="en-US"/>
+              <a:t>Corbin Ferguson</a:t>
+            </a:r>
+            <a:endParaRPr lang="en-US" dirty="0"/>
+          </a:p>
+        </p:txBody>
+      </p:sp>
+      <p:sp>
+        <p:nvSpPr>
+          <p:cNvPr id="5" name="Slide Number Placeholder 4">
+            <a:extLst>
+              <a:ext uri="{FF2B5EF4-FFF2-40B4-BE49-F238E27FC236}">
+                <a16:creationId xmlns:a16="http://schemas.microsoft.com/office/drawing/2014/main" id="{C555B569-8DC0-B4BA-84DA-1316D64196F4}"/>
+              </a:ext>
+            </a:extLst>
+          </p:cNvPr>
+          <p:cNvSpPr>
+            <a:spLocks noGrp="1"/>
+          </p:cNvSpPr>
+          <p:nvPr>
+            <p:ph type="sldNum" sz="quarter" idx="16"/>
+          </p:nvPr>
+        </p:nvSpPr>
+        <p:spPr/>
+        <p:txBody>
+          <a:bodyPr/>
+          <a:lstStyle/>
+          <a:p>
+            <a:r>
+              <a:rPr lang="en-US"/>
+              <a:t>Slide </a:t>
+            </a:r>
+            <a:fld id="{343E2BDD-E02E-4050-BD42-EC51EC0E8A87}" type="slidenum">
+              <a:rPr lang="en-US" smtClean="0"/>
+              <a:pPr/>
+              <a:t>8</a:t>
+            </a:fld>
+            <a:endParaRPr lang="en-US" dirty="0"/>
+          </a:p>
+        </p:txBody>
+      </p:sp>
+      <p:sp>
+        <p:nvSpPr>
+          <p:cNvPr id="6" name="Title 5">
+            <a:extLst>
+              <a:ext uri="{FF2B5EF4-FFF2-40B4-BE49-F238E27FC236}">
+                <a16:creationId xmlns:a16="http://schemas.microsoft.com/office/drawing/2014/main" id="{EDE23E98-5860-3F33-9CE1-AB9573CB1CBC}"/>
+              </a:ext>
+            </a:extLst>
+          </p:cNvPr>
+          <p:cNvSpPr>
+            <a:spLocks noGrp="1"/>
+          </p:cNvSpPr>
+          <p:nvPr>
+            <p:ph type="title"/>
+          </p:nvPr>
+        </p:nvSpPr>
+        <p:spPr/>
+        <p:txBody>
+          <a:bodyPr/>
+          <a:lstStyle/>
+          <a:p>
+            <a:r>
+              <a:rPr lang="en-US" dirty="0"/>
+              <a:t>System Architecture summary</a:t>
+            </a:r>
+          </a:p>
+        </p:txBody>
+      </p:sp>
+    </p:spTree>
+    <p:extLst>
+      <p:ext uri="{BB962C8B-B14F-4D97-AF65-F5344CB8AC3E}">
+        <p14:creationId xmlns:p14="http://schemas.microsoft.com/office/powerpoint/2010/main" val="4147216281"/>
+      </p:ext>
+    </p:extLst>
+  </p:cSld>
+  <p:clrMapOvr>
+    <a:masterClrMapping/>
+  </p:clrMapOvr>
+</p:sld>
+</file>
+
+<file path=ppt/slides/slide9.xml><?xml version="1.0" encoding="utf-8"?>
+<p:sld xmlns:a="http://schemas.openxmlformats.org/drawingml/2006/main" xmlns:r="http://schemas.openxmlformats.org/officeDocument/2006/relationships" xmlns:p="http://schemas.openxmlformats.org/presentationml/2006/main">
+  <p:cSld>
+    <p:spTree>
+      <p:nvGrpSpPr>
         <p:cNvPr id="1" name="">
           <a:extLst>
             <a:ext uri="{FF2B5EF4-FFF2-40B4-BE49-F238E27FC236}">
@@ -26085,7 +24599,7 @@
             </a:r>
             <a:fld id="{C6F8E2D1-BFA0-484A-B7F1-E348F2594759}" type="slidenum">
               <a:rPr lang="en-US" smtClean="0"/>
-              <a:t>8</a:t>
+              <a:t>9</a:t>
             </a:fld>
             <a:endParaRPr lang="en-US" dirty="0"/>
           </a:p>
@@ -26251,23 +24765,18 @@
             <a:avLst/>
           </a:prstGeom>
           <a:solidFill>
-            <a:schemeClr val="accent6">
-              <a:lumMod val="60000"/>
-              <a:lumOff val="40000"/>
+            <a:srgbClr val="007CAA">
               <a:alpha val="60000"/>
-            </a:schemeClr>
+            </a:srgbClr>
           </a:solidFill>
           <a:ln w="38100">
             <a:solidFill>
-              <a:schemeClr val="accent6">
-                <a:lumMod val="60000"/>
-                <a:lumOff val="40000"/>
-              </a:schemeClr>
+              <a:srgbClr val="007CAA"/>
             </a:solidFill>
           </a:ln>
           <a:effectLst>
-            <a:glow rad="139700">
-              <a:schemeClr val="accent6">
+            <a:glow rad="101600">
+              <a:schemeClr val="accent4">
                 <a:satMod val="175000"/>
                 <a:alpha val="40000"/>
               </a:schemeClr>
@@ -26321,13 +24830,13 @@
   <p:clrMapOvr>
     <a:masterClrMapping/>
   </p:clrMapOvr>
-  <mc:AlternateContent xmlns:mc="http://schemas.openxmlformats.org/markup-compatibility/2006">
-    <mc:Choice xmlns:p159="http://schemas.microsoft.com/office/powerpoint/2015/09/main" Requires="p159">
+  <mc:AlternateContent xmlns:mc="http://schemas.openxmlformats.org/markup-compatibility/2006" xmlns:p159="http://schemas.microsoft.com/office/powerpoint/2015/09/main">
+    <mc:Choice Requires="p159">
       <p:transition>
         <p159:morph option="byObject"/>
       </p:transition>
     </mc:Choice>
-    <mc:Fallback>
+    <mc:Fallback xmlns="">
       <p:transition>
         <p:fade/>
       </p:transition>
@@ -26453,435 +24962,6 @@
     </p:tnLst>
     <p:bldLst>
       <p:bldP spid="6" grpId="0" animBg="1"/>
-    </p:bldLst>
-  </p:timing>
-</p:sld>
-</file>
-
-<file path=ppt/slides/slide9.xml><?xml version="1.0" encoding="utf-8"?>
-<p:sld xmlns:a="http://schemas.openxmlformats.org/drawingml/2006/main" xmlns:r="http://schemas.openxmlformats.org/officeDocument/2006/relationships" xmlns:p="http://schemas.openxmlformats.org/presentationml/2006/main">
-  <p:cSld>
-    <p:spTree>
-      <p:nvGrpSpPr>
-        <p:cNvPr id="1" name="">
-          <a:extLst>
-            <a:ext uri="{FF2B5EF4-FFF2-40B4-BE49-F238E27FC236}">
-              <a16:creationId xmlns:a16="http://schemas.microsoft.com/office/drawing/2014/main" id="{7E4A68EB-BBA3-381D-430F-E3F9DF8BD3FB}"/>
-            </a:ext>
-          </a:extLst>
-        </p:cNvPr>
-        <p:cNvGrpSpPr/>
-        <p:nvPr/>
-      </p:nvGrpSpPr>
-      <p:grpSpPr>
-        <a:xfrm>
-          <a:off x="0" y="0"/>
-          <a:ext cx="0" cy="0"/>
-          <a:chOff x="0" y="0"/>
-          <a:chExt cx="0" cy="0"/>
-        </a:xfrm>
-      </p:grpSpPr>
-      <p:sp>
-        <p:nvSpPr>
-          <p:cNvPr id="2" name="Title 1">
-            <a:extLst>
-              <a:ext uri="{FF2B5EF4-FFF2-40B4-BE49-F238E27FC236}">
-                <a16:creationId xmlns:a16="http://schemas.microsoft.com/office/drawing/2014/main" id="{A767FD57-0C1F-53FC-E4AC-6E4AC4F8F9F9}"/>
-              </a:ext>
-            </a:extLst>
-          </p:cNvPr>
-          <p:cNvSpPr>
-            <a:spLocks noGrp="1"/>
-          </p:cNvSpPr>
-          <p:nvPr>
-            <p:ph type="title"/>
-          </p:nvPr>
-        </p:nvSpPr>
-        <p:spPr>
-          <a:xfrm>
-            <a:off x="334963" y="620690"/>
-            <a:ext cx="7018337" cy="360041"/>
-          </a:xfrm>
-        </p:spPr>
-        <p:txBody>
-          <a:bodyPr/>
-          <a:lstStyle/>
-          <a:p>
-            <a:r>
-              <a:rPr lang="en-US" dirty="0"/>
-              <a:t>New File Pathing</a:t>
-            </a:r>
-          </a:p>
-        </p:txBody>
-      </p:sp>
-      <p:sp>
-        <p:nvSpPr>
-          <p:cNvPr id="4" name="Date Placeholder 3">
-            <a:extLst>
-              <a:ext uri="{FF2B5EF4-FFF2-40B4-BE49-F238E27FC236}">
-                <a16:creationId xmlns:a16="http://schemas.microsoft.com/office/drawing/2014/main" id="{A7555496-A425-4EB0-4B85-1B98E6B462DC}"/>
-              </a:ext>
-            </a:extLst>
-          </p:cNvPr>
-          <p:cNvSpPr>
-            <a:spLocks noGrp="1"/>
-          </p:cNvSpPr>
-          <p:nvPr>
-            <p:ph type="dt" sz="half" idx="10"/>
-          </p:nvPr>
-        </p:nvSpPr>
-        <p:spPr/>
-        <p:txBody>
-          <a:bodyPr/>
-          <a:lstStyle/>
-          <a:p>
-            <a:r>
-              <a:rPr lang="en-US"/>
-              <a:t>L5X Automation Build Tool</a:t>
-            </a:r>
-            <a:endParaRPr lang="en-US" dirty="0"/>
-          </a:p>
-        </p:txBody>
-      </p:sp>
-      <p:sp>
-        <p:nvSpPr>
-          <p:cNvPr id="7" name="Slide Number Placeholder 6">
-            <a:extLst>
-              <a:ext uri="{FF2B5EF4-FFF2-40B4-BE49-F238E27FC236}">
-                <a16:creationId xmlns:a16="http://schemas.microsoft.com/office/drawing/2014/main" id="{8C70071A-23EE-C0B0-7BC3-656D969CC96D}"/>
-              </a:ext>
-            </a:extLst>
-          </p:cNvPr>
-          <p:cNvSpPr>
-            <a:spLocks noGrp="1"/>
-          </p:cNvSpPr>
-          <p:nvPr>
-            <p:ph type="sldNum" sz="quarter" idx="12"/>
-          </p:nvPr>
-        </p:nvSpPr>
-        <p:spPr/>
-        <p:txBody>
-          <a:bodyPr/>
-          <a:lstStyle/>
-          <a:p>
-            <a:r>
-              <a:rPr lang="en-US"/>
-              <a:t>Slide </a:t>
-            </a:r>
-            <a:fld id="{C6F8E2D1-BFA0-484A-B7F1-E348F2594759}" type="slidenum">
-              <a:rPr lang="en-US" smtClean="0"/>
-              <a:t>9</a:t>
-            </a:fld>
-            <a:endParaRPr lang="en-US" dirty="0"/>
-          </a:p>
-        </p:txBody>
-      </p:sp>
-      <p:sp>
-        <p:nvSpPr>
-          <p:cNvPr id="8" name="Footer Placeholder 7">
-            <a:extLst>
-              <a:ext uri="{FF2B5EF4-FFF2-40B4-BE49-F238E27FC236}">
-                <a16:creationId xmlns:a16="http://schemas.microsoft.com/office/drawing/2014/main" id="{560F8ABB-0706-BB35-FFAC-F2F7471C56AD}"/>
-              </a:ext>
-            </a:extLst>
-          </p:cNvPr>
-          <p:cNvSpPr>
-            <a:spLocks noGrp="1"/>
-          </p:cNvSpPr>
-          <p:nvPr>
-            <p:ph type="ftr" sz="quarter" idx="11"/>
-          </p:nvPr>
-        </p:nvSpPr>
-        <p:spPr/>
-        <p:txBody>
-          <a:bodyPr/>
-          <a:lstStyle/>
-          <a:p>
-            <a:r>
-              <a:rPr lang="en-US"/>
-              <a:t>Corbin Ferguson</a:t>
-            </a:r>
-            <a:endParaRPr lang="en-US" dirty="0"/>
-          </a:p>
-        </p:txBody>
-      </p:sp>
-      <p:pic>
-        <p:nvPicPr>
-          <p:cNvPr id="6" name="!NewFile">
-            <a:extLst>
-              <a:ext uri="{FF2B5EF4-FFF2-40B4-BE49-F238E27FC236}">
-                <a16:creationId xmlns:a16="http://schemas.microsoft.com/office/drawing/2014/main" id="{BF17B26E-CEBE-31E2-A928-A78B0BE175DA}"/>
-              </a:ext>
-            </a:extLst>
-          </p:cNvPr>
-          <p:cNvPicPr>
-            <a:picLocks noChangeAspect="1"/>
-          </p:cNvPicPr>
-          <p:nvPr/>
-        </p:nvPicPr>
-        <p:blipFill>
-          <a:blip r:embed="rId2"/>
-          <a:srcRect l="5131" t="67604" r="73596" b="17547"/>
-          <a:stretch>
-            <a:fillRect/>
-          </a:stretch>
-        </p:blipFill>
-        <p:spPr>
-          <a:xfrm>
-            <a:off x="1545843" y="1119567"/>
-            <a:ext cx="9552756" cy="4199766"/>
-          </a:xfrm>
-          <a:prstGeom prst="rect">
-            <a:avLst/>
-          </a:prstGeom>
-          <a:noFill/>
-        </p:spPr>
-      </p:pic>
-      <p:pic>
-        <p:nvPicPr>
-          <p:cNvPr id="11268" name="NewFile">
-            <a:extLst>
-              <a:ext uri="{FF2B5EF4-FFF2-40B4-BE49-F238E27FC236}">
-                <a16:creationId xmlns:a16="http://schemas.microsoft.com/office/drawing/2014/main" id="{14AE5F5A-6C88-0F58-A592-0FB668BF99DA}"/>
-              </a:ext>
-            </a:extLst>
-          </p:cNvPr>
-          <p:cNvPicPr>
-            <a:picLocks noChangeAspect="1" noChangeArrowheads="1"/>
-          </p:cNvPicPr>
-          <p:nvPr/>
-        </p:nvPicPr>
-        <p:blipFill>
-          <a:blip r:embed="rId3">
-            <a:extLst>
-              <a:ext uri="{28A0092B-C50C-407E-A947-70E740481C1C}">
-                <a14:useLocalDpi xmlns:a14="http://schemas.microsoft.com/office/drawing/2010/main" val="0"/>
-              </a:ext>
-            </a:extLst>
-          </a:blip>
-          <a:srcRect/>
-          <a:stretch>
-            <a:fillRect/>
-          </a:stretch>
-        </p:blipFill>
-        <p:spPr bwMode="auto">
-          <a:xfrm>
-            <a:off x="365435" y="980731"/>
-            <a:ext cx="11428631" cy="4882654"/>
-          </a:xfrm>
-          <a:prstGeom prst="rect">
-            <a:avLst/>
-          </a:prstGeom>
-          <a:solidFill>
-            <a:schemeClr val="bg1"/>
-          </a:solidFill>
-        </p:spPr>
-      </p:pic>
-      <p:sp>
-        <p:nvSpPr>
-          <p:cNvPr id="11" name="Rectangle: Rounded Corners 10">
-            <a:extLst>
-              <a:ext uri="{FF2B5EF4-FFF2-40B4-BE49-F238E27FC236}">
-                <a16:creationId xmlns:a16="http://schemas.microsoft.com/office/drawing/2014/main" id="{BBDD576A-A414-9915-960B-C7192C1A13D8}"/>
-              </a:ext>
-            </a:extLst>
-          </p:cNvPr>
-          <p:cNvSpPr/>
-          <p:nvPr/>
-        </p:nvSpPr>
-        <p:spPr>
-          <a:xfrm>
-            <a:off x="2514600" y="2705100"/>
-            <a:ext cx="8839200" cy="901700"/>
-          </a:xfrm>
-          <a:prstGeom prst="roundRect">
-            <a:avLst/>
-          </a:prstGeom>
-          <a:solidFill>
-            <a:srgbClr val="007CAA">
-              <a:alpha val="20000"/>
-            </a:srgbClr>
-          </a:solidFill>
-          <a:ln>
-            <a:solidFill>
-              <a:srgbClr val="007CAA"/>
-            </a:solidFill>
-          </a:ln>
-          <a:effectLst>
-            <a:glow rad="63500">
-              <a:schemeClr val="accent4">
-                <a:satMod val="175000"/>
-                <a:alpha val="40000"/>
-              </a:schemeClr>
-            </a:glow>
-          </a:effectLst>
-        </p:spPr>
-        <p:style>
-          <a:lnRef idx="2">
-            <a:schemeClr val="accent1">
-              <a:shade val="50000"/>
-            </a:schemeClr>
-          </a:lnRef>
-          <a:fillRef idx="1">
-            <a:schemeClr val="accent1"/>
-          </a:fillRef>
-          <a:effectRef idx="0">
-            <a:schemeClr val="accent1"/>
-          </a:effectRef>
-          <a:fontRef idx="minor">
-            <a:schemeClr val="lt1"/>
-          </a:fontRef>
-        </p:style>
-        <p:txBody>
-          <a:bodyPr rtlCol="0" anchor="ctr"/>
-          <a:lstStyle/>
-          <a:p>
-            <a:pPr algn="ctr"/>
-            <a:endParaRPr lang="en-US" sz="2000" dirty="0" err="1">
-              <a:solidFill>
-                <a:srgbClr val="FFFFFF"/>
-              </a:solidFill>
-              <a:latin typeface="E+H Sans" panose="020B0404050202020204" pitchFamily="34" charset="0"/>
-            </a:endParaRPr>
-          </a:p>
-        </p:txBody>
-      </p:sp>
-    </p:spTree>
-    <p:extLst>
-      <p:ext uri="{BB962C8B-B14F-4D97-AF65-F5344CB8AC3E}">
-        <p14:creationId xmlns:p14="http://schemas.microsoft.com/office/powerpoint/2010/main" val="1670292182"/>
-      </p:ext>
-    </p:extLst>
-  </p:cSld>
-  <p:clrMapOvr>
-    <a:masterClrMapping/>
-  </p:clrMapOvr>
-  <mc:AlternateContent xmlns:mc="http://schemas.openxmlformats.org/markup-compatibility/2006">
-    <mc:Choice xmlns:p159="http://schemas.microsoft.com/office/powerpoint/2015/09/main" Requires="p159">
-      <p:transition xmlns:p14="http://schemas.microsoft.com/office/powerpoint/2010/main" spd="slow" p14:dur="2000">
-        <p159:morph option="byObject"/>
-      </p:transition>
-    </mc:Choice>
-    <mc:Fallback>
-      <p:transition spd="slow">
-        <p:fade/>
-      </p:transition>
-    </mc:Fallback>
-  </mc:AlternateContent>
-  <p:timing>
-    <p:tnLst>
-      <p:par>
-        <p:cTn id="1" dur="indefinite" restart="never" nodeType="tmRoot">
-          <p:childTnLst>
-            <p:seq concurrent="1" nextAc="seek">
-              <p:cTn id="2" dur="indefinite" nodeType="mainSeq">
-                <p:childTnLst>
-                  <p:par>
-                    <p:cTn id="3" fill="hold">
-                      <p:stCondLst>
-                        <p:cond delay="indefinite"/>
-                        <p:cond evt="onBegin" delay="0">
-                          <p:tn val="2"/>
-                        </p:cond>
-                      </p:stCondLst>
-                      <p:childTnLst>
-                        <p:par>
-                          <p:cTn id="4" fill="hold">
-                            <p:stCondLst>
-                              <p:cond delay="0"/>
-                            </p:stCondLst>
-                            <p:childTnLst>
-                              <p:par>
-                                <p:cTn id="5" presetID="10" presetClass="entr" presetSubtype="0" fill="hold" grpId="0" nodeType="afterEffect">
-                                  <p:stCondLst>
-                                    <p:cond delay="100"/>
-                                  </p:stCondLst>
-                                  <p:childTnLst>
-                                    <p:set>
-                                      <p:cBhvr>
-                                        <p:cTn id="6" dur="1" fill="hold">
-                                          <p:stCondLst>
-                                            <p:cond delay="0"/>
-                                          </p:stCondLst>
-                                        </p:cTn>
-                                        <p:tgtEl>
-                                          <p:spTgt spid="11"/>
-                                        </p:tgtEl>
-                                        <p:attrNameLst>
-                                          <p:attrName>style.visibility</p:attrName>
-                                        </p:attrNameLst>
-                                      </p:cBhvr>
-                                      <p:to>
-                                        <p:strVal val="visible"/>
-                                      </p:to>
-                                    </p:set>
-                                    <p:animEffect transition="in" filter="fade">
-                                      <p:cBhvr>
-                                        <p:cTn id="7" dur="500"/>
-                                        <p:tgtEl>
-                                          <p:spTgt spid="11"/>
-                                        </p:tgtEl>
-                                      </p:cBhvr>
-                                    </p:animEffect>
-                                  </p:childTnLst>
-                                </p:cTn>
-                              </p:par>
-                              <p:par>
-                                <p:cTn id="8" presetID="1" presetClass="exit" presetSubtype="0" fill="hold" nodeType="withEffect">
-                                  <p:stCondLst>
-                                    <p:cond delay="0"/>
-                                  </p:stCondLst>
-                                  <p:childTnLst>
-                                    <p:set>
-                                      <p:cBhvr>
-                                        <p:cTn id="9" dur="1" fill="hold">
-                                          <p:stCondLst>
-                                            <p:cond delay="0"/>
-                                          </p:stCondLst>
-                                        </p:cTn>
-                                        <p:tgtEl>
-                                          <p:spTgt spid="6"/>
-                                        </p:tgtEl>
-                                        <p:attrNameLst>
-                                          <p:attrName>style.visibility</p:attrName>
-                                        </p:attrNameLst>
-                                      </p:cBhvr>
-                                      <p:to>
-                                        <p:strVal val="hidden"/>
-                                      </p:to>
-                                    </p:set>
-                                  </p:childTnLst>
-                                </p:cTn>
-                              </p:par>
-                            </p:childTnLst>
-                          </p:cTn>
-                        </p:par>
-                      </p:childTnLst>
-                    </p:cTn>
-                  </p:par>
-                </p:childTnLst>
-              </p:cTn>
-              <p:prevCondLst>
-                <p:cond evt="onPrev" delay="0">
-                  <p:tgtEl>
-                    <p:sldTgt/>
-                  </p:tgtEl>
-                </p:cond>
-              </p:prevCondLst>
-              <p:nextCondLst>
-                <p:cond evt="onNext" delay="0">
-                  <p:tgtEl>
-                    <p:sldTgt/>
-                  </p:tgtEl>
-                </p:cond>
-              </p:nextCondLst>
-            </p:seq>
-          </p:childTnLst>
-        </p:cTn>
-      </p:par>
-    </p:tnLst>
-    <p:bldLst>
-      <p:bldP spid="11" grpId="0" animBg="1"/>
     </p:bldLst>
   </p:timing>
 </p:sld>
@@ -27790,25 +25870,6 @@
 </file>
 
 <file path=customXml/item1.xml><?xml version="1.0" encoding="utf-8"?>
-<p:properties xmlns:p="http://schemas.microsoft.com/office/2006/metadata/properties" xmlns:xsi="http://www.w3.org/2001/XMLSchema-instance" xmlns:pc="http://schemas.microsoft.com/office/infopath/2007/PartnerControls">
-  <documentManagement>
-    <_dlc_DocId xmlns="ff469461-7529-4054-b699-f189b0470135">JMTRRF7WE2PD-394290014-179107</_dlc_DocId>
-    <_dlc_DocIdUrl xmlns="ff469461-7529-4054-b699-f189b0470135">
-      <Url>https://endresshauser.sharepoint.com/teams/wg0002545/_layouts/15/DocIdRedir.aspx?ID=JMTRRF7WE2PD-394290014-179107</Url>
-      <Description>JMTRRF7WE2PD-394290014-179107</Description>
-    </_dlc_DocIdUrl>
-    <lcf76f155ced4ddcb4097134ff3c332f xmlns="fd34c5d5-5d34-46ed-9bd0-fe73508393dd">
-      <Terms xmlns="http://schemas.microsoft.com/office/infopath/2007/PartnerControls"/>
-    </lcf76f155ced4ddcb4097134ff3c332f>
-    <TaxKeywordTaxHTField xmlns="ff469461-7529-4054-b699-f189b0470135">
-      <Terms xmlns="http://schemas.microsoft.com/office/infopath/2007/PartnerControls"/>
-    </TaxKeywordTaxHTField>
-    <TaxCatchAll xmlns="ff469461-7529-4054-b699-f189b0470135" xsi:nil="true"/>
-  </documentManagement>
-</p:properties>
-</file>
-
-<file path=customXml/item2.xml><?xml version="1.0" encoding="utf-8"?>
 <ct:contentTypeSchema xmlns:ct="http://schemas.microsoft.com/office/2006/metadata/contentType" xmlns:ma="http://schemas.microsoft.com/office/2006/metadata/properties/metaAttributes" ct:_="" ma:_="" ma:contentTypeName="Document" ma:contentTypeID="0x0101006EDC6CC76FF9184F853A569783F97413" ma:contentTypeVersion="22" ma:contentTypeDescription="Create a new document." ma:contentTypeScope="" ma:versionID="fafba55adc5922abf3c9c892f4cb72c7">
   <xsd:schema xmlns:xsd="http://www.w3.org/2001/XMLSchema" xmlns:xs="http://www.w3.org/2001/XMLSchema" xmlns:p="http://schemas.microsoft.com/office/2006/metadata/properties" xmlns:ns2="ff469461-7529-4054-b699-f189b0470135" xmlns:ns3="fd34c5d5-5d34-46ed-9bd0-fe73508393dd" targetNamespace="http://schemas.microsoft.com/office/2006/metadata/properties" ma:root="true" ma:fieldsID="060795adfc307ec5b186d3bc1ba667bf" ns2:_="" ns3:_="">
     <xsd:import namespace="ff469461-7529-4054-b699-f189b0470135"/>
@@ -28090,7 +26151,35 @@
 </ct:contentTypeSchema>
 </file>
 
+<file path=customXml/item2.xml><?xml version="1.0" encoding="utf-8"?>
+<p:properties xmlns:p="http://schemas.microsoft.com/office/2006/metadata/properties" xmlns:xsi="http://www.w3.org/2001/XMLSchema-instance" xmlns:pc="http://schemas.microsoft.com/office/infopath/2007/PartnerControls">
+  <documentManagement>
+    <_dlc_DocId xmlns="ff469461-7529-4054-b699-f189b0470135">JMTRRF7WE2PD-394290014-179107</_dlc_DocId>
+    <_dlc_DocIdUrl xmlns="ff469461-7529-4054-b699-f189b0470135">
+      <Url>https://endresshauser.sharepoint.com/teams/wg0002545/_layouts/15/DocIdRedir.aspx?ID=JMTRRF7WE2PD-394290014-179107</Url>
+      <Description>JMTRRF7WE2PD-394290014-179107</Description>
+    </_dlc_DocIdUrl>
+    <lcf76f155ced4ddcb4097134ff3c332f xmlns="fd34c5d5-5d34-46ed-9bd0-fe73508393dd">
+      <Terms xmlns="http://schemas.microsoft.com/office/infopath/2007/PartnerControls"/>
+    </lcf76f155ced4ddcb4097134ff3c332f>
+    <TaxKeywordTaxHTField xmlns="ff469461-7529-4054-b699-f189b0470135">
+      <Terms xmlns="http://schemas.microsoft.com/office/infopath/2007/PartnerControls"/>
+    </TaxKeywordTaxHTField>
+    <TaxCatchAll xmlns="ff469461-7529-4054-b699-f189b0470135" xsi:nil="true"/>
+  </documentManagement>
+</p:properties>
+</file>
+
 <file path=customXml/item3.xml><?xml version="1.0" encoding="utf-8"?>
+<?mso-contentType ?>
+<FormTemplates xmlns="http://schemas.microsoft.com/sharepoint/v3/contenttype/forms">
+  <Display>DocumentLibraryForm</Display>
+  <Edit>DocumentLibraryForm</Edit>
+  <New>DocumentLibraryForm</New>
+</FormTemplates>
+</file>
+
+<file path=customXml/item4.xml><?xml version="1.0" encoding="utf-8"?>
 <?mso-contentType ?>
 <spe:Receivers xmlns:spe="http://schemas.microsoft.com/sharepoint/events">
   <Receiver>
@@ -28140,27 +26229,7 @@
 </spe:Receivers>
 </file>
 
-<file path=customXml/item4.xml><?xml version="1.0" encoding="utf-8"?>
-<?mso-contentType ?>
-<FormTemplates xmlns="http://schemas.microsoft.com/sharepoint/v3/contenttype/forms">
-  <Display>DocumentLibraryForm</Display>
-  <Edit>DocumentLibraryForm</Edit>
-  <New>DocumentLibraryForm</New>
-</FormTemplates>
-</file>
-
 <file path=customXml/itemProps1.xml><?xml version="1.0" encoding="utf-8"?>
-<ds:datastoreItem xmlns:ds="http://schemas.openxmlformats.org/officeDocument/2006/customXml" ds:itemID="{BDDCD54E-E6D4-44B7-9C63-36A87B0BC892}">
-  <ds:schemaRefs>
-    <ds:schemaRef ds:uri="http://schemas.microsoft.com/office/2006/metadata/properties"/>
-    <ds:schemaRef ds:uri="http://schemas.microsoft.com/office/infopath/2007/PartnerControls"/>
-    <ds:schemaRef ds:uri="ff469461-7529-4054-b699-f189b0470135"/>
-    <ds:schemaRef ds:uri="fd34c5d5-5d34-46ed-9bd0-fe73508393dd"/>
-  </ds:schemaRefs>
-</ds:datastoreItem>
-</file>
-
-<file path=customXml/itemProps2.xml><?xml version="1.0" encoding="utf-8"?>
 <ds:datastoreItem xmlns:ds="http://schemas.openxmlformats.org/officeDocument/2006/customXml" ds:itemID="{9DFD6D4B-0724-4B51-A318-8F6196A403FF}">
   <ds:schemaRefs>
     <ds:schemaRef ds:uri="http://schemas.microsoft.com/office/2006/metadata/contentType"/>
@@ -28179,18 +26248,29 @@
 </ds:datastoreItem>
 </file>
 
+<file path=customXml/itemProps2.xml><?xml version="1.0" encoding="utf-8"?>
+<ds:datastoreItem xmlns:ds="http://schemas.openxmlformats.org/officeDocument/2006/customXml" ds:itemID="{BDDCD54E-E6D4-44B7-9C63-36A87B0BC892}">
+  <ds:schemaRefs>
+    <ds:schemaRef ds:uri="http://schemas.microsoft.com/office/2006/metadata/properties"/>
+    <ds:schemaRef ds:uri="http://schemas.microsoft.com/office/infopath/2007/PartnerControls"/>
+    <ds:schemaRef ds:uri="ff469461-7529-4054-b699-f189b0470135"/>
+    <ds:schemaRef ds:uri="fd34c5d5-5d34-46ed-9bd0-fe73508393dd"/>
+  </ds:schemaRefs>
+</ds:datastoreItem>
+</file>
+
 <file path=customXml/itemProps3.xml><?xml version="1.0" encoding="utf-8"?>
-<ds:datastoreItem xmlns:ds="http://schemas.openxmlformats.org/officeDocument/2006/customXml" ds:itemID="{AE2F94C8-66CF-41ED-818B-048931D25A1F}">
+<ds:datastoreItem xmlns:ds="http://schemas.openxmlformats.org/officeDocument/2006/customXml" ds:itemID="{A6D3E88B-1A5A-4B73-80E5-69C18FD07D34}">
   <ds:schemaRefs>
-    <ds:schemaRef ds:uri="http://schemas.microsoft.com/sharepoint/events"/>
+    <ds:schemaRef ds:uri="http://schemas.microsoft.com/sharepoint/v3/contenttype/forms"/>
   </ds:schemaRefs>
 </ds:datastoreItem>
 </file>
 
 <file path=customXml/itemProps4.xml><?xml version="1.0" encoding="utf-8"?>
-<ds:datastoreItem xmlns:ds="http://schemas.openxmlformats.org/officeDocument/2006/customXml" ds:itemID="{A6D3E88B-1A5A-4B73-80E5-69C18FD07D34}">
+<ds:datastoreItem xmlns:ds="http://schemas.openxmlformats.org/officeDocument/2006/customXml" ds:itemID="{AE2F94C8-66CF-41ED-818B-048931D25A1F}">
   <ds:schemaRefs>
-    <ds:schemaRef ds:uri="http://schemas.microsoft.com/sharepoint/v3/contenttype/forms"/>
+    <ds:schemaRef ds:uri="http://schemas.microsoft.com/sharepoint/events"/>
   </ds:schemaRefs>
 </ds:datastoreItem>
 </file>

--- a/Thesis Writing Documents/Project Development.pptx
+++ b/Thesis Writing Documents/Project Development.pptx
@@ -218,7 +218,7 @@
 <file path=ppt/revisionInfo.xml><?xml version="1.0" encoding="utf-8"?>
 <p1510:revInfo xmlns:a="http://schemas.openxmlformats.org/drawingml/2006/main" xmlns:r="http://schemas.openxmlformats.org/officeDocument/2006/relationships" xmlns:p1510="http://schemas.microsoft.com/office/powerpoint/2015/10/main">
   <p1510:revLst>
-    <p1510:client id="{F0E03B4B-CC56-43F1-8F18-BCA697229170}" v="611" dt="2026-03-31T14:30:05.421"/>
+    <p1510:client id="{F0E03B4B-CC56-43F1-8F18-BCA697229170}" v="614" dt="2026-03-31T18:39:42.242"/>
   </p1510:revLst>
 </p1510:revInfo>
 </file>
@@ -228,7 +228,7 @@
   <pc:docChgLst>
     <pc:chgData name="Corbin Ferguson" userId="34a864e2-e65e-4cb2-823c-dc28f73f0e40" providerId="ADAL" clId="{8D2D96CF-1319-4CCC-9EA9-073445628049}"/>
     <pc:docChg chg="undo redo custSel addSld delSld modSld sldOrd modMainMaster">
-      <pc:chgData name="Corbin Ferguson" userId="34a864e2-e65e-4cb2-823c-dc28f73f0e40" providerId="ADAL" clId="{8D2D96CF-1319-4CCC-9EA9-073445628049}" dt="2026-03-31T14:30:05.421" v="10483"/>
+      <pc:chgData name="Corbin Ferguson" userId="34a864e2-e65e-4cb2-823c-dc28f73f0e40" providerId="ADAL" clId="{8D2D96CF-1319-4CCC-9EA9-073445628049}" dt="2026-03-31T20:35:44.222" v="10649" actId="20577"/>
       <pc:docMkLst>
         <pc:docMk/>
       </pc:docMkLst>
@@ -247,8 +247,8 @@
           </ac:spMkLst>
         </pc:spChg>
       </pc:sldChg>
-      <pc:sldChg chg="addSp delSp modSp mod modTransition">
-        <pc:chgData name="Corbin Ferguson" userId="34a864e2-e65e-4cb2-823c-dc28f73f0e40" providerId="ADAL" clId="{8D2D96CF-1319-4CCC-9EA9-073445628049}" dt="2026-03-31T13:31:54.415" v="9176" actId="20577"/>
+      <pc:sldChg chg="addSp delSp modSp mod modTransition modNotesTx">
+        <pc:chgData name="Corbin Ferguson" userId="34a864e2-e65e-4cb2-823c-dc28f73f0e40" providerId="ADAL" clId="{8D2D96CF-1319-4CCC-9EA9-073445628049}" dt="2026-03-31T15:08:42.956" v="10501" actId="20577"/>
         <pc:sldMkLst>
           <pc:docMk/>
           <pc:sldMk cId="463964235" sldId="257"/>
@@ -262,7 +262,7 @@
           </ac:spMkLst>
         </pc:spChg>
         <pc:spChg chg="mod">
-          <ac:chgData name="Corbin Ferguson" userId="34a864e2-e65e-4cb2-823c-dc28f73f0e40" providerId="ADAL" clId="{8D2D96CF-1319-4CCC-9EA9-073445628049}" dt="2026-03-31T13:31:54.415" v="9176" actId="20577"/>
+          <ac:chgData name="Corbin Ferguson" userId="34a864e2-e65e-4cb2-823c-dc28f73f0e40" providerId="ADAL" clId="{8D2D96CF-1319-4CCC-9EA9-073445628049}" dt="2026-03-31T15:06:41.762" v="10489" actId="20577"/>
           <ac:spMkLst>
             <pc:docMk/>
             <pc:sldMk cId="463964235" sldId="257"/>
@@ -287,13 +287,13 @@
         </pc:picChg>
       </pc:sldChg>
       <pc:sldChg chg="addSp delSp modSp mod modTransition modClrScheme chgLayout">
-        <pc:chgData name="Corbin Ferguson" userId="34a864e2-e65e-4cb2-823c-dc28f73f0e40" providerId="ADAL" clId="{8D2D96CF-1319-4CCC-9EA9-073445628049}" dt="2026-03-31T14:28:07.771" v="10465" actId="20577"/>
+        <pc:chgData name="Corbin Ferguson" userId="34a864e2-e65e-4cb2-823c-dc28f73f0e40" providerId="ADAL" clId="{8D2D96CF-1319-4CCC-9EA9-073445628049}" dt="2026-03-31T19:08:48.793" v="10626" actId="14100"/>
         <pc:sldMkLst>
           <pc:docMk/>
           <pc:sldMk cId="3766655233" sldId="2146848300"/>
         </pc:sldMkLst>
         <pc:spChg chg="mod">
-          <ac:chgData name="Corbin Ferguson" userId="34a864e2-e65e-4cb2-823c-dc28f73f0e40" providerId="ADAL" clId="{8D2D96CF-1319-4CCC-9EA9-073445628049}" dt="2026-03-30T12:20:42.313" v="2477" actId="26606"/>
+          <ac:chgData name="Corbin Ferguson" userId="34a864e2-e65e-4cb2-823c-dc28f73f0e40" providerId="ADAL" clId="{8D2D96CF-1319-4CCC-9EA9-073445628049}" dt="2026-03-31T19:08:48.793" v="10626" actId="14100"/>
           <ac:spMkLst>
             <pc:docMk/>
             <pc:sldMk cId="3766655233" sldId="2146848300"/>
@@ -333,7 +333,7 @@
           </ac:spMkLst>
         </pc:spChg>
         <pc:spChg chg="add del mod">
-          <ac:chgData name="Corbin Ferguson" userId="34a864e2-e65e-4cb2-823c-dc28f73f0e40" providerId="ADAL" clId="{8D2D96CF-1319-4CCC-9EA9-073445628049}" dt="2026-03-31T14:28:07.771" v="10465" actId="20577"/>
+          <ac:chgData name="Corbin Ferguson" userId="34a864e2-e65e-4cb2-823c-dc28f73f0e40" providerId="ADAL" clId="{8D2D96CF-1319-4CCC-9EA9-073445628049}" dt="2026-03-31T19:08:19.591" v="10625" actId="20577"/>
           <ac:spMkLst>
             <pc:docMk/>
             <pc:sldMk cId="3766655233" sldId="2146848300"/>
@@ -482,13 +482,13 @@
         </pc:sldMkLst>
       </pc:sldChg>
       <pc:sldChg chg="modSp mod ord modTransition modNotesTx">
-        <pc:chgData name="Corbin Ferguson" userId="34a864e2-e65e-4cb2-823c-dc28f73f0e40" providerId="ADAL" clId="{8D2D96CF-1319-4CCC-9EA9-073445628049}" dt="2026-03-31T14:23:19.143" v="10431" actId="20577"/>
+        <pc:chgData name="Corbin Ferguson" userId="34a864e2-e65e-4cb2-823c-dc28f73f0e40" providerId="ADAL" clId="{8D2D96CF-1319-4CCC-9EA9-073445628049}" dt="2026-03-31T18:39:42.242" v="10560"/>
         <pc:sldMkLst>
           <pc:docMk/>
           <pc:sldMk cId="1957245743" sldId="2146848310"/>
         </pc:sldMkLst>
         <pc:spChg chg="mod">
-          <ac:chgData name="Corbin Ferguson" userId="34a864e2-e65e-4cb2-823c-dc28f73f0e40" providerId="ADAL" clId="{8D2D96CF-1319-4CCC-9EA9-073445628049}" dt="2026-03-31T14:23:19.143" v="10431" actId="20577"/>
+          <ac:chgData name="Corbin Ferguson" userId="34a864e2-e65e-4cb2-823c-dc28f73f0e40" providerId="ADAL" clId="{8D2D96CF-1319-4CCC-9EA9-073445628049}" dt="2026-03-31T18:39:42.242" v="10560"/>
           <ac:spMkLst>
             <pc:docMk/>
             <pc:sldMk cId="1957245743" sldId="2146848310"/>
@@ -1087,7 +1087,7 @@
         </pc:spChg>
       </pc:sldChg>
       <pc:sldChg chg="addSp delSp modSp new mod modTransition modClrScheme chgLayout modNotesTx">
-        <pc:chgData name="Corbin Ferguson" userId="34a864e2-e65e-4cb2-823c-dc28f73f0e40" providerId="ADAL" clId="{8D2D96CF-1319-4CCC-9EA9-073445628049}" dt="2026-03-31T14:05:33.952" v="10389" actId="20577"/>
+        <pc:chgData name="Corbin Ferguson" userId="34a864e2-e65e-4cb2-823c-dc28f73f0e40" providerId="ADAL" clId="{8D2D96CF-1319-4CCC-9EA9-073445628049}" dt="2026-03-31T19:17:40.468" v="10635" actId="20577"/>
         <pc:sldMkLst>
           <pc:docMk/>
           <pc:sldMk cId="3366771104" sldId="2146848333"/>
@@ -1141,7 +1141,7 @@
           </ac:spMkLst>
         </pc:spChg>
         <pc:spChg chg="add mod">
-          <ac:chgData name="Corbin Ferguson" userId="34a864e2-e65e-4cb2-823c-dc28f73f0e40" providerId="ADAL" clId="{8D2D96CF-1319-4CCC-9EA9-073445628049}" dt="2026-03-31T13:09:54.834" v="9157" actId="368"/>
+          <ac:chgData name="Corbin Ferguson" userId="34a864e2-e65e-4cb2-823c-dc28f73f0e40" providerId="ADAL" clId="{8D2D96CF-1319-4CCC-9EA9-073445628049}" dt="2026-03-31T19:17:40.468" v="10635" actId="20577"/>
           <ac:spMkLst>
             <pc:docMk/>
             <pc:sldMk cId="3366771104" sldId="2146848333"/>
@@ -1277,7 +1277,7 @@
         </pc:picChg>
       </pc:sldChg>
       <pc:sldChg chg="addSp delSp modSp new mod modTransition">
-        <pc:chgData name="Corbin Ferguson" userId="34a864e2-e65e-4cb2-823c-dc28f73f0e40" providerId="ADAL" clId="{8D2D96CF-1319-4CCC-9EA9-073445628049}" dt="2026-03-31T14:29:15.491" v="10468"/>
+        <pc:chgData name="Corbin Ferguson" userId="34a864e2-e65e-4cb2-823c-dc28f73f0e40" providerId="ADAL" clId="{8D2D96CF-1319-4CCC-9EA9-073445628049}" dt="2026-03-31T20:35:44.222" v="10649" actId="20577"/>
         <pc:sldMkLst>
           <pc:docMk/>
           <pc:sldMk cId="1311398929" sldId="2146848335"/>
@@ -1355,7 +1355,7 @@
           </ac:spMkLst>
         </pc:spChg>
         <pc:spChg chg="add mod">
-          <ac:chgData name="Corbin Ferguson" userId="34a864e2-e65e-4cb2-823c-dc28f73f0e40" providerId="ADAL" clId="{8D2D96CF-1319-4CCC-9EA9-073445628049}" dt="2026-03-31T13:45:15.537" v="9463" actId="6549"/>
+          <ac:chgData name="Corbin Ferguson" userId="34a864e2-e65e-4cb2-823c-dc28f73f0e40" providerId="ADAL" clId="{8D2D96CF-1319-4CCC-9EA9-073445628049}" dt="2026-03-31T20:35:44.222" v="10649" actId="20577"/>
           <ac:spMkLst>
             <pc:docMk/>
             <pc:sldMk cId="1311398929" sldId="2146848335"/>
@@ -1378,12 +1378,20 @@
             <ac:picMk id="11" creationId="{9C395893-10CB-DC77-C78E-1BD27244003D}"/>
           </ac:picMkLst>
         </pc:picChg>
-        <pc:picChg chg="add mod ord">
-          <ac:chgData name="Corbin Ferguson" userId="34a864e2-e65e-4cb2-823c-dc28f73f0e40" providerId="ADAL" clId="{8D2D96CF-1319-4CCC-9EA9-073445628049}" dt="2026-03-31T12:57:01.516" v="8175" actId="14100"/>
+        <pc:picChg chg="add del mod ord">
+          <ac:chgData name="Corbin Ferguson" userId="34a864e2-e65e-4cb2-823c-dc28f73f0e40" providerId="ADAL" clId="{8D2D96CF-1319-4CCC-9EA9-073445628049}" dt="2026-03-31T15:33:04.581" v="10502" actId="478"/>
           <ac:picMkLst>
             <pc:docMk/>
             <pc:sldMk cId="1311398929" sldId="2146848335"/>
             <ac:picMk id="13" creationId="{AFD30484-7327-2EF8-F791-E8AF4C39BD5C}"/>
+          </ac:picMkLst>
+        </pc:picChg>
+        <pc:picChg chg="add mod ord">
+          <ac:chgData name="Corbin Ferguson" userId="34a864e2-e65e-4cb2-823c-dc28f73f0e40" providerId="ADAL" clId="{8D2D96CF-1319-4CCC-9EA9-073445628049}" dt="2026-03-31T15:33:16.108" v="10508" actId="26606"/>
+          <ac:picMkLst>
+            <pc:docMk/>
+            <pc:sldMk cId="1311398929" sldId="2146848335"/>
+            <ac:picMk id="17" creationId="{07E999BB-F871-651D-2CBB-38D8B9FA34BA}"/>
           </ac:picMkLst>
         </pc:picChg>
       </pc:sldChg>
@@ -1403,7 +1411,7 @@
         </pc:spChg>
       </pc:sldChg>
       <pc:sldChg chg="addSp delSp modSp new mod modTransition">
-        <pc:chgData name="Corbin Ferguson" userId="34a864e2-e65e-4cb2-823c-dc28f73f0e40" providerId="ADAL" clId="{8D2D96CF-1319-4CCC-9EA9-073445628049}" dt="2026-03-31T14:29:17.831" v="10469"/>
+        <pc:chgData name="Corbin Ferguson" userId="34a864e2-e65e-4cb2-823c-dc28f73f0e40" providerId="ADAL" clId="{8D2D96CF-1319-4CCC-9EA9-073445628049}" dt="2026-03-31T15:33:43.051" v="10516" actId="26606"/>
         <pc:sldMkLst>
           <pc:docMk/>
           <pc:sldMk cId="156436412" sldId="2146848336"/>
@@ -1457,19 +1465,27 @@
           </ac:spMkLst>
         </pc:spChg>
         <pc:spChg chg="add mod">
-          <ac:chgData name="Corbin Ferguson" userId="34a864e2-e65e-4cb2-823c-dc28f73f0e40" providerId="ADAL" clId="{8D2D96CF-1319-4CCC-9EA9-073445628049}" dt="2026-03-31T13:03:17.992" v="8854" actId="20577"/>
+          <ac:chgData name="Corbin Ferguson" userId="34a864e2-e65e-4cb2-823c-dc28f73f0e40" providerId="ADAL" clId="{8D2D96CF-1319-4CCC-9EA9-073445628049}" dt="2026-03-31T15:33:43.051" v="10516" actId="26606"/>
           <ac:spMkLst>
             <pc:docMk/>
             <pc:sldMk cId="156436412" sldId="2146848336"/>
             <ac:spMk id="14" creationId="{79AF265C-42E8-C545-68A1-2F3A0E60B9FC}"/>
           </ac:spMkLst>
         </pc:spChg>
-        <pc:picChg chg="add mod ord">
-          <ac:chgData name="Corbin Ferguson" userId="34a864e2-e65e-4cb2-823c-dc28f73f0e40" providerId="ADAL" clId="{8D2D96CF-1319-4CCC-9EA9-073445628049}" dt="2026-03-31T12:58:01.767" v="8195" actId="26606"/>
+        <pc:picChg chg="add del mod ord">
+          <ac:chgData name="Corbin Ferguson" userId="34a864e2-e65e-4cb2-823c-dc28f73f0e40" providerId="ADAL" clId="{8D2D96CF-1319-4CCC-9EA9-073445628049}" dt="2026-03-31T15:33:31.860" v="10514" actId="478"/>
           <ac:picMkLst>
             <pc:docMk/>
             <pc:sldMk cId="156436412" sldId="2146848336"/>
             <ac:picMk id="9" creationId="{9E782A90-606C-B8FC-5DCD-B4609AECF711}"/>
+          </ac:picMkLst>
+        </pc:picChg>
+        <pc:picChg chg="add mod ord">
+          <ac:chgData name="Corbin Ferguson" userId="34a864e2-e65e-4cb2-823c-dc28f73f0e40" providerId="ADAL" clId="{8D2D96CF-1319-4CCC-9EA9-073445628049}" dt="2026-03-31T15:33:43.051" v="10516" actId="26606"/>
+          <ac:picMkLst>
+            <pc:docMk/>
+            <pc:sldMk cId="156436412" sldId="2146848336"/>
+            <ac:picMk id="11" creationId="{B46A16E4-8866-CF99-290D-B3D2521747BE}"/>
           </ac:picMkLst>
         </pc:picChg>
       </pc:sldChg>
@@ -2498,7 +2514,75 @@
           <a:bodyPr/>
           <a:lstStyle/>
           <a:p>
-            <a:pPr fontAlgn="t"/>
+            <a:pPr marL="0" marR="0" lvl="0" indent="0" algn="l" defTabSz="914400" rtl="0" eaLnBrk="1" fontAlgn="base" latinLnBrk="0" hangingPunct="1">
+              <a:lnSpc>
+                <a:spcPct val="100000"/>
+              </a:lnSpc>
+              <a:spcBef>
+                <a:spcPct val="30000"/>
+              </a:spcBef>
+              <a:spcAft>
+                <a:spcPct val="0"/>
+              </a:spcAft>
+              <a:buClrTx/>
+              <a:buSzTx/>
+              <a:buFontTx/>
+              <a:buNone/>
+              <a:tabLst/>
+              <a:defRPr/>
+            </a:pPr>
+            <a:r>
+              <a:rPr lang="en-US" sz="1200" b="0" i="1" kern="1200" dirty="0">
+                <a:solidFill>
+                  <a:schemeClr val="tx1"/>
+                </a:solidFill>
+                <a:effectLst/>
+                <a:latin typeface="E+H Serif" pitchFamily="18" charset="0"/>
+                <a:ea typeface="+mn-ea"/>
+                <a:cs typeface="+mn-cs"/>
+              </a:rPr>
+              <a:t>is Rockwell Automation’s main engineering and programming environment for controllers.</a:t>
+            </a:r>
+            <a:endParaRPr lang="en-US" sz="1200" b="0" i="0" kern="1200" dirty="0">
+              <a:solidFill>
+                <a:schemeClr val="tx1"/>
+              </a:solidFill>
+              <a:effectLst/>
+              <a:latin typeface="E+H Serif" pitchFamily="18" charset="0"/>
+              <a:ea typeface="+mn-ea"/>
+              <a:cs typeface="+mn-cs"/>
+            </a:endParaRPr>
+          </a:p>
+          <a:p>
+            <a:pPr marL="0" marR="0" lvl="0" indent="0" algn="l" defTabSz="914400" rtl="0" eaLnBrk="1" fontAlgn="base" latinLnBrk="0" hangingPunct="1">
+              <a:lnSpc>
+                <a:spcPct val="100000"/>
+              </a:lnSpc>
+              <a:spcBef>
+                <a:spcPct val="30000"/>
+              </a:spcBef>
+              <a:spcAft>
+                <a:spcPct val="0"/>
+              </a:spcAft>
+              <a:buClrTx/>
+              <a:buSzTx/>
+              <a:buFontTx/>
+              <a:buNone/>
+              <a:tabLst/>
+              <a:defRPr/>
+            </a:pPr>
+            <a:r>
+              <a:rPr lang="en-US" sz="1200" b="0" i="1" kern="1200" dirty="0">
+                <a:solidFill>
+                  <a:schemeClr val="tx1"/>
+                </a:solidFill>
+                <a:effectLst/>
+                <a:latin typeface="E+H Serif" pitchFamily="18" charset="0"/>
+                <a:ea typeface="+mn-ea"/>
+                <a:cs typeface="+mn-cs"/>
+              </a:rPr>
+              <a:t>It provides a single, scalable platform to configure, program, and maintain control systems within Rockwell’s Integrated Architecture.</a:t>
+            </a:r>
             <a:r>
               <a:rPr lang="en-US" sz="1200" b="0" i="0" kern="1200" dirty="0">
                 <a:solidFill>
@@ -2509,11 +2593,20 @@
                 <a:ea typeface="+mn-ea"/>
                 <a:cs typeface="+mn-cs"/>
               </a:rPr>
-              <a:t>Studio 5000 is optimized for detailed, manual PLC development, not rapid prototyping.</a:t>
-            </a:r>
-          </a:p>
-          <a:p>
-            <a:pPr fontAlgn="t"/>
+              <a:t> </a:t>
+            </a:r>
+            <a:r>
+              <a:rPr lang="en-US" sz="1200" b="0" i="1" kern="1200" dirty="0">
+                <a:solidFill>
+                  <a:schemeClr val="tx1"/>
+                </a:solidFill>
+                <a:effectLst/>
+                <a:latin typeface="E+H Serif" pitchFamily="18" charset="0"/>
+                <a:ea typeface="+mn-ea"/>
+                <a:cs typeface="+mn-cs"/>
+              </a:rPr>
+              <a:t>The software supports multiple programming languages—Ladder, Structured Text, Function Block, and Sequential Function Chart—within one unified design environment.</a:t>
+            </a:r>
             <a:r>
               <a:rPr lang="en-US" sz="1200" b="0" i="0" kern="1200" dirty="0">
                 <a:solidFill>
@@ -2524,13 +2617,38 @@
                 <a:ea typeface="+mn-ea"/>
                 <a:cs typeface="+mn-cs"/>
               </a:rPr>
-              <a:t>Manual creation of recurring controller structures is time‑consuming and repetitive.</a:t>
-            </a:r>
-          </a:p>
-          <a:p>
-            <a:pPr fontAlgn="t"/>
-            <a:r>
-              <a:rPr lang="en-US" sz="1200" b="0" i="0" kern="1200" dirty="0">
+              <a:t> </a:t>
+            </a:r>
+            <a:endParaRPr lang="en-US" sz="1200" b="0" i="0" u="none" strike="noStrike" kern="1200" dirty="0">
+              <a:solidFill>
+                <a:schemeClr val="tx1"/>
+              </a:solidFill>
+              <a:effectLst/>
+              <a:latin typeface="E+H Serif" pitchFamily="18" charset="0"/>
+              <a:ea typeface="+mn-ea"/>
+              <a:cs typeface="+mn-cs"/>
+            </a:endParaRPr>
+          </a:p>
+          <a:p>
+            <a:pPr marL="0" marR="0" lvl="0" indent="0" algn="l" defTabSz="914400" rtl="0" eaLnBrk="1" fontAlgn="base" latinLnBrk="0" hangingPunct="1">
+              <a:lnSpc>
+                <a:spcPct val="100000"/>
+              </a:lnSpc>
+              <a:spcBef>
+                <a:spcPct val="30000"/>
+              </a:spcBef>
+              <a:spcAft>
+                <a:spcPct val="0"/>
+              </a:spcAft>
+              <a:buClrTx/>
+              <a:buSzTx/>
+              <a:buFontTx/>
+              <a:buNone/>
+              <a:tabLst/>
+              <a:defRPr/>
+            </a:pPr>
+            <a:r>
+              <a:rPr lang="en-US" sz="1200" b="0" i="1" kern="1200" dirty="0">
                 <a:solidFill>
                   <a:schemeClr val="tx1"/>
                 </a:solidFill>
@@ -2539,38 +2657,17 @@
                 <a:ea typeface="+mn-ea"/>
                 <a:cs typeface="+mn-cs"/>
               </a:rPr>
-              <a:t>No streamlined way to mass‑generate template‑based code.</a:t>
-            </a:r>
-          </a:p>
-          <a:p>
-            <a:pPr fontAlgn="t"/>
-            <a:r>
-              <a:rPr lang="en-US" sz="1200" b="0" i="0" kern="1200" dirty="0">
-                <a:solidFill>
-                  <a:schemeClr val="tx1"/>
-                </a:solidFill>
-                <a:effectLst/>
-                <a:latin typeface="E+H Serif" pitchFamily="18" charset="0"/>
-                <a:ea typeface="+mn-ea"/>
-                <a:cs typeface="+mn-cs"/>
-              </a:rPr>
-              <a:t>L5X import/export enables automated manipulation since it is XML‑based.</a:t>
-            </a:r>
-          </a:p>
-          <a:p>
-            <a:pPr fontAlgn="t"/>
-            <a:r>
-              <a:rPr lang="en-US" sz="1200" b="0" i="0" kern="1200" dirty="0">
-                <a:solidFill>
-                  <a:schemeClr val="tx1"/>
-                </a:solidFill>
-                <a:effectLst/>
-                <a:latin typeface="E+H Serif" pitchFamily="18" charset="0"/>
-                <a:ea typeface="+mn-ea"/>
-                <a:cs typeface="+mn-cs"/>
-              </a:rPr>
-              <a:t>Tool aims to automate repetitive logic creation while preserving Studio 5000 compatibility.</a:t>
-            </a:r>
+              <a:t>Engineers use it to build I/O configurations, manage tags, develop logic routines, and integrate Rockwell hardware.</a:t>
+            </a:r>
+            <a:endParaRPr lang="en-US" sz="1200" b="0" i="0" kern="1200" dirty="0">
+              <a:solidFill>
+                <a:schemeClr val="tx1"/>
+              </a:solidFill>
+              <a:effectLst/>
+              <a:latin typeface="E+H Serif" pitchFamily="18" charset="0"/>
+              <a:ea typeface="+mn-ea"/>
+              <a:cs typeface="+mn-cs"/>
+            </a:endParaRPr>
           </a:p>
           <a:p>
             <a:endParaRPr lang="en-US" dirty="0"/>
@@ -21711,7 +21808,7 @@
             <a:pPr lvl="1"/>
             <a:r>
               <a:rPr lang="en-US" dirty="0"/>
-              <a:t>Utilizes MOQ to bypass UI functionality</a:t>
+              <a:t>Utilizes MOQ to bypass external element access functions</a:t>
             </a:r>
           </a:p>
           <a:p>
@@ -21738,7 +21835,7 @@
             <a:pPr lvl="1"/>
             <a:r>
               <a:rPr lang="en-US" dirty="0"/>
-              <a:t>Utilizes MOQ to bypass UI functionality</a:t>
+              <a:t>Utilizes MOQ to bypass external element access functions</a:t>
             </a:r>
           </a:p>
           <a:p>
@@ -21927,8 +22024,8 @@
         </p:nvSpPr>
         <p:spPr>
           <a:xfrm>
-            <a:off x="334963" y="620690"/>
-            <a:ext cx="11522075" cy="360041"/>
+            <a:off x="334964" y="620690"/>
+            <a:ext cx="1869588" cy="360041"/>
           </a:xfrm>
         </p:spPr>
         <p:txBody>
@@ -22043,6 +22140,12 @@
         <p:txBody>
           <a:bodyPr/>
           <a:lstStyle/>
+          <a:p>
+            <a:r>
+              <a:rPr lang="en-US" dirty="0"/>
+              <a:t>Tests were run both locally and on Jenkins pipeline</a:t>
+            </a:r>
+          </a:p>
           <a:p>
             <a:r>
               <a:rPr lang="en-US" dirty="0"/>
@@ -23678,15 +23781,7 @@
             </a:pPr>
             <a:r>
               <a:rPr lang="en-US" dirty="0"/>
-              <a:t>The goal of this application was to create a tool that can function as an alternative to Rockwell Automation’s Studio 5000 Logix Designer. /</a:t>
-            </a:r>
-            <a:r>
-              <a:rPr lang="en-US" b="1" dirty="0"/>
-              <a:t>explain what is</a:t>
-            </a:r>
-            <a:r>
-              <a:rPr lang="en-US" dirty="0"/>
-              <a:t>/</a:t>
+              <a:t>The goal of this application was to create a tool that can function as an alternative to Rockwell Automation’s Studio 5000 Logix Designer. </a:t>
             </a:r>
           </a:p>
           <a:p>
@@ -23695,7 +23790,7 @@
             </a:pPr>
             <a:r>
               <a:rPr lang="en-US" dirty="0"/>
-              <a:t> It needed to address the following issues with the existing designer:</a:t>
+              <a:t>It needed to address the following issues with the existing designer:</a:t>
             </a:r>
           </a:p>
           <a:p>
@@ -24587,7 +24682,7 @@
             </a:pPr>
             <a:r>
               <a:rPr lang="en-US" dirty="0"/>
-              <a:t>Creates, modifies, deletes</a:t>
+              <a:t>Imports, Creates, modifies, deletes</a:t>
             </a:r>
           </a:p>
           <a:p>
@@ -24900,12 +24995,210 @@
           </a:p>
         </p:txBody>
       </p:sp>
+      <p:sp>
+        <p:nvSpPr>
+          <p:cNvPr id="26" name="Content Placeholder 4">
+            <a:extLst>
+              <a:ext uri="{FF2B5EF4-FFF2-40B4-BE49-F238E27FC236}">
+                <a16:creationId xmlns:a16="http://schemas.microsoft.com/office/drawing/2014/main" id="{ED360616-AB19-F180-EAE4-E484295C9E7C}"/>
+              </a:ext>
+            </a:extLst>
+          </p:cNvPr>
+          <p:cNvSpPr>
+            <a:spLocks noGrp="1"/>
+          </p:cNvSpPr>
+          <p:nvPr>
+            <p:ph sz="quarter" idx="14"/>
+          </p:nvPr>
+        </p:nvSpPr>
+        <p:spPr>
+          <a:xfrm>
+            <a:off x="7595615" y="980732"/>
+            <a:ext cx="4261421" cy="5112094"/>
+          </a:xfrm>
+        </p:spPr>
+        <p:txBody>
+          <a:bodyPr/>
+          <a:lstStyle/>
+          <a:p>
+            <a:r>
+              <a:rPr lang="en-US" sz="1800" dirty="0"/>
+              <a:t>Execute</a:t>
+            </a:r>
+          </a:p>
+          <a:p>
+            <a:pPr lvl="1"/>
+            <a:r>
+              <a:rPr lang="en-US" sz="1600" dirty="0"/>
+              <a:t>Coordinates major operations</a:t>
+            </a:r>
+          </a:p>
+          <a:p>
+            <a:pPr lvl="1"/>
+            <a:r>
+              <a:rPr lang="en-US" sz="1600" dirty="0"/>
+              <a:t>Only class that interacts with GUI elements (through Interfaces)</a:t>
+            </a:r>
+          </a:p>
+          <a:p>
+            <a:r>
+              <a:rPr lang="en-US" sz="1800" dirty="0" err="1"/>
+              <a:t>ElementHelper</a:t>
+            </a:r>
+            <a:endParaRPr lang="en-US" sz="1800" dirty="0"/>
+          </a:p>
+          <a:p>
+            <a:pPr lvl="1"/>
+            <a:r>
+              <a:rPr lang="en-US" sz="1600" dirty="0"/>
+              <a:t>Contains relevant information for elements currently being modified</a:t>
+            </a:r>
+          </a:p>
+          <a:p>
+            <a:r>
+              <a:rPr lang="en-US" sz="1800" dirty="0" err="1"/>
+              <a:t>XMLHandler</a:t>
+            </a:r>
+            <a:endParaRPr lang="en-US" sz="1800" dirty="0"/>
+          </a:p>
+          <a:p>
+            <a:pPr lvl="1"/>
+            <a:r>
+              <a:rPr lang="en-US" sz="1600" dirty="0"/>
+              <a:t>Handles the reading and writing of </a:t>
+            </a:r>
+            <a:r>
+              <a:rPr lang="en-US" sz="1600"/>
+              <a:t>XML objects</a:t>
+            </a:r>
+            <a:endParaRPr lang="en-US" sz="1600" dirty="0"/>
+          </a:p>
+          <a:p>
+            <a:r>
+              <a:rPr lang="en-US" sz="1800" dirty="0" err="1"/>
+              <a:t>ValidationHandler</a:t>
+            </a:r>
+            <a:endParaRPr lang="en-US" sz="1800" dirty="0"/>
+          </a:p>
+          <a:p>
+            <a:pPr lvl="1"/>
+            <a:r>
+              <a:rPr lang="en-US" sz="1600" dirty="0"/>
+              <a:t>Handles reading of XSD file, passes information to </a:t>
+            </a:r>
+            <a:r>
+              <a:rPr lang="en-US" sz="1600" dirty="0" err="1"/>
+              <a:t>XMLHandler</a:t>
+            </a:r>
+            <a:endParaRPr lang="en-US" sz="1600" dirty="0"/>
+          </a:p>
+        </p:txBody>
+      </p:sp>
+      <p:sp>
+        <p:nvSpPr>
+          <p:cNvPr id="6" name="Footer Placeholder 5">
+            <a:extLst>
+              <a:ext uri="{FF2B5EF4-FFF2-40B4-BE49-F238E27FC236}">
+                <a16:creationId xmlns:a16="http://schemas.microsoft.com/office/drawing/2014/main" id="{6EACB492-E65F-C15E-A67C-498249C527CB}"/>
+              </a:ext>
+            </a:extLst>
+          </p:cNvPr>
+          <p:cNvSpPr>
+            <a:spLocks noGrp="1"/>
+          </p:cNvSpPr>
+          <p:nvPr>
+            <p:ph type="ftr" sz="quarter" idx="15"/>
+          </p:nvPr>
+        </p:nvSpPr>
+        <p:spPr>
+          <a:xfrm>
+            <a:off x="4086351" y="6469380"/>
+            <a:ext cx="1130300" cy="180000"/>
+          </a:xfrm>
+        </p:spPr>
+        <p:txBody>
+          <a:bodyPr wrap="none" anchor="ctr">
+            <a:normAutofit/>
+          </a:bodyPr>
+          <a:lstStyle/>
+          <a:p>
+            <a:pPr>
+              <a:lnSpc>
+                <a:spcPct val="90000"/>
+              </a:lnSpc>
+              <a:spcAft>
+                <a:spcPts val="600"/>
+              </a:spcAft>
+            </a:pPr>
+            <a:r>
+              <a:rPr lang="en-US"/>
+              <a:t>Corbin Ferguson</a:t>
+            </a:r>
+          </a:p>
+        </p:txBody>
+      </p:sp>
+      <p:sp>
+        <p:nvSpPr>
+          <p:cNvPr id="7" name="Slide Number Placeholder 6">
+            <a:extLst>
+              <a:ext uri="{FF2B5EF4-FFF2-40B4-BE49-F238E27FC236}">
+                <a16:creationId xmlns:a16="http://schemas.microsoft.com/office/drawing/2014/main" id="{6248CF65-0587-F225-E8E1-4881A1DE0251}"/>
+              </a:ext>
+            </a:extLst>
+          </p:cNvPr>
+          <p:cNvSpPr>
+            <a:spLocks noGrp="1"/>
+          </p:cNvSpPr>
+          <p:nvPr>
+            <p:ph type="sldNum" sz="quarter" idx="16"/>
+          </p:nvPr>
+        </p:nvSpPr>
+        <p:spPr>
+          <a:xfrm>
+            <a:off x="1633051" y="6469380"/>
+            <a:ext cx="571500" cy="180000"/>
+          </a:xfrm>
+        </p:spPr>
+        <p:txBody>
+          <a:bodyPr wrap="none" anchor="ctr">
+            <a:normAutofit/>
+          </a:bodyPr>
+          <a:lstStyle/>
+          <a:p>
+            <a:pPr>
+              <a:lnSpc>
+                <a:spcPct val="90000"/>
+              </a:lnSpc>
+              <a:spcAft>
+                <a:spcPts val="600"/>
+              </a:spcAft>
+            </a:pPr>
+            <a:r>
+              <a:rPr lang="en-US"/>
+              <a:t>Slide </a:t>
+            </a:r>
+            <a:fld id="{628FA54D-953C-47EB-A7E0-4AE7B797E29E}" type="slidenum">
+              <a:rPr lang="en-US" smtClean="0"/>
+              <a:pPr>
+                <a:lnSpc>
+                  <a:spcPct val="90000"/>
+                </a:lnSpc>
+                <a:spcAft>
+                  <a:spcPts val="600"/>
+                </a:spcAft>
+              </a:pPr>
+              <a:t>7</a:t>
+            </a:fld>
+            <a:endParaRPr lang="en-US"/>
+          </a:p>
+        </p:txBody>
+      </p:sp>
       <p:pic>
         <p:nvPicPr>
-          <p:cNvPr id="13" name="Picture 12">
-            <a:extLst>
-              <a:ext uri="{FF2B5EF4-FFF2-40B4-BE49-F238E27FC236}">
-                <a16:creationId xmlns:a16="http://schemas.microsoft.com/office/drawing/2014/main" id="{AFD30484-7327-2EF8-F791-E8AF4C39BD5C}"/>
+          <p:cNvPr id="17" name="Picture 16">
+            <a:extLst>
+              <a:ext uri="{FF2B5EF4-FFF2-40B4-BE49-F238E27FC236}">
+                <a16:creationId xmlns:a16="http://schemas.microsoft.com/office/drawing/2014/main" id="{07E999BB-F871-651D-2CBB-38D8B9FA34BA}"/>
               </a:ext>
             </a:extLst>
           </p:cNvPr>
@@ -24922,222 +25215,14 @@
         </p:blipFill>
         <p:spPr>
           <a:xfrm>
-            <a:off x="334963" y="1375131"/>
-            <a:ext cx="7112966" cy="4488253"/>
+            <a:off x="163512" y="1298404"/>
+            <a:ext cx="7267575" cy="4476750"/>
           </a:xfrm>
           <a:prstGeom prst="rect">
             <a:avLst/>
           </a:prstGeom>
-          <a:noFill/>
         </p:spPr>
       </p:pic>
-      <p:sp>
-        <p:nvSpPr>
-          <p:cNvPr id="26" name="Content Placeholder 4">
-            <a:extLst>
-              <a:ext uri="{FF2B5EF4-FFF2-40B4-BE49-F238E27FC236}">
-                <a16:creationId xmlns:a16="http://schemas.microsoft.com/office/drawing/2014/main" id="{ED360616-AB19-F180-EAE4-E484295C9E7C}"/>
-              </a:ext>
-            </a:extLst>
-          </p:cNvPr>
-          <p:cNvSpPr>
-            <a:spLocks noGrp="1"/>
-          </p:cNvSpPr>
-          <p:nvPr>
-            <p:ph sz="quarter" idx="14"/>
-          </p:nvPr>
-        </p:nvSpPr>
-        <p:spPr>
-          <a:xfrm>
-            <a:off x="7595615" y="980732"/>
-            <a:ext cx="4261421" cy="5112094"/>
-          </a:xfrm>
-        </p:spPr>
-        <p:txBody>
-          <a:bodyPr/>
-          <a:lstStyle/>
-          <a:p>
-            <a:r>
-              <a:rPr lang="en-US" sz="1800" dirty="0" err="1"/>
-              <a:t>ActionSelect</a:t>
-            </a:r>
-            <a:endParaRPr lang="en-US" sz="1800" dirty="0"/>
-          </a:p>
-          <a:p>
-            <a:pPr lvl="1"/>
-            <a:r>
-              <a:rPr lang="en-US" sz="1600" dirty="0"/>
-              <a:t>Main menu class, takes button input  events and calls functions in Execute class</a:t>
-            </a:r>
-          </a:p>
-          <a:p>
-            <a:r>
-              <a:rPr lang="en-US" sz="1800" dirty="0"/>
-              <a:t>Execute</a:t>
-            </a:r>
-          </a:p>
-          <a:p>
-            <a:pPr lvl="1"/>
-            <a:r>
-              <a:rPr lang="en-US" sz="1600" dirty="0"/>
-              <a:t>Coordinates major operations</a:t>
-            </a:r>
-          </a:p>
-          <a:p>
-            <a:pPr lvl="1"/>
-            <a:r>
-              <a:rPr lang="en-US" sz="1600" dirty="0"/>
-              <a:t>Only class that interacts with GUI elements (through Interfaces)</a:t>
-            </a:r>
-          </a:p>
-          <a:p>
-            <a:r>
-              <a:rPr lang="en-US" sz="1800" dirty="0" err="1"/>
-              <a:t>ElementHelper</a:t>
-            </a:r>
-            <a:endParaRPr lang="en-US" sz="1800" dirty="0"/>
-          </a:p>
-          <a:p>
-            <a:pPr lvl="1"/>
-            <a:r>
-              <a:rPr lang="en-US" sz="1600" dirty="0"/>
-              <a:t>Contains relevant information for elements currently being modified</a:t>
-            </a:r>
-          </a:p>
-          <a:p>
-            <a:r>
-              <a:rPr lang="en-US" sz="1800" dirty="0" err="1"/>
-              <a:t>XMLHandler</a:t>
-            </a:r>
-            <a:endParaRPr lang="en-US" sz="1800" dirty="0"/>
-          </a:p>
-          <a:p>
-            <a:pPr lvl="1"/>
-            <a:r>
-              <a:rPr lang="en-US" sz="1600" dirty="0"/>
-              <a:t>Handles the reading and writing of XML files</a:t>
-            </a:r>
-          </a:p>
-          <a:p>
-            <a:r>
-              <a:rPr lang="en-US" sz="1800" dirty="0" err="1"/>
-              <a:t>ValidationHandler</a:t>
-            </a:r>
-            <a:endParaRPr lang="en-US" sz="1800" dirty="0"/>
-          </a:p>
-          <a:p>
-            <a:pPr lvl="1"/>
-            <a:r>
-              <a:rPr lang="en-US" sz="1600" dirty="0"/>
-              <a:t>Handles reading of XSD file, passes information to </a:t>
-            </a:r>
-            <a:r>
-              <a:rPr lang="en-US" sz="1600" dirty="0" err="1"/>
-              <a:t>XMLHandler</a:t>
-            </a:r>
-            <a:endParaRPr lang="en-US" sz="1600" dirty="0"/>
-          </a:p>
-        </p:txBody>
-      </p:sp>
-      <p:sp>
-        <p:nvSpPr>
-          <p:cNvPr id="6" name="Footer Placeholder 5">
-            <a:extLst>
-              <a:ext uri="{FF2B5EF4-FFF2-40B4-BE49-F238E27FC236}">
-                <a16:creationId xmlns:a16="http://schemas.microsoft.com/office/drawing/2014/main" id="{6EACB492-E65F-C15E-A67C-498249C527CB}"/>
-              </a:ext>
-            </a:extLst>
-          </p:cNvPr>
-          <p:cNvSpPr>
-            <a:spLocks noGrp="1"/>
-          </p:cNvSpPr>
-          <p:nvPr>
-            <p:ph type="ftr" sz="quarter" idx="15"/>
-          </p:nvPr>
-        </p:nvSpPr>
-        <p:spPr>
-          <a:xfrm>
-            <a:off x="4086351" y="6469380"/>
-            <a:ext cx="1130300" cy="180000"/>
-          </a:xfrm>
-        </p:spPr>
-        <p:txBody>
-          <a:bodyPr wrap="none" anchor="ctr">
-            <a:normAutofit/>
-          </a:bodyPr>
-          <a:lstStyle/>
-          <a:p>
-            <a:pPr>
-              <a:lnSpc>
-                <a:spcPct val="90000"/>
-              </a:lnSpc>
-              <a:spcAft>
-                <a:spcPts val="600"/>
-              </a:spcAft>
-            </a:pPr>
-            <a:r>
-              <a:rPr lang="en-US"/>
-              <a:t>Corbin Ferguson</a:t>
-            </a:r>
-          </a:p>
-        </p:txBody>
-      </p:sp>
-      <p:sp>
-        <p:nvSpPr>
-          <p:cNvPr id="7" name="Slide Number Placeholder 6">
-            <a:extLst>
-              <a:ext uri="{FF2B5EF4-FFF2-40B4-BE49-F238E27FC236}">
-                <a16:creationId xmlns:a16="http://schemas.microsoft.com/office/drawing/2014/main" id="{6248CF65-0587-F225-E8E1-4881A1DE0251}"/>
-              </a:ext>
-            </a:extLst>
-          </p:cNvPr>
-          <p:cNvSpPr>
-            <a:spLocks noGrp="1"/>
-          </p:cNvSpPr>
-          <p:nvPr>
-            <p:ph type="sldNum" sz="quarter" idx="16"/>
-          </p:nvPr>
-        </p:nvSpPr>
-        <p:spPr>
-          <a:xfrm>
-            <a:off x="1633051" y="6469380"/>
-            <a:ext cx="571500" cy="180000"/>
-          </a:xfrm>
-        </p:spPr>
-        <p:txBody>
-          <a:bodyPr wrap="none" anchor="ctr">
-            <a:normAutofit/>
-          </a:bodyPr>
-          <a:lstStyle/>
-          <a:p>
-            <a:pPr>
-              <a:lnSpc>
-                <a:spcPct val="90000"/>
-              </a:lnSpc>
-              <a:spcAft>
-                <a:spcPts val="600"/>
-              </a:spcAft>
-            </a:pPr>
-            <a:r>
-              <a:rPr lang="en-US"/>
-              <a:t>Slide </a:t>
-            </a:r>
-            <a:fld id="{628FA54D-953C-47EB-A7E0-4AE7B797E29E}" type="slidenum">
-              <a:rPr lang="en-US" smtClean="0"/>
-              <a:pPr>
-                <a:lnSpc>
-                  <a:spcPct val="90000"/>
-                </a:lnSpc>
-                <a:spcAft>
-                  <a:spcPts val="600"/>
-                </a:spcAft>
-              </a:pPr>
-              <a:t>7</a:t>
-            </a:fld>
-            <a:endParaRPr lang="en-US"/>
-          </a:p>
-        </p:txBody>
-      </p:sp>
     </p:spTree>
     <p:extLst>
       <p:ext uri="{BB962C8B-B14F-4D97-AF65-F5344CB8AC3E}">
@@ -25256,10 +25341,10 @@
       </p:sp>
       <p:pic>
         <p:nvPicPr>
-          <p:cNvPr id="9" name="Picture 8">
-            <a:extLst>
-              <a:ext uri="{FF2B5EF4-FFF2-40B4-BE49-F238E27FC236}">
-                <a16:creationId xmlns:a16="http://schemas.microsoft.com/office/drawing/2014/main" id="{9E782A90-606C-B8FC-5DCD-B4609AECF711}"/>
+          <p:cNvPr id="11" name="Picture 10">
+            <a:extLst>
+              <a:ext uri="{FF2B5EF4-FFF2-40B4-BE49-F238E27FC236}">
+                <a16:creationId xmlns:a16="http://schemas.microsoft.com/office/drawing/2014/main" id="{B46A16E4-8866-CF99-290D-B3D2521747BE}"/>
               </a:ext>
             </a:extLst>
           </p:cNvPr>
@@ -25270,14 +25355,15 @@
         </p:nvPicPr>
         <p:blipFill>
           <a:blip r:embed="rId2"/>
+          <a:srcRect b="1398"/>
           <a:stretch>
             <a:fillRect/>
           </a:stretch>
         </p:blipFill>
         <p:spPr>
           <a:xfrm>
-            <a:off x="334963" y="1225812"/>
-            <a:ext cx="5616000" cy="4805675"/>
+            <a:off x="334963" y="1164474"/>
+            <a:ext cx="5616000" cy="4928351"/>
           </a:xfrm>
           <a:prstGeom prst="rect">
             <a:avLst/>
@@ -25308,76 +25394,140 @@
           </a:xfrm>
         </p:spPr>
         <p:txBody>
-          <a:bodyPr/>
-          <a:lstStyle/>
-          <a:p>
-            <a:r>
-              <a:rPr lang="en-US" dirty="0" err="1"/>
+          <a:bodyPr wrap="square" anchor="t">
+            <a:normAutofit/>
+          </a:bodyPr>
+          <a:lstStyle/>
+          <a:p>
+            <a:pPr>
+              <a:lnSpc>
+                <a:spcPct val="100000"/>
+              </a:lnSpc>
+            </a:pPr>
+            <a:r>
+              <a:rPr lang="en-US" sz="1900" err="1"/>
+              <a:t>ActionSelect</a:t>
+            </a:r>
+            <a:endParaRPr lang="en-US" sz="1900"/>
+          </a:p>
+          <a:p>
+            <a:pPr lvl="1">
+              <a:lnSpc>
+                <a:spcPct val="100000"/>
+              </a:lnSpc>
+            </a:pPr>
+            <a:r>
+              <a:rPr lang="en-US" sz="1900"/>
+              <a:t>Main menu class, takes button input  events and calls functions in Execute class</a:t>
+            </a:r>
+          </a:p>
+          <a:p>
+            <a:pPr>
+              <a:lnSpc>
+                <a:spcPct val="100000"/>
+              </a:lnSpc>
+            </a:pPr>
+            <a:r>
+              <a:rPr lang="en-US" sz="1900" err="1"/>
               <a:t>DropdownGui</a:t>
             </a:r>
-            <a:endParaRPr lang="en-US" dirty="0"/>
-          </a:p>
-          <a:p>
-            <a:pPr lvl="1"/>
-            <a:r>
-              <a:rPr lang="en-US" dirty="0"/>
+            <a:endParaRPr lang="en-US" sz="1900"/>
+          </a:p>
+          <a:p>
+            <a:pPr lvl="1">
+              <a:lnSpc>
+                <a:spcPct val="100000"/>
+              </a:lnSpc>
+            </a:pPr>
+            <a:r>
+              <a:rPr lang="en-US" sz="1900"/>
               <a:t>Single element selector via a dropdown</a:t>
             </a:r>
           </a:p>
           <a:p>
-            <a:pPr lvl="1"/>
-            <a:r>
-              <a:rPr lang="en-US" dirty="0"/>
+            <a:pPr lvl="1">
+              <a:lnSpc>
+                <a:spcPct val="100000"/>
+              </a:lnSpc>
+            </a:pPr>
+            <a:r>
+              <a:rPr lang="en-US" sz="1900"/>
               <a:t>Called when user must select between a defined list of options</a:t>
             </a:r>
           </a:p>
           <a:p>
-            <a:r>
-              <a:rPr lang="en-US" dirty="0" err="1"/>
+            <a:pPr>
+              <a:lnSpc>
+                <a:spcPct val="100000"/>
+              </a:lnSpc>
+            </a:pPr>
+            <a:r>
+              <a:rPr lang="en-US" sz="1900" err="1"/>
               <a:t>MultiSelectDropdown</a:t>
             </a:r>
-            <a:endParaRPr lang="en-US" dirty="0"/>
-          </a:p>
-          <a:p>
-            <a:pPr lvl="1"/>
-            <a:r>
-              <a:rPr lang="en-US" dirty="0"/>
+            <a:endParaRPr lang="en-US" sz="1900"/>
+          </a:p>
+          <a:p>
+            <a:pPr lvl="1">
+              <a:lnSpc>
+                <a:spcPct val="100000"/>
+              </a:lnSpc>
+            </a:pPr>
+            <a:r>
+              <a:rPr lang="en-US" sz="1900"/>
               <a:t>Multiple element selector via a dropdown</a:t>
             </a:r>
           </a:p>
           <a:p>
-            <a:pPr lvl="1"/>
-            <a:r>
-              <a:rPr lang="en-US" dirty="0"/>
+            <a:pPr lvl="1">
+              <a:lnSpc>
+                <a:spcPct val="100000"/>
+              </a:lnSpc>
+            </a:pPr>
+            <a:r>
+              <a:rPr lang="en-US" sz="1900"/>
               <a:t>Called when user must select between a defined list of options</a:t>
             </a:r>
           </a:p>
           <a:p>
-            <a:r>
-              <a:rPr lang="en-US" dirty="0" err="1"/>
+            <a:pPr>
+              <a:lnSpc>
+                <a:spcPct val="100000"/>
+              </a:lnSpc>
+            </a:pPr>
+            <a:r>
+              <a:rPr lang="en-US" sz="1900" err="1"/>
               <a:t>TextInput</a:t>
             </a:r>
-            <a:endParaRPr lang="en-US" dirty="0"/>
-          </a:p>
-          <a:p>
-            <a:pPr lvl="1"/>
-            <a:r>
-              <a:rPr lang="en-US" dirty="0"/>
+            <a:endParaRPr lang="en-US" sz="1900"/>
+          </a:p>
+          <a:p>
+            <a:pPr lvl="1">
+              <a:lnSpc>
+                <a:spcPct val="100000"/>
+              </a:lnSpc>
+            </a:pPr>
+            <a:r>
+              <a:rPr lang="en-US" sz="1900"/>
               <a:t>Text input field for user to type in text</a:t>
             </a:r>
           </a:p>
           <a:p>
-            <a:pPr lvl="1"/>
-            <a:r>
-              <a:rPr lang="en-US" dirty="0"/>
+            <a:pPr lvl="1">
+              <a:lnSpc>
+                <a:spcPct val="100000"/>
+              </a:lnSpc>
+            </a:pPr>
+            <a:r>
+              <a:rPr lang="en-US" sz="1900"/>
               <a:t>Can be </a:t>
             </a:r>
             <a:r>
-              <a:rPr lang="en-US" dirty="0" err="1"/>
+              <a:rPr lang="en-US" sz="1900" err="1"/>
               <a:t>regex’d</a:t>
             </a:r>
             <a:r>
-              <a:rPr lang="en-US" dirty="0"/>
+              <a:rPr lang="en-US" sz="1900"/>
               <a:t> to validate user input</a:t>
             </a:r>
           </a:p>

--- a/Thesis Writing Documents/Project Development.pptx
+++ b/Thesis Writing Documents/Project Development.pptx
@@ -218,7 +218,7 @@
 <file path=ppt/revisionInfo.xml><?xml version="1.0" encoding="utf-8"?>
 <p1510:revInfo xmlns:a="http://schemas.openxmlformats.org/drawingml/2006/main" xmlns:r="http://schemas.openxmlformats.org/officeDocument/2006/relationships" xmlns:p1510="http://schemas.microsoft.com/office/powerpoint/2015/10/main">
   <p1510:revLst>
-    <p1510:client id="{F0E03B4B-CC56-43F1-8F18-BCA697229170}" v="614" dt="2026-03-31T18:39:42.242"/>
+    <p1510:client id="{F0E03B4B-CC56-43F1-8F18-BCA697229170}" v="644" dt="2026-04-01T00:13:40.379"/>
   </p1510:revLst>
 </p1510:revInfo>
 </file>
@@ -228,7 +228,7 @@
   <pc:docChgLst>
     <pc:chgData name="Corbin Ferguson" userId="34a864e2-e65e-4cb2-823c-dc28f73f0e40" providerId="ADAL" clId="{8D2D96CF-1319-4CCC-9EA9-073445628049}"/>
     <pc:docChg chg="undo redo custSel addSld delSld modSld sldOrd modMainMaster">
-      <pc:chgData name="Corbin Ferguson" userId="34a864e2-e65e-4cb2-823c-dc28f73f0e40" providerId="ADAL" clId="{8D2D96CF-1319-4CCC-9EA9-073445628049}" dt="2026-03-31T20:35:44.222" v="10649" actId="20577"/>
+      <pc:chgData name="Corbin Ferguson" userId="34a864e2-e65e-4cb2-823c-dc28f73f0e40" providerId="ADAL" clId="{8D2D96CF-1319-4CCC-9EA9-073445628049}" dt="2026-04-01T00:13:56.004" v="10959" actId="14100"/>
       <pc:docMkLst>
         <pc:docMk/>
       </pc:docMkLst>
@@ -269,22 +269,6 @@
             <ac:spMk id="13" creationId="{50705606-BEFC-7BD3-6686-7F86A4FF0F2E}"/>
           </ac:spMkLst>
         </pc:spChg>
-        <pc:picChg chg="add del mod">
-          <ac:chgData name="Corbin Ferguson" userId="34a864e2-e65e-4cb2-823c-dc28f73f0e40" providerId="ADAL" clId="{8D2D96CF-1319-4CCC-9EA9-073445628049}" dt="2026-03-30T12:58:41.714" v="3679" actId="478"/>
-          <ac:picMkLst>
-            <pc:docMk/>
-            <pc:sldMk cId="463964235" sldId="257"/>
-            <ac:picMk id="1028" creationId="{6C86E4AC-1B5D-4CB7-A176-9C365C540E23}"/>
-          </ac:picMkLst>
-        </pc:picChg>
-        <pc:picChg chg="add del mod">
-          <ac:chgData name="Corbin Ferguson" userId="34a864e2-e65e-4cb2-823c-dc28f73f0e40" providerId="ADAL" clId="{8D2D96CF-1319-4CCC-9EA9-073445628049}" dt="2026-03-30T12:58:41.211" v="3678" actId="478"/>
-          <ac:picMkLst>
-            <pc:docMk/>
-            <pc:sldMk cId="463964235" sldId="257"/>
-            <ac:picMk id="1030" creationId="{84E072FF-ABEC-64D2-234E-9A5158069A12}"/>
-          </ac:picMkLst>
-        </pc:picChg>
       </pc:sldChg>
       <pc:sldChg chg="addSp delSp modSp mod modTransition modClrScheme chgLayout">
         <pc:chgData name="Corbin Ferguson" userId="34a864e2-e65e-4cb2-823c-dc28f73f0e40" providerId="ADAL" clId="{8D2D96CF-1319-4CCC-9EA9-073445628049}" dt="2026-03-31T19:08:48.793" v="10626" actId="14100"/>
@@ -324,14 +308,6 @@
             <ac:spMk id="7" creationId="{38D6E66F-E242-71AD-8EBC-F768E9376CE3}"/>
           </ac:spMkLst>
         </pc:spChg>
-        <pc:spChg chg="del">
-          <ac:chgData name="Corbin Ferguson" userId="34a864e2-e65e-4cb2-823c-dc28f73f0e40" providerId="ADAL" clId="{8D2D96CF-1319-4CCC-9EA9-073445628049}" dt="2026-03-30T12:19:03.827" v="2394" actId="478"/>
-          <ac:spMkLst>
-            <pc:docMk/>
-            <pc:sldMk cId="3766655233" sldId="2146848300"/>
-            <ac:spMk id="8" creationId="{A92DD050-2F4D-53AA-B5A1-03132F4C857B}"/>
-          </ac:spMkLst>
-        </pc:spChg>
         <pc:spChg chg="add del mod">
           <ac:chgData name="Corbin Ferguson" userId="34a864e2-e65e-4cb2-823c-dc28f73f0e40" providerId="ADAL" clId="{8D2D96CF-1319-4CCC-9EA9-073445628049}" dt="2026-03-31T19:08:19.591" v="10625" actId="20577"/>
           <ac:spMkLst>
@@ -340,46 +316,6 @@
             <ac:spMk id="16" creationId="{75043462-D499-CFD8-CA75-EACF7FECE616}"/>
           </ac:spMkLst>
         </pc:spChg>
-        <pc:graphicFrameChg chg="del">
-          <ac:chgData name="Corbin Ferguson" userId="34a864e2-e65e-4cb2-823c-dc28f73f0e40" providerId="ADAL" clId="{8D2D96CF-1319-4CCC-9EA9-073445628049}" dt="2026-03-30T12:18:54.973" v="2388" actId="478"/>
-          <ac:graphicFrameMkLst>
-            <pc:docMk/>
-            <pc:sldMk cId="3766655233" sldId="2146848300"/>
-            <ac:graphicFrameMk id="2" creationId="{00000000-0008-0000-0000-000002000000}"/>
-          </ac:graphicFrameMkLst>
-        </pc:graphicFrameChg>
-        <pc:graphicFrameChg chg="del">
-          <ac:chgData name="Corbin Ferguson" userId="34a864e2-e65e-4cb2-823c-dc28f73f0e40" providerId="ADAL" clId="{8D2D96CF-1319-4CCC-9EA9-073445628049}" dt="2026-03-30T12:18:56.361" v="2391" actId="478"/>
-          <ac:graphicFrameMkLst>
-            <pc:docMk/>
-            <pc:sldMk cId="3766655233" sldId="2146848300"/>
-            <ac:graphicFrameMk id="12" creationId="{00000000-0008-0000-0000-000003000000}"/>
-          </ac:graphicFrameMkLst>
-        </pc:graphicFrameChg>
-        <pc:graphicFrameChg chg="add del modGraphic">
-          <ac:chgData name="Corbin Ferguson" userId="34a864e2-e65e-4cb2-823c-dc28f73f0e40" providerId="ADAL" clId="{8D2D96CF-1319-4CCC-9EA9-073445628049}" dt="2026-03-30T12:20:41.105" v="2475" actId="1032"/>
-          <ac:graphicFrameMkLst>
-            <pc:docMk/>
-            <pc:sldMk cId="3766655233" sldId="2146848300"/>
-            <ac:graphicFrameMk id="13" creationId="{BED5C1C7-9FA3-06E9-39B9-D7350654734C}"/>
-          </ac:graphicFrameMkLst>
-        </pc:graphicFrameChg>
-        <pc:graphicFrameChg chg="del">
-          <ac:chgData name="Corbin Ferguson" userId="34a864e2-e65e-4cb2-823c-dc28f73f0e40" providerId="ADAL" clId="{8D2D96CF-1319-4CCC-9EA9-073445628049}" dt="2026-03-30T12:18:55.904" v="2390" actId="478"/>
-          <ac:graphicFrameMkLst>
-            <pc:docMk/>
-            <pc:sldMk cId="3766655233" sldId="2146848300"/>
-            <ac:graphicFrameMk id="14" creationId="{A2AF21A1-874A-01E1-B7E9-D274CA668642}"/>
-          </ac:graphicFrameMkLst>
-        </pc:graphicFrameChg>
-        <pc:graphicFrameChg chg="del">
-          <ac:chgData name="Corbin Ferguson" userId="34a864e2-e65e-4cb2-823c-dc28f73f0e40" providerId="ADAL" clId="{8D2D96CF-1319-4CCC-9EA9-073445628049}" dt="2026-03-30T12:18:55.510" v="2389" actId="478"/>
-          <ac:graphicFrameMkLst>
-            <pc:docMk/>
-            <pc:sldMk cId="3766655233" sldId="2146848300"/>
-            <ac:graphicFrameMk id="15" creationId="{33097FBC-2CBD-87D4-74AF-66102AD753AF}"/>
-          </ac:graphicFrameMkLst>
-        </pc:graphicFrameChg>
         <pc:picChg chg="add mod">
           <ac:chgData name="Corbin Ferguson" userId="34a864e2-e65e-4cb2-823c-dc28f73f0e40" providerId="ADAL" clId="{8D2D96CF-1319-4CCC-9EA9-073445628049}" dt="2026-03-30T12:20:42.313" v="2477" actId="26606"/>
           <ac:picMkLst>
@@ -410,30 +346,6 @@
           <pc:docMk/>
           <pc:sldMk cId="189939056" sldId="2146848304"/>
         </pc:sldMkLst>
-        <pc:spChg chg="add del mod">
-          <ac:chgData name="Corbin Ferguson" userId="34a864e2-e65e-4cb2-823c-dc28f73f0e40" providerId="ADAL" clId="{8D2D96CF-1319-4CCC-9EA9-073445628049}" dt="2026-03-30T13:50:46.665" v="4584" actId="478"/>
-          <ac:spMkLst>
-            <pc:docMk/>
-            <pc:sldMk cId="189939056" sldId="2146848304"/>
-            <ac:spMk id="9" creationId="{450D1C7F-8E37-F3F8-2112-AF2C44A0A141}"/>
-          </ac:spMkLst>
-        </pc:spChg>
-        <pc:spChg chg="del mod">
-          <ac:chgData name="Corbin Ferguson" userId="34a864e2-e65e-4cb2-823c-dc28f73f0e40" providerId="ADAL" clId="{8D2D96CF-1319-4CCC-9EA9-073445628049}" dt="2026-03-30T13:28:27.136" v="4576" actId="22"/>
-          <ac:spMkLst>
-            <pc:docMk/>
-            <pc:sldMk cId="189939056" sldId="2146848304"/>
-            <ac:spMk id="13" creationId="{4B3CDBD9-BD4E-E7E3-A1E9-2D692BAA1734}"/>
-          </ac:spMkLst>
-        </pc:spChg>
-        <pc:picChg chg="add del mod ord">
-          <ac:chgData name="Corbin Ferguson" userId="34a864e2-e65e-4cb2-823c-dc28f73f0e40" providerId="ADAL" clId="{8D2D96CF-1319-4CCC-9EA9-073445628049}" dt="2026-03-30T13:28:43.989" v="4579" actId="478"/>
-          <ac:picMkLst>
-            <pc:docMk/>
-            <pc:sldMk cId="189939056" sldId="2146848304"/>
-            <ac:picMk id="6" creationId="{93233039-22AC-BBA8-F2BF-D51DFD9769E2}"/>
-          </ac:picMkLst>
-        </pc:picChg>
         <pc:picChg chg="add mod">
           <ac:chgData name="Corbin Ferguson" userId="34a864e2-e65e-4cb2-823c-dc28f73f0e40" providerId="ADAL" clId="{8D2D96CF-1319-4CCC-9EA9-073445628049}" dt="2026-03-30T13:51:03.269" v="4586" actId="14100"/>
           <ac:picMkLst>
@@ -473,13 +385,6 @@
             <ac:spMk id="13" creationId="{929D0112-3559-BA85-36ED-E2064B91FC9A}"/>
           </ac:spMkLst>
         </pc:spChg>
-      </pc:sldChg>
-      <pc:sldChg chg="modSp del mod">
-        <pc:chgData name="Corbin Ferguson" userId="34a864e2-e65e-4cb2-823c-dc28f73f0e40" providerId="ADAL" clId="{8D2D96CF-1319-4CCC-9EA9-073445628049}" dt="2026-03-30T14:57:49.998" v="4888" actId="2696"/>
-        <pc:sldMkLst>
-          <pc:docMk/>
-          <pc:sldMk cId="364984994" sldId="2146848306"/>
-        </pc:sldMkLst>
       </pc:sldChg>
       <pc:sldChg chg="modSp mod ord modTransition modNotesTx">
         <pc:chgData name="Corbin Ferguson" userId="34a864e2-e65e-4cb2-823c-dc28f73f0e40" providerId="ADAL" clId="{8D2D96CF-1319-4CCC-9EA9-073445628049}" dt="2026-03-31T18:39:42.242" v="10560"/>
@@ -566,7 +471,7 @@
         </pc:sldMkLst>
       </pc:sldChg>
       <pc:sldChg chg="addSp modSp add mod modTransition">
-        <pc:chgData name="Corbin Ferguson" userId="34a864e2-e65e-4cb2-823c-dc28f73f0e40" providerId="ADAL" clId="{8D2D96CF-1319-4CCC-9EA9-073445628049}" dt="2026-03-30T15:50:23.046" v="7789"/>
+        <pc:chgData name="Corbin Ferguson" userId="34a864e2-e65e-4cb2-823c-dc28f73f0e40" providerId="ADAL" clId="{8D2D96CF-1319-4CCC-9EA9-073445628049}" dt="2026-04-01T00:03:48.423" v="10846" actId="20577"/>
         <pc:sldMkLst>
           <pc:docMk/>
           <pc:sldMk cId="1067535560" sldId="2146848314"/>
@@ -580,7 +485,7 @@
           </ac:spMkLst>
         </pc:spChg>
         <pc:spChg chg="mod">
-          <ac:chgData name="Corbin Ferguson" userId="34a864e2-e65e-4cb2-823c-dc28f73f0e40" providerId="ADAL" clId="{8D2D96CF-1319-4CCC-9EA9-073445628049}" dt="2026-03-16T15:12:46.375" v="1342" actId="20577"/>
+          <ac:chgData name="Corbin Ferguson" userId="34a864e2-e65e-4cb2-823c-dc28f73f0e40" providerId="ADAL" clId="{8D2D96CF-1319-4CCC-9EA9-073445628049}" dt="2026-04-01T00:03:48.423" v="10846" actId="20577"/>
           <ac:spMkLst>
             <pc:docMk/>
             <pc:sldMk cId="1067535560" sldId="2146848314"/>
@@ -639,14 +544,6 @@
             <pc:docMk/>
             <pc:sldMk cId="3831013115" sldId="2146848318"/>
             <ac:picMk id="6" creationId="{BF17B26E-CEBE-31E2-A928-A78B0BE175DA}"/>
-          </ac:picMkLst>
-        </pc:picChg>
-        <pc:picChg chg="add del mod ord modCrop">
-          <ac:chgData name="Corbin Ferguson" userId="34a864e2-e65e-4cb2-823c-dc28f73f0e40" providerId="ADAL" clId="{8D2D96CF-1319-4CCC-9EA9-073445628049}" dt="2026-03-30T15:42:30.036" v="7514" actId="21"/>
-          <ac:picMkLst>
-            <pc:docMk/>
-            <pc:sldMk cId="3831013115" sldId="2146848318"/>
-            <ac:picMk id="10" creationId="{36552AD4-E539-C4C4-F016-02E1B6D7EFCF}"/>
           </ac:picMkLst>
         </pc:picChg>
         <pc:picChg chg="mod ord modVis modCrop">
@@ -737,35 +634,19 @@
         </pc:picChg>
       </pc:sldChg>
       <pc:sldChg chg="addSp delSp modSp add mod ord modTransition delAnim modAnim modNotesTx">
-        <pc:chgData name="Corbin Ferguson" userId="34a864e2-e65e-4cb2-823c-dc28f73f0e40" providerId="ADAL" clId="{8D2D96CF-1319-4CCC-9EA9-073445628049}" dt="2026-03-31T14:29:52.063" v="10475"/>
+        <pc:chgData name="Corbin Ferguson" userId="34a864e2-e65e-4cb2-823c-dc28f73f0e40" providerId="ADAL" clId="{8D2D96CF-1319-4CCC-9EA9-073445628049}" dt="2026-04-01T00:10:33.119" v="10895" actId="14100"/>
         <pc:sldMkLst>
           <pc:docMk/>
           <pc:sldMk cId="1670292182" sldId="2146848323"/>
         </pc:sldMkLst>
         <pc:spChg chg="add mod">
-          <ac:chgData name="Corbin Ferguson" userId="34a864e2-e65e-4cb2-823c-dc28f73f0e40" providerId="ADAL" clId="{8D2D96CF-1319-4CCC-9EA9-073445628049}" dt="2026-03-16T20:44:01.003" v="1951" actId="207"/>
+          <ac:chgData name="Corbin Ferguson" userId="34a864e2-e65e-4cb2-823c-dc28f73f0e40" providerId="ADAL" clId="{8D2D96CF-1319-4CCC-9EA9-073445628049}" dt="2026-04-01T00:10:33.119" v="10895" actId="14100"/>
           <ac:spMkLst>
             <pc:docMk/>
             <pc:sldMk cId="1670292182" sldId="2146848323"/>
             <ac:spMk id="11" creationId="{BBDD576A-A414-9915-960B-C7192C1A13D8}"/>
           </ac:spMkLst>
         </pc:spChg>
-        <pc:picChg chg="del mod ord">
-          <ac:chgData name="Corbin Ferguson" userId="34a864e2-e65e-4cb2-823c-dc28f73f0e40" providerId="ADAL" clId="{8D2D96CF-1319-4CCC-9EA9-073445628049}" dt="2026-03-30T15:42:06.870" v="7509" actId="21"/>
-          <ac:picMkLst>
-            <pc:docMk/>
-            <pc:sldMk cId="1670292182" sldId="2146848323"/>
-            <ac:picMk id="6" creationId="{BF17B26E-CEBE-31E2-A928-A78B0BE175DA}"/>
-          </ac:picMkLst>
-        </pc:picChg>
-        <pc:picChg chg="add del mod ord">
-          <ac:chgData name="Corbin Ferguson" userId="34a864e2-e65e-4cb2-823c-dc28f73f0e40" providerId="ADAL" clId="{8D2D96CF-1319-4CCC-9EA9-073445628049}" dt="2026-03-30T15:43:16.250" v="7549" actId="21"/>
-          <ac:picMkLst>
-            <pc:docMk/>
-            <pc:sldMk cId="1670292182" sldId="2146848323"/>
-            <ac:picMk id="10" creationId="{36552AD4-E539-C4C4-F016-02E1B6D7EFCF}"/>
-          </ac:picMkLst>
-        </pc:picChg>
         <pc:picChg chg="add mod ord">
           <ac:chgData name="Corbin Ferguson" userId="34a864e2-e65e-4cb2-823c-dc28f73f0e40" providerId="ADAL" clId="{8D2D96CF-1319-4CCC-9EA9-073445628049}" dt="2026-03-30T15:43:47.495" v="7603" actId="14100"/>
           <ac:picMkLst>
@@ -774,8 +655,16 @@
             <ac:picMk id="15" creationId="{17752B2B-1B72-2430-A670-818B3CCFD41D}"/>
           </ac:picMkLst>
         </pc:picChg>
-        <pc:picChg chg="add mod modVis modCrop">
-          <ac:chgData name="Corbin Ferguson" userId="34a864e2-e65e-4cb2-823c-dc28f73f0e40" providerId="ADAL" clId="{8D2D96CF-1319-4CCC-9EA9-073445628049}" dt="2026-03-30T15:51:17.831" v="7798" actId="14429"/>
+        <pc:picChg chg="add mod ord">
+          <ac:chgData name="Corbin Ferguson" userId="34a864e2-e65e-4cb2-823c-dc28f73f0e40" providerId="ADAL" clId="{8D2D96CF-1319-4CCC-9EA9-073445628049}" dt="2026-04-01T00:10:10.563" v="10874" actId="962"/>
+          <ac:picMkLst>
+            <pc:docMk/>
+            <pc:sldMk cId="1670292182" sldId="2146848323"/>
+            <ac:picMk id="1026" creationId="{20890D35-21B5-65A3-4EB5-F39A5A0DCDD2}"/>
+          </ac:picMkLst>
+        </pc:picChg>
+        <pc:picChg chg="add del mod modVis modCrop">
+          <ac:chgData name="Corbin Ferguson" userId="34a864e2-e65e-4cb2-823c-dc28f73f0e40" providerId="ADAL" clId="{8D2D96CF-1319-4CCC-9EA9-073445628049}" dt="2026-04-01T00:09:14.387" v="10855" actId="478"/>
           <ac:picMkLst>
             <pc:docMk/>
             <pc:sldMk cId="1670292182" sldId="2146848323"/>
@@ -784,7 +673,7 @@
         </pc:picChg>
       </pc:sldChg>
       <pc:sldChg chg="addSp delSp modSp add mod modTransition delAnim modAnim modNotesTx">
-        <pc:chgData name="Corbin Ferguson" userId="34a864e2-e65e-4cb2-823c-dc28f73f0e40" providerId="ADAL" clId="{8D2D96CF-1319-4CCC-9EA9-073445628049}" dt="2026-03-31T14:29:55.376" v="10477"/>
+        <pc:chgData name="Corbin Ferguson" userId="34a864e2-e65e-4cb2-823c-dc28f73f0e40" providerId="ADAL" clId="{8D2D96CF-1319-4CCC-9EA9-073445628049}" dt="2026-04-01T00:13:14.955" v="10947" actId="14100"/>
         <pc:sldMkLst>
           <pc:docMk/>
           <pc:sldMk cId="2455060311" sldId="2146848324"/>
@@ -797,8 +686,8 @@
             <ac:spMk id="6" creationId="{A38A10BF-2126-40C7-FAE5-7BBF6C867EF1}"/>
           </ac:spMkLst>
         </pc:spChg>
-        <pc:picChg chg="add mod ord modVis modCrop">
-          <ac:chgData name="Corbin Ferguson" userId="34a864e2-e65e-4cb2-823c-dc28f73f0e40" providerId="ADAL" clId="{8D2D96CF-1319-4CCC-9EA9-073445628049}" dt="2026-03-30T15:47:45.781" v="7710" actId="14100"/>
+        <pc:picChg chg="add del mod ord modVis modCrop">
+          <ac:chgData name="Corbin Ferguson" userId="34a864e2-e65e-4cb2-823c-dc28f73f0e40" providerId="ADAL" clId="{8D2D96CF-1319-4CCC-9EA9-073445628049}" dt="2026-04-01T00:12:54.702" v="10939" actId="478"/>
           <ac:picMkLst>
             <pc:docMk/>
             <pc:sldMk cId="2455060311" sldId="2146848324"/>
@@ -806,50 +695,42 @@
           </ac:picMkLst>
         </pc:picChg>
         <pc:picChg chg="add mod modVis">
-          <ac:chgData name="Corbin Ferguson" userId="34a864e2-e65e-4cb2-823c-dc28f73f0e40" providerId="ADAL" clId="{8D2D96CF-1319-4CCC-9EA9-073445628049}" dt="2026-03-30T15:51:20.273" v="7799" actId="14429"/>
+          <ac:chgData name="Corbin Ferguson" userId="34a864e2-e65e-4cb2-823c-dc28f73f0e40" providerId="ADAL" clId="{8D2D96CF-1319-4CCC-9EA9-073445628049}" dt="2026-04-01T00:13:06.046" v="10943" actId="14429"/>
           <ac:picMkLst>
             <pc:docMk/>
             <pc:sldMk cId="2455060311" sldId="2146848324"/>
             <ac:picMk id="5" creationId="{BE5C2147-6B8C-1D93-D1D8-4113A963D2D0}"/>
           </ac:picMkLst>
         </pc:picChg>
-        <pc:picChg chg="add del mod ord">
-          <ac:chgData name="Corbin Ferguson" userId="34a864e2-e65e-4cb2-823c-dc28f73f0e40" providerId="ADAL" clId="{8D2D96CF-1319-4CCC-9EA9-073445628049}" dt="2026-03-30T15:46:55.485" v="7670" actId="478"/>
+        <pc:picChg chg="add mod ord">
+          <ac:chgData name="Corbin Ferguson" userId="34a864e2-e65e-4cb2-823c-dc28f73f0e40" providerId="ADAL" clId="{8D2D96CF-1319-4CCC-9EA9-073445628049}" dt="2026-04-01T00:13:14.955" v="10947" actId="14100"/>
           <ac:picMkLst>
             <pc:docMk/>
             <pc:sldMk cId="2455060311" sldId="2146848324"/>
-            <ac:picMk id="10" creationId="{36552AD4-E539-C4C4-F016-02E1B6D7EFCF}"/>
-          </ac:picMkLst>
-        </pc:picChg>
-        <pc:picChg chg="del mod">
-          <ac:chgData name="Corbin Ferguson" userId="34a864e2-e65e-4cb2-823c-dc28f73f0e40" providerId="ADAL" clId="{8D2D96CF-1319-4CCC-9EA9-073445628049}" dt="2026-03-30T15:43:35.840" v="7599" actId="21"/>
-          <ac:picMkLst>
-            <pc:docMk/>
-            <pc:sldMk cId="2455060311" sldId="2146848324"/>
-            <ac:picMk id="15" creationId="{17752B2B-1B72-2430-A670-818B3CCFD41D}"/>
+            <ac:picMk id="9" creationId="{8BFC2206-26A7-60F5-CBAC-314A71B8563A}"/>
           </ac:picMkLst>
         </pc:picChg>
       </pc:sldChg>
       <pc:sldChg chg="addSp delSp modSp add mod ord modTransition delAnim modAnim modNotesTx">
-        <pc:chgData name="Corbin Ferguson" userId="34a864e2-e65e-4cb2-823c-dc28f73f0e40" providerId="ADAL" clId="{8D2D96CF-1319-4CCC-9EA9-073445628049}" dt="2026-03-31T14:30:01.903" v="10481"/>
+        <pc:chgData name="Corbin Ferguson" userId="34a864e2-e65e-4cb2-823c-dc28f73f0e40" providerId="ADAL" clId="{8D2D96CF-1319-4CCC-9EA9-073445628049}" dt="2026-04-01T00:11:35.235" v="10933" actId="14429"/>
         <pc:sldMkLst>
           <pc:docMk/>
           <pc:sldMk cId="935187346" sldId="2146848325"/>
         </pc:sldMkLst>
-        <pc:spChg chg="mod">
-          <ac:chgData name="Corbin Ferguson" userId="34a864e2-e65e-4cb2-823c-dc28f73f0e40" providerId="ADAL" clId="{8D2D96CF-1319-4CCC-9EA9-073445628049}" dt="2026-03-30T15:37:53.843" v="7379" actId="1035"/>
+        <pc:spChg chg="mod modVis">
+          <ac:chgData name="Corbin Ferguson" userId="34a864e2-e65e-4cb2-823c-dc28f73f0e40" providerId="ADAL" clId="{8D2D96CF-1319-4CCC-9EA9-073445628049}" dt="2026-04-01T00:11:35.235" v="10933" actId="14429"/>
           <ac:spMkLst>
             <pc:docMk/>
             <pc:sldMk cId="935187346" sldId="2146848325"/>
             <ac:spMk id="11" creationId="{E527682E-55F4-1E8E-3D74-DD36AAF5EC17}"/>
           </ac:spMkLst>
         </pc:spChg>
-        <pc:picChg chg="add del mod ord">
-          <ac:chgData name="Corbin Ferguson" userId="34a864e2-e65e-4cb2-823c-dc28f73f0e40" providerId="ADAL" clId="{8D2D96CF-1319-4CCC-9EA9-073445628049}" dt="2026-03-30T15:48:48.749" v="7727" actId="478"/>
+        <pc:picChg chg="add mod ord">
+          <ac:chgData name="Corbin Ferguson" userId="34a864e2-e65e-4cb2-823c-dc28f73f0e40" providerId="ADAL" clId="{8D2D96CF-1319-4CCC-9EA9-073445628049}" dt="2026-04-01T00:10:46.878" v="10898" actId="13244"/>
           <ac:picMkLst>
             <pc:docMk/>
             <pc:sldMk cId="935187346" sldId="2146848325"/>
-            <ac:picMk id="3" creationId="{A34E6259-020A-CE8B-AC93-FDF3B8CB5BB9}"/>
+            <ac:picMk id="3" creationId="{35DB570D-C20F-4D18-AFA8-DB67D456C1A2}"/>
           </ac:picMkLst>
         </pc:picChg>
         <pc:picChg chg="add mod ord modVis">
@@ -860,56 +741,33 @@
             <ac:picMk id="5" creationId="{38941981-09C2-49EE-CBD3-2FA095358C90}"/>
           </ac:picMkLst>
         </pc:picChg>
-        <pc:picChg chg="add mod ord modCrop">
-          <ac:chgData name="Corbin Ferguson" userId="34a864e2-e65e-4cb2-823c-dc28f73f0e40" providerId="ADAL" clId="{8D2D96CF-1319-4CCC-9EA9-073445628049}" dt="2026-03-30T15:56:33.138" v="7942" actId="1037"/>
+        <pc:picChg chg="add del mod ord modCrop">
+          <ac:chgData name="Corbin Ferguson" userId="34a864e2-e65e-4cb2-823c-dc28f73f0e40" providerId="ADAL" clId="{8D2D96CF-1319-4CCC-9EA9-073445628049}" dt="2026-04-01T00:10:57.593" v="10899" actId="478"/>
           <ac:picMkLst>
             <pc:docMk/>
             <pc:sldMk cId="935187346" sldId="2146848325"/>
             <ac:picMk id="6" creationId="{8258F793-6C4B-B9D2-CC2E-6207D04A7C5C}"/>
           </ac:picMkLst>
         </pc:picChg>
-        <pc:picChg chg="add del mod">
-          <ac:chgData name="Corbin Ferguson" userId="34a864e2-e65e-4cb2-823c-dc28f73f0e40" providerId="ADAL" clId="{8D2D96CF-1319-4CCC-9EA9-073445628049}" dt="2026-03-30T15:35:03.940" v="7356" actId="478"/>
+        <pc:picChg chg="add mod ord modCrop">
+          <ac:chgData name="Corbin Ferguson" userId="34a864e2-e65e-4cb2-823c-dc28f73f0e40" providerId="ADAL" clId="{8D2D96CF-1319-4CCC-9EA9-073445628049}" dt="2026-04-01T00:11:32.939" v="10932" actId="13244"/>
           <ac:picMkLst>
             <pc:docMk/>
             <pc:sldMk cId="935187346" sldId="2146848325"/>
-            <ac:picMk id="4098" creationId="{8301C0C9-D4AA-0566-B820-5EAC6AD2ED11}"/>
+            <ac:picMk id="9" creationId="{0D495668-F0B2-4D67-2C55-18A3E3AB0F61}"/>
           </ac:picMkLst>
         </pc:picChg>
-        <pc:picChg chg="add mod ord modVis">
-          <ac:chgData name="Corbin Ferguson" userId="34a864e2-e65e-4cb2-823c-dc28f73f0e40" providerId="ADAL" clId="{8D2D96CF-1319-4CCC-9EA9-073445628049}" dt="2026-03-30T15:56:48.637" v="7943" actId="962"/>
+        <pc:picChg chg="add del mod ord modVis">
+          <ac:chgData name="Corbin Ferguson" userId="34a864e2-e65e-4cb2-823c-dc28f73f0e40" providerId="ADAL" clId="{8D2D96CF-1319-4CCC-9EA9-073445628049}" dt="2026-04-01T00:10:43.081" v="10896" actId="478"/>
           <ac:picMkLst>
             <pc:docMk/>
             <pc:sldMk cId="935187346" sldId="2146848325"/>
             <ac:picMk id="4100" creationId="{4C164929-3339-8372-C56E-6273FF8104E8}"/>
           </ac:picMkLst>
         </pc:picChg>
-        <pc:picChg chg="del mod modVis">
-          <ac:chgData name="Corbin Ferguson" userId="34a864e2-e65e-4cb2-823c-dc28f73f0e40" providerId="ADAL" clId="{8D2D96CF-1319-4CCC-9EA9-073445628049}" dt="2026-03-30T15:35:35.697" v="7360" actId="478"/>
-          <ac:picMkLst>
-            <pc:docMk/>
-            <pc:sldMk cId="935187346" sldId="2146848325"/>
-            <ac:picMk id="11268" creationId="{398BFDD6-EE1D-2233-1BC7-9B7205573827}"/>
-          </ac:picMkLst>
-        </pc:picChg>
-      </pc:sldChg>
-      <pc:sldChg chg="addSp delSp modSp new del mod ord">
-        <pc:chgData name="Corbin Ferguson" userId="34a864e2-e65e-4cb2-823c-dc28f73f0e40" providerId="ADAL" clId="{8D2D96CF-1319-4CCC-9EA9-073445628049}" dt="2026-03-30T14:41:28.637" v="4813" actId="2696"/>
-        <pc:sldMkLst>
-          <pc:docMk/>
-          <pc:sldMk cId="4147216281" sldId="2146848327"/>
-        </pc:sldMkLst>
-        <pc:spChg chg="mod">
-          <ac:chgData name="Corbin Ferguson" userId="34a864e2-e65e-4cb2-823c-dc28f73f0e40" providerId="ADAL" clId="{8D2D96CF-1319-4CCC-9EA9-073445628049}" dt="2026-03-30T14:19:20.036" v="4666" actId="20577"/>
-          <ac:spMkLst>
-            <pc:docMk/>
-            <pc:sldMk cId="4147216281" sldId="2146848327"/>
-            <ac:spMk id="2" creationId="{66F5F0CA-AE20-3F47-A2DA-544E05972351}"/>
-          </ac:spMkLst>
-        </pc:spChg>
       </pc:sldChg>
       <pc:sldChg chg="addSp delSp modSp new mod modTransition delAnim modAnim modNotesTx">
-        <pc:chgData name="Corbin Ferguson" userId="34a864e2-e65e-4cb2-823c-dc28f73f0e40" providerId="ADAL" clId="{8D2D96CF-1319-4CCC-9EA9-073445628049}" dt="2026-03-31T14:30:05.421" v="10483"/>
+        <pc:chgData name="Corbin Ferguson" userId="34a864e2-e65e-4cb2-823c-dc28f73f0e40" providerId="ADAL" clId="{8D2D96CF-1319-4CCC-9EA9-073445628049}" dt="2026-04-01T00:13:56.004" v="10959" actId="14100"/>
         <pc:sldMkLst>
           <pc:docMk/>
           <pc:sldMk cId="2633183682" sldId="2146848328"/>
@@ -922,22 +780,14 @@
             <ac:spMk id="2" creationId="{E3F023BE-C4A1-0C81-82B1-8BE303E6A0C4}"/>
           </ac:spMkLst>
         </pc:spChg>
-        <pc:spChg chg="del">
-          <ac:chgData name="Corbin Ferguson" userId="34a864e2-e65e-4cb2-823c-dc28f73f0e40" providerId="ADAL" clId="{8D2D96CF-1319-4CCC-9EA9-073445628049}" dt="2026-03-30T12:29:18.497" v="2513" actId="478"/>
-          <ac:spMkLst>
+        <pc:picChg chg="add mod ord modVis">
+          <ac:chgData name="Corbin Ferguson" userId="34a864e2-e65e-4cb2-823c-dc28f73f0e40" providerId="ADAL" clId="{8D2D96CF-1319-4CCC-9EA9-073445628049}" dt="2026-04-01T00:13:56.004" v="10959" actId="14100"/>
+          <ac:picMkLst>
             <pc:docMk/>
             <pc:sldMk cId="2633183682" sldId="2146848328"/>
-            <ac:spMk id="3" creationId="{C3E53D47-31DF-9BF6-2347-8A9B13DCC5CA}"/>
-          </ac:spMkLst>
-        </pc:spChg>
-        <pc:spChg chg="del">
-          <ac:chgData name="Corbin Ferguson" userId="34a864e2-e65e-4cb2-823c-dc28f73f0e40" providerId="ADAL" clId="{8D2D96CF-1319-4CCC-9EA9-073445628049}" dt="2026-03-30T12:29:17.305" v="2512" actId="478"/>
-          <ac:spMkLst>
-            <pc:docMk/>
-            <pc:sldMk cId="2633183682" sldId="2146848328"/>
-            <ac:spMk id="7" creationId="{8AC05C2F-2EF9-0069-B1C5-BAE17F07BBD5}"/>
-          </ac:spMkLst>
-        </pc:spChg>
+            <ac:picMk id="3" creationId="{06E6E34B-A3E4-5186-F073-42CEFA8945AB}"/>
+          </ac:picMkLst>
+        </pc:picChg>
         <pc:picChg chg="add mod modVis modCrop">
           <ac:chgData name="Corbin Ferguson" userId="34a864e2-e65e-4cb2-823c-dc28f73f0e40" providerId="ADAL" clId="{8D2D96CF-1319-4CCC-9EA9-073445628049}" dt="2026-03-30T18:33:13.337" v="7980" actId="14100"/>
           <ac:picMkLst>
@@ -946,16 +796,8 @@
             <ac:picMk id="9" creationId="{584FF30B-D15E-FA58-D2D2-6427F8479406}"/>
           </ac:picMkLst>
         </pc:picChg>
-        <pc:picChg chg="add del mod ord modCrop">
-          <ac:chgData name="Corbin Ferguson" userId="34a864e2-e65e-4cb2-823c-dc28f73f0e40" providerId="ADAL" clId="{8D2D96CF-1319-4CCC-9EA9-073445628049}" dt="2026-03-30T15:57:20.896" v="7944" actId="478"/>
-          <ac:picMkLst>
-            <pc:docMk/>
-            <pc:sldMk cId="2633183682" sldId="2146848328"/>
-            <ac:picMk id="10" creationId="{830F01A2-FC83-A9D1-7A0E-C2AB62460D0F}"/>
-          </ac:picMkLst>
-        </pc:picChg>
-        <pc:picChg chg="add mod ord">
-          <ac:chgData name="Corbin Ferguson" userId="34a864e2-e65e-4cb2-823c-dc28f73f0e40" providerId="ADAL" clId="{8D2D96CF-1319-4CCC-9EA9-073445628049}" dt="2026-03-30T15:57:51.920" v="7978" actId="1035"/>
+        <pc:picChg chg="add del mod ord">
+          <ac:chgData name="Corbin Ferguson" userId="34a864e2-e65e-4cb2-823c-dc28f73f0e40" providerId="ADAL" clId="{8D2D96CF-1319-4CCC-9EA9-073445628049}" dt="2026-04-01T00:13:50.116" v="10952" actId="478"/>
           <ac:picMkLst>
             <pc:docMk/>
             <pc:sldMk cId="2633183682" sldId="2146848328"/>
@@ -975,22 +817,6 @@
             <pc:docMk/>
             <pc:sldMk cId="3737639885" sldId="2146848329"/>
             <ac:spMk id="2" creationId="{739BBBBB-5627-C509-A3E9-051E4CBB9E93}"/>
-          </ac:spMkLst>
-        </pc:spChg>
-        <pc:spChg chg="del">
-          <ac:chgData name="Corbin Ferguson" userId="34a864e2-e65e-4cb2-823c-dc28f73f0e40" providerId="ADAL" clId="{8D2D96CF-1319-4CCC-9EA9-073445628049}" dt="2026-03-30T12:33:02.481" v="2571" actId="478"/>
-          <ac:spMkLst>
-            <pc:docMk/>
-            <pc:sldMk cId="3737639885" sldId="2146848329"/>
-            <ac:spMk id="3" creationId="{B2260CA0-C5E5-F52B-F364-ECF8CE007606}"/>
-          </ac:spMkLst>
-        </pc:spChg>
-        <pc:spChg chg="del">
-          <ac:chgData name="Corbin Ferguson" userId="34a864e2-e65e-4cb2-823c-dc28f73f0e40" providerId="ADAL" clId="{8D2D96CF-1319-4CCC-9EA9-073445628049}" dt="2026-03-30T12:33:01.640" v="2570" actId="478"/>
-          <ac:spMkLst>
-            <pc:docMk/>
-            <pc:sldMk cId="3737639885" sldId="2146848329"/>
-            <ac:spMk id="7" creationId="{5B72D51C-EDBC-2F65-F44F-A2103EB13E0A}"/>
           </ac:spMkLst>
         </pc:spChg>
         <pc:spChg chg="add mod">
@@ -1018,96 +844,12 @@
           </ac:picMkLst>
         </pc:picChg>
       </pc:sldChg>
-      <pc:sldChg chg="modSp add del mod ord">
-        <pc:chgData name="Corbin Ferguson" userId="34a864e2-e65e-4cb2-823c-dc28f73f0e40" providerId="ADAL" clId="{8D2D96CF-1319-4CCC-9EA9-073445628049}" dt="2026-03-30T12:34:20.254" v="2588" actId="2696"/>
-        <pc:sldMkLst>
-          <pc:docMk/>
-          <pc:sldMk cId="243149108" sldId="2146848330"/>
-        </pc:sldMkLst>
-        <pc:spChg chg="mod">
-          <ac:chgData name="Corbin Ferguson" userId="34a864e2-e65e-4cb2-823c-dc28f73f0e40" providerId="ADAL" clId="{8D2D96CF-1319-4CCC-9EA9-073445628049}" dt="2026-03-30T12:33:56.096" v="2585" actId="14100"/>
-          <ac:spMkLst>
-            <pc:docMk/>
-            <pc:sldMk cId="243149108" sldId="2146848330"/>
-            <ac:spMk id="11" creationId="{07991DD5-9A5C-E855-9D98-92A58A0146A6}"/>
-          </ac:spMkLst>
-        </pc:spChg>
-      </pc:sldChg>
-      <pc:sldChg chg="new del">
-        <pc:chgData name="Corbin Ferguson" userId="34a864e2-e65e-4cb2-823c-dc28f73f0e40" providerId="ADAL" clId="{8D2D96CF-1319-4CCC-9EA9-073445628049}" dt="2026-03-30T13:18:21.400" v="4574" actId="2696"/>
-        <pc:sldMkLst>
-          <pc:docMk/>
-          <pc:sldMk cId="1007462108" sldId="2146848330"/>
-        </pc:sldMkLst>
-      </pc:sldChg>
-      <pc:sldChg chg="addSp delSp modSp new del mod">
-        <pc:chgData name="Corbin Ferguson" userId="34a864e2-e65e-4cb2-823c-dc28f73f0e40" providerId="ADAL" clId="{8D2D96CF-1319-4CCC-9EA9-073445628049}" dt="2026-03-30T14:40:53.275" v="4788" actId="2696"/>
-        <pc:sldMkLst>
-          <pc:docMk/>
-          <pc:sldMk cId="4265443196" sldId="2146848331"/>
-        </pc:sldMkLst>
-        <pc:spChg chg="mod">
-          <ac:chgData name="Corbin Ferguson" userId="34a864e2-e65e-4cb2-823c-dc28f73f0e40" providerId="ADAL" clId="{8D2D96CF-1319-4CCC-9EA9-073445628049}" dt="2026-03-30T13:56:42.845" v="4650" actId="20577"/>
-          <ac:spMkLst>
-            <pc:docMk/>
-            <pc:sldMk cId="4265443196" sldId="2146848331"/>
-            <ac:spMk id="2" creationId="{78AF03D3-46E1-5CD8-2EF1-58210F086761}"/>
-          </ac:spMkLst>
-        </pc:spChg>
-        <pc:spChg chg="add del">
-          <ac:chgData name="Corbin Ferguson" userId="34a864e2-e65e-4cb2-823c-dc28f73f0e40" providerId="ADAL" clId="{8D2D96CF-1319-4CCC-9EA9-073445628049}" dt="2026-03-30T13:56:53.165" v="4652"/>
-          <ac:spMkLst>
-            <pc:docMk/>
-            <pc:sldMk cId="4265443196" sldId="2146848331"/>
-            <ac:spMk id="3" creationId="{55CB3071-6676-5655-7189-E9E7F7116C62}"/>
-          </ac:spMkLst>
-        </pc:spChg>
-        <pc:graphicFrameChg chg="add mod">
-          <ac:chgData name="Corbin Ferguson" userId="34a864e2-e65e-4cb2-823c-dc28f73f0e40" providerId="ADAL" clId="{8D2D96CF-1319-4CCC-9EA9-073445628049}" dt="2026-03-30T13:56:53.165" v="4652"/>
-          <ac:graphicFrameMkLst>
-            <pc:docMk/>
-            <pc:sldMk cId="4265443196" sldId="2146848331"/>
-            <ac:graphicFrameMk id="7" creationId="{E3D685B8-91B3-28F4-1DB3-9698C7C019E8}"/>
-          </ac:graphicFrameMkLst>
-        </pc:graphicFrameChg>
-      </pc:sldChg>
-      <pc:sldChg chg="modSp new del mod">
-        <pc:chgData name="Corbin Ferguson" userId="34a864e2-e65e-4cb2-823c-dc28f73f0e40" providerId="ADAL" clId="{8D2D96CF-1319-4CCC-9EA9-073445628049}" dt="2026-03-30T14:40:51.621" v="4787" actId="2696"/>
-        <pc:sldMkLst>
-          <pc:docMk/>
-          <pc:sldMk cId="4189671716" sldId="2146848332"/>
-        </pc:sldMkLst>
-        <pc:spChg chg="mod">
-          <ac:chgData name="Corbin Ferguson" userId="34a864e2-e65e-4cb2-823c-dc28f73f0e40" providerId="ADAL" clId="{8D2D96CF-1319-4CCC-9EA9-073445628049}" dt="2026-03-30T13:56:34.422" v="4627" actId="20577"/>
-          <ac:spMkLst>
-            <pc:docMk/>
-            <pc:sldMk cId="4189671716" sldId="2146848332"/>
-            <ac:spMk id="2" creationId="{F5C801AF-205E-CCC5-1469-42A47DA59246}"/>
-          </ac:spMkLst>
-        </pc:spChg>
-      </pc:sldChg>
       <pc:sldChg chg="addSp delSp modSp new mod modTransition modClrScheme chgLayout modNotesTx">
         <pc:chgData name="Corbin Ferguson" userId="34a864e2-e65e-4cb2-823c-dc28f73f0e40" providerId="ADAL" clId="{8D2D96CF-1319-4CCC-9EA9-073445628049}" dt="2026-03-31T19:17:40.468" v="10635" actId="20577"/>
         <pc:sldMkLst>
           <pc:docMk/>
           <pc:sldMk cId="3366771104" sldId="2146848333"/>
         </pc:sldMkLst>
-        <pc:spChg chg="del">
-          <ac:chgData name="Corbin Ferguson" userId="34a864e2-e65e-4cb2-823c-dc28f73f0e40" providerId="ADAL" clId="{8D2D96CF-1319-4CCC-9EA9-073445628049}" dt="2026-03-30T14:27:50.796" v="4668" actId="26606"/>
-          <ac:spMkLst>
-            <pc:docMk/>
-            <pc:sldMk cId="3366771104" sldId="2146848333"/>
-            <ac:spMk id="2" creationId="{B02CFBD2-353E-B389-D34D-FCF80EA69471}"/>
-          </ac:spMkLst>
-        </pc:spChg>
-        <pc:spChg chg="del">
-          <ac:chgData name="Corbin Ferguson" userId="34a864e2-e65e-4cb2-823c-dc28f73f0e40" providerId="ADAL" clId="{8D2D96CF-1319-4CCC-9EA9-073445628049}" dt="2026-03-30T14:27:50.796" v="4668" actId="26606"/>
-          <ac:spMkLst>
-            <pc:docMk/>
-            <pc:sldMk cId="3366771104" sldId="2146848333"/>
-            <ac:spMk id="3" creationId="{B069ABFB-1E08-3DD2-10E1-DFFA0076AEC1}"/>
-          </ac:spMkLst>
-        </pc:spChg>
         <pc:spChg chg="mod">
           <ac:chgData name="Corbin Ferguson" userId="34a864e2-e65e-4cb2-823c-dc28f73f0e40" providerId="ADAL" clId="{8D2D96CF-1319-4CCC-9EA9-073445628049}" dt="2026-03-30T14:27:50.796" v="4668" actId="26606"/>
           <ac:spMkLst>
@@ -1148,22 +890,6 @@
             <ac:spMk id="3081" creationId="{48E97AF7-5AD2-DC2E-0D5D-6756B90C946E}"/>
           </ac:spMkLst>
         </pc:spChg>
-        <pc:graphicFrameChg chg="add mod">
-          <ac:chgData name="Corbin Ferguson" userId="34a864e2-e65e-4cb2-823c-dc28f73f0e40" providerId="ADAL" clId="{8D2D96CF-1319-4CCC-9EA9-073445628049}" dt="2026-03-30T14:43:17.076" v="4853"/>
-          <ac:graphicFrameMkLst>
-            <pc:docMk/>
-            <pc:sldMk cId="3366771104" sldId="2146848333"/>
-            <ac:graphicFrameMk id="7" creationId="{BE047BC3-1128-EFE7-57C0-9E92F1E02BA4}"/>
-          </ac:graphicFrameMkLst>
-        </pc:graphicFrameChg>
-        <pc:graphicFrameChg chg="add mod">
-          <ac:chgData name="Corbin Ferguson" userId="34a864e2-e65e-4cb2-823c-dc28f73f0e40" providerId="ADAL" clId="{8D2D96CF-1319-4CCC-9EA9-073445628049}" dt="2026-03-30T14:43:19.705" v="4854"/>
-          <ac:graphicFrameMkLst>
-            <pc:docMk/>
-            <pc:sldMk cId="3366771104" sldId="2146848333"/>
-            <ac:graphicFrameMk id="8" creationId="{74D15E4F-78C3-5BD4-9D6A-FC3AC92DBCFF}"/>
-          </ac:graphicFrameMkLst>
-        </pc:graphicFrameChg>
         <pc:picChg chg="add mod ord">
           <ac:chgData name="Corbin Ferguson" userId="34a864e2-e65e-4cb2-823c-dc28f73f0e40" providerId="ADAL" clId="{8D2D96CF-1319-4CCC-9EA9-073445628049}" dt="2026-03-30T14:27:50.796" v="4668" actId="26606"/>
           <ac:picMkLst>
@@ -1174,7 +900,7 @@
         </pc:picChg>
       </pc:sldChg>
       <pc:sldChg chg="addSp delSp modSp new mod ord modTransition">
-        <pc:chgData name="Corbin Ferguson" userId="34a864e2-e65e-4cb2-823c-dc28f73f0e40" providerId="ADAL" clId="{8D2D96CF-1319-4CCC-9EA9-073445628049}" dt="2026-03-31T13:07:45.733" v="9084" actId="14100"/>
+        <pc:chgData name="Corbin Ferguson" userId="34a864e2-e65e-4cb2-823c-dc28f73f0e40" providerId="ADAL" clId="{8D2D96CF-1319-4CCC-9EA9-073445628049}" dt="2026-04-01T00:02:00.229" v="10668" actId="20577"/>
         <pc:sldMkLst>
           <pc:docMk/>
           <pc:sldMk cId="1111137208" sldId="2146848334"/>
@@ -1188,21 +914,13 @@
           </ac:spMkLst>
         </pc:spChg>
         <pc:spChg chg="mod">
-          <ac:chgData name="Corbin Ferguson" userId="34a864e2-e65e-4cb2-823c-dc28f73f0e40" providerId="ADAL" clId="{8D2D96CF-1319-4CCC-9EA9-073445628049}" dt="2026-03-31T13:07:45.733" v="9084" actId="14100"/>
+          <ac:chgData name="Corbin Ferguson" userId="34a864e2-e65e-4cb2-823c-dc28f73f0e40" providerId="ADAL" clId="{8D2D96CF-1319-4CCC-9EA9-073445628049}" dt="2026-04-01T00:02:00.229" v="10668" actId="20577"/>
           <ac:spMkLst>
             <pc:docMk/>
             <pc:sldMk cId="1111137208" sldId="2146848334"/>
             <ac:spMk id="3" creationId="{9B663C46-A793-3A1B-8101-817968A30164}"/>
           </ac:spMkLst>
         </pc:spChg>
-        <pc:picChg chg="add del">
-          <ac:chgData name="Corbin Ferguson" userId="34a864e2-e65e-4cb2-823c-dc28f73f0e40" providerId="ADAL" clId="{8D2D96CF-1319-4CCC-9EA9-073445628049}" dt="2026-03-30T13:11:30.020" v="3925" actId="478"/>
-          <ac:picMkLst>
-            <pc:docMk/>
-            <pc:sldMk cId="1111137208" sldId="2146848334"/>
-            <ac:picMk id="8" creationId="{122A7D7F-A135-94DF-62A6-8F9C5BC4365E}"/>
-          </ac:picMkLst>
-        </pc:picChg>
         <pc:picChg chg="add mod">
           <ac:chgData name="Corbin Ferguson" userId="34a864e2-e65e-4cb2-823c-dc28f73f0e40" providerId="ADAL" clId="{8D2D96CF-1319-4CCC-9EA9-073445628049}" dt="2026-03-30T13:16:50.251" v="4429" actId="1076"/>
           <ac:picMkLst>
@@ -1217,22 +935,6 @@
             <pc:docMk/>
             <pc:sldMk cId="1111137208" sldId="2146848334"/>
             <ac:picMk id="12" creationId="{E06BB708-2A6F-8850-88FE-C41AEC89FB75}"/>
-          </ac:picMkLst>
-        </pc:picChg>
-        <pc:picChg chg="add del mod">
-          <ac:chgData name="Corbin Ferguson" userId="34a864e2-e65e-4cb2-823c-dc28f73f0e40" providerId="ADAL" clId="{8D2D96CF-1319-4CCC-9EA9-073445628049}" dt="2026-03-30T13:13:33.676" v="4170" actId="478"/>
-          <ac:picMkLst>
-            <pc:docMk/>
-            <pc:sldMk cId="1111137208" sldId="2146848334"/>
-            <ac:picMk id="14" creationId="{06957091-5CD0-FF9F-41C8-E74BAFC760DD}"/>
-          </ac:picMkLst>
-        </pc:picChg>
-        <pc:picChg chg="add del">
-          <ac:chgData name="Corbin Ferguson" userId="34a864e2-e65e-4cb2-823c-dc28f73f0e40" providerId="ADAL" clId="{8D2D96CF-1319-4CCC-9EA9-073445628049}" dt="2026-03-30T13:13:32.666" v="4168" actId="478"/>
-          <ac:picMkLst>
-            <pc:docMk/>
-            <pc:sldMk cId="1111137208" sldId="2146848334"/>
-            <ac:picMk id="16" creationId="{99ABD223-57FD-53F5-F5A6-780849FE868A}"/>
           </ac:picMkLst>
         </pc:picChg>
         <pc:picChg chg="add mod">
@@ -1394,21 +1096,6 @@
             <ac:picMk id="17" creationId="{07E999BB-F871-651D-2CBB-38D8B9FA34BA}"/>
           </ac:picMkLst>
         </pc:picChg>
-      </pc:sldChg>
-      <pc:sldChg chg="modSp add del mod">
-        <pc:chgData name="Corbin Ferguson" userId="34a864e2-e65e-4cb2-823c-dc28f73f0e40" providerId="ADAL" clId="{8D2D96CF-1319-4CCC-9EA9-073445628049}" dt="2026-03-30T14:40:49.832" v="4786" actId="2696"/>
-        <pc:sldMkLst>
-          <pc:docMk/>
-          <pc:sldMk cId="2271584715" sldId="2146848335"/>
-        </pc:sldMkLst>
-        <pc:spChg chg="mod">
-          <ac:chgData name="Corbin Ferguson" userId="34a864e2-e65e-4cb2-823c-dc28f73f0e40" providerId="ADAL" clId="{8D2D96CF-1319-4CCC-9EA9-073445628049}" dt="2026-03-30T13:56:27.859" v="4607" actId="20577"/>
-          <ac:spMkLst>
-            <pc:docMk/>
-            <pc:sldMk cId="2271584715" sldId="2146848335"/>
-            <ac:spMk id="2" creationId="{52254D65-5761-ABD9-2C81-218FD1C54027}"/>
-          </ac:spMkLst>
-        </pc:spChg>
       </pc:sldChg>
       <pc:sldChg chg="addSp delSp modSp new mod modTransition">
         <pc:chgData name="Corbin Ferguson" userId="34a864e2-e65e-4cb2-823c-dc28f73f0e40" providerId="ADAL" clId="{8D2D96CF-1319-4CCC-9EA9-073445628049}" dt="2026-03-31T15:33:43.051" v="10516" actId="26606"/>
@@ -19098,13 +18785,13 @@
   <p:clrMapOvr>
     <a:masterClrMapping/>
   </p:clrMapOvr>
-  <mc:AlternateContent xmlns:mc="http://schemas.openxmlformats.org/markup-compatibility/2006">
-    <mc:Choice xmlns:p159="http://schemas.microsoft.com/office/powerpoint/2015/09/main" Requires="p159">
+  <mc:AlternateContent xmlns:mc="http://schemas.openxmlformats.org/markup-compatibility/2006" xmlns:p159="http://schemas.microsoft.com/office/powerpoint/2015/09/main">
+    <mc:Choice Requires="p159">
       <p:transition>
         <p159:morph option="byObject"/>
       </p:transition>
     </mc:Choice>
-    <mc:Fallback>
+    <mc:Fallback xmlns="">
       <p:transition>
         <p:fade/>
       </p:transition>
@@ -19533,13 +19220,13 @@
   <p:clrMapOvr>
     <a:masterClrMapping/>
   </p:clrMapOvr>
-  <mc:AlternateContent xmlns:mc="http://schemas.openxmlformats.org/markup-compatibility/2006">
-    <mc:Choice xmlns:p159="http://schemas.microsoft.com/office/powerpoint/2015/09/main" Requires="p159">
+  <mc:AlternateContent xmlns:mc="http://schemas.openxmlformats.org/markup-compatibility/2006" xmlns:p159="http://schemas.microsoft.com/office/powerpoint/2015/09/main">
+    <mc:Choice Requires="p159">
       <p:transition>
         <p159:morph option="byObject"/>
       </p:transition>
     </mc:Choice>
-    <mc:Fallback>
+    <mc:Fallback xmlns="">
       <p:transition>
         <p:fade/>
       </p:transition>
@@ -19853,10 +19540,10 @@
       </p:pic>
       <p:pic>
         <p:nvPicPr>
-          <p:cNvPr id="11268" name="NewFile">
-            <a:extLst>
-              <a:ext uri="{FF2B5EF4-FFF2-40B4-BE49-F238E27FC236}">
-                <a16:creationId xmlns:a16="http://schemas.microsoft.com/office/drawing/2014/main" id="{14AE5F5A-6C88-0F58-A592-0FB668BF99DA}"/>
+          <p:cNvPr id="1026" name="NewFile">
+            <a:extLst>
+              <a:ext uri="{FF2B5EF4-FFF2-40B4-BE49-F238E27FC236}">
+                <a16:creationId xmlns:a16="http://schemas.microsoft.com/office/drawing/2014/main" id="{20890D35-21B5-65A3-4EB5-F39A5A0DCDD2}"/>
               </a:ext>
             </a:extLst>
           </p:cNvPr>
@@ -19880,8 +19567,8 @@
         </p:blipFill>
         <p:spPr bwMode="auto">
           <a:xfrm>
-            <a:off x="365435" y="980731"/>
-            <a:ext cx="11428631" cy="4882654"/>
+            <a:off x="387104" y="905835"/>
+            <a:ext cx="11417792" cy="5068102"/>
           </a:xfrm>
           <a:prstGeom prst="rect">
             <a:avLst/>
@@ -19905,8 +19592,8 @@
         </p:nvSpPr>
         <p:spPr>
           <a:xfrm>
-            <a:off x="2514600" y="2705100"/>
-            <a:ext cx="8839200" cy="901700"/>
+            <a:off x="3483428" y="2498270"/>
+            <a:ext cx="7979229" cy="901700"/>
           </a:xfrm>
           <a:prstGeom prst="roundRect">
             <a:avLst/>
@@ -19970,13 +19657,13 @@
   <p:clrMapOvr>
     <a:masterClrMapping/>
   </p:clrMapOvr>
-  <mc:AlternateContent xmlns:mc="http://schemas.openxmlformats.org/markup-compatibility/2006">
-    <mc:Choice xmlns:p159="http://schemas.microsoft.com/office/powerpoint/2015/09/main" Requires="p159">
+  <mc:AlternateContent xmlns:mc="http://schemas.openxmlformats.org/markup-compatibility/2006" xmlns:p159="http://schemas.microsoft.com/office/powerpoint/2015/09/main">
+    <mc:Choice Requires="p159">
       <p:transition>
         <p159:morph option="byObject"/>
       </p:transition>
     </mc:Choice>
-    <mc:Fallback>
+    <mc:Fallback xmlns="">
       <p:transition>
         <p:fade/>
       </p:transition>
@@ -20259,10 +19946,10 @@
       </p:sp>
       <p:pic>
         <p:nvPicPr>
-          <p:cNvPr id="3" name="!NewFile">
-            <a:extLst>
-              <a:ext uri="{FF2B5EF4-FFF2-40B4-BE49-F238E27FC236}">
-                <a16:creationId xmlns:a16="http://schemas.microsoft.com/office/drawing/2014/main" id="{2C2C5AB6-0479-9BDD-DD83-40A7451A2B32}"/>
+          <p:cNvPr id="9" name="!NewFile">
+            <a:extLst>
+              <a:ext uri="{FF2B5EF4-FFF2-40B4-BE49-F238E27FC236}">
+                <a16:creationId xmlns:a16="http://schemas.microsoft.com/office/drawing/2014/main" id="{8BFC2206-26A7-60F5-CBAC-314A71B8563A}"/>
               </a:ext>
             </a:extLst>
           </p:cNvPr>
@@ -20279,15 +19966,15 @@
               </a:ext>
             </a:extLst>
           </a:blip>
-          <a:srcRect l="18830" t="34247" r="4223" b="46101"/>
+          <a:srcRect/>
           <a:stretch>
             <a:fillRect/>
           </a:stretch>
         </p:blipFill>
         <p:spPr bwMode="auto">
           <a:xfrm>
-            <a:off x="1433867" y="2599943"/>
-            <a:ext cx="9764534" cy="1065448"/>
+            <a:off x="2196748" y="1709095"/>
+            <a:ext cx="7798505" cy="3461582"/>
           </a:xfrm>
           <a:prstGeom prst="rect">
             <a:avLst/>
@@ -20406,13 +20093,13 @@
   <p:clrMapOvr>
     <a:masterClrMapping/>
   </p:clrMapOvr>
-  <mc:AlternateContent xmlns:mc="http://schemas.openxmlformats.org/markup-compatibility/2006">
-    <mc:Choice xmlns:p159="http://schemas.microsoft.com/office/powerpoint/2015/09/main" Requires="p159">
+  <mc:AlternateContent xmlns:mc="http://schemas.openxmlformats.org/markup-compatibility/2006" xmlns:p159="http://schemas.microsoft.com/office/powerpoint/2015/09/main">
+    <mc:Choice Requires="p159">
       <p:transition>
         <p159:morph option="byObject"/>
       </p:transition>
     </mc:Choice>
-    <mc:Fallback>
+    <mc:Fallback xmlns="">
       <p:transition>
         <p:fade/>
       </p:transition>
@@ -20479,42 +20166,6 @@
                             </p:childTnLst>
                           </p:cTn>
                         </p:par>
-                        <p:par>
-                          <p:cTn id="8" fill="hold">
-                            <p:stCondLst>
-                              <p:cond delay="600"/>
-                            </p:stCondLst>
-                            <p:childTnLst>
-                              <p:par>
-                                <p:cTn id="9" presetID="1" presetClass="exit" presetSubtype="0" fill="hold" nodeType="afterEffect">
-                                  <p:stCondLst>
-                                    <p:cond delay="0"/>
-                                  </p:stCondLst>
-                                  <p:childTnLst>
-                                    <p:set>
-                                      <p:cBhvr>
-                                        <p:cTn id="10" dur="1" fill="hold">
-                                          <p:stCondLst>
-                                            <p:cond delay="0"/>
-                                          </p:stCondLst>
-                                        </p:cTn>
-                                        <p:tgtEl>
-                                          <p:spTgt spid="3"/>
-                                        </p:tgtEl>
-                                        <p:attrNameLst>
-                                          <p:attrName>style.visibility</p:attrName>
-                                        </p:attrNameLst>
-                                      </p:cBhvr>
-                                      <p:to>
-                                        <p:strVal val="hidden"/>
-                                      </p:to>
-                                    </p:set>
-                                  </p:childTnLst>
-                                </p:cTn>
-                              </p:par>
-                            </p:childTnLst>
-                          </p:cTn>
-                        </p:par>
                       </p:childTnLst>
                     </p:cTn>
                   </p:par>
@@ -20832,13 +20483,13 @@
   <p:clrMapOvr>
     <a:masterClrMapping/>
   </p:clrMapOvr>
-  <mc:AlternateContent xmlns:mc="http://schemas.openxmlformats.org/markup-compatibility/2006">
-    <mc:Choice xmlns:p159="http://schemas.microsoft.com/office/powerpoint/2015/09/main" Requires="p159">
+  <mc:AlternateContent xmlns:mc="http://schemas.openxmlformats.org/markup-compatibility/2006" xmlns:p159="http://schemas.microsoft.com/office/powerpoint/2015/09/main">
+    <mc:Choice Requires="p159">
       <p:transition>
         <p159:morph option="byObject"/>
       </p:transition>
     </mc:Choice>
-    <mc:Fallback>
+    <mc:Fallback xmlns="">
       <p:transition>
         <p:fade/>
       </p:transition>
@@ -21161,10 +20812,10 @@
       </p:pic>
       <p:pic>
         <p:nvPicPr>
-          <p:cNvPr id="4100" name="NewFileFULL">
-            <a:extLst>
-              <a:ext uri="{FF2B5EF4-FFF2-40B4-BE49-F238E27FC236}">
-                <a16:creationId xmlns:a16="http://schemas.microsoft.com/office/drawing/2014/main" id="{4C164929-3339-8372-C56E-6273FF8104E8}"/>
+          <p:cNvPr id="3" name="NewFile">
+            <a:extLst>
+              <a:ext uri="{FF2B5EF4-FFF2-40B4-BE49-F238E27FC236}">
+                <a16:creationId xmlns:a16="http://schemas.microsoft.com/office/drawing/2014/main" id="{35DB570D-C20F-4D18-AFA8-DB67D456C1A2}"/>
               </a:ext>
             </a:extLst>
           </p:cNvPr>
@@ -21188,8 +20839,8 @@
         </p:blipFill>
         <p:spPr bwMode="auto">
           <a:xfrm>
-            <a:off x="199916" y="909969"/>
-            <a:ext cx="11480450" cy="4380698"/>
+            <a:off x="387104" y="905835"/>
+            <a:ext cx="11417792" cy="5068102"/>
           </a:xfrm>
           <a:prstGeom prst="rect">
             <a:avLst/>
@@ -21201,10 +20852,10 @@
       </p:pic>
       <p:pic>
         <p:nvPicPr>
-          <p:cNvPr id="6" name="NewFile">
-            <a:extLst>
-              <a:ext uri="{FF2B5EF4-FFF2-40B4-BE49-F238E27FC236}">
-                <a16:creationId xmlns:a16="http://schemas.microsoft.com/office/drawing/2014/main" id="{8258F793-6C4B-B9D2-CC2E-6207D04A7C5C}"/>
+          <p:cNvPr id="9" name="NewFile">
+            <a:extLst>
+              <a:ext uri="{FF2B5EF4-FFF2-40B4-BE49-F238E27FC236}">
+                <a16:creationId xmlns:a16="http://schemas.microsoft.com/office/drawing/2014/main" id="{0D495668-F0B2-4D67-2C55-18A3E3AB0F61}"/>
               </a:ext>
             </a:extLst>
           </p:cNvPr>
@@ -21221,15 +20872,15 @@
               </a:ext>
             </a:extLst>
           </a:blip>
-          <a:srcRect l="24267" t="50542" r="1330" b="6617"/>
+          <a:srcRect l="28358" t="48926"/>
           <a:stretch>
             <a:fillRect/>
           </a:stretch>
         </p:blipFill>
         <p:spPr bwMode="auto">
           <a:xfrm>
-            <a:off x="2985822" y="3104438"/>
-            <a:ext cx="8541879" cy="1876777"/>
+            <a:off x="3624942" y="3385455"/>
+            <a:ext cx="8179953" cy="2588481"/>
           </a:xfrm>
           <a:prstGeom prst="rect">
             <a:avLst/>
@@ -21253,8 +20904,8 @@
         </p:nvSpPr>
         <p:spPr>
           <a:xfrm>
-            <a:off x="2489200" y="3407832"/>
-            <a:ext cx="8839200" cy="1663700"/>
+            <a:off x="3494313" y="3429000"/>
+            <a:ext cx="8197429" cy="1663700"/>
           </a:xfrm>
           <a:prstGeom prst="roundRect">
             <a:avLst/>
@@ -21318,13 +20969,13 @@
   <p:clrMapOvr>
     <a:masterClrMapping/>
   </p:clrMapOvr>
-  <mc:AlternateContent xmlns:mc="http://schemas.openxmlformats.org/markup-compatibility/2006">
-    <mc:Choice xmlns:p159="http://schemas.microsoft.com/office/powerpoint/2015/09/main" Requires="p159">
+  <mc:AlternateContent xmlns:mc="http://schemas.openxmlformats.org/markup-compatibility/2006" xmlns:p159="http://schemas.microsoft.com/office/powerpoint/2015/09/main">
+    <mc:Choice Requires="p159">
       <p:transition>
         <p159:morph option="byObject"/>
       </p:transition>
     </mc:Choice>
-    <mc:Fallback>
+    <mc:Fallback xmlns="">
       <p:transition>
         <p:fade/>
       </p:transition>
@@ -21597,10 +21248,10 @@
       </p:sp>
       <p:pic>
         <p:nvPicPr>
-          <p:cNvPr id="11" name="!NewFile">
-            <a:extLst>
-              <a:ext uri="{FF2B5EF4-FFF2-40B4-BE49-F238E27FC236}">
-                <a16:creationId xmlns:a16="http://schemas.microsoft.com/office/drawing/2014/main" id="{52DEB6A1-15E1-625C-99FA-5170366012B3}"/>
+          <p:cNvPr id="3" name="NewFile">
+            <a:extLst>
+              <a:ext uri="{FF2B5EF4-FFF2-40B4-BE49-F238E27FC236}">
+                <a16:creationId xmlns:a16="http://schemas.microsoft.com/office/drawing/2014/main" id="{06E6E34B-A3E4-5186-F073-42CEFA8945AB}"/>
               </a:ext>
             </a:extLst>
           </p:cNvPr>
@@ -21617,15 +21268,15 @@
               </a:ext>
             </a:extLst>
           </a:blip>
-          <a:srcRect l="24267" t="50542" r="1330" b="6617"/>
+          <a:srcRect/>
           <a:stretch>
             <a:fillRect/>
           </a:stretch>
         </p:blipFill>
         <p:spPr bwMode="auto">
           <a:xfrm>
-            <a:off x="2637691" y="2539993"/>
-            <a:ext cx="7149776" cy="1570912"/>
+            <a:off x="2551225" y="1866440"/>
+            <a:ext cx="7089550" cy="3146893"/>
           </a:xfrm>
           <a:prstGeom prst="rect">
             <a:avLst/>
@@ -21676,13 +21327,13 @@
   <p:clrMapOvr>
     <a:masterClrMapping/>
   </p:clrMapOvr>
-  <mc:AlternateContent xmlns:mc="http://schemas.openxmlformats.org/markup-compatibility/2006">
-    <mc:Choice xmlns:p159="http://schemas.microsoft.com/office/powerpoint/2015/09/main" Requires="p159">
+  <mc:AlternateContent xmlns:mc="http://schemas.openxmlformats.org/markup-compatibility/2006" xmlns:p159="http://schemas.microsoft.com/office/powerpoint/2015/09/main">
+    <mc:Choice Requires="p159">
       <p:transition>
         <p159:morph option="byObject"/>
       </p:transition>
     </mc:Choice>
-    <mc:Fallback>
+    <mc:Fallback xmlns="">
       <p:transition>
         <p:fade/>
       </p:transition>
@@ -23048,7 +22699,37 @@
             </a:pPr>
             <a:r>
               <a:rPr lang="en-US" dirty="0"/>
-              <a:t>Application state OK but not shippable</a:t>
+              <a:t>Potential future additions:</a:t>
+            </a:r>
+          </a:p>
+          <a:p>
+            <a:pPr marL="703263" lvl="1" indent="-342900">
+              <a:buFont typeface="Arial" panose="020B0604020202020204" pitchFamily="34" charset="0"/>
+              <a:buChar char="•"/>
+            </a:pPr>
+            <a:r>
+              <a:rPr lang="en-US" dirty="0"/>
+              <a:t>Upgraded UI to more intuitive feel</a:t>
+            </a:r>
+          </a:p>
+          <a:p>
+            <a:pPr marL="703263" lvl="1" indent="-342900">
+              <a:buFont typeface="Arial" panose="020B0604020202020204" pitchFamily="34" charset="0"/>
+              <a:buChar char="•"/>
+            </a:pPr>
+            <a:r>
+              <a:rPr lang="en-US" dirty="0"/>
+              <a:t>Enhanced system validation</a:t>
+            </a:r>
+          </a:p>
+          <a:p>
+            <a:pPr marL="703263" lvl="1" indent="-342900">
+              <a:buFont typeface="Arial" panose="020B0604020202020204" pitchFamily="34" charset="0"/>
+              <a:buChar char="•"/>
+            </a:pPr>
+            <a:r>
+              <a:rPr lang="en-US" dirty="0"/>
+              <a:t>Opening file being actively modified</a:t>
             </a:r>
           </a:p>
           <a:p>
@@ -25233,11 +24914,11 @@
   <p:clrMapOvr>
     <a:masterClrMapping/>
   </p:clrMapOvr>
-  <mc:AlternateContent xmlns:mc="http://schemas.openxmlformats.org/markup-compatibility/2006">
-    <mc:Choice xmlns:p14="http://schemas.microsoft.com/office/powerpoint/2010/main" Requires="p14">
+  <mc:AlternateContent xmlns:mc="http://schemas.openxmlformats.org/markup-compatibility/2006" xmlns:p14="http://schemas.microsoft.com/office/powerpoint/2010/main">
+    <mc:Choice Requires="p14">
       <p:transition p14:dur="0"/>
     </mc:Choice>
-    <mc:Fallback>
+    <mc:Fallback xmlns="">
       <p:transition/>
     </mc:Fallback>
   </mc:AlternateContent>
@@ -25642,11 +25323,11 @@
   <p:clrMapOvr>
     <a:masterClrMapping/>
   </p:clrMapOvr>
-  <mc:AlternateContent xmlns:mc="http://schemas.openxmlformats.org/markup-compatibility/2006">
-    <mc:Choice xmlns:p14="http://schemas.microsoft.com/office/powerpoint/2010/main" Requires="p14">
+  <mc:AlternateContent xmlns:mc="http://schemas.openxmlformats.org/markup-compatibility/2006" xmlns:p14="http://schemas.microsoft.com/office/powerpoint/2010/main">
+    <mc:Choice Requires="p14">
       <p:transition p14:dur="0"/>
     </mc:Choice>
-    <mc:Fallback>
+    <mc:Fallback xmlns="">
       <p:transition/>
     </mc:Fallback>
   </mc:AlternateContent>
@@ -25788,6 +25469,14 @@
             <a:r>
               <a:rPr lang="en-US" dirty="0" err="1"/>
               <a:t>ImessageService</a:t>
+            </a:r>
+            <a:endParaRPr lang="en-US" dirty="0"/>
+          </a:p>
+          <a:p>
+            <a:pPr lvl="2"/>
+            <a:r>
+              <a:rPr lang="en-US" dirty="0" err="1"/>
+              <a:t>IUserPromptService</a:t>
             </a:r>
             <a:endParaRPr lang="en-US" dirty="0"/>
           </a:p>
@@ -27053,6 +26742,15 @@
 </file>
 
 <file path=customXml/item1.xml><?xml version="1.0" encoding="utf-8"?>
+<?mso-contentType ?>
+<FormTemplates xmlns="http://schemas.microsoft.com/sharepoint/v3/contenttype/forms">
+  <Display>DocumentLibraryForm</Display>
+  <Edit>DocumentLibraryForm</Edit>
+  <New>DocumentLibraryForm</New>
+</FormTemplates>
+</file>
+
+<file path=customXml/item2.xml><?xml version="1.0" encoding="utf-8"?>
 <p:properties xmlns:p="http://schemas.microsoft.com/office/2006/metadata/properties" xmlns:xsi="http://www.w3.org/2001/XMLSchema-instance" xmlns:pc="http://schemas.microsoft.com/office/infopath/2007/PartnerControls">
   <documentManagement>
     <_dlc_DocId xmlns="ff469461-7529-4054-b699-f189b0470135">JMTRRF7WE2PD-394290014-179107</_dlc_DocId>
@@ -27071,66 +26769,7 @@
 </p:properties>
 </file>
 
-<file path=customXml/item2.xml><?xml version="1.0" encoding="utf-8"?>
-<?mso-contentType ?>
-<FormTemplates xmlns="http://schemas.microsoft.com/sharepoint/v3/contenttype/forms">
-  <Display>DocumentLibraryForm</Display>
-  <Edit>DocumentLibraryForm</Edit>
-  <New>DocumentLibraryForm</New>
-</FormTemplates>
-</file>
-
 <file path=customXml/item3.xml><?xml version="1.0" encoding="utf-8"?>
-<?mso-contentType ?>
-<spe:Receivers xmlns:spe="http://schemas.microsoft.com/sharepoint/events">
-  <Receiver>
-    <Name>Document ID Generator</Name>
-    <Synchronization>Synchronous</Synchronization>
-    <Type>10001</Type>
-    <SequenceNumber>1000</SequenceNumber>
-    <Url/>
-    <Assembly>Microsoft.Office.DocumentManagement, Version=16.0.0.0, Culture=neutral, PublicKeyToken=71e9bce111e9429c</Assembly>
-    <Class>Microsoft.Office.DocumentManagement.Internal.DocIdHandler</Class>
-    <Data/>
-    <Filter/>
-  </Receiver>
-  <Receiver>
-    <Name>Document ID Generator</Name>
-    <Synchronization>Synchronous</Synchronization>
-    <Type>10002</Type>
-    <SequenceNumber>1001</SequenceNumber>
-    <Url/>
-    <Assembly>Microsoft.Office.DocumentManagement, Version=16.0.0.0, Culture=neutral, PublicKeyToken=71e9bce111e9429c</Assembly>
-    <Class>Microsoft.Office.DocumentManagement.Internal.DocIdHandler</Class>
-    <Data/>
-    <Filter/>
-  </Receiver>
-  <Receiver>
-    <Name>Document ID Generator</Name>
-    <Synchronization>Synchronous</Synchronization>
-    <Type>10004</Type>
-    <SequenceNumber>1002</SequenceNumber>
-    <Url/>
-    <Assembly>Microsoft.Office.DocumentManagement, Version=16.0.0.0, Culture=neutral, PublicKeyToken=71e9bce111e9429c</Assembly>
-    <Class>Microsoft.Office.DocumentManagement.Internal.DocIdHandler</Class>
-    <Data/>
-    <Filter/>
-  </Receiver>
-  <Receiver>
-    <Name>Document ID Generator</Name>
-    <Synchronization>Synchronous</Synchronization>
-    <Type>10006</Type>
-    <SequenceNumber>1003</SequenceNumber>
-    <Url/>
-    <Assembly>Microsoft.Office.DocumentManagement, Version=16.0.0.0, Culture=neutral, PublicKeyToken=71e9bce111e9429c</Assembly>
-    <Class>Microsoft.Office.DocumentManagement.Internal.DocIdHandler</Class>
-    <Data/>
-    <Filter/>
-  </Receiver>
-</spe:Receivers>
-</file>
-
-<file path=customXml/item4.xml><?xml version="1.0" encoding="utf-8"?>
 <ct:contentTypeSchema xmlns:ct="http://schemas.microsoft.com/office/2006/metadata/contentType" xmlns:ma="http://schemas.microsoft.com/office/2006/metadata/properties/metaAttributes" ct:_="" ma:_="" ma:contentTypeName="Document" ma:contentTypeID="0x0101006EDC6CC76FF9184F853A569783F97413" ma:contentTypeVersion="22" ma:contentTypeDescription="Create a new document." ma:contentTypeScope="" ma:versionID="fafba55adc5922abf3c9c892f4cb72c7">
   <xsd:schema xmlns:xsd="http://www.w3.org/2001/XMLSchema" xmlns:xs="http://www.w3.org/2001/XMLSchema" xmlns:p="http://schemas.microsoft.com/office/2006/metadata/properties" xmlns:ns2="ff469461-7529-4054-b699-f189b0470135" xmlns:ns3="fd34c5d5-5d34-46ed-9bd0-fe73508393dd" targetNamespace="http://schemas.microsoft.com/office/2006/metadata/properties" ma:root="true" ma:fieldsID="060795adfc307ec5b186d3bc1ba667bf" ns2:_="" ns3:_="">
     <xsd:import namespace="ff469461-7529-4054-b699-f189b0470135"/>
@@ -27412,18 +27051,57 @@
 </ct:contentTypeSchema>
 </file>
 
-<file path=customXml/itemProps1.xml><?xml version="1.0" encoding="utf-8"?>
-<ds:datastoreItem xmlns:ds="http://schemas.openxmlformats.org/officeDocument/2006/customXml" ds:itemID="{BDDCD54E-E6D4-44B7-9C63-36A87B0BC892}">
-  <ds:schemaRefs>
-    <ds:schemaRef ds:uri="http://schemas.microsoft.com/office/2006/metadata/properties"/>
-    <ds:schemaRef ds:uri="http://schemas.microsoft.com/office/infopath/2007/PartnerControls"/>
-    <ds:schemaRef ds:uri="ff469461-7529-4054-b699-f189b0470135"/>
-    <ds:schemaRef ds:uri="fd34c5d5-5d34-46ed-9bd0-fe73508393dd"/>
-  </ds:schemaRefs>
-</ds:datastoreItem>
+<file path=customXml/item4.xml><?xml version="1.0" encoding="utf-8"?>
+<?mso-contentType ?>
+<spe:Receivers xmlns:spe="http://schemas.microsoft.com/sharepoint/events">
+  <Receiver>
+    <Name>Document ID Generator</Name>
+    <Synchronization>Synchronous</Synchronization>
+    <Type>10001</Type>
+    <SequenceNumber>1000</SequenceNumber>
+    <Url/>
+    <Assembly>Microsoft.Office.DocumentManagement, Version=16.0.0.0, Culture=neutral, PublicKeyToken=71e9bce111e9429c</Assembly>
+    <Class>Microsoft.Office.DocumentManagement.Internal.DocIdHandler</Class>
+    <Data/>
+    <Filter/>
+  </Receiver>
+  <Receiver>
+    <Name>Document ID Generator</Name>
+    <Synchronization>Synchronous</Synchronization>
+    <Type>10002</Type>
+    <SequenceNumber>1001</SequenceNumber>
+    <Url/>
+    <Assembly>Microsoft.Office.DocumentManagement, Version=16.0.0.0, Culture=neutral, PublicKeyToken=71e9bce111e9429c</Assembly>
+    <Class>Microsoft.Office.DocumentManagement.Internal.DocIdHandler</Class>
+    <Data/>
+    <Filter/>
+  </Receiver>
+  <Receiver>
+    <Name>Document ID Generator</Name>
+    <Synchronization>Synchronous</Synchronization>
+    <Type>10004</Type>
+    <SequenceNumber>1002</SequenceNumber>
+    <Url/>
+    <Assembly>Microsoft.Office.DocumentManagement, Version=16.0.0.0, Culture=neutral, PublicKeyToken=71e9bce111e9429c</Assembly>
+    <Class>Microsoft.Office.DocumentManagement.Internal.DocIdHandler</Class>
+    <Data/>
+    <Filter/>
+  </Receiver>
+  <Receiver>
+    <Name>Document ID Generator</Name>
+    <Synchronization>Synchronous</Synchronization>
+    <Type>10006</Type>
+    <SequenceNumber>1003</SequenceNumber>
+    <Url/>
+    <Assembly>Microsoft.Office.DocumentManagement, Version=16.0.0.0, Culture=neutral, PublicKeyToken=71e9bce111e9429c</Assembly>
+    <Class>Microsoft.Office.DocumentManagement.Internal.DocIdHandler</Class>
+    <Data/>
+    <Filter/>
+  </Receiver>
+</spe:Receivers>
 </file>
 
-<file path=customXml/itemProps2.xml><?xml version="1.0" encoding="utf-8"?>
+<file path=customXml/itemProps1.xml><?xml version="1.0" encoding="utf-8"?>
 <ds:datastoreItem xmlns:ds="http://schemas.openxmlformats.org/officeDocument/2006/customXml" ds:itemID="{A6D3E88B-1A5A-4B73-80E5-69C18FD07D34}">
   <ds:schemaRefs>
     <ds:schemaRef ds:uri="http://schemas.microsoft.com/sharepoint/v3/contenttype/forms"/>
@@ -27431,15 +27109,24 @@
 </ds:datastoreItem>
 </file>
 
-<file path=customXml/itemProps3.xml><?xml version="1.0" encoding="utf-8"?>
-<ds:datastoreItem xmlns:ds="http://schemas.openxmlformats.org/officeDocument/2006/customXml" ds:itemID="{AE2F94C8-66CF-41ED-818B-048931D25A1F}">
+<file path=customXml/itemProps2.xml><?xml version="1.0" encoding="utf-8"?>
+<ds:datastoreItem xmlns:ds="http://schemas.openxmlformats.org/officeDocument/2006/customXml" ds:itemID="{BDDCD54E-E6D4-44B7-9C63-36A87B0BC892}">
   <ds:schemaRefs>
-    <ds:schemaRef ds:uri="http://schemas.microsoft.com/sharepoint/events"/>
+    <ds:schemaRef ds:uri="http://schemas.microsoft.com/office/2006/documentManagement/types"/>
+    <ds:schemaRef ds:uri="http://purl.org/dc/terms/"/>
+    <ds:schemaRef ds:uri="http://schemas.microsoft.com/office/2006/metadata/properties"/>
+    <ds:schemaRef ds:uri="http://purl.org/dc/elements/1.1/"/>
+    <ds:schemaRef ds:uri="http://schemas.openxmlformats.org/package/2006/metadata/core-properties"/>
+    <ds:schemaRef ds:uri="fd34c5d5-5d34-46ed-9bd0-fe73508393dd"/>
+    <ds:schemaRef ds:uri="http://purl.org/dc/dcmitype/"/>
+    <ds:schemaRef ds:uri="http://schemas.microsoft.com/office/infopath/2007/PartnerControls"/>
+    <ds:schemaRef ds:uri="ff469461-7529-4054-b699-f189b0470135"/>
+    <ds:schemaRef ds:uri="http://www.w3.org/XML/1998/namespace"/>
   </ds:schemaRefs>
 </ds:datastoreItem>
 </file>
 
-<file path=customXml/itemProps4.xml><?xml version="1.0" encoding="utf-8"?>
+<file path=customXml/itemProps3.xml><?xml version="1.0" encoding="utf-8"?>
 <ds:datastoreItem xmlns:ds="http://schemas.openxmlformats.org/officeDocument/2006/customXml" ds:itemID="{9DFD6D4B-0724-4B51-A318-8F6196A403FF}">
   <ds:schemaRefs>
     <ds:schemaRef ds:uri="http://schemas.microsoft.com/office/2006/metadata/contentType"/>
@@ -27458,6 +27145,14 @@
 </ds:datastoreItem>
 </file>
 
+<file path=customXml/itemProps4.xml><?xml version="1.0" encoding="utf-8"?>
+<ds:datastoreItem xmlns:ds="http://schemas.openxmlformats.org/officeDocument/2006/customXml" ds:itemID="{AE2F94C8-66CF-41ED-818B-048931D25A1F}">
+  <ds:schemaRefs>
+    <ds:schemaRef ds:uri="http://schemas.microsoft.com/sharepoint/events"/>
+  </ds:schemaRefs>
+</ds:datastoreItem>
+</file>
+
 <file path=docMetadata/LabelInfo.xml><?xml version="1.0" encoding="utf-8"?>
 <clbl:labelList xmlns:clbl="http://schemas.microsoft.com/office/2020/mipLabelMetadata">
   <clbl:label id="{2988f0a4-524a-45f2-829d-417725fa4957}" enabled="1" method="Standard" siteId="{52daf2a9-3b73-4da4-ac6a-3f81adc92b7e}" removed="0"/>

--- a/Thesis Writing Documents/Project Development.pptx
+++ b/Thesis Writing Documents/Project Development.pptx
@@ -5,10 +5,10 @@
     <p:sldMasterId id="2147483648" r:id="rId5"/>
   </p:sldMasterIdLst>
   <p:notesMasterIdLst>
-    <p:notesMasterId r:id="rId30"/>
+    <p:notesMasterId r:id="rId31"/>
   </p:notesMasterIdLst>
   <p:handoutMasterIdLst>
-    <p:handoutMasterId r:id="rId31"/>
+    <p:handoutMasterId r:id="rId32"/>
   </p:handoutMasterIdLst>
   <p:sldIdLst>
     <p:sldId id="256" r:id="rId6"/>
@@ -16,30 +16,31 @@
     <p:sldId id="257" r:id="rId8"/>
     <p:sldId id="2146848305" r:id="rId9"/>
     <p:sldId id="2146848304" r:id="rId10"/>
-    <p:sldId id="2146848333" r:id="rId11"/>
-    <p:sldId id="2146848335" r:id="rId12"/>
-    <p:sldId id="2146848336" r:id="rId13"/>
-    <p:sldId id="2146848334" r:id="rId14"/>
-    <p:sldId id="2146848319" r:id="rId15"/>
-    <p:sldId id="2146848322" r:id="rId16"/>
-    <p:sldId id="2146848318" r:id="rId17"/>
-    <p:sldId id="2146848323" r:id="rId18"/>
-    <p:sldId id="2146848324" r:id="rId19"/>
-    <p:sldId id="2146848329" r:id="rId20"/>
-    <p:sldId id="2146848325" r:id="rId21"/>
-    <p:sldId id="2146848328" r:id="rId22"/>
-    <p:sldId id="2146848310" r:id="rId23"/>
-    <p:sldId id="2146848300" r:id="rId24"/>
-    <p:sldId id="2146848311" r:id="rId25"/>
-    <p:sldId id="2146848312" r:id="rId26"/>
-    <p:sldId id="2146848314" r:id="rId27"/>
-    <p:sldId id="2146848313" r:id="rId28"/>
-    <p:sldId id="2146848315" r:id="rId29"/>
+    <p:sldId id="2146848337" r:id="rId11"/>
+    <p:sldId id="2146848333" r:id="rId12"/>
+    <p:sldId id="2146848335" r:id="rId13"/>
+    <p:sldId id="2146848336" r:id="rId14"/>
+    <p:sldId id="2146848334" r:id="rId15"/>
+    <p:sldId id="2146848319" r:id="rId16"/>
+    <p:sldId id="2146848322" r:id="rId17"/>
+    <p:sldId id="2146848318" r:id="rId18"/>
+    <p:sldId id="2146848323" r:id="rId19"/>
+    <p:sldId id="2146848324" r:id="rId20"/>
+    <p:sldId id="2146848329" r:id="rId21"/>
+    <p:sldId id="2146848325" r:id="rId22"/>
+    <p:sldId id="2146848328" r:id="rId23"/>
+    <p:sldId id="2146848310" r:id="rId24"/>
+    <p:sldId id="2146848300" r:id="rId25"/>
+    <p:sldId id="2146848311" r:id="rId26"/>
+    <p:sldId id="2146848312" r:id="rId27"/>
+    <p:sldId id="2146848314" r:id="rId28"/>
+    <p:sldId id="2146848313" r:id="rId29"/>
+    <p:sldId id="2146848315" r:id="rId30"/>
   </p:sldIdLst>
   <p:sldSz cx="12192000" cy="6858000"/>
   <p:notesSz cx="6800850" cy="9926638"/>
   <p:custDataLst>
-    <p:tags r:id="rId32"/>
+    <p:tags r:id="rId33"/>
   </p:custDataLst>
   <p:defaultTextStyle>
     <a:defPPr>
@@ -218,7 +219,7 @@
 <file path=ppt/revisionInfo.xml><?xml version="1.0" encoding="utf-8"?>
 <p1510:revInfo xmlns:a="http://schemas.openxmlformats.org/drawingml/2006/main" xmlns:r="http://schemas.openxmlformats.org/officeDocument/2006/relationships" xmlns:p1510="http://schemas.microsoft.com/office/powerpoint/2015/10/main">
   <p1510:revLst>
-    <p1510:client id="{F0E03B4B-CC56-43F1-8F18-BCA697229170}" v="644" dt="2026-04-01T00:13:40.379"/>
+    <p1510:client id="{F0E03B4B-CC56-43F1-8F18-BCA697229170}" v="655" dt="2026-04-01T12:49:00.432"/>
   </p1510:revLst>
 </p1510:revInfo>
 </file>
@@ -228,7 +229,7 @@
   <pc:docChgLst>
     <pc:chgData name="Corbin Ferguson" userId="34a864e2-e65e-4cb2-823c-dc28f73f0e40" providerId="ADAL" clId="{8D2D96CF-1319-4CCC-9EA9-073445628049}"/>
     <pc:docChg chg="undo redo custSel addSld delSld modSld sldOrd modMainMaster">
-      <pc:chgData name="Corbin Ferguson" userId="34a864e2-e65e-4cb2-823c-dc28f73f0e40" providerId="ADAL" clId="{8D2D96CF-1319-4CCC-9EA9-073445628049}" dt="2026-04-01T00:13:56.004" v="10959" actId="14100"/>
+      <pc:chgData name="Corbin Ferguson" userId="34a864e2-e65e-4cb2-823c-dc28f73f0e40" providerId="ADAL" clId="{8D2D96CF-1319-4CCC-9EA9-073445628049}" dt="2026-04-01T13:43:16.991" v="12004" actId="20577"/>
       <pc:docMkLst>
         <pc:docMk/>
       </pc:docMkLst>
@@ -248,7 +249,7 @@
         </pc:spChg>
       </pc:sldChg>
       <pc:sldChg chg="addSp delSp modSp mod modTransition modNotesTx">
-        <pc:chgData name="Corbin Ferguson" userId="34a864e2-e65e-4cb2-823c-dc28f73f0e40" providerId="ADAL" clId="{8D2D96CF-1319-4CCC-9EA9-073445628049}" dt="2026-03-31T15:08:42.956" v="10501" actId="20577"/>
+        <pc:chgData name="Corbin Ferguson" userId="34a864e2-e65e-4cb2-823c-dc28f73f0e40" providerId="ADAL" clId="{8D2D96CF-1319-4CCC-9EA9-073445628049}" dt="2026-04-01T13:33:25.470" v="11752" actId="20577"/>
         <pc:sldMkLst>
           <pc:docMk/>
           <pc:sldMk cId="463964235" sldId="257"/>
@@ -262,7 +263,7 @@
           </ac:spMkLst>
         </pc:spChg>
         <pc:spChg chg="mod">
-          <ac:chgData name="Corbin Ferguson" userId="34a864e2-e65e-4cb2-823c-dc28f73f0e40" providerId="ADAL" clId="{8D2D96CF-1319-4CCC-9EA9-073445628049}" dt="2026-03-31T15:06:41.762" v="10489" actId="20577"/>
+          <ac:chgData name="Corbin Ferguson" userId="34a864e2-e65e-4cb2-823c-dc28f73f0e40" providerId="ADAL" clId="{8D2D96CF-1319-4CCC-9EA9-073445628049}" dt="2026-04-01T13:33:25.470" v="11752" actId="20577"/>
           <ac:spMkLst>
             <pc:docMk/>
             <pc:sldMk cId="463964235" sldId="257"/>
@@ -271,7 +272,7 @@
         </pc:spChg>
       </pc:sldChg>
       <pc:sldChg chg="addSp delSp modSp mod modTransition modClrScheme chgLayout">
-        <pc:chgData name="Corbin Ferguson" userId="34a864e2-e65e-4cb2-823c-dc28f73f0e40" providerId="ADAL" clId="{8D2D96CF-1319-4CCC-9EA9-073445628049}" dt="2026-03-31T19:08:48.793" v="10626" actId="14100"/>
+        <pc:chgData name="Corbin Ferguson" userId="34a864e2-e65e-4cb2-823c-dc28f73f0e40" providerId="ADAL" clId="{8D2D96CF-1319-4CCC-9EA9-073445628049}" dt="2026-04-01T13:43:16.991" v="12004" actId="20577"/>
         <pc:sldMkLst>
           <pc:docMk/>
           <pc:sldMk cId="3766655233" sldId="2146848300"/>
@@ -309,7 +310,7 @@
           </ac:spMkLst>
         </pc:spChg>
         <pc:spChg chg="add del mod">
-          <ac:chgData name="Corbin Ferguson" userId="34a864e2-e65e-4cb2-823c-dc28f73f0e40" providerId="ADAL" clId="{8D2D96CF-1319-4CCC-9EA9-073445628049}" dt="2026-03-31T19:08:19.591" v="10625" actId="20577"/>
+          <ac:chgData name="Corbin Ferguson" userId="34a864e2-e65e-4cb2-823c-dc28f73f0e40" providerId="ADAL" clId="{8D2D96CF-1319-4CCC-9EA9-073445628049}" dt="2026-04-01T13:43:16.991" v="12004" actId="20577"/>
           <ac:spMkLst>
             <pc:docMk/>
             <pc:sldMk cId="3766655233" sldId="2146848300"/>
@@ -325,20 +326,36 @@
           </ac:picMkLst>
         </pc:picChg>
       </pc:sldChg>
-      <pc:sldChg chg="modSp mod modTransition">
-        <pc:chgData name="Corbin Ferguson" userId="34a864e2-e65e-4cb2-823c-dc28f73f0e40" providerId="ADAL" clId="{8D2D96CF-1319-4CCC-9EA9-073445628049}" dt="2026-03-30T15:49:40.296" v="7778"/>
+      <pc:sldChg chg="addSp delSp modSp mod modTransition">
+        <pc:chgData name="Corbin Ferguson" userId="34a864e2-e65e-4cb2-823c-dc28f73f0e40" providerId="ADAL" clId="{8D2D96CF-1319-4CCC-9EA9-073445628049}" dt="2026-04-01T00:27:24.700" v="11010" actId="20577"/>
         <pc:sldMkLst>
           <pc:docMk/>
           <pc:sldMk cId="4050751982" sldId="2146848302"/>
         </pc:sldMkLst>
-        <pc:spChg chg="mod">
-          <ac:chgData name="Corbin Ferguson" userId="34a864e2-e65e-4cb2-823c-dc28f73f0e40" providerId="ADAL" clId="{8D2D96CF-1319-4CCC-9EA9-073445628049}" dt="2026-03-30T12:56:37.173" v="3572" actId="20577"/>
+        <pc:spChg chg="add del mod">
+          <ac:chgData name="Corbin Ferguson" userId="34a864e2-e65e-4cb2-823c-dc28f73f0e40" providerId="ADAL" clId="{8D2D96CF-1319-4CCC-9EA9-073445628049}" dt="2026-04-01T00:27:24.700" v="11010" actId="20577"/>
           <ac:spMkLst>
             <pc:docMk/>
             <pc:sldMk cId="4050751982" sldId="2146848302"/>
             <ac:spMk id="13" creationId="{9ABB78FB-6052-78C4-38A0-9B7AF58E9FCB}"/>
           </ac:spMkLst>
         </pc:spChg>
+        <pc:graphicFrameChg chg="add mod">
+          <ac:chgData name="Corbin Ferguson" userId="34a864e2-e65e-4cb2-823c-dc28f73f0e40" providerId="ADAL" clId="{8D2D96CF-1319-4CCC-9EA9-073445628049}" dt="2026-04-01T00:26:23.506" v="10962"/>
+          <ac:graphicFrameMkLst>
+            <pc:docMk/>
+            <pc:sldMk cId="4050751982" sldId="2146848302"/>
+            <ac:graphicFrameMk id="5" creationId="{580DDE94-C75B-42E1-C4E8-56CB8A2EA67C}"/>
+          </ac:graphicFrameMkLst>
+        </pc:graphicFrameChg>
+        <pc:graphicFrameChg chg="add mod">
+          <ac:chgData name="Corbin Ferguson" userId="34a864e2-e65e-4cb2-823c-dc28f73f0e40" providerId="ADAL" clId="{8D2D96CF-1319-4CCC-9EA9-073445628049}" dt="2026-04-01T00:26:28.217" v="10966"/>
+          <ac:graphicFrameMkLst>
+            <pc:docMk/>
+            <pc:sldMk cId="4050751982" sldId="2146848302"/>
+            <ac:graphicFrameMk id="6" creationId="{8C31B843-7176-FA1D-9832-2B357D524468}"/>
+          </ac:graphicFrameMkLst>
+        </pc:graphicFrameChg>
       </pc:sldChg>
       <pc:sldChg chg="addSp delSp modSp mod modTransition modNotesTx">
         <pc:chgData name="Corbin Ferguson" userId="34a864e2-e65e-4cb2-823c-dc28f73f0e40" providerId="ADAL" clId="{8D2D96CF-1319-4CCC-9EA9-073445628049}" dt="2026-03-31T13:59:16.193" v="9888" actId="20577"/>
@@ -402,7 +419,7 @@
         </pc:spChg>
       </pc:sldChg>
       <pc:sldChg chg="addSp modSp mod ord modTransition modClrScheme chgLayout">
-        <pc:chgData name="Corbin Ferguson" userId="34a864e2-e65e-4cb2-823c-dc28f73f0e40" providerId="ADAL" clId="{8D2D96CF-1319-4CCC-9EA9-073445628049}" dt="2026-03-31T14:28:50.889" v="10467"/>
+        <pc:chgData name="Corbin Ferguson" userId="34a864e2-e65e-4cb2-823c-dc28f73f0e40" providerId="ADAL" clId="{8D2D96CF-1319-4CCC-9EA9-073445628049}" dt="2026-04-01T12:23:09.151" v="11181"/>
         <pc:sldMkLst>
           <pc:docMk/>
           <pc:sldMk cId="765330338" sldId="2146848311"/>
@@ -471,7 +488,7 @@
         </pc:sldMkLst>
       </pc:sldChg>
       <pc:sldChg chg="addSp modSp add mod modTransition">
-        <pc:chgData name="Corbin Ferguson" userId="34a864e2-e65e-4cb2-823c-dc28f73f0e40" providerId="ADAL" clId="{8D2D96CF-1319-4CCC-9EA9-073445628049}" dt="2026-04-01T00:03:48.423" v="10846" actId="20577"/>
+        <pc:chgData name="Corbin Ferguson" userId="34a864e2-e65e-4cb2-823c-dc28f73f0e40" providerId="ADAL" clId="{8D2D96CF-1319-4CCC-9EA9-073445628049}" dt="2026-04-01T13:38:35.973" v="11966" actId="20577"/>
         <pc:sldMkLst>
           <pc:docMk/>
           <pc:sldMk cId="1067535560" sldId="2146848314"/>
@@ -485,7 +502,7 @@
           </ac:spMkLst>
         </pc:spChg>
         <pc:spChg chg="mod">
-          <ac:chgData name="Corbin Ferguson" userId="34a864e2-e65e-4cb2-823c-dc28f73f0e40" providerId="ADAL" clId="{8D2D96CF-1319-4CCC-9EA9-073445628049}" dt="2026-04-01T00:03:48.423" v="10846" actId="20577"/>
+          <ac:chgData name="Corbin Ferguson" userId="34a864e2-e65e-4cb2-823c-dc28f73f0e40" providerId="ADAL" clId="{8D2D96CF-1319-4CCC-9EA9-073445628049}" dt="2026-04-01T13:38:35.973" v="11966" actId="20577"/>
           <ac:spMkLst>
             <pc:docMk/>
             <pc:sldMk cId="1067535560" sldId="2146848314"/>
@@ -845,7 +862,7 @@
         </pc:picChg>
       </pc:sldChg>
       <pc:sldChg chg="addSp delSp modSp new mod modTransition modClrScheme chgLayout modNotesTx">
-        <pc:chgData name="Corbin Ferguson" userId="34a864e2-e65e-4cb2-823c-dc28f73f0e40" providerId="ADAL" clId="{8D2D96CF-1319-4CCC-9EA9-073445628049}" dt="2026-03-31T19:17:40.468" v="10635" actId="20577"/>
+        <pc:chgData name="Corbin Ferguson" userId="34a864e2-e65e-4cb2-823c-dc28f73f0e40" providerId="ADAL" clId="{8D2D96CF-1319-4CCC-9EA9-073445628049}" dt="2026-04-01T12:19:08.110" v="11021" actId="20577"/>
         <pc:sldMkLst>
           <pc:docMk/>
           <pc:sldMk cId="3366771104" sldId="2146848333"/>
@@ -899,8 +916,8 @@
           </ac:picMkLst>
         </pc:picChg>
       </pc:sldChg>
-      <pc:sldChg chg="addSp delSp modSp new mod ord modTransition">
-        <pc:chgData name="Corbin Ferguson" userId="34a864e2-e65e-4cb2-823c-dc28f73f0e40" providerId="ADAL" clId="{8D2D96CF-1319-4CCC-9EA9-073445628049}" dt="2026-04-01T00:02:00.229" v="10668" actId="20577"/>
+      <pc:sldChg chg="addSp delSp modSp new mod ord modTransition modNotesTx">
+        <pc:chgData name="Corbin Ferguson" userId="34a864e2-e65e-4cb2-823c-dc28f73f0e40" providerId="ADAL" clId="{8D2D96CF-1319-4CCC-9EA9-073445628049}" dt="2026-04-01T13:36:05.163" v="11894" actId="20577"/>
         <pc:sldMkLst>
           <pc:docMk/>
           <pc:sldMk cId="1111137208" sldId="2146848334"/>
@@ -914,7 +931,7 @@
           </ac:spMkLst>
         </pc:spChg>
         <pc:spChg chg="mod">
-          <ac:chgData name="Corbin Ferguson" userId="34a864e2-e65e-4cb2-823c-dc28f73f0e40" providerId="ADAL" clId="{8D2D96CF-1319-4CCC-9EA9-073445628049}" dt="2026-04-01T00:02:00.229" v="10668" actId="20577"/>
+          <ac:chgData name="Corbin Ferguson" userId="34a864e2-e65e-4cb2-823c-dc28f73f0e40" providerId="ADAL" clId="{8D2D96CF-1319-4CCC-9EA9-073445628049}" dt="2026-04-01T13:36:05.163" v="11894" actId="20577"/>
           <ac:spMkLst>
             <pc:docMk/>
             <pc:sldMk cId="1111137208" sldId="2146848334"/>
@@ -979,7 +996,7 @@
         </pc:picChg>
       </pc:sldChg>
       <pc:sldChg chg="addSp delSp modSp new mod modTransition">
-        <pc:chgData name="Corbin Ferguson" userId="34a864e2-e65e-4cb2-823c-dc28f73f0e40" providerId="ADAL" clId="{8D2D96CF-1319-4CCC-9EA9-073445628049}" dt="2026-03-31T20:35:44.222" v="10649" actId="20577"/>
+        <pc:chgData name="Corbin Ferguson" userId="34a864e2-e65e-4cb2-823c-dc28f73f0e40" providerId="ADAL" clId="{8D2D96CF-1319-4CCC-9EA9-073445628049}" dt="2026-04-01T13:35:30.739" v="11838" actId="20577"/>
         <pc:sldMkLst>
           <pc:docMk/>
           <pc:sldMk cId="1311398929" sldId="2146848335"/>
@@ -1057,7 +1074,7 @@
           </ac:spMkLst>
         </pc:spChg>
         <pc:spChg chg="add mod">
-          <ac:chgData name="Corbin Ferguson" userId="34a864e2-e65e-4cb2-823c-dc28f73f0e40" providerId="ADAL" clId="{8D2D96CF-1319-4CCC-9EA9-073445628049}" dt="2026-03-31T20:35:44.222" v="10649" actId="20577"/>
+          <ac:chgData name="Corbin Ferguson" userId="34a864e2-e65e-4cb2-823c-dc28f73f0e40" providerId="ADAL" clId="{8D2D96CF-1319-4CCC-9EA9-073445628049}" dt="2026-04-01T13:35:30.739" v="11838" actId="20577"/>
           <ac:spMkLst>
             <pc:docMk/>
             <pc:sldMk cId="1311398929" sldId="2146848335"/>
@@ -1098,7 +1115,7 @@
         </pc:picChg>
       </pc:sldChg>
       <pc:sldChg chg="addSp delSp modSp new mod modTransition">
-        <pc:chgData name="Corbin Ferguson" userId="34a864e2-e65e-4cb2-823c-dc28f73f0e40" providerId="ADAL" clId="{8D2D96CF-1319-4CCC-9EA9-073445628049}" dt="2026-03-31T15:33:43.051" v="10516" actId="26606"/>
+        <pc:chgData name="Corbin Ferguson" userId="34a864e2-e65e-4cb2-823c-dc28f73f0e40" providerId="ADAL" clId="{8D2D96CF-1319-4CCC-9EA9-073445628049}" dt="2026-04-01T13:35:51.644" v="11892" actId="20577"/>
         <pc:sldMkLst>
           <pc:docMk/>
           <pc:sldMk cId="156436412" sldId="2146848336"/>
@@ -1152,7 +1169,7 @@
           </ac:spMkLst>
         </pc:spChg>
         <pc:spChg chg="add mod">
-          <ac:chgData name="Corbin Ferguson" userId="34a864e2-e65e-4cb2-823c-dc28f73f0e40" providerId="ADAL" clId="{8D2D96CF-1319-4CCC-9EA9-073445628049}" dt="2026-03-31T15:33:43.051" v="10516" actId="26606"/>
+          <ac:chgData name="Corbin Ferguson" userId="34a864e2-e65e-4cb2-823c-dc28f73f0e40" providerId="ADAL" clId="{8D2D96CF-1319-4CCC-9EA9-073445628049}" dt="2026-04-01T13:35:51.644" v="11892" actId="20577"/>
           <ac:spMkLst>
             <pc:docMk/>
             <pc:sldMk cId="156436412" sldId="2146848336"/>
@@ -1175,6 +1192,37 @@
             <ac:picMk id="11" creationId="{B46A16E4-8866-CF99-290D-B3D2521747BE}"/>
           </ac:picMkLst>
         </pc:picChg>
+      </pc:sldChg>
+      <pc:sldChg chg="addSp delSp modSp new mod">
+        <pc:chgData name="Corbin Ferguson" userId="34a864e2-e65e-4cb2-823c-dc28f73f0e40" providerId="ADAL" clId="{8D2D96CF-1319-4CCC-9EA9-073445628049}" dt="2026-04-01T13:03:42.960" v="11429" actId="20577"/>
+        <pc:sldMkLst>
+          <pc:docMk/>
+          <pc:sldMk cId="1769686303" sldId="2146848337"/>
+        </pc:sldMkLst>
+        <pc:spChg chg="mod">
+          <ac:chgData name="Corbin Ferguson" userId="34a864e2-e65e-4cb2-823c-dc28f73f0e40" providerId="ADAL" clId="{8D2D96CF-1319-4CCC-9EA9-073445628049}" dt="2026-04-01T12:50:17.286" v="11267" actId="20577"/>
+          <ac:spMkLst>
+            <pc:docMk/>
+            <pc:sldMk cId="1769686303" sldId="2146848337"/>
+            <ac:spMk id="2" creationId="{FC0F7EBC-D651-293F-1FD9-D7B38E1FFCE0}"/>
+          </ac:spMkLst>
+        </pc:spChg>
+        <pc:spChg chg="add del mod">
+          <ac:chgData name="Corbin Ferguson" userId="34a864e2-e65e-4cb2-823c-dc28f73f0e40" providerId="ADAL" clId="{8D2D96CF-1319-4CCC-9EA9-073445628049}" dt="2026-04-01T13:03:42.960" v="11429" actId="20577"/>
+          <ac:spMkLst>
+            <pc:docMk/>
+            <pc:sldMk cId="1769686303" sldId="2146848337"/>
+            <ac:spMk id="3" creationId="{7193BD63-63E1-A487-4179-CEB7CD1BA869}"/>
+          </ac:spMkLst>
+        </pc:spChg>
+        <pc:graphicFrameChg chg="add mod">
+          <ac:chgData name="Corbin Ferguson" userId="34a864e2-e65e-4cb2-823c-dc28f73f0e40" providerId="ADAL" clId="{8D2D96CF-1319-4CCC-9EA9-073445628049}" dt="2026-04-01T12:49:00.418" v="11227"/>
+          <ac:graphicFrameMkLst>
+            <pc:docMk/>
+            <pc:sldMk cId="1769686303" sldId="2146848337"/>
+            <ac:graphicFrameMk id="7" creationId="{0828979C-2A61-2303-3369-0F7E40D0A6A8}"/>
+          </ac:graphicFrameMkLst>
+        </pc:graphicFrameChg>
       </pc:sldChg>
       <pc:sldMasterChg chg="modTransition modSldLayout">
         <pc:chgData name="Corbin Ferguson" userId="34a864e2-e65e-4cb2-823c-dc28f73f0e40" providerId="ADAL" clId="{8D2D96CF-1319-4CCC-9EA9-073445628049}" dt="2026-03-30T15:49:29.956" v="7776"/>
@@ -2219,7 +2267,7 @@
               <a:defRPr/>
             </a:pPr>
             <a:r>
-              <a:rPr lang="en-US" sz="1200" b="0" i="1" kern="1200" dirty="0">
+              <a:rPr lang="en-US" sz="1200" b="0" i="0" kern="1200" dirty="0">
                 <a:solidFill>
                   <a:schemeClr val="tx1"/>
                 </a:solidFill>
@@ -2230,15 +2278,6 @@
               </a:rPr>
               <a:t>is Rockwell Automation’s main engineering and programming environment for controllers.</a:t>
             </a:r>
-            <a:endParaRPr lang="en-US" sz="1200" b="0" i="0" kern="1200" dirty="0">
-              <a:solidFill>
-                <a:schemeClr val="tx1"/>
-              </a:solidFill>
-              <a:effectLst/>
-              <a:latin typeface="E+H Serif" pitchFamily="18" charset="0"/>
-              <a:ea typeface="+mn-ea"/>
-              <a:cs typeface="+mn-cs"/>
-            </a:endParaRPr>
           </a:p>
           <a:p>
             <a:pPr marL="0" marR="0" lvl="0" indent="0" algn="l" defTabSz="914400" rtl="0" eaLnBrk="1" fontAlgn="base" latinLnBrk="0" hangingPunct="1">
@@ -2259,18 +2298,6 @@
               <a:defRPr/>
             </a:pPr>
             <a:r>
-              <a:rPr lang="en-US" sz="1200" b="0" i="1" kern="1200" dirty="0">
-                <a:solidFill>
-                  <a:schemeClr val="tx1"/>
-                </a:solidFill>
-                <a:effectLst/>
-                <a:latin typeface="E+H Serif" pitchFamily="18" charset="0"/>
-                <a:ea typeface="+mn-ea"/>
-                <a:cs typeface="+mn-cs"/>
-              </a:rPr>
-              <a:t>It provides a single, scalable platform to configure, program, and maintain control systems within Rockwell’s Integrated Architecture.</a:t>
-            </a:r>
-            <a:r>
               <a:rPr lang="en-US" sz="1200" b="0" i="0" kern="1200" dirty="0">
                 <a:solidFill>
                   <a:schemeClr val="tx1"/>
@@ -2280,31 +2307,7 @@
                 <a:ea typeface="+mn-ea"/>
                 <a:cs typeface="+mn-cs"/>
               </a:rPr>
-              <a:t> </a:t>
-            </a:r>
-            <a:r>
-              <a:rPr lang="en-US" sz="1200" b="0" i="1" kern="1200" dirty="0">
-                <a:solidFill>
-                  <a:schemeClr val="tx1"/>
-                </a:solidFill>
-                <a:effectLst/>
-                <a:latin typeface="E+H Serif" pitchFamily="18" charset="0"/>
-                <a:ea typeface="+mn-ea"/>
-                <a:cs typeface="+mn-cs"/>
-              </a:rPr>
-              <a:t>The software supports multiple programming languages—Ladder, Structured Text, Function Block, and Sequential Function Chart—within one unified design environment.</a:t>
-            </a:r>
-            <a:r>
-              <a:rPr lang="en-US" sz="1200" b="0" i="0" kern="1200" dirty="0">
-                <a:solidFill>
-                  <a:schemeClr val="tx1"/>
-                </a:solidFill>
-                <a:effectLst/>
-                <a:latin typeface="E+H Serif" pitchFamily="18" charset="0"/>
-                <a:ea typeface="+mn-ea"/>
-                <a:cs typeface="+mn-cs"/>
-              </a:rPr>
-              <a:t> </a:t>
+              <a:t>It provides a single, scalable platform to configure, program, and maintain control systems within Rockwell’s Integrated Architecture. The software supports multiple programming languages—Ladder, Structured Text, Function Block, and Sequential Function Chart—within one unified design environment. </a:t>
             </a:r>
             <a:endParaRPr lang="en-US" sz="1200" b="0" i="0" u="none" strike="noStrike" kern="1200" dirty="0">
               <a:solidFill>
@@ -2335,7 +2338,7 @@
               <a:defRPr/>
             </a:pPr>
             <a:r>
-              <a:rPr lang="en-US" sz="1200" b="0" i="1" kern="1200" dirty="0">
+              <a:rPr lang="en-US" sz="1200" b="0" i="0" kern="1200" dirty="0">
                 <a:solidFill>
                   <a:schemeClr val="tx1"/>
                 </a:solidFill>
@@ -2346,18 +2349,9 @@
               </a:rPr>
               <a:t>Engineers use it to build I/O configurations, manage tags, develop logic routines, and integrate Rockwell hardware.</a:t>
             </a:r>
-            <a:endParaRPr lang="en-US" sz="1200" b="0" i="0" kern="1200" dirty="0">
-              <a:solidFill>
-                <a:schemeClr val="tx1"/>
-              </a:solidFill>
-              <a:effectLst/>
-              <a:latin typeface="E+H Serif" pitchFamily="18" charset="0"/>
-              <a:ea typeface="+mn-ea"/>
-              <a:cs typeface="+mn-cs"/>
-            </a:endParaRPr>
-          </a:p>
-          <a:p>
-            <a:endParaRPr lang="en-US" dirty="0"/>
+          </a:p>
+          <a:p>
+            <a:endParaRPr lang="en-US" i="0" dirty="0"/>
           </a:p>
         </p:txBody>
       </p:sp>
@@ -2470,7 +2464,18 @@
           <a:bodyPr/>
           <a:lstStyle/>
           <a:p>
-            <a:endParaRPr lang="en-US" dirty="0"/>
+            <a:r>
+              <a:rPr lang="en-US" dirty="0"/>
+              <a:t>This is the window that the user sees. It is a default </a:t>
+            </a:r>
+            <a:r>
+              <a:rPr lang="en-US" dirty="0" err="1"/>
+              <a:t>MessageBox</a:t>
+            </a:r>
+            <a:r>
+              <a:rPr lang="en-US" dirty="0"/>
+              <a:t> popup that is windows controls, created with the default Forms class</a:t>
+            </a:r>
           </a:p>
         </p:txBody>
       </p:sp>
@@ -2524,7 +2529,7 @@
     </p:spTree>
     <p:extLst>
       <p:ext uri="{BB962C8B-B14F-4D97-AF65-F5344CB8AC3E}">
-        <p14:creationId xmlns:p14="http://schemas.microsoft.com/office/powerpoint/2010/main" val="1913580739"/>
+        <p14:creationId xmlns:p14="http://schemas.microsoft.com/office/powerpoint/2010/main" val="3825567377"/>
       </p:ext>
     </p:extLst>
   </p:cSld>
@@ -2583,10 +2588,7 @@
           <a:bodyPr/>
           <a:lstStyle/>
           <a:p>
-            <a:r>
-              <a:rPr lang="en-US" dirty="0"/>
-              <a:t>Once the user confirms file creation, control returns to Execute</a:t>
-            </a:r>
+            <a:endParaRPr lang="en-US" dirty="0"/>
           </a:p>
         </p:txBody>
       </p:sp>
@@ -2640,7 +2642,7 @@
     </p:spTree>
     <p:extLst>
       <p:ext uri="{BB962C8B-B14F-4D97-AF65-F5344CB8AC3E}">
-        <p14:creationId xmlns:p14="http://schemas.microsoft.com/office/powerpoint/2010/main" val="3256437804"/>
+        <p14:creationId xmlns:p14="http://schemas.microsoft.com/office/powerpoint/2010/main" val="1913580739"/>
       </p:ext>
     </p:extLst>
   </p:cSld>
@@ -2701,7 +2703,7 @@
           <a:p>
             <a:r>
               <a:rPr lang="en-US" dirty="0"/>
-              <a:t>The same as previously shown, a popup appears so that the user knows there was no error during operation, if an error occurs during any point of operation, the same structured window appears with the text replaced with the error message.</a:t>
+              <a:t>Once the user confirms file creation, control returns to Execute</a:t>
             </a:r>
           </a:p>
         </p:txBody>
@@ -2756,7 +2758,7 @@
     </p:spTree>
     <p:extLst>
       <p:ext uri="{BB962C8B-B14F-4D97-AF65-F5344CB8AC3E}">
-        <p14:creationId xmlns:p14="http://schemas.microsoft.com/office/powerpoint/2010/main" val="584390718"/>
+        <p14:creationId xmlns:p14="http://schemas.microsoft.com/office/powerpoint/2010/main" val="3256437804"/>
       </p:ext>
     </p:extLst>
   </p:cSld>
@@ -2817,6 +2819,122 @@
           <a:p>
             <a:r>
               <a:rPr lang="en-US" dirty="0"/>
+              <a:t>The same as previously shown, a popup appears so that the user knows there was no error during operation, if an error occurs during any point of operation, the same structured window appears with the text replaced with the error message.</a:t>
+            </a:r>
+          </a:p>
+        </p:txBody>
+      </p:sp>
+      <p:sp>
+        <p:nvSpPr>
+          <p:cNvPr id="4" name="Header Placeholder 3"/>
+          <p:cNvSpPr>
+            <a:spLocks noGrp="1"/>
+          </p:cNvSpPr>
+          <p:nvPr>
+            <p:ph type="hdr" sz="quarter"/>
+          </p:nvPr>
+        </p:nvSpPr>
+        <p:spPr/>
+        <p:txBody>
+          <a:bodyPr/>
+          <a:lstStyle/>
+          <a:p>
+            <a:r>
+              <a:rPr lang="en-US"/>
+              <a:t>L5X Automation Build Tool</a:t>
+            </a:r>
+            <a:endParaRPr lang="en-US" dirty="0"/>
+          </a:p>
+        </p:txBody>
+      </p:sp>
+      <p:sp>
+        <p:nvSpPr>
+          <p:cNvPr id="5" name="Slide Number Placeholder 4"/>
+          <p:cNvSpPr>
+            <a:spLocks noGrp="1"/>
+          </p:cNvSpPr>
+          <p:nvPr>
+            <p:ph type="sldNum" sz="quarter" idx="5"/>
+          </p:nvPr>
+        </p:nvSpPr>
+        <p:spPr/>
+        <p:txBody>
+          <a:bodyPr/>
+          <a:lstStyle/>
+          <a:p>
+            <a:fld id="{C6E303EA-09C3-495B-8565-6524796C22FB}" type="slidenum">
+              <a:rPr lang="en-US" noProof="0" smtClean="0"/>
+              <a:pPr/>
+              <a:t>18</a:t>
+            </a:fld>
+            <a:endParaRPr lang="en-US" noProof="0" dirty="0"/>
+          </a:p>
+        </p:txBody>
+      </p:sp>
+    </p:spTree>
+    <p:extLst>
+      <p:ext uri="{BB962C8B-B14F-4D97-AF65-F5344CB8AC3E}">
+        <p14:creationId xmlns:p14="http://schemas.microsoft.com/office/powerpoint/2010/main" val="584390718"/>
+      </p:ext>
+    </p:extLst>
+  </p:cSld>
+  <p:clrMapOvr>
+    <a:masterClrMapping/>
+  </p:clrMapOvr>
+</p:notes>
+</file>
+
+<file path=ppt/notesSlides/notesSlide14.xml><?xml version="1.0" encoding="utf-8"?>
+<p:notes xmlns:a="http://schemas.openxmlformats.org/drawingml/2006/main" xmlns:r="http://schemas.openxmlformats.org/officeDocument/2006/relationships" xmlns:p="http://schemas.openxmlformats.org/presentationml/2006/main">
+  <p:cSld>
+    <p:spTree>
+      <p:nvGrpSpPr>
+        <p:cNvPr id="1" name=""/>
+        <p:cNvGrpSpPr/>
+        <p:nvPr/>
+      </p:nvGrpSpPr>
+      <p:grpSpPr>
+        <a:xfrm>
+          <a:off x="0" y="0"/>
+          <a:ext cx="0" cy="0"/>
+          <a:chOff x="0" y="0"/>
+          <a:chExt cx="0" cy="0"/>
+        </a:xfrm>
+      </p:grpSpPr>
+      <p:sp>
+        <p:nvSpPr>
+          <p:cNvPr id="2" name="Slide Image Placeholder 1"/>
+          <p:cNvSpPr>
+            <a:spLocks noGrp="1" noRot="1" noChangeAspect="1"/>
+          </p:cNvSpPr>
+          <p:nvPr>
+            <p:ph type="sldImg"/>
+          </p:nvPr>
+        </p:nvSpPr>
+        <p:spPr>
+          <a:xfrm>
+            <a:off x="295275" y="3835400"/>
+            <a:ext cx="6224588" cy="3500438"/>
+          </a:xfrm>
+        </p:spPr>
+      </p:sp>
+      <p:sp>
+        <p:nvSpPr>
+          <p:cNvPr id="3" name="Notes Placeholder 2"/>
+          <p:cNvSpPr>
+            <a:spLocks noGrp="1"/>
+          </p:cNvSpPr>
+          <p:nvPr>
+            <p:ph type="body" idx="1"/>
+          </p:nvPr>
+        </p:nvSpPr>
+        <p:spPr/>
+        <p:txBody>
+          <a:bodyPr/>
+          <a:lstStyle/>
+          <a:p>
+            <a:r>
+              <a:rPr lang="en-US" dirty="0"/>
               <a:t>Within Execute: Create, delete, handle clashes, Import, load file, modify, new, save, set attributes, validate</a:t>
             </a:r>
           </a:p>
@@ -2881,7 +2999,7 @@
             <a:fld id="{C6E303EA-09C3-495B-8565-6524796C22FB}" type="slidenum">
               <a:rPr lang="en-US" noProof="0" smtClean="0"/>
               <a:pPr/>
-              <a:t>18</a:t>
+              <a:t>19</a:t>
             </a:fld>
             <a:endParaRPr lang="en-US" noProof="0" dirty="0"/>
           </a:p>
@@ -2891,6 +3009,114 @@
     <p:extLst>
       <p:ext uri="{BB962C8B-B14F-4D97-AF65-F5344CB8AC3E}">
         <p14:creationId xmlns:p14="http://schemas.microsoft.com/office/powerpoint/2010/main" val="931058154"/>
+      </p:ext>
+    </p:extLst>
+  </p:cSld>
+  <p:clrMapOvr>
+    <a:masterClrMapping/>
+  </p:clrMapOvr>
+</p:notes>
+</file>
+
+<file path=ppt/notesSlides/notesSlide15.xml><?xml version="1.0" encoding="utf-8"?>
+<p:notes xmlns:a="http://schemas.openxmlformats.org/drawingml/2006/main" xmlns:r="http://schemas.openxmlformats.org/officeDocument/2006/relationships" xmlns:p="http://schemas.openxmlformats.org/presentationml/2006/main">
+  <p:cSld>
+    <p:spTree>
+      <p:nvGrpSpPr>
+        <p:cNvPr id="1" name=""/>
+        <p:cNvGrpSpPr/>
+        <p:nvPr/>
+      </p:nvGrpSpPr>
+      <p:grpSpPr>
+        <a:xfrm>
+          <a:off x="0" y="0"/>
+          <a:ext cx="0" cy="0"/>
+          <a:chOff x="0" y="0"/>
+          <a:chExt cx="0" cy="0"/>
+        </a:xfrm>
+      </p:grpSpPr>
+      <p:sp>
+        <p:nvSpPr>
+          <p:cNvPr id="2" name="Slide Image Placeholder 1"/>
+          <p:cNvSpPr>
+            <a:spLocks noGrp="1" noRot="1" noChangeAspect="1"/>
+          </p:cNvSpPr>
+          <p:nvPr>
+            <p:ph type="sldImg"/>
+          </p:nvPr>
+        </p:nvSpPr>
+        <p:spPr/>
+      </p:sp>
+      <p:sp>
+        <p:nvSpPr>
+          <p:cNvPr id="3" name="Notes Placeholder 2"/>
+          <p:cNvSpPr>
+            <a:spLocks noGrp="1"/>
+          </p:cNvSpPr>
+          <p:nvPr>
+            <p:ph type="body" idx="1"/>
+          </p:nvPr>
+        </p:nvSpPr>
+        <p:spPr/>
+        <p:txBody>
+          <a:bodyPr/>
+          <a:lstStyle/>
+          <a:p>
+            <a:endParaRPr lang="en-US" dirty="0"/>
+          </a:p>
+        </p:txBody>
+      </p:sp>
+      <p:sp>
+        <p:nvSpPr>
+          <p:cNvPr id="4" name="Header Placeholder 3"/>
+          <p:cNvSpPr>
+            <a:spLocks noGrp="1"/>
+          </p:cNvSpPr>
+          <p:nvPr>
+            <p:ph type="hdr" sz="quarter"/>
+          </p:nvPr>
+        </p:nvSpPr>
+        <p:spPr/>
+        <p:txBody>
+          <a:bodyPr/>
+          <a:lstStyle/>
+          <a:p>
+            <a:r>
+              <a:rPr lang="en-US"/>
+              <a:t>L5X Automation Build Tool</a:t>
+            </a:r>
+            <a:endParaRPr lang="en-US" dirty="0"/>
+          </a:p>
+        </p:txBody>
+      </p:sp>
+      <p:sp>
+        <p:nvSpPr>
+          <p:cNvPr id="5" name="Slide Number Placeholder 4"/>
+          <p:cNvSpPr>
+            <a:spLocks noGrp="1"/>
+          </p:cNvSpPr>
+          <p:nvPr>
+            <p:ph type="sldNum" sz="quarter" idx="5"/>
+          </p:nvPr>
+        </p:nvSpPr>
+        <p:spPr/>
+        <p:txBody>
+          <a:bodyPr/>
+          <a:lstStyle/>
+          <a:p>
+            <a:fld id="{C6E303EA-09C3-495B-8565-6524796C22FB}" type="slidenum">
+              <a:rPr lang="en-US" noProof="0" smtClean="0"/>
+              <a:pPr/>
+              <a:t>21</a:t>
+            </a:fld>
+            <a:endParaRPr lang="en-US" noProof="0" dirty="0"/>
+          </a:p>
+        </p:txBody>
+      </p:sp>
+    </p:spTree>
+    <p:extLst>
+      <p:ext uri="{BB962C8B-B14F-4D97-AF65-F5344CB8AC3E}">
+        <p14:creationId xmlns:p14="http://schemas.microsoft.com/office/powerpoint/2010/main" val="2844339762"/>
       </p:ext>
     </p:extLst>
   </p:cSld>
@@ -3293,7 +3519,7 @@
           <a:p>
             <a:r>
               <a:rPr lang="en-US" dirty="0"/>
-              <a:t>The system was designed as a 3-tiered architecture. However, this design was largely incidental, and the system was not so much designed from the start with that in mind so much as it grew to reflect that as development went on. A 3 tiered system naturally handles the necessary interactions that the application performs with external elements, while keeping the core logic abstracted away from those external elements.</a:t>
+              <a:t>The system was designed as a 3-tiered architecture. However, this design was incidental, and the system was not so much designed from the start with that in mind so much as it grew to reflect that as development went on. A 3 tiered system naturally handles the necessary interactions that the application performs with external elements, while keeping the core logic abstracted away from those external elements.</a:t>
             </a:r>
           </a:p>
         </p:txBody>
@@ -3339,7 +3565,7 @@
             <a:fld id="{C6E303EA-09C3-495B-8565-6524796C22FB}" type="slidenum">
               <a:rPr lang="en-US" noProof="0" smtClean="0"/>
               <a:pPr/>
-              <a:t>6</a:t>
+              <a:t>7</a:t>
             </a:fld>
             <a:endParaRPr lang="en-US" noProof="0" dirty="0"/>
           </a:p>
@@ -3409,13 +3635,13 @@
           <a:p>
             <a:r>
               <a:rPr lang="en-US" dirty="0"/>
-              <a:t>This is the entire flowchart for all user interactions in the application. However, due to the complexity we will focus on one sequence(New File). </a:t>
-            </a:r>
-          </a:p>
-          <a:p>
-            <a:r>
-              <a:rPr lang="en-US" dirty="0"/>
-              <a:t>We start with the “Main menu” that is the action select window.</a:t>
+              <a:t>Early design had tightly coupled UI and Logic</a:t>
+            </a:r>
+          </a:p>
+          <a:p>
+            <a:r>
+              <a:rPr lang="en-US" dirty="0"/>
+              <a:t>Started because automated testing tools required interfaces to implement unit tests</a:t>
             </a:r>
           </a:p>
         </p:txBody>
@@ -3470,7 +3696,7 @@
     </p:spTree>
     <p:extLst>
       <p:ext uri="{BB962C8B-B14F-4D97-AF65-F5344CB8AC3E}">
-        <p14:creationId xmlns:p14="http://schemas.microsoft.com/office/powerpoint/2010/main" val="1408680808"/>
+        <p14:creationId xmlns:p14="http://schemas.microsoft.com/office/powerpoint/2010/main" val="3403276216"/>
       </p:ext>
     </p:extLst>
   </p:cSld>
@@ -3531,7 +3757,13 @@
           <a:p>
             <a:r>
               <a:rPr lang="en-US" dirty="0"/>
-              <a:t>The action select window presents the user with all the options that they can take, each press follows a sequence as seen in the initial GUI flowchart. We will follow the new file sequence, to overwrite the existing file being loaded, and create a new blank file. Because of templating, the default(and new) file is not a blank xml but instead a template of a file with no elements.</a:t>
+              <a:t>This is the entire flowchart for all user interactions in the application. However, due to the complexity we will focus on one sequence(New File). </a:t>
+            </a:r>
+          </a:p>
+          <a:p>
+            <a:r>
+              <a:rPr lang="en-US" dirty="0"/>
+              <a:t>We start with the “Main menu” that is the action select window.</a:t>
             </a:r>
           </a:p>
         </p:txBody>
@@ -3586,7 +3818,7 @@
     </p:spTree>
     <p:extLst>
       <p:ext uri="{BB962C8B-B14F-4D97-AF65-F5344CB8AC3E}">
-        <p14:creationId xmlns:p14="http://schemas.microsoft.com/office/powerpoint/2010/main" val="544452193"/>
+        <p14:creationId xmlns:p14="http://schemas.microsoft.com/office/powerpoint/2010/main" val="1408680808"/>
       </p:ext>
     </p:extLst>
   </p:cSld>
@@ -3647,7 +3879,7 @@
           <a:p>
             <a:r>
               <a:rPr lang="en-US" dirty="0"/>
-              <a:t>Shown in the GUI diagram below is the specific segment the code is currently waiting on, it will stay here until a user button press, and either move to a confirmation popup, or abort the sequence and return to the Action Select window</a:t>
+              <a:t>The action select window presents the user with all the options that they can take, each press follows a sequence as seen in the initial GUI flowchart. We will follow the new file sequence, to overwrite the existing file being loaded, and create a new blank file. Because of templating, the default(and new) file is not a blank xml but instead a template of a file with no elements.</a:t>
             </a:r>
           </a:p>
         </p:txBody>
@@ -3702,7 +3934,7 @@
     </p:spTree>
     <p:extLst>
       <p:ext uri="{BB962C8B-B14F-4D97-AF65-F5344CB8AC3E}">
-        <p14:creationId xmlns:p14="http://schemas.microsoft.com/office/powerpoint/2010/main" val="1905324723"/>
+        <p14:creationId xmlns:p14="http://schemas.microsoft.com/office/powerpoint/2010/main" val="544452193"/>
       </p:ext>
     </p:extLst>
   </p:cSld>
@@ -3763,36 +3995,7 @@
           <a:p>
             <a:r>
               <a:rPr lang="en-US" dirty="0"/>
-              <a:t>Shown above is the sequence after the user presses the New File button. </a:t>
-            </a:r>
-          </a:p>
-          <a:p>
-            <a:r>
-              <a:rPr lang="en-US" dirty="0"/>
-              <a:t>Standard to all sequences, when </a:t>
-            </a:r>
-            <a:r>
-              <a:rPr lang="en-US" dirty="0" err="1"/>
-              <a:t>actionSelect</a:t>
-            </a:r>
-            <a:r>
-              <a:rPr lang="en-US" dirty="0"/>
-              <a:t> detects a button press event, it calls the associated Execute function for that action. That Execute function then handles whatever internal actions it needs to before utilizing the </a:t>
-            </a:r>
-            <a:r>
-              <a:rPr lang="en-US" dirty="0" err="1"/>
-              <a:t>MessageService</a:t>
-            </a:r>
-            <a:r>
-              <a:rPr lang="en-US" dirty="0"/>
-              <a:t> class to prompt the user for inputs or action clarifications. In the functions that interact with elements this is often a type selection then a specific item selection.</a:t>
-            </a:r>
-            <a:br>
-              <a:rPr lang="en-US" dirty="0"/>
-            </a:br>
-            <a:r>
-              <a:rPr lang="en-US" dirty="0"/>
-              <a:t>It then presents the window that needs the input, and the application waits for the user to press the input.</a:t>
+              <a:t>Shown in the GUI diagram below is the specific segment the code is currently waiting on, it will stay here until a user button press, and either move to a confirmation popup, or abort the sequence and return to the Action Select window</a:t>
             </a:r>
           </a:p>
         </p:txBody>
@@ -3847,7 +4050,7 @@
     </p:spTree>
     <p:extLst>
       <p:ext uri="{BB962C8B-B14F-4D97-AF65-F5344CB8AC3E}">
-        <p14:creationId xmlns:p14="http://schemas.microsoft.com/office/powerpoint/2010/main" val="173117514"/>
+        <p14:creationId xmlns:p14="http://schemas.microsoft.com/office/powerpoint/2010/main" val="1905324723"/>
       </p:ext>
     </p:extLst>
   </p:cSld>
@@ -3908,15 +4111,36 @@
           <a:p>
             <a:r>
               <a:rPr lang="en-US" dirty="0"/>
-              <a:t>This is the window that the user sees. It is a default </a:t>
+              <a:t>Shown above is the sequence after the user presses the New File button. </a:t>
+            </a:r>
+          </a:p>
+          <a:p>
+            <a:r>
+              <a:rPr lang="en-US" dirty="0"/>
+              <a:t>Standard to all sequences, when </a:t>
             </a:r>
             <a:r>
               <a:rPr lang="en-US" dirty="0" err="1"/>
-              <a:t>MessageBox</a:t>
-            </a:r>
-            <a:r>
-              <a:rPr lang="en-US" dirty="0"/>
-              <a:t> popup that is windows controls, created with the default Forms class</a:t>
+              <a:t>actionSelect</a:t>
+            </a:r>
+            <a:r>
+              <a:rPr lang="en-US" dirty="0"/>
+              <a:t> detects a button press event, it calls the associated Execute function for that action. That Execute function then handles whatever internal actions it needs to before utilizing the </a:t>
+            </a:r>
+            <a:r>
+              <a:rPr lang="en-US" dirty="0" err="1"/>
+              <a:t>MessageService</a:t>
+            </a:r>
+            <a:r>
+              <a:rPr lang="en-US" dirty="0"/>
+              <a:t> class to prompt the user for inputs or action clarifications. In the functions that interact with elements this is often a type selection then a specific item selection.</a:t>
+            </a:r>
+            <a:br>
+              <a:rPr lang="en-US" dirty="0"/>
+            </a:br>
+            <a:r>
+              <a:rPr lang="en-US" dirty="0"/>
+              <a:t>It then presents the window that needs the input, and the application waits for the user to press the input.</a:t>
             </a:r>
           </a:p>
         </p:txBody>
@@ -3971,7 +4195,7 @@
     </p:spTree>
     <p:extLst>
       <p:ext uri="{BB962C8B-B14F-4D97-AF65-F5344CB8AC3E}">
-        <p14:creationId xmlns:p14="http://schemas.microsoft.com/office/powerpoint/2010/main" val="3825567377"/>
+        <p14:creationId xmlns:p14="http://schemas.microsoft.com/office/powerpoint/2010/main" val="173117514"/>
       </p:ext>
     </p:extLst>
   </p:cSld>
@@ -17908,6 +18132,511 @@
   <p:cSld>
     <p:spTree>
       <p:nvGrpSpPr>
+        <p:cNvPr id="1" name=""/>
+        <p:cNvGrpSpPr/>
+        <p:nvPr/>
+      </p:nvGrpSpPr>
+      <p:grpSpPr>
+        <a:xfrm>
+          <a:off x="0" y="0"/>
+          <a:ext cx="0" cy="0"/>
+          <a:chOff x="0" y="0"/>
+          <a:chExt cx="0" cy="0"/>
+        </a:xfrm>
+      </p:grpSpPr>
+      <p:sp>
+        <p:nvSpPr>
+          <p:cNvPr id="2" name="Title 1">
+            <a:extLst>
+              <a:ext uri="{FF2B5EF4-FFF2-40B4-BE49-F238E27FC236}">
+                <a16:creationId xmlns:a16="http://schemas.microsoft.com/office/drawing/2014/main" id="{AD501F52-637D-977D-471F-6C2D70288A9C}"/>
+              </a:ext>
+            </a:extLst>
+          </p:cNvPr>
+          <p:cNvSpPr>
+            <a:spLocks noGrp="1"/>
+          </p:cNvSpPr>
+          <p:nvPr>
+            <p:ph type="title"/>
+          </p:nvPr>
+        </p:nvSpPr>
+        <p:spPr/>
+        <p:txBody>
+          <a:bodyPr/>
+          <a:lstStyle/>
+          <a:p>
+            <a:r>
+              <a:rPr lang="en-US" dirty="0"/>
+              <a:t>Major Code Refactor</a:t>
+            </a:r>
+          </a:p>
+        </p:txBody>
+      </p:sp>
+      <p:sp>
+        <p:nvSpPr>
+          <p:cNvPr id="3" name="Content Placeholder 2">
+            <a:extLst>
+              <a:ext uri="{FF2B5EF4-FFF2-40B4-BE49-F238E27FC236}">
+                <a16:creationId xmlns:a16="http://schemas.microsoft.com/office/drawing/2014/main" id="{9B663C46-A793-3A1B-8101-817968A30164}"/>
+              </a:ext>
+            </a:extLst>
+          </p:cNvPr>
+          <p:cNvSpPr>
+            <a:spLocks noGrp="1"/>
+          </p:cNvSpPr>
+          <p:nvPr>
+            <p:ph idx="1"/>
+          </p:nvPr>
+        </p:nvSpPr>
+        <p:spPr>
+          <a:xfrm>
+            <a:off x="334961" y="1164474"/>
+            <a:ext cx="10247695" cy="4928351"/>
+          </a:xfrm>
+        </p:spPr>
+        <p:txBody>
+          <a:bodyPr/>
+          <a:lstStyle/>
+          <a:p>
+            <a:r>
+              <a:rPr lang="en-US" dirty="0"/>
+              <a:t>Refactored application to implement interface handling</a:t>
+            </a:r>
+          </a:p>
+          <a:p>
+            <a:r>
+              <a:rPr lang="en-US" dirty="0"/>
+              <a:t>Interfaces were needed for testability and isolating any interaction with external elements</a:t>
+            </a:r>
+          </a:p>
+          <a:p>
+            <a:r>
+              <a:rPr lang="en-US" dirty="0"/>
+              <a:t>Made file structure much smoother with clear rules: only Execute class calls the user interaction interfaces, only </a:t>
+            </a:r>
+            <a:r>
+              <a:rPr lang="en-US" dirty="0" err="1"/>
+              <a:t>XMLHandler</a:t>
+            </a:r>
+            <a:r>
+              <a:rPr lang="en-US" dirty="0"/>
+              <a:t> calls </a:t>
+            </a:r>
+            <a:r>
+              <a:rPr lang="en-US" dirty="0" err="1"/>
+              <a:t>IschemaDisambiguator</a:t>
+            </a:r>
+            <a:endParaRPr lang="en-US" dirty="0"/>
+          </a:p>
+          <a:p>
+            <a:r>
+              <a:rPr lang="en-US" dirty="0"/>
+              <a:t>Added 7 interface classes for any interactions with external elements</a:t>
+            </a:r>
+          </a:p>
+          <a:p>
+            <a:pPr lvl="1"/>
+            <a:r>
+              <a:rPr lang="en-US" dirty="0"/>
+              <a:t>User interactions:</a:t>
+            </a:r>
+          </a:p>
+          <a:p>
+            <a:pPr lvl="2"/>
+            <a:r>
+              <a:rPr lang="en-US" dirty="0" err="1"/>
+              <a:t>IOpenFileService</a:t>
+            </a:r>
+            <a:endParaRPr lang="en-US" dirty="0"/>
+          </a:p>
+          <a:p>
+            <a:pPr lvl="2"/>
+            <a:r>
+              <a:rPr lang="en-US" dirty="0" err="1"/>
+              <a:t>ISaveFileService</a:t>
+            </a:r>
+            <a:endParaRPr lang="en-US" dirty="0"/>
+          </a:p>
+          <a:p>
+            <a:pPr lvl="2"/>
+            <a:r>
+              <a:rPr lang="en-US" dirty="0" err="1"/>
+              <a:t>IMessageService</a:t>
+            </a:r>
+            <a:endParaRPr lang="en-US" dirty="0"/>
+          </a:p>
+          <a:p>
+            <a:pPr lvl="2"/>
+            <a:r>
+              <a:rPr lang="en-US" dirty="0" err="1"/>
+              <a:t>IUserPromptService</a:t>
+            </a:r>
+            <a:endParaRPr lang="en-US" dirty="0"/>
+          </a:p>
+          <a:p>
+            <a:pPr lvl="1"/>
+            <a:r>
+              <a:rPr lang="en-US" dirty="0"/>
+              <a:t>File Interactions</a:t>
+            </a:r>
+          </a:p>
+          <a:p>
+            <a:pPr lvl="2"/>
+            <a:r>
+              <a:rPr lang="en-US" dirty="0" err="1"/>
+              <a:t>IValidationService</a:t>
+            </a:r>
+            <a:endParaRPr lang="en-US" dirty="0"/>
+          </a:p>
+          <a:p>
+            <a:pPr lvl="2"/>
+            <a:r>
+              <a:rPr lang="en-US" dirty="0" err="1"/>
+              <a:t>IFileSystem</a:t>
+            </a:r>
+            <a:endParaRPr lang="en-US" dirty="0"/>
+          </a:p>
+          <a:p>
+            <a:pPr lvl="2"/>
+            <a:r>
+              <a:rPr lang="en-US" dirty="0" err="1"/>
+              <a:t>ISchemaDisambiguator</a:t>
+            </a:r>
+            <a:endParaRPr lang="en-US" dirty="0"/>
+          </a:p>
+          <a:p>
+            <a:endParaRPr lang="en-US" dirty="0"/>
+          </a:p>
+        </p:txBody>
+      </p:sp>
+      <p:sp>
+        <p:nvSpPr>
+          <p:cNvPr id="4" name="Date Placeholder 3">
+            <a:extLst>
+              <a:ext uri="{FF2B5EF4-FFF2-40B4-BE49-F238E27FC236}">
+                <a16:creationId xmlns:a16="http://schemas.microsoft.com/office/drawing/2014/main" id="{A2403822-2E16-3AF0-20DB-E4157D0972E2}"/>
+              </a:ext>
+            </a:extLst>
+          </p:cNvPr>
+          <p:cNvSpPr>
+            <a:spLocks noGrp="1"/>
+          </p:cNvSpPr>
+          <p:nvPr>
+            <p:ph type="dt" sz="half" idx="10"/>
+          </p:nvPr>
+        </p:nvSpPr>
+        <p:spPr/>
+        <p:txBody>
+          <a:bodyPr/>
+          <a:lstStyle/>
+          <a:p>
+            <a:r>
+              <a:rPr lang="en-US"/>
+              <a:t>L5X Automation Build Tool</a:t>
+            </a:r>
+            <a:endParaRPr lang="en-US" dirty="0"/>
+          </a:p>
+        </p:txBody>
+      </p:sp>
+      <p:sp>
+        <p:nvSpPr>
+          <p:cNvPr id="5" name="Footer Placeholder 4">
+            <a:extLst>
+              <a:ext uri="{FF2B5EF4-FFF2-40B4-BE49-F238E27FC236}">
+                <a16:creationId xmlns:a16="http://schemas.microsoft.com/office/drawing/2014/main" id="{A468DAD6-FF96-14DE-7054-036F6DC1A31D}"/>
+              </a:ext>
+            </a:extLst>
+          </p:cNvPr>
+          <p:cNvSpPr>
+            <a:spLocks noGrp="1"/>
+          </p:cNvSpPr>
+          <p:nvPr>
+            <p:ph type="ftr" sz="quarter" idx="11"/>
+          </p:nvPr>
+        </p:nvSpPr>
+        <p:spPr/>
+        <p:txBody>
+          <a:bodyPr/>
+          <a:lstStyle/>
+          <a:p>
+            <a:r>
+              <a:rPr lang="en-US"/>
+              <a:t>Corbin Ferguson</a:t>
+            </a:r>
+            <a:endParaRPr lang="en-US" dirty="0"/>
+          </a:p>
+        </p:txBody>
+      </p:sp>
+      <p:sp>
+        <p:nvSpPr>
+          <p:cNvPr id="6" name="Slide Number Placeholder 5">
+            <a:extLst>
+              <a:ext uri="{FF2B5EF4-FFF2-40B4-BE49-F238E27FC236}">
+                <a16:creationId xmlns:a16="http://schemas.microsoft.com/office/drawing/2014/main" id="{35A12B6A-85EB-3071-D3BE-FF977C73E2E1}"/>
+              </a:ext>
+            </a:extLst>
+          </p:cNvPr>
+          <p:cNvSpPr>
+            <a:spLocks noGrp="1"/>
+          </p:cNvSpPr>
+          <p:nvPr>
+            <p:ph type="sldNum" sz="quarter" idx="12"/>
+          </p:nvPr>
+        </p:nvSpPr>
+        <p:spPr/>
+        <p:txBody>
+          <a:bodyPr/>
+          <a:lstStyle/>
+          <a:p>
+            <a:r>
+              <a:rPr lang="en-US"/>
+              <a:t>Slide </a:t>
+            </a:r>
+            <a:fld id="{60BF249C-6EE1-465B-9621-0BD76B5184D6}" type="slidenum">
+              <a:rPr lang="en-US" smtClean="0"/>
+              <a:pPr/>
+              <a:t>10</a:t>
+            </a:fld>
+            <a:endParaRPr lang="en-US" dirty="0"/>
+          </a:p>
+        </p:txBody>
+      </p:sp>
+      <p:pic>
+        <p:nvPicPr>
+          <p:cNvPr id="10" name="Picture 9">
+            <a:extLst>
+              <a:ext uri="{FF2B5EF4-FFF2-40B4-BE49-F238E27FC236}">
+                <a16:creationId xmlns:a16="http://schemas.microsoft.com/office/drawing/2014/main" id="{9DC1AA47-EAA6-0FC1-349A-4C10C08EACEC}"/>
+              </a:ext>
+            </a:extLst>
+          </p:cNvPr>
+          <p:cNvPicPr>
+            <a:picLocks noChangeAspect="1"/>
+          </p:cNvPicPr>
+          <p:nvPr/>
+        </p:nvPicPr>
+        <p:blipFill>
+          <a:blip r:embed="rId3"/>
+          <a:stretch>
+            <a:fillRect/>
+          </a:stretch>
+        </p:blipFill>
+        <p:spPr>
+          <a:xfrm>
+            <a:off x="10273688" y="3051297"/>
+            <a:ext cx="1552575" cy="1543050"/>
+          </a:xfrm>
+          <a:prstGeom prst="rect">
+            <a:avLst/>
+          </a:prstGeom>
+        </p:spPr>
+      </p:pic>
+      <p:pic>
+        <p:nvPicPr>
+          <p:cNvPr id="12" name="Picture 11">
+            <a:extLst>
+              <a:ext uri="{FF2B5EF4-FFF2-40B4-BE49-F238E27FC236}">
+                <a16:creationId xmlns:a16="http://schemas.microsoft.com/office/drawing/2014/main" id="{E06BB708-2A6F-8850-88FE-C41AEC89FB75}"/>
+              </a:ext>
+            </a:extLst>
+          </p:cNvPr>
+          <p:cNvPicPr>
+            <a:picLocks noChangeAspect="1"/>
+          </p:cNvPicPr>
+          <p:nvPr/>
+        </p:nvPicPr>
+        <p:blipFill>
+          <a:blip r:embed="rId4"/>
+          <a:stretch>
+            <a:fillRect/>
+          </a:stretch>
+        </p:blipFill>
+        <p:spPr>
+          <a:xfrm>
+            <a:off x="5780207" y="3033335"/>
+            <a:ext cx="1552575" cy="1190625"/>
+          </a:xfrm>
+          <a:prstGeom prst="rect">
+            <a:avLst/>
+          </a:prstGeom>
+        </p:spPr>
+      </p:pic>
+      <p:pic>
+        <p:nvPicPr>
+          <p:cNvPr id="18" name="Picture 17">
+            <a:extLst>
+              <a:ext uri="{FF2B5EF4-FFF2-40B4-BE49-F238E27FC236}">
+                <a16:creationId xmlns:a16="http://schemas.microsoft.com/office/drawing/2014/main" id="{E002A1E3-8FC1-01E9-E60A-8E5850E50E0F}"/>
+              </a:ext>
+            </a:extLst>
+          </p:cNvPr>
+          <p:cNvPicPr>
+            <a:picLocks noChangeAspect="1"/>
+          </p:cNvPicPr>
+          <p:nvPr/>
+        </p:nvPicPr>
+        <p:blipFill>
+          <a:blip r:embed="rId5"/>
+          <a:stretch>
+            <a:fillRect/>
+          </a:stretch>
+        </p:blipFill>
+        <p:spPr>
+          <a:xfrm>
+            <a:off x="8747858" y="3051297"/>
+            <a:ext cx="1552575" cy="1543050"/>
+          </a:xfrm>
+          <a:prstGeom prst="rect">
+            <a:avLst/>
+          </a:prstGeom>
+        </p:spPr>
+      </p:pic>
+      <p:pic>
+        <p:nvPicPr>
+          <p:cNvPr id="20" name="Picture 19">
+            <a:extLst>
+              <a:ext uri="{FF2B5EF4-FFF2-40B4-BE49-F238E27FC236}">
+                <a16:creationId xmlns:a16="http://schemas.microsoft.com/office/drawing/2014/main" id="{0181E8D7-18F1-7A3F-D74B-8A2D8979568E}"/>
+              </a:ext>
+            </a:extLst>
+          </p:cNvPr>
+          <p:cNvPicPr>
+            <a:picLocks noChangeAspect="1"/>
+          </p:cNvPicPr>
+          <p:nvPr/>
+        </p:nvPicPr>
+        <p:blipFill>
+          <a:blip r:embed="rId6"/>
+          <a:stretch>
+            <a:fillRect/>
+          </a:stretch>
+        </p:blipFill>
+        <p:spPr>
+          <a:xfrm>
+            <a:off x="6025845" y="4544298"/>
+            <a:ext cx="1552575" cy="1362075"/>
+          </a:xfrm>
+          <a:prstGeom prst="rect">
+            <a:avLst/>
+          </a:prstGeom>
+        </p:spPr>
+      </p:pic>
+      <p:pic>
+        <p:nvPicPr>
+          <p:cNvPr id="22" name="Picture 21">
+            <a:extLst>
+              <a:ext uri="{FF2B5EF4-FFF2-40B4-BE49-F238E27FC236}">
+                <a16:creationId xmlns:a16="http://schemas.microsoft.com/office/drawing/2014/main" id="{F6187785-C299-FF92-CA26-1C2CF6062006}"/>
+              </a:ext>
+            </a:extLst>
+          </p:cNvPr>
+          <p:cNvPicPr>
+            <a:picLocks noChangeAspect="1"/>
+          </p:cNvPicPr>
+          <p:nvPr/>
+        </p:nvPicPr>
+        <p:blipFill>
+          <a:blip r:embed="rId7"/>
+          <a:stretch>
+            <a:fillRect/>
+          </a:stretch>
+        </p:blipFill>
+        <p:spPr>
+          <a:xfrm>
+            <a:off x="7265742" y="3033336"/>
+            <a:ext cx="1552575" cy="1190625"/>
+          </a:xfrm>
+          <a:prstGeom prst="rect">
+            <a:avLst/>
+          </a:prstGeom>
+        </p:spPr>
+      </p:pic>
+      <p:pic>
+        <p:nvPicPr>
+          <p:cNvPr id="24" name="Picture 23">
+            <a:extLst>
+              <a:ext uri="{FF2B5EF4-FFF2-40B4-BE49-F238E27FC236}">
+                <a16:creationId xmlns:a16="http://schemas.microsoft.com/office/drawing/2014/main" id="{0D8B0675-1901-CC41-0471-210D7299F6DD}"/>
+              </a:ext>
+            </a:extLst>
+          </p:cNvPr>
+          <p:cNvPicPr>
+            <a:picLocks noChangeAspect="1"/>
+          </p:cNvPicPr>
+          <p:nvPr/>
+        </p:nvPicPr>
+        <p:blipFill>
+          <a:blip r:embed="rId8"/>
+          <a:stretch>
+            <a:fillRect/>
+          </a:stretch>
+        </p:blipFill>
+        <p:spPr>
+          <a:xfrm>
+            <a:off x="9610763" y="4522810"/>
+            <a:ext cx="2238375" cy="1714500"/>
+          </a:xfrm>
+          <a:prstGeom prst="rect">
+            <a:avLst/>
+          </a:prstGeom>
+        </p:spPr>
+      </p:pic>
+      <p:pic>
+        <p:nvPicPr>
+          <p:cNvPr id="26" name="Picture 25">
+            <a:extLst>
+              <a:ext uri="{FF2B5EF4-FFF2-40B4-BE49-F238E27FC236}">
+                <a16:creationId xmlns:a16="http://schemas.microsoft.com/office/drawing/2014/main" id="{62070A87-CDD3-5AC1-C3F9-58BA5F923CF0}"/>
+              </a:ext>
+            </a:extLst>
+          </p:cNvPr>
+          <p:cNvPicPr>
+            <a:picLocks noChangeAspect="1"/>
+          </p:cNvPicPr>
+          <p:nvPr/>
+        </p:nvPicPr>
+        <p:blipFill>
+          <a:blip r:embed="rId9"/>
+          <a:stretch>
+            <a:fillRect/>
+          </a:stretch>
+        </p:blipFill>
+        <p:spPr>
+          <a:xfrm>
+            <a:off x="7572988" y="4552950"/>
+            <a:ext cx="2009775" cy="1362075"/>
+          </a:xfrm>
+          <a:prstGeom prst="rect">
+            <a:avLst/>
+          </a:prstGeom>
+        </p:spPr>
+      </p:pic>
+    </p:spTree>
+    <p:extLst>
+      <p:ext uri="{BB962C8B-B14F-4D97-AF65-F5344CB8AC3E}">
+        <p14:creationId xmlns:p14="http://schemas.microsoft.com/office/powerpoint/2010/main" val="1111137208"/>
+      </p:ext>
+    </p:extLst>
+  </p:cSld>
+  <p:clrMapOvr>
+    <a:masterClrMapping/>
+  </p:clrMapOvr>
+  <mc:AlternateContent xmlns:mc="http://schemas.openxmlformats.org/markup-compatibility/2006" xmlns:p14="http://schemas.microsoft.com/office/powerpoint/2010/main">
+    <mc:Choice Requires="p14">
+      <p:transition p14:dur="0"/>
+    </mc:Choice>
+    <mc:Fallback xmlns="">
+      <p:transition/>
+    </mc:Fallback>
+  </mc:AlternateContent>
+</p:sld>
+</file>
+
+<file path=ppt/slides/slide11.xml><?xml version="1.0" encoding="utf-8"?>
+<p:sld xmlns:a="http://schemas.openxmlformats.org/drawingml/2006/main" xmlns:r="http://schemas.openxmlformats.org/officeDocument/2006/relationships" xmlns:p="http://schemas.openxmlformats.org/presentationml/2006/main">
+  <p:cSld>
+    <p:spTree>
+      <p:nvGrpSpPr>
         <p:cNvPr id="1" name="">
           <a:extLst>
             <a:ext uri="{FF2B5EF4-FFF2-40B4-BE49-F238E27FC236}">
@@ -18015,7 +18744,7 @@
             </a:r>
             <a:fld id="{C6F8E2D1-BFA0-484A-B7F1-E348F2594759}" type="slidenum">
               <a:rPr lang="en-US" smtClean="0"/>
-              <a:t>10</a:t>
+              <a:t>11</a:t>
             </a:fld>
             <a:endParaRPr lang="en-US" dirty="0"/>
           </a:p>
@@ -18442,7 +19171,7 @@
 </p:sld>
 </file>
 
-<file path=ppt/slides/slide11.xml><?xml version="1.0" encoding="utf-8"?>
+<file path=ppt/slides/slide12.xml><?xml version="1.0" encoding="utf-8"?>
 <p:sld xmlns:a="http://schemas.openxmlformats.org/drawingml/2006/main" xmlns:r="http://schemas.openxmlformats.org/officeDocument/2006/relationships" xmlns:p="http://schemas.openxmlformats.org/presentationml/2006/main">
   <p:cSld>
     <p:spTree>
@@ -18554,7 +19283,7 @@
             </a:r>
             <a:fld id="{C6F8E2D1-BFA0-484A-B7F1-E348F2594759}" type="slidenum">
               <a:rPr lang="en-US" smtClean="0"/>
-              <a:t>11</a:t>
+              <a:t>12</a:t>
             </a:fld>
             <a:endParaRPr lang="en-US" dirty="0"/>
           </a:p>
@@ -18922,7 +19651,7 @@
 </p:sld>
 </file>
 
-<file path=ppt/slides/slide12.xml><?xml version="1.0" encoding="utf-8"?>
+<file path=ppt/slides/slide13.xml><?xml version="1.0" encoding="utf-8"?>
 <p:sld xmlns:a="http://schemas.openxmlformats.org/drawingml/2006/main" xmlns:r="http://schemas.openxmlformats.org/officeDocument/2006/relationships" xmlns:p="http://schemas.openxmlformats.org/presentationml/2006/main">
   <p:cSld>
     <p:spTree>
@@ -19034,7 +19763,7 @@
             </a:r>
             <a:fld id="{C6F8E2D1-BFA0-484A-B7F1-E348F2594759}" type="slidenum">
               <a:rPr lang="en-US" smtClean="0"/>
-              <a:t>12</a:t>
+              <a:t>13</a:t>
             </a:fld>
             <a:endParaRPr lang="en-US" dirty="0"/>
           </a:p>
@@ -19351,7 +20080,7 @@
 </p:sld>
 </file>
 
-<file path=ppt/slides/slide13.xml><?xml version="1.0" encoding="utf-8"?>
+<file path=ppt/slides/slide14.xml><?xml version="1.0" encoding="utf-8"?>
 <p:sld xmlns:a="http://schemas.openxmlformats.org/drawingml/2006/main" xmlns:r="http://schemas.openxmlformats.org/officeDocument/2006/relationships" xmlns:p="http://schemas.openxmlformats.org/presentationml/2006/main">
   <p:cSld>
     <p:spTree>
@@ -19463,7 +20192,7 @@
             </a:r>
             <a:fld id="{C6F8E2D1-BFA0-484A-B7F1-E348F2594759}" type="slidenum">
               <a:rPr lang="en-US" smtClean="0"/>
-              <a:t>13</a:t>
+              <a:t>14</a:t>
             </a:fld>
             <a:endParaRPr lang="en-US" dirty="0"/>
           </a:p>
@@ -19797,7 +20526,7 @@
 </p:sld>
 </file>
 
-<file path=ppt/slides/slide14.xml><?xml version="1.0" encoding="utf-8"?>
+<file path=ppt/slides/slide15.xml><?xml version="1.0" encoding="utf-8"?>
 <p:sld xmlns:a="http://schemas.openxmlformats.org/drawingml/2006/main" xmlns:r="http://schemas.openxmlformats.org/officeDocument/2006/relationships" xmlns:p="http://schemas.openxmlformats.org/presentationml/2006/main">
   <p:cSld>
     <p:spTree>
@@ -19909,7 +20638,7 @@
             </a:r>
             <a:fld id="{C6F8E2D1-BFA0-484A-B7F1-E348F2594759}" type="slidenum">
               <a:rPr lang="en-US" smtClean="0"/>
-              <a:t>14</a:t>
+              <a:t>15</a:t>
             </a:fld>
             <a:endParaRPr lang="en-US" dirty="0"/>
           </a:p>
@@ -20197,7 +20926,7 @@
 </p:sld>
 </file>
 
-<file path=ppt/slides/slide15.xml><?xml version="1.0" encoding="utf-8"?>
+<file path=ppt/slides/slide16.xml><?xml version="1.0" encoding="utf-8"?>
 <p:sld xmlns:a="http://schemas.openxmlformats.org/drawingml/2006/main" xmlns:r="http://schemas.openxmlformats.org/officeDocument/2006/relationships" xmlns:p="http://schemas.openxmlformats.org/presentationml/2006/main">
   <p:cSld>
     <p:spTree>
@@ -20328,7 +21057,7 @@
             <a:fld id="{27814C39-D19F-4924-8254-47FE7D97AAB9}" type="slidenum">
               <a:rPr lang="en-US" smtClean="0"/>
               <a:pPr/>
-              <a:t>15</a:t>
+              <a:t>16</a:t>
             </a:fld>
             <a:endParaRPr lang="en-US" dirty="0"/>
           </a:p>
@@ -20623,7 +21352,7 @@
 </p:sld>
 </file>
 
-<file path=ppt/slides/slide16.xml><?xml version="1.0" encoding="utf-8"?>
+<file path=ppt/slides/slide17.xml><?xml version="1.0" encoding="utf-8"?>
 <p:sld xmlns:a="http://schemas.openxmlformats.org/drawingml/2006/main" xmlns:r="http://schemas.openxmlformats.org/officeDocument/2006/relationships" xmlns:p="http://schemas.openxmlformats.org/presentationml/2006/main">
   <p:cSld>
     <p:spTree>
@@ -20735,7 +21464,7 @@
             </a:r>
             <a:fld id="{C6F8E2D1-BFA0-484A-B7F1-E348F2594759}" type="slidenum">
               <a:rPr lang="en-US" smtClean="0"/>
-              <a:t>16</a:t>
+              <a:t>17</a:t>
             </a:fld>
             <a:endParaRPr lang="en-US" dirty="0"/>
           </a:p>
@@ -21109,7 +21838,7 @@
 </p:sld>
 </file>
 
-<file path=ppt/slides/slide17.xml><?xml version="1.0" encoding="utf-8"?>
+<file path=ppt/slides/slide18.xml><?xml version="1.0" encoding="utf-8"?>
 <p:sld xmlns:a="http://schemas.openxmlformats.org/drawingml/2006/main" xmlns:r="http://schemas.openxmlformats.org/officeDocument/2006/relationships" xmlns:p="http://schemas.openxmlformats.org/presentationml/2006/main">
   <p:cSld>
     <p:spTree>
@@ -21240,7 +21969,7 @@
             <a:fld id="{27814C39-D19F-4924-8254-47FE7D97AAB9}" type="slidenum">
               <a:rPr lang="en-US" smtClean="0"/>
               <a:pPr/>
-              <a:t>17</a:t>
+              <a:t>18</a:t>
             </a:fld>
             <a:endParaRPr lang="en-US" dirty="0"/>
           </a:p>
@@ -21342,7 +22071,7 @@
 </p:sld>
 </file>
 
-<file path=ppt/slides/slide18.xml><?xml version="1.0" encoding="utf-8"?>
+<file path=ppt/slides/slide19.xml><?xml version="1.0" encoding="utf-8"?>
 <p:sld xmlns:a="http://schemas.openxmlformats.org/drawingml/2006/main" xmlns:r="http://schemas.openxmlformats.org/officeDocument/2006/relationships" xmlns:p="http://schemas.openxmlformats.org/presentationml/2006/main">
   <p:cSld>
     <p:spTree>
@@ -21584,7 +22313,7 @@
             </a:r>
             <a:fld id="{5BFF8BEA-C7AD-416A-8E1B-AC59D078A379}" type="slidenum">
               <a:rPr lang="en-US" smtClean="0"/>
-              <a:t>18</a:t>
+              <a:t>19</a:t>
             </a:fld>
             <a:endParaRPr lang="en-US" dirty="0"/>
           </a:p>
@@ -21640,7 +22369,268 @@
 </p:sld>
 </file>
 
-<file path=ppt/slides/slide19.xml><?xml version="1.0" encoding="utf-8"?>
+<file path=ppt/slides/slide2.xml><?xml version="1.0" encoding="utf-8"?>
+<p:sld xmlns:a="http://schemas.openxmlformats.org/drawingml/2006/main" xmlns:r="http://schemas.openxmlformats.org/officeDocument/2006/relationships" xmlns:p="http://schemas.openxmlformats.org/presentationml/2006/main">
+  <p:cSld>
+    <p:spTree>
+      <p:nvGrpSpPr>
+        <p:cNvPr id="1" name="">
+          <a:extLst>
+            <a:ext uri="{FF2B5EF4-FFF2-40B4-BE49-F238E27FC236}">
+              <a16:creationId xmlns:a16="http://schemas.microsoft.com/office/drawing/2014/main" id="{ECC06C52-67BC-A4C8-3ED0-3636080E3212}"/>
+            </a:ext>
+          </a:extLst>
+        </p:cNvPr>
+        <p:cNvGrpSpPr/>
+        <p:nvPr/>
+      </p:nvGrpSpPr>
+      <p:grpSpPr>
+        <a:xfrm>
+          <a:off x="0" y="0"/>
+          <a:ext cx="0" cy="0"/>
+          <a:chOff x="0" y="0"/>
+          <a:chExt cx="0" cy="0"/>
+        </a:xfrm>
+      </p:grpSpPr>
+      <p:sp>
+        <p:nvSpPr>
+          <p:cNvPr id="2" name="Title 1">
+            <a:extLst>
+              <a:ext uri="{FF2B5EF4-FFF2-40B4-BE49-F238E27FC236}">
+                <a16:creationId xmlns:a16="http://schemas.microsoft.com/office/drawing/2014/main" id="{389C7A2E-1427-5278-B512-F2A80C319122}"/>
+              </a:ext>
+            </a:extLst>
+          </p:cNvPr>
+          <p:cNvSpPr>
+            <a:spLocks noGrp="1"/>
+          </p:cNvSpPr>
+          <p:nvPr>
+            <p:ph type="title"/>
+          </p:nvPr>
+        </p:nvSpPr>
+        <p:spPr>
+          <a:xfrm>
+            <a:off x="334963" y="620690"/>
+            <a:ext cx="11522075" cy="360041"/>
+          </a:xfrm>
+        </p:spPr>
+        <p:txBody>
+          <a:bodyPr/>
+          <a:lstStyle/>
+          <a:p>
+            <a:r>
+              <a:rPr lang="en-US" dirty="0"/>
+              <a:t>Outline</a:t>
+            </a:r>
+          </a:p>
+        </p:txBody>
+      </p:sp>
+      <p:sp>
+        <p:nvSpPr>
+          <p:cNvPr id="13" name="Content Placeholder 12">
+            <a:extLst>
+              <a:ext uri="{FF2B5EF4-FFF2-40B4-BE49-F238E27FC236}">
+                <a16:creationId xmlns:a16="http://schemas.microsoft.com/office/drawing/2014/main" id="{9ABB78FB-6052-78C4-38A0-9B7AF58E9FCB}"/>
+              </a:ext>
+            </a:extLst>
+          </p:cNvPr>
+          <p:cNvSpPr>
+            <a:spLocks noGrp="1"/>
+          </p:cNvSpPr>
+          <p:nvPr>
+            <p:ph idx="1"/>
+          </p:nvPr>
+        </p:nvSpPr>
+        <p:spPr/>
+        <p:txBody>
+          <a:bodyPr/>
+          <a:lstStyle/>
+          <a:p>
+            <a:r>
+              <a:rPr lang="en-US" dirty="0"/>
+              <a:t>Project Necessity</a:t>
+            </a:r>
+          </a:p>
+          <a:p>
+            <a:r>
+              <a:rPr lang="en-US" dirty="0"/>
+              <a:t>Requirements</a:t>
+            </a:r>
+          </a:p>
+          <a:p>
+            <a:r>
+              <a:rPr lang="en-US" dirty="0"/>
+              <a:t>Design Timeline</a:t>
+            </a:r>
+          </a:p>
+          <a:p>
+            <a:r>
+              <a:rPr lang="en-US" dirty="0"/>
+              <a:t>System Architecture</a:t>
+            </a:r>
+          </a:p>
+          <a:p>
+            <a:r>
+              <a:rPr lang="en-US" dirty="0"/>
+              <a:t>Core Classes</a:t>
+            </a:r>
+          </a:p>
+          <a:p>
+            <a:r>
+              <a:rPr lang="en-US" dirty="0"/>
+              <a:t>Major Code Refactor</a:t>
+            </a:r>
+          </a:p>
+          <a:p>
+            <a:r>
+              <a:rPr lang="en-US" dirty="0"/>
+              <a:t>Sequence Visualization</a:t>
+            </a:r>
+          </a:p>
+          <a:p>
+            <a:r>
+              <a:rPr lang="en-US" dirty="0"/>
+              <a:t>Application Demo</a:t>
+            </a:r>
+          </a:p>
+          <a:p>
+            <a:r>
+              <a:rPr lang="en-US" dirty="0"/>
+              <a:t>Testing &amp; Verification</a:t>
+            </a:r>
+          </a:p>
+          <a:p>
+            <a:r>
+              <a:rPr lang="en-US" dirty="0"/>
+              <a:t>Lessons Learned</a:t>
+            </a:r>
+          </a:p>
+          <a:p>
+            <a:r>
+              <a:rPr lang="en-US" dirty="0"/>
+              <a:t>Conclusions</a:t>
+            </a:r>
+          </a:p>
+        </p:txBody>
+      </p:sp>
+      <p:sp>
+        <p:nvSpPr>
+          <p:cNvPr id="4" name="Date Placeholder 3">
+            <a:extLst>
+              <a:ext uri="{FF2B5EF4-FFF2-40B4-BE49-F238E27FC236}">
+                <a16:creationId xmlns:a16="http://schemas.microsoft.com/office/drawing/2014/main" id="{64344D59-887A-89DB-90DC-83D1F2848381}"/>
+              </a:ext>
+            </a:extLst>
+          </p:cNvPr>
+          <p:cNvSpPr>
+            <a:spLocks noGrp="1"/>
+          </p:cNvSpPr>
+          <p:nvPr>
+            <p:ph type="dt" sz="half" idx="10"/>
+          </p:nvPr>
+        </p:nvSpPr>
+        <p:spPr>
+          <a:xfrm>
+            <a:off x="334963" y="194736"/>
+            <a:ext cx="9674225" cy="180000"/>
+          </a:xfrm>
+        </p:spPr>
+        <p:txBody>
+          <a:bodyPr/>
+          <a:lstStyle/>
+          <a:p>
+            <a:r>
+              <a:rPr lang="en-US"/>
+              <a:t>L5X Automation Build Tool</a:t>
+            </a:r>
+            <a:endParaRPr lang="en-US" dirty="0"/>
+          </a:p>
+        </p:txBody>
+      </p:sp>
+      <p:sp>
+        <p:nvSpPr>
+          <p:cNvPr id="3" name="Slide Number Placeholder 2">
+            <a:extLst>
+              <a:ext uri="{FF2B5EF4-FFF2-40B4-BE49-F238E27FC236}">
+                <a16:creationId xmlns:a16="http://schemas.microsoft.com/office/drawing/2014/main" id="{D1AEB583-7C00-647F-EA4B-940732920BC4}"/>
+              </a:ext>
+            </a:extLst>
+          </p:cNvPr>
+          <p:cNvSpPr>
+            <a:spLocks noGrp="1"/>
+          </p:cNvSpPr>
+          <p:nvPr>
+            <p:ph type="sldNum" sz="quarter" idx="12"/>
+          </p:nvPr>
+        </p:nvSpPr>
+        <p:spPr/>
+        <p:txBody>
+          <a:bodyPr/>
+          <a:lstStyle/>
+          <a:p>
+            <a:r>
+              <a:rPr lang="en-US"/>
+              <a:t>Slide </a:t>
+            </a:r>
+            <a:fld id="{6ED4F0B8-A3B9-4B6F-BEC0-B0E78C1192A7}" type="slidenum">
+              <a:rPr lang="en-US" smtClean="0"/>
+              <a:t>2</a:t>
+            </a:fld>
+            <a:endParaRPr lang="en-US" dirty="0"/>
+          </a:p>
+        </p:txBody>
+      </p:sp>
+      <p:sp>
+        <p:nvSpPr>
+          <p:cNvPr id="7" name="Footer Placeholder 6">
+            <a:extLst>
+              <a:ext uri="{FF2B5EF4-FFF2-40B4-BE49-F238E27FC236}">
+                <a16:creationId xmlns:a16="http://schemas.microsoft.com/office/drawing/2014/main" id="{9F92DEA4-6CF8-8F90-FC4B-A9A798E29D53}"/>
+              </a:ext>
+            </a:extLst>
+          </p:cNvPr>
+          <p:cNvSpPr>
+            <a:spLocks noGrp="1"/>
+          </p:cNvSpPr>
+          <p:nvPr>
+            <p:ph type="ftr" sz="quarter" idx="11"/>
+          </p:nvPr>
+        </p:nvSpPr>
+        <p:spPr/>
+        <p:txBody>
+          <a:bodyPr/>
+          <a:lstStyle/>
+          <a:p>
+            <a:r>
+              <a:rPr lang="en-US"/>
+              <a:t>Corbin Ferguson</a:t>
+            </a:r>
+            <a:endParaRPr lang="en-US" dirty="0"/>
+          </a:p>
+        </p:txBody>
+      </p:sp>
+    </p:spTree>
+    <p:extLst>
+      <p:ext uri="{BB962C8B-B14F-4D97-AF65-F5344CB8AC3E}">
+        <p14:creationId xmlns:p14="http://schemas.microsoft.com/office/powerpoint/2010/main" val="4050751982"/>
+      </p:ext>
+    </p:extLst>
+  </p:cSld>
+  <p:clrMapOvr>
+    <a:masterClrMapping/>
+  </p:clrMapOvr>
+  <mc:AlternateContent xmlns:mc="http://schemas.openxmlformats.org/markup-compatibility/2006" xmlns:p14="http://schemas.microsoft.com/office/powerpoint/2010/main">
+    <mc:Choice Requires="p14">
+      <p:transition p14:dur="0"/>
+    </mc:Choice>
+    <mc:Fallback xmlns="">
+      <p:transition/>
+    </mc:Fallback>
+  </mc:AlternateContent>
+</p:sld>
+</file>
+
+<file path=ppt/slides/slide20.xml><?xml version="1.0" encoding="utf-8"?>
 <p:sld xmlns:a="http://schemas.openxmlformats.org/drawingml/2006/main" xmlns:r="http://schemas.openxmlformats.org/officeDocument/2006/relationships" xmlns:p="http://schemas.openxmlformats.org/presentationml/2006/main">
   <p:cSld>
     <p:spTree>
@@ -21800,6 +22790,12 @@
           <a:p>
             <a:r>
               <a:rPr lang="en-US" dirty="0"/>
+              <a:t>High passing test rate indicates stable architecture</a:t>
+            </a:r>
+          </a:p>
+          <a:p>
+            <a:r>
+              <a:rPr lang="en-US" dirty="0"/>
               <a:t>Skipped test: </a:t>
             </a:r>
             <a:r>
@@ -21826,7 +22822,7 @@
             <a:pPr lvl="1"/>
             <a:r>
               <a:rPr lang="en-US" dirty="0"/>
-              <a:t>Kept for notation purposes</a:t>
+              <a:t>Kept for notation purposes and potential future implementation</a:t>
             </a:r>
           </a:p>
         </p:txBody>
@@ -21924,7 +22920,7 @@
                   <a:spcPts val="600"/>
                 </a:spcAft>
               </a:pPr>
-              <a:t>19</a:t>
+              <a:t>20</a:t>
             </a:fld>
             <a:endParaRPr lang="en-US"/>
           </a:p>
@@ -21956,250 +22952,7 @@
 </p:sld>
 </file>
 
-<file path=ppt/slides/slide2.xml><?xml version="1.0" encoding="utf-8"?>
-<p:sld xmlns:a="http://schemas.openxmlformats.org/drawingml/2006/main" xmlns:r="http://schemas.openxmlformats.org/officeDocument/2006/relationships" xmlns:p="http://schemas.openxmlformats.org/presentationml/2006/main">
-  <p:cSld>
-    <p:spTree>
-      <p:nvGrpSpPr>
-        <p:cNvPr id="1" name="">
-          <a:extLst>
-            <a:ext uri="{FF2B5EF4-FFF2-40B4-BE49-F238E27FC236}">
-              <a16:creationId xmlns:a16="http://schemas.microsoft.com/office/drawing/2014/main" id="{ECC06C52-67BC-A4C8-3ED0-3636080E3212}"/>
-            </a:ext>
-          </a:extLst>
-        </p:cNvPr>
-        <p:cNvGrpSpPr/>
-        <p:nvPr/>
-      </p:nvGrpSpPr>
-      <p:grpSpPr>
-        <a:xfrm>
-          <a:off x="0" y="0"/>
-          <a:ext cx="0" cy="0"/>
-          <a:chOff x="0" y="0"/>
-          <a:chExt cx="0" cy="0"/>
-        </a:xfrm>
-      </p:grpSpPr>
-      <p:sp>
-        <p:nvSpPr>
-          <p:cNvPr id="2" name="Title 1">
-            <a:extLst>
-              <a:ext uri="{FF2B5EF4-FFF2-40B4-BE49-F238E27FC236}">
-                <a16:creationId xmlns:a16="http://schemas.microsoft.com/office/drawing/2014/main" id="{389C7A2E-1427-5278-B512-F2A80C319122}"/>
-              </a:ext>
-            </a:extLst>
-          </p:cNvPr>
-          <p:cNvSpPr>
-            <a:spLocks noGrp="1"/>
-          </p:cNvSpPr>
-          <p:nvPr>
-            <p:ph type="title"/>
-          </p:nvPr>
-        </p:nvSpPr>
-        <p:spPr>
-          <a:xfrm>
-            <a:off x="334963" y="620690"/>
-            <a:ext cx="11522075" cy="360041"/>
-          </a:xfrm>
-        </p:spPr>
-        <p:txBody>
-          <a:bodyPr/>
-          <a:lstStyle/>
-          <a:p>
-            <a:r>
-              <a:rPr lang="en-US" dirty="0"/>
-              <a:t>Outline</a:t>
-            </a:r>
-          </a:p>
-        </p:txBody>
-      </p:sp>
-      <p:sp>
-        <p:nvSpPr>
-          <p:cNvPr id="13" name="Content Placeholder 12">
-            <a:extLst>
-              <a:ext uri="{FF2B5EF4-FFF2-40B4-BE49-F238E27FC236}">
-                <a16:creationId xmlns:a16="http://schemas.microsoft.com/office/drawing/2014/main" id="{9ABB78FB-6052-78C4-38A0-9B7AF58E9FCB}"/>
-              </a:ext>
-            </a:extLst>
-          </p:cNvPr>
-          <p:cNvSpPr>
-            <a:spLocks noGrp="1"/>
-          </p:cNvSpPr>
-          <p:nvPr>
-            <p:ph idx="1"/>
-          </p:nvPr>
-        </p:nvSpPr>
-        <p:spPr/>
-        <p:txBody>
-          <a:bodyPr/>
-          <a:lstStyle/>
-          <a:p>
-            <a:r>
-              <a:rPr lang="en-US" dirty="0"/>
-              <a:t>Project Goals</a:t>
-            </a:r>
-          </a:p>
-          <a:p>
-            <a:r>
-              <a:rPr lang="en-US" dirty="0"/>
-              <a:t>Implemented Features</a:t>
-            </a:r>
-          </a:p>
-          <a:p>
-            <a:r>
-              <a:rPr lang="en-US" dirty="0"/>
-              <a:t>Design timeline</a:t>
-            </a:r>
-          </a:p>
-          <a:p>
-            <a:r>
-              <a:rPr lang="en-US" dirty="0"/>
-              <a:t>Tools Used</a:t>
-            </a:r>
-          </a:p>
-          <a:p>
-            <a:r>
-              <a:rPr lang="en-US" dirty="0"/>
-              <a:t>System Design</a:t>
-            </a:r>
-          </a:p>
-          <a:p>
-            <a:r>
-              <a:rPr lang="en-US" dirty="0"/>
-              <a:t>Testing and Verification</a:t>
-            </a:r>
-          </a:p>
-          <a:p>
-            <a:r>
-              <a:rPr lang="en-US" dirty="0"/>
-              <a:t>Lessons Learned</a:t>
-            </a:r>
-          </a:p>
-          <a:p>
-            <a:r>
-              <a:rPr lang="en-US" dirty="0"/>
-              <a:t>Conclusions</a:t>
-            </a:r>
-          </a:p>
-        </p:txBody>
-      </p:sp>
-      <p:sp>
-        <p:nvSpPr>
-          <p:cNvPr id="4" name="Date Placeholder 3">
-            <a:extLst>
-              <a:ext uri="{FF2B5EF4-FFF2-40B4-BE49-F238E27FC236}">
-                <a16:creationId xmlns:a16="http://schemas.microsoft.com/office/drawing/2014/main" id="{64344D59-887A-89DB-90DC-83D1F2848381}"/>
-              </a:ext>
-            </a:extLst>
-          </p:cNvPr>
-          <p:cNvSpPr>
-            <a:spLocks noGrp="1"/>
-          </p:cNvSpPr>
-          <p:nvPr>
-            <p:ph type="dt" sz="half" idx="10"/>
-          </p:nvPr>
-        </p:nvSpPr>
-        <p:spPr>
-          <a:xfrm>
-            <a:off x="334963" y="194736"/>
-            <a:ext cx="9674225" cy="180000"/>
-          </a:xfrm>
-        </p:spPr>
-        <p:txBody>
-          <a:bodyPr/>
-          <a:lstStyle/>
-          <a:p>
-            <a:r>
-              <a:rPr lang="en-US"/>
-              <a:t>L5X Automation Build Tool</a:t>
-            </a:r>
-            <a:endParaRPr lang="en-US" dirty="0"/>
-          </a:p>
-        </p:txBody>
-      </p:sp>
-      <p:sp>
-        <p:nvSpPr>
-          <p:cNvPr id="3" name="Slide Number Placeholder 2">
-            <a:extLst>
-              <a:ext uri="{FF2B5EF4-FFF2-40B4-BE49-F238E27FC236}">
-                <a16:creationId xmlns:a16="http://schemas.microsoft.com/office/drawing/2014/main" id="{D1AEB583-7C00-647F-EA4B-940732920BC4}"/>
-              </a:ext>
-            </a:extLst>
-          </p:cNvPr>
-          <p:cNvSpPr>
-            <a:spLocks noGrp="1"/>
-          </p:cNvSpPr>
-          <p:nvPr>
-            <p:ph type="sldNum" sz="quarter" idx="12"/>
-          </p:nvPr>
-        </p:nvSpPr>
-        <p:spPr/>
-        <p:txBody>
-          <a:bodyPr/>
-          <a:lstStyle/>
-          <a:p>
-            <a:r>
-              <a:rPr lang="en-US"/>
-              <a:t>Slide </a:t>
-            </a:r>
-            <a:fld id="{6ED4F0B8-A3B9-4B6F-BEC0-B0E78C1192A7}" type="slidenum">
-              <a:rPr lang="en-US" smtClean="0"/>
-              <a:t>2</a:t>
-            </a:fld>
-            <a:endParaRPr lang="en-US" dirty="0"/>
-          </a:p>
-        </p:txBody>
-      </p:sp>
-      <p:sp>
-        <p:nvSpPr>
-          <p:cNvPr id="7" name="Footer Placeholder 6">
-            <a:extLst>
-              <a:ext uri="{FF2B5EF4-FFF2-40B4-BE49-F238E27FC236}">
-                <a16:creationId xmlns:a16="http://schemas.microsoft.com/office/drawing/2014/main" id="{9F92DEA4-6CF8-8F90-FC4B-A9A798E29D53}"/>
-              </a:ext>
-            </a:extLst>
-          </p:cNvPr>
-          <p:cNvSpPr>
-            <a:spLocks noGrp="1"/>
-          </p:cNvSpPr>
-          <p:nvPr>
-            <p:ph type="ftr" sz="quarter" idx="11"/>
-          </p:nvPr>
-        </p:nvSpPr>
-        <p:spPr/>
-        <p:txBody>
-          <a:bodyPr/>
-          <a:lstStyle/>
-          <a:p>
-            <a:r>
-              <a:rPr lang="en-US"/>
-              <a:t>Corbin Ferguson</a:t>
-            </a:r>
-            <a:endParaRPr lang="en-US" dirty="0"/>
-          </a:p>
-        </p:txBody>
-      </p:sp>
-    </p:spTree>
-    <p:extLst>
-      <p:ext uri="{BB962C8B-B14F-4D97-AF65-F5344CB8AC3E}">
-        <p14:creationId xmlns:p14="http://schemas.microsoft.com/office/powerpoint/2010/main" val="4050751982"/>
-      </p:ext>
-    </p:extLst>
-  </p:cSld>
-  <p:clrMapOvr>
-    <a:masterClrMapping/>
-  </p:clrMapOvr>
-  <mc:AlternateContent xmlns:mc="http://schemas.openxmlformats.org/markup-compatibility/2006" xmlns:p14="http://schemas.microsoft.com/office/powerpoint/2010/main">
-    <mc:Choice Requires="p14">
-      <p:transition p14:dur="0"/>
-    </mc:Choice>
-    <mc:Fallback xmlns="">
-      <p:transition/>
-    </mc:Fallback>
-  </mc:AlternateContent>
-</p:sld>
-</file>
-
-<file path=ppt/slides/slide20.xml><?xml version="1.0" encoding="utf-8"?>
+<file path=ppt/slides/slide21.xml><?xml version="1.0" encoding="utf-8"?>
 <p:sld xmlns:a="http://schemas.openxmlformats.org/drawingml/2006/main" xmlns:r="http://schemas.openxmlformats.org/officeDocument/2006/relationships" xmlns:p="http://schemas.openxmlformats.org/presentationml/2006/main">
   <p:cSld>
     <p:spTree>
@@ -22278,7 +23031,7 @@
             </a:r>
             <a:fld id="{32B897BE-5B46-4D7A-8E5C-716C3CDA6A39}" type="slidenum">
               <a:rPr lang="en-US" smtClean="0"/>
-              <a:t>20</a:t>
+              <a:t>21</a:t>
             </a:fld>
             <a:endParaRPr lang="en-US" dirty="0"/>
           </a:p>
@@ -22383,245 +23136,6 @@
     <p:extLst>
       <p:ext uri="{BB962C8B-B14F-4D97-AF65-F5344CB8AC3E}">
         <p14:creationId xmlns:p14="http://schemas.microsoft.com/office/powerpoint/2010/main" val="765330338"/>
-      </p:ext>
-    </p:extLst>
-  </p:cSld>
-  <p:clrMapOvr>
-    <a:masterClrMapping/>
-  </p:clrMapOvr>
-  <mc:AlternateContent xmlns:mc="http://schemas.openxmlformats.org/markup-compatibility/2006" xmlns:p14="http://schemas.microsoft.com/office/powerpoint/2010/main">
-    <mc:Choice Requires="p14">
-      <p:transition p14:dur="0"/>
-    </mc:Choice>
-    <mc:Fallback xmlns="">
-      <p:transition/>
-    </mc:Fallback>
-  </mc:AlternateContent>
-</p:sld>
-</file>
-
-<file path=ppt/slides/slide21.xml><?xml version="1.0" encoding="utf-8"?>
-<p:sld xmlns:a="http://schemas.openxmlformats.org/drawingml/2006/main" xmlns:r="http://schemas.openxmlformats.org/officeDocument/2006/relationships" xmlns:p="http://schemas.openxmlformats.org/presentationml/2006/main">
-  <p:cSld>
-    <p:spTree>
-      <p:nvGrpSpPr>
-        <p:cNvPr id="1" name=""/>
-        <p:cNvGrpSpPr/>
-        <p:nvPr/>
-      </p:nvGrpSpPr>
-      <p:grpSpPr>
-        <a:xfrm>
-          <a:off x="0" y="0"/>
-          <a:ext cx="0" cy="0"/>
-          <a:chOff x="0" y="0"/>
-          <a:chExt cx="0" cy="0"/>
-        </a:xfrm>
-      </p:grpSpPr>
-      <p:sp>
-        <p:nvSpPr>
-          <p:cNvPr id="9" name="Text Placeholder 8">
-            <a:extLst>
-              <a:ext uri="{FF2B5EF4-FFF2-40B4-BE49-F238E27FC236}">
-                <a16:creationId xmlns:a16="http://schemas.microsoft.com/office/drawing/2014/main" id="{F12D16D0-86CF-AF46-C7E4-9E991E80B9A8}"/>
-              </a:ext>
-            </a:extLst>
-          </p:cNvPr>
-          <p:cNvSpPr>
-            <a:spLocks noGrp="1"/>
-          </p:cNvSpPr>
-          <p:nvPr>
-            <p:ph type="body" sz="quarter" idx="13"/>
-          </p:nvPr>
-        </p:nvSpPr>
-        <p:spPr/>
-        <p:txBody>
-          <a:bodyPr/>
-          <a:lstStyle/>
-          <a:p>
-            <a:pPr marL="342900" indent="-342900">
-              <a:buFont typeface="Arial" panose="020B0604020202020204" pitchFamily="34" charset="0"/>
-              <a:buChar char="•"/>
-            </a:pPr>
-            <a:r>
-              <a:rPr lang="en-US" sz="2200" dirty="0"/>
-              <a:t>Start with clearly defined and detailed requirements</a:t>
-            </a:r>
-          </a:p>
-          <a:p>
-            <a:pPr marL="342900" indent="-342900">
-              <a:buFont typeface="Arial" panose="020B0604020202020204" pitchFamily="34" charset="0"/>
-              <a:buChar char="•"/>
-            </a:pPr>
-            <a:r>
-              <a:rPr lang="en-US" sz="2200" dirty="0"/>
-              <a:t>Segment out and abstract classes from the start, interfaces were very helpful</a:t>
-            </a:r>
-          </a:p>
-          <a:p>
-            <a:pPr marL="342900" indent="-342900">
-              <a:buFont typeface="Arial" panose="020B0604020202020204" pitchFamily="34" charset="0"/>
-              <a:buChar char="•"/>
-            </a:pPr>
-            <a:r>
-              <a:rPr lang="en-US" sz="2200" dirty="0"/>
-              <a:t>Devote more time to comparing tool options early on, rather than running with the first tool that works</a:t>
-            </a:r>
-          </a:p>
-          <a:p>
-            <a:pPr marL="342900" indent="-342900">
-              <a:buFont typeface="Arial" panose="020B0604020202020204" pitchFamily="34" charset="0"/>
-              <a:buChar char="•"/>
-            </a:pPr>
-            <a:r>
-              <a:rPr lang="en-US" sz="2200" dirty="0"/>
-              <a:t>Integrate documentation work throughout development, rather than separately</a:t>
-            </a:r>
-          </a:p>
-          <a:p>
-            <a:pPr marL="342900" indent="-342900">
-              <a:buFont typeface="Arial" panose="020B0604020202020204" pitchFamily="34" charset="0"/>
-              <a:buChar char="•"/>
-            </a:pPr>
-            <a:r>
-              <a:rPr lang="en-US" sz="2200" dirty="0"/>
-              <a:t>Develop tests alongside application, not after the fact(test-driven development leads to cleaner code and easier debugging)</a:t>
-            </a:r>
-          </a:p>
-          <a:p>
-            <a:pPr marL="342900" indent="-342900">
-              <a:buFont typeface="Arial" panose="020B0604020202020204" pitchFamily="34" charset="0"/>
-              <a:buChar char="•"/>
-            </a:pPr>
-            <a:r>
-              <a:rPr lang="en-US" sz="2200" dirty="0"/>
-              <a:t>Keep a constant line of communication open with the client(Matt) for better workflow in system design</a:t>
-            </a:r>
-          </a:p>
-        </p:txBody>
-      </p:sp>
-      <p:sp>
-        <p:nvSpPr>
-          <p:cNvPr id="3" name="Date Placeholder 2">
-            <a:extLst>
-              <a:ext uri="{FF2B5EF4-FFF2-40B4-BE49-F238E27FC236}">
-                <a16:creationId xmlns:a16="http://schemas.microsoft.com/office/drawing/2014/main" id="{4591C6F5-1471-06B7-C32B-59BCD0819533}"/>
-              </a:ext>
-            </a:extLst>
-          </p:cNvPr>
-          <p:cNvSpPr>
-            <a:spLocks noGrp="1"/>
-          </p:cNvSpPr>
-          <p:nvPr>
-            <p:ph type="dt" sz="half" idx="14"/>
-          </p:nvPr>
-        </p:nvSpPr>
-        <p:spPr/>
-        <p:txBody>
-          <a:bodyPr/>
-          <a:lstStyle/>
-          <a:p>
-            <a:r>
-              <a:rPr lang="en-US"/>
-              <a:t>L5X Automation Build Tool</a:t>
-            </a:r>
-            <a:endParaRPr lang="en-US" dirty="0"/>
-          </a:p>
-        </p:txBody>
-      </p:sp>
-      <p:sp>
-        <p:nvSpPr>
-          <p:cNvPr id="4" name="Footer Placeholder 3">
-            <a:extLst>
-              <a:ext uri="{FF2B5EF4-FFF2-40B4-BE49-F238E27FC236}">
-                <a16:creationId xmlns:a16="http://schemas.microsoft.com/office/drawing/2014/main" id="{CCB6A675-2BFE-99E9-F187-94EAE5052860}"/>
-              </a:ext>
-            </a:extLst>
-          </p:cNvPr>
-          <p:cNvSpPr>
-            <a:spLocks noGrp="1"/>
-          </p:cNvSpPr>
-          <p:nvPr>
-            <p:ph type="ftr" sz="quarter" idx="15"/>
-          </p:nvPr>
-        </p:nvSpPr>
-        <p:spPr/>
-        <p:txBody>
-          <a:bodyPr/>
-          <a:lstStyle/>
-          <a:p>
-            <a:r>
-              <a:rPr lang="en-US"/>
-              <a:t>Corbin Ferguson</a:t>
-            </a:r>
-            <a:endParaRPr lang="en-US" dirty="0"/>
-          </a:p>
-        </p:txBody>
-      </p:sp>
-      <p:sp>
-        <p:nvSpPr>
-          <p:cNvPr id="5" name="Slide Number Placeholder 4">
-            <a:extLst>
-              <a:ext uri="{FF2B5EF4-FFF2-40B4-BE49-F238E27FC236}">
-                <a16:creationId xmlns:a16="http://schemas.microsoft.com/office/drawing/2014/main" id="{815389D2-E47D-4909-7C5F-8A4D84C4821F}"/>
-              </a:ext>
-            </a:extLst>
-          </p:cNvPr>
-          <p:cNvSpPr>
-            <a:spLocks noGrp="1"/>
-          </p:cNvSpPr>
-          <p:nvPr>
-            <p:ph type="sldNum" sz="quarter" idx="16"/>
-          </p:nvPr>
-        </p:nvSpPr>
-        <p:spPr/>
-        <p:txBody>
-          <a:bodyPr/>
-          <a:lstStyle/>
-          <a:p>
-            <a:r>
-              <a:rPr lang="en-US"/>
-              <a:t>Slide </a:t>
-            </a:r>
-            <a:fld id="{B7F1FE61-F696-4BC2-948F-7278C8C6DBB9}" type="slidenum">
-              <a:rPr lang="en-US" smtClean="0"/>
-              <a:t>21</a:t>
-            </a:fld>
-            <a:endParaRPr lang="en-US" dirty="0"/>
-          </a:p>
-        </p:txBody>
-      </p:sp>
-      <p:sp>
-        <p:nvSpPr>
-          <p:cNvPr id="2" name="Title 1">
-            <a:extLst>
-              <a:ext uri="{FF2B5EF4-FFF2-40B4-BE49-F238E27FC236}">
-                <a16:creationId xmlns:a16="http://schemas.microsoft.com/office/drawing/2014/main" id="{61113C17-0C45-ADED-44EF-50665713EACA}"/>
-              </a:ext>
-            </a:extLst>
-          </p:cNvPr>
-          <p:cNvSpPr>
-            <a:spLocks noGrp="1"/>
-          </p:cNvSpPr>
-          <p:nvPr>
-            <p:ph type="title"/>
-          </p:nvPr>
-        </p:nvSpPr>
-        <p:spPr/>
-        <p:txBody>
-          <a:bodyPr/>
-          <a:lstStyle/>
-          <a:p>
-            <a:r>
-              <a:rPr lang="en-US" dirty="0"/>
-              <a:t>Lessons Learned</a:t>
-            </a:r>
-          </a:p>
-        </p:txBody>
-      </p:sp>
-    </p:spTree>
-    <p:extLst>
-      <p:ext uri="{BB962C8B-B14F-4D97-AF65-F5344CB8AC3E}">
-        <p14:creationId xmlns:p14="http://schemas.microsoft.com/office/powerpoint/2010/main" val="785037573"/>
       </p:ext>
     </p:extLst>
   </p:cSld>
@@ -22644,13 +23158,7 @@
   <p:cSld>
     <p:spTree>
       <p:nvGrpSpPr>
-        <p:cNvPr id="1" name="">
-          <a:extLst>
-            <a:ext uri="{FF2B5EF4-FFF2-40B4-BE49-F238E27FC236}">
-              <a16:creationId xmlns:a16="http://schemas.microsoft.com/office/drawing/2014/main" id="{B2FF2CB5-4411-5F8F-ECAD-B9723833255F}"/>
-            </a:ext>
-          </a:extLst>
-        </p:cNvPr>
+        <p:cNvPr id="1" name=""/>
         <p:cNvGrpSpPr/>
         <p:nvPr/>
       </p:nvGrpSpPr>
@@ -22667,7 +23175,7 @@
           <p:cNvPr id="9" name="Text Placeholder 8">
             <a:extLst>
               <a:ext uri="{FF2B5EF4-FFF2-40B4-BE49-F238E27FC236}">
-                <a16:creationId xmlns:a16="http://schemas.microsoft.com/office/drawing/2014/main" id="{10547ECE-F4D6-7E7B-B957-03EBA9BFAC16}"/>
+                <a16:creationId xmlns:a16="http://schemas.microsoft.com/office/drawing/2014/main" id="{F12D16D0-86CF-AF46-C7E4-9E991E80B9A8}"/>
               </a:ext>
             </a:extLst>
           </p:cNvPr>
@@ -22688,8 +23196,8 @@
               <a:buChar char="•"/>
             </a:pPr>
             <a:r>
-              <a:rPr lang="en-US" dirty="0"/>
-              <a:t>Gained substantial experience in software design principles, test‑driven development practices, UML modeling, and project management techniques for single‑developer projects.</a:t>
+              <a:rPr lang="en-US" sz="2200" dirty="0"/>
+              <a:t>Start with clearly defined and detailed requirements</a:t>
             </a:r>
           </a:p>
           <a:p>
@@ -22698,38 +23206,8 @@
               <a:buChar char="•"/>
             </a:pPr>
             <a:r>
-              <a:rPr lang="en-US" dirty="0"/>
-              <a:t>Potential future additions:</a:t>
-            </a:r>
-          </a:p>
-          <a:p>
-            <a:pPr marL="703263" lvl="1" indent="-342900">
-              <a:buFont typeface="Arial" panose="020B0604020202020204" pitchFamily="34" charset="0"/>
-              <a:buChar char="•"/>
-            </a:pPr>
-            <a:r>
-              <a:rPr lang="en-US" dirty="0"/>
-              <a:t>Upgraded UI to more intuitive feel</a:t>
-            </a:r>
-          </a:p>
-          <a:p>
-            <a:pPr marL="703263" lvl="1" indent="-342900">
-              <a:buFont typeface="Arial" panose="020B0604020202020204" pitchFamily="34" charset="0"/>
-              <a:buChar char="•"/>
-            </a:pPr>
-            <a:r>
-              <a:rPr lang="en-US" dirty="0"/>
-              <a:t>Enhanced system validation</a:t>
-            </a:r>
-          </a:p>
-          <a:p>
-            <a:pPr marL="703263" lvl="1" indent="-342900">
-              <a:buFont typeface="Arial" panose="020B0604020202020204" pitchFamily="34" charset="0"/>
-              <a:buChar char="•"/>
-            </a:pPr>
-            <a:r>
-              <a:rPr lang="en-US" dirty="0"/>
-              <a:t>Opening file being actively modified</a:t>
+              <a:rPr lang="en-US" sz="2200" dirty="0"/>
+              <a:t>Segment out and abstract classes from the start, interfaces were very helpful</a:t>
             </a:r>
           </a:p>
           <a:p>
@@ -22738,28 +23216,38 @@
               <a:buChar char="•"/>
             </a:pPr>
             <a:r>
-              <a:rPr lang="en-US" dirty="0"/>
-              <a:t>Significant additional input and item‑level validation is required to ensure data integrity and make the tool viable for real‑world deployment.</a:t>
-            </a:r>
-          </a:p>
-          <a:p>
-            <a:pPr marL="703263" lvl="1" indent="-342900">
+              <a:rPr lang="en-US" sz="2200" dirty="0"/>
+              <a:t>Devote more time to comparing tool options early on, rather than running with the first tool that works</a:t>
+            </a:r>
+          </a:p>
+          <a:p>
+            <a:pPr marL="342900" indent="-342900">
               <a:buFont typeface="Arial" panose="020B0604020202020204" pitchFamily="34" charset="0"/>
               <a:buChar char="•"/>
             </a:pPr>
             <a:r>
-              <a:rPr lang="en-US" sz="2000" dirty="0"/>
-              <a:t>Still requires extensive manual corrections outside of the defined XML schema, reducing reliability and increasing error risk.</a:t>
-            </a:r>
-          </a:p>
-          <a:p>
-            <a:pPr marL="703263" lvl="1" indent="-342900">
+              <a:rPr lang="en-US" sz="2200" dirty="0"/>
+              <a:t>Integrate documentation work throughout development, rather than separately</a:t>
+            </a:r>
+          </a:p>
+          <a:p>
+            <a:pPr marL="342900" indent="-342900">
               <a:buFont typeface="Arial" panose="020B0604020202020204" pitchFamily="34" charset="0"/>
               <a:buChar char="•"/>
             </a:pPr>
             <a:r>
-              <a:rPr lang="en-US" sz="2000" dirty="0"/>
-              <a:t>Not all dependencies function like normal XML dependencies but are unique to L5X, meaning they cannot be included in the schema</a:t>
+              <a:rPr lang="en-US" sz="2200" dirty="0"/>
+              <a:t>Develop tests alongside application, not after the fact(test-driven development leads to cleaner code and easier debugging)</a:t>
+            </a:r>
+          </a:p>
+          <a:p>
+            <a:pPr marL="342900" indent="-342900">
+              <a:buFont typeface="Arial" panose="020B0604020202020204" pitchFamily="34" charset="0"/>
+              <a:buChar char="•"/>
+            </a:pPr>
+            <a:r>
+              <a:rPr lang="en-US" sz="2200" dirty="0"/>
+              <a:t>Keep a constant line of communication open with the client(Matt) for better workflow in system design</a:t>
             </a:r>
           </a:p>
         </p:txBody>
@@ -22769,7 +23257,7 @@
           <p:cNvPr id="3" name="Date Placeholder 2">
             <a:extLst>
               <a:ext uri="{FF2B5EF4-FFF2-40B4-BE49-F238E27FC236}">
-                <a16:creationId xmlns:a16="http://schemas.microsoft.com/office/drawing/2014/main" id="{E4CEC92F-70B2-5955-59BA-71F8FCCF7607}"/>
+                <a16:creationId xmlns:a16="http://schemas.microsoft.com/office/drawing/2014/main" id="{4591C6F5-1471-06B7-C32B-59BCD0819533}"/>
               </a:ext>
             </a:extLst>
           </p:cNvPr>
@@ -22798,7 +23286,7 @@
           <p:cNvPr id="4" name="Footer Placeholder 3">
             <a:extLst>
               <a:ext uri="{FF2B5EF4-FFF2-40B4-BE49-F238E27FC236}">
-                <a16:creationId xmlns:a16="http://schemas.microsoft.com/office/drawing/2014/main" id="{ABD4DDF0-37C4-840E-A856-383B023B3228}"/>
+                <a16:creationId xmlns:a16="http://schemas.microsoft.com/office/drawing/2014/main" id="{CCB6A675-2BFE-99E9-F187-94EAE5052860}"/>
               </a:ext>
             </a:extLst>
           </p:cNvPr>
@@ -22827,7 +23315,7 @@
           <p:cNvPr id="5" name="Slide Number Placeholder 4">
             <a:extLst>
               <a:ext uri="{FF2B5EF4-FFF2-40B4-BE49-F238E27FC236}">
-                <a16:creationId xmlns:a16="http://schemas.microsoft.com/office/drawing/2014/main" id="{E1A1F705-1454-F7D1-51D1-6A08783759F2}"/>
+                <a16:creationId xmlns:a16="http://schemas.microsoft.com/office/drawing/2014/main" id="{815389D2-E47D-4909-7C5F-8A4D84C4821F}"/>
               </a:ext>
             </a:extLst>
           </p:cNvPr>
@@ -22860,7 +23348,7 @@
           <p:cNvPr id="2" name="Title 1">
             <a:extLst>
               <a:ext uri="{FF2B5EF4-FFF2-40B4-BE49-F238E27FC236}">
-                <a16:creationId xmlns:a16="http://schemas.microsoft.com/office/drawing/2014/main" id="{29DC8B36-B78B-74FC-1B96-372E60B3CCA5}"/>
+                <a16:creationId xmlns:a16="http://schemas.microsoft.com/office/drawing/2014/main" id="{61113C17-0C45-ADED-44EF-50665713EACA}"/>
               </a:ext>
             </a:extLst>
           </p:cNvPr>
@@ -22878,7 +23366,7 @@
           <a:p>
             <a:r>
               <a:rPr lang="en-US" dirty="0"/>
-              <a:t>Conclusion</a:t>
+              <a:t>Lessons Learned</a:t>
             </a:r>
           </a:p>
         </p:txBody>
@@ -22886,7 +23374,7 @@
     </p:spTree>
     <p:extLst>
       <p:ext uri="{BB962C8B-B14F-4D97-AF65-F5344CB8AC3E}">
-        <p14:creationId xmlns:p14="http://schemas.microsoft.com/office/powerpoint/2010/main" val="1067535560"/>
+        <p14:creationId xmlns:p14="http://schemas.microsoft.com/office/powerpoint/2010/main" val="785037573"/>
       </p:ext>
     </p:extLst>
   </p:cSld>
@@ -22912,6 +23400,271 @@
         <p:cNvPr id="1" name="">
           <a:extLst>
             <a:ext uri="{FF2B5EF4-FFF2-40B4-BE49-F238E27FC236}">
+              <a16:creationId xmlns:a16="http://schemas.microsoft.com/office/drawing/2014/main" id="{B2FF2CB5-4411-5F8F-ECAD-B9723833255F}"/>
+            </a:ext>
+          </a:extLst>
+        </p:cNvPr>
+        <p:cNvGrpSpPr/>
+        <p:nvPr/>
+      </p:nvGrpSpPr>
+      <p:grpSpPr>
+        <a:xfrm>
+          <a:off x="0" y="0"/>
+          <a:ext cx="0" cy="0"/>
+          <a:chOff x="0" y="0"/>
+          <a:chExt cx="0" cy="0"/>
+        </a:xfrm>
+      </p:grpSpPr>
+      <p:sp>
+        <p:nvSpPr>
+          <p:cNvPr id="9" name="Text Placeholder 8">
+            <a:extLst>
+              <a:ext uri="{FF2B5EF4-FFF2-40B4-BE49-F238E27FC236}">
+                <a16:creationId xmlns:a16="http://schemas.microsoft.com/office/drawing/2014/main" id="{10547ECE-F4D6-7E7B-B957-03EBA9BFAC16}"/>
+              </a:ext>
+            </a:extLst>
+          </p:cNvPr>
+          <p:cNvSpPr>
+            <a:spLocks noGrp="1"/>
+          </p:cNvSpPr>
+          <p:nvPr>
+            <p:ph type="body" sz="quarter" idx="13"/>
+          </p:nvPr>
+        </p:nvSpPr>
+        <p:spPr/>
+        <p:txBody>
+          <a:bodyPr/>
+          <a:lstStyle/>
+          <a:p>
+            <a:pPr marL="342900" indent="-342900">
+              <a:buFont typeface="Arial" panose="020B0604020202020204" pitchFamily="34" charset="0"/>
+              <a:buChar char="•"/>
+            </a:pPr>
+            <a:r>
+              <a:rPr lang="en-US" dirty="0"/>
+              <a:t>Gained substantial experience in software design principles, test‑driven development practices, UML modeling, and project management techniques for single‑developer projects</a:t>
+            </a:r>
+          </a:p>
+          <a:p>
+            <a:pPr marL="342900" indent="-342900">
+              <a:buFont typeface="Arial" panose="020B0604020202020204" pitchFamily="34" charset="0"/>
+              <a:buChar char="•"/>
+            </a:pPr>
+            <a:r>
+              <a:rPr lang="en-US" dirty="0"/>
+              <a:t>Potential future additions:</a:t>
+            </a:r>
+          </a:p>
+          <a:p>
+            <a:pPr marL="703263" lvl="1" indent="-342900">
+              <a:buFont typeface="Arial" panose="020B0604020202020204" pitchFamily="34" charset="0"/>
+              <a:buChar char="•"/>
+            </a:pPr>
+            <a:r>
+              <a:rPr lang="en-US" dirty="0"/>
+              <a:t>Upgraded UI to more intuitive feel</a:t>
+            </a:r>
+          </a:p>
+          <a:p>
+            <a:pPr marL="703263" lvl="1" indent="-342900">
+              <a:buFont typeface="Arial" panose="020B0604020202020204" pitchFamily="34" charset="0"/>
+              <a:buChar char="•"/>
+            </a:pPr>
+            <a:r>
+              <a:rPr lang="en-US" dirty="0"/>
+              <a:t>Enhanced system validation</a:t>
+            </a:r>
+          </a:p>
+          <a:p>
+            <a:pPr marL="703263" lvl="1" indent="-342900">
+              <a:buFont typeface="Arial" panose="020B0604020202020204" pitchFamily="34" charset="0"/>
+              <a:buChar char="•"/>
+            </a:pPr>
+            <a:r>
+              <a:rPr lang="en-US" dirty="0"/>
+              <a:t>Opening file being actively modified</a:t>
+            </a:r>
+          </a:p>
+          <a:p>
+            <a:pPr marL="342900" indent="-342900">
+              <a:buFont typeface="Arial" panose="020B0604020202020204" pitchFamily="34" charset="0"/>
+              <a:buChar char="•"/>
+            </a:pPr>
+            <a:r>
+              <a:rPr lang="en-US" dirty="0"/>
+              <a:t>Significant additional input and item‑level validation is required to ensure data integrity and make the tool viable for real‑world deployment</a:t>
+            </a:r>
+          </a:p>
+          <a:p>
+            <a:pPr marL="703263" lvl="1" indent="-342900">
+              <a:buFont typeface="Arial" panose="020B0604020202020204" pitchFamily="34" charset="0"/>
+              <a:buChar char="•"/>
+            </a:pPr>
+            <a:r>
+              <a:rPr lang="en-US" sz="2000" dirty="0"/>
+              <a:t>Still requires extensive manual corrections outside of the defined XML schema, reducing reliability and increasing error risk</a:t>
+            </a:r>
+          </a:p>
+          <a:p>
+            <a:pPr marL="703263" lvl="1" indent="-342900">
+              <a:buFont typeface="Arial" panose="020B0604020202020204" pitchFamily="34" charset="0"/>
+              <a:buChar char="•"/>
+            </a:pPr>
+            <a:r>
+              <a:rPr lang="en-US" sz="2000" dirty="0"/>
+              <a:t>Not all dependencies function like normal XML dependencies but are unique to L5X, meaning they cannot be included in the schema</a:t>
+            </a:r>
+          </a:p>
+        </p:txBody>
+      </p:sp>
+      <p:sp>
+        <p:nvSpPr>
+          <p:cNvPr id="3" name="Date Placeholder 2">
+            <a:extLst>
+              <a:ext uri="{FF2B5EF4-FFF2-40B4-BE49-F238E27FC236}">
+                <a16:creationId xmlns:a16="http://schemas.microsoft.com/office/drawing/2014/main" id="{E4CEC92F-70B2-5955-59BA-71F8FCCF7607}"/>
+              </a:ext>
+            </a:extLst>
+          </p:cNvPr>
+          <p:cNvSpPr>
+            <a:spLocks noGrp="1"/>
+          </p:cNvSpPr>
+          <p:nvPr>
+            <p:ph type="dt" sz="half" idx="14"/>
+          </p:nvPr>
+        </p:nvSpPr>
+        <p:spPr/>
+        <p:txBody>
+          <a:bodyPr/>
+          <a:lstStyle/>
+          <a:p>
+            <a:r>
+              <a:rPr lang="en-US"/>
+              <a:t>L5X Automation Build Tool</a:t>
+            </a:r>
+            <a:endParaRPr lang="en-US" dirty="0"/>
+          </a:p>
+        </p:txBody>
+      </p:sp>
+      <p:sp>
+        <p:nvSpPr>
+          <p:cNvPr id="4" name="Footer Placeholder 3">
+            <a:extLst>
+              <a:ext uri="{FF2B5EF4-FFF2-40B4-BE49-F238E27FC236}">
+                <a16:creationId xmlns:a16="http://schemas.microsoft.com/office/drawing/2014/main" id="{ABD4DDF0-37C4-840E-A856-383B023B3228}"/>
+              </a:ext>
+            </a:extLst>
+          </p:cNvPr>
+          <p:cNvSpPr>
+            <a:spLocks noGrp="1"/>
+          </p:cNvSpPr>
+          <p:nvPr>
+            <p:ph type="ftr" sz="quarter" idx="15"/>
+          </p:nvPr>
+        </p:nvSpPr>
+        <p:spPr/>
+        <p:txBody>
+          <a:bodyPr/>
+          <a:lstStyle/>
+          <a:p>
+            <a:r>
+              <a:rPr lang="en-US"/>
+              <a:t>Corbin Ferguson</a:t>
+            </a:r>
+            <a:endParaRPr lang="en-US" dirty="0"/>
+          </a:p>
+        </p:txBody>
+      </p:sp>
+      <p:sp>
+        <p:nvSpPr>
+          <p:cNvPr id="5" name="Slide Number Placeholder 4">
+            <a:extLst>
+              <a:ext uri="{FF2B5EF4-FFF2-40B4-BE49-F238E27FC236}">
+                <a16:creationId xmlns:a16="http://schemas.microsoft.com/office/drawing/2014/main" id="{E1A1F705-1454-F7D1-51D1-6A08783759F2}"/>
+              </a:ext>
+            </a:extLst>
+          </p:cNvPr>
+          <p:cNvSpPr>
+            <a:spLocks noGrp="1"/>
+          </p:cNvSpPr>
+          <p:nvPr>
+            <p:ph type="sldNum" sz="quarter" idx="16"/>
+          </p:nvPr>
+        </p:nvSpPr>
+        <p:spPr/>
+        <p:txBody>
+          <a:bodyPr/>
+          <a:lstStyle/>
+          <a:p>
+            <a:r>
+              <a:rPr lang="en-US"/>
+              <a:t>Slide </a:t>
+            </a:r>
+            <a:fld id="{B7F1FE61-F696-4BC2-948F-7278C8C6DBB9}" type="slidenum">
+              <a:rPr lang="en-US" smtClean="0"/>
+              <a:t>23</a:t>
+            </a:fld>
+            <a:endParaRPr lang="en-US" dirty="0"/>
+          </a:p>
+        </p:txBody>
+      </p:sp>
+      <p:sp>
+        <p:nvSpPr>
+          <p:cNvPr id="2" name="Title 1">
+            <a:extLst>
+              <a:ext uri="{FF2B5EF4-FFF2-40B4-BE49-F238E27FC236}">
+                <a16:creationId xmlns:a16="http://schemas.microsoft.com/office/drawing/2014/main" id="{29DC8B36-B78B-74FC-1B96-372E60B3CCA5}"/>
+              </a:ext>
+            </a:extLst>
+          </p:cNvPr>
+          <p:cNvSpPr>
+            <a:spLocks noGrp="1"/>
+          </p:cNvSpPr>
+          <p:nvPr>
+            <p:ph type="title"/>
+          </p:nvPr>
+        </p:nvSpPr>
+        <p:spPr/>
+        <p:txBody>
+          <a:bodyPr/>
+          <a:lstStyle/>
+          <a:p>
+            <a:r>
+              <a:rPr lang="en-US" dirty="0"/>
+              <a:t>Conclusion</a:t>
+            </a:r>
+          </a:p>
+        </p:txBody>
+      </p:sp>
+    </p:spTree>
+    <p:extLst>
+      <p:ext uri="{BB962C8B-B14F-4D97-AF65-F5344CB8AC3E}">
+        <p14:creationId xmlns:p14="http://schemas.microsoft.com/office/powerpoint/2010/main" val="1067535560"/>
+      </p:ext>
+    </p:extLst>
+  </p:cSld>
+  <p:clrMapOvr>
+    <a:masterClrMapping/>
+  </p:clrMapOvr>
+  <mc:AlternateContent xmlns:mc="http://schemas.openxmlformats.org/markup-compatibility/2006" xmlns:p14="http://schemas.microsoft.com/office/powerpoint/2010/main">
+    <mc:Choice Requires="p14">
+      <p:transition p14:dur="0"/>
+    </mc:Choice>
+    <mc:Fallback xmlns="">
+      <p:transition/>
+    </mc:Fallback>
+  </mc:AlternateContent>
+</p:sld>
+</file>
+
+<file path=ppt/slides/slide24.xml><?xml version="1.0" encoding="utf-8"?>
+<p:sld xmlns:a="http://schemas.openxmlformats.org/drawingml/2006/main" xmlns:r="http://schemas.openxmlformats.org/officeDocument/2006/relationships" xmlns:p="http://schemas.openxmlformats.org/presentationml/2006/main">
+  <p:cSld>
+    <p:spTree>
+      <p:nvGrpSpPr>
+        <p:cNvPr id="1" name="">
+          <a:extLst>
+            <a:ext uri="{FF2B5EF4-FFF2-40B4-BE49-F238E27FC236}">
               <a16:creationId xmlns:a16="http://schemas.microsoft.com/office/drawing/2014/main" id="{F576D799-83D0-D8E1-369F-8F93C173AC3A}"/>
             </a:ext>
           </a:extLst>
@@ -22954,7 +23707,7 @@
             </a:r>
             <a:fld id="{C20DA095-8283-4DCC-BA55-3B61E88C6181}" type="slidenum">
               <a:rPr lang="en-US" smtClean="0"/>
-              <a:t>23</a:t>
+              <a:t>24</a:t>
             </a:fld>
             <a:endParaRPr lang="en-US" dirty="0"/>
           </a:p>
@@ -23056,7 +23809,7 @@
 </p:sld>
 </file>
 
-<file path=ppt/slides/slide24.xml><?xml version="1.0" encoding="utf-8"?>
+<file path=ppt/slides/slide25.xml><?xml version="1.0" encoding="utf-8"?>
 <p:sld xmlns:a="http://schemas.openxmlformats.org/drawingml/2006/main" xmlns:r="http://schemas.openxmlformats.org/officeDocument/2006/relationships" xmlns:p="http://schemas.openxmlformats.org/presentationml/2006/main">
   <p:cSld>
     <p:spTree>
@@ -23331,7 +24084,7 @@
             </a:r>
             <a:fld id="{B7F1FE61-F696-4BC2-948F-7278C8C6DBB9}" type="slidenum">
               <a:rPr lang="en-US" smtClean="0"/>
-              <a:t>24</a:t>
+              <a:t>25</a:t>
             </a:fld>
             <a:endParaRPr lang="en-US" dirty="0"/>
           </a:p>
@@ -23477,20 +24230,38 @@
           <a:p>
             <a:r>
               <a:rPr lang="en-US" dirty="0"/>
+              <a:t>The existing designer was designed for high-detail PLC (programmable logic controller) code development</a:t>
+            </a:r>
+          </a:p>
+          <a:p>
+            <a:r>
+              <a:rPr lang="en-US" dirty="0"/>
               <a:t>Designing controller code from scratch for each project in the designer could be tedious and repetitive</a:t>
             </a:r>
           </a:p>
           <a:p>
             <a:r>
               <a:rPr lang="en-US" dirty="0"/>
-              <a:t>There was no simple way to generate large amounts of basic template code that would be frequently reused in a time-efficient manner</a:t>
-            </a:r>
-          </a:p>
-          <a:p>
-            <a:r>
-              <a:rPr lang="en-US" dirty="0"/>
-              <a:t>The existing designer was designed for high-detail PLC code development and unoptimized for rapid development</a:t>
-            </a:r>
+              <a:t>No simple way to generate large amounts of basic template code quickly</a:t>
+            </a:r>
+          </a:p>
+          <a:p>
+            <a:pPr marL="0" indent="0">
+              <a:buNone/>
+            </a:pPr>
+            <a:r>
+              <a:rPr lang="en-US" dirty="0"/>
+              <a:t>Feature enabling the creation of a tool:</a:t>
+            </a:r>
+          </a:p>
+          <a:p>
+            <a:r>
+              <a:rPr lang="en-US" dirty="0"/>
+              <a:t>The designer can import/export custom XML files(.L5X) containing automation code in segments or in full</a:t>
+            </a:r>
+          </a:p>
+          <a:p>
+            <a:endParaRPr lang="en-US" dirty="0"/>
           </a:p>
         </p:txBody>
       </p:sp>
@@ -24143,10 +24914,10 @@
       </p:grpSpPr>
       <p:sp>
         <p:nvSpPr>
-          <p:cNvPr id="3079" name="Title 1">
-            <a:extLst>
-              <a:ext uri="{FF2B5EF4-FFF2-40B4-BE49-F238E27FC236}">
-                <a16:creationId xmlns:a16="http://schemas.microsoft.com/office/drawing/2014/main" id="{DE7D139F-1F92-4BD8-0AD6-6BA8F2883934}"/>
+          <p:cNvPr id="2" name="Title 1">
+            <a:extLst>
+              <a:ext uri="{FF2B5EF4-FFF2-40B4-BE49-F238E27FC236}">
+                <a16:creationId xmlns:a16="http://schemas.microsoft.com/office/drawing/2014/main" id="{FC0F7EBC-D651-293F-1FD9-D7B38E1FFCE0}"/>
               </a:ext>
             </a:extLst>
           </p:cNvPr>
@@ -24157,19 +24928,129 @@
             <p:ph type="title"/>
           </p:nvPr>
         </p:nvSpPr>
-        <p:spPr>
-          <a:xfrm>
-            <a:off x="334963" y="620690"/>
-            <a:ext cx="11522075" cy="360041"/>
-          </a:xfrm>
-        </p:spPr>
+        <p:spPr/>
         <p:txBody>
           <a:bodyPr/>
           <a:lstStyle/>
           <a:p>
             <a:r>
               <a:rPr lang="en-US" dirty="0"/>
-              <a:t>System Architecture</a:t>
+              <a:t>Tools &amp; Technologies</a:t>
+            </a:r>
+          </a:p>
+        </p:txBody>
+      </p:sp>
+      <p:sp>
+        <p:nvSpPr>
+          <p:cNvPr id="3" name="Content Placeholder 2">
+            <a:extLst>
+              <a:ext uri="{FF2B5EF4-FFF2-40B4-BE49-F238E27FC236}">
+                <a16:creationId xmlns:a16="http://schemas.microsoft.com/office/drawing/2014/main" id="{7193BD63-63E1-A487-4179-CEB7CD1BA869}"/>
+              </a:ext>
+            </a:extLst>
+          </p:cNvPr>
+          <p:cNvSpPr>
+            <a:spLocks noGrp="1"/>
+          </p:cNvSpPr>
+          <p:nvPr>
+            <p:ph idx="1"/>
+          </p:nvPr>
+        </p:nvSpPr>
+        <p:spPr/>
+        <p:txBody>
+          <a:bodyPr/>
+          <a:lstStyle/>
+          <a:p>
+            <a:r>
+              <a:rPr lang="en-US" dirty="0"/>
+              <a:t>Development Technologies</a:t>
+            </a:r>
+          </a:p>
+          <a:p>
+            <a:pPr lvl="1"/>
+            <a:r>
+              <a:rPr lang="en-US" dirty="0"/>
+              <a:t>C# – Primary programming language for application logic</a:t>
+            </a:r>
+          </a:p>
+          <a:p>
+            <a:pPr lvl="1"/>
+            <a:r>
+              <a:rPr lang="en-US" dirty="0"/>
+              <a:t>LINQ to XML – XML parsing, querying, and structured L5X manipulation</a:t>
+            </a:r>
+          </a:p>
+          <a:p>
+            <a:pPr lvl="1"/>
+            <a:r>
+              <a:rPr lang="en-US" dirty="0"/>
+              <a:t>Windows Forms – GUI framework for the forms taking user input and presenting information</a:t>
+            </a:r>
+          </a:p>
+          <a:p>
+            <a:pPr lvl="1"/>
+            <a:r>
+              <a:rPr lang="en-US" dirty="0"/>
+              <a:t>XSD Schema File –XML file validation reference for L5X content and structure verification</a:t>
+            </a:r>
+          </a:p>
+          <a:p>
+            <a:r>
+              <a:rPr lang="en-US" dirty="0"/>
+              <a:t>Testing &amp; Quality Assurance</a:t>
+            </a:r>
+          </a:p>
+          <a:p>
+            <a:pPr lvl="1"/>
+            <a:r>
+              <a:rPr lang="en-US" dirty="0" err="1"/>
+              <a:t>MSTest</a:t>
+            </a:r>
+            <a:r>
+              <a:rPr lang="en-US" dirty="0"/>
+              <a:t> – Unit testing framework for backend and workflow logic</a:t>
+            </a:r>
+          </a:p>
+          <a:p>
+            <a:pPr lvl="1"/>
+            <a:r>
+              <a:rPr lang="en-US" dirty="0" err="1"/>
+              <a:t>Moq</a:t>
+            </a:r>
+            <a:r>
+              <a:rPr lang="en-US" dirty="0"/>
+              <a:t> – Mocking framework used to isolate external dependencies during tests</a:t>
+            </a:r>
+          </a:p>
+          <a:p>
+            <a:pPr lvl="1"/>
+            <a:r>
+              <a:rPr lang="en-US" dirty="0" err="1"/>
+              <a:t>FlaUI</a:t>
+            </a:r>
+            <a:r>
+              <a:rPr lang="en-US" dirty="0"/>
+              <a:t> – Automated UI testing to validate GUI window flow</a:t>
+            </a:r>
+          </a:p>
+          <a:p>
+            <a:r>
+              <a:rPr lang="en-US" dirty="0"/>
+              <a:t>Automation &amp; Project Management</a:t>
+            </a:r>
+          </a:p>
+          <a:p>
+            <a:pPr lvl="1"/>
+            <a:r>
+              <a:rPr lang="en-US" dirty="0"/>
+              <a:t>Jenkins – Automated pipeline for continuous testing and verification</a:t>
+            </a:r>
+          </a:p>
+          <a:p>
+            <a:pPr lvl="1"/>
+            <a:r>
+              <a:rPr lang="en-US" dirty="0"/>
+              <a:t>Trello – Task tracking, requirements organization, and progress visualization</a:t>
             </a:r>
           </a:p>
         </p:txBody>
@@ -24179,7 +25060,7 @@
           <p:cNvPr id="4" name="Date Placeholder 3">
             <a:extLst>
               <a:ext uri="{FF2B5EF4-FFF2-40B4-BE49-F238E27FC236}">
-                <a16:creationId xmlns:a16="http://schemas.microsoft.com/office/drawing/2014/main" id="{2A9FE8A4-E06E-22A9-D3EB-7A7FCED11DB8}"/>
+                <a16:creationId xmlns:a16="http://schemas.microsoft.com/office/drawing/2014/main" id="{5D9C1B05-7469-9FE0-8DA0-BD35848F5FD4}"/>
               </a:ext>
             </a:extLst>
           </p:cNvPr>
@@ -24190,317 +25071,45 @@
             <p:ph type="dt" sz="half" idx="10"/>
           </p:nvPr>
         </p:nvSpPr>
-        <p:spPr>
-          <a:xfrm>
-            <a:off x="334963" y="194736"/>
-            <a:ext cx="9674225" cy="180000"/>
-          </a:xfrm>
-        </p:spPr>
-        <p:txBody>
-          <a:bodyPr wrap="none" anchor="t">
-            <a:normAutofit/>
-          </a:bodyPr>
-          <a:lstStyle/>
-          <a:p>
-            <a:pPr>
-              <a:lnSpc>
-                <a:spcPct val="90000"/>
-              </a:lnSpc>
-              <a:spcAft>
-                <a:spcPts val="600"/>
-              </a:spcAft>
-            </a:pPr>
+        <p:spPr/>
+        <p:txBody>
+          <a:bodyPr/>
+          <a:lstStyle/>
+          <a:p>
             <a:r>
               <a:rPr lang="en-US"/>
               <a:t>L5X Automation Build Tool</a:t>
             </a:r>
-          </a:p>
-        </p:txBody>
-      </p:sp>
-      <p:pic>
-        <p:nvPicPr>
-          <p:cNvPr id="3074" name="Picture 2">
-            <a:extLst>
-              <a:ext uri="{FF2B5EF4-FFF2-40B4-BE49-F238E27FC236}">
-                <a16:creationId xmlns:a16="http://schemas.microsoft.com/office/drawing/2014/main" id="{589C1114-EE17-B236-E59B-833EB4FC6E60}"/>
-              </a:ext>
-            </a:extLst>
-          </p:cNvPr>
-          <p:cNvPicPr>
-            <a:picLocks noChangeAspect="1" noChangeArrowheads="1"/>
-          </p:cNvPicPr>
-          <p:nvPr/>
-        </p:nvPicPr>
-        <p:blipFill>
-          <a:blip r:embed="rId3">
-            <a:extLst>
-              <a:ext uri="{28A0092B-C50C-407E-A947-70E740481C1C}">
-                <a14:useLocalDpi xmlns:a14="http://schemas.microsoft.com/office/drawing/2010/main" val="0"/>
-              </a:ext>
-            </a:extLst>
-          </a:blip>
-          <a:stretch>
-            <a:fillRect/>
-          </a:stretch>
-        </p:blipFill>
-        <p:spPr bwMode="auto">
-          <a:xfrm>
-            <a:off x="1054574" y="1164474"/>
-            <a:ext cx="4176777" cy="4928351"/>
-          </a:xfrm>
-          <a:prstGeom prst="rect">
-            <a:avLst/>
-          </a:prstGeom>
-          <a:solidFill>
-            <a:srgbClr val="FFFFFF"/>
-          </a:solidFill>
-        </p:spPr>
-      </p:pic>
-      <p:sp>
-        <p:nvSpPr>
-          <p:cNvPr id="3081" name="Content Placeholder 4">
-            <a:extLst>
-              <a:ext uri="{FF2B5EF4-FFF2-40B4-BE49-F238E27FC236}">
-                <a16:creationId xmlns:a16="http://schemas.microsoft.com/office/drawing/2014/main" id="{48E97AF7-5AD2-DC2E-0D5D-6756B90C946E}"/>
-              </a:ext>
-            </a:extLst>
-          </p:cNvPr>
-          <p:cNvSpPr>
-            <a:spLocks noGrp="1"/>
-          </p:cNvSpPr>
-          <p:nvPr>
-            <p:ph sz="quarter" idx="14"/>
-          </p:nvPr>
-        </p:nvSpPr>
-        <p:spPr>
-          <a:xfrm>
-            <a:off x="6241037" y="1061156"/>
-            <a:ext cx="5616000" cy="5031669"/>
-          </a:xfrm>
-        </p:spPr>
+            <a:endParaRPr lang="en-US" dirty="0"/>
+          </a:p>
+        </p:txBody>
+      </p:sp>
+      <p:sp>
+        <p:nvSpPr>
+          <p:cNvPr id="5" name="Footer Placeholder 4">
+            <a:extLst>
+              <a:ext uri="{FF2B5EF4-FFF2-40B4-BE49-F238E27FC236}">
+                <a16:creationId xmlns:a16="http://schemas.microsoft.com/office/drawing/2014/main" id="{68893A56-3ABA-C940-AA5A-1DE9ECD8E72B}"/>
+              </a:ext>
+            </a:extLst>
+          </p:cNvPr>
+          <p:cNvSpPr>
+            <a:spLocks noGrp="1"/>
+          </p:cNvSpPr>
+          <p:nvPr>
+            <p:ph type="ftr" sz="quarter" idx="11"/>
+          </p:nvPr>
+        </p:nvSpPr>
+        <p:spPr/>
         <p:txBody>
           <a:bodyPr/>
           <a:lstStyle/>
           <a:p>
             <a:r>
-              <a:rPr lang="en-US" dirty="0"/>
-              <a:t>3-Tiered architecture style:</a:t>
-            </a:r>
-          </a:p>
-          <a:p>
-            <a:pPr lvl="1"/>
-            <a:r>
-              <a:rPr lang="en-US" dirty="0"/>
-              <a:t>Presentation Layer: </a:t>
-            </a:r>
-          </a:p>
-          <a:p>
-            <a:pPr marL="719138" lvl="2" fontAlgn="t">
-              <a:lnSpc>
-                <a:spcPct val="100000"/>
-              </a:lnSpc>
-              <a:buSzPct val="100000"/>
-            </a:pPr>
-            <a:r>
-              <a:rPr lang="en-US" dirty="0"/>
-              <a:t>Multi‑form, event‑driven interface</a:t>
-            </a:r>
-          </a:p>
-          <a:p>
-            <a:pPr marL="719138" lvl="2" fontAlgn="t">
-              <a:lnSpc>
-                <a:spcPct val="100000"/>
-              </a:lnSpc>
-              <a:buSzPct val="100000"/>
-            </a:pPr>
-            <a:r>
-              <a:rPr lang="en-US" dirty="0"/>
-              <a:t>Collects user input and returns structured data</a:t>
-            </a:r>
-          </a:p>
-          <a:p>
-            <a:pPr marL="719138" lvl="2" fontAlgn="t">
-              <a:lnSpc>
-                <a:spcPct val="100000"/>
-              </a:lnSpc>
-              <a:buSzPct val="100000"/>
-            </a:pPr>
-            <a:r>
-              <a:rPr lang="en-US" dirty="0"/>
-              <a:t>Dynamically navigates between UI stages based on workflow logic</a:t>
-            </a:r>
-          </a:p>
-          <a:p>
-            <a:pPr marL="542926" lvl="1" fontAlgn="t">
-              <a:lnSpc>
-                <a:spcPct val="100000"/>
-              </a:lnSpc>
-              <a:buSzPct val="100000"/>
-            </a:pPr>
-            <a:r>
-              <a:rPr lang="en-US" dirty="0"/>
-              <a:t>Business Logic Layer:</a:t>
-            </a:r>
-          </a:p>
-          <a:p>
-            <a:pPr marL="719138" lvl="2" fontAlgn="t">
-              <a:lnSpc>
-                <a:spcPct val="100000"/>
-              </a:lnSpc>
-              <a:buSzPct val="100000"/>
-            </a:pPr>
-            <a:r>
-              <a:rPr lang="en-US" dirty="0"/>
-              <a:t>Core processing written in C# using LINQ to XML</a:t>
-            </a:r>
-          </a:p>
-          <a:p>
-            <a:pPr marL="719138" lvl="2" fontAlgn="t">
-              <a:lnSpc>
-                <a:spcPct val="100000"/>
-              </a:lnSpc>
-              <a:buSzPct val="100000"/>
-            </a:pPr>
-            <a:r>
-              <a:rPr lang="en-US" dirty="0"/>
-              <a:t>Imports, Creates, modifies, deletes</a:t>
-            </a:r>
-          </a:p>
-          <a:p>
-            <a:pPr marL="542926" lvl="1" fontAlgn="t">
-              <a:lnSpc>
-                <a:spcPct val="100000"/>
-              </a:lnSpc>
-              <a:buSzPct val="100000"/>
-            </a:pPr>
-            <a:r>
-              <a:rPr lang="en-US" dirty="0"/>
-              <a:t>Data Layer:</a:t>
-            </a:r>
-          </a:p>
-          <a:p>
-            <a:pPr marL="719138" lvl="2" fontAlgn="t">
-              <a:lnSpc>
-                <a:spcPct val="100000"/>
-              </a:lnSpc>
-              <a:buSzPct val="100000"/>
-            </a:pPr>
-            <a:r>
-              <a:rPr lang="en-US" dirty="0"/>
-              <a:t>Uses the </a:t>
-            </a:r>
-            <a:r>
-              <a:rPr lang="en-US" b="1" dirty="0"/>
-              <a:t>RSLogix5000_V35.xsd </a:t>
-            </a:r>
-            <a:r>
-              <a:rPr lang="en-US" dirty="0"/>
-              <a:t>XML schema for XML structure guidance</a:t>
-            </a:r>
-          </a:p>
-          <a:p>
-            <a:pPr marL="901701" lvl="3" fontAlgn="t">
-              <a:lnSpc>
-                <a:spcPct val="100000"/>
-              </a:lnSpc>
-              <a:buSzPct val="100000"/>
-            </a:pPr>
-            <a:r>
-              <a:rPr lang="en-US" dirty="0"/>
-              <a:t>Identify necessary attributes or </a:t>
-            </a:r>
-            <a:r>
-              <a:rPr lang="en-US" dirty="0" err="1"/>
-              <a:t>subelements</a:t>
-            </a:r>
-            <a:endParaRPr lang="en-US" dirty="0"/>
-          </a:p>
-          <a:p>
-            <a:pPr marL="901701" lvl="3" fontAlgn="t">
-              <a:lnSpc>
-                <a:spcPct val="100000"/>
-              </a:lnSpc>
-              <a:buSzPct val="100000"/>
-            </a:pPr>
-            <a:r>
-              <a:rPr lang="en-US" dirty="0"/>
-              <a:t>Find valid types or parent and child relations</a:t>
-            </a:r>
-          </a:p>
-          <a:p>
-            <a:pPr marL="719138" lvl="2" fontAlgn="t">
-              <a:lnSpc>
-                <a:spcPct val="100000"/>
-              </a:lnSpc>
-              <a:buSzPct val="100000"/>
-            </a:pPr>
-            <a:r>
-              <a:rPr lang="en-US" dirty="0"/>
-              <a:t>Loads template files from a defined library</a:t>
-            </a:r>
-          </a:p>
-          <a:p>
-            <a:pPr marL="719138" lvl="2" fontAlgn="t">
-              <a:lnSpc>
-                <a:spcPct val="100000"/>
-              </a:lnSpc>
-              <a:buSzPct val="100000"/>
-            </a:pPr>
-            <a:r>
-              <a:rPr lang="en-US" dirty="0"/>
-              <a:t>Central </a:t>
-            </a:r>
-            <a:r>
-              <a:rPr lang="en-US" dirty="0" err="1"/>
-              <a:t>XMLHandler</a:t>
-            </a:r>
-            <a:r>
-              <a:rPr lang="en-US" dirty="0"/>
-              <a:t> class abstracts all read/write operations</a:t>
-            </a:r>
-          </a:p>
-        </p:txBody>
-      </p:sp>
-      <p:sp>
-        <p:nvSpPr>
-          <p:cNvPr id="5" name="Footer Placeholder 4">
-            <a:extLst>
-              <a:ext uri="{FF2B5EF4-FFF2-40B4-BE49-F238E27FC236}">
-                <a16:creationId xmlns:a16="http://schemas.microsoft.com/office/drawing/2014/main" id="{155F751A-16E2-0724-4BD0-168517E9733B}"/>
-              </a:ext>
-            </a:extLst>
-          </p:cNvPr>
-          <p:cNvSpPr>
-            <a:spLocks noGrp="1"/>
-          </p:cNvSpPr>
-          <p:nvPr>
-            <p:ph type="ftr" sz="quarter" idx="15"/>
-          </p:nvPr>
-        </p:nvSpPr>
-        <p:spPr>
-          <a:xfrm>
-            <a:off x="4086351" y="6469380"/>
-            <a:ext cx="1130300" cy="180000"/>
-          </a:xfrm>
-        </p:spPr>
-        <p:txBody>
-          <a:bodyPr wrap="none" anchor="ctr">
-            <a:normAutofit/>
-          </a:bodyPr>
-          <a:lstStyle/>
-          <a:p>
-            <a:pPr>
-              <a:lnSpc>
-                <a:spcPct val="90000"/>
-              </a:lnSpc>
-              <a:spcAft>
-                <a:spcPts val="600"/>
-              </a:spcAft>
-            </a:pPr>
-            <a:r>
               <a:rPr lang="en-US"/>
               <a:t>Corbin Ferguson</a:t>
             </a:r>
+            <a:endParaRPr lang="en-US" dirty="0"/>
           </a:p>
         </p:txBody>
       </p:sp>
@@ -24509,73 +25118,55 @@
           <p:cNvPr id="6" name="Slide Number Placeholder 5">
             <a:extLst>
               <a:ext uri="{FF2B5EF4-FFF2-40B4-BE49-F238E27FC236}">
-                <a16:creationId xmlns:a16="http://schemas.microsoft.com/office/drawing/2014/main" id="{F44F0703-936F-3954-8205-F9125E1E2DE6}"/>
-              </a:ext>
-            </a:extLst>
-          </p:cNvPr>
-          <p:cNvSpPr>
-            <a:spLocks noGrp="1"/>
-          </p:cNvSpPr>
-          <p:nvPr>
-            <p:ph type="sldNum" sz="quarter" idx="16"/>
-          </p:nvPr>
-        </p:nvSpPr>
-        <p:spPr>
-          <a:xfrm>
-            <a:off x="1633051" y="6469380"/>
-            <a:ext cx="571500" cy="180000"/>
-          </a:xfrm>
-        </p:spPr>
-        <p:txBody>
-          <a:bodyPr wrap="none" anchor="ctr">
-            <a:normAutofit/>
-          </a:bodyPr>
-          <a:lstStyle/>
-          <a:p>
-            <a:pPr>
-              <a:lnSpc>
-                <a:spcPct val="90000"/>
-              </a:lnSpc>
-              <a:spcAft>
-                <a:spcPts val="600"/>
-              </a:spcAft>
-            </a:pPr>
+                <a16:creationId xmlns:a16="http://schemas.microsoft.com/office/drawing/2014/main" id="{9F8D6A3B-5A0C-0D1B-8B31-E7743D6211CD}"/>
+              </a:ext>
+            </a:extLst>
+          </p:cNvPr>
+          <p:cNvSpPr>
+            <a:spLocks noGrp="1"/>
+          </p:cNvSpPr>
+          <p:nvPr>
+            <p:ph type="sldNum" sz="quarter" idx="12"/>
+          </p:nvPr>
+        </p:nvSpPr>
+        <p:spPr/>
+        <p:txBody>
+          <a:bodyPr/>
+          <a:lstStyle/>
+          <a:p>
             <a:r>
               <a:rPr lang="en-US"/>
               <a:t>Slide </a:t>
             </a:r>
             <a:fld id="{60BF249C-6EE1-465B-9621-0BD76B5184D6}" type="slidenum">
               <a:rPr lang="en-US" smtClean="0"/>
-              <a:pPr>
-                <a:lnSpc>
-                  <a:spcPct val="90000"/>
-                </a:lnSpc>
-                <a:spcAft>
-                  <a:spcPts val="600"/>
-                </a:spcAft>
-              </a:pPr>
+              <a:pPr/>
               <a:t>6</a:t>
             </a:fld>
-            <a:endParaRPr lang="en-US"/>
+            <a:endParaRPr lang="en-US" dirty="0"/>
           </a:p>
         </p:txBody>
       </p:sp>
     </p:spTree>
     <p:extLst>
       <p:ext uri="{BB962C8B-B14F-4D97-AF65-F5344CB8AC3E}">
-        <p14:creationId xmlns:p14="http://schemas.microsoft.com/office/powerpoint/2010/main" val="3366771104"/>
+        <p14:creationId xmlns:p14="http://schemas.microsoft.com/office/powerpoint/2010/main" val="1769686303"/>
       </p:ext>
     </p:extLst>
   </p:cSld>
   <p:clrMapOvr>
     <a:masterClrMapping/>
   </p:clrMapOvr>
-  <mc:AlternateContent xmlns:mc="http://schemas.openxmlformats.org/markup-compatibility/2006" xmlns:p14="http://schemas.microsoft.com/office/powerpoint/2010/main">
-    <mc:Choice Requires="p14">
-      <p:transition p14:dur="0"/>
+  <mc:AlternateContent xmlns:mc="http://schemas.openxmlformats.org/markup-compatibility/2006" xmlns:p159="http://schemas.microsoft.com/office/powerpoint/2015/09/main">
+    <mc:Choice Requires="p159">
+      <p:transition spd="slow">
+        <p159:morph option="byObject"/>
+      </p:transition>
     </mc:Choice>
     <mc:Fallback xmlns="">
-      <p:transition/>
+      <p:transition spd="slow">
+        <p:fade/>
+      </p:transition>
     </mc:Fallback>
   </mc:AlternateContent>
 </p:sld>
@@ -24600,10 +25191,10 @@
       </p:grpSpPr>
       <p:sp>
         <p:nvSpPr>
-          <p:cNvPr id="14" name="Title 1">
-            <a:extLst>
-              <a:ext uri="{FF2B5EF4-FFF2-40B4-BE49-F238E27FC236}">
-                <a16:creationId xmlns:a16="http://schemas.microsoft.com/office/drawing/2014/main" id="{F9CABB68-B9AE-E538-B290-526A0808696E}"/>
+          <p:cNvPr id="3079" name="Title 1">
+            <a:extLst>
+              <a:ext uri="{FF2B5EF4-FFF2-40B4-BE49-F238E27FC236}">
+                <a16:creationId xmlns:a16="http://schemas.microsoft.com/office/drawing/2014/main" id="{DE7D139F-1F92-4BD8-0AD6-6BA8F2883934}"/>
               </a:ext>
             </a:extLst>
           </p:cNvPr>
@@ -24621,24 +25212,22 @@
           </a:xfrm>
         </p:spPr>
         <p:txBody>
-          <a:bodyPr wrap="none" anchor="t">
-            <a:normAutofit/>
-          </a:bodyPr>
-          <a:lstStyle/>
-          <a:p>
-            <a:r>
-              <a:rPr lang="en-US" dirty="0"/>
-              <a:t>Core Class Functionality-Data &amp; Business Logic Layer</a:t>
-            </a:r>
-          </a:p>
-        </p:txBody>
-      </p:sp>
-      <p:sp>
-        <p:nvSpPr>
-          <p:cNvPr id="3" name="Date Placeholder 2">
-            <a:extLst>
-              <a:ext uri="{FF2B5EF4-FFF2-40B4-BE49-F238E27FC236}">
-                <a16:creationId xmlns:a16="http://schemas.microsoft.com/office/drawing/2014/main" id="{EB6FB79B-8ABC-218A-B905-F6EA441DAD73}"/>
+          <a:bodyPr/>
+          <a:lstStyle/>
+          <a:p>
+            <a:r>
+              <a:rPr lang="en-US" dirty="0"/>
+              <a:t>System Architecture</a:t>
+            </a:r>
+          </a:p>
+        </p:txBody>
+      </p:sp>
+      <p:sp>
+        <p:nvSpPr>
+          <p:cNvPr id="4" name="Date Placeholder 3">
+            <a:extLst>
+              <a:ext uri="{FF2B5EF4-FFF2-40B4-BE49-F238E27FC236}">
+                <a16:creationId xmlns:a16="http://schemas.microsoft.com/office/drawing/2014/main" id="{2A9FE8A4-E06E-22A9-D3EB-7A7FCED11DB8}"/>
               </a:ext>
             </a:extLst>
           </p:cNvPr>
@@ -24676,6 +25265,465 @@
           </a:p>
         </p:txBody>
       </p:sp>
+      <p:pic>
+        <p:nvPicPr>
+          <p:cNvPr id="3074" name="Picture 2">
+            <a:extLst>
+              <a:ext uri="{FF2B5EF4-FFF2-40B4-BE49-F238E27FC236}">
+                <a16:creationId xmlns:a16="http://schemas.microsoft.com/office/drawing/2014/main" id="{589C1114-EE17-B236-E59B-833EB4FC6E60}"/>
+              </a:ext>
+            </a:extLst>
+          </p:cNvPr>
+          <p:cNvPicPr>
+            <a:picLocks noChangeAspect="1" noChangeArrowheads="1"/>
+          </p:cNvPicPr>
+          <p:nvPr/>
+        </p:nvPicPr>
+        <p:blipFill>
+          <a:blip r:embed="rId3">
+            <a:extLst>
+              <a:ext uri="{28A0092B-C50C-407E-A947-70E740481C1C}">
+                <a14:useLocalDpi xmlns:a14="http://schemas.microsoft.com/office/drawing/2010/main" val="0"/>
+              </a:ext>
+            </a:extLst>
+          </a:blip>
+          <a:stretch>
+            <a:fillRect/>
+          </a:stretch>
+        </p:blipFill>
+        <p:spPr bwMode="auto">
+          <a:xfrm>
+            <a:off x="1054574" y="1164474"/>
+            <a:ext cx="4176777" cy="4928351"/>
+          </a:xfrm>
+          <a:prstGeom prst="rect">
+            <a:avLst/>
+          </a:prstGeom>
+          <a:solidFill>
+            <a:srgbClr val="FFFFFF"/>
+          </a:solidFill>
+        </p:spPr>
+      </p:pic>
+      <p:sp>
+        <p:nvSpPr>
+          <p:cNvPr id="3081" name="Content Placeholder 4">
+            <a:extLst>
+              <a:ext uri="{FF2B5EF4-FFF2-40B4-BE49-F238E27FC236}">
+                <a16:creationId xmlns:a16="http://schemas.microsoft.com/office/drawing/2014/main" id="{48E97AF7-5AD2-DC2E-0D5D-6756B90C946E}"/>
+              </a:ext>
+            </a:extLst>
+          </p:cNvPr>
+          <p:cNvSpPr>
+            <a:spLocks noGrp="1"/>
+          </p:cNvSpPr>
+          <p:nvPr>
+            <p:ph sz="quarter" idx="14"/>
+          </p:nvPr>
+        </p:nvSpPr>
+        <p:spPr>
+          <a:xfrm>
+            <a:off x="6241037" y="1061156"/>
+            <a:ext cx="5616000" cy="5031669"/>
+          </a:xfrm>
+        </p:spPr>
+        <p:txBody>
+          <a:bodyPr/>
+          <a:lstStyle/>
+          <a:p>
+            <a:r>
+              <a:rPr lang="en-US" dirty="0"/>
+              <a:t>3-Tiered architecture style:</a:t>
+            </a:r>
+          </a:p>
+          <a:p>
+            <a:pPr lvl="1"/>
+            <a:r>
+              <a:rPr lang="en-US" dirty="0"/>
+              <a:t>Presentation Layer: </a:t>
+            </a:r>
+          </a:p>
+          <a:p>
+            <a:pPr marL="719138" lvl="2" fontAlgn="t">
+              <a:lnSpc>
+                <a:spcPct val="100000"/>
+              </a:lnSpc>
+              <a:buSzPct val="100000"/>
+            </a:pPr>
+            <a:r>
+              <a:rPr lang="en-US" dirty="0"/>
+              <a:t>Multi‑form, event‑driven interface</a:t>
+            </a:r>
+          </a:p>
+          <a:p>
+            <a:pPr marL="719138" lvl="2" fontAlgn="t">
+              <a:lnSpc>
+                <a:spcPct val="100000"/>
+              </a:lnSpc>
+              <a:buSzPct val="100000"/>
+            </a:pPr>
+            <a:r>
+              <a:rPr lang="en-US" dirty="0"/>
+              <a:t>Collects user input and returns structured data</a:t>
+            </a:r>
+          </a:p>
+          <a:p>
+            <a:pPr marL="719138" lvl="2" fontAlgn="t">
+              <a:lnSpc>
+                <a:spcPct val="100000"/>
+              </a:lnSpc>
+              <a:buSzPct val="100000"/>
+            </a:pPr>
+            <a:r>
+              <a:rPr lang="en-US" dirty="0"/>
+              <a:t>Dynamically navigates between UI stages based on workflow logic</a:t>
+            </a:r>
+          </a:p>
+          <a:p>
+            <a:pPr marL="542926" lvl="1" fontAlgn="t">
+              <a:lnSpc>
+                <a:spcPct val="100000"/>
+              </a:lnSpc>
+              <a:buSzPct val="100000"/>
+            </a:pPr>
+            <a:r>
+              <a:rPr lang="en-US" dirty="0"/>
+              <a:t>Business Logic Layer:</a:t>
+            </a:r>
+          </a:p>
+          <a:p>
+            <a:pPr marL="719138" lvl="2" fontAlgn="t">
+              <a:lnSpc>
+                <a:spcPct val="100000"/>
+              </a:lnSpc>
+              <a:buSzPct val="100000"/>
+            </a:pPr>
+            <a:r>
+              <a:rPr lang="en-US" dirty="0"/>
+              <a:t>Core processing written in C# using LINQ to XML</a:t>
+            </a:r>
+          </a:p>
+          <a:p>
+            <a:pPr marL="719138" lvl="2" fontAlgn="t">
+              <a:lnSpc>
+                <a:spcPct val="100000"/>
+              </a:lnSpc>
+              <a:buSzPct val="100000"/>
+            </a:pPr>
+            <a:r>
+              <a:rPr lang="en-US" dirty="0"/>
+              <a:t>Imports, Creates, modifies, deletes</a:t>
+            </a:r>
+          </a:p>
+          <a:p>
+            <a:pPr marL="542926" lvl="1" fontAlgn="t">
+              <a:lnSpc>
+                <a:spcPct val="100000"/>
+              </a:lnSpc>
+              <a:buSzPct val="100000"/>
+            </a:pPr>
+            <a:r>
+              <a:rPr lang="en-US" dirty="0"/>
+              <a:t>Data Layer:</a:t>
+            </a:r>
+          </a:p>
+          <a:p>
+            <a:pPr marL="719138" lvl="2" fontAlgn="t">
+              <a:lnSpc>
+                <a:spcPct val="100000"/>
+              </a:lnSpc>
+              <a:buSzPct val="100000"/>
+            </a:pPr>
+            <a:r>
+              <a:rPr lang="en-US" dirty="0"/>
+              <a:t>Uses the </a:t>
+            </a:r>
+            <a:r>
+              <a:rPr lang="en-US" b="1" dirty="0"/>
+              <a:t>RSLogix5000_V35.xsd </a:t>
+            </a:r>
+            <a:r>
+              <a:rPr lang="en-US" dirty="0"/>
+              <a:t>XML schema for XML structure guidance</a:t>
+            </a:r>
+          </a:p>
+          <a:p>
+            <a:pPr marL="901701" lvl="3" fontAlgn="t">
+              <a:lnSpc>
+                <a:spcPct val="100000"/>
+              </a:lnSpc>
+              <a:buSzPct val="100000"/>
+            </a:pPr>
+            <a:r>
+              <a:rPr lang="en-US" dirty="0"/>
+              <a:t>Identify necessary attributes or </a:t>
+            </a:r>
+            <a:r>
+              <a:rPr lang="en-US" dirty="0" err="1"/>
+              <a:t>subelements</a:t>
+            </a:r>
+            <a:endParaRPr lang="en-US" dirty="0"/>
+          </a:p>
+          <a:p>
+            <a:pPr marL="901701" lvl="3" fontAlgn="t">
+              <a:lnSpc>
+                <a:spcPct val="100000"/>
+              </a:lnSpc>
+              <a:buSzPct val="100000"/>
+            </a:pPr>
+            <a:r>
+              <a:rPr lang="en-US" dirty="0"/>
+              <a:t>Find valid types or parent and child relations</a:t>
+            </a:r>
+          </a:p>
+          <a:p>
+            <a:pPr marL="719138" lvl="2" fontAlgn="t">
+              <a:lnSpc>
+                <a:spcPct val="100000"/>
+              </a:lnSpc>
+              <a:buSzPct val="100000"/>
+            </a:pPr>
+            <a:r>
+              <a:rPr lang="en-US" dirty="0"/>
+              <a:t>Loads template files from a defined library</a:t>
+            </a:r>
+          </a:p>
+          <a:p>
+            <a:pPr marL="719138" lvl="2" fontAlgn="t">
+              <a:lnSpc>
+                <a:spcPct val="100000"/>
+              </a:lnSpc>
+              <a:buSzPct val="100000"/>
+            </a:pPr>
+            <a:r>
+              <a:rPr lang="en-US" dirty="0"/>
+              <a:t>Central </a:t>
+            </a:r>
+            <a:r>
+              <a:rPr lang="en-US" dirty="0" err="1"/>
+              <a:t>XMLHandler</a:t>
+            </a:r>
+            <a:r>
+              <a:rPr lang="en-US" dirty="0"/>
+              <a:t> class abstracts all read/write operations</a:t>
+            </a:r>
+          </a:p>
+        </p:txBody>
+      </p:sp>
+      <p:sp>
+        <p:nvSpPr>
+          <p:cNvPr id="5" name="Footer Placeholder 4">
+            <a:extLst>
+              <a:ext uri="{FF2B5EF4-FFF2-40B4-BE49-F238E27FC236}">
+                <a16:creationId xmlns:a16="http://schemas.microsoft.com/office/drawing/2014/main" id="{155F751A-16E2-0724-4BD0-168517E9733B}"/>
+              </a:ext>
+            </a:extLst>
+          </p:cNvPr>
+          <p:cNvSpPr>
+            <a:spLocks noGrp="1"/>
+          </p:cNvSpPr>
+          <p:nvPr>
+            <p:ph type="ftr" sz="quarter" idx="15"/>
+          </p:nvPr>
+        </p:nvSpPr>
+        <p:spPr>
+          <a:xfrm>
+            <a:off x="4086351" y="6469380"/>
+            <a:ext cx="1130300" cy="180000"/>
+          </a:xfrm>
+        </p:spPr>
+        <p:txBody>
+          <a:bodyPr wrap="none" anchor="ctr">
+            <a:normAutofit/>
+          </a:bodyPr>
+          <a:lstStyle/>
+          <a:p>
+            <a:pPr>
+              <a:lnSpc>
+                <a:spcPct val="90000"/>
+              </a:lnSpc>
+              <a:spcAft>
+                <a:spcPts val="600"/>
+              </a:spcAft>
+            </a:pPr>
+            <a:r>
+              <a:rPr lang="en-US"/>
+              <a:t>Corbin Ferguson</a:t>
+            </a:r>
+          </a:p>
+        </p:txBody>
+      </p:sp>
+      <p:sp>
+        <p:nvSpPr>
+          <p:cNvPr id="6" name="Slide Number Placeholder 5">
+            <a:extLst>
+              <a:ext uri="{FF2B5EF4-FFF2-40B4-BE49-F238E27FC236}">
+                <a16:creationId xmlns:a16="http://schemas.microsoft.com/office/drawing/2014/main" id="{F44F0703-936F-3954-8205-F9125E1E2DE6}"/>
+              </a:ext>
+            </a:extLst>
+          </p:cNvPr>
+          <p:cNvSpPr>
+            <a:spLocks noGrp="1"/>
+          </p:cNvSpPr>
+          <p:nvPr>
+            <p:ph type="sldNum" sz="quarter" idx="16"/>
+          </p:nvPr>
+        </p:nvSpPr>
+        <p:spPr>
+          <a:xfrm>
+            <a:off x="1633051" y="6469380"/>
+            <a:ext cx="571500" cy="180000"/>
+          </a:xfrm>
+        </p:spPr>
+        <p:txBody>
+          <a:bodyPr wrap="none" anchor="ctr">
+            <a:normAutofit/>
+          </a:bodyPr>
+          <a:lstStyle/>
+          <a:p>
+            <a:pPr>
+              <a:lnSpc>
+                <a:spcPct val="90000"/>
+              </a:lnSpc>
+              <a:spcAft>
+                <a:spcPts val="600"/>
+              </a:spcAft>
+            </a:pPr>
+            <a:r>
+              <a:rPr lang="en-US"/>
+              <a:t>Slide </a:t>
+            </a:r>
+            <a:fld id="{60BF249C-6EE1-465B-9621-0BD76B5184D6}" type="slidenum">
+              <a:rPr lang="en-US" smtClean="0"/>
+              <a:pPr>
+                <a:lnSpc>
+                  <a:spcPct val="90000"/>
+                </a:lnSpc>
+                <a:spcAft>
+                  <a:spcPts val="600"/>
+                </a:spcAft>
+              </a:pPr>
+              <a:t>7</a:t>
+            </a:fld>
+            <a:endParaRPr lang="en-US"/>
+          </a:p>
+        </p:txBody>
+      </p:sp>
+    </p:spTree>
+    <p:extLst>
+      <p:ext uri="{BB962C8B-B14F-4D97-AF65-F5344CB8AC3E}">
+        <p14:creationId xmlns:p14="http://schemas.microsoft.com/office/powerpoint/2010/main" val="3366771104"/>
+      </p:ext>
+    </p:extLst>
+  </p:cSld>
+  <p:clrMapOvr>
+    <a:masterClrMapping/>
+  </p:clrMapOvr>
+  <mc:AlternateContent xmlns:mc="http://schemas.openxmlformats.org/markup-compatibility/2006" xmlns:p14="http://schemas.microsoft.com/office/powerpoint/2010/main">
+    <mc:Choice Requires="p14">
+      <p:transition p14:dur="0"/>
+    </mc:Choice>
+    <mc:Fallback xmlns="">
+      <p:transition/>
+    </mc:Fallback>
+  </mc:AlternateContent>
+</p:sld>
+</file>
+
+<file path=ppt/slides/slide8.xml><?xml version="1.0" encoding="utf-8"?>
+<p:sld xmlns:a="http://schemas.openxmlformats.org/drawingml/2006/main" xmlns:r="http://schemas.openxmlformats.org/officeDocument/2006/relationships" xmlns:p="http://schemas.openxmlformats.org/presentationml/2006/main">
+  <p:cSld>
+    <p:spTree>
+      <p:nvGrpSpPr>
+        <p:cNvPr id="1" name=""/>
+        <p:cNvGrpSpPr/>
+        <p:nvPr/>
+      </p:nvGrpSpPr>
+      <p:grpSpPr>
+        <a:xfrm>
+          <a:off x="0" y="0"/>
+          <a:ext cx="0" cy="0"/>
+          <a:chOff x="0" y="0"/>
+          <a:chExt cx="0" cy="0"/>
+        </a:xfrm>
+      </p:grpSpPr>
+      <p:sp>
+        <p:nvSpPr>
+          <p:cNvPr id="14" name="Title 1">
+            <a:extLst>
+              <a:ext uri="{FF2B5EF4-FFF2-40B4-BE49-F238E27FC236}">
+                <a16:creationId xmlns:a16="http://schemas.microsoft.com/office/drawing/2014/main" id="{F9CABB68-B9AE-E538-B290-526A0808696E}"/>
+              </a:ext>
+            </a:extLst>
+          </p:cNvPr>
+          <p:cNvSpPr>
+            <a:spLocks noGrp="1"/>
+          </p:cNvSpPr>
+          <p:nvPr>
+            <p:ph type="title"/>
+          </p:nvPr>
+        </p:nvSpPr>
+        <p:spPr>
+          <a:xfrm>
+            <a:off x="334963" y="620690"/>
+            <a:ext cx="11522075" cy="360041"/>
+          </a:xfrm>
+        </p:spPr>
+        <p:txBody>
+          <a:bodyPr wrap="none" anchor="t">
+            <a:normAutofit/>
+          </a:bodyPr>
+          <a:lstStyle/>
+          <a:p>
+            <a:r>
+              <a:rPr lang="en-US" dirty="0"/>
+              <a:t>Core Class Functionality-Data &amp; Business Logic Layer</a:t>
+            </a:r>
+          </a:p>
+        </p:txBody>
+      </p:sp>
+      <p:sp>
+        <p:nvSpPr>
+          <p:cNvPr id="3" name="Date Placeholder 2">
+            <a:extLst>
+              <a:ext uri="{FF2B5EF4-FFF2-40B4-BE49-F238E27FC236}">
+                <a16:creationId xmlns:a16="http://schemas.microsoft.com/office/drawing/2014/main" id="{EB6FB79B-8ABC-218A-B905-F6EA441DAD73}"/>
+              </a:ext>
+            </a:extLst>
+          </p:cNvPr>
+          <p:cNvSpPr>
+            <a:spLocks noGrp="1"/>
+          </p:cNvSpPr>
+          <p:nvPr>
+            <p:ph type="dt" sz="half" idx="10"/>
+          </p:nvPr>
+        </p:nvSpPr>
+        <p:spPr>
+          <a:xfrm>
+            <a:off x="334963" y="194736"/>
+            <a:ext cx="9674225" cy="180000"/>
+          </a:xfrm>
+        </p:spPr>
+        <p:txBody>
+          <a:bodyPr wrap="none" anchor="t">
+            <a:normAutofit/>
+          </a:bodyPr>
+          <a:lstStyle/>
+          <a:p>
+            <a:pPr>
+              <a:lnSpc>
+                <a:spcPct val="90000"/>
+              </a:lnSpc>
+              <a:spcAft>
+                <a:spcPts val="600"/>
+              </a:spcAft>
+            </a:pPr>
+            <a:r>
+              <a:rPr lang="en-US"/>
+              <a:t>L5X Automation Build Tool</a:t>
+            </a:r>
+          </a:p>
+        </p:txBody>
+      </p:sp>
       <p:sp>
         <p:nvSpPr>
           <p:cNvPr id="26" name="Content Placeholder 4">
@@ -24711,7 +25759,7 @@
             <a:pPr lvl="1"/>
             <a:r>
               <a:rPr lang="en-US" sz="1600" dirty="0"/>
-              <a:t>Coordinates major operations</a:t>
+              <a:t>Orchestrates core functional operations</a:t>
             </a:r>
           </a:p>
           <a:p>
@@ -24732,7 +25780,7 @@
             <a:pPr lvl="1"/>
             <a:r>
               <a:rPr lang="en-US" sz="1600" dirty="0"/>
-              <a:t>Contains relevant information for elements currently being modified</a:t>
+              <a:t>Contains element metadata for the currently active operation</a:t>
             </a:r>
           </a:p>
           <a:p>
@@ -24746,13 +25794,8 @@
             <a:pPr lvl="1"/>
             <a:r>
               <a:rPr lang="en-US" sz="1600" dirty="0"/>
-              <a:t>Handles the reading and writing of </a:t>
-            </a:r>
-            <a:r>
-              <a:rPr lang="en-US" sz="1600"/>
-              <a:t>XML objects</a:t>
-            </a:r>
-            <a:endParaRPr lang="en-US" sz="1600" dirty="0"/>
+              <a:t>Handles the reading and writing of XML objects</a:t>
+            </a:r>
           </a:p>
           <a:p>
             <a:r>
@@ -24868,7 +25911,7 @@
                   <a:spcPts val="600"/>
                 </a:spcAft>
               </a:pPr>
-              <a:t>7</a:t>
+              <a:t>8</a:t>
             </a:fld>
             <a:endParaRPr lang="en-US"/>
           </a:p>
@@ -24925,7 +25968,7 @@
 </p:sld>
 </file>
 
-<file path=ppt/slides/slide8.xml><?xml version="1.0" encoding="utf-8"?>
+<file path=ppt/slides/slide9.xml><?xml version="1.0" encoding="utf-8"?>
 <p:sld xmlns:a="http://schemas.openxmlformats.org/drawingml/2006/main" xmlns:r="http://schemas.openxmlformats.org/officeDocument/2006/relationships" xmlns:p="http://schemas.openxmlformats.org/presentationml/2006/main">
   <p:cSld>
     <p:spTree>
@@ -25086,10 +26129,10 @@
               </a:lnSpc>
             </a:pPr>
             <a:r>
-              <a:rPr lang="en-US" sz="1900" err="1"/>
+              <a:rPr lang="en-US" sz="1900" dirty="0" err="1"/>
               <a:t>ActionSelect</a:t>
             </a:r>
-            <a:endParaRPr lang="en-US" sz="1900"/>
+            <a:endParaRPr lang="en-US" sz="1900" dirty="0"/>
           </a:p>
           <a:p>
             <a:pPr lvl="1">
@@ -25098,7 +26141,7 @@
               </a:lnSpc>
             </a:pPr>
             <a:r>
-              <a:rPr lang="en-US" sz="1900"/>
+              <a:rPr lang="en-US" sz="1900" dirty="0"/>
               <a:t>Main menu class, takes button input  events and calls functions in Execute class</a:t>
             </a:r>
           </a:p>
@@ -25109,10 +26152,10 @@
               </a:lnSpc>
             </a:pPr>
             <a:r>
-              <a:rPr lang="en-US" sz="1900" err="1"/>
+              <a:rPr lang="en-US" sz="1900" dirty="0" err="1"/>
               <a:t>DropdownGui</a:t>
             </a:r>
-            <a:endParaRPr lang="en-US" sz="1900"/>
+            <a:endParaRPr lang="en-US" sz="1900" dirty="0"/>
           </a:p>
           <a:p>
             <a:pPr lvl="1">
@@ -25121,7 +26164,7 @@
               </a:lnSpc>
             </a:pPr>
             <a:r>
-              <a:rPr lang="en-US" sz="1900"/>
+              <a:rPr lang="en-US" sz="1900" dirty="0"/>
               <a:t>Single element selector via a dropdown</a:t>
             </a:r>
           </a:p>
@@ -25132,7 +26175,7 @@
               </a:lnSpc>
             </a:pPr>
             <a:r>
-              <a:rPr lang="en-US" sz="1900"/>
+              <a:rPr lang="en-US" sz="1900" dirty="0"/>
               <a:t>Called when user must select between a defined list of options</a:t>
             </a:r>
           </a:p>
@@ -25143,10 +26186,10 @@
               </a:lnSpc>
             </a:pPr>
             <a:r>
-              <a:rPr lang="en-US" sz="1900" err="1"/>
+              <a:rPr lang="en-US" sz="1900" dirty="0" err="1"/>
               <a:t>MultiSelectDropdown</a:t>
             </a:r>
-            <a:endParaRPr lang="en-US" sz="1900"/>
+            <a:endParaRPr lang="en-US" sz="1900" dirty="0"/>
           </a:p>
           <a:p>
             <a:pPr lvl="1">
@@ -25155,7 +26198,7 @@
               </a:lnSpc>
             </a:pPr>
             <a:r>
-              <a:rPr lang="en-US" sz="1900"/>
+              <a:rPr lang="en-US" sz="1900" dirty="0"/>
               <a:t>Multiple element selector via a dropdown</a:t>
             </a:r>
           </a:p>
@@ -25166,7 +26209,7 @@
               </a:lnSpc>
             </a:pPr>
             <a:r>
-              <a:rPr lang="en-US" sz="1900"/>
+              <a:rPr lang="en-US" sz="1900" dirty="0"/>
               <a:t>Called when user must select between a defined list of options</a:t>
             </a:r>
           </a:p>
@@ -25177,10 +26220,10 @@
               </a:lnSpc>
             </a:pPr>
             <a:r>
-              <a:rPr lang="en-US" sz="1900" err="1"/>
+              <a:rPr lang="en-US" sz="1900" dirty="0" err="1"/>
               <a:t>TextInput</a:t>
             </a:r>
-            <a:endParaRPr lang="en-US" sz="1900"/>
+            <a:endParaRPr lang="en-US" sz="1900" dirty="0"/>
           </a:p>
           <a:p>
             <a:pPr lvl="1">
@@ -25189,7 +26232,7 @@
               </a:lnSpc>
             </a:pPr>
             <a:r>
-              <a:rPr lang="en-US" sz="1900"/>
+              <a:rPr lang="en-US" sz="1900" dirty="0"/>
               <a:t>Text input field for user to type in text</a:t>
             </a:r>
           </a:p>
@@ -25200,16 +26243,8 @@
               </a:lnSpc>
             </a:pPr>
             <a:r>
-              <a:rPr lang="en-US" sz="1900"/>
-              <a:t>Can be </a:t>
-            </a:r>
-            <a:r>
-              <a:rPr lang="en-US" sz="1900" err="1"/>
-              <a:t>regex’d</a:t>
-            </a:r>
-            <a:r>
-              <a:rPr lang="en-US" sz="1900"/>
-              <a:t> to validate user input</a:t>
+              <a:rPr lang="en-US" sz="1900" dirty="0"/>
+              <a:t>Utilizes regular expression for input validation</a:t>
             </a:r>
           </a:p>
         </p:txBody>
@@ -25307,7 +26342,7 @@
                   <a:spcPts val="600"/>
                 </a:spcAft>
               </a:pPr>
-              <a:t>8</a:t>
+              <a:t>9</a:t>
             </a:fld>
             <a:endParaRPr lang="en-US"/>
           </a:p>
@@ -25317,511 +26352,6 @@
     <p:extLst>
       <p:ext uri="{BB962C8B-B14F-4D97-AF65-F5344CB8AC3E}">
         <p14:creationId xmlns:p14="http://schemas.microsoft.com/office/powerpoint/2010/main" val="156436412"/>
-      </p:ext>
-    </p:extLst>
-  </p:cSld>
-  <p:clrMapOvr>
-    <a:masterClrMapping/>
-  </p:clrMapOvr>
-  <mc:AlternateContent xmlns:mc="http://schemas.openxmlformats.org/markup-compatibility/2006" xmlns:p14="http://schemas.microsoft.com/office/powerpoint/2010/main">
-    <mc:Choice Requires="p14">
-      <p:transition p14:dur="0"/>
-    </mc:Choice>
-    <mc:Fallback xmlns="">
-      <p:transition/>
-    </mc:Fallback>
-  </mc:AlternateContent>
-</p:sld>
-</file>
-
-<file path=ppt/slides/slide9.xml><?xml version="1.0" encoding="utf-8"?>
-<p:sld xmlns:a="http://schemas.openxmlformats.org/drawingml/2006/main" xmlns:r="http://schemas.openxmlformats.org/officeDocument/2006/relationships" xmlns:p="http://schemas.openxmlformats.org/presentationml/2006/main">
-  <p:cSld>
-    <p:spTree>
-      <p:nvGrpSpPr>
-        <p:cNvPr id="1" name=""/>
-        <p:cNvGrpSpPr/>
-        <p:nvPr/>
-      </p:nvGrpSpPr>
-      <p:grpSpPr>
-        <a:xfrm>
-          <a:off x="0" y="0"/>
-          <a:ext cx="0" cy="0"/>
-          <a:chOff x="0" y="0"/>
-          <a:chExt cx="0" cy="0"/>
-        </a:xfrm>
-      </p:grpSpPr>
-      <p:sp>
-        <p:nvSpPr>
-          <p:cNvPr id="2" name="Title 1">
-            <a:extLst>
-              <a:ext uri="{FF2B5EF4-FFF2-40B4-BE49-F238E27FC236}">
-                <a16:creationId xmlns:a16="http://schemas.microsoft.com/office/drawing/2014/main" id="{AD501F52-637D-977D-471F-6C2D70288A9C}"/>
-              </a:ext>
-            </a:extLst>
-          </p:cNvPr>
-          <p:cNvSpPr>
-            <a:spLocks noGrp="1"/>
-          </p:cNvSpPr>
-          <p:nvPr>
-            <p:ph type="title"/>
-          </p:nvPr>
-        </p:nvSpPr>
-        <p:spPr/>
-        <p:txBody>
-          <a:bodyPr/>
-          <a:lstStyle/>
-          <a:p>
-            <a:r>
-              <a:rPr lang="en-US" dirty="0"/>
-              <a:t>Major Code Refactor</a:t>
-            </a:r>
-          </a:p>
-        </p:txBody>
-      </p:sp>
-      <p:sp>
-        <p:nvSpPr>
-          <p:cNvPr id="3" name="Content Placeholder 2">
-            <a:extLst>
-              <a:ext uri="{FF2B5EF4-FFF2-40B4-BE49-F238E27FC236}">
-                <a16:creationId xmlns:a16="http://schemas.microsoft.com/office/drawing/2014/main" id="{9B663C46-A793-3A1B-8101-817968A30164}"/>
-              </a:ext>
-            </a:extLst>
-          </p:cNvPr>
-          <p:cNvSpPr>
-            <a:spLocks noGrp="1"/>
-          </p:cNvSpPr>
-          <p:nvPr>
-            <p:ph idx="1"/>
-          </p:nvPr>
-        </p:nvSpPr>
-        <p:spPr>
-          <a:xfrm>
-            <a:off x="334961" y="1164474"/>
-            <a:ext cx="10247695" cy="4928351"/>
-          </a:xfrm>
-        </p:spPr>
-        <p:txBody>
-          <a:bodyPr/>
-          <a:lstStyle/>
-          <a:p>
-            <a:r>
-              <a:rPr lang="en-US" dirty="0"/>
-              <a:t>Refactored application to implement interface handling</a:t>
-            </a:r>
-          </a:p>
-          <a:p>
-            <a:r>
-              <a:rPr lang="en-US" dirty="0"/>
-              <a:t>Interfaces were needed for testability and isolating any interaction with external elements</a:t>
-            </a:r>
-          </a:p>
-          <a:p>
-            <a:r>
-              <a:rPr lang="en-US" dirty="0"/>
-              <a:t>Made file structure much smoother with clear rules: only Execute class calls the user interaction interfaces, only </a:t>
-            </a:r>
-            <a:r>
-              <a:rPr lang="en-US" dirty="0" err="1"/>
-              <a:t>XMLHandler</a:t>
-            </a:r>
-            <a:r>
-              <a:rPr lang="en-US" dirty="0"/>
-              <a:t> calls </a:t>
-            </a:r>
-            <a:r>
-              <a:rPr lang="en-US" dirty="0" err="1"/>
-              <a:t>IschemaDisambiguator</a:t>
-            </a:r>
-            <a:endParaRPr lang="en-US" dirty="0"/>
-          </a:p>
-          <a:p>
-            <a:r>
-              <a:rPr lang="en-US" dirty="0"/>
-              <a:t>Added 7 interface classes for any interactions with external elements</a:t>
-            </a:r>
-          </a:p>
-          <a:p>
-            <a:pPr lvl="1"/>
-            <a:r>
-              <a:rPr lang="en-US" dirty="0"/>
-              <a:t>User interactions:</a:t>
-            </a:r>
-          </a:p>
-          <a:p>
-            <a:pPr lvl="2"/>
-            <a:r>
-              <a:rPr lang="en-US" dirty="0" err="1"/>
-              <a:t>IOpenFileService</a:t>
-            </a:r>
-            <a:endParaRPr lang="en-US" dirty="0"/>
-          </a:p>
-          <a:p>
-            <a:pPr lvl="2"/>
-            <a:r>
-              <a:rPr lang="en-US" dirty="0" err="1"/>
-              <a:t>ISaveFileService</a:t>
-            </a:r>
-            <a:endParaRPr lang="en-US" dirty="0"/>
-          </a:p>
-          <a:p>
-            <a:pPr lvl="2"/>
-            <a:r>
-              <a:rPr lang="en-US" dirty="0" err="1"/>
-              <a:t>ImessageService</a:t>
-            </a:r>
-            <a:endParaRPr lang="en-US" dirty="0"/>
-          </a:p>
-          <a:p>
-            <a:pPr lvl="2"/>
-            <a:r>
-              <a:rPr lang="en-US" dirty="0" err="1"/>
-              <a:t>IUserPromptService</a:t>
-            </a:r>
-            <a:endParaRPr lang="en-US" dirty="0"/>
-          </a:p>
-          <a:p>
-            <a:pPr lvl="1"/>
-            <a:r>
-              <a:rPr lang="en-US" dirty="0"/>
-              <a:t>File Interactions</a:t>
-            </a:r>
-          </a:p>
-          <a:p>
-            <a:pPr lvl="2"/>
-            <a:r>
-              <a:rPr lang="en-US" dirty="0" err="1"/>
-              <a:t>IValidationService</a:t>
-            </a:r>
-            <a:endParaRPr lang="en-US" dirty="0"/>
-          </a:p>
-          <a:p>
-            <a:pPr lvl="2"/>
-            <a:r>
-              <a:rPr lang="en-US" dirty="0" err="1"/>
-              <a:t>IFileSystem</a:t>
-            </a:r>
-            <a:endParaRPr lang="en-US" dirty="0"/>
-          </a:p>
-          <a:p>
-            <a:pPr lvl="2"/>
-            <a:r>
-              <a:rPr lang="en-US" dirty="0" err="1"/>
-              <a:t>ISchemaDisambiguator</a:t>
-            </a:r>
-            <a:endParaRPr lang="en-US" dirty="0"/>
-          </a:p>
-          <a:p>
-            <a:endParaRPr lang="en-US" dirty="0"/>
-          </a:p>
-        </p:txBody>
-      </p:sp>
-      <p:sp>
-        <p:nvSpPr>
-          <p:cNvPr id="4" name="Date Placeholder 3">
-            <a:extLst>
-              <a:ext uri="{FF2B5EF4-FFF2-40B4-BE49-F238E27FC236}">
-                <a16:creationId xmlns:a16="http://schemas.microsoft.com/office/drawing/2014/main" id="{A2403822-2E16-3AF0-20DB-E4157D0972E2}"/>
-              </a:ext>
-            </a:extLst>
-          </p:cNvPr>
-          <p:cNvSpPr>
-            <a:spLocks noGrp="1"/>
-          </p:cNvSpPr>
-          <p:nvPr>
-            <p:ph type="dt" sz="half" idx="10"/>
-          </p:nvPr>
-        </p:nvSpPr>
-        <p:spPr/>
-        <p:txBody>
-          <a:bodyPr/>
-          <a:lstStyle/>
-          <a:p>
-            <a:r>
-              <a:rPr lang="en-US"/>
-              <a:t>L5X Automation Build Tool</a:t>
-            </a:r>
-            <a:endParaRPr lang="en-US" dirty="0"/>
-          </a:p>
-        </p:txBody>
-      </p:sp>
-      <p:sp>
-        <p:nvSpPr>
-          <p:cNvPr id="5" name="Footer Placeholder 4">
-            <a:extLst>
-              <a:ext uri="{FF2B5EF4-FFF2-40B4-BE49-F238E27FC236}">
-                <a16:creationId xmlns:a16="http://schemas.microsoft.com/office/drawing/2014/main" id="{A468DAD6-FF96-14DE-7054-036F6DC1A31D}"/>
-              </a:ext>
-            </a:extLst>
-          </p:cNvPr>
-          <p:cNvSpPr>
-            <a:spLocks noGrp="1"/>
-          </p:cNvSpPr>
-          <p:nvPr>
-            <p:ph type="ftr" sz="quarter" idx="11"/>
-          </p:nvPr>
-        </p:nvSpPr>
-        <p:spPr/>
-        <p:txBody>
-          <a:bodyPr/>
-          <a:lstStyle/>
-          <a:p>
-            <a:r>
-              <a:rPr lang="en-US"/>
-              <a:t>Corbin Ferguson</a:t>
-            </a:r>
-            <a:endParaRPr lang="en-US" dirty="0"/>
-          </a:p>
-        </p:txBody>
-      </p:sp>
-      <p:sp>
-        <p:nvSpPr>
-          <p:cNvPr id="6" name="Slide Number Placeholder 5">
-            <a:extLst>
-              <a:ext uri="{FF2B5EF4-FFF2-40B4-BE49-F238E27FC236}">
-                <a16:creationId xmlns:a16="http://schemas.microsoft.com/office/drawing/2014/main" id="{35A12B6A-85EB-3071-D3BE-FF977C73E2E1}"/>
-              </a:ext>
-            </a:extLst>
-          </p:cNvPr>
-          <p:cNvSpPr>
-            <a:spLocks noGrp="1"/>
-          </p:cNvSpPr>
-          <p:nvPr>
-            <p:ph type="sldNum" sz="quarter" idx="12"/>
-          </p:nvPr>
-        </p:nvSpPr>
-        <p:spPr/>
-        <p:txBody>
-          <a:bodyPr/>
-          <a:lstStyle/>
-          <a:p>
-            <a:r>
-              <a:rPr lang="en-US"/>
-              <a:t>Slide </a:t>
-            </a:r>
-            <a:fld id="{60BF249C-6EE1-465B-9621-0BD76B5184D6}" type="slidenum">
-              <a:rPr lang="en-US" smtClean="0"/>
-              <a:pPr/>
-              <a:t>9</a:t>
-            </a:fld>
-            <a:endParaRPr lang="en-US" dirty="0"/>
-          </a:p>
-        </p:txBody>
-      </p:sp>
-      <p:pic>
-        <p:nvPicPr>
-          <p:cNvPr id="10" name="Picture 9">
-            <a:extLst>
-              <a:ext uri="{FF2B5EF4-FFF2-40B4-BE49-F238E27FC236}">
-                <a16:creationId xmlns:a16="http://schemas.microsoft.com/office/drawing/2014/main" id="{9DC1AA47-EAA6-0FC1-349A-4C10C08EACEC}"/>
-              </a:ext>
-            </a:extLst>
-          </p:cNvPr>
-          <p:cNvPicPr>
-            <a:picLocks noChangeAspect="1"/>
-          </p:cNvPicPr>
-          <p:nvPr/>
-        </p:nvPicPr>
-        <p:blipFill>
-          <a:blip r:embed="rId2"/>
-          <a:stretch>
-            <a:fillRect/>
-          </a:stretch>
-        </p:blipFill>
-        <p:spPr>
-          <a:xfrm>
-            <a:off x="10273688" y="3051297"/>
-            <a:ext cx="1552575" cy="1543050"/>
-          </a:xfrm>
-          <a:prstGeom prst="rect">
-            <a:avLst/>
-          </a:prstGeom>
-        </p:spPr>
-      </p:pic>
-      <p:pic>
-        <p:nvPicPr>
-          <p:cNvPr id="12" name="Picture 11">
-            <a:extLst>
-              <a:ext uri="{FF2B5EF4-FFF2-40B4-BE49-F238E27FC236}">
-                <a16:creationId xmlns:a16="http://schemas.microsoft.com/office/drawing/2014/main" id="{E06BB708-2A6F-8850-88FE-C41AEC89FB75}"/>
-              </a:ext>
-            </a:extLst>
-          </p:cNvPr>
-          <p:cNvPicPr>
-            <a:picLocks noChangeAspect="1"/>
-          </p:cNvPicPr>
-          <p:nvPr/>
-        </p:nvPicPr>
-        <p:blipFill>
-          <a:blip r:embed="rId3"/>
-          <a:stretch>
-            <a:fillRect/>
-          </a:stretch>
-        </p:blipFill>
-        <p:spPr>
-          <a:xfrm>
-            <a:off x="5780207" y="3033335"/>
-            <a:ext cx="1552575" cy="1190625"/>
-          </a:xfrm>
-          <a:prstGeom prst="rect">
-            <a:avLst/>
-          </a:prstGeom>
-        </p:spPr>
-      </p:pic>
-      <p:pic>
-        <p:nvPicPr>
-          <p:cNvPr id="18" name="Picture 17">
-            <a:extLst>
-              <a:ext uri="{FF2B5EF4-FFF2-40B4-BE49-F238E27FC236}">
-                <a16:creationId xmlns:a16="http://schemas.microsoft.com/office/drawing/2014/main" id="{E002A1E3-8FC1-01E9-E60A-8E5850E50E0F}"/>
-              </a:ext>
-            </a:extLst>
-          </p:cNvPr>
-          <p:cNvPicPr>
-            <a:picLocks noChangeAspect="1"/>
-          </p:cNvPicPr>
-          <p:nvPr/>
-        </p:nvPicPr>
-        <p:blipFill>
-          <a:blip r:embed="rId4"/>
-          <a:stretch>
-            <a:fillRect/>
-          </a:stretch>
-        </p:blipFill>
-        <p:spPr>
-          <a:xfrm>
-            <a:off x="8747858" y="3051297"/>
-            <a:ext cx="1552575" cy="1543050"/>
-          </a:xfrm>
-          <a:prstGeom prst="rect">
-            <a:avLst/>
-          </a:prstGeom>
-        </p:spPr>
-      </p:pic>
-      <p:pic>
-        <p:nvPicPr>
-          <p:cNvPr id="20" name="Picture 19">
-            <a:extLst>
-              <a:ext uri="{FF2B5EF4-FFF2-40B4-BE49-F238E27FC236}">
-                <a16:creationId xmlns:a16="http://schemas.microsoft.com/office/drawing/2014/main" id="{0181E8D7-18F1-7A3F-D74B-8A2D8979568E}"/>
-              </a:ext>
-            </a:extLst>
-          </p:cNvPr>
-          <p:cNvPicPr>
-            <a:picLocks noChangeAspect="1"/>
-          </p:cNvPicPr>
-          <p:nvPr/>
-        </p:nvPicPr>
-        <p:blipFill>
-          <a:blip r:embed="rId5"/>
-          <a:stretch>
-            <a:fillRect/>
-          </a:stretch>
-        </p:blipFill>
-        <p:spPr>
-          <a:xfrm>
-            <a:off x="6025845" y="4544298"/>
-            <a:ext cx="1552575" cy="1362075"/>
-          </a:xfrm>
-          <a:prstGeom prst="rect">
-            <a:avLst/>
-          </a:prstGeom>
-        </p:spPr>
-      </p:pic>
-      <p:pic>
-        <p:nvPicPr>
-          <p:cNvPr id="22" name="Picture 21">
-            <a:extLst>
-              <a:ext uri="{FF2B5EF4-FFF2-40B4-BE49-F238E27FC236}">
-                <a16:creationId xmlns:a16="http://schemas.microsoft.com/office/drawing/2014/main" id="{F6187785-C299-FF92-CA26-1C2CF6062006}"/>
-              </a:ext>
-            </a:extLst>
-          </p:cNvPr>
-          <p:cNvPicPr>
-            <a:picLocks noChangeAspect="1"/>
-          </p:cNvPicPr>
-          <p:nvPr/>
-        </p:nvPicPr>
-        <p:blipFill>
-          <a:blip r:embed="rId6"/>
-          <a:stretch>
-            <a:fillRect/>
-          </a:stretch>
-        </p:blipFill>
-        <p:spPr>
-          <a:xfrm>
-            <a:off x="7265742" y="3033336"/>
-            <a:ext cx="1552575" cy="1190625"/>
-          </a:xfrm>
-          <a:prstGeom prst="rect">
-            <a:avLst/>
-          </a:prstGeom>
-        </p:spPr>
-      </p:pic>
-      <p:pic>
-        <p:nvPicPr>
-          <p:cNvPr id="24" name="Picture 23">
-            <a:extLst>
-              <a:ext uri="{FF2B5EF4-FFF2-40B4-BE49-F238E27FC236}">
-                <a16:creationId xmlns:a16="http://schemas.microsoft.com/office/drawing/2014/main" id="{0D8B0675-1901-CC41-0471-210D7299F6DD}"/>
-              </a:ext>
-            </a:extLst>
-          </p:cNvPr>
-          <p:cNvPicPr>
-            <a:picLocks noChangeAspect="1"/>
-          </p:cNvPicPr>
-          <p:nvPr/>
-        </p:nvPicPr>
-        <p:blipFill>
-          <a:blip r:embed="rId7"/>
-          <a:stretch>
-            <a:fillRect/>
-          </a:stretch>
-        </p:blipFill>
-        <p:spPr>
-          <a:xfrm>
-            <a:off x="9610763" y="4522810"/>
-            <a:ext cx="2238375" cy="1714500"/>
-          </a:xfrm>
-          <a:prstGeom prst="rect">
-            <a:avLst/>
-          </a:prstGeom>
-        </p:spPr>
-      </p:pic>
-      <p:pic>
-        <p:nvPicPr>
-          <p:cNvPr id="26" name="Picture 25">
-            <a:extLst>
-              <a:ext uri="{FF2B5EF4-FFF2-40B4-BE49-F238E27FC236}">
-                <a16:creationId xmlns:a16="http://schemas.microsoft.com/office/drawing/2014/main" id="{62070A87-CDD3-5AC1-C3F9-58BA5F923CF0}"/>
-              </a:ext>
-            </a:extLst>
-          </p:cNvPr>
-          <p:cNvPicPr>
-            <a:picLocks noChangeAspect="1"/>
-          </p:cNvPicPr>
-          <p:nvPr/>
-        </p:nvPicPr>
-        <p:blipFill>
-          <a:blip r:embed="rId8"/>
-          <a:stretch>
-            <a:fillRect/>
-          </a:stretch>
-        </p:blipFill>
-        <p:spPr>
-          <a:xfrm>
-            <a:off x="7572988" y="4552950"/>
-            <a:ext cx="2009775" cy="1362075"/>
-          </a:xfrm>
-          <a:prstGeom prst="rect">
-            <a:avLst/>
-          </a:prstGeom>
-        </p:spPr>
-      </p:pic>
-    </p:spTree>
-    <p:extLst>
-      <p:ext uri="{BB962C8B-B14F-4D97-AF65-F5344CB8AC3E}">
-        <p14:creationId xmlns:p14="http://schemas.microsoft.com/office/powerpoint/2010/main" val="1111137208"/>
       </p:ext>
     </p:extLst>
   </p:cSld>
